--- a/RefactorToEcIntro.pptx
+++ b/RefactorToEcIntro.pptx
@@ -123,6 +123,11 @@
       </a:defRPr>
     </a:lvl9pPr>
   </p:defaultTextStyle>
+  <p:extLst>
+    <p:ext uri="{EFAFB233-063F-42B5-8137-9DF3F51BA10A}">
+      <p15:sldGuideLst xmlns:p15="http://schemas.microsoft.com/office/powerpoint/2012/main"/>
+    </p:ext>
+  </p:extLst>
 </p:presentation>
 </file>
 
@@ -1366,7 +1371,7 @@
         </p:nvSpPr>
         <p:spPr>
           <a:xfrm>
-            <a:off x="838200" y="1064842"/>
+            <a:off x="838200" y="960120"/>
             <a:ext cx="10515601" cy="1"/>
           </a:xfrm>
           <a:prstGeom prst="line">
@@ -2494,7 +2499,7 @@
         </p:nvSpPr>
         <p:spPr>
           <a:xfrm>
-            <a:off x="838200" y="1064842"/>
+            <a:off x="838200" y="960120"/>
             <a:ext cx="10515601" cy="1"/>
           </a:xfrm>
           <a:prstGeom prst="line">
@@ -3286,9 +3291,7 @@
           <a:prstGeom prst="rect">
             <a:avLst/>
           </a:prstGeom>
-          <a:solidFill>
-            <a:schemeClr val="bg1"/>
-          </a:solidFill>
+          <a:noFill/>
         </p:spPr>
         <p:txBody>
           <a:bodyPr vert="horz" lIns="91440" tIns="45720" rIns="91440" bIns="45720" rtlCol="0" anchor="ctr">
@@ -4134,7 +4137,7 @@
           </a:ln>
           <a:extLst>
             <a:ext uri="{C572A759-6A51-4108-AA02-DFA0A04FC94B}">
-              <ma14:wrappingTextBoxFlag xmlns:ma14="http://schemas.microsoft.com/office/mac/drawingml/2011/main" xmlns="" val="1"/>
+              <ma14:wrappingTextBoxFlag xmlns="" xmlns:ma14="http://schemas.microsoft.com/office/mac/drawingml/2011/main" val="1"/>
             </a:ext>
           </a:extLst>
         </p:spPr>
@@ -4420,7 +4423,7 @@
                 </a:solidFill>
                 <a:latin typeface="Aptos" panose="020B0004020202020204" pitchFamily="34" charset="0"/>
               </a:rPr>
-              <a:t>Donal Raab, Vladimir Zakharov</a:t>
+              <a:t>Donald Raab, Vladimir Zakharov</a:t>
             </a:r>
           </a:p>
           <a:p>
@@ -4561,7 +4564,7 @@
           </a:ln>
           <a:extLst>
             <a:ext uri="{C572A759-6A51-4108-AA02-DFA0A04FC94B}">
-              <ma14:wrappingTextBoxFlag xmlns:ma14="http://schemas.microsoft.com/office/mac/drawingml/2011/main" xmlns="" val="1"/>
+              <ma14:wrappingTextBoxFlag xmlns="" xmlns:ma14="http://schemas.microsoft.com/office/mac/drawingml/2011/main" val="1"/>
             </a:ext>
           </a:extLst>
         </p:spPr>
@@ -11017,7 +11020,7 @@
           </a:ln>
           <a:extLst>
             <a:ext uri="{C572A759-6A51-4108-AA02-DFA0A04FC94B}">
-              <ma14:wrappingTextBoxFlag xmlns:ma14="http://schemas.microsoft.com/office/mac/drawingml/2011/main" xmlns="" val="1"/>
+              <ma14:wrappingTextBoxFlag xmlns="" xmlns:ma14="http://schemas.microsoft.com/office/mac/drawingml/2011/main" val="1"/>
             </a:ext>
           </a:extLst>
         </p:spPr>
@@ -11521,8 +11524,8 @@
         </p:blipFill>
         <p:spPr>
           <a:xfrm>
-            <a:off x="8718083" y="2471735"/>
-            <a:ext cx="2990884" cy="3848565"/>
+            <a:off x="9018322" y="2879331"/>
+            <a:ext cx="2416894" cy="3109975"/>
           </a:xfrm>
           <a:prstGeom prst="rect">
             <a:avLst/>
@@ -11567,7 +11570,7 @@
         </p:blipFill>
         <p:spPr>
           <a:xfrm>
-            <a:off x="704688" y="3103681"/>
+            <a:off x="783272" y="3057735"/>
             <a:ext cx="2224384" cy="2753166"/>
           </a:xfrm>
           <a:prstGeom prst="rect">
@@ -11613,7 +11616,7 @@
         </p:blipFill>
         <p:spPr>
           <a:xfrm>
-            <a:off x="3204512" y="3001707"/>
+            <a:off x="3356981" y="3001708"/>
             <a:ext cx="2321742" cy="2865221"/>
           </a:xfrm>
           <a:prstGeom prst="rect">
@@ -11659,7 +11662,7 @@
         </p:blipFill>
         <p:spPr>
           <a:xfrm>
-            <a:off x="5801694" y="2746444"/>
+            <a:off x="6028048" y="2746444"/>
             <a:ext cx="2640950" cy="3375748"/>
           </a:xfrm>
           <a:prstGeom prst="rect">
@@ -12633,7 +12636,7 @@
           </a:ln>
           <a:extLst>
             <a:ext uri="{C572A759-6A51-4108-AA02-DFA0A04FC94B}">
-              <ma14:wrappingTextBoxFlag xmlns:ma14="http://schemas.microsoft.com/office/mac/drawingml/2011/main" xmlns="" val="1"/>
+              <ma14:wrappingTextBoxFlag xmlns="" xmlns:ma14="http://schemas.microsoft.com/office/mac/drawingml/2011/main" val="1"/>
             </a:ext>
           </a:extLst>
         </p:spPr>
@@ -13027,7 +13030,7 @@
             <a:effectLst/>
             <a:extLst>
               <a:ext uri="{C572A759-6A51-4108-AA02-DFA0A04FC94B}">
-                <ma14:wrappingTextBoxFlag xmlns:ma14="http://schemas.microsoft.com/office/mac/drawingml/2011/main" xmlns="" val="1"/>
+                <ma14:wrappingTextBoxFlag xmlns="" xmlns:ma14="http://schemas.microsoft.com/office/mac/drawingml/2011/main" val="1"/>
               </a:ext>
             </a:extLst>
           </p:spPr>
@@ -13130,7 +13133,7 @@
             <a:effectLst/>
             <a:extLst>
               <a:ext uri="{C572A759-6A51-4108-AA02-DFA0A04FC94B}">
-                <ma14:wrappingTextBoxFlag xmlns:ma14="http://schemas.microsoft.com/office/mac/drawingml/2011/main" xmlns="" val="1"/>
+                <ma14:wrappingTextBoxFlag xmlns="" xmlns:ma14="http://schemas.microsoft.com/office/mac/drawingml/2011/main" val="1"/>
               </a:ext>
             </a:extLst>
           </p:spPr>
@@ -13234,7 +13237,7 @@
             <a:effectLst/>
             <a:extLst>
               <a:ext uri="{C572A759-6A51-4108-AA02-DFA0A04FC94B}">
-                <ma14:wrappingTextBoxFlag xmlns:ma14="http://schemas.microsoft.com/office/mac/drawingml/2011/main" xmlns="" val="1"/>
+                <ma14:wrappingTextBoxFlag xmlns="" xmlns:ma14="http://schemas.microsoft.com/office/mac/drawingml/2011/main" val="1"/>
               </a:ext>
             </a:extLst>
           </p:spPr>
@@ -13337,7 +13340,7 @@
             <a:effectLst/>
             <a:extLst>
               <a:ext uri="{C572A759-6A51-4108-AA02-DFA0A04FC94B}">
-                <ma14:wrappingTextBoxFlag xmlns:ma14="http://schemas.microsoft.com/office/mac/drawingml/2011/main" xmlns="" val="1"/>
+                <ma14:wrappingTextBoxFlag xmlns="" xmlns:ma14="http://schemas.microsoft.com/office/mac/drawingml/2011/main" val="1"/>
               </a:ext>
             </a:extLst>
           </p:spPr>
@@ -13440,7 +13443,7 @@
             <a:effectLst/>
             <a:extLst>
               <a:ext uri="{C572A759-6A51-4108-AA02-DFA0A04FC94B}">
-                <ma14:wrappingTextBoxFlag xmlns:ma14="http://schemas.microsoft.com/office/mac/drawingml/2011/main" xmlns="" val="1"/>
+                <ma14:wrappingTextBoxFlag xmlns="" xmlns:ma14="http://schemas.microsoft.com/office/mac/drawingml/2011/main" val="1"/>
               </a:ext>
             </a:extLst>
           </p:spPr>
@@ -13548,7 +13551,7 @@
             <a:effectLst/>
             <a:extLst>
               <a:ext uri="{C572A759-6A51-4108-AA02-DFA0A04FC94B}">
-                <ma14:wrappingTextBoxFlag xmlns:ma14="http://schemas.microsoft.com/office/mac/drawingml/2011/main" xmlns="" val="1"/>
+                <ma14:wrappingTextBoxFlag xmlns="" xmlns:ma14="http://schemas.microsoft.com/office/mac/drawingml/2011/main" val="1"/>
               </a:ext>
             </a:extLst>
           </p:spPr>
@@ -13651,7 +13654,7 @@
             <a:effectLst/>
             <a:extLst>
               <a:ext uri="{C572A759-6A51-4108-AA02-DFA0A04FC94B}">
-                <ma14:wrappingTextBoxFlag xmlns:ma14="http://schemas.microsoft.com/office/mac/drawingml/2011/main" xmlns="" val="1"/>
+                <ma14:wrappingTextBoxFlag xmlns="" xmlns:ma14="http://schemas.microsoft.com/office/mac/drawingml/2011/main" val="1"/>
               </a:ext>
             </a:extLst>
           </p:spPr>
@@ -13754,7 +13757,7 @@
             <a:effectLst/>
             <a:extLst>
               <a:ext uri="{C572A759-6A51-4108-AA02-DFA0A04FC94B}">
-                <ma14:wrappingTextBoxFlag xmlns:ma14="http://schemas.microsoft.com/office/mac/drawingml/2011/main" xmlns="" val="1"/>
+                <ma14:wrappingTextBoxFlag xmlns="" xmlns:ma14="http://schemas.microsoft.com/office/mac/drawingml/2011/main" val="1"/>
               </a:ext>
             </a:extLst>
           </p:spPr>
@@ -13868,7 +13871,7 @@
             <a:effectLst/>
             <a:extLst>
               <a:ext uri="{C572A759-6A51-4108-AA02-DFA0A04FC94B}">
-                <ma14:wrappingTextBoxFlag xmlns:ma14="http://schemas.microsoft.com/office/mac/drawingml/2011/main" xmlns="" val="1"/>
+                <ma14:wrappingTextBoxFlag xmlns="" xmlns:ma14="http://schemas.microsoft.com/office/mac/drawingml/2011/main" val="1"/>
               </a:ext>
             </a:extLst>
           </p:spPr>
@@ -14081,7 +14084,7 @@
               <a:effectLst/>
               <a:extLst>
                 <a:ext uri="{C572A759-6A51-4108-AA02-DFA0A04FC94B}">
-                  <ma14:wrappingTextBoxFlag xmlns:ma14="http://schemas.microsoft.com/office/mac/drawingml/2011/main" xmlns="" val="1"/>
+                  <ma14:wrappingTextBoxFlag xmlns="" xmlns:ma14="http://schemas.microsoft.com/office/mac/drawingml/2011/main" val="1"/>
                 </a:ext>
               </a:extLst>
             </p:spPr>
@@ -14185,7 +14188,7 @@
             <a:effectLst/>
             <a:extLst>
               <a:ext uri="{C572A759-6A51-4108-AA02-DFA0A04FC94B}">
-                <ma14:wrappingTextBoxFlag xmlns:ma14="http://schemas.microsoft.com/office/mac/drawingml/2011/main" xmlns="" val="1"/>
+                <ma14:wrappingTextBoxFlag xmlns="" xmlns:ma14="http://schemas.microsoft.com/office/mac/drawingml/2011/main" val="1"/>
               </a:ext>
             </a:extLst>
           </p:spPr>
@@ -14288,7 +14291,7 @@
             <a:effectLst/>
             <a:extLst>
               <a:ext uri="{C572A759-6A51-4108-AA02-DFA0A04FC94B}">
-                <ma14:wrappingTextBoxFlag xmlns:ma14="http://schemas.microsoft.com/office/mac/drawingml/2011/main" xmlns="" val="1"/>
+                <ma14:wrappingTextBoxFlag xmlns="" xmlns:ma14="http://schemas.microsoft.com/office/mac/drawingml/2011/main" val="1"/>
               </a:ext>
             </a:extLst>
           </p:spPr>
@@ -14445,7 +14448,7 @@
               <a:effectLst/>
               <a:extLst>
                 <a:ext uri="{C572A759-6A51-4108-AA02-DFA0A04FC94B}">
-                  <ma14:wrappingTextBoxFlag xmlns:ma14="http://schemas.microsoft.com/office/mac/drawingml/2011/main" xmlns="" val="1"/>
+                  <ma14:wrappingTextBoxFlag xmlns="" xmlns:ma14="http://schemas.microsoft.com/office/mac/drawingml/2011/main" val="1"/>
                 </a:ext>
               </a:extLst>
             </p:spPr>
@@ -14603,7 +14606,7 @@
               <a:effectLst/>
               <a:extLst>
                 <a:ext uri="{C572A759-6A51-4108-AA02-DFA0A04FC94B}">
-                  <ma14:wrappingTextBoxFlag xmlns:ma14="http://schemas.microsoft.com/office/mac/drawingml/2011/main" xmlns="" val="1"/>
+                  <ma14:wrappingTextBoxFlag xmlns="" xmlns:ma14="http://schemas.microsoft.com/office/mac/drawingml/2011/main" val="1"/>
                 </a:ext>
               </a:extLst>
             </p:spPr>
@@ -14622,8 +14625,10 @@
               </a:lstStyle>
               <a:p>
                 <a:r>
+                  <a:rPr dirty="0" err="1"/>
                   <a:t>TestUtils</a:t>
                 </a:r>
+                <a:endParaRPr dirty="0"/>
               </a:p>
             </p:txBody>
           </p:sp>
@@ -14978,7 +14983,7 @@
               <a:effectLst/>
               <a:extLst>
                 <a:ext uri="{C572A759-6A51-4108-AA02-DFA0A04FC94B}">
-                  <ma14:wrappingTextBoxFlag xmlns:ma14="http://schemas.microsoft.com/office/mac/drawingml/2011/main" xmlns="" val="1"/>
+                  <ma14:wrappingTextBoxFlag xmlns="" xmlns:ma14="http://schemas.microsoft.com/office/mac/drawingml/2011/main" val="1"/>
                 </a:ext>
               </a:extLst>
             </p:spPr>
@@ -15139,7 +15144,7 @@
               <a:effectLst/>
               <a:extLst>
                 <a:ext uri="{C572A759-6A51-4108-AA02-DFA0A04FC94B}">
-                  <ma14:wrappingTextBoxFlag xmlns:ma14="http://schemas.microsoft.com/office/mac/drawingml/2011/main" xmlns="" val="1"/>
+                  <ma14:wrappingTextBoxFlag xmlns="" xmlns:ma14="http://schemas.microsoft.com/office/mac/drawingml/2011/main" val="1"/>
                 </a:ext>
               </a:extLst>
             </p:spPr>
@@ -15536,7 +15541,7 @@
               <a:effectLst/>
               <a:extLst>
                 <a:ext uri="{C572A759-6A51-4108-AA02-DFA0A04FC94B}">
-                  <ma14:wrappingTextBoxFlag xmlns:ma14="http://schemas.microsoft.com/office/mac/drawingml/2011/main" xmlns="" val="1"/>
+                  <ma14:wrappingTextBoxFlag xmlns="" xmlns:ma14="http://schemas.microsoft.com/office/mac/drawingml/2011/main" val="1"/>
                 </a:ext>
               </a:extLst>
             </p:spPr>
@@ -15638,7 +15643,7 @@
           </a:ln>
           <a:extLst>
             <a:ext uri="{C572A759-6A51-4108-AA02-DFA0A04FC94B}">
-              <ma14:wrappingTextBoxFlag xmlns:ma14="http://schemas.microsoft.com/office/mac/drawingml/2011/main" xmlns="" val="1"/>
+              <ma14:wrappingTextBoxFlag xmlns="" xmlns:ma14="http://schemas.microsoft.com/office/mac/drawingml/2011/main" val="1"/>
             </a:ext>
           </a:extLst>
         </p:spPr>
@@ -16093,7 +16098,7 @@
               <a:effectLst/>
               <a:extLst>
                 <a:ext uri="{C572A759-6A51-4108-AA02-DFA0A04FC94B}">
-                  <ma14:wrappingTextBoxFlag xmlns:ma14="http://schemas.microsoft.com/office/mac/drawingml/2011/main" xmlns="" val="1"/>
+                  <ma14:wrappingTextBoxFlag xmlns="" xmlns:ma14="http://schemas.microsoft.com/office/mac/drawingml/2011/main" val="1"/>
                 </a:ext>
               </a:extLst>
             </p:spPr>
@@ -16261,7 +16266,7 @@
               <a:effectLst/>
               <a:extLst>
                 <a:ext uri="{C572A759-6A51-4108-AA02-DFA0A04FC94B}">
-                  <ma14:wrappingTextBoxFlag xmlns:ma14="http://schemas.microsoft.com/office/mac/drawingml/2011/main" xmlns="" val="1"/>
+                  <ma14:wrappingTextBoxFlag xmlns="" xmlns:ma14="http://schemas.microsoft.com/office/mac/drawingml/2011/main" val="1"/>
                 </a:ext>
               </a:extLst>
             </p:spPr>
@@ -16881,7 +16886,7 @@
               <a:effectLst/>
               <a:extLst>
                 <a:ext uri="{C572A759-6A51-4108-AA02-DFA0A04FC94B}">
-                  <ma14:wrappingTextBoxFlag xmlns:ma14="http://schemas.microsoft.com/office/mac/drawingml/2011/main" xmlns="" val="1"/>
+                  <ma14:wrappingTextBoxFlag xmlns="" xmlns:ma14="http://schemas.microsoft.com/office/mac/drawingml/2011/main" val="1"/>
                 </a:ext>
               </a:extLst>
             </p:spPr>
@@ -16934,7 +16939,7 @@
           </a:ln>
           <a:extLst>
             <a:ext uri="{C572A759-6A51-4108-AA02-DFA0A04FC94B}">
-              <ma14:wrappingTextBoxFlag xmlns:ma14="http://schemas.microsoft.com/office/mac/drawingml/2011/main" xmlns="" val="1"/>
+              <ma14:wrappingTextBoxFlag xmlns="" xmlns:ma14="http://schemas.microsoft.com/office/mac/drawingml/2011/main" val="1"/>
             </a:ext>
           </a:extLst>
         </p:spPr>
@@ -17223,7 +17228,7 @@
           </a:ln>
           <a:extLst>
             <a:ext uri="{C572A759-6A51-4108-AA02-DFA0A04FC94B}">
-              <ma14:wrappingTextBoxFlag xmlns:ma14="http://schemas.microsoft.com/office/mac/drawingml/2011/main" xmlns="" val="1"/>
+              <ma14:wrappingTextBoxFlag xmlns="" xmlns:ma14="http://schemas.microsoft.com/office/mac/drawingml/2011/main" val="1"/>
             </a:ext>
           </a:extLst>
         </p:spPr>
@@ -17543,7 +17548,13 @@
         <p:nvGraphicFramePr>
           <p:cNvPr id="238" name="Table 3"/>
           <p:cNvGraphicFramePr/>
-          <p:nvPr/>
+          <p:nvPr>
+            <p:extLst>
+              <p:ext uri="{D42A27DB-BD31-4B8C-83A1-F6EECF244321}">
+                <p14:modId xmlns:p14="http://schemas.microsoft.com/office/powerpoint/2010/main" val="1522430867"/>
+              </p:ext>
+            </p:extLst>
+          </p:nvPr>
         </p:nvGraphicFramePr>
         <p:xfrm>
           <a:off x="1052945" y="1294627"/>
@@ -17614,15 +17625,33 @@
                   </a:txBody>
                   <a:tcPr marL="45720" marR="45720" anchor="b" horzOverflow="overflow">
                     <a:lnL w="38100">
+                      <a:noFill/>
+                    </a:lnL>
+                    <a:lnR w="12700" cmpd="sng">
+                      <a:noFill/>
+                      <a:prstDash val="solid"/>
+                    </a:lnR>
+                    <a:lnT w="12700" cmpd="sng">
+                      <a:noFill/>
+                      <a:prstDash val="solid"/>
+                    </a:lnT>
+                    <a:lnB w="12700" cap="flat" cmpd="sng" algn="ctr">
                       <a:solidFill>
-                        <a:srgbClr val="FFFFFF"/>
+                        <a:schemeClr val="tx1"/>
                       </a:solidFill>
-                    </a:lnL>
-                    <a:lnB w="12700">
-                      <a:solidFill>
-                        <a:srgbClr val="000000"/>
-                      </a:solidFill>
+                      <a:prstDash val="solid"/>
+                      <a:round/>
+                      <a:headEnd type="none" w="med" len="med"/>
+                      <a:tailEnd type="none" w="med" len="med"/>
                     </a:lnB>
+                    <a:lnTlToBr w="12700" cmpd="sng">
+                      <a:noFill/>
+                      <a:prstDash val="solid"/>
+                    </a:lnTlToBr>
+                    <a:lnBlToTr w="12700" cmpd="sng">
+                      <a:noFill/>
+                      <a:prstDash val="solid"/>
+                    </a:lnBlToTr>
                   </a:tcPr>
                 </a:tc>
                 <a:tc>
@@ -17640,11 +17669,35 @@
                     </a:p>
                   </a:txBody>
                   <a:tcPr marL="45720" marR="45720" anchor="b" horzOverflow="overflow">
-                    <a:lnB w="12700">
+                    <a:lnL w="12700" cmpd="sng">
+                      <a:noFill/>
+                      <a:prstDash val="solid"/>
+                    </a:lnL>
+                    <a:lnR w="12700" cmpd="sng">
+                      <a:noFill/>
+                      <a:prstDash val="solid"/>
+                    </a:lnR>
+                    <a:lnT w="12700" cmpd="sng">
+                      <a:noFill/>
+                      <a:prstDash val="solid"/>
+                    </a:lnT>
+                    <a:lnB w="12700" cap="flat" cmpd="sng" algn="ctr">
                       <a:solidFill>
-                        <a:srgbClr val="000000"/>
+                        <a:schemeClr val="tx1"/>
                       </a:solidFill>
+                      <a:prstDash val="solid"/>
+                      <a:round/>
+                      <a:headEnd type="none" w="med" len="med"/>
+                      <a:tailEnd type="none" w="med" len="med"/>
                     </a:lnB>
+                    <a:lnTlToBr w="12700" cmpd="sng">
+                      <a:noFill/>
+                      <a:prstDash val="solid"/>
+                    </a:lnTlToBr>
+                    <a:lnBlToTr w="12700" cmpd="sng">
+                      <a:noFill/>
+                      <a:prstDash val="solid"/>
+                    </a:lnBlToTr>
                   </a:tcPr>
                 </a:tc>
                 <a:tc>
@@ -17662,11 +17715,35 @@
                     </a:p>
                   </a:txBody>
                   <a:tcPr marL="45720" marR="45720" anchor="b" horzOverflow="overflow">
-                    <a:lnB w="12700">
+                    <a:lnL w="12700" cmpd="sng">
+                      <a:noFill/>
+                      <a:prstDash val="solid"/>
+                    </a:lnL>
+                    <a:lnR w="12700" cmpd="sng">
+                      <a:noFill/>
+                      <a:prstDash val="solid"/>
+                    </a:lnR>
+                    <a:lnT w="12700" cmpd="sng">
+                      <a:noFill/>
+                      <a:prstDash val="solid"/>
+                    </a:lnT>
+                    <a:lnB w="12700" cap="flat" cmpd="sng" algn="ctr">
                       <a:solidFill>
-                        <a:srgbClr val="000000"/>
+                        <a:schemeClr val="tx1"/>
                       </a:solidFill>
+                      <a:prstDash val="solid"/>
+                      <a:round/>
+                      <a:headEnd type="none" w="med" len="med"/>
+                      <a:tailEnd type="none" w="med" len="med"/>
                     </a:lnB>
+                    <a:lnTlToBr w="12700" cmpd="sng">
+                      <a:noFill/>
+                      <a:prstDash val="solid"/>
+                    </a:lnTlToBr>
+                    <a:lnBlToTr w="12700" cmpd="sng">
+                      <a:noFill/>
+                      <a:prstDash val="solid"/>
+                    </a:lnBlToTr>
                   </a:tcPr>
                 </a:tc>
                 <a:tc>
@@ -17684,11 +17761,35 @@
                     </a:p>
                   </a:txBody>
                   <a:tcPr marL="45720" marR="45720" anchor="b" horzOverflow="overflow">
-                    <a:lnB w="12700">
+                    <a:lnL w="12700" cmpd="sng">
+                      <a:noFill/>
+                      <a:prstDash val="solid"/>
+                    </a:lnL>
+                    <a:lnR w="12700" cmpd="sng">
+                      <a:noFill/>
+                      <a:prstDash val="solid"/>
+                    </a:lnR>
+                    <a:lnT w="12700" cmpd="sng">
+                      <a:noFill/>
+                      <a:prstDash val="solid"/>
+                    </a:lnT>
+                    <a:lnB w="12700" cap="flat" cmpd="sng" algn="ctr">
                       <a:solidFill>
-                        <a:srgbClr val="000000"/>
+                        <a:schemeClr val="tx1"/>
                       </a:solidFill>
+                      <a:prstDash val="solid"/>
+                      <a:round/>
+                      <a:headEnd type="none" w="med" len="med"/>
+                      <a:tailEnd type="none" w="med" len="med"/>
                     </a:lnB>
+                    <a:lnTlToBr w="12700" cmpd="sng">
+                      <a:noFill/>
+                      <a:prstDash val="solid"/>
+                    </a:lnTlToBr>
+                    <a:lnBlToTr w="12700" cmpd="sng">
+                      <a:noFill/>
+                      <a:prstDash val="solid"/>
+                    </a:lnBlToTr>
                   </a:tcPr>
                 </a:tc>
                 <a:tc>
@@ -17706,11 +17807,35 @@
                     </a:p>
                   </a:txBody>
                   <a:tcPr marL="45720" marR="45720" anchor="b" horzOverflow="overflow">
-                    <a:lnB w="12700">
+                    <a:lnL w="12700" cmpd="sng">
+                      <a:noFill/>
+                      <a:prstDash val="solid"/>
+                    </a:lnL>
+                    <a:lnR w="12700" cmpd="sng">
+                      <a:noFill/>
+                      <a:prstDash val="solid"/>
+                    </a:lnR>
+                    <a:lnT w="12700" cmpd="sng">
+                      <a:noFill/>
+                      <a:prstDash val="solid"/>
+                    </a:lnT>
+                    <a:lnB w="12700" cap="flat" cmpd="sng" algn="ctr">
                       <a:solidFill>
-                        <a:srgbClr val="000000"/>
+                        <a:schemeClr val="tx1"/>
                       </a:solidFill>
+                      <a:prstDash val="solid"/>
+                      <a:round/>
+                      <a:headEnd type="none" w="med" len="med"/>
+                      <a:tailEnd type="none" w="med" len="med"/>
                     </a:lnB>
+                    <a:lnTlToBr w="12700" cmpd="sng">
+                      <a:noFill/>
+                      <a:prstDash val="solid"/>
+                    </a:lnTlToBr>
+                    <a:lnBlToTr w="12700" cmpd="sng">
+                      <a:noFill/>
+                      <a:prstDash val="solid"/>
+                    </a:lnBlToTr>
                   </a:tcPr>
                 </a:tc>
                 <a:tc>
@@ -17722,17 +17847,41 @@
                         <a:defRPr sz="1800"/>
                       </a:pPr>
                       <a:r>
-                        <a:rPr b="1"/>
+                        <a:rPr b="1" dirty="0"/>
                         <a:t>Lazy</a:t>
                       </a:r>
                     </a:p>
                   </a:txBody>
                   <a:tcPr marL="45720" marR="45720" anchor="b" horzOverflow="overflow">
-                    <a:lnB w="12700">
+                    <a:lnL w="12700" cmpd="sng">
+                      <a:noFill/>
+                      <a:prstDash val="solid"/>
+                    </a:lnL>
+                    <a:lnR w="12700" cmpd="sng">
+                      <a:noFill/>
+                      <a:prstDash val="solid"/>
+                    </a:lnR>
+                    <a:lnT w="12700" cmpd="sng">
+                      <a:noFill/>
+                      <a:prstDash val="solid"/>
+                    </a:lnT>
+                    <a:lnB w="12700" cap="flat" cmpd="sng" algn="ctr">
                       <a:solidFill>
-                        <a:srgbClr val="000000"/>
+                        <a:schemeClr val="tx1"/>
                       </a:solidFill>
+                      <a:prstDash val="solid"/>
+                      <a:round/>
+                      <a:headEnd type="none" w="med" len="med"/>
+                      <a:tailEnd type="none" w="med" len="med"/>
                     </a:lnB>
+                    <a:lnTlToBr w="12700" cmpd="sng">
+                      <a:noFill/>
+                      <a:prstDash val="solid"/>
+                    </a:lnTlToBr>
+                    <a:lnBlToTr w="12700" cmpd="sng">
+                      <a:noFill/>
+                      <a:prstDash val="solid"/>
+                    </a:lnBlToTr>
                   </a:tcPr>
                 </a:tc>
                 <a:extLst>
@@ -17857,15 +18006,33 @@
                   </a:txBody>
                   <a:tcPr marL="45720" marR="45720" horzOverflow="overflow">
                     <a:lnL w="38100">
+                      <a:noFill/>
+                    </a:lnL>
+                    <a:lnR w="12700" cmpd="sng">
+                      <a:noFill/>
+                      <a:prstDash val="solid"/>
+                    </a:lnR>
+                    <a:lnT w="12700" cap="flat" cmpd="sng" algn="ctr">
                       <a:solidFill>
-                        <a:srgbClr val="FFFFFF"/>
+                        <a:schemeClr val="tx1"/>
                       </a:solidFill>
-                    </a:lnL>
-                    <a:lnT w="12700">
-                      <a:solidFill>
-                        <a:srgbClr val="000000"/>
-                      </a:solidFill>
+                      <a:prstDash val="solid"/>
+                      <a:round/>
+                      <a:headEnd type="none" w="med" len="med"/>
+                      <a:tailEnd type="none" w="med" len="med"/>
                     </a:lnT>
+                    <a:lnB w="12700" cmpd="sng">
+                      <a:noFill/>
+                      <a:prstDash val="solid"/>
+                    </a:lnB>
+                    <a:lnTlToBr w="12700" cmpd="sng">
+                      <a:noFill/>
+                      <a:prstDash val="solid"/>
+                    </a:lnTlToBr>
+                    <a:lnBlToTr w="12700" cmpd="sng">
+                      <a:noFill/>
+                      <a:prstDash val="solid"/>
+                    </a:lnBlToTr>
                   </a:tcPr>
                 </a:tc>
                 <a:tc>
@@ -17882,6 +18049,7 @@
                         </a:defRPr>
                       </a:pPr>
                       <a:r>
+                        <a:rPr dirty="0"/>
                         <a:t>Bags</a:t>
                       </a:r>
                     </a:p>
@@ -17895,8 +18063,10 @@
                         </a:defRPr>
                       </a:pPr>
                       <a:r>
+                        <a:rPr dirty="0" err="1"/>
                         <a:t>BiMaps</a:t>
                       </a:r>
+                      <a:endParaRPr dirty="0"/>
                     </a:p>
                     <a:p>
                       <a:pPr algn="l">
@@ -17908,6 +18078,7 @@
                         </a:defRPr>
                       </a:pPr>
                       <a:r>
+                        <a:rPr dirty="0"/>
                         <a:t>Lists</a:t>
                       </a:r>
                     </a:p>
@@ -17921,6 +18092,7 @@
                         </a:defRPr>
                       </a:pPr>
                       <a:r>
+                        <a:rPr dirty="0"/>
                         <a:t>Maps</a:t>
                       </a:r>
                     </a:p>
@@ -17934,6 +18106,7 @@
                         </a:defRPr>
                       </a:pPr>
                       <a:r>
+                        <a:rPr dirty="0"/>
                         <a:t>Multimaps</a:t>
                       </a:r>
                     </a:p>
@@ -17947,6 +18120,7 @@
                         </a:defRPr>
                       </a:pPr>
                       <a:r>
+                        <a:rPr dirty="0"/>
                         <a:t>Sets</a:t>
                       </a:r>
                     </a:p>
@@ -17960,8 +18134,10 @@
                         </a:defRPr>
                       </a:pPr>
                       <a:r>
+                        <a:rPr dirty="0" err="1"/>
                         <a:t>SortedBags</a:t>
                       </a:r>
+                      <a:endParaRPr dirty="0"/>
                     </a:p>
                     <a:p>
                       <a:pPr algn="l">
@@ -17973,8 +18149,10 @@
                         </a:defRPr>
                       </a:pPr>
                       <a:r>
+                        <a:rPr dirty="0" err="1"/>
                         <a:t>SortedMaps</a:t>
                       </a:r>
+                      <a:endParaRPr dirty="0"/>
                     </a:p>
                     <a:p>
                       <a:pPr algn="l">
@@ -17986,8 +18164,10 @@
                         </a:defRPr>
                       </a:pPr>
                       <a:r>
+                        <a:rPr dirty="0" err="1"/>
                         <a:t>SortedSets</a:t>
                       </a:r>
+                      <a:endParaRPr dirty="0"/>
                     </a:p>
                     <a:p>
                       <a:pPr algn="l">
@@ -17999,16 +18179,41 @@
                         </a:defRPr>
                       </a:pPr>
                       <a:r>
+                        <a:rPr dirty="0"/>
                         <a:t>Stacks</a:t>
                       </a:r>
                     </a:p>
                   </a:txBody>
                   <a:tcPr marL="45720" marR="45720" horzOverflow="overflow">
-                    <a:lnT w="12700">
+                    <a:lnL w="12700" cmpd="sng">
+                      <a:noFill/>
+                      <a:prstDash val="solid"/>
+                    </a:lnL>
+                    <a:lnR w="12700" cmpd="sng">
+                      <a:noFill/>
+                      <a:prstDash val="solid"/>
+                    </a:lnR>
+                    <a:lnT w="12700" cap="flat" cmpd="sng" algn="ctr">
                       <a:solidFill>
-                        <a:srgbClr val="000000"/>
+                        <a:schemeClr val="tx1"/>
                       </a:solidFill>
+                      <a:prstDash val="solid"/>
+                      <a:round/>
+                      <a:headEnd type="none" w="med" len="med"/>
+                      <a:tailEnd type="none" w="med" len="med"/>
                     </a:lnT>
+                    <a:lnB w="12700" cmpd="sng">
+                      <a:noFill/>
+                      <a:prstDash val="solid"/>
+                    </a:lnB>
+                    <a:lnTlToBr w="12700" cmpd="sng">
+                      <a:noFill/>
+                      <a:prstDash val="solid"/>
+                    </a:lnTlToBr>
+                    <a:lnBlToTr w="12700" cmpd="sng">
+                      <a:noFill/>
+                      <a:prstDash val="solid"/>
+                    </a:lnBlToTr>
                   </a:tcPr>
                 </a:tc>
                 <a:tc>
@@ -18033,11 +18238,35 @@
                     </a:p>
                   </a:txBody>
                   <a:tcPr marL="45720" marR="45720" horzOverflow="overflow">
-                    <a:lnT w="12700">
+                    <a:lnL w="12700" cmpd="sng">
+                      <a:noFill/>
+                      <a:prstDash val="solid"/>
+                    </a:lnL>
+                    <a:lnR w="12700" cmpd="sng">
+                      <a:noFill/>
+                      <a:prstDash val="solid"/>
+                    </a:lnR>
+                    <a:lnT w="12700" cap="flat" cmpd="sng" algn="ctr">
                       <a:solidFill>
-                        <a:srgbClr val="000000"/>
+                        <a:schemeClr val="tx1"/>
                       </a:solidFill>
+                      <a:prstDash val="solid"/>
+                      <a:round/>
+                      <a:headEnd type="none" w="med" len="med"/>
+                      <a:tailEnd type="none" w="med" len="med"/>
                     </a:lnT>
+                    <a:lnB w="12700" cmpd="sng">
+                      <a:noFill/>
+                      <a:prstDash val="solid"/>
+                    </a:lnB>
+                    <a:lnTlToBr w="12700" cmpd="sng">
+                      <a:noFill/>
+                      <a:prstDash val="solid"/>
+                    </a:lnTlToBr>
+                    <a:lnBlToTr w="12700" cmpd="sng">
+                      <a:noFill/>
+                      <a:prstDash val="solid"/>
+                    </a:lnBlToTr>
                   </a:tcPr>
                 </a:tc>
                 <a:tc>
@@ -18063,11 +18292,35 @@
                     </a:p>
                   </a:txBody>
                   <a:tcPr marL="45720" marR="45720" horzOverflow="overflow">
-                    <a:lnT w="12700">
+                    <a:lnL w="12700" cmpd="sng">
+                      <a:noFill/>
+                      <a:prstDash val="solid"/>
+                    </a:lnL>
+                    <a:lnR w="12700" cmpd="sng">
+                      <a:noFill/>
+                      <a:prstDash val="solid"/>
+                    </a:lnR>
+                    <a:lnT w="12700" cap="flat" cmpd="sng" algn="ctr">
                       <a:solidFill>
-                        <a:srgbClr val="000000"/>
+                        <a:schemeClr val="tx1"/>
                       </a:solidFill>
+                      <a:prstDash val="solid"/>
+                      <a:round/>
+                      <a:headEnd type="none" w="med" len="med"/>
+                      <a:tailEnd type="none" w="med" len="med"/>
                     </a:lnT>
+                    <a:lnB w="12700" cmpd="sng">
+                      <a:noFill/>
+                      <a:prstDash val="solid"/>
+                    </a:lnB>
+                    <a:lnTlToBr w="12700" cmpd="sng">
+                      <a:noFill/>
+                      <a:prstDash val="solid"/>
+                    </a:lnTlToBr>
+                    <a:lnBlToTr w="12700" cmpd="sng">
+                      <a:noFill/>
+                      <a:prstDash val="solid"/>
+                    </a:lnBlToTr>
                   </a:tcPr>
                 </a:tc>
                 <a:tc>
@@ -18226,11 +18479,35 @@
                     </a:p>
                   </a:txBody>
                   <a:tcPr marL="45720" marR="45720" horzOverflow="overflow">
-                    <a:lnT w="12700">
+                    <a:lnL w="12700" cmpd="sng">
+                      <a:noFill/>
+                      <a:prstDash val="solid"/>
+                    </a:lnL>
+                    <a:lnR w="12700" cmpd="sng">
+                      <a:noFill/>
+                      <a:prstDash val="solid"/>
+                    </a:lnR>
+                    <a:lnT w="12700" cap="flat" cmpd="sng" algn="ctr">
                       <a:solidFill>
-                        <a:srgbClr val="000000"/>
+                        <a:schemeClr val="tx1"/>
                       </a:solidFill>
+                      <a:prstDash val="solid"/>
+                      <a:round/>
+                      <a:headEnd type="none" w="med" len="med"/>
+                      <a:tailEnd type="none" w="med" len="med"/>
                     </a:lnT>
+                    <a:lnB w="12700" cmpd="sng">
+                      <a:noFill/>
+                      <a:prstDash val="solid"/>
+                    </a:lnB>
+                    <a:lnTlToBr w="12700" cmpd="sng">
+                      <a:noFill/>
+                      <a:prstDash val="solid"/>
+                    </a:lnTlToBr>
+                    <a:lnBlToTr w="12700" cmpd="sng">
+                      <a:noFill/>
+                      <a:prstDash val="solid"/>
+                    </a:lnBlToTr>
                   </a:tcPr>
                 </a:tc>
                 <a:tc>
@@ -18242,22 +18519,64 @@
                         <a:defRPr sz="1800"/>
                       </a:pPr>
                       <a:r>
-                        <a:rPr>
+                        <a:rPr dirty="0">
                           <a:latin typeface="Consolas"/>
                           <a:ea typeface="Consolas"/>
                           <a:cs typeface="Consolas"/>
                           <a:sym typeface="Consolas"/>
                         </a:rPr>
-                        <a:t>.asLazy()</a:t>
+                        <a:t>.</a:t>
+                      </a:r>
+                      <a:r>
+                        <a:rPr dirty="0" err="1">
+                          <a:latin typeface="Consolas"/>
+                          <a:ea typeface="Consolas"/>
+                          <a:cs typeface="Consolas"/>
+                          <a:sym typeface="Consolas"/>
+                        </a:rPr>
+                        <a:t>asLazy</a:t>
+                      </a:r>
+                      <a:r>
+                        <a:rPr dirty="0">
+                          <a:latin typeface="Consolas"/>
+                          <a:ea typeface="Consolas"/>
+                          <a:cs typeface="Consolas"/>
+                          <a:sym typeface="Consolas"/>
+                        </a:rPr>
+                        <a:t>()</a:t>
                       </a:r>
                     </a:p>
                   </a:txBody>
                   <a:tcPr marL="45720" marR="45720" horzOverflow="overflow">
-                    <a:lnT w="12700">
+                    <a:lnL w="12700" cmpd="sng">
+                      <a:noFill/>
+                      <a:prstDash val="solid"/>
+                    </a:lnL>
+                    <a:lnR w="12700" cmpd="sng">
+                      <a:noFill/>
+                      <a:prstDash val="solid"/>
+                    </a:lnR>
+                    <a:lnT w="12700" cap="flat" cmpd="sng" algn="ctr">
                       <a:solidFill>
-                        <a:srgbClr val="000000"/>
+                        <a:schemeClr val="tx1"/>
                       </a:solidFill>
+                      <a:prstDash val="solid"/>
+                      <a:round/>
+                      <a:headEnd type="none" w="med" len="med"/>
+                      <a:tailEnd type="none" w="med" len="med"/>
                     </a:lnT>
+                    <a:lnB w="12700" cmpd="sng">
+                      <a:noFill/>
+                      <a:prstDash val="solid"/>
+                    </a:lnB>
+                    <a:lnTlToBr w="12700" cmpd="sng">
+                      <a:noFill/>
+                      <a:prstDash val="solid"/>
+                    </a:lnTlToBr>
+                    <a:lnBlToTr w="12700" cmpd="sng">
+                      <a:noFill/>
+                      <a:prstDash val="solid"/>
+                    </a:lnBlToTr>
                   </a:tcPr>
                 </a:tc>
                 <a:extLst>
@@ -18289,7 +18608,7 @@
           </a:ln>
           <a:extLst>
             <a:ext uri="{C572A759-6A51-4108-AA02-DFA0A04FC94B}">
-              <ma14:wrappingTextBoxFlag xmlns:ma14="http://schemas.microsoft.com/office/mac/drawingml/2011/main" xmlns="" val="1"/>
+              <ma14:wrappingTextBoxFlag xmlns="" xmlns:ma14="http://schemas.microsoft.com/office/mac/drawingml/2011/main" val="1"/>
             </a:ext>
           </a:extLst>
         </p:spPr>
@@ -18597,7 +18916,7 @@
           </a:ln>
           <a:extLst>
             <a:ext uri="{C572A759-6A51-4108-AA02-DFA0A04FC94B}">
-              <ma14:wrappingTextBoxFlag xmlns:ma14="http://schemas.microsoft.com/office/mac/drawingml/2011/main" xmlns="" val="1"/>
+              <ma14:wrappingTextBoxFlag xmlns="" xmlns:ma14="http://schemas.microsoft.com/office/mac/drawingml/2011/main" val="1"/>
             </a:ext>
           </a:extLst>
         </p:spPr>
@@ -18647,7 +18966,7 @@
           </a:ln>
           <a:extLst>
             <a:ext uri="{C572A759-6A51-4108-AA02-DFA0A04FC94B}">
-              <ma14:wrappingTextBoxFlag xmlns:ma14="http://schemas.microsoft.com/office/mac/drawingml/2011/main" xmlns="" val="1"/>
+              <ma14:wrappingTextBoxFlag xmlns="" xmlns:ma14="http://schemas.microsoft.com/office/mac/drawingml/2011/main" val="1"/>
             </a:ext>
           </a:extLst>
         </p:spPr>
@@ -18816,7 +19135,7 @@
           </a:ln>
           <a:extLst>
             <a:ext uri="{C572A759-6A51-4108-AA02-DFA0A04FC94B}">
-              <ma14:wrappingTextBoxFlag xmlns:ma14="http://schemas.microsoft.com/office/mac/drawingml/2011/main" xmlns="" val="1"/>
+              <ma14:wrappingTextBoxFlag xmlns="" xmlns:ma14="http://schemas.microsoft.com/office/mac/drawingml/2011/main" val="1"/>
             </a:ext>
           </a:extLst>
         </p:spPr>
@@ -19222,7 +19541,7 @@
               <a:effectLst/>
               <a:extLst>
                 <a:ext uri="{C572A759-6A51-4108-AA02-DFA0A04FC94B}">
-                  <ma14:wrappingTextBoxFlag xmlns:ma14="http://schemas.microsoft.com/office/mac/drawingml/2011/main" xmlns="" val="1"/>
+                  <ma14:wrappingTextBoxFlag xmlns="" xmlns:ma14="http://schemas.microsoft.com/office/mac/drawingml/2011/main" val="1"/>
                 </a:ext>
               </a:extLst>
             </p:spPr>
@@ -19267,7 +19586,7 @@
             <a:effectLst/>
             <a:extLst>
               <a:ext uri="{C572A759-6A51-4108-AA02-DFA0A04FC94B}">
-                <ma14:wrappingTextBoxFlag xmlns:ma14="http://schemas.microsoft.com/office/mac/drawingml/2011/main" xmlns="" val="1"/>
+                <ma14:wrappingTextBoxFlag xmlns="" xmlns:ma14="http://schemas.microsoft.com/office/mac/drawingml/2011/main" val="1"/>
               </a:ext>
             </a:extLst>
           </p:spPr>
@@ -19490,7 +19809,7 @@
               <a:effectLst/>
               <a:extLst>
                 <a:ext uri="{C572A759-6A51-4108-AA02-DFA0A04FC94B}">
-                  <ma14:wrappingTextBoxFlag xmlns:ma14="http://schemas.microsoft.com/office/mac/drawingml/2011/main" xmlns="" val="1"/>
+                  <ma14:wrappingTextBoxFlag xmlns="" xmlns:ma14="http://schemas.microsoft.com/office/mac/drawingml/2011/main" val="1"/>
                 </a:ext>
               </a:extLst>
             </p:spPr>
@@ -19535,7 +19854,7 @@
             <a:effectLst/>
             <a:extLst>
               <a:ext uri="{C572A759-6A51-4108-AA02-DFA0A04FC94B}">
-                <ma14:wrappingTextBoxFlag xmlns:ma14="http://schemas.microsoft.com/office/mac/drawingml/2011/main" xmlns="" val="1"/>
+                <ma14:wrappingTextBoxFlag xmlns="" xmlns:ma14="http://schemas.microsoft.com/office/mac/drawingml/2011/main" val="1"/>
               </a:ext>
             </a:extLst>
           </p:spPr>
@@ -19713,7 +20032,7 @@
               <a:effectLst/>
               <a:extLst>
                 <a:ext uri="{C572A759-6A51-4108-AA02-DFA0A04FC94B}">
-                  <ma14:wrappingTextBoxFlag xmlns:ma14="http://schemas.microsoft.com/office/mac/drawingml/2011/main" xmlns="" val="1"/>
+                  <ma14:wrappingTextBoxFlag xmlns="" xmlns:ma14="http://schemas.microsoft.com/office/mac/drawingml/2011/main" val="1"/>
                 </a:ext>
               </a:extLst>
             </p:spPr>
@@ -19758,7 +20077,7 @@
             <a:effectLst/>
             <a:extLst>
               <a:ext uri="{C572A759-6A51-4108-AA02-DFA0A04FC94B}">
-                <ma14:wrappingTextBoxFlag xmlns:ma14="http://schemas.microsoft.com/office/mac/drawingml/2011/main" xmlns="" val="1"/>
+                <ma14:wrappingTextBoxFlag xmlns="" xmlns:ma14="http://schemas.microsoft.com/office/mac/drawingml/2011/main" val="1"/>
               </a:ext>
             </a:extLst>
           </p:spPr>
@@ -20037,7 +20356,7 @@
               <a:effectLst/>
               <a:extLst>
                 <a:ext uri="{C572A759-6A51-4108-AA02-DFA0A04FC94B}">
-                  <ma14:wrappingTextBoxFlag xmlns:ma14="http://schemas.microsoft.com/office/mac/drawingml/2011/main" xmlns="" val="1"/>
+                  <ma14:wrappingTextBoxFlag xmlns="" xmlns:ma14="http://schemas.microsoft.com/office/mac/drawingml/2011/main" val="1"/>
                 </a:ext>
               </a:extLst>
             </p:spPr>
@@ -20082,7 +20401,7 @@
             <a:effectLst/>
             <a:extLst>
               <a:ext uri="{C572A759-6A51-4108-AA02-DFA0A04FC94B}">
-                <ma14:wrappingTextBoxFlag xmlns:ma14="http://schemas.microsoft.com/office/mac/drawingml/2011/main" xmlns="" val="1"/>
+                <ma14:wrappingTextBoxFlag xmlns="" xmlns:ma14="http://schemas.microsoft.com/office/mac/drawingml/2011/main" val="1"/>
               </a:ext>
             </a:extLst>
           </p:spPr>
@@ -20300,7 +20619,7 @@
               <a:effectLst/>
               <a:extLst>
                 <a:ext uri="{C572A759-6A51-4108-AA02-DFA0A04FC94B}">
-                  <ma14:wrappingTextBoxFlag xmlns:ma14="http://schemas.microsoft.com/office/mac/drawingml/2011/main" xmlns="" val="1"/>
+                  <ma14:wrappingTextBoxFlag xmlns="" xmlns:ma14="http://schemas.microsoft.com/office/mac/drawingml/2011/main" val="1"/>
                 </a:ext>
               </a:extLst>
             </p:spPr>
@@ -20348,7 +20667,7 @@
             <a:effectLst/>
             <a:extLst>
               <a:ext uri="{C572A759-6A51-4108-AA02-DFA0A04FC94B}">
-                <ma14:wrappingTextBoxFlag xmlns:ma14="http://schemas.microsoft.com/office/mac/drawingml/2011/main" xmlns="" val="1"/>
+                <ma14:wrappingTextBoxFlag xmlns="" xmlns:ma14="http://schemas.microsoft.com/office/mac/drawingml/2011/main" val="1"/>
               </a:ext>
             </a:extLst>
           </p:spPr>
@@ -20553,7 +20872,7 @@
               <a:effectLst/>
               <a:extLst>
                 <a:ext uri="{C572A759-6A51-4108-AA02-DFA0A04FC94B}">
-                  <ma14:wrappingTextBoxFlag xmlns:ma14="http://schemas.microsoft.com/office/mac/drawingml/2011/main" xmlns="" val="1"/>
+                  <ma14:wrappingTextBoxFlag xmlns="" xmlns:ma14="http://schemas.microsoft.com/office/mac/drawingml/2011/main" val="1"/>
                 </a:ext>
               </a:extLst>
             </p:spPr>
@@ -20601,7 +20920,7 @@
             <a:effectLst/>
             <a:extLst>
               <a:ext uri="{C572A759-6A51-4108-AA02-DFA0A04FC94B}">
-                <ma14:wrappingTextBoxFlag xmlns:ma14="http://schemas.microsoft.com/office/mac/drawingml/2011/main" xmlns="" val="1"/>
+                <ma14:wrappingTextBoxFlag xmlns="" xmlns:ma14="http://schemas.microsoft.com/office/mac/drawingml/2011/main" val="1"/>
               </a:ext>
             </a:extLst>
           </p:spPr>
@@ -20843,7 +21162,7 @@
               <a:effectLst/>
               <a:extLst>
                 <a:ext uri="{C572A759-6A51-4108-AA02-DFA0A04FC94B}">
-                  <ma14:wrappingTextBoxFlag xmlns:ma14="http://schemas.microsoft.com/office/mac/drawingml/2011/main" xmlns="" val="1"/>
+                  <ma14:wrappingTextBoxFlag xmlns="" xmlns:ma14="http://schemas.microsoft.com/office/mac/drawingml/2011/main" val="1"/>
                 </a:ext>
               </a:extLst>
             </p:spPr>
@@ -20891,7 +21210,7 @@
             <a:effectLst/>
             <a:extLst>
               <a:ext uri="{C572A759-6A51-4108-AA02-DFA0A04FC94B}">
-                <ma14:wrappingTextBoxFlag xmlns:ma14="http://schemas.microsoft.com/office/mac/drawingml/2011/main" xmlns="" val="1"/>
+                <ma14:wrappingTextBoxFlag xmlns="" xmlns:ma14="http://schemas.microsoft.com/office/mac/drawingml/2011/main" val="1"/>
               </a:ext>
             </a:extLst>
           </p:spPr>
@@ -21159,7 +21478,7 @@
           </a:ln>
           <a:extLst>
             <a:ext uri="{C572A759-6A51-4108-AA02-DFA0A04FC94B}">
-              <ma14:wrappingTextBoxFlag xmlns:ma14="http://schemas.microsoft.com/office/mac/drawingml/2011/main" xmlns="" val="1"/>
+              <ma14:wrappingTextBoxFlag xmlns="" xmlns:ma14="http://schemas.microsoft.com/office/mac/drawingml/2011/main" val="1"/>
             </a:ext>
           </a:extLst>
         </p:spPr>
@@ -21603,7 +21922,12 @@
             <p:ph type="title"/>
           </p:nvPr>
         </p:nvSpPr>
-        <p:spPr/>
+        <p:spPr>
+          <a:xfrm>
+            <a:off x="838200" y="228600"/>
+            <a:ext cx="10515600" cy="822960"/>
+          </a:xfrm>
+        </p:spPr>
         <p:txBody>
           <a:bodyPr/>
           <a:lstStyle/>
@@ -21632,9 +21956,10 @@
           </p:nvPr>
         </p:nvSpPr>
         <p:spPr>
-          <a:prstGeom prst="rect">
-            <a:avLst/>
-          </a:prstGeom>
+          <a:xfrm>
+            <a:off x="8610600" y="6356350"/>
+            <a:ext cx="2743200" cy="365125"/>
+          </a:xfrm>
           <a:ln w="12700">
             <a:miter lim="400000"/>
           </a:ln>
@@ -21979,7 +22304,7 @@
         </p:blipFill>
         <p:spPr>
           <a:xfrm>
-            <a:off x="1115302" y="1825720"/>
+            <a:off x="2209800" y="1413825"/>
             <a:ext cx="7772400" cy="4708783"/>
           </a:xfrm>
           <a:prstGeom prst="rect">

--- a/RefactorToEcIntro.pptx
+++ b/RefactorToEcIntro.pptx
@@ -537,6 +537,90 @@
     <p:extLst>
       <p:ext uri="{BB962C8B-B14F-4D97-AF65-F5344CB8AC3E}">
         <p14:creationId xmlns:p14="http://schemas.microsoft.com/office/powerpoint/2010/main" val="2361595313"/>
+      </p:ext>
+    </p:extLst>
+  </p:cSld>
+  <p:clrMapOvr>
+    <a:masterClrMapping/>
+  </p:clrMapOvr>
+</p:notes>
+</file>
+
+<file path=ppt/notesSlides/notesSlide2.xml><?xml version="1.0" encoding="utf-8"?>
+<p:notes xmlns:a="http://schemas.openxmlformats.org/drawingml/2006/main" xmlns:r="http://schemas.openxmlformats.org/officeDocument/2006/relationships" xmlns:p="http://schemas.openxmlformats.org/presentationml/2006/main">
+  <p:cSld>
+    <p:spTree>
+      <p:nvGrpSpPr>
+        <p:cNvPr id="1" name=""/>
+        <p:cNvGrpSpPr/>
+        <p:nvPr/>
+      </p:nvGrpSpPr>
+      <p:grpSpPr>
+        <a:xfrm>
+          <a:off x="0" y="0"/>
+          <a:ext cx="0" cy="0"/>
+          <a:chOff x="0" y="0"/>
+          <a:chExt cx="0" cy="0"/>
+        </a:xfrm>
+      </p:grpSpPr>
+      <p:sp>
+        <p:nvSpPr>
+          <p:cNvPr id="2" name="Slide Image Placeholder 1"/>
+          <p:cNvSpPr>
+            <a:spLocks noGrp="1" noRot="1" noChangeAspect="1"/>
+          </p:cNvSpPr>
+          <p:nvPr>
+            <p:ph type="sldImg"/>
+          </p:nvPr>
+        </p:nvSpPr>
+        <p:spPr/>
+      </p:sp>
+      <p:sp>
+        <p:nvSpPr>
+          <p:cNvPr id="3" name="Notes Placeholder 2"/>
+          <p:cNvSpPr>
+            <a:spLocks noGrp="1"/>
+          </p:cNvSpPr>
+          <p:nvPr>
+            <p:ph type="body" idx="1"/>
+          </p:nvPr>
+        </p:nvSpPr>
+        <p:spPr/>
+        <p:txBody>
+          <a:bodyPr/>
+          <a:lstStyle/>
+          <a:p>
+            <a:endParaRPr lang="en-US" b="0" dirty="0"/>
+          </a:p>
+        </p:txBody>
+      </p:sp>
+      <p:sp>
+        <p:nvSpPr>
+          <p:cNvPr id="4" name="Slide Number Placeholder 3"/>
+          <p:cNvSpPr>
+            <a:spLocks noGrp="1"/>
+          </p:cNvSpPr>
+          <p:nvPr>
+            <p:ph type="sldNum" sz="quarter" idx="5"/>
+          </p:nvPr>
+        </p:nvSpPr>
+        <p:spPr/>
+        <p:txBody>
+          <a:bodyPr/>
+          <a:lstStyle/>
+          <a:p>
+            <a:fld id="{3009100B-F611-4B83-9AF4-01D82287C5E3}" type="slidenum">
+              <a:rPr lang="en-US" smtClean="0"/>
+              <a:t>15</a:t>
+            </a:fld>
+            <a:endParaRPr lang="en-US"/>
+          </a:p>
+        </p:txBody>
+      </p:sp>
+    </p:spTree>
+    <p:extLst>
+      <p:ext uri="{BB962C8B-B14F-4D97-AF65-F5344CB8AC3E}">
+        <p14:creationId xmlns:p14="http://schemas.microsoft.com/office/powerpoint/2010/main" val="1590806808"/>
       </p:ext>
     </p:extLst>
   </p:cSld>
@@ -4954,14 +5038,15 @@
         <p:spPr/>
         <p:txBody>
           <a:bodyPr>
-            <a:normAutofit lnSpcReduction="10000"/>
+            <a:normAutofit fontScale="92500" lnSpcReduction="10000"/>
           </a:bodyPr>
           <a:lstStyle/>
           <a:p>
-            <a:pPr>
+            <a:pPr marL="0" indent="0">
               <a:lnSpc>
                 <a:spcPct val="120000"/>
               </a:lnSpc>
+              <a:buNone/>
             </a:pPr>
             <a:r>
               <a:rPr lang="en-US" dirty="0">
@@ -4998,11 +5083,29 @@
               </a:lnSpc>
               <a:buNone/>
             </a:pPr>
+            <a:endParaRPr lang="en-US" sz="1700" dirty="0">
+              <a:solidFill>
+                <a:schemeClr val="accent1">
+                  <a:lumMod val="50000"/>
+                </a:schemeClr>
+              </a:solidFill>
+              <a:latin typeface="JetBrains Mono Medium" panose="02000009000000000000" pitchFamily="49" charset="0"/>
+              <a:ea typeface="JetBrains Mono Medium" panose="02000009000000000000" pitchFamily="49" charset="0"/>
+              <a:cs typeface="JetBrains Mono Medium" panose="02000009000000000000" pitchFamily="49" charset="0"/>
+            </a:endParaRPr>
+          </a:p>
+          <a:p>
+            <a:pPr marL="548639" lvl="1" indent="0">
+              <a:lnSpc>
+                <a:spcPts val="1500"/>
+              </a:lnSpc>
+              <a:buNone/>
+            </a:pPr>
             <a:r>
               <a:rPr lang="en-US" sz="1700" dirty="0">
                 <a:solidFill>
                   <a:schemeClr val="accent1">
-                    <a:lumMod val="50000"/>
+                    <a:lumMod val="75000"/>
                   </a:schemeClr>
                 </a:solidFill>
                 <a:latin typeface="JetBrains Mono Medium" panose="02000009000000000000" pitchFamily="49" charset="0"/>
@@ -5013,7 +5116,7 @@
             </a:r>
           </a:p>
           <a:p>
-            <a:pPr marL="1005839" lvl="2" indent="0">
+            <a:pPr marL="548639" lvl="1" indent="0">
               <a:lnSpc>
                 <a:spcPts val="1500"/>
               </a:lnSpc>
@@ -5023,7 +5126,7 @@
               <a:rPr lang="en-US" sz="1700" dirty="0">
                 <a:solidFill>
                   <a:schemeClr val="accent1">
-                    <a:lumMod val="50000"/>
+                    <a:lumMod val="75000"/>
                   </a:schemeClr>
                 </a:solidFill>
                 <a:latin typeface="JetBrains Mono Medium" panose="02000009000000000000" pitchFamily="49" charset="0"/>
@@ -5036,7 +5139,7 @@
               <a:rPr lang="en-US" sz="1700" dirty="0" err="1">
                 <a:solidFill>
                   <a:schemeClr val="accent1">
-                    <a:lumMod val="50000"/>
+                    <a:lumMod val="75000"/>
                   </a:schemeClr>
                 </a:solidFill>
                 <a:latin typeface="JetBrains Mono Medium" panose="02000009000000000000" pitchFamily="49" charset="0"/>
@@ -5049,7 +5152,7 @@
               <a:rPr lang="en-US" sz="1700" dirty="0">
                 <a:solidFill>
                   <a:schemeClr val="accent1">
-                    <a:lumMod val="50000"/>
+                    <a:lumMod val="75000"/>
                   </a:schemeClr>
                 </a:solidFill>
                 <a:latin typeface="JetBrains Mono Medium" panose="02000009000000000000" pitchFamily="49" charset="0"/>
@@ -5062,7 +5165,7 @@
               <a:rPr lang="en-US" sz="1700" dirty="0" err="1">
                 <a:solidFill>
                   <a:schemeClr val="accent1">
-                    <a:lumMod val="50000"/>
+                    <a:lumMod val="75000"/>
                   </a:schemeClr>
                 </a:solidFill>
                 <a:latin typeface="JetBrains Mono Medium" panose="02000009000000000000" pitchFamily="49" charset="0"/>
@@ -5075,7 +5178,7 @@
               <a:rPr lang="en-US" sz="1700" dirty="0">
                 <a:solidFill>
                   <a:schemeClr val="accent1">
-                    <a:lumMod val="50000"/>
+                    <a:lumMod val="75000"/>
                   </a:schemeClr>
                 </a:solidFill>
                 <a:latin typeface="JetBrains Mono Medium" panose="02000009000000000000" pitchFamily="49" charset="0"/>
@@ -5088,7 +5191,7 @@
               <a:rPr lang="en-US" sz="1700" dirty="0" err="1">
                 <a:solidFill>
                   <a:schemeClr val="accent1">
-                    <a:lumMod val="50000"/>
+                    <a:lumMod val="75000"/>
                   </a:schemeClr>
                 </a:solidFill>
                 <a:latin typeface="JetBrains Mono Medium" panose="02000009000000000000" pitchFamily="49" charset="0"/>
@@ -5101,7 +5204,7 @@
               <a:rPr lang="en-US" sz="1700" dirty="0">
                 <a:solidFill>
                   <a:schemeClr val="accent1">
-                    <a:lumMod val="50000"/>
+                    <a:lumMod val="75000"/>
                   </a:schemeClr>
                 </a:solidFill>
                 <a:latin typeface="JetBrains Mono Medium" panose="02000009000000000000" pitchFamily="49" charset="0"/>
@@ -5112,7 +5215,7 @@
             </a:r>
           </a:p>
           <a:p>
-            <a:pPr marL="1005839" lvl="2" indent="0">
+            <a:pPr marL="548639" lvl="1" indent="0">
               <a:lnSpc>
                 <a:spcPts val="1500"/>
               </a:lnSpc>
@@ -5122,7 +5225,7 @@
               <a:rPr lang="en-US" sz="1700" dirty="0">
                 <a:solidFill>
                   <a:schemeClr val="accent1">
-                    <a:lumMod val="50000"/>
+                    <a:lumMod val="75000"/>
                   </a:schemeClr>
                 </a:solidFill>
                 <a:latin typeface="JetBrains Mono Medium" panose="02000009000000000000" pitchFamily="49" charset="0"/>
@@ -5135,7 +5238,7 @@
               <a:rPr lang="en-US" sz="1700" dirty="0" err="1">
                 <a:solidFill>
                   <a:schemeClr val="accent1">
-                    <a:lumMod val="50000"/>
+                    <a:lumMod val="75000"/>
                   </a:schemeClr>
                 </a:solidFill>
                 <a:latin typeface="JetBrains Mono Medium" panose="02000009000000000000" pitchFamily="49" charset="0"/>
@@ -5148,7 +5251,7 @@
               <a:rPr lang="en-US" sz="1700" dirty="0">
                 <a:solidFill>
                   <a:schemeClr val="accent1">
-                    <a:lumMod val="50000"/>
+                    <a:lumMod val="75000"/>
                   </a:schemeClr>
                 </a:solidFill>
                 <a:latin typeface="JetBrains Mono Medium" panose="02000009000000000000" pitchFamily="49" charset="0"/>
@@ -5161,7 +5264,7 @@
               <a:rPr lang="en-US" sz="1700" dirty="0" err="1">
                 <a:solidFill>
                   <a:schemeClr val="accent1">
-                    <a:lumMod val="50000"/>
+                    <a:lumMod val="75000"/>
                   </a:schemeClr>
                 </a:solidFill>
                 <a:latin typeface="JetBrains Mono Medium" panose="02000009000000000000" pitchFamily="49" charset="0"/>
@@ -5174,7 +5277,7 @@
               <a:rPr lang="en-US" sz="1700" dirty="0">
                 <a:solidFill>
                   <a:schemeClr val="accent1">
-                    <a:lumMod val="50000"/>
+                    <a:lumMod val="75000"/>
                   </a:schemeClr>
                 </a:solidFill>
                 <a:latin typeface="JetBrains Mono Medium" panose="02000009000000000000" pitchFamily="49" charset="0"/>
@@ -5185,7 +5288,7 @@
             </a:r>
           </a:p>
           <a:p>
-            <a:pPr marL="1005839" lvl="2" indent="0">
+            <a:pPr marL="548639" lvl="1" indent="0">
               <a:lnSpc>
                 <a:spcPts val="1500"/>
               </a:lnSpc>
@@ -5195,7 +5298,7 @@
               <a:rPr lang="en-US" sz="1700" dirty="0">
                 <a:solidFill>
                   <a:schemeClr val="accent1">
-                    <a:lumMod val="50000"/>
+                    <a:lumMod val="75000"/>
                   </a:schemeClr>
                 </a:solidFill>
                 <a:latin typeface="JetBrains Mono Medium" panose="02000009000000000000" pitchFamily="49" charset="0"/>
@@ -5206,7 +5309,7 @@
             </a:r>
           </a:p>
           <a:p>
-            <a:pPr marL="1005839" lvl="2" indent="0">
+            <a:pPr marL="548639" lvl="1" indent="0">
               <a:lnSpc>
                 <a:spcPts val="1500"/>
               </a:lnSpc>
@@ -5216,7 +5319,7 @@
               <a:rPr lang="en-US" sz="1700" dirty="0">
                 <a:solidFill>
                   <a:schemeClr val="accent1">
-                    <a:lumMod val="50000"/>
+                    <a:lumMod val="75000"/>
                   </a:schemeClr>
                 </a:solidFill>
                 <a:latin typeface="JetBrains Mono Medium" panose="02000009000000000000" pitchFamily="49" charset="0"/>
@@ -5227,7 +5330,21 @@
             </a:r>
           </a:p>
           <a:p>
-            <a:pPr>
+            <a:pPr marL="0" indent="0">
+              <a:lnSpc>
+                <a:spcPct val="120000"/>
+              </a:lnSpc>
+              <a:buNone/>
+            </a:pPr>
+            <a:r>
+              <a:rPr lang="en-US" dirty="0">
+                <a:latin typeface="Aptos" panose="020B0004020202020204" pitchFamily="34" charset="0"/>
+              </a:rPr>
+              <a:t>Further reading</a:t>
+            </a:r>
+          </a:p>
+          <a:p>
+            <a:pPr lvl="1">
               <a:lnSpc>
                 <a:spcPct val="120000"/>
               </a:lnSpc>
@@ -5242,7 +5359,7 @@
               <a:rPr lang="en-US" dirty="0">
                 <a:latin typeface="Aptos" panose="020B0004020202020204" pitchFamily="34" charset="0"/>
               </a:rPr>
-              <a:t> Article: </a:t>
+              <a:t>: </a:t>
             </a:r>
             <a:r>
               <a:rPr lang="en-US" u="sng" dirty="0">
@@ -5256,7 +5373,7 @@
             </a:endParaRPr>
           </a:p>
           <a:p>
-            <a:pPr>
+            <a:pPr lvl="1">
               <a:lnSpc>
                 <a:spcPct val="120000"/>
               </a:lnSpc>
@@ -5425,6 +5542,66 @@
               <a:t>11</a:t>
             </a:fld>
             <a:endParaRPr lang="en-US"/>
+          </a:p>
+        </p:txBody>
+      </p:sp>
+      <p:sp>
+        <p:nvSpPr>
+          <p:cNvPr id="7" name="TextBox 6">
+            <a:extLst>
+              <a:ext uri="{FF2B5EF4-FFF2-40B4-BE49-F238E27FC236}">
+                <a16:creationId xmlns:a16="http://schemas.microsoft.com/office/drawing/2014/main" id="{4EA74B74-31EE-CF78-2B4F-FAF4D7D31539}"/>
+              </a:ext>
+            </a:extLst>
+          </p:cNvPr>
+          <p:cNvSpPr txBox="1"/>
+          <p:nvPr/>
+        </p:nvSpPr>
+        <p:spPr>
+          <a:xfrm>
+            <a:off x="0" y="6126480"/>
+            <a:ext cx="731520" cy="584775"/>
+          </a:xfrm>
+          <a:prstGeom prst="rect">
+            <a:avLst/>
+          </a:prstGeom>
+          <a:noFill/>
+          <a:ln w="12700" cap="flat">
+            <a:noFill/>
+            <a:miter lim="400000"/>
+          </a:ln>
+          <a:effectLst/>
+          <a:sp3d/>
+        </p:spPr>
+        <p:style>
+          <a:lnRef idx="0">
+            <a:scrgbClr r="0" g="0" b="0"/>
+          </a:lnRef>
+          <a:fillRef idx="0">
+            <a:scrgbClr r="0" g="0" b="0"/>
+          </a:fillRef>
+          <a:effectRef idx="0">
+            <a:scrgbClr r="0" g="0" b="0"/>
+          </a:effectRef>
+          <a:fontRef idx="none"/>
+        </p:style>
+        <p:txBody>
+          <a:bodyPr wrap="square">
+            <a:spAutoFit/>
+          </a:bodyPr>
+          <a:lstStyle/>
+          <a:p>
+            <a:r>
+              <a:rPr lang="en-US" sz="3200" b="0" i="0" u="none" strike="noStrike" dirty="0">
+                <a:solidFill>
+                  <a:srgbClr val="000000"/>
+                </a:solidFill>
+                <a:effectLst/>
+                <a:latin typeface="Arial" panose="020B0604020202020204" pitchFamily="34" charset="0"/>
+              </a:rPr>
+              <a:t>🐿️</a:t>
+            </a:r>
+            <a:endParaRPr lang="en-US" sz="3200" dirty="0"/>
           </a:p>
         </p:txBody>
       </p:sp>
@@ -6407,7 +6584,13 @@
           <p:cNvGraphicFramePr>
             <a:graphicFrameLocks noGrp="1"/>
           </p:cNvGraphicFramePr>
-          <p:nvPr/>
+          <p:nvPr>
+            <p:extLst>
+              <p:ext uri="{D42A27DB-BD31-4B8C-83A1-F6EECF244321}">
+                <p14:modId xmlns:p14="http://schemas.microsoft.com/office/powerpoint/2010/main" val="3633310470"/>
+              </p:ext>
+            </p:extLst>
+          </p:nvPr>
         </p:nvGraphicFramePr>
         <p:xfrm>
           <a:off x="1844040" y="1232054"/>
@@ -6465,12 +6648,12 @@
                       <a:pPr algn="l"/>
                       <a:r>
                         <a:rPr lang="en-US" sz="1600" b="1" i="0" dirty="0">
-                          <a:latin typeface="Univers" panose="020B0503020202020204" pitchFamily="34" charset="0"/>
+                          <a:latin typeface="+mn-lt"/>
                         </a:rPr>
                         <a:t>Features</a:t>
                       </a:r>
                       <a:endParaRPr lang="en-US" sz="1600" dirty="0">
-                        <a:latin typeface="Univers" panose="020B0503020202020204" pitchFamily="34" charset="0"/>
+                        <a:latin typeface="+mn-lt"/>
                       </a:endParaRPr>
                     </a:p>
                   </a:txBody>
@@ -6513,7 +6696,7 @@
                       <a:pPr algn="r"/>
                       <a:r>
                         <a:rPr lang="en-US" sz="1200" b="1" i="0" dirty="0">
-                          <a:latin typeface="Univers" panose="020B0503020202020204" pitchFamily="34" charset="0"/>
+                          <a:latin typeface="+mn-lt"/>
                         </a:rPr>
                         <a:t>Productivity </a:t>
                       </a:r>
@@ -6561,7 +6744,7 @@
                       <a:pPr algn="r"/>
                       <a:r>
                         <a:rPr lang="en-US" sz="1200" b="1" i="0" dirty="0">
-                          <a:latin typeface="Univers" panose="020B0503020202020204" pitchFamily="34" charset="0"/>
+                          <a:latin typeface="+mn-lt"/>
                         </a:rPr>
                         <a:t>Performance </a:t>
                       </a:r>
@@ -6613,34 +6796,11 @@
                       <a:r>
                         <a:rPr lang="en-US" sz="1200" b="1" i="0" dirty="0">
                           <a:solidFill>
-                            <a:srgbClr val="FF0000"/>
+                            <a:schemeClr val="tx1"/>
                           </a:solidFill>
-                          <a:latin typeface="Univers" panose="020B0503020202020204" pitchFamily="34" charset="0"/>
+                          <a:latin typeface="+mn-lt"/>
                         </a:rPr>
-                        <a:t>Protection</a:t>
-                      </a:r>
-                      <a:br>
-                        <a:rPr lang="en-US" sz="1200" b="1" i="0" dirty="0">
-                          <a:solidFill>
-                            <a:srgbClr val="FF0000"/>
-                          </a:solidFill>
-                          <a:latin typeface="Univers" panose="020B0503020202020204" pitchFamily="34" charset="0"/>
-                        </a:rPr>
-                      </a:br>
-                      <a:r>
-                        <a:rPr lang="en-US" sz="1200" b="1" i="0" dirty="0">
-                          <a:solidFill>
-                            <a:srgbClr val="FF0000"/>
-                          </a:solidFill>
-                          <a:latin typeface="Univers" panose="020B0503020202020204" pitchFamily="34" charset="0"/>
-                        </a:rPr>
-                        <a:t>Safety</a:t>
-                      </a:r>
-                      <a:r>
-                        <a:rPr lang="en-US" sz="1200" b="1" i="0" dirty="0">
-                          <a:latin typeface="Univers" panose="020B0503020202020204" pitchFamily="34" charset="0"/>
-                        </a:rPr>
-                        <a:t> </a:t>
+                        <a:t>Thread Safety </a:t>
                       </a:r>
                     </a:p>
                   </a:txBody>
@@ -6686,7 +6846,7 @@
                       <a:pPr algn="r"/>
                       <a:r>
                         <a:rPr lang="en-US" sz="1200" b="1" i="0" dirty="0">
-                          <a:latin typeface="Univers" panose="020B0503020202020204" pitchFamily="34" charset="0"/>
+                          <a:latin typeface="+mn-lt"/>
                         </a:rPr>
                         <a:t>Type Safety  </a:t>
                       </a:r>
@@ -17148,7 +17308,7 @@
         </p:nvSpPr>
         <p:spPr>
           <a:xfrm>
-            <a:off x="1184563" y="4800600"/>
+            <a:off x="1184563" y="4809765"/>
             <a:ext cx="9822874" cy="1822856"/>
           </a:xfrm>
           <a:prstGeom prst="ellipse">
@@ -17551,7 +17711,7 @@
           <p:nvPr>
             <p:extLst>
               <p:ext uri="{D42A27DB-BD31-4B8C-83A1-F6EECF244321}">
-                <p14:modId xmlns:p14="http://schemas.microsoft.com/office/powerpoint/2010/main" val="1522430867"/>
+                <p14:modId xmlns:p14="http://schemas.microsoft.com/office/powerpoint/2010/main" val="3985011068"/>
               </p:ext>
             </p:extLst>
           </p:nvPr>
@@ -17618,9 +17778,14 @@
                         <a:defRPr sz="1800"/>
                       </a:pPr>
                       <a:r>
-                        <a:rPr b="1"/>
+                        <a:rPr b="1" dirty="0"/>
                         <a:t>Primitive Type</a:t>
                       </a:r>
+                      <a:r>
+                        <a:rPr lang="en-US" b="1" baseline="30000" dirty="0"/>
+                        <a:t>*</a:t>
+                      </a:r>
+                      <a:endParaRPr b="1" baseline="30000" dirty="0"/>
                     </a:p>
                   </a:txBody>
                   <a:tcPr marL="45720" marR="45720" anchor="b" horzOverflow="overflow">
@@ -17905,10 +18070,14 @@
                         </a:defRPr>
                       </a:pPr>
                       <a:r>
+                        <a:rPr dirty="0"/>
                         <a:t>Boolean</a:t>
                       </a:r>
-                      <a:br/>
+                      <a:br>
+                        <a:rPr dirty="0"/>
+                      </a:br>
                       <a:r>
+                        <a:rPr dirty="0"/>
                         <a:t>Byte</a:t>
                       </a:r>
                     </a:p>
@@ -17922,6 +18091,7 @@
                         </a:defRPr>
                       </a:pPr>
                       <a:r>
+                        <a:rPr dirty="0"/>
                         <a:t>Char</a:t>
                       </a:r>
                     </a:p>
@@ -17935,6 +18105,7 @@
                         </a:defRPr>
                       </a:pPr>
                       <a:r>
+                        <a:rPr dirty="0"/>
                         <a:t>Double</a:t>
                       </a:r>
                     </a:p>
@@ -17948,6 +18119,7 @@
                         </a:defRPr>
                       </a:pPr>
                       <a:r>
+                        <a:rPr dirty="0"/>
                         <a:t>Float</a:t>
                       </a:r>
                     </a:p>
@@ -17961,6 +18133,7 @@
                         </a:defRPr>
                       </a:pPr>
                       <a:r>
+                        <a:rPr dirty="0"/>
                         <a:t>Int</a:t>
                       </a:r>
                     </a:p>
@@ -17974,6 +18147,7 @@
                         </a:defRPr>
                       </a:pPr>
                       <a:r>
+                        <a:rPr dirty="0"/>
                         <a:t>Long</a:t>
                       </a:r>
                     </a:p>
@@ -17987,6 +18161,7 @@
                         </a:defRPr>
                       </a:pPr>
                       <a:r>
+                        <a:rPr dirty="0"/>
                         <a:t>Object</a:t>
                       </a:r>
                     </a:p>
@@ -18000,6 +18175,7 @@
                         </a:defRPr>
                       </a:pPr>
                       <a:r>
+                        <a:rPr dirty="0"/>
                         <a:t>Short</a:t>
                       </a:r>
                     </a:p>
@@ -18597,8 +18773,8 @@
         </p:nvSpPr>
         <p:spPr>
           <a:xfrm>
-            <a:off x="1492827" y="5458909"/>
-            <a:ext cx="9206346" cy="434341"/>
+            <a:off x="1492827" y="5380197"/>
+            <a:ext cx="9206346" cy="591765"/>
           </a:xfrm>
           <a:prstGeom prst="rect">
             <a:avLst/>
@@ -18633,79 +18809,144 @@
               </a:defRPr>
             </a:pPr>
             <a:r>
+              <a:rPr dirty="0" err="1">
+                <a:latin typeface="JetBrains Mono" panose="02000009000000000000" pitchFamily="49" charset="0"/>
+                <a:ea typeface="JetBrains Mono" panose="02000009000000000000" pitchFamily="49" charset="0"/>
+                <a:cs typeface="JetBrains Mono" panose="02000009000000000000" pitchFamily="49" charset="0"/>
+              </a:rPr>
               <a:t>LongStacks</a:t>
             </a:r>
             <a:r>
-              <a:rPr>
+              <a:rPr dirty="0" err="1">
                 <a:solidFill>
                   <a:srgbClr val="000000"/>
                 </a:solidFill>
+                <a:latin typeface="JetBrains Mono" panose="02000009000000000000" pitchFamily="49" charset="0"/>
+                <a:ea typeface="JetBrains Mono" panose="02000009000000000000" pitchFamily="49" charset="0"/>
+                <a:cs typeface="JetBrains Mono" panose="02000009000000000000" pitchFamily="49" charset="0"/>
               </a:rPr>
               <a:t>.</a:t>
             </a:r>
             <a:r>
-              <a:rPr b="1" i="1">
+              <a:rPr b="1" i="1" dirty="0" err="1">
                 <a:solidFill>
                   <a:srgbClr val="660E7A"/>
                 </a:solidFill>
+                <a:latin typeface="JetBrains Mono" panose="02000009000000000000" pitchFamily="49" charset="0"/>
+                <a:ea typeface="JetBrains Mono" panose="02000009000000000000" pitchFamily="49" charset="0"/>
+                <a:cs typeface="JetBrains Mono" panose="02000009000000000000" pitchFamily="49" charset="0"/>
               </a:rPr>
               <a:t>immutable</a:t>
             </a:r>
             <a:r>
-              <a:rPr>
+              <a:rPr dirty="0" err="1">
                 <a:solidFill>
                   <a:srgbClr val="000000"/>
                 </a:solidFill>
+                <a:latin typeface="JetBrains Mono" panose="02000009000000000000" pitchFamily="49" charset="0"/>
+                <a:ea typeface="JetBrains Mono" panose="02000009000000000000" pitchFamily="49" charset="0"/>
+                <a:cs typeface="JetBrains Mono" panose="02000009000000000000" pitchFamily="49" charset="0"/>
               </a:rPr>
-              <a:t>.with(</a:t>
+              <a:t>.with</a:t>
             </a:r>
             <a:r>
-              <a:rPr>
+              <a:rPr dirty="0">
+                <a:solidFill>
+                  <a:srgbClr val="000000"/>
+                </a:solidFill>
+                <a:latin typeface="JetBrains Mono" panose="02000009000000000000" pitchFamily="49" charset="0"/>
+                <a:ea typeface="JetBrains Mono" panose="02000009000000000000" pitchFamily="49" charset="0"/>
+                <a:cs typeface="JetBrains Mono" panose="02000009000000000000" pitchFamily="49" charset="0"/>
+              </a:rPr>
+              <a:t>(</a:t>
+            </a:r>
+            <a:r>
+              <a:rPr dirty="0">
                 <a:solidFill>
                   <a:srgbClr val="0000FF"/>
                 </a:solidFill>
+                <a:latin typeface="JetBrains Mono" panose="02000009000000000000" pitchFamily="49" charset="0"/>
+                <a:ea typeface="JetBrains Mono" panose="02000009000000000000" pitchFamily="49" charset="0"/>
+                <a:cs typeface="JetBrains Mono" panose="02000009000000000000" pitchFamily="49" charset="0"/>
               </a:rPr>
               <a:t>1</a:t>
             </a:r>
             <a:r>
-              <a:rPr>
+              <a:rPr dirty="0">
                 <a:solidFill>
                   <a:srgbClr val="000000"/>
                 </a:solidFill>
+                <a:latin typeface="JetBrains Mono" panose="02000009000000000000" pitchFamily="49" charset="0"/>
+                <a:ea typeface="JetBrains Mono" panose="02000009000000000000" pitchFamily="49" charset="0"/>
+                <a:cs typeface="JetBrains Mono" panose="02000009000000000000" pitchFamily="49" charset="0"/>
               </a:rPr>
               <a:t>, </a:t>
             </a:r>
             <a:r>
-              <a:rPr>
+              <a:rPr dirty="0">
                 <a:solidFill>
                   <a:srgbClr val="0000FF"/>
                 </a:solidFill>
+                <a:latin typeface="JetBrains Mono" panose="02000009000000000000" pitchFamily="49" charset="0"/>
+                <a:ea typeface="JetBrains Mono" panose="02000009000000000000" pitchFamily="49" charset="0"/>
+                <a:cs typeface="JetBrains Mono" panose="02000009000000000000" pitchFamily="49" charset="0"/>
               </a:rPr>
               <a:t>2</a:t>
             </a:r>
             <a:r>
-              <a:rPr>
+              <a:rPr dirty="0">
                 <a:solidFill>
                   <a:srgbClr val="000000"/>
                 </a:solidFill>
+                <a:latin typeface="JetBrains Mono" panose="02000009000000000000" pitchFamily="49" charset="0"/>
+                <a:ea typeface="JetBrains Mono" panose="02000009000000000000" pitchFamily="49" charset="0"/>
+                <a:cs typeface="JetBrains Mono" panose="02000009000000000000" pitchFamily="49" charset="0"/>
               </a:rPr>
               <a:t>, </a:t>
             </a:r>
             <a:r>
-              <a:rPr>
+              <a:rPr dirty="0">
                 <a:solidFill>
                   <a:srgbClr val="0000FF"/>
                 </a:solidFill>
+                <a:latin typeface="JetBrains Mono" panose="02000009000000000000" pitchFamily="49" charset="0"/>
+                <a:ea typeface="JetBrains Mono" panose="02000009000000000000" pitchFamily="49" charset="0"/>
+                <a:cs typeface="JetBrains Mono" panose="02000009000000000000" pitchFamily="49" charset="0"/>
               </a:rPr>
               <a:t>3</a:t>
             </a:r>
             <a:r>
-              <a:rPr>
+              <a:rPr dirty="0">
                 <a:solidFill>
                   <a:srgbClr val="000000"/>
                 </a:solidFill>
+                <a:latin typeface="JetBrains Mono" panose="02000009000000000000" pitchFamily="49" charset="0"/>
+                <a:ea typeface="JetBrains Mono" panose="02000009000000000000" pitchFamily="49" charset="0"/>
+                <a:cs typeface="JetBrains Mono" panose="02000009000000000000" pitchFamily="49" charset="0"/>
               </a:rPr>
-              <a:t>).asLazy()</a:t>
+              <a:t>).</a:t>
+            </a:r>
+            <a:r>
+              <a:rPr dirty="0" err="1">
+                <a:solidFill>
+                  <a:srgbClr val="000000"/>
+                </a:solidFill>
+                <a:latin typeface="JetBrains Mono" panose="02000009000000000000" pitchFamily="49" charset="0"/>
+                <a:ea typeface="JetBrains Mono" panose="02000009000000000000" pitchFamily="49" charset="0"/>
+                <a:cs typeface="JetBrains Mono" panose="02000009000000000000" pitchFamily="49" charset="0"/>
+              </a:rPr>
+              <a:t>asLazy</a:t>
+            </a:r>
+            <a:r>
+              <a:rPr dirty="0">
+                <a:solidFill>
+                  <a:srgbClr val="000000"/>
+                </a:solidFill>
+                <a:latin typeface="JetBrains Mono" panose="02000009000000000000" pitchFamily="49" charset="0"/>
+                <a:ea typeface="JetBrains Mono" panose="02000009000000000000" pitchFamily="49" charset="0"/>
+                <a:cs typeface="JetBrains Mono" panose="02000009000000000000" pitchFamily="49" charset="0"/>
+              </a:rPr>
+              <a:t>()</a:t>
             </a:r>
           </a:p>
         </p:txBody>
@@ -18905,8 +19146,8 @@
         </p:nvSpPr>
         <p:spPr>
           <a:xfrm>
-            <a:off x="4580652" y="6068286"/>
-            <a:ext cx="3030697" cy="434341"/>
+            <a:off x="4575073" y="6068286"/>
+            <a:ext cx="3041856" cy="591765"/>
           </a:xfrm>
           <a:prstGeom prst="rect">
             <a:avLst/>
@@ -18942,8 +19183,18 @@
           </a:lstStyle>
           <a:p>
             <a:r>
+              <a:rPr dirty="0" err="1">
+                <a:latin typeface="JetBrains Mono" panose="02000009000000000000" pitchFamily="49" charset="0"/>
+                <a:ea typeface="JetBrains Mono" panose="02000009000000000000" pitchFamily="49" charset="0"/>
+                <a:cs typeface="JetBrains Mono" panose="02000009000000000000" pitchFamily="49" charset="0"/>
+              </a:rPr>
               <a:t>LazyLongIterable</a:t>
             </a:r>
+            <a:endParaRPr dirty="0">
+              <a:latin typeface="JetBrains Mono" panose="02000009000000000000" pitchFamily="49" charset="0"/>
+              <a:ea typeface="JetBrains Mono" panose="02000009000000000000" pitchFamily="49" charset="0"/>
+              <a:cs typeface="JetBrains Mono" panose="02000009000000000000" pitchFamily="49" charset="0"/>
+            </a:endParaRPr>
           </a:p>
         </p:txBody>
       </p:sp>
@@ -18955,8 +19206,8 @@
         </p:nvSpPr>
         <p:spPr>
           <a:xfrm>
-            <a:off x="3255820" y="4794967"/>
-            <a:ext cx="3969329" cy="434341"/>
+            <a:off x="3255820" y="4716255"/>
+            <a:ext cx="3969329" cy="591765"/>
           </a:xfrm>
           <a:prstGeom prst="rect">
             <a:avLst/>
@@ -18992,8 +19243,18 @@
           </a:lstStyle>
           <a:p>
             <a:r>
+              <a:rPr dirty="0" err="1">
+                <a:latin typeface="JetBrains Mono" panose="02000009000000000000" pitchFamily="49" charset="0"/>
+                <a:ea typeface="JetBrains Mono" panose="02000009000000000000" pitchFamily="49" charset="0"/>
+                <a:cs typeface="JetBrains Mono" panose="02000009000000000000" pitchFamily="49" charset="0"/>
+              </a:rPr>
               <a:t>ImmutableLongStack</a:t>
             </a:r>
+            <a:endParaRPr dirty="0">
+              <a:latin typeface="JetBrains Mono" panose="02000009000000000000" pitchFamily="49" charset="0"/>
+              <a:ea typeface="JetBrains Mono" panose="02000009000000000000" pitchFamily="49" charset="0"/>
+              <a:cs typeface="JetBrains Mono" panose="02000009000000000000" pitchFamily="49" charset="0"/>
+            </a:endParaRPr>
           </a:p>
         </p:txBody>
       </p:sp>
@@ -19057,6 +19318,203 @@
           </a:p>
         </p:txBody>
       </p:sp>
+      <p:graphicFrame>
+        <p:nvGraphicFramePr>
+          <p:cNvPr id="4" name="Table 3">
+            <a:extLst>
+              <a:ext uri="{FF2B5EF4-FFF2-40B4-BE49-F238E27FC236}">
+                <a16:creationId xmlns:a16="http://schemas.microsoft.com/office/drawing/2014/main" id="{F60D15EA-778D-05EC-B96F-D7585E1D7678}"/>
+              </a:ext>
+            </a:extLst>
+          </p:cNvPr>
+          <p:cNvGraphicFramePr>
+            <a:graphicFrameLocks noGrp="1"/>
+          </p:cNvGraphicFramePr>
+          <p:nvPr>
+            <p:extLst>
+              <p:ext uri="{D42A27DB-BD31-4B8C-83A1-F6EECF244321}">
+                <p14:modId xmlns:p14="http://schemas.microsoft.com/office/powerpoint/2010/main" val="3185407409"/>
+              </p:ext>
+            </p:extLst>
+          </p:nvPr>
+        </p:nvGraphicFramePr>
+        <p:xfrm>
+          <a:off x="1032568" y="4648849"/>
+          <a:ext cx="1353444" cy="518160"/>
+        </p:xfrm>
+        <a:graphic>
+          <a:graphicData uri="http://schemas.openxmlformats.org/drawingml/2006/table">
+            <a:tbl>
+              <a:tblPr firstRow="1" bandRow="1">
+                <a:tableStyleId>{2D5ABB26-0587-4C30-8999-92F81FD0307C}</a:tableStyleId>
+              </a:tblPr>
+              <a:tblGrid>
+                <a:gridCol w="339031">
+                  <a:extLst>
+                    <a:ext uri="{9D8B030D-6E8A-4147-A177-3AD203B41FA5}">
+                      <a16:colId xmlns:a16="http://schemas.microsoft.com/office/drawing/2014/main" val="3255514871"/>
+                    </a:ext>
+                  </a:extLst>
+                </a:gridCol>
+                <a:gridCol w="1014413">
+                  <a:extLst>
+                    <a:ext uri="{9D8B030D-6E8A-4147-A177-3AD203B41FA5}">
+                      <a16:colId xmlns:a16="http://schemas.microsoft.com/office/drawing/2014/main" val="627946117"/>
+                    </a:ext>
+                  </a:extLst>
+                </a:gridCol>
+              </a:tblGrid>
+              <a:tr h="370840">
+                <a:tc>
+                  <a:txBody>
+                    <a:bodyPr/>
+                    <a:lstStyle/>
+                    <a:p>
+                      <a:pPr marL="0" marR="0" lvl="0" indent="0" algn="l" defTabSz="914400" rtl="0" eaLnBrk="1" fontAlgn="auto" latinLnBrk="0" hangingPunct="1">
+                        <a:lnSpc>
+                          <a:spcPct val="100000"/>
+                        </a:lnSpc>
+                        <a:spcBef>
+                          <a:spcPts val="0"/>
+                        </a:spcBef>
+                        <a:spcAft>
+                          <a:spcPts val="0"/>
+                        </a:spcAft>
+                        <a:buClrTx/>
+                        <a:buSzTx/>
+                        <a:buFontTx/>
+                        <a:buNone/>
+                        <a:tabLst/>
+                        <a:defRPr/>
+                      </a:pPr>
+                      <a:r>
+                        <a:rPr lang="en-US" sz="1800" b="1" i="1" baseline="0" dirty="0"/>
+                        <a:t>* </a:t>
+                      </a:r>
+                      <a:endParaRPr lang="en-US" sz="1400" b="1" i="1" baseline="0" dirty="0"/>
+                    </a:p>
+                  </a:txBody>
+                  <a:tcPr marL="45720" marR="45720">
+                    <a:lnL>
+                      <a:noFill/>
+                    </a:lnL>
+                    <a:lnR>
+                      <a:noFill/>
+                    </a:lnR>
+                    <a:lnT w="12700" cap="flat" cmpd="sng" algn="ctr">
+                      <a:noFill/>
+                      <a:prstDash val="solid"/>
+                      <a:round/>
+                      <a:headEnd type="none" w="med" len="med"/>
+                      <a:tailEnd type="none" w="med" len="med"/>
+                    </a:lnT>
+                    <a:lnB>
+                      <a:noFill/>
+                    </a:lnB>
+                    <a:lnTlToBr w="12700" cmpd="sng">
+                      <a:noFill/>
+                      <a:prstDash val="solid"/>
+                    </a:lnTlToBr>
+                    <a:lnBlToTr w="12700" cmpd="sng">
+                      <a:noFill/>
+                      <a:prstDash val="solid"/>
+                    </a:lnBlToTr>
+                  </a:tcPr>
+                </a:tc>
+                <a:tc>
+                  <a:txBody>
+                    <a:bodyPr/>
+                    <a:lstStyle/>
+                    <a:p>
+                      <a:r>
+                        <a:rPr lang="en-US" sz="1400" i="1" dirty="0"/>
+                        <a:t>Pick two</a:t>
+                      </a:r>
+                      <a:br>
+                        <a:rPr lang="en-US" sz="1400" i="1" dirty="0"/>
+                      </a:br>
+                      <a:r>
+                        <a:rPr lang="en-US" sz="1400" i="1" dirty="0"/>
+                        <a:t>for maps</a:t>
+                      </a:r>
+                    </a:p>
+                  </a:txBody>
+                  <a:tcPr marL="45720" marR="45720">
+                    <a:lnL>
+                      <a:noFill/>
+                    </a:lnL>
+                    <a:lnR>
+                      <a:noFill/>
+                    </a:lnR>
+                    <a:lnT>
+                      <a:noFill/>
+                    </a:lnT>
+                    <a:lnB>
+                      <a:noFill/>
+                    </a:lnB>
+                    <a:lnTlToBr w="12700" cmpd="sng">
+                      <a:noFill/>
+                      <a:prstDash val="solid"/>
+                    </a:lnTlToBr>
+                    <a:lnBlToTr w="12700" cmpd="sng">
+                      <a:noFill/>
+                      <a:prstDash val="solid"/>
+                    </a:lnBlToTr>
+                  </a:tcPr>
+                </a:tc>
+                <a:extLst>
+                  <a:ext uri="{0D108BD9-81ED-4DB2-BD59-A6C34878D82A}">
+                    <a16:rowId xmlns:a16="http://schemas.microsoft.com/office/drawing/2014/main" val="2369994956"/>
+                  </a:ext>
+                </a:extLst>
+              </a:tr>
+            </a:tbl>
+          </a:graphicData>
+        </a:graphic>
+      </p:graphicFrame>
+      <p:cxnSp>
+        <p:nvCxnSpPr>
+          <p:cNvPr id="6" name="Straight Connector 5">
+            <a:extLst>
+              <a:ext uri="{FF2B5EF4-FFF2-40B4-BE49-F238E27FC236}">
+                <a16:creationId xmlns:a16="http://schemas.microsoft.com/office/drawing/2014/main" id="{FBC222FD-97C5-4176-B56B-FA9332F7BEBF}"/>
+              </a:ext>
+            </a:extLst>
+          </p:cNvPr>
+          <p:cNvCxnSpPr>
+            <a:endCxn id="4" idx="0"/>
+          </p:cNvCxnSpPr>
+          <p:nvPr/>
+        </p:nvCxnSpPr>
+        <p:spPr>
+          <a:xfrm>
+            <a:off x="1031513" y="4648849"/>
+            <a:ext cx="677777" cy="0"/>
+          </a:xfrm>
+          <a:prstGeom prst="line">
+            <a:avLst/>
+          </a:prstGeom>
+          <a:ln w="12700">
+            <a:solidFill>
+              <a:schemeClr val="tx1"/>
+            </a:solidFill>
+          </a:ln>
+        </p:spPr>
+        <p:style>
+          <a:lnRef idx="2">
+            <a:schemeClr val="accent1"/>
+          </a:lnRef>
+          <a:fillRef idx="0">
+            <a:schemeClr val="accent1"/>
+          </a:fillRef>
+          <a:effectRef idx="1">
+            <a:schemeClr val="accent1"/>
+          </a:effectRef>
+          <a:fontRef idx="minor">
+            <a:schemeClr val="tx1"/>
+          </a:fontRef>
+        </p:style>
+      </p:cxnSp>
     </p:spTree>
   </p:cSld>
   <p:clrMapOvr>

--- a/RefactorToEcIntro.pptx
+++ b/RefactorToEcIntro.pptx
@@ -5,7 +5,7 @@
     <p:sldMasterId id="2147483648" r:id="rId1"/>
   </p:sldMasterIdLst>
   <p:notesMasterIdLst>
-    <p:notesMasterId r:id="rId22"/>
+    <p:notesMasterId r:id="rId23"/>
   </p:notesMasterIdLst>
   <p:sldIdLst>
     <p:sldId id="334" r:id="rId2"/>
@@ -13,21 +13,22 @@
     <p:sldId id="258" r:id="rId4"/>
     <p:sldId id="259" r:id="rId5"/>
     <p:sldId id="260" r:id="rId6"/>
-    <p:sldId id="338" r:id="rId7"/>
-    <p:sldId id="261" r:id="rId8"/>
-    <p:sldId id="267" r:id="rId9"/>
-    <p:sldId id="263" r:id="rId10"/>
-    <p:sldId id="335" r:id="rId11"/>
-    <p:sldId id="270" r:id="rId12"/>
-    <p:sldId id="271" r:id="rId13"/>
-    <p:sldId id="264" r:id="rId14"/>
-    <p:sldId id="333" r:id="rId15"/>
-    <p:sldId id="308" r:id="rId16"/>
-    <p:sldId id="309" r:id="rId17"/>
-    <p:sldId id="336" r:id="rId18"/>
-    <p:sldId id="339" r:id="rId19"/>
-    <p:sldId id="340" r:id="rId20"/>
-    <p:sldId id="341" r:id="rId21"/>
+    <p:sldId id="342" r:id="rId7"/>
+    <p:sldId id="338" r:id="rId8"/>
+    <p:sldId id="261" r:id="rId9"/>
+    <p:sldId id="343" r:id="rId10"/>
+    <p:sldId id="263" r:id="rId11"/>
+    <p:sldId id="344" r:id="rId12"/>
+    <p:sldId id="270" r:id="rId13"/>
+    <p:sldId id="271" r:id="rId14"/>
+    <p:sldId id="264" r:id="rId15"/>
+    <p:sldId id="333" r:id="rId16"/>
+    <p:sldId id="308" r:id="rId17"/>
+    <p:sldId id="309" r:id="rId18"/>
+    <p:sldId id="336" r:id="rId19"/>
+    <p:sldId id="339" r:id="rId20"/>
+    <p:sldId id="340" r:id="rId21"/>
+    <p:sldId id="341" r:id="rId22"/>
   </p:sldIdLst>
   <p:sldSz cx="12192000" cy="6858000"/>
   <p:notesSz cx="6858000" cy="9144000"/>
@@ -216,7 +217,7 @@
           <a:p>
             <a:fld id="{8CCF7272-9B1D-4C9A-BAA4-A2C3BF62B1D2}" type="datetimeFigureOut">
               <a:rPr lang="en-US" smtClean="0"/>
-              <a:t>9/23/2025</a:t>
+              <a:t>9/24/2025</a:t>
             </a:fld>
             <a:endParaRPr lang="en-US"/>
           </a:p>
@@ -614,7 +615,7 @@
           <a:p>
             <a:fld id="{3009100B-F611-4B83-9AF4-01D82287C5E3}" type="slidenum">
               <a:rPr lang="en-US" smtClean="0"/>
-              <a:t>14</a:t>
+              <a:t>15</a:t>
             </a:fld>
             <a:endParaRPr lang="en-US"/>
           </a:p>
@@ -780,7 +781,7 @@
           <a:p>
             <a:fld id="{A978A291-C87E-4583-AB2D-5CAEB7F4C3DE}" type="datetime1">
               <a:rPr lang="en-US" smtClean="0"/>
-              <a:t>9/23/2025</a:t>
+              <a:t>9/24/2025</a:t>
             </a:fld>
             <a:endParaRPr lang="en-US"/>
           </a:p>
@@ -978,7 +979,7 @@
           <a:p>
             <a:fld id="{D9948513-3721-474C-BE80-7871409E66CD}" type="datetime1">
               <a:rPr lang="en-US" smtClean="0"/>
-              <a:t>9/23/2025</a:t>
+              <a:t>9/24/2025</a:t>
             </a:fld>
             <a:endParaRPr lang="en-US"/>
           </a:p>
@@ -1186,7 +1187,7 @@
           <a:p>
             <a:fld id="{9C3FEB91-5253-4CC2-B144-C35513BB77D7}" type="datetime1">
               <a:rPr lang="en-US" smtClean="0"/>
-              <a:t>9/23/2025</a:t>
+              <a:t>9/24/2025</a:t>
             </a:fld>
             <a:endParaRPr lang="en-US"/>
           </a:p>
@@ -1384,7 +1385,7 @@
           <a:p>
             <a:fld id="{09779B33-F1DD-498D-93C7-6B8EC548F6D2}" type="datetime1">
               <a:rPr lang="en-US" smtClean="0"/>
-              <a:t>9/23/2025</a:t>
+              <a:t>9/24/2025</a:t>
             </a:fld>
             <a:endParaRPr lang="en-US"/>
           </a:p>
@@ -1694,7 +1695,7 @@
           <a:p>
             <a:fld id="{6820CCE4-48AB-4521-B222-52BFE717148C}" type="datetime1">
               <a:rPr lang="en-US" smtClean="0"/>
-              <a:t>9/23/2025</a:t>
+              <a:t>9/24/2025</a:t>
             </a:fld>
             <a:endParaRPr lang="en-US"/>
           </a:p>
@@ -1959,7 +1960,7 @@
           <a:p>
             <a:fld id="{A3A19DA7-183B-4551-9BD3-7C8E51B9184E}" type="datetime1">
               <a:rPr lang="en-US" smtClean="0"/>
-              <a:t>9/23/2025</a:t>
+              <a:t>9/24/2025</a:t>
             </a:fld>
             <a:endParaRPr lang="en-US"/>
           </a:p>
@@ -2371,7 +2372,7 @@
           <a:p>
             <a:fld id="{4A926BFC-E9D5-40BE-8176-572BC6F88714}" type="datetime1">
               <a:rPr lang="en-US" smtClean="0"/>
-              <a:t>9/23/2025</a:t>
+              <a:t>9/24/2025</a:t>
             </a:fld>
             <a:endParaRPr lang="en-US"/>
           </a:p>
@@ -2512,7 +2513,7 @@
           <a:p>
             <a:fld id="{605F6A97-0388-4AFE-AA88-9F8EE659E9FB}" type="datetime1">
               <a:rPr lang="en-US" smtClean="0"/>
-              <a:t>9/23/2025</a:t>
+              <a:t>9/24/2025</a:t>
             </a:fld>
             <a:endParaRPr lang="en-US"/>
           </a:p>
@@ -2660,7 +2661,7 @@
           <a:p>
             <a:fld id="{97CBCB5A-D4E0-47ED-AB71-73E5049E5258}" type="datetime1">
               <a:rPr lang="en-US" smtClean="0"/>
-              <a:t>9/23/2025</a:t>
+              <a:t>9/24/2025</a:t>
             </a:fld>
             <a:endParaRPr lang="en-US"/>
           </a:p>
@@ -2971,7 +2972,7 @@
           <a:p>
             <a:fld id="{62FB721B-115B-4B8B-AFC8-140F455CE774}" type="datetime1">
               <a:rPr lang="en-US" smtClean="0"/>
-              <a:t>9/23/2025</a:t>
+              <a:t>9/24/2025</a:t>
             </a:fld>
             <a:endParaRPr lang="en-US"/>
           </a:p>
@@ -3259,7 +3260,7 @@
           <a:p>
             <a:fld id="{E32E6149-AA0E-47F5-B01B-3D90BEF64480}" type="datetime1">
               <a:rPr lang="en-US" smtClean="0"/>
-              <a:t>9/23/2025</a:t>
+              <a:t>9/24/2025</a:t>
             </a:fld>
             <a:endParaRPr lang="en-US"/>
           </a:p>
@@ -3501,7 +3502,7 @@
           <a:p>
             <a:fld id="{B9BE06C6-629D-4C3F-AD68-BEBDFC283B8F}" type="datetime1">
               <a:rPr lang="en-US" smtClean="0"/>
-              <a:t>9/23/2025</a:t>
+              <a:t>9/24/2025</a:t>
             </a:fld>
             <a:endParaRPr lang="en-US"/>
           </a:p>
@@ -4225,7 +4226,7 @@
           </a:ln>
           <a:extLst>
             <a:ext uri="{C572A759-6A51-4108-AA02-DFA0A04FC94B}">
-              <ma14:wrappingTextBoxFlag xmlns:ma14="http://schemas.microsoft.com/office/mac/drawingml/2011/main" xmlns="" val="1"/>
+              <ma14:wrappingTextBoxFlag xmlns="" xmlns:ma14="http://schemas.microsoft.com/office/mac/drawingml/2011/main" val="1"/>
             </a:ext>
           </a:extLst>
         </p:spPr>
@@ -4602,6 +4603,89 @@
       </p:grpSpPr>
       <p:sp>
         <p:nvSpPr>
+          <p:cNvPr id="295" name="Title 1"/>
+          <p:cNvSpPr txBox="1">
+            <a:spLocks noGrp="1"/>
+          </p:cNvSpPr>
+          <p:nvPr>
+            <p:ph type="title"/>
+          </p:nvPr>
+        </p:nvSpPr>
+        <p:spPr>
+          <a:xfrm>
+            <a:off x="838200" y="225379"/>
+            <a:ext cx="10515600" cy="792053"/>
+          </a:xfrm>
+          <a:prstGeom prst="rect">
+            <a:avLst/>
+          </a:prstGeom>
+        </p:spPr>
+        <p:txBody>
+          <a:bodyPr/>
+          <a:lstStyle/>
+          <a:p>
+            <a:r>
+              <a:t>Let’s Do It!</a:t>
+            </a:r>
+          </a:p>
+        </p:txBody>
+      </p:sp>
+      <p:sp>
+        <p:nvSpPr>
+          <p:cNvPr id="2" name="Slide Number Placeholder 1">
+            <a:extLst>
+              <a:ext uri="{FF2B5EF4-FFF2-40B4-BE49-F238E27FC236}">
+                <a16:creationId xmlns:a16="http://schemas.microsoft.com/office/drawing/2014/main" id="{1B7B5161-E119-F229-D991-9E4CD4DE9AAE}"/>
+              </a:ext>
+            </a:extLst>
+          </p:cNvPr>
+          <p:cNvSpPr>
+            <a:spLocks noGrp="1"/>
+          </p:cNvSpPr>
+          <p:nvPr>
+            <p:ph type="sldNum" sz="quarter" idx="12"/>
+          </p:nvPr>
+        </p:nvSpPr>
+        <p:spPr/>
+        <p:txBody>
+          <a:bodyPr/>
+          <a:lstStyle/>
+          <a:p>
+            <a:fld id="{6874CE7D-5D74-4EC3-A871-8F42005EC53C}" type="slidenum">
+              <a:rPr lang="en-US" smtClean="0"/>
+              <a:t>10</a:t>
+            </a:fld>
+            <a:endParaRPr lang="en-US"/>
+          </a:p>
+        </p:txBody>
+      </p:sp>
+    </p:spTree>
+  </p:cSld>
+  <p:clrMapOvr>
+    <a:masterClrMapping/>
+  </p:clrMapOvr>
+</p:sld>
+</file>
+
+<file path=ppt/slides/slide11.xml><?xml version="1.0" encoding="utf-8"?>
+<p:sld xmlns:a="http://schemas.openxmlformats.org/drawingml/2006/main" xmlns:r="http://schemas.openxmlformats.org/officeDocument/2006/relationships" xmlns:p="http://schemas.openxmlformats.org/presentationml/2006/main">
+  <p:cSld>
+    <p:spTree>
+      <p:nvGrpSpPr>
+        <p:cNvPr id="1" name=""/>
+        <p:cNvGrpSpPr/>
+        <p:nvPr/>
+      </p:nvGrpSpPr>
+      <p:grpSpPr>
+        <a:xfrm>
+          <a:off x="0" y="0"/>
+          <a:ext cx="0" cy="0"/>
+          <a:chOff x="0" y="0"/>
+          <a:chExt cx="0" cy="0"/>
+        </a:xfrm>
+      </p:grpSpPr>
+      <p:sp>
+        <p:nvSpPr>
           <p:cNvPr id="4" name="Title 3">
             <a:extLst>
               <a:ext uri="{FF2B5EF4-FFF2-40B4-BE49-F238E27FC236}">
@@ -4649,7 +4733,7 @@
         <p:spPr/>
         <p:txBody>
           <a:bodyPr>
-            <a:normAutofit lnSpcReduction="10000"/>
+            <a:normAutofit fontScale="92500" lnSpcReduction="10000"/>
           </a:bodyPr>
           <a:lstStyle/>
           <a:p>
@@ -5001,12 +5085,36 @@
               </a:rPr>
               <a:t>: </a:t>
             </a:r>
+          </a:p>
+          <a:p>
+            <a:pPr lvl="2">
+              <a:lnSpc>
+                <a:spcPct val="120000"/>
+              </a:lnSpc>
+            </a:pPr>
             <a:r>
               <a:rPr lang="en-US" u="sng" dirty="0">
                 <a:latin typeface="Aptos" panose="020B0004020202020204" pitchFamily="34" charset="0"/>
                 <a:hlinkClick r:id="rId4"/>
               </a:rPr>
               <a:t>Does Java Object Layout work with Java Records?</a:t>
+            </a:r>
+            <a:endParaRPr lang="en-US" u="sng" dirty="0">
+              <a:latin typeface="Aptos" panose="020B0004020202020204" pitchFamily="34" charset="0"/>
+            </a:endParaRPr>
+          </a:p>
+          <a:p>
+            <a:pPr lvl="2">
+              <a:lnSpc>
+                <a:spcPct val="120000"/>
+              </a:lnSpc>
+            </a:pPr>
+            <a:r>
+              <a:rPr lang="en-US" dirty="0">
+                <a:latin typeface="Aptos" panose="020B0004020202020204" pitchFamily="34" charset="0"/>
+                <a:hlinkClick r:id="rId5"/>
+              </a:rPr>
+              <a:t>Does Java Object Layout (JOL) work with Java 25 and Compact Object Headers enabled?</a:t>
             </a:r>
             <a:endParaRPr lang="en-US" u="sng" dirty="0">
               <a:latin typeface="Aptos" panose="020B0004020202020204" pitchFamily="34" charset="0"/>
@@ -5105,7 +5213,7 @@
           <a:p>
             <a:fld id="{6874CE7D-5D74-4EC3-A871-8F42005EC53C}" type="slidenum">
               <a:rPr lang="en-US" smtClean="0"/>
-              <a:t>10</a:t>
+              <a:t>11</a:t>
             </a:fld>
             <a:endParaRPr lang="en-US"/>
           </a:p>
@@ -5114,7 +5222,7 @@
     </p:spTree>
     <p:extLst>
       <p:ext uri="{BB962C8B-B14F-4D97-AF65-F5344CB8AC3E}">
-        <p14:creationId xmlns:p14="http://schemas.microsoft.com/office/powerpoint/2010/main" val="2282349943"/>
+        <p14:creationId xmlns:p14="http://schemas.microsoft.com/office/powerpoint/2010/main" val="3965208180"/>
       </p:ext>
     </p:extLst>
   </p:cSld>
@@ -5124,7 +5232,7 @@
 </p:sld>
 </file>
 
-<file path=ppt/slides/slide11.xml><?xml version="1.0" encoding="utf-8"?>
+<file path=ppt/slides/slide12.xml><?xml version="1.0" encoding="utf-8"?>
 <p:sld xmlns:a="http://schemas.openxmlformats.org/drawingml/2006/main" xmlns:r="http://schemas.openxmlformats.org/officeDocument/2006/relationships" xmlns:p="http://schemas.openxmlformats.org/presentationml/2006/main">
   <p:cSld>
     <p:spTree>
@@ -5293,7 +5401,7 @@
           <a:p>
             <a:fld id="{6874CE7D-5D74-4EC3-A871-8F42005EC53C}" type="slidenum">
               <a:rPr lang="en-US" smtClean="0"/>
-              <a:t>11</a:t>
+              <a:t>12</a:t>
             </a:fld>
             <a:endParaRPr lang="en-US"/>
           </a:p>
@@ -5312,7 +5420,7 @@
 </p:sld>
 </file>
 
-<file path=ppt/slides/slide12.xml><?xml version="1.0" encoding="utf-8"?>
+<file path=ppt/slides/slide13.xml><?xml version="1.0" encoding="utf-8"?>
 <p:sld xmlns:a="http://schemas.openxmlformats.org/drawingml/2006/main" xmlns:r="http://schemas.openxmlformats.org/officeDocument/2006/relationships" xmlns:p="http://schemas.openxmlformats.org/presentationml/2006/main">
   <p:cSld>
     <p:spTree>
@@ -5497,7 +5605,7 @@
           <a:p>
             <a:fld id="{6874CE7D-5D74-4EC3-A871-8F42005EC53C}" type="slidenum">
               <a:rPr lang="en-US" smtClean="0"/>
-              <a:t>12</a:t>
+              <a:t>13</a:t>
             </a:fld>
             <a:endParaRPr lang="en-US"/>
           </a:p>
@@ -5516,7 +5624,7 @@
 </p:sld>
 </file>
 
-<file path=ppt/slides/slide13.xml><?xml version="1.0" encoding="utf-8"?>
+<file path=ppt/slides/slide14.xml><?xml version="1.0" encoding="utf-8"?>
 <p:sld xmlns:a="http://schemas.openxmlformats.org/drawingml/2006/main" xmlns:r="http://schemas.openxmlformats.org/officeDocument/2006/relationships" xmlns:p="http://schemas.openxmlformats.org/presentationml/2006/main">
   <p:cSld>
     <p:spTree>
@@ -5691,7 +5799,7 @@
           <a:p>
             <a:fld id="{6874CE7D-5D74-4EC3-A871-8F42005EC53C}" type="slidenum">
               <a:rPr lang="en-US" smtClean="0"/>
-              <a:t>13</a:t>
+              <a:t>14</a:t>
             </a:fld>
             <a:endParaRPr lang="en-US"/>
           </a:p>
@@ -5705,7 +5813,7 @@
 </p:sld>
 </file>
 
-<file path=ppt/slides/slide14.xml><?xml version="1.0" encoding="utf-8"?>
+<file path=ppt/slides/slide15.xml><?xml version="1.0" encoding="utf-8"?>
 <p:sld xmlns:a="http://schemas.openxmlformats.org/drawingml/2006/main" xmlns:r="http://schemas.openxmlformats.org/officeDocument/2006/relationships" xmlns:p="http://schemas.openxmlformats.org/presentationml/2006/main">
   <p:cSld>
     <p:spTree>
@@ -9329,7 +9437,7 @@
           <a:p>
             <a:fld id="{6874CE7D-5D74-4EC3-A871-8F42005EC53C}" type="slidenum">
               <a:rPr lang="en-US" smtClean="0"/>
-              <a:t>14</a:t>
+              <a:t>15</a:t>
             </a:fld>
             <a:endParaRPr lang="en-US"/>
           </a:p>
@@ -9348,7 +9456,7 @@
 </p:sld>
 </file>
 
-<file path=ppt/slides/slide15.xml><?xml version="1.0" encoding="utf-8"?>
+<file path=ppt/slides/slide16.xml><?xml version="1.0" encoding="utf-8"?>
 <p:sld xmlns:a="http://schemas.openxmlformats.org/drawingml/2006/main" xmlns:r="http://schemas.openxmlformats.org/officeDocument/2006/relationships" xmlns:p="http://schemas.openxmlformats.org/presentationml/2006/main">
   <p:cSld>
     <p:spTree>
@@ -9557,7 +9665,7 @@
           <a:p>
             <a:fld id="{6874CE7D-5D74-4EC3-A871-8F42005EC53C}" type="slidenum">
               <a:rPr lang="en-US" smtClean="0"/>
-              <a:t>15</a:t>
+              <a:t>16</a:t>
             </a:fld>
             <a:endParaRPr lang="en-US"/>
           </a:p>
@@ -9576,7 +9684,7 @@
 </p:sld>
 </file>
 
-<file path=ppt/slides/slide16.xml><?xml version="1.0" encoding="utf-8"?>
+<file path=ppt/slides/slide17.xml><?xml version="1.0" encoding="utf-8"?>
 <p:sld xmlns:a="http://schemas.openxmlformats.org/drawingml/2006/main" xmlns:r="http://schemas.openxmlformats.org/officeDocument/2006/relationships" xmlns:p="http://schemas.openxmlformats.org/presentationml/2006/main">
   <p:cSld>
     <p:spTree>
@@ -9785,7 +9893,7 @@
           <a:p>
             <a:fld id="{6874CE7D-5D74-4EC3-A871-8F42005EC53C}" type="slidenum">
               <a:rPr lang="en-US" smtClean="0"/>
-              <a:t>16</a:t>
+              <a:t>17</a:t>
             </a:fld>
             <a:endParaRPr lang="en-US"/>
           </a:p>
@@ -9804,7 +9912,7 @@
 </p:sld>
 </file>
 
-<file path=ppt/slides/slide17.xml><?xml version="1.0" encoding="utf-8"?>
+<file path=ppt/slides/slide18.xml><?xml version="1.0" encoding="utf-8"?>
 <p:sld xmlns:a="http://schemas.openxmlformats.org/drawingml/2006/main" xmlns:r="http://schemas.openxmlformats.org/officeDocument/2006/relationships" xmlns:p="http://schemas.openxmlformats.org/presentationml/2006/main">
   <p:cSld>
     <p:spTree>
@@ -10083,7 +10191,7 @@
 </p:sld>
 </file>
 
-<file path=ppt/slides/slide18.xml><?xml version="1.0" encoding="utf-8"?>
+<file path=ppt/slides/slide19.xml><?xml version="1.0" encoding="utf-8"?>
 <p:sld xmlns:a="http://schemas.openxmlformats.org/drawingml/2006/main" xmlns:r="http://schemas.openxmlformats.org/officeDocument/2006/relationships" xmlns:p="http://schemas.openxmlformats.org/presentationml/2006/main">
   <p:cSld>
     <p:spTree>
@@ -10176,7 +10284,7 @@
           <a:p>
             <a:fld id="{6874CE7D-5D74-4EC3-A871-8F42005EC53C}" type="slidenum">
               <a:rPr lang="en-US" smtClean="0"/>
-              <a:t>18</a:t>
+              <a:t>19</a:t>
             </a:fld>
             <a:endParaRPr lang="en-US"/>
           </a:p>
@@ -10186,129 +10294,6 @@
     <p:extLst>
       <p:ext uri="{BB962C8B-B14F-4D97-AF65-F5344CB8AC3E}">
         <p14:creationId xmlns:p14="http://schemas.microsoft.com/office/powerpoint/2010/main" val="1671047315"/>
-      </p:ext>
-    </p:extLst>
-  </p:cSld>
-  <p:clrMapOvr>
-    <a:masterClrMapping/>
-  </p:clrMapOvr>
-</p:sld>
-</file>
-
-<file path=ppt/slides/slide19.xml><?xml version="1.0" encoding="utf-8"?>
-<p:sld xmlns:a="http://schemas.openxmlformats.org/drawingml/2006/main" xmlns:r="http://schemas.openxmlformats.org/officeDocument/2006/relationships" xmlns:p="http://schemas.openxmlformats.org/presentationml/2006/main">
-  <p:cSld>
-    <p:spTree>
-      <p:nvGrpSpPr>
-        <p:cNvPr id="1" name=""/>
-        <p:cNvGrpSpPr/>
-        <p:nvPr/>
-      </p:nvGrpSpPr>
-      <p:grpSpPr>
-        <a:xfrm>
-          <a:off x="0" y="0"/>
-          <a:ext cx="0" cy="0"/>
-          <a:chOff x="0" y="0"/>
-          <a:chExt cx="0" cy="0"/>
-        </a:xfrm>
-      </p:grpSpPr>
-      <p:sp>
-        <p:nvSpPr>
-          <p:cNvPr id="2" name="Title 1">
-            <a:extLst>
-              <a:ext uri="{FF2B5EF4-FFF2-40B4-BE49-F238E27FC236}">
-                <a16:creationId xmlns:a16="http://schemas.microsoft.com/office/drawing/2014/main" id="{8E2E84DA-2B31-7C3D-32A6-CB43E195CD34}"/>
-              </a:ext>
-            </a:extLst>
-          </p:cNvPr>
-          <p:cNvSpPr>
-            <a:spLocks noGrp="1"/>
-          </p:cNvSpPr>
-          <p:nvPr>
-            <p:ph type="title"/>
-          </p:nvPr>
-        </p:nvSpPr>
-        <p:spPr/>
-        <p:txBody>
-          <a:bodyPr/>
-          <a:lstStyle/>
-          <a:p>
-            <a:r>
-              <a:rPr lang="en-US" dirty="0"/>
-              <a:t>Eclipse Collections Set Type Hierarchy</a:t>
-            </a:r>
-          </a:p>
-        </p:txBody>
-      </p:sp>
-      <p:sp>
-        <p:nvSpPr>
-          <p:cNvPr id="3" name="Slide Number Placeholder 2">
-            <a:extLst>
-              <a:ext uri="{FF2B5EF4-FFF2-40B4-BE49-F238E27FC236}">
-                <a16:creationId xmlns:a16="http://schemas.microsoft.com/office/drawing/2014/main" id="{FFE17414-88B9-7453-18EB-ADCFD3F2BDAD}"/>
-              </a:ext>
-            </a:extLst>
-          </p:cNvPr>
-          <p:cNvSpPr>
-            <a:spLocks noGrp="1"/>
-          </p:cNvSpPr>
-          <p:nvPr>
-            <p:ph type="sldNum" sz="quarter" idx="12"/>
-          </p:nvPr>
-        </p:nvSpPr>
-        <p:spPr/>
-        <p:txBody>
-          <a:bodyPr/>
-          <a:lstStyle/>
-          <a:p>
-            <a:fld id="{6874CE7D-5D74-4EC3-A871-8F42005EC53C}" type="slidenum">
-              <a:rPr lang="en-US" smtClean="0"/>
-              <a:t>19</a:t>
-            </a:fld>
-            <a:endParaRPr lang="en-US"/>
-          </a:p>
-        </p:txBody>
-      </p:sp>
-      <p:pic>
-        <p:nvPicPr>
-          <p:cNvPr id="5" name="Picture 4" descr="A diagram of a network&#10;&#10;AI-generated content may be incorrect.">
-            <a:extLst>
-              <a:ext uri="{FF2B5EF4-FFF2-40B4-BE49-F238E27FC236}">
-                <a16:creationId xmlns:a16="http://schemas.microsoft.com/office/drawing/2014/main" id="{55D25964-79BD-1889-55AD-F66730D57785}"/>
-              </a:ext>
-            </a:extLst>
-          </p:cNvPr>
-          <p:cNvPicPr>
-            <a:picLocks noChangeAspect="1"/>
-          </p:cNvPicPr>
-          <p:nvPr/>
-        </p:nvPicPr>
-        <p:blipFill>
-          <a:blip r:embed="rId2">
-            <a:extLst>
-              <a:ext uri="{28A0092B-C50C-407E-A947-70E740481C1C}">
-                <a14:useLocalDpi xmlns:a14="http://schemas.microsoft.com/office/drawing/2010/main" val="0"/>
-              </a:ext>
-            </a:extLst>
-          </a:blip>
-          <a:stretch>
-            <a:fillRect/>
-          </a:stretch>
-        </p:blipFill>
-        <p:spPr>
-          <a:xfrm>
-            <a:off x="1357039" y="983330"/>
-            <a:ext cx="9477922" cy="5874670"/>
-          </a:xfrm>
-          <a:prstGeom prst="rect">
-            <a:avLst/>
-          </a:prstGeom>
-        </p:spPr>
-      </p:pic>
-    </p:spTree>
-    <p:extLst>
-      <p:ext uri="{BB962C8B-B14F-4D97-AF65-F5344CB8AC3E}">
-        <p14:creationId xmlns:p14="http://schemas.microsoft.com/office/powerpoint/2010/main" val="2631228176"/>
       </p:ext>
     </p:extLst>
   </p:cSld>
@@ -10648,6 +10633,129 @@
 </file>
 
 <file path=ppt/slides/slide20.xml><?xml version="1.0" encoding="utf-8"?>
+<p:sld xmlns:a="http://schemas.openxmlformats.org/drawingml/2006/main" xmlns:r="http://schemas.openxmlformats.org/officeDocument/2006/relationships" xmlns:p="http://schemas.openxmlformats.org/presentationml/2006/main">
+  <p:cSld>
+    <p:spTree>
+      <p:nvGrpSpPr>
+        <p:cNvPr id="1" name=""/>
+        <p:cNvGrpSpPr/>
+        <p:nvPr/>
+      </p:nvGrpSpPr>
+      <p:grpSpPr>
+        <a:xfrm>
+          <a:off x="0" y="0"/>
+          <a:ext cx="0" cy="0"/>
+          <a:chOff x="0" y="0"/>
+          <a:chExt cx="0" cy="0"/>
+        </a:xfrm>
+      </p:grpSpPr>
+      <p:sp>
+        <p:nvSpPr>
+          <p:cNvPr id="2" name="Title 1">
+            <a:extLst>
+              <a:ext uri="{FF2B5EF4-FFF2-40B4-BE49-F238E27FC236}">
+                <a16:creationId xmlns:a16="http://schemas.microsoft.com/office/drawing/2014/main" id="{8E2E84DA-2B31-7C3D-32A6-CB43E195CD34}"/>
+              </a:ext>
+            </a:extLst>
+          </p:cNvPr>
+          <p:cNvSpPr>
+            <a:spLocks noGrp="1"/>
+          </p:cNvSpPr>
+          <p:nvPr>
+            <p:ph type="title"/>
+          </p:nvPr>
+        </p:nvSpPr>
+        <p:spPr/>
+        <p:txBody>
+          <a:bodyPr/>
+          <a:lstStyle/>
+          <a:p>
+            <a:r>
+              <a:rPr lang="en-US" dirty="0"/>
+              <a:t>Eclipse Collections Set Type Hierarchy</a:t>
+            </a:r>
+          </a:p>
+        </p:txBody>
+      </p:sp>
+      <p:sp>
+        <p:nvSpPr>
+          <p:cNvPr id="3" name="Slide Number Placeholder 2">
+            <a:extLst>
+              <a:ext uri="{FF2B5EF4-FFF2-40B4-BE49-F238E27FC236}">
+                <a16:creationId xmlns:a16="http://schemas.microsoft.com/office/drawing/2014/main" id="{FFE17414-88B9-7453-18EB-ADCFD3F2BDAD}"/>
+              </a:ext>
+            </a:extLst>
+          </p:cNvPr>
+          <p:cNvSpPr>
+            <a:spLocks noGrp="1"/>
+          </p:cNvSpPr>
+          <p:nvPr>
+            <p:ph type="sldNum" sz="quarter" idx="12"/>
+          </p:nvPr>
+        </p:nvSpPr>
+        <p:spPr/>
+        <p:txBody>
+          <a:bodyPr/>
+          <a:lstStyle/>
+          <a:p>
+            <a:fld id="{6874CE7D-5D74-4EC3-A871-8F42005EC53C}" type="slidenum">
+              <a:rPr lang="en-US" smtClean="0"/>
+              <a:t>20</a:t>
+            </a:fld>
+            <a:endParaRPr lang="en-US"/>
+          </a:p>
+        </p:txBody>
+      </p:sp>
+      <p:pic>
+        <p:nvPicPr>
+          <p:cNvPr id="5" name="Picture 4" descr="A diagram of a network&#10;&#10;AI-generated content may be incorrect.">
+            <a:extLst>
+              <a:ext uri="{FF2B5EF4-FFF2-40B4-BE49-F238E27FC236}">
+                <a16:creationId xmlns:a16="http://schemas.microsoft.com/office/drawing/2014/main" id="{55D25964-79BD-1889-55AD-F66730D57785}"/>
+              </a:ext>
+            </a:extLst>
+          </p:cNvPr>
+          <p:cNvPicPr>
+            <a:picLocks noChangeAspect="1"/>
+          </p:cNvPicPr>
+          <p:nvPr/>
+        </p:nvPicPr>
+        <p:blipFill>
+          <a:blip r:embed="rId2">
+            <a:extLst>
+              <a:ext uri="{28A0092B-C50C-407E-A947-70E740481C1C}">
+                <a14:useLocalDpi xmlns:a14="http://schemas.microsoft.com/office/drawing/2010/main" val="0"/>
+              </a:ext>
+            </a:extLst>
+          </a:blip>
+          <a:stretch>
+            <a:fillRect/>
+          </a:stretch>
+        </p:blipFill>
+        <p:spPr>
+          <a:xfrm>
+            <a:off x="1357039" y="983330"/>
+            <a:ext cx="9477922" cy="5874670"/>
+          </a:xfrm>
+          <a:prstGeom prst="rect">
+            <a:avLst/>
+          </a:prstGeom>
+        </p:spPr>
+      </p:pic>
+    </p:spTree>
+    <p:extLst>
+      <p:ext uri="{BB962C8B-B14F-4D97-AF65-F5344CB8AC3E}">
+        <p14:creationId xmlns:p14="http://schemas.microsoft.com/office/powerpoint/2010/main" val="2631228176"/>
+      </p:ext>
+    </p:extLst>
+  </p:cSld>
+  <p:clrMapOvr>
+    <a:masterClrMapping/>
+  </p:clrMapOvr>
+</p:sld>
+</file>
+
+<file path=ppt/slides/slide21.xml><?xml version="1.0" encoding="utf-8"?>
 <p:sld xmlns:a="http://schemas.openxmlformats.org/drawingml/2006/main" xmlns:r="http://schemas.openxmlformats.org/officeDocument/2006/relationships" xmlns:p="http://schemas.openxmlformats.org/presentationml/2006/main">
   <p:cSld>
     <p:spTree>
@@ -10761,7 +10869,7 @@
           <a:p>
             <a:fld id="{6874CE7D-5D74-4EC3-A871-8F42005EC53C}" type="slidenum">
               <a:rPr lang="en-US" smtClean="0"/>
-              <a:t>20</a:t>
+              <a:t>21</a:t>
             </a:fld>
             <a:endParaRPr lang="en-US"/>
           </a:p>
@@ -11372,7 +11480,7 @@
             <a:effectLst/>
             <a:extLst>
               <a:ext uri="{C572A759-6A51-4108-AA02-DFA0A04FC94B}">
-                <ma14:wrappingTextBoxFlag xmlns:ma14="http://schemas.microsoft.com/office/mac/drawingml/2011/main" xmlns="" val="1"/>
+                <ma14:wrappingTextBoxFlag xmlns="" xmlns:ma14="http://schemas.microsoft.com/office/mac/drawingml/2011/main" val="1"/>
               </a:ext>
             </a:extLst>
           </p:spPr>
@@ -11475,7 +11583,7 @@
             <a:effectLst/>
             <a:extLst>
               <a:ext uri="{C572A759-6A51-4108-AA02-DFA0A04FC94B}">
-                <ma14:wrappingTextBoxFlag xmlns:ma14="http://schemas.microsoft.com/office/mac/drawingml/2011/main" xmlns="" val="1"/>
+                <ma14:wrappingTextBoxFlag xmlns="" xmlns:ma14="http://schemas.microsoft.com/office/mac/drawingml/2011/main" val="1"/>
               </a:ext>
             </a:extLst>
           </p:spPr>
@@ -11579,7 +11687,7 @@
             <a:effectLst/>
             <a:extLst>
               <a:ext uri="{C572A759-6A51-4108-AA02-DFA0A04FC94B}">
-                <ma14:wrappingTextBoxFlag xmlns:ma14="http://schemas.microsoft.com/office/mac/drawingml/2011/main" xmlns="" val="1"/>
+                <ma14:wrappingTextBoxFlag xmlns="" xmlns:ma14="http://schemas.microsoft.com/office/mac/drawingml/2011/main" val="1"/>
               </a:ext>
             </a:extLst>
           </p:spPr>
@@ -11682,7 +11790,7 @@
             <a:effectLst/>
             <a:extLst>
               <a:ext uri="{C572A759-6A51-4108-AA02-DFA0A04FC94B}">
-                <ma14:wrappingTextBoxFlag xmlns:ma14="http://schemas.microsoft.com/office/mac/drawingml/2011/main" xmlns="" val="1"/>
+                <ma14:wrappingTextBoxFlag xmlns="" xmlns:ma14="http://schemas.microsoft.com/office/mac/drawingml/2011/main" val="1"/>
               </a:ext>
             </a:extLst>
           </p:spPr>
@@ -11785,7 +11893,7 @@
             <a:effectLst/>
             <a:extLst>
               <a:ext uri="{C572A759-6A51-4108-AA02-DFA0A04FC94B}">
-                <ma14:wrappingTextBoxFlag xmlns:ma14="http://schemas.microsoft.com/office/mac/drawingml/2011/main" xmlns="" val="1"/>
+                <ma14:wrappingTextBoxFlag xmlns="" xmlns:ma14="http://schemas.microsoft.com/office/mac/drawingml/2011/main" val="1"/>
               </a:ext>
             </a:extLst>
           </p:spPr>
@@ -11893,7 +12001,7 @@
             <a:effectLst/>
             <a:extLst>
               <a:ext uri="{C572A759-6A51-4108-AA02-DFA0A04FC94B}">
-                <ma14:wrappingTextBoxFlag xmlns:ma14="http://schemas.microsoft.com/office/mac/drawingml/2011/main" xmlns="" val="1"/>
+                <ma14:wrappingTextBoxFlag xmlns="" xmlns:ma14="http://schemas.microsoft.com/office/mac/drawingml/2011/main" val="1"/>
               </a:ext>
             </a:extLst>
           </p:spPr>
@@ -11996,7 +12104,7 @@
             <a:effectLst/>
             <a:extLst>
               <a:ext uri="{C572A759-6A51-4108-AA02-DFA0A04FC94B}">
-                <ma14:wrappingTextBoxFlag xmlns:ma14="http://schemas.microsoft.com/office/mac/drawingml/2011/main" xmlns="" val="1"/>
+                <ma14:wrappingTextBoxFlag xmlns="" xmlns:ma14="http://schemas.microsoft.com/office/mac/drawingml/2011/main" val="1"/>
               </a:ext>
             </a:extLst>
           </p:spPr>
@@ -12099,7 +12207,7 @@
             <a:effectLst/>
             <a:extLst>
               <a:ext uri="{C572A759-6A51-4108-AA02-DFA0A04FC94B}">
-                <ma14:wrappingTextBoxFlag xmlns:ma14="http://schemas.microsoft.com/office/mac/drawingml/2011/main" xmlns="" val="1"/>
+                <ma14:wrappingTextBoxFlag xmlns="" xmlns:ma14="http://schemas.microsoft.com/office/mac/drawingml/2011/main" val="1"/>
               </a:ext>
             </a:extLst>
           </p:spPr>
@@ -12213,7 +12321,7 @@
             <a:effectLst/>
             <a:extLst>
               <a:ext uri="{C572A759-6A51-4108-AA02-DFA0A04FC94B}">
-                <ma14:wrappingTextBoxFlag xmlns:ma14="http://schemas.microsoft.com/office/mac/drawingml/2011/main" xmlns="" val="1"/>
+                <ma14:wrappingTextBoxFlag xmlns="" xmlns:ma14="http://schemas.microsoft.com/office/mac/drawingml/2011/main" val="1"/>
               </a:ext>
             </a:extLst>
           </p:spPr>
@@ -12426,7 +12534,7 @@
               <a:effectLst/>
               <a:extLst>
                 <a:ext uri="{C572A759-6A51-4108-AA02-DFA0A04FC94B}">
-                  <ma14:wrappingTextBoxFlag xmlns:ma14="http://schemas.microsoft.com/office/mac/drawingml/2011/main" xmlns="" val="1"/>
+                  <ma14:wrappingTextBoxFlag xmlns="" xmlns:ma14="http://schemas.microsoft.com/office/mac/drawingml/2011/main" val="1"/>
                 </a:ext>
               </a:extLst>
             </p:spPr>
@@ -12530,7 +12638,7 @@
             <a:effectLst/>
             <a:extLst>
               <a:ext uri="{C572A759-6A51-4108-AA02-DFA0A04FC94B}">
-                <ma14:wrappingTextBoxFlag xmlns:ma14="http://schemas.microsoft.com/office/mac/drawingml/2011/main" xmlns="" val="1"/>
+                <ma14:wrappingTextBoxFlag xmlns="" xmlns:ma14="http://schemas.microsoft.com/office/mac/drawingml/2011/main" val="1"/>
               </a:ext>
             </a:extLst>
           </p:spPr>
@@ -12633,7 +12741,7 @@
             <a:effectLst/>
             <a:extLst>
               <a:ext uri="{C572A759-6A51-4108-AA02-DFA0A04FC94B}">
-                <ma14:wrappingTextBoxFlag xmlns:ma14="http://schemas.microsoft.com/office/mac/drawingml/2011/main" xmlns="" val="1"/>
+                <ma14:wrappingTextBoxFlag xmlns="" xmlns:ma14="http://schemas.microsoft.com/office/mac/drawingml/2011/main" val="1"/>
               </a:ext>
             </a:extLst>
           </p:spPr>
@@ -12790,7 +12898,7 @@
               <a:effectLst/>
               <a:extLst>
                 <a:ext uri="{C572A759-6A51-4108-AA02-DFA0A04FC94B}">
-                  <ma14:wrappingTextBoxFlag xmlns:ma14="http://schemas.microsoft.com/office/mac/drawingml/2011/main" xmlns="" val="1"/>
+                  <ma14:wrappingTextBoxFlag xmlns="" xmlns:ma14="http://schemas.microsoft.com/office/mac/drawingml/2011/main" val="1"/>
                 </a:ext>
               </a:extLst>
             </p:spPr>
@@ -12948,7 +13056,7 @@
               <a:effectLst/>
               <a:extLst>
                 <a:ext uri="{C572A759-6A51-4108-AA02-DFA0A04FC94B}">
-                  <ma14:wrappingTextBoxFlag xmlns:ma14="http://schemas.microsoft.com/office/mac/drawingml/2011/main" xmlns="" val="1"/>
+                  <ma14:wrappingTextBoxFlag xmlns="" xmlns:ma14="http://schemas.microsoft.com/office/mac/drawingml/2011/main" val="1"/>
                 </a:ext>
               </a:extLst>
             </p:spPr>
@@ -13354,7 +13462,7 @@
               <a:effectLst/>
               <a:extLst>
                 <a:ext uri="{C572A759-6A51-4108-AA02-DFA0A04FC94B}">
-                  <ma14:wrappingTextBoxFlag xmlns:ma14="http://schemas.microsoft.com/office/mac/drawingml/2011/main" xmlns="" val="1"/>
+                  <ma14:wrappingTextBoxFlag xmlns="" xmlns:ma14="http://schemas.microsoft.com/office/mac/drawingml/2011/main" val="1"/>
                 </a:ext>
               </a:extLst>
             </p:spPr>
@@ -13515,7 +13623,7 @@
               <a:effectLst/>
               <a:extLst>
                 <a:ext uri="{C572A759-6A51-4108-AA02-DFA0A04FC94B}">
-                  <ma14:wrappingTextBoxFlag xmlns:ma14="http://schemas.microsoft.com/office/mac/drawingml/2011/main" xmlns="" val="1"/>
+                  <ma14:wrappingTextBoxFlag xmlns="" xmlns:ma14="http://schemas.microsoft.com/office/mac/drawingml/2011/main" val="1"/>
                 </a:ext>
               </a:extLst>
             </p:spPr>
@@ -13912,7 +14020,7 @@
               <a:effectLst/>
               <a:extLst>
                 <a:ext uri="{C572A759-6A51-4108-AA02-DFA0A04FC94B}">
-                  <ma14:wrappingTextBoxFlag xmlns:ma14="http://schemas.microsoft.com/office/mac/drawingml/2011/main" xmlns="" val="1"/>
+                  <ma14:wrappingTextBoxFlag xmlns="" xmlns:ma14="http://schemas.microsoft.com/office/mac/drawingml/2011/main" val="1"/>
                 </a:ext>
               </a:extLst>
             </p:spPr>
@@ -14130,7 +14238,7 @@
               <a:effectLst/>
               <a:extLst>
                 <a:ext uri="{C572A759-6A51-4108-AA02-DFA0A04FC94B}">
-                  <ma14:wrappingTextBoxFlag xmlns:ma14="http://schemas.microsoft.com/office/mac/drawingml/2011/main" xmlns="" val="1"/>
+                  <ma14:wrappingTextBoxFlag xmlns="" xmlns:ma14="http://schemas.microsoft.com/office/mac/drawingml/2011/main" val="1"/>
                 </a:ext>
               </a:extLst>
             </p:spPr>
@@ -14298,7 +14406,7 @@
               <a:effectLst/>
               <a:extLst>
                 <a:ext uri="{C572A759-6A51-4108-AA02-DFA0A04FC94B}">
-                  <ma14:wrappingTextBoxFlag xmlns:ma14="http://schemas.microsoft.com/office/mac/drawingml/2011/main" xmlns="" val="1"/>
+                  <ma14:wrappingTextBoxFlag xmlns="" xmlns:ma14="http://schemas.microsoft.com/office/mac/drawingml/2011/main" val="1"/>
                 </a:ext>
               </a:extLst>
             </p:spPr>
@@ -14918,7 +15026,7 @@
               <a:effectLst/>
               <a:extLst>
                 <a:ext uri="{C572A759-6A51-4108-AA02-DFA0A04FC94B}">
-                  <ma14:wrappingTextBoxFlag xmlns:ma14="http://schemas.microsoft.com/office/mac/drawingml/2011/main" xmlns="" val="1"/>
+                  <ma14:wrappingTextBoxFlag xmlns="" xmlns:ma14="http://schemas.microsoft.com/office/mac/drawingml/2011/main" val="1"/>
                 </a:ext>
               </a:extLst>
             </p:spPr>
@@ -14971,7 +15079,7 @@
           </a:ln>
           <a:extLst>
             <a:ext uri="{C572A759-6A51-4108-AA02-DFA0A04FC94B}">
-              <ma14:wrappingTextBoxFlag xmlns:ma14="http://schemas.microsoft.com/office/mac/drawingml/2011/main" xmlns="" val="1"/>
+              <ma14:wrappingTextBoxFlag xmlns="" xmlns:ma14="http://schemas.microsoft.com/office/mac/drawingml/2011/main" val="1"/>
             </a:ext>
           </a:extLst>
         </p:spPr>
@@ -16346,7 +16454,7 @@
           </a:ln>
           <a:extLst>
             <a:ext uri="{C572A759-6A51-4108-AA02-DFA0A04FC94B}">
-              <ma14:wrappingTextBoxFlag xmlns:ma14="http://schemas.microsoft.com/office/mac/drawingml/2011/main" xmlns="" val="1"/>
+              <ma14:wrappingTextBoxFlag xmlns="" xmlns:ma14="http://schemas.microsoft.com/office/mac/drawingml/2011/main" val="1"/>
             </a:ext>
           </a:extLst>
         </p:spPr>
@@ -16719,7 +16827,7 @@
           </a:ln>
           <a:extLst>
             <a:ext uri="{C572A759-6A51-4108-AA02-DFA0A04FC94B}">
-              <ma14:wrappingTextBoxFlag xmlns:ma14="http://schemas.microsoft.com/office/mac/drawingml/2011/main" xmlns="" val="1"/>
+              <ma14:wrappingTextBoxFlag xmlns="" xmlns:ma14="http://schemas.microsoft.com/office/mac/drawingml/2011/main" val="1"/>
             </a:ext>
           </a:extLst>
         </p:spPr>
@@ -16779,7 +16887,7 @@
           </a:ln>
           <a:extLst>
             <a:ext uri="{C572A759-6A51-4108-AA02-DFA0A04FC94B}">
-              <ma14:wrappingTextBoxFlag xmlns:ma14="http://schemas.microsoft.com/office/mac/drawingml/2011/main" xmlns="" val="1"/>
+              <ma14:wrappingTextBoxFlag xmlns="" xmlns:ma14="http://schemas.microsoft.com/office/mac/drawingml/2011/main" val="1"/>
             </a:ext>
           </a:extLst>
         </p:spPr>
@@ -17119,6 +17227,2103 @@
   <p:cSld>
     <p:spTree>
       <p:nvGrpSpPr>
+        <p:cNvPr id="1" name=""/>
+        <p:cNvGrpSpPr/>
+        <p:nvPr/>
+      </p:nvGrpSpPr>
+      <p:grpSpPr>
+        <a:xfrm>
+          <a:off x="0" y="0"/>
+          <a:ext cx="0" cy="0"/>
+          <a:chOff x="0" y="0"/>
+          <a:chExt cx="0" cy="0"/>
+        </a:xfrm>
+      </p:grpSpPr>
+      <p:sp>
+        <p:nvSpPr>
+          <p:cNvPr id="2" name="Title 1">
+            <a:extLst>
+              <a:ext uri="{FF2B5EF4-FFF2-40B4-BE49-F238E27FC236}">
+                <a16:creationId xmlns:a16="http://schemas.microsoft.com/office/drawing/2014/main" id="{60A49C69-FBAB-CF94-2FE5-04FF22B836A0}"/>
+              </a:ext>
+            </a:extLst>
+          </p:cNvPr>
+          <p:cNvSpPr>
+            <a:spLocks noGrp="1"/>
+          </p:cNvSpPr>
+          <p:nvPr>
+            <p:ph type="title"/>
+          </p:nvPr>
+        </p:nvSpPr>
+        <p:spPr/>
+        <p:txBody>
+          <a:bodyPr/>
+          <a:lstStyle/>
+          <a:p>
+            <a:r>
+              <a:rPr lang="en-US" dirty="0"/>
+              <a:t>Comparing JDK and EC Set Factories</a:t>
+            </a:r>
+          </a:p>
+        </p:txBody>
+      </p:sp>
+      <p:sp>
+        <p:nvSpPr>
+          <p:cNvPr id="3" name="Slide Number Placeholder 2">
+            <a:extLst>
+              <a:ext uri="{FF2B5EF4-FFF2-40B4-BE49-F238E27FC236}">
+                <a16:creationId xmlns:a16="http://schemas.microsoft.com/office/drawing/2014/main" id="{13066716-3408-779A-5E6C-F0A8F24D78BF}"/>
+              </a:ext>
+            </a:extLst>
+          </p:cNvPr>
+          <p:cNvSpPr>
+            <a:spLocks noGrp="1"/>
+          </p:cNvSpPr>
+          <p:nvPr>
+            <p:ph type="sldNum" sz="quarter" idx="12"/>
+          </p:nvPr>
+        </p:nvSpPr>
+        <p:spPr/>
+        <p:txBody>
+          <a:bodyPr/>
+          <a:lstStyle/>
+          <a:p>
+            <a:fld id="{6874CE7D-5D74-4EC3-A871-8F42005EC53C}" type="slidenum">
+              <a:rPr lang="en-US" smtClean="0"/>
+              <a:t>6</a:t>
+            </a:fld>
+            <a:endParaRPr lang="en-US"/>
+          </a:p>
+        </p:txBody>
+      </p:sp>
+      <p:sp>
+        <p:nvSpPr>
+          <p:cNvPr id="5" name="TextBox 4">
+            <a:extLst>
+              <a:ext uri="{FF2B5EF4-FFF2-40B4-BE49-F238E27FC236}">
+                <a16:creationId xmlns:a16="http://schemas.microsoft.com/office/drawing/2014/main" id="{C6CEE6F6-EF64-28AD-414C-739235CDED32}"/>
+              </a:ext>
+            </a:extLst>
+          </p:cNvPr>
+          <p:cNvSpPr txBox="1">
+            <a:spLocks/>
+          </p:cNvSpPr>
+          <p:nvPr/>
+        </p:nvSpPr>
+        <p:spPr>
+          <a:xfrm>
+            <a:off x="838200" y="983598"/>
+            <a:ext cx="11158151" cy="5684505"/>
+          </a:xfrm>
+          <a:prstGeom prst="rect">
+            <a:avLst/>
+          </a:prstGeom>
+          <a:noFill/>
+        </p:spPr>
+        <p:txBody>
+          <a:bodyPr wrap="square">
+            <a:spAutoFit/>
+          </a:bodyPr>
+          <a:lstStyle/>
+          <a:p>
+            <a:pPr>
+              <a:lnSpc>
+                <a:spcPts val="1900"/>
+              </a:lnSpc>
+              <a:buNone/>
+            </a:pPr>
+            <a:r>
+              <a:rPr lang="en-US" sz="1400" dirty="0">
+                <a:solidFill>
+                  <a:srgbClr val="808000"/>
+                </a:solidFill>
+                <a:effectLst/>
+                <a:latin typeface="JetBrains Mono" panose="02000009000000000000" pitchFamily="49" charset="0"/>
+                <a:ea typeface="JetBrains Mono" panose="02000009000000000000" pitchFamily="49" charset="0"/>
+                <a:cs typeface="JetBrains Mono" panose="02000009000000000000" pitchFamily="49" charset="0"/>
+              </a:rPr>
+              <a:t>@Test</a:t>
+            </a:r>
+            <a:br>
+              <a:rPr lang="en-US" sz="1400" dirty="0">
+                <a:solidFill>
+                  <a:srgbClr val="808000"/>
+                </a:solidFill>
+                <a:effectLst/>
+                <a:latin typeface="JetBrains Mono" panose="02000009000000000000" pitchFamily="49" charset="0"/>
+                <a:ea typeface="JetBrains Mono" panose="02000009000000000000" pitchFamily="49" charset="0"/>
+                <a:cs typeface="JetBrains Mono" panose="02000009000000000000" pitchFamily="49" charset="0"/>
+              </a:rPr>
+            </a:br>
+            <a:r>
+              <a:rPr lang="en-US" sz="1400" dirty="0">
+                <a:solidFill>
+                  <a:srgbClr val="530E80"/>
+                </a:solidFill>
+                <a:effectLst/>
+                <a:latin typeface="JetBrains Mono" panose="02000009000000000000" pitchFamily="49" charset="0"/>
+                <a:ea typeface="JetBrains Mono" panose="02000009000000000000" pitchFamily="49" charset="0"/>
+                <a:cs typeface="JetBrains Mono" panose="02000009000000000000" pitchFamily="49" charset="0"/>
+              </a:rPr>
+              <a:t>public void </a:t>
+            </a:r>
+            <a:r>
+              <a:rPr lang="en-US" sz="1400" dirty="0" err="1">
+                <a:solidFill>
+                  <a:srgbClr val="000000"/>
+                </a:solidFill>
+                <a:effectLst/>
+                <a:latin typeface="JetBrains Mono" panose="02000009000000000000" pitchFamily="49" charset="0"/>
+                <a:ea typeface="JetBrains Mono" panose="02000009000000000000" pitchFamily="49" charset="0"/>
+                <a:cs typeface="JetBrains Mono" panose="02000009000000000000" pitchFamily="49" charset="0"/>
+              </a:rPr>
+              <a:t>setFactories</a:t>
+            </a:r>
+            <a:r>
+              <a:rPr lang="en-US" sz="1400" dirty="0">
+                <a:solidFill>
+                  <a:srgbClr val="000000"/>
+                </a:solidFill>
+                <a:effectLst/>
+                <a:latin typeface="JetBrains Mono" panose="02000009000000000000" pitchFamily="49" charset="0"/>
+                <a:ea typeface="JetBrains Mono" panose="02000009000000000000" pitchFamily="49" charset="0"/>
+                <a:cs typeface="JetBrains Mono" panose="02000009000000000000" pitchFamily="49" charset="0"/>
+              </a:rPr>
+              <a:t>()</a:t>
+            </a:r>
+            <a:br>
+              <a:rPr lang="en-US" sz="1400" dirty="0">
+                <a:solidFill>
+                  <a:srgbClr val="000000"/>
+                </a:solidFill>
+                <a:effectLst/>
+                <a:latin typeface="JetBrains Mono" panose="02000009000000000000" pitchFamily="49" charset="0"/>
+                <a:ea typeface="JetBrains Mono" panose="02000009000000000000" pitchFamily="49" charset="0"/>
+                <a:cs typeface="JetBrains Mono" panose="02000009000000000000" pitchFamily="49" charset="0"/>
+              </a:rPr>
+            </a:br>
+            <a:r>
+              <a:rPr lang="en-US" sz="1400" dirty="0">
+                <a:solidFill>
+                  <a:srgbClr val="000000"/>
+                </a:solidFill>
+                <a:effectLst/>
+                <a:latin typeface="JetBrains Mono" panose="02000009000000000000" pitchFamily="49" charset="0"/>
+                <a:ea typeface="JetBrains Mono" panose="02000009000000000000" pitchFamily="49" charset="0"/>
+                <a:cs typeface="JetBrains Mono" panose="02000009000000000000" pitchFamily="49" charset="0"/>
+              </a:rPr>
+              <a:t>{</a:t>
+            </a:r>
+            <a:br>
+              <a:rPr lang="en-US" sz="1400" dirty="0">
+                <a:solidFill>
+                  <a:srgbClr val="000000"/>
+                </a:solidFill>
+                <a:effectLst/>
+                <a:latin typeface="JetBrains Mono" panose="02000009000000000000" pitchFamily="49" charset="0"/>
+                <a:ea typeface="JetBrains Mono" panose="02000009000000000000" pitchFamily="49" charset="0"/>
+                <a:cs typeface="JetBrains Mono" panose="02000009000000000000" pitchFamily="49" charset="0"/>
+              </a:rPr>
+            </a:br>
+            <a:r>
+              <a:rPr lang="en-US" sz="1400" dirty="0">
+                <a:solidFill>
+                  <a:srgbClr val="000000"/>
+                </a:solidFill>
+                <a:effectLst/>
+                <a:latin typeface="JetBrains Mono" panose="02000009000000000000" pitchFamily="49" charset="0"/>
+                <a:ea typeface="JetBrains Mono" panose="02000009000000000000" pitchFamily="49" charset="0"/>
+                <a:cs typeface="JetBrains Mono" panose="02000009000000000000" pitchFamily="49" charset="0"/>
+              </a:rPr>
+              <a:t>    </a:t>
+            </a:r>
+            <a:r>
+              <a:rPr lang="en-US" sz="1400" i="1" dirty="0">
+                <a:solidFill>
+                  <a:srgbClr val="808080"/>
+                </a:solidFill>
+                <a:effectLst/>
+                <a:latin typeface="JetBrains Mono" panose="02000009000000000000" pitchFamily="49" charset="0"/>
+                <a:ea typeface="JetBrains Mono" panose="02000009000000000000" pitchFamily="49" charset="0"/>
+                <a:cs typeface="JetBrains Mono" panose="02000009000000000000" pitchFamily="49" charset="0"/>
+              </a:rPr>
+              <a:t>// JDK Types</a:t>
+            </a:r>
+            <a:br>
+              <a:rPr lang="en-US" sz="1400" i="1" dirty="0">
+                <a:solidFill>
+                  <a:srgbClr val="808080"/>
+                </a:solidFill>
+                <a:effectLst/>
+                <a:latin typeface="JetBrains Mono" panose="02000009000000000000" pitchFamily="49" charset="0"/>
+                <a:ea typeface="JetBrains Mono" panose="02000009000000000000" pitchFamily="49" charset="0"/>
+                <a:cs typeface="JetBrains Mono" panose="02000009000000000000" pitchFamily="49" charset="0"/>
+              </a:rPr>
+            </a:br>
+            <a:r>
+              <a:rPr lang="en-US" sz="1400" i="1" dirty="0">
+                <a:solidFill>
+                  <a:srgbClr val="808080"/>
+                </a:solidFill>
+                <a:effectLst/>
+                <a:latin typeface="JetBrains Mono" panose="02000009000000000000" pitchFamily="49" charset="0"/>
+                <a:ea typeface="JetBrains Mono" panose="02000009000000000000" pitchFamily="49" charset="0"/>
+                <a:cs typeface="JetBrains Mono" panose="02000009000000000000" pitchFamily="49" charset="0"/>
+              </a:rPr>
+              <a:t>    </a:t>
+            </a:r>
+            <a:r>
+              <a:rPr lang="en-US" sz="1400" dirty="0">
+                <a:solidFill>
+                  <a:srgbClr val="0070FF"/>
+                </a:solidFill>
+                <a:effectLst/>
+                <a:latin typeface="JetBrains Mono" panose="02000009000000000000" pitchFamily="49" charset="0"/>
+                <a:ea typeface="JetBrains Mono" panose="02000009000000000000" pitchFamily="49" charset="0"/>
+                <a:cs typeface="JetBrains Mono" panose="02000009000000000000" pitchFamily="49" charset="0"/>
+              </a:rPr>
+              <a:t>Set</a:t>
+            </a:r>
+            <a:r>
+              <a:rPr lang="en-US" sz="1400" dirty="0">
+                <a:solidFill>
+                  <a:srgbClr val="000000"/>
+                </a:solidFill>
+                <a:effectLst/>
+                <a:latin typeface="JetBrains Mono" panose="02000009000000000000" pitchFamily="49" charset="0"/>
+                <a:ea typeface="JetBrains Mono" panose="02000009000000000000" pitchFamily="49" charset="0"/>
+                <a:cs typeface="JetBrains Mono" panose="02000009000000000000" pitchFamily="49" charset="0"/>
+              </a:rPr>
+              <a:t>&lt;</a:t>
+            </a:r>
+            <a:r>
+              <a:rPr lang="en-US" sz="1400" dirty="0">
+                <a:solidFill>
+                  <a:srgbClr val="A10000"/>
+                </a:solidFill>
+                <a:effectLst/>
+                <a:latin typeface="JetBrains Mono" panose="02000009000000000000" pitchFamily="49" charset="0"/>
+                <a:ea typeface="JetBrains Mono" panose="02000009000000000000" pitchFamily="49" charset="0"/>
+                <a:cs typeface="JetBrains Mono" panose="02000009000000000000" pitchFamily="49" charset="0"/>
+              </a:rPr>
+              <a:t>String</a:t>
+            </a:r>
+            <a:r>
+              <a:rPr lang="en-US" sz="1400" dirty="0">
+                <a:solidFill>
+                  <a:srgbClr val="000000"/>
+                </a:solidFill>
+                <a:effectLst/>
+                <a:latin typeface="JetBrains Mono" panose="02000009000000000000" pitchFamily="49" charset="0"/>
+                <a:ea typeface="JetBrains Mono" panose="02000009000000000000" pitchFamily="49" charset="0"/>
+                <a:cs typeface="JetBrains Mono" panose="02000009000000000000" pitchFamily="49" charset="0"/>
+              </a:rPr>
+              <a:t>&gt; </a:t>
+            </a:r>
+            <a:r>
+              <a:rPr lang="en-US" sz="1400" dirty="0" err="1">
+                <a:solidFill>
+                  <a:srgbClr val="000000"/>
+                </a:solidFill>
+                <a:effectLst/>
+                <a:latin typeface="JetBrains Mono" panose="02000009000000000000" pitchFamily="49" charset="0"/>
+                <a:ea typeface="JetBrains Mono" panose="02000009000000000000" pitchFamily="49" charset="0"/>
+                <a:cs typeface="JetBrains Mono" panose="02000009000000000000" pitchFamily="49" charset="0"/>
+              </a:rPr>
+              <a:t>jdkMutableSet</a:t>
+            </a:r>
+            <a:r>
+              <a:rPr lang="en-US" sz="1400" dirty="0">
+                <a:solidFill>
+                  <a:srgbClr val="000000"/>
+                </a:solidFill>
+                <a:effectLst/>
+                <a:latin typeface="JetBrains Mono" panose="02000009000000000000" pitchFamily="49" charset="0"/>
+                <a:ea typeface="JetBrains Mono" panose="02000009000000000000" pitchFamily="49" charset="0"/>
+                <a:cs typeface="JetBrains Mono" panose="02000009000000000000" pitchFamily="49" charset="0"/>
+              </a:rPr>
+              <a:t> = </a:t>
+            </a:r>
+            <a:r>
+              <a:rPr lang="en-US" sz="1400" dirty="0">
+                <a:solidFill>
+                  <a:srgbClr val="530E80"/>
+                </a:solidFill>
+                <a:effectLst/>
+                <a:latin typeface="JetBrains Mono" panose="02000009000000000000" pitchFamily="49" charset="0"/>
+                <a:ea typeface="JetBrains Mono" panose="02000009000000000000" pitchFamily="49" charset="0"/>
+                <a:cs typeface="JetBrains Mono" panose="02000009000000000000" pitchFamily="49" charset="0"/>
+              </a:rPr>
+              <a:t>new </a:t>
+            </a:r>
+            <a:r>
+              <a:rPr lang="en-US" sz="1400" dirty="0">
+                <a:solidFill>
+                  <a:srgbClr val="000000"/>
+                </a:solidFill>
+                <a:effectLst/>
+                <a:latin typeface="JetBrains Mono" panose="02000009000000000000" pitchFamily="49" charset="0"/>
+                <a:ea typeface="JetBrains Mono" panose="02000009000000000000" pitchFamily="49" charset="0"/>
+                <a:cs typeface="JetBrains Mono" panose="02000009000000000000" pitchFamily="49" charset="0"/>
+              </a:rPr>
+              <a:t>HashSet&lt;&gt;(</a:t>
+            </a:r>
+            <a:r>
+              <a:rPr lang="en-US" sz="1400" dirty="0" err="1">
+                <a:solidFill>
+                  <a:srgbClr val="0070FF"/>
+                </a:solidFill>
+                <a:effectLst/>
+                <a:latin typeface="JetBrains Mono" panose="02000009000000000000" pitchFamily="49" charset="0"/>
+                <a:ea typeface="JetBrains Mono" panose="02000009000000000000" pitchFamily="49" charset="0"/>
+                <a:cs typeface="JetBrains Mono" panose="02000009000000000000" pitchFamily="49" charset="0"/>
+              </a:rPr>
+              <a:t>List</a:t>
+            </a:r>
+            <a:r>
+              <a:rPr lang="en-US" sz="1400" dirty="0" err="1">
+                <a:solidFill>
+                  <a:srgbClr val="000000"/>
+                </a:solidFill>
+                <a:effectLst/>
+                <a:latin typeface="JetBrains Mono" panose="02000009000000000000" pitchFamily="49" charset="0"/>
+                <a:ea typeface="JetBrains Mono" panose="02000009000000000000" pitchFamily="49" charset="0"/>
+                <a:cs typeface="JetBrains Mono" panose="02000009000000000000" pitchFamily="49" charset="0"/>
+              </a:rPr>
+              <a:t>.</a:t>
+            </a:r>
+            <a:r>
+              <a:rPr lang="en-US" sz="1400" i="1" dirty="0" err="1">
+                <a:solidFill>
+                  <a:srgbClr val="000000"/>
+                </a:solidFill>
+                <a:effectLst/>
+                <a:latin typeface="JetBrains Mono" panose="02000009000000000000" pitchFamily="49" charset="0"/>
+                <a:ea typeface="JetBrains Mono" panose="02000009000000000000" pitchFamily="49" charset="0"/>
+                <a:cs typeface="JetBrains Mono" panose="02000009000000000000" pitchFamily="49" charset="0"/>
+              </a:rPr>
+              <a:t>of</a:t>
+            </a:r>
+            <a:r>
+              <a:rPr lang="en-US" sz="1400" dirty="0">
+                <a:solidFill>
+                  <a:srgbClr val="000000"/>
+                </a:solidFill>
+                <a:effectLst/>
+                <a:latin typeface="JetBrains Mono" panose="02000009000000000000" pitchFamily="49" charset="0"/>
+                <a:ea typeface="JetBrains Mono" panose="02000009000000000000" pitchFamily="49" charset="0"/>
+                <a:cs typeface="JetBrains Mono" panose="02000009000000000000" pitchFamily="49" charset="0"/>
+              </a:rPr>
+              <a:t>(</a:t>
+            </a:r>
+            <a:r>
+              <a:rPr lang="en-US" sz="1400" b="1" dirty="0">
+                <a:solidFill>
+                  <a:srgbClr val="0B00CC"/>
+                </a:solidFill>
+                <a:effectLst/>
+                <a:latin typeface="JetBrains Mono" panose="02000009000000000000" pitchFamily="49" charset="0"/>
+                <a:ea typeface="JetBrains Mono" panose="02000009000000000000" pitchFamily="49" charset="0"/>
+                <a:cs typeface="JetBrains Mono" panose="02000009000000000000" pitchFamily="49" charset="0"/>
+              </a:rPr>
+              <a:t>"1"</a:t>
+            </a:r>
+            <a:r>
+              <a:rPr lang="en-US" sz="1400" dirty="0">
+                <a:solidFill>
+                  <a:srgbClr val="000000"/>
+                </a:solidFill>
+                <a:effectLst/>
+                <a:latin typeface="JetBrains Mono" panose="02000009000000000000" pitchFamily="49" charset="0"/>
+                <a:ea typeface="JetBrains Mono" panose="02000009000000000000" pitchFamily="49" charset="0"/>
+                <a:cs typeface="JetBrains Mono" panose="02000009000000000000" pitchFamily="49" charset="0"/>
+              </a:rPr>
+              <a:t>, </a:t>
+            </a:r>
+            <a:r>
+              <a:rPr lang="en-US" sz="1400" b="1" dirty="0">
+                <a:solidFill>
+                  <a:srgbClr val="0B00CC"/>
+                </a:solidFill>
+                <a:effectLst/>
+                <a:latin typeface="JetBrains Mono" panose="02000009000000000000" pitchFamily="49" charset="0"/>
+                <a:ea typeface="JetBrains Mono" panose="02000009000000000000" pitchFamily="49" charset="0"/>
+                <a:cs typeface="JetBrains Mono" panose="02000009000000000000" pitchFamily="49" charset="0"/>
+              </a:rPr>
+              <a:t>"2"</a:t>
+            </a:r>
+            <a:r>
+              <a:rPr lang="en-US" sz="1400" dirty="0">
+                <a:solidFill>
+                  <a:srgbClr val="000000"/>
+                </a:solidFill>
+                <a:effectLst/>
+                <a:latin typeface="JetBrains Mono" panose="02000009000000000000" pitchFamily="49" charset="0"/>
+                <a:ea typeface="JetBrains Mono" panose="02000009000000000000" pitchFamily="49" charset="0"/>
+                <a:cs typeface="JetBrains Mono" panose="02000009000000000000" pitchFamily="49" charset="0"/>
+              </a:rPr>
+              <a:t>, </a:t>
+            </a:r>
+            <a:r>
+              <a:rPr lang="en-US" sz="1400" b="1" dirty="0">
+                <a:solidFill>
+                  <a:srgbClr val="0B00CC"/>
+                </a:solidFill>
+                <a:effectLst/>
+                <a:latin typeface="JetBrains Mono" panose="02000009000000000000" pitchFamily="49" charset="0"/>
+                <a:ea typeface="JetBrains Mono" panose="02000009000000000000" pitchFamily="49" charset="0"/>
+                <a:cs typeface="JetBrains Mono" panose="02000009000000000000" pitchFamily="49" charset="0"/>
+              </a:rPr>
+              <a:t>"3"</a:t>
+            </a:r>
+            <a:r>
+              <a:rPr lang="en-US" sz="1400" dirty="0">
+                <a:solidFill>
+                  <a:srgbClr val="000000"/>
+                </a:solidFill>
+                <a:effectLst/>
+                <a:latin typeface="JetBrains Mono" panose="02000009000000000000" pitchFamily="49" charset="0"/>
+                <a:ea typeface="JetBrains Mono" panose="02000009000000000000" pitchFamily="49" charset="0"/>
+                <a:cs typeface="JetBrains Mono" panose="02000009000000000000" pitchFamily="49" charset="0"/>
+              </a:rPr>
+              <a:t>));</a:t>
+            </a:r>
+            <a:br>
+              <a:rPr lang="en-US" sz="1400" dirty="0">
+                <a:solidFill>
+                  <a:srgbClr val="000000"/>
+                </a:solidFill>
+                <a:effectLst/>
+                <a:latin typeface="JetBrains Mono" panose="02000009000000000000" pitchFamily="49" charset="0"/>
+                <a:ea typeface="JetBrains Mono" panose="02000009000000000000" pitchFamily="49" charset="0"/>
+                <a:cs typeface="JetBrains Mono" panose="02000009000000000000" pitchFamily="49" charset="0"/>
+              </a:rPr>
+            </a:br>
+            <a:r>
+              <a:rPr lang="en-US" sz="1400" dirty="0">
+                <a:solidFill>
+                  <a:srgbClr val="000000"/>
+                </a:solidFill>
+                <a:effectLst/>
+                <a:latin typeface="JetBrains Mono" panose="02000009000000000000" pitchFamily="49" charset="0"/>
+                <a:ea typeface="JetBrains Mono" panose="02000009000000000000" pitchFamily="49" charset="0"/>
+                <a:cs typeface="JetBrains Mono" panose="02000009000000000000" pitchFamily="49" charset="0"/>
+              </a:rPr>
+              <a:t>    </a:t>
+            </a:r>
+            <a:r>
+              <a:rPr lang="en-US" sz="1400" dirty="0">
+                <a:solidFill>
+                  <a:srgbClr val="0070FF"/>
+                </a:solidFill>
+                <a:effectLst/>
+                <a:latin typeface="JetBrains Mono" panose="02000009000000000000" pitchFamily="49" charset="0"/>
+                <a:ea typeface="JetBrains Mono" panose="02000009000000000000" pitchFamily="49" charset="0"/>
+                <a:cs typeface="JetBrains Mono" panose="02000009000000000000" pitchFamily="49" charset="0"/>
+              </a:rPr>
+              <a:t>Set</a:t>
+            </a:r>
+            <a:r>
+              <a:rPr lang="en-US" sz="1400" dirty="0">
+                <a:solidFill>
+                  <a:srgbClr val="000000"/>
+                </a:solidFill>
+                <a:effectLst/>
+                <a:latin typeface="JetBrains Mono" panose="02000009000000000000" pitchFamily="49" charset="0"/>
+                <a:ea typeface="JetBrains Mono" panose="02000009000000000000" pitchFamily="49" charset="0"/>
+                <a:cs typeface="JetBrains Mono" panose="02000009000000000000" pitchFamily="49" charset="0"/>
+              </a:rPr>
+              <a:t>&lt;</a:t>
+            </a:r>
+            <a:r>
+              <a:rPr lang="en-US" sz="1400" dirty="0">
+                <a:solidFill>
+                  <a:srgbClr val="A10000"/>
+                </a:solidFill>
+                <a:effectLst/>
+                <a:latin typeface="JetBrains Mono" panose="02000009000000000000" pitchFamily="49" charset="0"/>
+                <a:ea typeface="JetBrains Mono" panose="02000009000000000000" pitchFamily="49" charset="0"/>
+                <a:cs typeface="JetBrains Mono" panose="02000009000000000000" pitchFamily="49" charset="0"/>
+              </a:rPr>
+              <a:t>String</a:t>
+            </a:r>
+            <a:r>
+              <a:rPr lang="en-US" sz="1400" dirty="0">
+                <a:solidFill>
+                  <a:srgbClr val="000000"/>
+                </a:solidFill>
+                <a:effectLst/>
+                <a:latin typeface="JetBrains Mono" panose="02000009000000000000" pitchFamily="49" charset="0"/>
+                <a:ea typeface="JetBrains Mono" panose="02000009000000000000" pitchFamily="49" charset="0"/>
+                <a:cs typeface="JetBrains Mono" panose="02000009000000000000" pitchFamily="49" charset="0"/>
+              </a:rPr>
+              <a:t>&gt; </a:t>
+            </a:r>
+            <a:r>
+              <a:rPr lang="en-US" sz="1400" dirty="0" err="1">
+                <a:solidFill>
+                  <a:srgbClr val="000000"/>
+                </a:solidFill>
+                <a:effectLst/>
+                <a:latin typeface="JetBrains Mono" panose="02000009000000000000" pitchFamily="49" charset="0"/>
+                <a:ea typeface="JetBrains Mono" panose="02000009000000000000" pitchFamily="49" charset="0"/>
+                <a:cs typeface="JetBrains Mono" panose="02000009000000000000" pitchFamily="49" charset="0"/>
+              </a:rPr>
+              <a:t>jdkImmutableSet</a:t>
+            </a:r>
+            <a:r>
+              <a:rPr lang="en-US" sz="1400" dirty="0">
+                <a:solidFill>
+                  <a:srgbClr val="000000"/>
+                </a:solidFill>
+                <a:effectLst/>
+                <a:latin typeface="JetBrains Mono" panose="02000009000000000000" pitchFamily="49" charset="0"/>
+                <a:ea typeface="JetBrains Mono" panose="02000009000000000000" pitchFamily="49" charset="0"/>
+                <a:cs typeface="JetBrains Mono" panose="02000009000000000000" pitchFamily="49" charset="0"/>
+              </a:rPr>
+              <a:t> = </a:t>
+            </a:r>
+            <a:r>
+              <a:rPr lang="en-US" sz="1400" dirty="0" err="1">
+                <a:solidFill>
+                  <a:srgbClr val="0070FF"/>
+                </a:solidFill>
+                <a:effectLst/>
+                <a:latin typeface="JetBrains Mono" panose="02000009000000000000" pitchFamily="49" charset="0"/>
+                <a:ea typeface="JetBrains Mono" panose="02000009000000000000" pitchFamily="49" charset="0"/>
+                <a:cs typeface="JetBrains Mono" panose="02000009000000000000" pitchFamily="49" charset="0"/>
+              </a:rPr>
+              <a:t>Set</a:t>
+            </a:r>
+            <a:r>
+              <a:rPr lang="en-US" sz="1400" dirty="0" err="1">
+                <a:solidFill>
+                  <a:srgbClr val="000000"/>
+                </a:solidFill>
+                <a:effectLst/>
+                <a:latin typeface="JetBrains Mono" panose="02000009000000000000" pitchFamily="49" charset="0"/>
+                <a:ea typeface="JetBrains Mono" panose="02000009000000000000" pitchFamily="49" charset="0"/>
+                <a:cs typeface="JetBrains Mono" panose="02000009000000000000" pitchFamily="49" charset="0"/>
+              </a:rPr>
+              <a:t>.</a:t>
+            </a:r>
+            <a:r>
+              <a:rPr lang="en-US" sz="1400" i="1" dirty="0" err="1">
+                <a:solidFill>
+                  <a:srgbClr val="000000"/>
+                </a:solidFill>
+                <a:effectLst/>
+                <a:latin typeface="JetBrains Mono" panose="02000009000000000000" pitchFamily="49" charset="0"/>
+                <a:ea typeface="JetBrains Mono" panose="02000009000000000000" pitchFamily="49" charset="0"/>
+                <a:cs typeface="JetBrains Mono" panose="02000009000000000000" pitchFamily="49" charset="0"/>
+              </a:rPr>
+              <a:t>of</a:t>
+            </a:r>
+            <a:r>
+              <a:rPr lang="en-US" sz="1400" dirty="0">
+                <a:solidFill>
+                  <a:srgbClr val="000000"/>
+                </a:solidFill>
+                <a:effectLst/>
+                <a:latin typeface="JetBrains Mono" panose="02000009000000000000" pitchFamily="49" charset="0"/>
+                <a:ea typeface="JetBrains Mono" panose="02000009000000000000" pitchFamily="49" charset="0"/>
+                <a:cs typeface="JetBrains Mono" panose="02000009000000000000" pitchFamily="49" charset="0"/>
+              </a:rPr>
+              <a:t>(</a:t>
+            </a:r>
+            <a:r>
+              <a:rPr lang="en-US" sz="1400" b="1" dirty="0">
+                <a:solidFill>
+                  <a:srgbClr val="0B00CC"/>
+                </a:solidFill>
+                <a:effectLst/>
+                <a:latin typeface="JetBrains Mono" panose="02000009000000000000" pitchFamily="49" charset="0"/>
+                <a:ea typeface="JetBrains Mono" panose="02000009000000000000" pitchFamily="49" charset="0"/>
+                <a:cs typeface="JetBrains Mono" panose="02000009000000000000" pitchFamily="49" charset="0"/>
+              </a:rPr>
+              <a:t>"1"</a:t>
+            </a:r>
+            <a:r>
+              <a:rPr lang="en-US" sz="1400" dirty="0">
+                <a:solidFill>
+                  <a:srgbClr val="000000"/>
+                </a:solidFill>
+                <a:effectLst/>
+                <a:latin typeface="JetBrains Mono" panose="02000009000000000000" pitchFamily="49" charset="0"/>
+                <a:ea typeface="JetBrains Mono" panose="02000009000000000000" pitchFamily="49" charset="0"/>
+                <a:cs typeface="JetBrains Mono" panose="02000009000000000000" pitchFamily="49" charset="0"/>
+              </a:rPr>
+              <a:t>, </a:t>
+            </a:r>
+            <a:r>
+              <a:rPr lang="en-US" sz="1400" b="1" dirty="0">
+                <a:solidFill>
+                  <a:srgbClr val="0B00CC"/>
+                </a:solidFill>
+                <a:effectLst/>
+                <a:latin typeface="JetBrains Mono" panose="02000009000000000000" pitchFamily="49" charset="0"/>
+                <a:ea typeface="JetBrains Mono" panose="02000009000000000000" pitchFamily="49" charset="0"/>
+                <a:cs typeface="JetBrains Mono" panose="02000009000000000000" pitchFamily="49" charset="0"/>
+              </a:rPr>
+              <a:t>"2"</a:t>
+            </a:r>
+            <a:r>
+              <a:rPr lang="en-US" sz="1400" dirty="0">
+                <a:solidFill>
+                  <a:srgbClr val="000000"/>
+                </a:solidFill>
+                <a:effectLst/>
+                <a:latin typeface="JetBrains Mono" panose="02000009000000000000" pitchFamily="49" charset="0"/>
+                <a:ea typeface="JetBrains Mono" panose="02000009000000000000" pitchFamily="49" charset="0"/>
+                <a:cs typeface="JetBrains Mono" panose="02000009000000000000" pitchFamily="49" charset="0"/>
+              </a:rPr>
+              <a:t>, </a:t>
+            </a:r>
+            <a:r>
+              <a:rPr lang="en-US" sz="1400" b="1" dirty="0">
+                <a:solidFill>
+                  <a:srgbClr val="0B00CC"/>
+                </a:solidFill>
+                <a:effectLst/>
+                <a:latin typeface="JetBrains Mono" panose="02000009000000000000" pitchFamily="49" charset="0"/>
+                <a:ea typeface="JetBrains Mono" panose="02000009000000000000" pitchFamily="49" charset="0"/>
+                <a:cs typeface="JetBrains Mono" panose="02000009000000000000" pitchFamily="49" charset="0"/>
+              </a:rPr>
+              <a:t>"3"</a:t>
+            </a:r>
+            <a:r>
+              <a:rPr lang="en-US" sz="1400" dirty="0">
+                <a:solidFill>
+                  <a:srgbClr val="000000"/>
+                </a:solidFill>
+                <a:effectLst/>
+                <a:latin typeface="JetBrains Mono" panose="02000009000000000000" pitchFamily="49" charset="0"/>
+                <a:ea typeface="JetBrains Mono" panose="02000009000000000000" pitchFamily="49" charset="0"/>
+                <a:cs typeface="JetBrains Mono" panose="02000009000000000000" pitchFamily="49" charset="0"/>
+              </a:rPr>
+              <a:t>);</a:t>
+            </a:r>
+            <a:br>
+              <a:rPr lang="en-US" sz="1400" dirty="0">
+                <a:solidFill>
+                  <a:srgbClr val="000000"/>
+                </a:solidFill>
+                <a:effectLst/>
+                <a:latin typeface="JetBrains Mono" panose="02000009000000000000" pitchFamily="49" charset="0"/>
+                <a:ea typeface="JetBrains Mono" panose="02000009000000000000" pitchFamily="49" charset="0"/>
+                <a:cs typeface="JetBrains Mono" panose="02000009000000000000" pitchFamily="49" charset="0"/>
+              </a:rPr>
+            </a:br>
+            <a:br>
+              <a:rPr lang="en-US" sz="1400" dirty="0">
+                <a:solidFill>
+                  <a:srgbClr val="000000"/>
+                </a:solidFill>
+                <a:effectLst/>
+                <a:latin typeface="JetBrains Mono" panose="02000009000000000000" pitchFamily="49" charset="0"/>
+                <a:ea typeface="JetBrains Mono" panose="02000009000000000000" pitchFamily="49" charset="0"/>
+                <a:cs typeface="JetBrains Mono" panose="02000009000000000000" pitchFamily="49" charset="0"/>
+              </a:rPr>
+            </a:br>
+            <a:r>
+              <a:rPr lang="en-US" sz="1400" dirty="0">
+                <a:solidFill>
+                  <a:srgbClr val="000000"/>
+                </a:solidFill>
+                <a:effectLst/>
+                <a:latin typeface="JetBrains Mono" panose="02000009000000000000" pitchFamily="49" charset="0"/>
+                <a:ea typeface="JetBrains Mono" panose="02000009000000000000" pitchFamily="49" charset="0"/>
+                <a:cs typeface="JetBrains Mono" panose="02000009000000000000" pitchFamily="49" charset="0"/>
+              </a:rPr>
+              <a:t>    </a:t>
+            </a:r>
+            <a:r>
+              <a:rPr lang="en-US" sz="1400" i="1" dirty="0">
+                <a:solidFill>
+                  <a:srgbClr val="808080"/>
+                </a:solidFill>
+                <a:effectLst/>
+                <a:latin typeface="JetBrains Mono" panose="02000009000000000000" pitchFamily="49" charset="0"/>
+                <a:ea typeface="JetBrains Mono" panose="02000009000000000000" pitchFamily="49" charset="0"/>
+                <a:cs typeface="JetBrains Mono" panose="02000009000000000000" pitchFamily="49" charset="0"/>
+              </a:rPr>
+              <a:t>// Eclipse Collections Types</a:t>
+            </a:r>
+            <a:br>
+              <a:rPr lang="en-US" sz="1400" i="1" dirty="0">
+                <a:solidFill>
+                  <a:srgbClr val="808080"/>
+                </a:solidFill>
+                <a:effectLst/>
+                <a:latin typeface="JetBrains Mono" panose="02000009000000000000" pitchFamily="49" charset="0"/>
+                <a:ea typeface="JetBrains Mono" panose="02000009000000000000" pitchFamily="49" charset="0"/>
+                <a:cs typeface="JetBrains Mono" panose="02000009000000000000" pitchFamily="49" charset="0"/>
+              </a:rPr>
+            </a:br>
+            <a:r>
+              <a:rPr lang="en-US" sz="1400" i="1" dirty="0">
+                <a:solidFill>
+                  <a:srgbClr val="808080"/>
+                </a:solidFill>
+                <a:effectLst/>
+                <a:latin typeface="JetBrains Mono" panose="02000009000000000000" pitchFamily="49" charset="0"/>
+                <a:ea typeface="JetBrains Mono" panose="02000009000000000000" pitchFamily="49" charset="0"/>
+                <a:cs typeface="JetBrains Mono" panose="02000009000000000000" pitchFamily="49" charset="0"/>
+              </a:rPr>
+              <a:t>    </a:t>
+            </a:r>
+            <a:r>
+              <a:rPr lang="en-US" sz="1400" dirty="0" err="1">
+                <a:solidFill>
+                  <a:srgbClr val="0070FF"/>
+                </a:solidFill>
+                <a:effectLst/>
+                <a:latin typeface="JetBrains Mono" panose="02000009000000000000" pitchFamily="49" charset="0"/>
+                <a:ea typeface="JetBrains Mono" panose="02000009000000000000" pitchFamily="49" charset="0"/>
+                <a:cs typeface="JetBrains Mono" panose="02000009000000000000" pitchFamily="49" charset="0"/>
+              </a:rPr>
+              <a:t>MutableSet</a:t>
+            </a:r>
+            <a:r>
+              <a:rPr lang="en-US" sz="1400" dirty="0">
+                <a:solidFill>
+                  <a:srgbClr val="000000"/>
+                </a:solidFill>
+                <a:effectLst/>
+                <a:latin typeface="JetBrains Mono" panose="02000009000000000000" pitchFamily="49" charset="0"/>
+                <a:ea typeface="JetBrains Mono" panose="02000009000000000000" pitchFamily="49" charset="0"/>
+                <a:cs typeface="JetBrains Mono" panose="02000009000000000000" pitchFamily="49" charset="0"/>
+              </a:rPr>
+              <a:t>&lt;</a:t>
+            </a:r>
+            <a:r>
+              <a:rPr lang="en-US" sz="1400" dirty="0">
+                <a:solidFill>
+                  <a:srgbClr val="A10000"/>
+                </a:solidFill>
+                <a:effectLst/>
+                <a:latin typeface="JetBrains Mono" panose="02000009000000000000" pitchFamily="49" charset="0"/>
+                <a:ea typeface="JetBrains Mono" panose="02000009000000000000" pitchFamily="49" charset="0"/>
+                <a:cs typeface="JetBrains Mono" panose="02000009000000000000" pitchFamily="49" charset="0"/>
+              </a:rPr>
+              <a:t>String</a:t>
+            </a:r>
+            <a:r>
+              <a:rPr lang="en-US" sz="1400" dirty="0">
+                <a:solidFill>
+                  <a:srgbClr val="000000"/>
+                </a:solidFill>
+                <a:effectLst/>
+                <a:latin typeface="JetBrains Mono" panose="02000009000000000000" pitchFamily="49" charset="0"/>
+                <a:ea typeface="JetBrains Mono" panose="02000009000000000000" pitchFamily="49" charset="0"/>
+                <a:cs typeface="JetBrains Mono" panose="02000009000000000000" pitchFamily="49" charset="0"/>
+              </a:rPr>
+              <a:t>&gt; ecMutableSet1 = </a:t>
+            </a:r>
+            <a:r>
+              <a:rPr lang="en-US" sz="1400" dirty="0" err="1">
+                <a:solidFill>
+                  <a:srgbClr val="A10000"/>
+                </a:solidFill>
+                <a:effectLst/>
+                <a:latin typeface="JetBrains Mono" panose="02000009000000000000" pitchFamily="49" charset="0"/>
+                <a:ea typeface="JetBrains Mono" panose="02000009000000000000" pitchFamily="49" charset="0"/>
+                <a:cs typeface="JetBrains Mono" panose="02000009000000000000" pitchFamily="49" charset="0"/>
+              </a:rPr>
+              <a:t>Sets</a:t>
+            </a:r>
+            <a:r>
+              <a:rPr lang="en-US" sz="1400" dirty="0" err="1">
+                <a:solidFill>
+                  <a:srgbClr val="000000"/>
+                </a:solidFill>
+                <a:effectLst/>
+                <a:latin typeface="JetBrains Mono" panose="02000009000000000000" pitchFamily="49" charset="0"/>
+                <a:ea typeface="JetBrains Mono" panose="02000009000000000000" pitchFamily="49" charset="0"/>
+                <a:cs typeface="JetBrains Mono" panose="02000009000000000000" pitchFamily="49" charset="0"/>
+              </a:rPr>
+              <a:t>.</a:t>
+            </a:r>
+            <a:r>
+              <a:rPr lang="en-US" sz="1400" b="1" i="1" dirty="0" err="1">
+                <a:solidFill>
+                  <a:srgbClr val="660E7A"/>
+                </a:solidFill>
+                <a:effectLst/>
+                <a:latin typeface="JetBrains Mono" panose="02000009000000000000" pitchFamily="49" charset="0"/>
+                <a:ea typeface="JetBrains Mono" panose="02000009000000000000" pitchFamily="49" charset="0"/>
+                <a:cs typeface="JetBrains Mono" panose="02000009000000000000" pitchFamily="49" charset="0"/>
+              </a:rPr>
+              <a:t>mutable</a:t>
+            </a:r>
+            <a:r>
+              <a:rPr lang="en-US" sz="1400" dirty="0" err="1">
+                <a:solidFill>
+                  <a:srgbClr val="000000"/>
+                </a:solidFill>
+                <a:effectLst/>
+                <a:latin typeface="JetBrains Mono" panose="02000009000000000000" pitchFamily="49" charset="0"/>
+                <a:ea typeface="JetBrains Mono" panose="02000009000000000000" pitchFamily="49" charset="0"/>
+                <a:cs typeface="JetBrains Mono" panose="02000009000000000000" pitchFamily="49" charset="0"/>
+              </a:rPr>
+              <a:t>.of</a:t>
+            </a:r>
+            <a:r>
+              <a:rPr lang="en-US" sz="1400" dirty="0">
+                <a:solidFill>
+                  <a:srgbClr val="000000"/>
+                </a:solidFill>
+                <a:effectLst/>
+                <a:latin typeface="JetBrains Mono" panose="02000009000000000000" pitchFamily="49" charset="0"/>
+                <a:ea typeface="JetBrains Mono" panose="02000009000000000000" pitchFamily="49" charset="0"/>
+                <a:cs typeface="JetBrains Mono" panose="02000009000000000000" pitchFamily="49" charset="0"/>
+              </a:rPr>
+              <a:t>(</a:t>
+            </a:r>
+            <a:r>
+              <a:rPr lang="en-US" sz="1400" b="1" dirty="0">
+                <a:solidFill>
+                  <a:srgbClr val="0B00CC"/>
+                </a:solidFill>
+                <a:effectLst/>
+                <a:latin typeface="JetBrains Mono" panose="02000009000000000000" pitchFamily="49" charset="0"/>
+                <a:ea typeface="JetBrains Mono" panose="02000009000000000000" pitchFamily="49" charset="0"/>
+                <a:cs typeface="JetBrains Mono" panose="02000009000000000000" pitchFamily="49" charset="0"/>
+              </a:rPr>
+              <a:t>"1"</a:t>
+            </a:r>
+            <a:r>
+              <a:rPr lang="en-US" sz="1400" dirty="0">
+                <a:solidFill>
+                  <a:srgbClr val="000000"/>
+                </a:solidFill>
+                <a:effectLst/>
+                <a:latin typeface="JetBrains Mono" panose="02000009000000000000" pitchFamily="49" charset="0"/>
+                <a:ea typeface="JetBrains Mono" panose="02000009000000000000" pitchFamily="49" charset="0"/>
+                <a:cs typeface="JetBrains Mono" panose="02000009000000000000" pitchFamily="49" charset="0"/>
+              </a:rPr>
+              <a:t>, </a:t>
+            </a:r>
+            <a:r>
+              <a:rPr lang="en-US" sz="1400" b="1" dirty="0">
+                <a:solidFill>
+                  <a:srgbClr val="0B00CC"/>
+                </a:solidFill>
+                <a:effectLst/>
+                <a:latin typeface="JetBrains Mono" panose="02000009000000000000" pitchFamily="49" charset="0"/>
+                <a:ea typeface="JetBrains Mono" panose="02000009000000000000" pitchFamily="49" charset="0"/>
+                <a:cs typeface="JetBrains Mono" panose="02000009000000000000" pitchFamily="49" charset="0"/>
+              </a:rPr>
+              <a:t>"2"</a:t>
+            </a:r>
+            <a:r>
+              <a:rPr lang="en-US" sz="1400" dirty="0">
+                <a:solidFill>
+                  <a:srgbClr val="000000"/>
+                </a:solidFill>
+                <a:effectLst/>
+                <a:latin typeface="JetBrains Mono" panose="02000009000000000000" pitchFamily="49" charset="0"/>
+                <a:ea typeface="JetBrains Mono" panose="02000009000000000000" pitchFamily="49" charset="0"/>
+                <a:cs typeface="JetBrains Mono" panose="02000009000000000000" pitchFamily="49" charset="0"/>
+              </a:rPr>
+              <a:t>, </a:t>
+            </a:r>
+            <a:r>
+              <a:rPr lang="en-US" sz="1400" b="1" dirty="0">
+                <a:solidFill>
+                  <a:srgbClr val="0B00CC"/>
+                </a:solidFill>
+                <a:effectLst/>
+                <a:latin typeface="JetBrains Mono" panose="02000009000000000000" pitchFamily="49" charset="0"/>
+                <a:ea typeface="JetBrains Mono" panose="02000009000000000000" pitchFamily="49" charset="0"/>
+                <a:cs typeface="JetBrains Mono" panose="02000009000000000000" pitchFamily="49" charset="0"/>
+              </a:rPr>
+              <a:t>"3"</a:t>
+            </a:r>
+            <a:r>
+              <a:rPr lang="en-US" sz="1400" dirty="0">
+                <a:solidFill>
+                  <a:srgbClr val="000000"/>
+                </a:solidFill>
+                <a:effectLst/>
+                <a:latin typeface="JetBrains Mono" panose="02000009000000000000" pitchFamily="49" charset="0"/>
+                <a:ea typeface="JetBrains Mono" panose="02000009000000000000" pitchFamily="49" charset="0"/>
+                <a:cs typeface="JetBrains Mono" panose="02000009000000000000" pitchFamily="49" charset="0"/>
+              </a:rPr>
+              <a:t>);</a:t>
+            </a:r>
+            <a:br>
+              <a:rPr lang="en-US" sz="1400" dirty="0">
+                <a:solidFill>
+                  <a:srgbClr val="000000"/>
+                </a:solidFill>
+                <a:effectLst/>
+                <a:latin typeface="JetBrains Mono" panose="02000009000000000000" pitchFamily="49" charset="0"/>
+                <a:ea typeface="JetBrains Mono" panose="02000009000000000000" pitchFamily="49" charset="0"/>
+                <a:cs typeface="JetBrains Mono" panose="02000009000000000000" pitchFamily="49" charset="0"/>
+              </a:rPr>
+            </a:br>
+            <a:r>
+              <a:rPr lang="en-US" sz="1400" dirty="0">
+                <a:solidFill>
+                  <a:srgbClr val="000000"/>
+                </a:solidFill>
+                <a:effectLst/>
+                <a:latin typeface="JetBrains Mono" panose="02000009000000000000" pitchFamily="49" charset="0"/>
+                <a:ea typeface="JetBrains Mono" panose="02000009000000000000" pitchFamily="49" charset="0"/>
+                <a:cs typeface="JetBrains Mono" panose="02000009000000000000" pitchFamily="49" charset="0"/>
+              </a:rPr>
+              <a:t>    </a:t>
+            </a:r>
+            <a:r>
+              <a:rPr lang="en-US" sz="1400" dirty="0" err="1">
+                <a:solidFill>
+                  <a:srgbClr val="0070FF"/>
+                </a:solidFill>
+                <a:effectLst/>
+                <a:latin typeface="JetBrains Mono" panose="02000009000000000000" pitchFamily="49" charset="0"/>
+                <a:ea typeface="JetBrains Mono" panose="02000009000000000000" pitchFamily="49" charset="0"/>
+                <a:cs typeface="JetBrains Mono" panose="02000009000000000000" pitchFamily="49" charset="0"/>
+              </a:rPr>
+              <a:t>ImmutableSet</a:t>
+            </a:r>
+            <a:r>
+              <a:rPr lang="en-US" sz="1400" dirty="0">
+                <a:solidFill>
+                  <a:srgbClr val="000000"/>
+                </a:solidFill>
+                <a:effectLst/>
+                <a:latin typeface="JetBrains Mono" panose="02000009000000000000" pitchFamily="49" charset="0"/>
+                <a:ea typeface="JetBrains Mono" panose="02000009000000000000" pitchFamily="49" charset="0"/>
+                <a:cs typeface="JetBrains Mono" panose="02000009000000000000" pitchFamily="49" charset="0"/>
+              </a:rPr>
+              <a:t>&lt;</a:t>
+            </a:r>
+            <a:r>
+              <a:rPr lang="en-US" sz="1400" dirty="0">
+                <a:solidFill>
+                  <a:srgbClr val="A10000"/>
+                </a:solidFill>
+                <a:effectLst/>
+                <a:latin typeface="JetBrains Mono" panose="02000009000000000000" pitchFamily="49" charset="0"/>
+                <a:ea typeface="JetBrains Mono" panose="02000009000000000000" pitchFamily="49" charset="0"/>
+                <a:cs typeface="JetBrains Mono" panose="02000009000000000000" pitchFamily="49" charset="0"/>
+              </a:rPr>
+              <a:t>String</a:t>
+            </a:r>
+            <a:r>
+              <a:rPr lang="en-US" sz="1400" dirty="0">
+                <a:solidFill>
+                  <a:srgbClr val="000000"/>
+                </a:solidFill>
+                <a:effectLst/>
+                <a:latin typeface="JetBrains Mono" panose="02000009000000000000" pitchFamily="49" charset="0"/>
+                <a:ea typeface="JetBrains Mono" panose="02000009000000000000" pitchFamily="49" charset="0"/>
+                <a:cs typeface="JetBrains Mono" panose="02000009000000000000" pitchFamily="49" charset="0"/>
+              </a:rPr>
+              <a:t>&gt; ecImmutableSet1 = </a:t>
+            </a:r>
+            <a:r>
+              <a:rPr lang="en-US" sz="1400" dirty="0" err="1">
+                <a:solidFill>
+                  <a:srgbClr val="A10000"/>
+                </a:solidFill>
+                <a:effectLst/>
+                <a:latin typeface="JetBrains Mono" panose="02000009000000000000" pitchFamily="49" charset="0"/>
+                <a:ea typeface="JetBrains Mono" panose="02000009000000000000" pitchFamily="49" charset="0"/>
+                <a:cs typeface="JetBrains Mono" panose="02000009000000000000" pitchFamily="49" charset="0"/>
+              </a:rPr>
+              <a:t>Sets</a:t>
+            </a:r>
+            <a:r>
+              <a:rPr lang="en-US" sz="1400" dirty="0" err="1">
+                <a:solidFill>
+                  <a:srgbClr val="000000"/>
+                </a:solidFill>
+                <a:effectLst/>
+                <a:latin typeface="JetBrains Mono" panose="02000009000000000000" pitchFamily="49" charset="0"/>
+                <a:ea typeface="JetBrains Mono" panose="02000009000000000000" pitchFamily="49" charset="0"/>
+                <a:cs typeface="JetBrains Mono" panose="02000009000000000000" pitchFamily="49" charset="0"/>
+              </a:rPr>
+              <a:t>.</a:t>
+            </a:r>
+            <a:r>
+              <a:rPr lang="en-US" sz="1400" b="1" i="1" dirty="0" err="1">
+                <a:solidFill>
+                  <a:srgbClr val="660E7A"/>
+                </a:solidFill>
+                <a:effectLst/>
+                <a:latin typeface="JetBrains Mono" panose="02000009000000000000" pitchFamily="49" charset="0"/>
+                <a:ea typeface="JetBrains Mono" panose="02000009000000000000" pitchFamily="49" charset="0"/>
+                <a:cs typeface="JetBrains Mono" panose="02000009000000000000" pitchFamily="49" charset="0"/>
+              </a:rPr>
+              <a:t>immutable</a:t>
+            </a:r>
+            <a:r>
+              <a:rPr lang="en-US" sz="1400" dirty="0" err="1">
+                <a:solidFill>
+                  <a:srgbClr val="000000"/>
+                </a:solidFill>
+                <a:effectLst/>
+                <a:latin typeface="JetBrains Mono" panose="02000009000000000000" pitchFamily="49" charset="0"/>
+                <a:ea typeface="JetBrains Mono" panose="02000009000000000000" pitchFamily="49" charset="0"/>
+                <a:cs typeface="JetBrains Mono" panose="02000009000000000000" pitchFamily="49" charset="0"/>
+              </a:rPr>
+              <a:t>.of</a:t>
+            </a:r>
+            <a:r>
+              <a:rPr lang="en-US" sz="1400" dirty="0">
+                <a:solidFill>
+                  <a:srgbClr val="000000"/>
+                </a:solidFill>
+                <a:effectLst/>
+                <a:latin typeface="JetBrains Mono" panose="02000009000000000000" pitchFamily="49" charset="0"/>
+                <a:ea typeface="JetBrains Mono" panose="02000009000000000000" pitchFamily="49" charset="0"/>
+                <a:cs typeface="JetBrains Mono" panose="02000009000000000000" pitchFamily="49" charset="0"/>
+              </a:rPr>
+              <a:t>(</a:t>
+            </a:r>
+            <a:r>
+              <a:rPr lang="en-US" sz="1400" b="1" dirty="0">
+                <a:solidFill>
+                  <a:srgbClr val="0B00CC"/>
+                </a:solidFill>
+                <a:effectLst/>
+                <a:latin typeface="JetBrains Mono" panose="02000009000000000000" pitchFamily="49" charset="0"/>
+                <a:ea typeface="JetBrains Mono" panose="02000009000000000000" pitchFamily="49" charset="0"/>
+                <a:cs typeface="JetBrains Mono" panose="02000009000000000000" pitchFamily="49" charset="0"/>
+              </a:rPr>
+              <a:t>"1"</a:t>
+            </a:r>
+            <a:r>
+              <a:rPr lang="en-US" sz="1400" dirty="0">
+                <a:solidFill>
+                  <a:srgbClr val="000000"/>
+                </a:solidFill>
+                <a:effectLst/>
+                <a:latin typeface="JetBrains Mono" panose="02000009000000000000" pitchFamily="49" charset="0"/>
+                <a:ea typeface="JetBrains Mono" panose="02000009000000000000" pitchFamily="49" charset="0"/>
+                <a:cs typeface="JetBrains Mono" panose="02000009000000000000" pitchFamily="49" charset="0"/>
+              </a:rPr>
+              <a:t>, </a:t>
+            </a:r>
+            <a:r>
+              <a:rPr lang="en-US" sz="1400" b="1" dirty="0">
+                <a:solidFill>
+                  <a:srgbClr val="0B00CC"/>
+                </a:solidFill>
+                <a:effectLst/>
+                <a:latin typeface="JetBrains Mono" panose="02000009000000000000" pitchFamily="49" charset="0"/>
+                <a:ea typeface="JetBrains Mono" panose="02000009000000000000" pitchFamily="49" charset="0"/>
+                <a:cs typeface="JetBrains Mono" panose="02000009000000000000" pitchFamily="49" charset="0"/>
+              </a:rPr>
+              <a:t>"2"</a:t>
+            </a:r>
+            <a:r>
+              <a:rPr lang="en-US" sz="1400" dirty="0">
+                <a:solidFill>
+                  <a:srgbClr val="000000"/>
+                </a:solidFill>
+                <a:effectLst/>
+                <a:latin typeface="JetBrains Mono" panose="02000009000000000000" pitchFamily="49" charset="0"/>
+                <a:ea typeface="JetBrains Mono" panose="02000009000000000000" pitchFamily="49" charset="0"/>
+                <a:cs typeface="JetBrains Mono" panose="02000009000000000000" pitchFamily="49" charset="0"/>
+              </a:rPr>
+              <a:t>, </a:t>
+            </a:r>
+            <a:r>
+              <a:rPr lang="en-US" sz="1400" b="1" dirty="0">
+                <a:solidFill>
+                  <a:srgbClr val="0B00CC"/>
+                </a:solidFill>
+                <a:effectLst/>
+                <a:latin typeface="JetBrains Mono" panose="02000009000000000000" pitchFamily="49" charset="0"/>
+                <a:ea typeface="JetBrains Mono" panose="02000009000000000000" pitchFamily="49" charset="0"/>
+                <a:cs typeface="JetBrains Mono" panose="02000009000000000000" pitchFamily="49" charset="0"/>
+              </a:rPr>
+              <a:t>"3"</a:t>
+            </a:r>
+            <a:r>
+              <a:rPr lang="en-US" sz="1400" dirty="0">
+                <a:solidFill>
+                  <a:srgbClr val="000000"/>
+                </a:solidFill>
+                <a:effectLst/>
+                <a:latin typeface="JetBrains Mono" panose="02000009000000000000" pitchFamily="49" charset="0"/>
+                <a:ea typeface="JetBrains Mono" panose="02000009000000000000" pitchFamily="49" charset="0"/>
+                <a:cs typeface="JetBrains Mono" panose="02000009000000000000" pitchFamily="49" charset="0"/>
+              </a:rPr>
+              <a:t>);</a:t>
+            </a:r>
+            <a:br>
+              <a:rPr lang="en-US" sz="1400" dirty="0">
+                <a:solidFill>
+                  <a:srgbClr val="000000"/>
+                </a:solidFill>
+                <a:effectLst/>
+                <a:latin typeface="JetBrains Mono" panose="02000009000000000000" pitchFamily="49" charset="0"/>
+                <a:ea typeface="JetBrains Mono" panose="02000009000000000000" pitchFamily="49" charset="0"/>
+                <a:cs typeface="JetBrains Mono" panose="02000009000000000000" pitchFamily="49" charset="0"/>
+              </a:rPr>
+            </a:br>
+            <a:br>
+              <a:rPr lang="en-US" sz="1400" dirty="0">
+                <a:solidFill>
+                  <a:srgbClr val="000000"/>
+                </a:solidFill>
+                <a:effectLst/>
+                <a:latin typeface="JetBrains Mono" panose="02000009000000000000" pitchFamily="49" charset="0"/>
+                <a:ea typeface="JetBrains Mono" panose="02000009000000000000" pitchFamily="49" charset="0"/>
+                <a:cs typeface="JetBrains Mono" panose="02000009000000000000" pitchFamily="49" charset="0"/>
+              </a:rPr>
+            </a:br>
+            <a:r>
+              <a:rPr lang="en-US" sz="1400" dirty="0">
+                <a:solidFill>
+                  <a:srgbClr val="000000"/>
+                </a:solidFill>
+                <a:effectLst/>
+                <a:latin typeface="JetBrains Mono" panose="02000009000000000000" pitchFamily="49" charset="0"/>
+                <a:ea typeface="JetBrains Mono" panose="02000009000000000000" pitchFamily="49" charset="0"/>
+                <a:cs typeface="JetBrains Mono" panose="02000009000000000000" pitchFamily="49" charset="0"/>
+              </a:rPr>
+              <a:t>    </a:t>
+            </a:r>
+            <a:r>
+              <a:rPr lang="en-US" sz="1400" i="1" dirty="0">
+                <a:solidFill>
+                  <a:srgbClr val="808080"/>
+                </a:solidFill>
+                <a:effectLst/>
+                <a:latin typeface="JetBrains Mono" panose="02000009000000000000" pitchFamily="49" charset="0"/>
+                <a:ea typeface="JetBrains Mono" panose="02000009000000000000" pitchFamily="49" charset="0"/>
+                <a:cs typeface="JetBrains Mono" panose="02000009000000000000" pitchFamily="49" charset="0"/>
+              </a:rPr>
+              <a:t>// Eclipse Collections using JDK Types</a:t>
+            </a:r>
+            <a:br>
+              <a:rPr lang="en-US" sz="1400" i="1" dirty="0">
+                <a:solidFill>
+                  <a:srgbClr val="808080"/>
+                </a:solidFill>
+                <a:effectLst/>
+                <a:latin typeface="JetBrains Mono" panose="02000009000000000000" pitchFamily="49" charset="0"/>
+                <a:ea typeface="JetBrains Mono" panose="02000009000000000000" pitchFamily="49" charset="0"/>
+                <a:cs typeface="JetBrains Mono" panose="02000009000000000000" pitchFamily="49" charset="0"/>
+              </a:rPr>
+            </a:br>
+            <a:r>
+              <a:rPr lang="en-US" sz="1400" i="1" dirty="0">
+                <a:solidFill>
+                  <a:srgbClr val="808080"/>
+                </a:solidFill>
+                <a:effectLst/>
+                <a:latin typeface="JetBrains Mono" panose="02000009000000000000" pitchFamily="49" charset="0"/>
+                <a:ea typeface="JetBrains Mono" panose="02000009000000000000" pitchFamily="49" charset="0"/>
+                <a:cs typeface="JetBrains Mono" panose="02000009000000000000" pitchFamily="49" charset="0"/>
+              </a:rPr>
+              <a:t>    </a:t>
+            </a:r>
+            <a:r>
+              <a:rPr lang="en-US" sz="1400" dirty="0">
+                <a:solidFill>
+                  <a:srgbClr val="0070FF"/>
+                </a:solidFill>
+                <a:effectLst/>
+                <a:latin typeface="JetBrains Mono" panose="02000009000000000000" pitchFamily="49" charset="0"/>
+                <a:ea typeface="JetBrains Mono" panose="02000009000000000000" pitchFamily="49" charset="0"/>
+                <a:cs typeface="JetBrains Mono" panose="02000009000000000000" pitchFamily="49" charset="0"/>
+              </a:rPr>
+              <a:t>Set</a:t>
+            </a:r>
+            <a:r>
+              <a:rPr lang="en-US" sz="1400" dirty="0">
+                <a:solidFill>
+                  <a:srgbClr val="000000"/>
+                </a:solidFill>
+                <a:effectLst/>
+                <a:latin typeface="JetBrains Mono" panose="02000009000000000000" pitchFamily="49" charset="0"/>
+                <a:ea typeface="JetBrains Mono" panose="02000009000000000000" pitchFamily="49" charset="0"/>
+                <a:cs typeface="JetBrains Mono" panose="02000009000000000000" pitchFamily="49" charset="0"/>
+              </a:rPr>
+              <a:t>&lt;</a:t>
+            </a:r>
+            <a:r>
+              <a:rPr lang="en-US" sz="1400" dirty="0">
+                <a:solidFill>
+                  <a:srgbClr val="A10000"/>
+                </a:solidFill>
+                <a:effectLst/>
+                <a:latin typeface="JetBrains Mono" panose="02000009000000000000" pitchFamily="49" charset="0"/>
+                <a:ea typeface="JetBrains Mono" panose="02000009000000000000" pitchFamily="49" charset="0"/>
+                <a:cs typeface="JetBrains Mono" panose="02000009000000000000" pitchFamily="49" charset="0"/>
+              </a:rPr>
+              <a:t>String</a:t>
+            </a:r>
+            <a:r>
+              <a:rPr lang="en-US" sz="1400" dirty="0">
+                <a:solidFill>
+                  <a:srgbClr val="000000"/>
+                </a:solidFill>
+                <a:effectLst/>
+                <a:latin typeface="JetBrains Mono" panose="02000009000000000000" pitchFamily="49" charset="0"/>
+                <a:ea typeface="JetBrains Mono" panose="02000009000000000000" pitchFamily="49" charset="0"/>
+                <a:cs typeface="JetBrains Mono" panose="02000009000000000000" pitchFamily="49" charset="0"/>
+              </a:rPr>
+              <a:t>&gt; ecMutableSet2 = ecMutableSet1;</a:t>
+            </a:r>
+            <a:br>
+              <a:rPr lang="en-US" sz="1400" dirty="0">
+                <a:solidFill>
+                  <a:srgbClr val="000000"/>
+                </a:solidFill>
+                <a:effectLst/>
+                <a:latin typeface="JetBrains Mono" panose="02000009000000000000" pitchFamily="49" charset="0"/>
+                <a:ea typeface="JetBrains Mono" panose="02000009000000000000" pitchFamily="49" charset="0"/>
+                <a:cs typeface="JetBrains Mono" panose="02000009000000000000" pitchFamily="49" charset="0"/>
+              </a:rPr>
+            </a:br>
+            <a:r>
+              <a:rPr lang="en-US" sz="1400" dirty="0">
+                <a:solidFill>
+                  <a:srgbClr val="000000"/>
+                </a:solidFill>
+                <a:effectLst/>
+                <a:latin typeface="JetBrains Mono" panose="02000009000000000000" pitchFamily="49" charset="0"/>
+                <a:ea typeface="JetBrains Mono" panose="02000009000000000000" pitchFamily="49" charset="0"/>
+                <a:cs typeface="JetBrains Mono" panose="02000009000000000000" pitchFamily="49" charset="0"/>
+              </a:rPr>
+              <a:t>    </a:t>
+            </a:r>
+            <a:r>
+              <a:rPr lang="en-US" sz="1400" dirty="0">
+                <a:solidFill>
+                  <a:srgbClr val="0070FF"/>
+                </a:solidFill>
+                <a:effectLst/>
+                <a:latin typeface="JetBrains Mono" panose="02000009000000000000" pitchFamily="49" charset="0"/>
+                <a:ea typeface="JetBrains Mono" panose="02000009000000000000" pitchFamily="49" charset="0"/>
+                <a:cs typeface="JetBrains Mono" panose="02000009000000000000" pitchFamily="49" charset="0"/>
+              </a:rPr>
+              <a:t>Set</a:t>
+            </a:r>
+            <a:r>
+              <a:rPr lang="en-US" sz="1400" dirty="0">
+                <a:solidFill>
+                  <a:srgbClr val="000000"/>
+                </a:solidFill>
+                <a:effectLst/>
+                <a:latin typeface="JetBrains Mono" panose="02000009000000000000" pitchFamily="49" charset="0"/>
+                <a:ea typeface="JetBrains Mono" panose="02000009000000000000" pitchFamily="49" charset="0"/>
+                <a:cs typeface="JetBrains Mono" panose="02000009000000000000" pitchFamily="49" charset="0"/>
+              </a:rPr>
+              <a:t>&lt;</a:t>
+            </a:r>
+            <a:r>
+              <a:rPr lang="en-US" sz="1400" dirty="0">
+                <a:solidFill>
+                  <a:srgbClr val="A10000"/>
+                </a:solidFill>
+                <a:effectLst/>
+                <a:latin typeface="JetBrains Mono" panose="02000009000000000000" pitchFamily="49" charset="0"/>
+                <a:ea typeface="JetBrains Mono" panose="02000009000000000000" pitchFamily="49" charset="0"/>
+                <a:cs typeface="JetBrains Mono" panose="02000009000000000000" pitchFamily="49" charset="0"/>
+              </a:rPr>
+              <a:t>String</a:t>
+            </a:r>
+            <a:r>
+              <a:rPr lang="en-US" sz="1400" dirty="0">
+                <a:solidFill>
+                  <a:srgbClr val="000000"/>
+                </a:solidFill>
+                <a:effectLst/>
+                <a:latin typeface="JetBrains Mono" panose="02000009000000000000" pitchFamily="49" charset="0"/>
+                <a:ea typeface="JetBrains Mono" panose="02000009000000000000" pitchFamily="49" charset="0"/>
+                <a:cs typeface="JetBrains Mono" panose="02000009000000000000" pitchFamily="49" charset="0"/>
+              </a:rPr>
+              <a:t>&gt; ecImmutableSet2 = ecImmutableSet1.castToSet();</a:t>
+            </a:r>
+            <a:br>
+              <a:rPr lang="en-US" sz="1400" dirty="0">
+                <a:solidFill>
+                  <a:srgbClr val="000000"/>
+                </a:solidFill>
+                <a:effectLst/>
+                <a:latin typeface="JetBrains Mono" panose="02000009000000000000" pitchFamily="49" charset="0"/>
+                <a:ea typeface="JetBrains Mono" panose="02000009000000000000" pitchFamily="49" charset="0"/>
+                <a:cs typeface="JetBrains Mono" panose="02000009000000000000" pitchFamily="49" charset="0"/>
+              </a:rPr>
+            </a:br>
+            <a:br>
+              <a:rPr lang="en-US" sz="1400" dirty="0">
+                <a:solidFill>
+                  <a:srgbClr val="000000"/>
+                </a:solidFill>
+                <a:effectLst/>
+                <a:latin typeface="JetBrains Mono" panose="02000009000000000000" pitchFamily="49" charset="0"/>
+                <a:ea typeface="JetBrains Mono" panose="02000009000000000000" pitchFamily="49" charset="0"/>
+                <a:cs typeface="JetBrains Mono" panose="02000009000000000000" pitchFamily="49" charset="0"/>
+              </a:rPr>
+            </a:br>
+            <a:r>
+              <a:rPr lang="en-US" sz="1400" dirty="0">
+                <a:solidFill>
+                  <a:srgbClr val="000000"/>
+                </a:solidFill>
+                <a:effectLst/>
+                <a:latin typeface="JetBrains Mono" panose="02000009000000000000" pitchFamily="49" charset="0"/>
+                <a:ea typeface="JetBrains Mono" panose="02000009000000000000" pitchFamily="49" charset="0"/>
+                <a:cs typeface="JetBrains Mono" panose="02000009000000000000" pitchFamily="49" charset="0"/>
+              </a:rPr>
+              <a:t>    </a:t>
+            </a:r>
+            <a:r>
+              <a:rPr lang="en-US" sz="1400" i="1" dirty="0">
+                <a:solidFill>
+                  <a:srgbClr val="808080"/>
+                </a:solidFill>
+                <a:effectLst/>
+                <a:latin typeface="JetBrains Mono" panose="02000009000000000000" pitchFamily="49" charset="0"/>
+                <a:ea typeface="JetBrains Mono" panose="02000009000000000000" pitchFamily="49" charset="0"/>
+                <a:cs typeface="JetBrains Mono" panose="02000009000000000000" pitchFamily="49" charset="0"/>
+              </a:rPr>
+              <a:t>// Testing JDK and Eclipse Collections Set Types for Equality</a:t>
+            </a:r>
+            <a:br>
+              <a:rPr lang="en-US" sz="1400" i="1" dirty="0">
+                <a:solidFill>
+                  <a:srgbClr val="808080"/>
+                </a:solidFill>
+                <a:effectLst/>
+                <a:latin typeface="JetBrains Mono" panose="02000009000000000000" pitchFamily="49" charset="0"/>
+                <a:ea typeface="JetBrains Mono" panose="02000009000000000000" pitchFamily="49" charset="0"/>
+                <a:cs typeface="JetBrains Mono" panose="02000009000000000000" pitchFamily="49" charset="0"/>
+              </a:rPr>
+            </a:br>
+            <a:r>
+              <a:rPr lang="en-US" sz="1400" i="1" dirty="0">
+                <a:solidFill>
+                  <a:srgbClr val="808080"/>
+                </a:solidFill>
+                <a:effectLst/>
+                <a:latin typeface="JetBrains Mono" panose="02000009000000000000" pitchFamily="49" charset="0"/>
+                <a:ea typeface="JetBrains Mono" panose="02000009000000000000" pitchFamily="49" charset="0"/>
+                <a:cs typeface="JetBrains Mono" panose="02000009000000000000" pitchFamily="49" charset="0"/>
+              </a:rPr>
+              <a:t>    </a:t>
+            </a:r>
+            <a:r>
+              <a:rPr lang="en-US" sz="1400" dirty="0">
+                <a:solidFill>
+                  <a:srgbClr val="530E80"/>
+                </a:solidFill>
+                <a:effectLst/>
+                <a:latin typeface="JetBrains Mono" panose="02000009000000000000" pitchFamily="49" charset="0"/>
+                <a:ea typeface="JetBrains Mono" panose="02000009000000000000" pitchFamily="49" charset="0"/>
+                <a:cs typeface="JetBrains Mono" panose="02000009000000000000" pitchFamily="49" charset="0"/>
+              </a:rPr>
+              <a:t>var </a:t>
+            </a:r>
+            <a:r>
+              <a:rPr lang="en-US" sz="1400" dirty="0" err="1">
+                <a:solidFill>
+                  <a:srgbClr val="000000"/>
+                </a:solidFill>
+                <a:effectLst/>
+                <a:latin typeface="JetBrains Mono" panose="02000009000000000000" pitchFamily="49" charset="0"/>
+                <a:ea typeface="JetBrains Mono" panose="02000009000000000000" pitchFamily="49" charset="0"/>
+                <a:cs typeface="JetBrains Mono" panose="02000009000000000000" pitchFamily="49" charset="0"/>
+              </a:rPr>
+              <a:t>jdkSets</a:t>
+            </a:r>
+            <a:r>
+              <a:rPr lang="en-US" sz="1400" dirty="0">
+                <a:solidFill>
+                  <a:srgbClr val="000000"/>
+                </a:solidFill>
+                <a:effectLst/>
+                <a:latin typeface="JetBrains Mono" panose="02000009000000000000" pitchFamily="49" charset="0"/>
+                <a:ea typeface="JetBrains Mono" panose="02000009000000000000" pitchFamily="49" charset="0"/>
+                <a:cs typeface="JetBrains Mono" panose="02000009000000000000" pitchFamily="49" charset="0"/>
+              </a:rPr>
+              <a:t> = </a:t>
+            </a:r>
+            <a:r>
+              <a:rPr lang="en-US" sz="1400" dirty="0" err="1">
+                <a:solidFill>
+                  <a:srgbClr val="A10000"/>
+                </a:solidFill>
+                <a:effectLst/>
+                <a:latin typeface="JetBrains Mono" panose="02000009000000000000" pitchFamily="49" charset="0"/>
+                <a:ea typeface="JetBrains Mono" panose="02000009000000000000" pitchFamily="49" charset="0"/>
+                <a:cs typeface="JetBrains Mono" panose="02000009000000000000" pitchFamily="49" charset="0"/>
+              </a:rPr>
+              <a:t>Sets</a:t>
+            </a:r>
+            <a:r>
+              <a:rPr lang="en-US" sz="1400" dirty="0" err="1">
+                <a:solidFill>
+                  <a:srgbClr val="000000"/>
+                </a:solidFill>
+                <a:effectLst/>
+                <a:latin typeface="JetBrains Mono" panose="02000009000000000000" pitchFamily="49" charset="0"/>
+                <a:ea typeface="JetBrains Mono" panose="02000009000000000000" pitchFamily="49" charset="0"/>
+                <a:cs typeface="JetBrains Mono" panose="02000009000000000000" pitchFamily="49" charset="0"/>
+              </a:rPr>
+              <a:t>.</a:t>
+            </a:r>
+            <a:r>
+              <a:rPr lang="en-US" sz="1400" b="1" i="1" dirty="0" err="1">
+                <a:solidFill>
+                  <a:srgbClr val="660E7A"/>
+                </a:solidFill>
+                <a:effectLst/>
+                <a:latin typeface="JetBrains Mono" panose="02000009000000000000" pitchFamily="49" charset="0"/>
+                <a:ea typeface="JetBrains Mono" panose="02000009000000000000" pitchFamily="49" charset="0"/>
+                <a:cs typeface="JetBrains Mono" panose="02000009000000000000" pitchFamily="49" charset="0"/>
+              </a:rPr>
+              <a:t>mutable</a:t>
+            </a:r>
+            <a:r>
+              <a:rPr lang="en-US" sz="1400" dirty="0" err="1">
+                <a:solidFill>
+                  <a:srgbClr val="000000"/>
+                </a:solidFill>
+                <a:effectLst/>
+                <a:latin typeface="JetBrains Mono" panose="02000009000000000000" pitchFamily="49" charset="0"/>
+                <a:ea typeface="JetBrains Mono" panose="02000009000000000000" pitchFamily="49" charset="0"/>
+                <a:cs typeface="JetBrains Mono" panose="02000009000000000000" pitchFamily="49" charset="0"/>
+              </a:rPr>
+              <a:t>.of</a:t>
+            </a:r>
+            <a:r>
+              <a:rPr lang="en-US" sz="1400" dirty="0">
+                <a:solidFill>
+                  <a:srgbClr val="000000"/>
+                </a:solidFill>
+                <a:effectLst/>
+                <a:latin typeface="JetBrains Mono" panose="02000009000000000000" pitchFamily="49" charset="0"/>
+                <a:ea typeface="JetBrains Mono" panose="02000009000000000000" pitchFamily="49" charset="0"/>
+                <a:cs typeface="JetBrains Mono" panose="02000009000000000000" pitchFamily="49" charset="0"/>
+              </a:rPr>
+              <a:t>(</a:t>
+            </a:r>
+            <a:r>
+              <a:rPr lang="en-US" sz="1400" dirty="0" err="1">
+                <a:solidFill>
+                  <a:srgbClr val="000000"/>
+                </a:solidFill>
+                <a:effectLst/>
+                <a:latin typeface="JetBrains Mono" panose="02000009000000000000" pitchFamily="49" charset="0"/>
+                <a:ea typeface="JetBrains Mono" panose="02000009000000000000" pitchFamily="49" charset="0"/>
+                <a:cs typeface="JetBrains Mono" panose="02000009000000000000" pitchFamily="49" charset="0"/>
+              </a:rPr>
+              <a:t>jdkImmutableSet</a:t>
+            </a:r>
+            <a:r>
+              <a:rPr lang="en-US" sz="1400" dirty="0">
+                <a:solidFill>
+                  <a:srgbClr val="000000"/>
+                </a:solidFill>
+                <a:effectLst/>
+                <a:latin typeface="JetBrains Mono" panose="02000009000000000000" pitchFamily="49" charset="0"/>
+                <a:ea typeface="JetBrains Mono" panose="02000009000000000000" pitchFamily="49" charset="0"/>
+                <a:cs typeface="JetBrains Mono" panose="02000009000000000000" pitchFamily="49" charset="0"/>
+              </a:rPr>
+              <a:t>, </a:t>
+            </a:r>
+            <a:r>
+              <a:rPr lang="en-US" sz="1400" dirty="0" err="1">
+                <a:solidFill>
+                  <a:srgbClr val="000000"/>
+                </a:solidFill>
+                <a:effectLst/>
+                <a:latin typeface="JetBrains Mono" panose="02000009000000000000" pitchFamily="49" charset="0"/>
+                <a:ea typeface="JetBrains Mono" panose="02000009000000000000" pitchFamily="49" charset="0"/>
+                <a:cs typeface="JetBrains Mono" panose="02000009000000000000" pitchFamily="49" charset="0"/>
+              </a:rPr>
+              <a:t>jdkMutableSet</a:t>
+            </a:r>
+            <a:r>
+              <a:rPr lang="en-US" sz="1400" dirty="0">
+                <a:solidFill>
+                  <a:srgbClr val="000000"/>
+                </a:solidFill>
+                <a:effectLst/>
+                <a:latin typeface="JetBrains Mono" panose="02000009000000000000" pitchFamily="49" charset="0"/>
+                <a:ea typeface="JetBrains Mono" panose="02000009000000000000" pitchFamily="49" charset="0"/>
+                <a:cs typeface="JetBrains Mono" panose="02000009000000000000" pitchFamily="49" charset="0"/>
+              </a:rPr>
+              <a:t>);</a:t>
+            </a:r>
+            <a:br>
+              <a:rPr lang="en-US" sz="1400" dirty="0">
+                <a:solidFill>
+                  <a:srgbClr val="000000"/>
+                </a:solidFill>
+                <a:effectLst/>
+                <a:latin typeface="JetBrains Mono" panose="02000009000000000000" pitchFamily="49" charset="0"/>
+                <a:ea typeface="JetBrains Mono" panose="02000009000000000000" pitchFamily="49" charset="0"/>
+                <a:cs typeface="JetBrains Mono" panose="02000009000000000000" pitchFamily="49" charset="0"/>
+              </a:rPr>
+            </a:br>
+            <a:r>
+              <a:rPr lang="en-US" sz="1400" dirty="0">
+                <a:solidFill>
+                  <a:srgbClr val="000000"/>
+                </a:solidFill>
+                <a:effectLst/>
+                <a:latin typeface="JetBrains Mono" panose="02000009000000000000" pitchFamily="49" charset="0"/>
+                <a:ea typeface="JetBrains Mono" panose="02000009000000000000" pitchFamily="49" charset="0"/>
+                <a:cs typeface="JetBrains Mono" panose="02000009000000000000" pitchFamily="49" charset="0"/>
+              </a:rPr>
+              <a:t>    </a:t>
+            </a:r>
+            <a:r>
+              <a:rPr lang="en-US" sz="1400" dirty="0">
+                <a:solidFill>
+                  <a:srgbClr val="530E80"/>
+                </a:solidFill>
+                <a:effectLst/>
+                <a:latin typeface="JetBrains Mono" panose="02000009000000000000" pitchFamily="49" charset="0"/>
+                <a:ea typeface="JetBrains Mono" panose="02000009000000000000" pitchFamily="49" charset="0"/>
+                <a:cs typeface="JetBrains Mono" panose="02000009000000000000" pitchFamily="49" charset="0"/>
+              </a:rPr>
+              <a:t>var </a:t>
+            </a:r>
+            <a:r>
+              <a:rPr lang="en-US" sz="1400" dirty="0" err="1">
+                <a:solidFill>
+                  <a:srgbClr val="000000"/>
+                </a:solidFill>
+                <a:effectLst/>
+                <a:latin typeface="JetBrains Mono" panose="02000009000000000000" pitchFamily="49" charset="0"/>
+                <a:ea typeface="JetBrains Mono" panose="02000009000000000000" pitchFamily="49" charset="0"/>
+                <a:cs typeface="JetBrains Mono" panose="02000009000000000000" pitchFamily="49" charset="0"/>
+              </a:rPr>
+              <a:t>ecSets</a:t>
+            </a:r>
+            <a:r>
+              <a:rPr lang="en-US" sz="1400" dirty="0">
+                <a:solidFill>
+                  <a:srgbClr val="000000"/>
+                </a:solidFill>
+                <a:effectLst/>
+                <a:latin typeface="JetBrains Mono" panose="02000009000000000000" pitchFamily="49" charset="0"/>
+                <a:ea typeface="JetBrains Mono" panose="02000009000000000000" pitchFamily="49" charset="0"/>
+                <a:cs typeface="JetBrains Mono" panose="02000009000000000000" pitchFamily="49" charset="0"/>
+              </a:rPr>
+              <a:t> = </a:t>
+            </a:r>
+            <a:r>
+              <a:rPr lang="en-US" sz="1400" dirty="0" err="1">
+                <a:solidFill>
+                  <a:srgbClr val="A10000"/>
+                </a:solidFill>
+                <a:effectLst/>
+                <a:latin typeface="JetBrains Mono" panose="02000009000000000000" pitchFamily="49" charset="0"/>
+                <a:ea typeface="JetBrains Mono" panose="02000009000000000000" pitchFamily="49" charset="0"/>
+                <a:cs typeface="JetBrains Mono" panose="02000009000000000000" pitchFamily="49" charset="0"/>
+              </a:rPr>
+              <a:t>Sets</a:t>
+            </a:r>
+            <a:r>
+              <a:rPr lang="en-US" sz="1400" dirty="0" err="1">
+                <a:solidFill>
+                  <a:srgbClr val="000000"/>
+                </a:solidFill>
+                <a:effectLst/>
+                <a:latin typeface="JetBrains Mono" panose="02000009000000000000" pitchFamily="49" charset="0"/>
+                <a:ea typeface="JetBrains Mono" panose="02000009000000000000" pitchFamily="49" charset="0"/>
+                <a:cs typeface="JetBrains Mono" panose="02000009000000000000" pitchFamily="49" charset="0"/>
+              </a:rPr>
+              <a:t>.</a:t>
+            </a:r>
+            <a:r>
+              <a:rPr lang="en-US" sz="1400" b="1" i="1" dirty="0" err="1">
+                <a:solidFill>
+                  <a:srgbClr val="660E7A"/>
+                </a:solidFill>
+                <a:effectLst/>
+                <a:latin typeface="JetBrains Mono" panose="02000009000000000000" pitchFamily="49" charset="0"/>
+                <a:ea typeface="JetBrains Mono" panose="02000009000000000000" pitchFamily="49" charset="0"/>
+                <a:cs typeface="JetBrains Mono" panose="02000009000000000000" pitchFamily="49" charset="0"/>
+              </a:rPr>
+              <a:t>mutable</a:t>
+            </a:r>
+            <a:r>
+              <a:rPr lang="en-US" sz="1400" dirty="0" err="1">
+                <a:solidFill>
+                  <a:srgbClr val="000000"/>
+                </a:solidFill>
+                <a:effectLst/>
+                <a:latin typeface="JetBrains Mono" panose="02000009000000000000" pitchFamily="49" charset="0"/>
+                <a:ea typeface="JetBrains Mono" panose="02000009000000000000" pitchFamily="49" charset="0"/>
+                <a:cs typeface="JetBrains Mono" panose="02000009000000000000" pitchFamily="49" charset="0"/>
+              </a:rPr>
+              <a:t>.of</a:t>
+            </a:r>
+            <a:r>
+              <a:rPr lang="en-US" sz="1400" dirty="0">
+                <a:solidFill>
+                  <a:srgbClr val="000000"/>
+                </a:solidFill>
+                <a:effectLst/>
+                <a:latin typeface="JetBrains Mono" panose="02000009000000000000" pitchFamily="49" charset="0"/>
+                <a:ea typeface="JetBrains Mono" panose="02000009000000000000" pitchFamily="49" charset="0"/>
+                <a:cs typeface="JetBrains Mono" panose="02000009000000000000" pitchFamily="49" charset="0"/>
+              </a:rPr>
+              <a:t>(ecMutableSet1, ecImmutableSet1, ecMutableSet2, ecImmutableSet2);</a:t>
+            </a:r>
+            <a:br>
+              <a:rPr lang="en-US" sz="1400" dirty="0">
+                <a:solidFill>
+                  <a:srgbClr val="000000"/>
+                </a:solidFill>
+                <a:effectLst/>
+                <a:latin typeface="JetBrains Mono" panose="02000009000000000000" pitchFamily="49" charset="0"/>
+                <a:ea typeface="JetBrains Mono" panose="02000009000000000000" pitchFamily="49" charset="0"/>
+                <a:cs typeface="JetBrains Mono" panose="02000009000000000000" pitchFamily="49" charset="0"/>
+              </a:rPr>
+            </a:br>
+            <a:endParaRPr lang="en-US" sz="1400" dirty="0">
+              <a:solidFill>
+                <a:srgbClr val="000000"/>
+              </a:solidFill>
+              <a:effectLst/>
+              <a:latin typeface="JetBrains Mono" panose="02000009000000000000" pitchFamily="49" charset="0"/>
+              <a:ea typeface="JetBrains Mono" panose="02000009000000000000" pitchFamily="49" charset="0"/>
+              <a:cs typeface="JetBrains Mono" panose="02000009000000000000" pitchFamily="49" charset="0"/>
+            </a:endParaRPr>
+          </a:p>
+          <a:p>
+            <a:pPr>
+              <a:lnSpc>
+                <a:spcPts val="1900"/>
+              </a:lnSpc>
+              <a:buNone/>
+            </a:pPr>
+            <a:r>
+              <a:rPr lang="en-US" sz="1400" dirty="0">
+                <a:solidFill>
+                  <a:srgbClr val="000000"/>
+                </a:solidFill>
+                <a:effectLst/>
+                <a:latin typeface="JetBrains Mono" panose="02000009000000000000" pitchFamily="49" charset="0"/>
+                <a:ea typeface="JetBrains Mono" panose="02000009000000000000" pitchFamily="49" charset="0"/>
+                <a:cs typeface="JetBrains Mono" panose="02000009000000000000" pitchFamily="49" charset="0"/>
+              </a:rPr>
+              <a:t>    </a:t>
+            </a:r>
+            <a:r>
+              <a:rPr lang="en-US" sz="1400" dirty="0">
+                <a:solidFill>
+                  <a:schemeClr val="bg2">
+                    <a:lumMod val="50000"/>
+                  </a:schemeClr>
+                </a:solidFill>
+                <a:effectLst/>
+                <a:latin typeface="JetBrains Mono" panose="02000009000000000000" pitchFamily="49" charset="0"/>
+                <a:ea typeface="JetBrains Mono" panose="02000009000000000000" pitchFamily="49" charset="0"/>
+                <a:cs typeface="JetBrains Mono" panose="02000009000000000000" pitchFamily="49" charset="0"/>
+              </a:rPr>
+              <a:t>// Eclipse Collection </a:t>
+            </a:r>
+            <a:r>
+              <a:rPr lang="en-US" sz="1400" dirty="0" err="1">
+                <a:solidFill>
+                  <a:schemeClr val="bg2">
+                    <a:lumMod val="50000"/>
+                  </a:schemeClr>
+                </a:solidFill>
+                <a:effectLst/>
+                <a:latin typeface="JetBrains Mono" panose="02000009000000000000" pitchFamily="49" charset="0"/>
+                <a:ea typeface="JetBrains Mono" panose="02000009000000000000" pitchFamily="49" charset="0"/>
+                <a:cs typeface="JetBrains Mono" panose="02000009000000000000" pitchFamily="49" charset="0"/>
+              </a:rPr>
+              <a:t>SetIterable</a:t>
+            </a:r>
+            <a:r>
+              <a:rPr lang="en-US" sz="1400" dirty="0">
+                <a:solidFill>
+                  <a:schemeClr val="bg2">
+                    <a:lumMod val="50000"/>
+                  </a:schemeClr>
+                </a:solidFill>
+                <a:effectLst/>
+                <a:latin typeface="JetBrains Mono" panose="02000009000000000000" pitchFamily="49" charset="0"/>
+                <a:ea typeface="JetBrains Mono" panose="02000009000000000000" pitchFamily="49" charset="0"/>
+                <a:cs typeface="JetBrains Mono" panose="02000009000000000000" pitchFamily="49" charset="0"/>
+              </a:rPr>
+              <a:t> type defines methods like </a:t>
+            </a:r>
+            <a:r>
+              <a:rPr lang="en-US" sz="1400" dirty="0" err="1">
+                <a:solidFill>
+                  <a:schemeClr val="bg2">
+                    <a:lumMod val="50000"/>
+                  </a:schemeClr>
+                </a:solidFill>
+                <a:effectLst/>
+                <a:latin typeface="JetBrains Mono" panose="02000009000000000000" pitchFamily="49" charset="0"/>
+                <a:ea typeface="JetBrains Mono" panose="02000009000000000000" pitchFamily="49" charset="0"/>
+                <a:cs typeface="JetBrains Mono" panose="02000009000000000000" pitchFamily="49" charset="0"/>
+              </a:rPr>
+              <a:t>cartesianProduct</a:t>
+            </a:r>
+            <a:r>
+              <a:rPr lang="en-US" sz="1400" dirty="0">
+                <a:solidFill>
+                  <a:schemeClr val="bg2">
+                    <a:lumMod val="50000"/>
+                  </a:schemeClr>
+                </a:solidFill>
+                <a:effectLst/>
+                <a:latin typeface="JetBrains Mono" panose="02000009000000000000" pitchFamily="49" charset="0"/>
+                <a:ea typeface="JetBrains Mono" panose="02000009000000000000" pitchFamily="49" charset="0"/>
+                <a:cs typeface="JetBrains Mono" panose="02000009000000000000" pitchFamily="49" charset="0"/>
+              </a:rPr>
+              <a:t>()</a:t>
+            </a:r>
+          </a:p>
+          <a:p>
+            <a:pPr>
+              <a:lnSpc>
+                <a:spcPts val="1900"/>
+              </a:lnSpc>
+              <a:buNone/>
+            </a:pPr>
+            <a:r>
+              <a:rPr lang="en-US" sz="1400" dirty="0">
+                <a:solidFill>
+                  <a:srgbClr val="000000"/>
+                </a:solidFill>
+                <a:effectLst/>
+                <a:latin typeface="JetBrains Mono" panose="02000009000000000000" pitchFamily="49" charset="0"/>
+                <a:ea typeface="JetBrains Mono" panose="02000009000000000000" pitchFamily="49" charset="0"/>
+                <a:cs typeface="JetBrains Mono" panose="02000009000000000000" pitchFamily="49" charset="0"/>
+              </a:rPr>
+              <a:t>    </a:t>
+            </a:r>
+            <a:r>
+              <a:rPr lang="en-US" sz="1400" dirty="0" err="1">
+                <a:solidFill>
+                  <a:srgbClr val="000000"/>
+                </a:solidFill>
+                <a:effectLst/>
+                <a:latin typeface="JetBrains Mono" panose="02000009000000000000" pitchFamily="49" charset="0"/>
+                <a:ea typeface="JetBrains Mono" panose="02000009000000000000" pitchFamily="49" charset="0"/>
+                <a:cs typeface="JetBrains Mono" panose="02000009000000000000" pitchFamily="49" charset="0"/>
+              </a:rPr>
+              <a:t>jdkSets.cartesianProduct</a:t>
+            </a:r>
+            <a:r>
+              <a:rPr lang="en-US" sz="1400" dirty="0">
+                <a:solidFill>
+                  <a:srgbClr val="000000"/>
+                </a:solidFill>
+                <a:effectLst/>
+                <a:latin typeface="JetBrains Mono" panose="02000009000000000000" pitchFamily="49" charset="0"/>
+                <a:ea typeface="JetBrains Mono" panose="02000009000000000000" pitchFamily="49" charset="0"/>
+                <a:cs typeface="JetBrains Mono" panose="02000009000000000000" pitchFamily="49" charset="0"/>
+              </a:rPr>
+              <a:t>(</a:t>
+            </a:r>
+            <a:r>
+              <a:rPr lang="en-US" sz="1400" dirty="0" err="1">
+                <a:solidFill>
+                  <a:srgbClr val="000000"/>
+                </a:solidFill>
+                <a:effectLst/>
+                <a:latin typeface="JetBrains Mono" panose="02000009000000000000" pitchFamily="49" charset="0"/>
+                <a:ea typeface="JetBrains Mono" panose="02000009000000000000" pitchFamily="49" charset="0"/>
+                <a:cs typeface="JetBrains Mono" panose="02000009000000000000" pitchFamily="49" charset="0"/>
+              </a:rPr>
+              <a:t>ecSets</a:t>
+            </a:r>
+            <a:r>
+              <a:rPr lang="en-US" sz="1400" dirty="0">
+                <a:solidFill>
+                  <a:srgbClr val="000000"/>
+                </a:solidFill>
+                <a:effectLst/>
+                <a:latin typeface="JetBrains Mono" panose="02000009000000000000" pitchFamily="49" charset="0"/>
+                <a:ea typeface="JetBrains Mono" panose="02000009000000000000" pitchFamily="49" charset="0"/>
+                <a:cs typeface="JetBrains Mono" panose="02000009000000000000" pitchFamily="49" charset="0"/>
+              </a:rPr>
+              <a:t>)</a:t>
+            </a:r>
+            <a:br>
+              <a:rPr lang="en-US" sz="1400" dirty="0">
+                <a:solidFill>
+                  <a:srgbClr val="000000"/>
+                </a:solidFill>
+                <a:effectLst/>
+                <a:latin typeface="JetBrains Mono" panose="02000009000000000000" pitchFamily="49" charset="0"/>
+                <a:ea typeface="JetBrains Mono" panose="02000009000000000000" pitchFamily="49" charset="0"/>
+                <a:cs typeface="JetBrains Mono" panose="02000009000000000000" pitchFamily="49" charset="0"/>
+              </a:rPr>
+            </a:br>
+            <a:r>
+              <a:rPr lang="en-US" sz="1400" dirty="0">
+                <a:solidFill>
+                  <a:srgbClr val="000000"/>
+                </a:solidFill>
+                <a:effectLst/>
+                <a:latin typeface="JetBrains Mono" panose="02000009000000000000" pitchFamily="49" charset="0"/>
+                <a:ea typeface="JetBrains Mono" panose="02000009000000000000" pitchFamily="49" charset="0"/>
+                <a:cs typeface="JetBrains Mono" panose="02000009000000000000" pitchFamily="49" charset="0"/>
+              </a:rPr>
+              <a:t>            .</a:t>
+            </a:r>
+            <a:r>
+              <a:rPr lang="en-US" sz="1400" dirty="0" err="1">
+                <a:solidFill>
+                  <a:srgbClr val="000000"/>
+                </a:solidFill>
+                <a:effectLst/>
+                <a:latin typeface="JetBrains Mono" panose="02000009000000000000" pitchFamily="49" charset="0"/>
+                <a:ea typeface="JetBrains Mono" panose="02000009000000000000" pitchFamily="49" charset="0"/>
+                <a:cs typeface="JetBrains Mono" panose="02000009000000000000" pitchFamily="49" charset="0"/>
+              </a:rPr>
+              <a:t>forEach</a:t>
+            </a:r>
+            <a:r>
+              <a:rPr lang="en-US" sz="1400" dirty="0">
+                <a:solidFill>
+                  <a:srgbClr val="000000"/>
+                </a:solidFill>
+                <a:effectLst/>
+                <a:latin typeface="JetBrains Mono" panose="02000009000000000000" pitchFamily="49" charset="0"/>
+                <a:ea typeface="JetBrains Mono" panose="02000009000000000000" pitchFamily="49" charset="0"/>
+                <a:cs typeface="JetBrains Mono" panose="02000009000000000000" pitchFamily="49" charset="0"/>
+              </a:rPr>
+              <a:t>(</a:t>
+            </a:r>
+            <a:r>
+              <a:rPr lang="en-US" sz="1400" dirty="0">
+                <a:solidFill>
+                  <a:srgbClr val="009911"/>
+                </a:solidFill>
+                <a:effectLst/>
+                <a:latin typeface="JetBrains Mono" panose="02000009000000000000" pitchFamily="49" charset="0"/>
+                <a:ea typeface="JetBrains Mono" panose="02000009000000000000" pitchFamily="49" charset="0"/>
+                <a:cs typeface="JetBrains Mono" panose="02000009000000000000" pitchFamily="49" charset="0"/>
+              </a:rPr>
+              <a:t>pair </a:t>
+            </a:r>
+            <a:r>
+              <a:rPr lang="en-US" sz="1400" dirty="0">
+                <a:solidFill>
+                  <a:srgbClr val="000000"/>
+                </a:solidFill>
+                <a:effectLst/>
+                <a:latin typeface="JetBrains Mono" panose="02000009000000000000" pitchFamily="49" charset="0"/>
+                <a:ea typeface="JetBrains Mono" panose="02000009000000000000" pitchFamily="49" charset="0"/>
+                <a:cs typeface="JetBrains Mono" panose="02000009000000000000" pitchFamily="49" charset="0"/>
+              </a:rPr>
+              <a:t>-&gt; </a:t>
+            </a:r>
+            <a:r>
+              <a:rPr lang="en-US" sz="1400" i="1" dirty="0" err="1">
+                <a:solidFill>
+                  <a:srgbClr val="000000"/>
+                </a:solidFill>
+                <a:effectLst/>
+                <a:latin typeface="JetBrains Mono" panose="02000009000000000000" pitchFamily="49" charset="0"/>
+                <a:ea typeface="JetBrains Mono" panose="02000009000000000000" pitchFamily="49" charset="0"/>
+                <a:cs typeface="JetBrains Mono" panose="02000009000000000000" pitchFamily="49" charset="0"/>
+              </a:rPr>
+              <a:t>assertEquals</a:t>
+            </a:r>
+            <a:r>
+              <a:rPr lang="en-US" sz="1400" dirty="0">
+                <a:solidFill>
+                  <a:srgbClr val="000000"/>
+                </a:solidFill>
+                <a:effectLst/>
+                <a:latin typeface="JetBrains Mono" panose="02000009000000000000" pitchFamily="49" charset="0"/>
+                <a:ea typeface="JetBrains Mono" panose="02000009000000000000" pitchFamily="49" charset="0"/>
+                <a:cs typeface="JetBrains Mono" panose="02000009000000000000" pitchFamily="49" charset="0"/>
+              </a:rPr>
+              <a:t>(</a:t>
+            </a:r>
+            <a:r>
+              <a:rPr lang="en-US" sz="1400" dirty="0" err="1">
+                <a:solidFill>
+                  <a:srgbClr val="009911"/>
+                </a:solidFill>
+                <a:effectLst/>
+                <a:latin typeface="JetBrains Mono" panose="02000009000000000000" pitchFamily="49" charset="0"/>
+                <a:ea typeface="JetBrains Mono" panose="02000009000000000000" pitchFamily="49" charset="0"/>
+                <a:cs typeface="JetBrains Mono" panose="02000009000000000000" pitchFamily="49" charset="0"/>
+              </a:rPr>
+              <a:t>pair</a:t>
+            </a:r>
+            <a:r>
+              <a:rPr lang="en-US" sz="1400" dirty="0" err="1">
+                <a:solidFill>
+                  <a:srgbClr val="000000"/>
+                </a:solidFill>
+                <a:effectLst/>
+                <a:latin typeface="JetBrains Mono" panose="02000009000000000000" pitchFamily="49" charset="0"/>
+                <a:ea typeface="JetBrains Mono" panose="02000009000000000000" pitchFamily="49" charset="0"/>
+                <a:cs typeface="JetBrains Mono" panose="02000009000000000000" pitchFamily="49" charset="0"/>
+              </a:rPr>
+              <a:t>.getOne</a:t>
+            </a:r>
+            <a:r>
+              <a:rPr lang="en-US" sz="1400" dirty="0">
+                <a:solidFill>
+                  <a:srgbClr val="000000"/>
+                </a:solidFill>
+                <a:effectLst/>
+                <a:latin typeface="JetBrains Mono" panose="02000009000000000000" pitchFamily="49" charset="0"/>
+                <a:ea typeface="JetBrains Mono" panose="02000009000000000000" pitchFamily="49" charset="0"/>
+                <a:cs typeface="JetBrains Mono" panose="02000009000000000000" pitchFamily="49" charset="0"/>
+              </a:rPr>
+              <a:t>(), </a:t>
+            </a:r>
+            <a:r>
+              <a:rPr lang="en-US" sz="1400" dirty="0" err="1">
+                <a:solidFill>
+                  <a:srgbClr val="009911"/>
+                </a:solidFill>
+                <a:effectLst/>
+                <a:latin typeface="JetBrains Mono" panose="02000009000000000000" pitchFamily="49" charset="0"/>
+                <a:ea typeface="JetBrains Mono" panose="02000009000000000000" pitchFamily="49" charset="0"/>
+                <a:cs typeface="JetBrains Mono" panose="02000009000000000000" pitchFamily="49" charset="0"/>
+              </a:rPr>
+              <a:t>pair</a:t>
+            </a:r>
+            <a:r>
+              <a:rPr lang="en-US" sz="1400" dirty="0" err="1">
+                <a:solidFill>
+                  <a:srgbClr val="000000"/>
+                </a:solidFill>
+                <a:effectLst/>
+                <a:latin typeface="JetBrains Mono" panose="02000009000000000000" pitchFamily="49" charset="0"/>
+                <a:ea typeface="JetBrains Mono" panose="02000009000000000000" pitchFamily="49" charset="0"/>
+                <a:cs typeface="JetBrains Mono" panose="02000009000000000000" pitchFamily="49" charset="0"/>
+              </a:rPr>
+              <a:t>.getTwo</a:t>
+            </a:r>
+            <a:r>
+              <a:rPr lang="en-US" sz="1400" dirty="0">
+                <a:solidFill>
+                  <a:srgbClr val="000000"/>
+                </a:solidFill>
+                <a:effectLst/>
+                <a:latin typeface="JetBrains Mono" panose="02000009000000000000" pitchFamily="49" charset="0"/>
+                <a:ea typeface="JetBrains Mono" panose="02000009000000000000" pitchFamily="49" charset="0"/>
+                <a:cs typeface="JetBrains Mono" panose="02000009000000000000" pitchFamily="49" charset="0"/>
+              </a:rPr>
+              <a:t>()));</a:t>
+            </a:r>
+            <a:br>
+              <a:rPr lang="en-US" sz="1400" dirty="0">
+                <a:solidFill>
+                  <a:srgbClr val="000000"/>
+                </a:solidFill>
+                <a:effectLst/>
+                <a:latin typeface="JetBrains Mono" panose="02000009000000000000" pitchFamily="49" charset="0"/>
+                <a:ea typeface="JetBrains Mono" panose="02000009000000000000" pitchFamily="49" charset="0"/>
+                <a:cs typeface="JetBrains Mono" panose="02000009000000000000" pitchFamily="49" charset="0"/>
+              </a:rPr>
+            </a:br>
+            <a:r>
+              <a:rPr lang="en-US" sz="1400" dirty="0">
+                <a:solidFill>
+                  <a:srgbClr val="000000"/>
+                </a:solidFill>
+                <a:effectLst/>
+                <a:latin typeface="JetBrains Mono" panose="02000009000000000000" pitchFamily="49" charset="0"/>
+                <a:ea typeface="JetBrains Mono" panose="02000009000000000000" pitchFamily="49" charset="0"/>
+                <a:cs typeface="JetBrains Mono" panose="02000009000000000000" pitchFamily="49" charset="0"/>
+              </a:rPr>
+              <a:t>}</a:t>
+            </a:r>
+          </a:p>
+        </p:txBody>
+      </p:sp>
+      <p:sp>
+        <p:nvSpPr>
+          <p:cNvPr id="4" name="TextBox 3">
+            <a:extLst>
+              <a:ext uri="{FF2B5EF4-FFF2-40B4-BE49-F238E27FC236}">
+                <a16:creationId xmlns:a16="http://schemas.microsoft.com/office/drawing/2014/main" id="{5C06906A-E138-4DEF-1058-A158B4B49AE5}"/>
+              </a:ext>
+            </a:extLst>
+          </p:cNvPr>
+          <p:cNvSpPr txBox="1"/>
+          <p:nvPr/>
+        </p:nvSpPr>
+        <p:spPr>
+          <a:xfrm>
+            <a:off x="0" y="6126480"/>
+            <a:ext cx="731520" cy="584775"/>
+          </a:xfrm>
+          <a:prstGeom prst="rect">
+            <a:avLst/>
+          </a:prstGeom>
+          <a:noFill/>
+          <a:ln w="12700" cap="flat">
+            <a:noFill/>
+            <a:miter lim="400000"/>
+          </a:ln>
+          <a:effectLst/>
+          <a:sp3d/>
+        </p:spPr>
+        <p:style>
+          <a:lnRef idx="0">
+            <a:scrgbClr r="0" g="0" b="0"/>
+          </a:lnRef>
+          <a:fillRef idx="0">
+            <a:scrgbClr r="0" g="0" b="0"/>
+          </a:fillRef>
+          <a:effectRef idx="0">
+            <a:scrgbClr r="0" g="0" b="0"/>
+          </a:effectRef>
+          <a:fontRef idx="none"/>
+        </p:style>
+        <p:txBody>
+          <a:bodyPr wrap="square">
+            <a:spAutoFit/>
+          </a:bodyPr>
+          <a:lstStyle/>
+          <a:p>
+            <a:r>
+              <a:rPr lang="en-US" sz="3200" b="0" i="0" u="none" strike="noStrike" dirty="0">
+                <a:solidFill>
+                  <a:srgbClr val="000000"/>
+                </a:solidFill>
+                <a:effectLst/>
+                <a:latin typeface="Arial" panose="020B0604020202020204" pitchFamily="34" charset="0"/>
+              </a:rPr>
+              <a:t>🐿️</a:t>
+            </a:r>
+            <a:endParaRPr lang="en-US" sz="3200" dirty="0"/>
+          </a:p>
+        </p:txBody>
+      </p:sp>
+    </p:spTree>
+    <p:extLst>
+      <p:ext uri="{BB962C8B-B14F-4D97-AF65-F5344CB8AC3E}">
+        <p14:creationId xmlns:p14="http://schemas.microsoft.com/office/powerpoint/2010/main" val="2861380186"/>
+      </p:ext>
+    </p:extLst>
+  </p:cSld>
+  <p:clrMapOvr>
+    <a:masterClrMapping/>
+  </p:clrMapOvr>
+</p:sld>
+</file>
+
+<file path=ppt/slides/slide7.xml><?xml version="1.0" encoding="utf-8"?>
+<p:sld xmlns:a="http://schemas.openxmlformats.org/drawingml/2006/main" xmlns:r="http://schemas.openxmlformats.org/officeDocument/2006/relationships" xmlns:p="http://schemas.openxmlformats.org/presentationml/2006/main">
+  <p:cSld>
+    <p:spTree>
+      <p:nvGrpSpPr>
         <p:cNvPr id="1" name="">
           <a:extLst>
             <a:ext uri="{FF2B5EF4-FFF2-40B4-BE49-F238E27FC236}">
@@ -17238,7 +19443,7 @@
           </a:ln>
           <a:extLst>
             <a:ext uri="{C572A759-6A51-4108-AA02-DFA0A04FC94B}">
-              <ma14:wrappingTextBoxFlag xmlns:ma14="http://schemas.microsoft.com/office/mac/drawingml/2011/main" xmlns:a14="http://schemas.microsoft.com/office/drawing/2010/main" xmlns:m="http://schemas.openxmlformats.org/officeDocument/2006/math" xmlns="" xmlns:lc="http://schemas.openxmlformats.org/drawingml/2006/lockedCanvas" val="1"/>
+              <ma14:wrappingTextBoxFlag xmlns:lc="http://schemas.openxmlformats.org/drawingml/2006/lockedCanvas" xmlns="" xmlns:m="http://schemas.openxmlformats.org/officeDocument/2006/math" xmlns:a14="http://schemas.microsoft.com/office/drawing/2010/main" xmlns:ma14="http://schemas.microsoft.com/office/mac/drawingml/2011/main" val="1"/>
             </a:ext>
           </a:extLst>
         </p:spPr>
@@ -17606,7 +19811,7 @@
           </a:ln>
           <a:extLst>
             <a:ext uri="{C572A759-6A51-4108-AA02-DFA0A04FC94B}">
-              <ma14:wrappingTextBoxFlag xmlns:ma14="http://schemas.microsoft.com/office/mac/drawingml/2011/main" xmlns:a14="http://schemas.microsoft.com/office/drawing/2010/main" xmlns:m="http://schemas.openxmlformats.org/officeDocument/2006/math" xmlns="" xmlns:lc="http://schemas.openxmlformats.org/drawingml/2006/lockedCanvas" val="1"/>
+              <ma14:wrappingTextBoxFlag xmlns:lc="http://schemas.openxmlformats.org/drawingml/2006/lockedCanvas" xmlns="" xmlns:m="http://schemas.openxmlformats.org/officeDocument/2006/math" xmlns:a14="http://schemas.microsoft.com/office/drawing/2010/main" xmlns:ma14="http://schemas.microsoft.com/office/mac/drawingml/2011/main" val="1"/>
             </a:ext>
           </a:extLst>
         </p:spPr>
@@ -17973,7 +20178,7 @@
           </a:ln>
           <a:extLst>
             <a:ext uri="{C572A759-6A51-4108-AA02-DFA0A04FC94B}">
-              <ma14:wrappingTextBoxFlag xmlns:ma14="http://schemas.microsoft.com/office/mac/drawingml/2011/main" xmlns:a14="http://schemas.microsoft.com/office/drawing/2010/main" xmlns:m="http://schemas.openxmlformats.org/officeDocument/2006/math" xmlns="" xmlns:lc="http://schemas.openxmlformats.org/drawingml/2006/lockedCanvas" val="1"/>
+              <ma14:wrappingTextBoxFlag xmlns:lc="http://schemas.openxmlformats.org/drawingml/2006/lockedCanvas" xmlns="" xmlns:m="http://schemas.openxmlformats.org/officeDocument/2006/math" xmlns:a14="http://schemas.microsoft.com/office/drawing/2010/main" xmlns:ma14="http://schemas.microsoft.com/office/mac/drawingml/2011/main" val="1"/>
             </a:ext>
           </a:extLst>
         </p:spPr>
@@ -18330,7 +20535,7 @@
           </a:ln>
           <a:extLst>
             <a:ext uri="{C572A759-6A51-4108-AA02-DFA0A04FC94B}">
-              <ma14:wrappingTextBoxFlag xmlns:ma14="http://schemas.microsoft.com/office/mac/drawingml/2011/main" xmlns:a14="http://schemas.microsoft.com/office/drawing/2010/main" xmlns:m="http://schemas.openxmlformats.org/officeDocument/2006/math" xmlns="" xmlns:lc="http://schemas.openxmlformats.org/drawingml/2006/lockedCanvas" val="1"/>
+              <ma14:wrappingTextBoxFlag xmlns:lc="http://schemas.openxmlformats.org/drawingml/2006/lockedCanvas" xmlns="" xmlns:m="http://schemas.openxmlformats.org/officeDocument/2006/math" xmlns:a14="http://schemas.microsoft.com/office/drawing/2010/main" xmlns:ma14="http://schemas.microsoft.com/office/mac/drawingml/2011/main" val="1"/>
             </a:ext>
           </a:extLst>
         </p:spPr>
@@ -18679,7 +20884,7 @@
           </a:ln>
           <a:extLst>
             <a:ext uri="{C572A759-6A51-4108-AA02-DFA0A04FC94B}">
-              <ma14:wrappingTextBoxFlag xmlns:ma14="http://schemas.microsoft.com/office/mac/drawingml/2011/main" xmlns:a14="http://schemas.microsoft.com/office/drawing/2010/main" xmlns:m="http://schemas.openxmlformats.org/officeDocument/2006/math" xmlns="" xmlns:lc="http://schemas.openxmlformats.org/drawingml/2006/lockedCanvas" val="1"/>
+              <ma14:wrappingTextBoxFlag xmlns:lc="http://schemas.openxmlformats.org/drawingml/2006/lockedCanvas" xmlns="" xmlns:m="http://schemas.openxmlformats.org/officeDocument/2006/math" xmlns:a14="http://schemas.microsoft.com/office/drawing/2010/main" xmlns:ma14="http://schemas.microsoft.com/office/mac/drawingml/2011/main" val="1"/>
             </a:ext>
           </a:extLst>
         </p:spPr>
@@ -19036,7 +21241,7 @@
           </a:ln>
           <a:extLst>
             <a:ext uri="{C572A759-6A51-4108-AA02-DFA0A04FC94B}">
-              <ma14:wrappingTextBoxFlag xmlns:ma14="http://schemas.microsoft.com/office/mac/drawingml/2011/main" xmlns:a14="http://schemas.microsoft.com/office/drawing/2010/main" xmlns:m="http://schemas.openxmlformats.org/officeDocument/2006/math" xmlns="" xmlns:lc="http://schemas.openxmlformats.org/drawingml/2006/lockedCanvas" val="1"/>
+              <ma14:wrappingTextBoxFlag xmlns:lc="http://schemas.openxmlformats.org/drawingml/2006/lockedCanvas" xmlns="" xmlns:m="http://schemas.openxmlformats.org/officeDocument/2006/math" xmlns:a14="http://schemas.microsoft.com/office/drawing/2010/main" xmlns:ma14="http://schemas.microsoft.com/office/mac/drawingml/2011/main" val="1"/>
             </a:ext>
           </a:extLst>
         </p:spPr>
@@ -19385,7 +21590,7 @@
           </a:ln>
           <a:extLst>
             <a:ext uri="{C572A759-6A51-4108-AA02-DFA0A04FC94B}">
-              <ma14:wrappingTextBoxFlag xmlns:ma14="http://schemas.microsoft.com/office/mac/drawingml/2011/main" xmlns:a14="http://schemas.microsoft.com/office/drawing/2010/main" xmlns:m="http://schemas.openxmlformats.org/officeDocument/2006/math" xmlns="" xmlns:lc="http://schemas.openxmlformats.org/drawingml/2006/lockedCanvas" val="1"/>
+              <ma14:wrappingTextBoxFlag xmlns:lc="http://schemas.openxmlformats.org/drawingml/2006/lockedCanvas" xmlns="" xmlns:m="http://schemas.openxmlformats.org/officeDocument/2006/math" xmlns:a14="http://schemas.microsoft.com/office/drawing/2010/main" xmlns:ma14="http://schemas.microsoft.com/office/mac/drawingml/2011/main" val="1"/>
             </a:ext>
           </a:extLst>
         </p:spPr>
@@ -19749,7 +21954,7 @@
           </a:ln>
           <a:extLst>
             <a:ext uri="{C572A759-6A51-4108-AA02-DFA0A04FC94B}">
-              <ma14:wrappingTextBoxFlag xmlns:ma14="http://schemas.microsoft.com/office/mac/drawingml/2011/main" xmlns:a14="http://schemas.microsoft.com/office/drawing/2010/main" xmlns:m="http://schemas.openxmlformats.org/officeDocument/2006/math" xmlns="" xmlns:lc="http://schemas.openxmlformats.org/drawingml/2006/lockedCanvas" val="1"/>
+              <ma14:wrappingTextBoxFlag xmlns:lc="http://schemas.openxmlformats.org/drawingml/2006/lockedCanvas" xmlns="" xmlns:m="http://schemas.openxmlformats.org/officeDocument/2006/math" xmlns:a14="http://schemas.microsoft.com/office/drawing/2010/main" xmlns:ma14="http://schemas.microsoft.com/office/mac/drawingml/2011/main" val="1"/>
             </a:ext>
           </a:extLst>
         </p:spPr>
@@ -20088,7 +22293,7 @@
           </a:ln>
           <a:extLst>
             <a:ext uri="{C572A759-6A51-4108-AA02-DFA0A04FC94B}">
-              <ma14:wrappingTextBoxFlag xmlns:ma14="http://schemas.microsoft.com/office/mac/drawingml/2011/main" xmlns:a14="http://schemas.microsoft.com/office/drawing/2010/main" xmlns:m="http://schemas.openxmlformats.org/officeDocument/2006/math" xmlns="" xmlns:lc="http://schemas.openxmlformats.org/drawingml/2006/lockedCanvas" val="1"/>
+              <ma14:wrappingTextBoxFlag xmlns:lc="http://schemas.openxmlformats.org/drawingml/2006/lockedCanvas" xmlns="" xmlns:m="http://schemas.openxmlformats.org/officeDocument/2006/math" xmlns:a14="http://schemas.microsoft.com/office/drawing/2010/main" xmlns:ma14="http://schemas.microsoft.com/office/mac/drawingml/2011/main" val="1"/>
             </a:ext>
           </a:extLst>
         </p:spPr>
@@ -20427,7 +22632,7 @@
           </a:ln>
           <a:extLst>
             <a:ext uri="{C572A759-6A51-4108-AA02-DFA0A04FC94B}">
-              <ma14:wrappingTextBoxFlag xmlns:ma14="http://schemas.microsoft.com/office/mac/drawingml/2011/main" xmlns:a14="http://schemas.microsoft.com/office/drawing/2010/main" xmlns:m="http://schemas.openxmlformats.org/officeDocument/2006/math" xmlns="" xmlns:lc="http://schemas.openxmlformats.org/drawingml/2006/lockedCanvas" val="1"/>
+              <ma14:wrappingTextBoxFlag xmlns:lc="http://schemas.openxmlformats.org/drawingml/2006/lockedCanvas" xmlns="" xmlns:m="http://schemas.openxmlformats.org/officeDocument/2006/math" xmlns:a14="http://schemas.microsoft.com/office/drawing/2010/main" xmlns:ma14="http://schemas.microsoft.com/office/mac/drawingml/2011/main" val="1"/>
             </a:ext>
           </a:extLst>
         </p:spPr>
@@ -20766,7 +22971,7 @@
           </a:ln>
           <a:extLst>
             <a:ext uri="{C572A759-6A51-4108-AA02-DFA0A04FC94B}">
-              <ma14:wrappingTextBoxFlag xmlns:ma14="http://schemas.microsoft.com/office/mac/drawingml/2011/main" xmlns:a14="http://schemas.microsoft.com/office/drawing/2010/main" xmlns:m="http://schemas.openxmlformats.org/officeDocument/2006/math" xmlns="" xmlns:lc="http://schemas.openxmlformats.org/drawingml/2006/lockedCanvas" val="1"/>
+              <ma14:wrappingTextBoxFlag xmlns:lc="http://schemas.openxmlformats.org/drawingml/2006/lockedCanvas" xmlns="" xmlns:m="http://schemas.openxmlformats.org/officeDocument/2006/math" xmlns:a14="http://schemas.microsoft.com/office/drawing/2010/main" xmlns:ma14="http://schemas.microsoft.com/office/mac/drawingml/2011/main" val="1"/>
             </a:ext>
           </a:extLst>
         </p:spPr>
@@ -21135,7 +23340,7 @@
           </a:ln>
           <a:extLst>
             <a:ext uri="{C572A759-6A51-4108-AA02-DFA0A04FC94B}">
-              <ma14:wrappingTextBoxFlag xmlns:ma14="http://schemas.microsoft.com/office/mac/drawingml/2011/main" xmlns:a14="http://schemas.microsoft.com/office/drawing/2010/main" xmlns:m="http://schemas.openxmlformats.org/officeDocument/2006/math" xmlns="" xmlns:lc="http://schemas.openxmlformats.org/drawingml/2006/lockedCanvas" val="1"/>
+              <ma14:wrappingTextBoxFlag xmlns:lc="http://schemas.openxmlformats.org/drawingml/2006/lockedCanvas" xmlns="" xmlns:m="http://schemas.openxmlformats.org/officeDocument/2006/math" xmlns:a14="http://schemas.microsoft.com/office/drawing/2010/main" xmlns:ma14="http://schemas.microsoft.com/office/mac/drawingml/2011/main" val="1"/>
             </a:ext>
           </a:extLst>
         </p:spPr>
@@ -21492,7 +23697,7 @@
           </a:ln>
           <a:extLst>
             <a:ext uri="{C572A759-6A51-4108-AA02-DFA0A04FC94B}">
-              <ma14:wrappingTextBoxFlag xmlns:ma14="http://schemas.microsoft.com/office/mac/drawingml/2011/main" xmlns:a14="http://schemas.microsoft.com/office/drawing/2010/main" xmlns:m="http://schemas.openxmlformats.org/officeDocument/2006/math" xmlns="" xmlns:lc="http://schemas.openxmlformats.org/drawingml/2006/lockedCanvas" val="1"/>
+              <ma14:wrappingTextBoxFlag xmlns:lc="http://schemas.openxmlformats.org/drawingml/2006/lockedCanvas" xmlns="" xmlns:m="http://schemas.openxmlformats.org/officeDocument/2006/math" xmlns:a14="http://schemas.microsoft.com/office/drawing/2010/main" xmlns:ma14="http://schemas.microsoft.com/office/mac/drawingml/2011/main" val="1"/>
             </a:ext>
           </a:extLst>
         </p:spPr>
@@ -21831,7 +24036,7 @@
           </a:ln>
           <a:extLst>
             <a:ext uri="{C572A759-6A51-4108-AA02-DFA0A04FC94B}">
-              <ma14:wrappingTextBoxFlag xmlns:ma14="http://schemas.microsoft.com/office/mac/drawingml/2011/main" xmlns:a14="http://schemas.microsoft.com/office/drawing/2010/main" xmlns:m="http://schemas.openxmlformats.org/officeDocument/2006/math" xmlns="" xmlns:lc="http://schemas.openxmlformats.org/drawingml/2006/lockedCanvas" val="1"/>
+              <ma14:wrappingTextBoxFlag xmlns:lc="http://schemas.openxmlformats.org/drawingml/2006/lockedCanvas" xmlns="" xmlns:m="http://schemas.openxmlformats.org/officeDocument/2006/math" xmlns:a14="http://schemas.microsoft.com/office/drawing/2010/main" xmlns:ma14="http://schemas.microsoft.com/office/mac/drawingml/2011/main" val="1"/>
             </a:ext>
           </a:extLst>
         </p:spPr>
@@ -22170,7 +24375,7 @@
           </a:ln>
           <a:extLst>
             <a:ext uri="{C572A759-6A51-4108-AA02-DFA0A04FC94B}">
-              <ma14:wrappingTextBoxFlag xmlns:ma14="http://schemas.microsoft.com/office/mac/drawingml/2011/main" xmlns:a14="http://schemas.microsoft.com/office/drawing/2010/main" xmlns:m="http://schemas.openxmlformats.org/officeDocument/2006/math" xmlns="" xmlns:lc="http://schemas.openxmlformats.org/drawingml/2006/lockedCanvas" val="1"/>
+              <ma14:wrappingTextBoxFlag xmlns:lc="http://schemas.openxmlformats.org/drawingml/2006/lockedCanvas" xmlns="" xmlns:m="http://schemas.openxmlformats.org/officeDocument/2006/math" xmlns:a14="http://schemas.microsoft.com/office/drawing/2010/main" xmlns:ma14="http://schemas.microsoft.com/office/mac/drawingml/2011/main" val="1"/>
             </a:ext>
           </a:extLst>
         </p:spPr>
@@ -22512,7 +24717,7 @@
           </a:ln>
           <a:extLst>
             <a:ext uri="{C572A759-6A51-4108-AA02-DFA0A04FC94B}">
-              <ma14:wrappingTextBoxFlag xmlns:ma14="http://schemas.microsoft.com/office/mac/drawingml/2011/main" xmlns:a14="http://schemas.microsoft.com/office/drawing/2010/main" xmlns:m="http://schemas.openxmlformats.org/officeDocument/2006/math" xmlns="" xmlns:lc="http://schemas.openxmlformats.org/drawingml/2006/lockedCanvas" val="1"/>
+              <ma14:wrappingTextBoxFlag xmlns:lc="http://schemas.openxmlformats.org/drawingml/2006/lockedCanvas" xmlns="" xmlns:m="http://schemas.openxmlformats.org/officeDocument/2006/math" xmlns:a14="http://schemas.microsoft.com/office/drawing/2010/main" xmlns:ma14="http://schemas.microsoft.com/office/mac/drawingml/2011/main" val="1"/>
             </a:ext>
           </a:extLst>
         </p:spPr>
@@ -23553,7 +25758,7 @@
           </a:ln>
           <a:extLst>
             <a:ext uri="{C572A759-6A51-4108-AA02-DFA0A04FC94B}">
-              <ma14:wrappingTextBoxFlag xmlns:ma14="http://schemas.microsoft.com/office/mac/drawingml/2011/main" xmlns:a14="http://schemas.microsoft.com/office/drawing/2010/main" xmlns:m="http://schemas.openxmlformats.org/officeDocument/2006/math" xmlns="" xmlns:lc="http://schemas.openxmlformats.org/drawingml/2006/lockedCanvas" val="1"/>
+              <ma14:wrappingTextBoxFlag xmlns:lc="http://schemas.openxmlformats.org/drawingml/2006/lockedCanvas" xmlns="" xmlns:m="http://schemas.openxmlformats.org/officeDocument/2006/math" xmlns:a14="http://schemas.microsoft.com/office/drawing/2010/main" xmlns:ma14="http://schemas.microsoft.com/office/mac/drawingml/2011/main" val="1"/>
             </a:ext>
           </a:extLst>
         </p:spPr>
@@ -23910,7 +26115,7 @@
           </a:ln>
           <a:extLst>
             <a:ext uri="{C572A759-6A51-4108-AA02-DFA0A04FC94B}">
-              <ma14:wrappingTextBoxFlag xmlns:ma14="http://schemas.microsoft.com/office/mac/drawingml/2011/main" xmlns:a14="http://schemas.microsoft.com/office/drawing/2010/main" xmlns:m="http://schemas.openxmlformats.org/officeDocument/2006/math" xmlns="" xmlns:lc="http://schemas.openxmlformats.org/drawingml/2006/lockedCanvas" val="1"/>
+              <ma14:wrappingTextBoxFlag xmlns:lc="http://schemas.openxmlformats.org/drawingml/2006/lockedCanvas" xmlns="" xmlns:m="http://schemas.openxmlformats.org/officeDocument/2006/math" xmlns:a14="http://schemas.microsoft.com/office/drawing/2010/main" xmlns:ma14="http://schemas.microsoft.com/office/mac/drawingml/2011/main" val="1"/>
             </a:ext>
           </a:extLst>
         </p:spPr>
@@ -24247,7 +26452,7 @@
           <a:p>
             <a:fld id="{6874CE7D-5D74-4EC3-A871-8F42005EC53C}" type="slidenum">
               <a:rPr lang="en-US" smtClean="0"/>
-              <a:t>6</a:t>
+              <a:t>7</a:t>
             </a:fld>
             <a:endParaRPr lang="en-US"/>
           </a:p>
@@ -24326,7 +26531,7 @@
 </p:sld>
 </file>
 
-<file path=ppt/slides/slide7.xml><?xml version="1.0" encoding="utf-8"?>
+<file path=ppt/slides/slide8.xml><?xml version="1.0" encoding="utf-8"?>
 <p:sld xmlns:a="http://schemas.openxmlformats.org/drawingml/2006/main" xmlns:r="http://schemas.openxmlformats.org/officeDocument/2006/relationships" xmlns:p="http://schemas.openxmlformats.org/presentationml/2006/main">
   <p:cSld>
     <p:spTree>
@@ -24464,7 +26669,7 @@
               <a:effectLst/>
               <a:extLst>
                 <a:ext uri="{C572A759-6A51-4108-AA02-DFA0A04FC94B}">
-                  <ma14:wrappingTextBoxFlag xmlns:ma14="http://schemas.microsoft.com/office/mac/drawingml/2011/main" xmlns="" val="1"/>
+                  <ma14:wrappingTextBoxFlag xmlns="" xmlns:ma14="http://schemas.microsoft.com/office/mac/drawingml/2011/main" val="1"/>
                 </a:ext>
               </a:extLst>
             </p:spPr>
@@ -24515,7 +26720,7 @@
             <a:effectLst/>
             <a:extLst>
               <a:ext uri="{C572A759-6A51-4108-AA02-DFA0A04FC94B}">
-                <ma14:wrappingTextBoxFlag xmlns:ma14="http://schemas.microsoft.com/office/mac/drawingml/2011/main" xmlns="" val="1"/>
+                <ma14:wrappingTextBoxFlag xmlns="" xmlns:ma14="http://schemas.microsoft.com/office/mac/drawingml/2011/main" val="1"/>
               </a:ext>
             </a:extLst>
           </p:spPr>
@@ -24738,7 +26943,7 @@
               <a:effectLst/>
               <a:extLst>
                 <a:ext uri="{C572A759-6A51-4108-AA02-DFA0A04FC94B}">
-                  <ma14:wrappingTextBoxFlag xmlns:ma14="http://schemas.microsoft.com/office/mac/drawingml/2011/main" xmlns="" val="1"/>
+                  <ma14:wrappingTextBoxFlag xmlns="" xmlns:ma14="http://schemas.microsoft.com/office/mac/drawingml/2011/main" val="1"/>
                 </a:ext>
               </a:extLst>
             </p:spPr>
@@ -24789,7 +26994,7 @@
             <a:effectLst/>
             <a:extLst>
               <a:ext uri="{C572A759-6A51-4108-AA02-DFA0A04FC94B}">
-                <ma14:wrappingTextBoxFlag xmlns:ma14="http://schemas.microsoft.com/office/mac/drawingml/2011/main" xmlns="" val="1"/>
+                <ma14:wrappingTextBoxFlag xmlns="" xmlns:ma14="http://schemas.microsoft.com/office/mac/drawingml/2011/main" val="1"/>
               </a:ext>
             </a:extLst>
           </p:spPr>
@@ -24967,7 +27172,7 @@
               <a:effectLst/>
               <a:extLst>
                 <a:ext uri="{C572A759-6A51-4108-AA02-DFA0A04FC94B}">
-                  <ma14:wrappingTextBoxFlag xmlns:ma14="http://schemas.microsoft.com/office/mac/drawingml/2011/main" xmlns="" val="1"/>
+                  <ma14:wrappingTextBoxFlag xmlns="" xmlns:ma14="http://schemas.microsoft.com/office/mac/drawingml/2011/main" val="1"/>
                 </a:ext>
               </a:extLst>
             </p:spPr>
@@ -25018,7 +27223,7 @@
             <a:effectLst/>
             <a:extLst>
               <a:ext uri="{C572A759-6A51-4108-AA02-DFA0A04FC94B}">
-                <ma14:wrappingTextBoxFlag xmlns:ma14="http://schemas.microsoft.com/office/mac/drawingml/2011/main" xmlns="" val="1"/>
+                <ma14:wrappingTextBoxFlag xmlns="" xmlns:ma14="http://schemas.microsoft.com/office/mac/drawingml/2011/main" val="1"/>
               </a:ext>
             </a:extLst>
           </p:spPr>
@@ -25297,7 +27502,7 @@
               <a:effectLst/>
               <a:extLst>
                 <a:ext uri="{C572A759-6A51-4108-AA02-DFA0A04FC94B}">
-                  <ma14:wrappingTextBoxFlag xmlns:ma14="http://schemas.microsoft.com/office/mac/drawingml/2011/main" xmlns="" val="1"/>
+                  <ma14:wrappingTextBoxFlag xmlns="" xmlns:ma14="http://schemas.microsoft.com/office/mac/drawingml/2011/main" val="1"/>
                 </a:ext>
               </a:extLst>
             </p:spPr>
@@ -25348,7 +27553,7 @@
             <a:effectLst/>
             <a:extLst>
               <a:ext uri="{C572A759-6A51-4108-AA02-DFA0A04FC94B}">
-                <ma14:wrappingTextBoxFlag xmlns:ma14="http://schemas.microsoft.com/office/mac/drawingml/2011/main" xmlns="" val="1"/>
+                <ma14:wrappingTextBoxFlag xmlns="" xmlns:ma14="http://schemas.microsoft.com/office/mac/drawingml/2011/main" val="1"/>
               </a:ext>
             </a:extLst>
           </p:spPr>
@@ -25566,7 +27771,7 @@
               <a:effectLst/>
               <a:extLst>
                 <a:ext uri="{C572A759-6A51-4108-AA02-DFA0A04FC94B}">
-                  <ma14:wrappingTextBoxFlag xmlns:ma14="http://schemas.microsoft.com/office/mac/drawingml/2011/main" xmlns="" val="1"/>
+                  <ma14:wrappingTextBoxFlag xmlns="" xmlns:ma14="http://schemas.microsoft.com/office/mac/drawingml/2011/main" val="1"/>
                 </a:ext>
               </a:extLst>
             </p:spPr>
@@ -25620,7 +27825,7 @@
             <a:effectLst/>
             <a:extLst>
               <a:ext uri="{C572A759-6A51-4108-AA02-DFA0A04FC94B}">
-                <ma14:wrappingTextBoxFlag xmlns:ma14="http://schemas.microsoft.com/office/mac/drawingml/2011/main" xmlns="" val="1"/>
+                <ma14:wrappingTextBoxFlag xmlns="" xmlns:ma14="http://schemas.microsoft.com/office/mac/drawingml/2011/main" val="1"/>
               </a:ext>
             </a:extLst>
           </p:spPr>
@@ -25825,7 +28030,7 @@
               <a:effectLst/>
               <a:extLst>
                 <a:ext uri="{C572A759-6A51-4108-AA02-DFA0A04FC94B}">
-                  <ma14:wrappingTextBoxFlag xmlns:ma14="http://schemas.microsoft.com/office/mac/drawingml/2011/main" xmlns="" val="1"/>
+                  <ma14:wrappingTextBoxFlag xmlns="" xmlns:ma14="http://schemas.microsoft.com/office/mac/drawingml/2011/main" val="1"/>
                 </a:ext>
               </a:extLst>
             </p:spPr>
@@ -25879,7 +28084,7 @@
             <a:effectLst/>
             <a:extLst>
               <a:ext uri="{C572A759-6A51-4108-AA02-DFA0A04FC94B}">
-                <ma14:wrappingTextBoxFlag xmlns:ma14="http://schemas.microsoft.com/office/mac/drawingml/2011/main" xmlns="" val="1"/>
+                <ma14:wrappingTextBoxFlag xmlns="" xmlns:ma14="http://schemas.microsoft.com/office/mac/drawingml/2011/main" val="1"/>
               </a:ext>
             </a:extLst>
           </p:spPr>
@@ -26121,7 +28326,7 @@
               <a:effectLst/>
               <a:extLst>
                 <a:ext uri="{C572A759-6A51-4108-AA02-DFA0A04FC94B}">
-                  <ma14:wrappingTextBoxFlag xmlns:ma14="http://schemas.microsoft.com/office/mac/drawingml/2011/main" xmlns="" val="1"/>
+                  <ma14:wrappingTextBoxFlag xmlns="" xmlns:ma14="http://schemas.microsoft.com/office/mac/drawingml/2011/main" val="1"/>
                 </a:ext>
               </a:extLst>
             </p:spPr>
@@ -26179,7 +28384,7 @@
             <a:effectLst/>
             <a:extLst>
               <a:ext uri="{C572A759-6A51-4108-AA02-DFA0A04FC94B}">
-                <ma14:wrappingTextBoxFlag xmlns:ma14="http://schemas.microsoft.com/office/mac/drawingml/2011/main" xmlns="" val="1"/>
+                <ma14:wrappingTextBoxFlag xmlns="" xmlns:ma14="http://schemas.microsoft.com/office/mac/drawingml/2011/main" val="1"/>
               </a:ext>
             </a:extLst>
           </p:spPr>
@@ -26392,7 +28597,7 @@
           <a:p>
             <a:fld id="{6874CE7D-5D74-4EC3-A871-8F42005EC53C}" type="slidenum">
               <a:rPr lang="en-US" smtClean="0"/>
-              <a:t>7</a:t>
+              <a:t>8</a:t>
             </a:fld>
             <a:endParaRPr lang="en-US"/>
           </a:p>
@@ -26406,7 +28611,7 @@
 </p:sld>
 </file>
 
-<file path=ppt/slides/slide8.xml><?xml version="1.0" encoding="utf-8"?>
+<file path=ppt/slides/slide9.xml><?xml version="1.0" encoding="utf-8"?>
 <p:sld xmlns:a="http://schemas.openxmlformats.org/drawingml/2006/main" xmlns:r="http://schemas.openxmlformats.org/officeDocument/2006/relationships" xmlns:p="http://schemas.openxmlformats.org/presentationml/2006/main">
   <p:cSld>
     <p:spTree>
@@ -26451,7 +28656,7 @@
           <a:p>
             <a:r>
               <a:rPr lang="en-US" dirty="0"/>
-              <a:t>Simulating Method Categories in Java</a:t>
+              <a:t>Simulating Method Categories in IntelliJ</a:t>
             </a:r>
           </a:p>
         </p:txBody>
@@ -26484,7 +28689,7 @@
         </p:blipFill>
         <p:spPr>
           <a:xfrm>
-            <a:off x="2209800" y="1413825"/>
+            <a:off x="838200" y="1513324"/>
             <a:ext cx="7772400" cy="4708783"/>
           </a:xfrm>
           <a:prstGeom prst="rect">
@@ -26575,101 +28780,187 @@
           <a:p>
             <a:fld id="{6874CE7D-5D74-4EC3-A871-8F42005EC53C}" type="slidenum">
               <a:rPr lang="en-US" smtClean="0"/>
-              <a:t>8</a:t>
-            </a:fld>
-            <a:endParaRPr lang="en-US"/>
-          </a:p>
-        </p:txBody>
-      </p:sp>
-    </p:spTree>
-    <p:extLst>
-      <p:ext uri="{BB962C8B-B14F-4D97-AF65-F5344CB8AC3E}">
-        <p14:creationId xmlns:p14="http://schemas.microsoft.com/office/powerpoint/2010/main" val="2885244876"/>
-      </p:ext>
-    </p:extLst>
-  </p:cSld>
-  <p:clrMapOvr>
-    <a:masterClrMapping/>
-  </p:clrMapOvr>
-</p:sld>
-</file>
-
-<file path=ppt/slides/slide9.xml><?xml version="1.0" encoding="utf-8"?>
-<p:sld xmlns:a="http://schemas.openxmlformats.org/drawingml/2006/main" xmlns:r="http://schemas.openxmlformats.org/officeDocument/2006/relationships" xmlns:p="http://schemas.openxmlformats.org/presentationml/2006/main">
-  <p:cSld>
-    <p:spTree>
-      <p:nvGrpSpPr>
-        <p:cNvPr id="1" name=""/>
-        <p:cNvGrpSpPr/>
-        <p:nvPr/>
-      </p:nvGrpSpPr>
-      <p:grpSpPr>
-        <a:xfrm>
-          <a:off x="0" y="0"/>
-          <a:ext cx="0" cy="0"/>
-          <a:chOff x="0" y="0"/>
-          <a:chExt cx="0" cy="0"/>
-        </a:xfrm>
-      </p:grpSpPr>
-      <p:sp>
-        <p:nvSpPr>
-          <p:cNvPr id="295" name="Title 1"/>
-          <p:cNvSpPr txBox="1">
-            <a:spLocks noGrp="1"/>
-          </p:cNvSpPr>
-          <p:nvPr>
-            <p:ph type="title"/>
-          </p:nvPr>
-        </p:nvSpPr>
-        <p:spPr>
-          <a:xfrm>
-            <a:off x="838200" y="225379"/>
-            <a:ext cx="10515600" cy="792053"/>
-          </a:xfrm>
-          <a:prstGeom prst="rect">
-            <a:avLst/>
-          </a:prstGeom>
-        </p:spPr>
-        <p:txBody>
-          <a:bodyPr/>
-          <a:lstStyle/>
-          <a:p>
-            <a:r>
-              <a:t>Let’s Do It!</a:t>
-            </a:r>
-          </a:p>
-        </p:txBody>
-      </p:sp>
-      <p:sp>
-        <p:nvSpPr>
-          <p:cNvPr id="2" name="Slide Number Placeholder 1">
-            <a:extLst>
-              <a:ext uri="{FF2B5EF4-FFF2-40B4-BE49-F238E27FC236}">
-                <a16:creationId xmlns:a16="http://schemas.microsoft.com/office/drawing/2014/main" id="{1B7B5161-E119-F229-D991-9E4CD4DE9AAE}"/>
-              </a:ext>
-            </a:extLst>
-          </p:cNvPr>
-          <p:cNvSpPr>
-            <a:spLocks noGrp="1"/>
-          </p:cNvSpPr>
-          <p:nvPr>
-            <p:ph type="sldNum" sz="quarter" idx="12"/>
-          </p:nvPr>
-        </p:nvSpPr>
-        <p:spPr/>
-        <p:txBody>
-          <a:bodyPr/>
-          <a:lstStyle/>
-          <a:p>
-            <a:fld id="{6874CE7D-5D74-4EC3-A871-8F42005EC53C}" type="slidenum">
-              <a:rPr lang="en-US" smtClean="0"/>
               <a:t>9</a:t>
             </a:fld>
             <a:endParaRPr lang="en-US"/>
           </a:p>
         </p:txBody>
       </p:sp>
+      <p:sp>
+        <p:nvSpPr>
+          <p:cNvPr id="4" name="TextBox 3">
+            <a:extLst>
+              <a:ext uri="{FF2B5EF4-FFF2-40B4-BE49-F238E27FC236}">
+                <a16:creationId xmlns:a16="http://schemas.microsoft.com/office/drawing/2014/main" id="{D06CED0B-071D-42E7-AF1F-66B77D6AD5B3}"/>
+              </a:ext>
+            </a:extLst>
+          </p:cNvPr>
+          <p:cNvSpPr txBox="1"/>
+          <p:nvPr/>
+        </p:nvSpPr>
+        <p:spPr>
+          <a:xfrm>
+            <a:off x="838200" y="1097776"/>
+            <a:ext cx="4229043" cy="369332"/>
+          </a:xfrm>
+          <a:prstGeom prst="rect">
+            <a:avLst/>
+          </a:prstGeom>
+          <a:noFill/>
+        </p:spPr>
+        <p:txBody>
+          <a:bodyPr wrap="none" rtlCol="0">
+            <a:spAutoFit/>
+          </a:bodyPr>
+          <a:lstStyle/>
+          <a:p>
+            <a:pPr marL="285750" indent="-285750">
+              <a:buFont typeface="Arial" panose="020B0604020202020204" pitchFamily="34" charset="0"/>
+              <a:buChar char="•"/>
+            </a:pPr>
+            <a:r>
+              <a:rPr lang="en-US" dirty="0"/>
+              <a:t>Using </a:t>
+            </a:r>
+            <a:r>
+              <a:rPr lang="en-US" b="1" dirty="0"/>
+              <a:t>Custom Code Folding Regions</a:t>
+            </a:r>
+          </a:p>
+        </p:txBody>
+      </p:sp>
+      <p:pic>
+        <p:nvPicPr>
+          <p:cNvPr id="9" name="Picture 8" descr="A screenshot of a computer code&#10;&#10;AI-generated content may be incorrect.">
+            <a:extLst>
+              <a:ext uri="{FF2B5EF4-FFF2-40B4-BE49-F238E27FC236}">
+                <a16:creationId xmlns:a16="http://schemas.microsoft.com/office/drawing/2014/main" id="{D9A31B18-ECB7-A23A-9950-4393F056BD57}"/>
+              </a:ext>
+            </a:extLst>
+          </p:cNvPr>
+          <p:cNvPicPr>
+            <a:picLocks noChangeAspect="1"/>
+          </p:cNvPicPr>
+          <p:nvPr/>
+        </p:nvPicPr>
+        <p:blipFill>
+          <a:blip r:embed="rId3">
+            <a:extLst>
+              <a:ext uri="{28A0092B-C50C-407E-A947-70E740481C1C}">
+                <a14:useLocalDpi xmlns:a14="http://schemas.microsoft.com/office/drawing/2010/main" val="0"/>
+              </a:ext>
+            </a:extLst>
+          </a:blip>
+          <a:stretch>
+            <a:fillRect/>
+          </a:stretch>
+        </p:blipFill>
+        <p:spPr>
+          <a:xfrm>
+            <a:off x="6372963" y="1060309"/>
+            <a:ext cx="4587479" cy="5296041"/>
+          </a:xfrm>
+          <a:prstGeom prst="rect">
+            <a:avLst/>
+          </a:prstGeom>
+          <a:ln w="25400">
+            <a:solidFill>
+              <a:schemeClr val="accent1"/>
+            </a:solidFill>
+          </a:ln>
+          <a:effectLst>
+            <a:softEdge rad="0"/>
+          </a:effectLst>
+        </p:spPr>
+      </p:pic>
+      <p:cxnSp>
+        <p:nvCxnSpPr>
+          <p:cNvPr id="11" name="Straight Arrow Connector 10">
+            <a:extLst>
+              <a:ext uri="{FF2B5EF4-FFF2-40B4-BE49-F238E27FC236}">
+                <a16:creationId xmlns:a16="http://schemas.microsoft.com/office/drawing/2014/main" id="{081A2A41-9C6A-43D2-8239-27968DE6245B}"/>
+              </a:ext>
+            </a:extLst>
+          </p:cNvPr>
+          <p:cNvCxnSpPr>
+            <a:cxnSpLocks/>
+          </p:cNvCxnSpPr>
+          <p:nvPr/>
+        </p:nvCxnSpPr>
+        <p:spPr>
+          <a:xfrm flipV="1">
+            <a:off x="3416643" y="1334530"/>
+            <a:ext cx="2910016" cy="1075038"/>
+          </a:xfrm>
+          <a:prstGeom prst="straightConnector1">
+            <a:avLst/>
+          </a:prstGeom>
+          <a:ln>
+            <a:tailEnd type="triangle"/>
+          </a:ln>
+        </p:spPr>
+        <p:style>
+          <a:lnRef idx="2">
+            <a:schemeClr val="accent1"/>
+          </a:lnRef>
+          <a:fillRef idx="0">
+            <a:schemeClr val="accent1"/>
+          </a:fillRef>
+          <a:effectRef idx="1">
+            <a:schemeClr val="accent1"/>
+          </a:effectRef>
+          <a:fontRef idx="minor">
+            <a:schemeClr val="tx1"/>
+          </a:fontRef>
+        </p:style>
+      </p:cxnSp>
+      <p:cxnSp>
+        <p:nvCxnSpPr>
+          <p:cNvPr id="12" name="Straight Arrow Connector 11">
+            <a:extLst>
+              <a:ext uri="{FF2B5EF4-FFF2-40B4-BE49-F238E27FC236}">
+                <a16:creationId xmlns:a16="http://schemas.microsoft.com/office/drawing/2014/main" id="{E8630C00-5E55-5BF6-F05F-92601C82362D}"/>
+              </a:ext>
+            </a:extLst>
+          </p:cNvPr>
+          <p:cNvCxnSpPr>
+            <a:cxnSpLocks/>
+          </p:cNvCxnSpPr>
+          <p:nvPr/>
+        </p:nvCxnSpPr>
+        <p:spPr>
+          <a:xfrm>
+            <a:off x="3416643" y="2409568"/>
+            <a:ext cx="2910016" cy="3651421"/>
+          </a:xfrm>
+          <a:prstGeom prst="straightConnector1">
+            <a:avLst/>
+          </a:prstGeom>
+          <a:ln>
+            <a:tailEnd type="triangle"/>
+          </a:ln>
+        </p:spPr>
+        <p:style>
+          <a:lnRef idx="2">
+            <a:schemeClr val="accent1"/>
+          </a:lnRef>
+          <a:fillRef idx="0">
+            <a:schemeClr val="accent1"/>
+          </a:fillRef>
+          <a:effectRef idx="1">
+            <a:schemeClr val="accent1"/>
+          </a:effectRef>
+          <a:fontRef idx="minor">
+            <a:schemeClr val="tx1"/>
+          </a:fontRef>
+        </p:style>
+      </p:cxnSp>
     </p:spTree>
+    <p:extLst>
+      <p:ext uri="{BB962C8B-B14F-4D97-AF65-F5344CB8AC3E}">
+        <p14:creationId xmlns:p14="http://schemas.microsoft.com/office/powerpoint/2010/main" val="1256773908"/>
+      </p:ext>
+    </p:extLst>
   </p:cSld>
   <p:clrMapOvr>
     <a:masterClrMapping/>

--- a/RefactorToEcIntro.pptx
+++ b/RefactorToEcIntro.pptx
@@ -5,7 +5,7 @@
     <p:sldMasterId id="2147483648" r:id="rId1"/>
   </p:sldMasterIdLst>
   <p:notesMasterIdLst>
-    <p:notesMasterId r:id="rId23"/>
+    <p:notesMasterId r:id="rId24"/>
   </p:notesMasterIdLst>
   <p:sldIdLst>
     <p:sldId id="334" r:id="rId2"/>
@@ -13,22 +13,23 @@
     <p:sldId id="258" r:id="rId4"/>
     <p:sldId id="259" r:id="rId5"/>
     <p:sldId id="260" r:id="rId6"/>
-    <p:sldId id="342" r:id="rId7"/>
+    <p:sldId id="346" r:id="rId7"/>
     <p:sldId id="338" r:id="rId8"/>
     <p:sldId id="261" r:id="rId9"/>
     <p:sldId id="343" r:id="rId10"/>
     <p:sldId id="263" r:id="rId11"/>
     <p:sldId id="344" r:id="rId12"/>
-    <p:sldId id="270" r:id="rId13"/>
-    <p:sldId id="271" r:id="rId14"/>
-    <p:sldId id="264" r:id="rId15"/>
-    <p:sldId id="333" r:id="rId16"/>
-    <p:sldId id="308" r:id="rId17"/>
-    <p:sldId id="309" r:id="rId18"/>
-    <p:sldId id="336" r:id="rId19"/>
-    <p:sldId id="339" r:id="rId20"/>
-    <p:sldId id="340" r:id="rId21"/>
-    <p:sldId id="341" r:id="rId22"/>
+    <p:sldId id="347" r:id="rId13"/>
+    <p:sldId id="270" r:id="rId14"/>
+    <p:sldId id="271" r:id="rId15"/>
+    <p:sldId id="264" r:id="rId16"/>
+    <p:sldId id="333" r:id="rId17"/>
+    <p:sldId id="308" r:id="rId18"/>
+    <p:sldId id="309" r:id="rId19"/>
+    <p:sldId id="336" r:id="rId20"/>
+    <p:sldId id="339" r:id="rId21"/>
+    <p:sldId id="340" r:id="rId22"/>
+    <p:sldId id="341" r:id="rId23"/>
   </p:sldIdLst>
   <p:sldSz cx="12192000" cy="6858000"/>
   <p:notesSz cx="6858000" cy="9144000"/>
@@ -615,7 +616,7 @@
           <a:p>
             <a:fld id="{3009100B-F611-4B83-9AF4-01D82287C5E3}" type="slidenum">
               <a:rPr lang="en-US" smtClean="0"/>
-              <a:t>15</a:t>
+              <a:t>16</a:t>
             </a:fld>
             <a:endParaRPr lang="en-US"/>
           </a:p>
@@ -4226,7 +4227,7 @@
           </a:ln>
           <a:extLst>
             <a:ext uri="{C572A759-6A51-4108-AA02-DFA0A04FC94B}">
-              <ma14:wrappingTextBoxFlag xmlns="" xmlns:ma14="http://schemas.microsoft.com/office/mac/drawingml/2011/main" val="1"/>
+              <ma14:wrappingTextBoxFlag xmlns:ma14="http://schemas.microsoft.com/office/mac/drawingml/2011/main" xmlns="" val="1"/>
             </a:ext>
           </a:extLst>
         </p:spPr>
@@ -5251,6 +5252,199 @@
       </p:grpSpPr>
       <p:sp>
         <p:nvSpPr>
+          <p:cNvPr id="5" name="Title 4">
+            <a:extLst>
+              <a:ext uri="{FF2B5EF4-FFF2-40B4-BE49-F238E27FC236}">
+                <a16:creationId xmlns:a16="http://schemas.microsoft.com/office/drawing/2014/main" id="{74F4B80A-B43E-B858-17CD-6AC98AC2BB13}"/>
+              </a:ext>
+            </a:extLst>
+          </p:cNvPr>
+          <p:cNvSpPr>
+            <a:spLocks noGrp="1"/>
+          </p:cNvSpPr>
+          <p:nvPr>
+            <p:ph type="title"/>
+          </p:nvPr>
+        </p:nvSpPr>
+        <p:spPr/>
+        <p:txBody>
+          <a:bodyPr/>
+          <a:lstStyle/>
+          <a:p>
+            <a:r>
+              <a:rPr lang="en-US" dirty="0"/>
+              <a:t>Memory: Word </a:t>
+            </a:r>
+            <a:r>
+              <a:rPr lang="en-US" dirty="0">
+                <a:sym typeface="Wingdings" panose="05000000000000000000" pitchFamily="2" charset="2"/>
+              </a:rPr>
+              <a:t> </a:t>
+            </a:r>
+            <a:r>
+              <a:rPr lang="en-US" dirty="0"/>
+              <a:t>Count Map</a:t>
+            </a:r>
+          </a:p>
+        </p:txBody>
+      </p:sp>
+      <p:sp>
+        <p:nvSpPr>
+          <p:cNvPr id="4" name="Slide Number Placeholder 3">
+            <a:extLst>
+              <a:ext uri="{FF2B5EF4-FFF2-40B4-BE49-F238E27FC236}">
+                <a16:creationId xmlns:a16="http://schemas.microsoft.com/office/drawing/2014/main" id="{23620DC2-21BE-4AD1-9CAC-C0FC03521E50}"/>
+              </a:ext>
+            </a:extLst>
+          </p:cNvPr>
+          <p:cNvSpPr>
+            <a:spLocks noGrp="1"/>
+          </p:cNvSpPr>
+          <p:nvPr>
+            <p:ph type="sldNum" sz="quarter" idx="12"/>
+          </p:nvPr>
+        </p:nvSpPr>
+        <p:spPr/>
+        <p:txBody>
+          <a:bodyPr/>
+          <a:lstStyle/>
+          <a:p>
+            <a:fld id="{6874CE7D-5D74-4EC3-A871-8F42005EC53C}" type="slidenum">
+              <a:rPr lang="en-US" smtClean="0"/>
+              <a:t>12</a:t>
+            </a:fld>
+            <a:endParaRPr lang="en-US"/>
+          </a:p>
+        </p:txBody>
+      </p:sp>
+      <p:pic>
+        <p:nvPicPr>
+          <p:cNvPr id="7" name="Graphic 6">
+            <a:extLst>
+              <a:ext uri="{FF2B5EF4-FFF2-40B4-BE49-F238E27FC236}">
+                <a16:creationId xmlns:a16="http://schemas.microsoft.com/office/drawing/2014/main" id="{594C2B61-954C-6F4D-53C7-F5A60D4BA600}"/>
+              </a:ext>
+            </a:extLst>
+          </p:cNvPr>
+          <p:cNvPicPr>
+            <a:picLocks noChangeAspect="1"/>
+          </p:cNvPicPr>
+          <p:nvPr/>
+        </p:nvPicPr>
+        <p:blipFill>
+          <a:blip r:embed="rId2">
+            <a:extLst>
+              <a:ext uri="{96DAC541-7B7A-43D3-8B79-37D633B846F1}">
+                <asvg:svgBlip xmlns:asvg="http://schemas.microsoft.com/office/drawing/2016/SVG/main" r:embed="rId3"/>
+              </a:ext>
+            </a:extLst>
+          </a:blip>
+          <a:stretch>
+            <a:fillRect/>
+          </a:stretch>
+        </p:blipFill>
+        <p:spPr>
+          <a:xfrm>
+            <a:off x="2428875" y="1544955"/>
+            <a:ext cx="7334250" cy="4581525"/>
+          </a:xfrm>
+          <a:prstGeom prst="rect">
+            <a:avLst/>
+          </a:prstGeom>
+        </p:spPr>
+      </p:pic>
+      <p:sp>
+        <p:nvSpPr>
+          <p:cNvPr id="8" name="TextBox 7">
+            <a:extLst>
+              <a:ext uri="{FF2B5EF4-FFF2-40B4-BE49-F238E27FC236}">
+                <a16:creationId xmlns:a16="http://schemas.microsoft.com/office/drawing/2014/main" id="{D5D36F6E-5CE7-B6E0-80BD-E758EE975269}"/>
+              </a:ext>
+            </a:extLst>
+          </p:cNvPr>
+          <p:cNvSpPr txBox="1"/>
+          <p:nvPr/>
+        </p:nvSpPr>
+        <p:spPr>
+          <a:xfrm>
+            <a:off x="0" y="6126480"/>
+            <a:ext cx="731520" cy="584775"/>
+          </a:xfrm>
+          <a:prstGeom prst="rect">
+            <a:avLst/>
+          </a:prstGeom>
+          <a:noFill/>
+          <a:ln w="12700" cap="flat">
+            <a:noFill/>
+            <a:miter lim="400000"/>
+          </a:ln>
+          <a:effectLst/>
+          <a:sp3d/>
+        </p:spPr>
+        <p:style>
+          <a:lnRef idx="0">
+            <a:scrgbClr r="0" g="0" b="0"/>
+          </a:lnRef>
+          <a:fillRef idx="0">
+            <a:scrgbClr r="0" g="0" b="0"/>
+          </a:fillRef>
+          <a:effectRef idx="0">
+            <a:scrgbClr r="0" g="0" b="0"/>
+          </a:effectRef>
+          <a:fontRef idx="none"/>
+        </p:style>
+        <p:txBody>
+          <a:bodyPr wrap="square">
+            <a:spAutoFit/>
+          </a:bodyPr>
+          <a:lstStyle/>
+          <a:p>
+            <a:r>
+              <a:rPr lang="en-US" sz="3200" b="0" i="0" u="none" strike="noStrike" dirty="0">
+                <a:solidFill>
+                  <a:srgbClr val="000000"/>
+                </a:solidFill>
+                <a:effectLst/>
+                <a:latin typeface="Arial" panose="020B0604020202020204" pitchFamily="34" charset="0"/>
+              </a:rPr>
+              <a:t>🐿️</a:t>
+            </a:r>
+            <a:endParaRPr lang="en-US" sz="3200" dirty="0"/>
+          </a:p>
+        </p:txBody>
+      </p:sp>
+    </p:spTree>
+    <p:extLst>
+      <p:ext uri="{BB962C8B-B14F-4D97-AF65-F5344CB8AC3E}">
+        <p14:creationId xmlns:p14="http://schemas.microsoft.com/office/powerpoint/2010/main" val="2202888030"/>
+      </p:ext>
+    </p:extLst>
+  </p:cSld>
+  <p:clrMapOvr>
+    <a:masterClrMapping/>
+  </p:clrMapOvr>
+</p:sld>
+</file>
+
+<file path=ppt/slides/slide13.xml><?xml version="1.0" encoding="utf-8"?>
+<p:sld xmlns:a="http://schemas.openxmlformats.org/drawingml/2006/main" xmlns:r="http://schemas.openxmlformats.org/officeDocument/2006/relationships" xmlns:p="http://schemas.openxmlformats.org/presentationml/2006/main">
+  <p:cSld>
+    <p:spTree>
+      <p:nvGrpSpPr>
+        <p:cNvPr id="1" name=""/>
+        <p:cNvGrpSpPr/>
+        <p:nvPr/>
+      </p:nvGrpSpPr>
+      <p:grpSpPr>
+        <a:xfrm>
+          <a:off x="0" y="0"/>
+          <a:ext cx="0" cy="0"/>
+          <a:chOff x="0" y="0"/>
+          <a:chExt cx="0" cy="0"/>
+        </a:xfrm>
+      </p:grpSpPr>
+      <p:sp>
+        <p:nvSpPr>
           <p:cNvPr id="2" name="Title 1">
             <a:extLst>
               <a:ext uri="{FF2B5EF4-FFF2-40B4-BE49-F238E27FC236}">
@@ -5401,7 +5595,7 @@
           <a:p>
             <a:fld id="{6874CE7D-5D74-4EC3-A871-8F42005EC53C}" type="slidenum">
               <a:rPr lang="en-US" smtClean="0"/>
-              <a:t>12</a:t>
+              <a:t>13</a:t>
             </a:fld>
             <a:endParaRPr lang="en-US"/>
           </a:p>
@@ -5420,7 +5614,7 @@
 </p:sld>
 </file>
 
-<file path=ppt/slides/slide13.xml><?xml version="1.0" encoding="utf-8"?>
+<file path=ppt/slides/slide14.xml><?xml version="1.0" encoding="utf-8"?>
 <p:sld xmlns:a="http://schemas.openxmlformats.org/drawingml/2006/main" xmlns:r="http://schemas.openxmlformats.org/officeDocument/2006/relationships" xmlns:p="http://schemas.openxmlformats.org/presentationml/2006/main">
   <p:cSld>
     <p:spTree>
@@ -5605,7 +5799,7 @@
           <a:p>
             <a:fld id="{6874CE7D-5D74-4EC3-A871-8F42005EC53C}" type="slidenum">
               <a:rPr lang="en-US" smtClean="0"/>
-              <a:t>13</a:t>
+              <a:t>14</a:t>
             </a:fld>
             <a:endParaRPr lang="en-US"/>
           </a:p>
@@ -5624,7 +5818,7 @@
 </p:sld>
 </file>
 
-<file path=ppt/slides/slide14.xml><?xml version="1.0" encoding="utf-8"?>
+<file path=ppt/slides/slide15.xml><?xml version="1.0" encoding="utf-8"?>
 <p:sld xmlns:a="http://schemas.openxmlformats.org/drawingml/2006/main" xmlns:r="http://schemas.openxmlformats.org/officeDocument/2006/relationships" xmlns:p="http://schemas.openxmlformats.org/presentationml/2006/main">
   <p:cSld>
     <p:spTree>
@@ -5799,7 +5993,7 @@
           <a:p>
             <a:fld id="{6874CE7D-5D74-4EC3-A871-8F42005EC53C}" type="slidenum">
               <a:rPr lang="en-US" smtClean="0"/>
-              <a:t>14</a:t>
+              <a:t>15</a:t>
             </a:fld>
             <a:endParaRPr lang="en-US"/>
           </a:p>
@@ -5813,7 +6007,7 @@
 </p:sld>
 </file>
 
-<file path=ppt/slides/slide15.xml><?xml version="1.0" encoding="utf-8"?>
+<file path=ppt/slides/slide16.xml><?xml version="1.0" encoding="utf-8"?>
 <p:sld xmlns:a="http://schemas.openxmlformats.org/drawingml/2006/main" xmlns:r="http://schemas.openxmlformats.org/officeDocument/2006/relationships" xmlns:p="http://schemas.openxmlformats.org/presentationml/2006/main">
   <p:cSld>
     <p:spTree>
@@ -9437,7 +9631,7 @@
           <a:p>
             <a:fld id="{6874CE7D-5D74-4EC3-A871-8F42005EC53C}" type="slidenum">
               <a:rPr lang="en-US" smtClean="0"/>
-              <a:t>15</a:t>
+              <a:t>16</a:t>
             </a:fld>
             <a:endParaRPr lang="en-US"/>
           </a:p>
@@ -9456,7 +9650,7 @@
 </p:sld>
 </file>
 
-<file path=ppt/slides/slide16.xml><?xml version="1.0" encoding="utf-8"?>
+<file path=ppt/slides/slide17.xml><?xml version="1.0" encoding="utf-8"?>
 <p:sld xmlns:a="http://schemas.openxmlformats.org/drawingml/2006/main" xmlns:r="http://schemas.openxmlformats.org/officeDocument/2006/relationships" xmlns:p="http://schemas.openxmlformats.org/presentationml/2006/main">
   <p:cSld>
     <p:spTree>
@@ -9665,7 +9859,7 @@
           <a:p>
             <a:fld id="{6874CE7D-5D74-4EC3-A871-8F42005EC53C}" type="slidenum">
               <a:rPr lang="en-US" smtClean="0"/>
-              <a:t>16</a:t>
+              <a:t>17</a:t>
             </a:fld>
             <a:endParaRPr lang="en-US"/>
           </a:p>
@@ -9684,7 +9878,7 @@
 </p:sld>
 </file>
 
-<file path=ppt/slides/slide17.xml><?xml version="1.0" encoding="utf-8"?>
+<file path=ppt/slides/slide18.xml><?xml version="1.0" encoding="utf-8"?>
 <p:sld xmlns:a="http://schemas.openxmlformats.org/drawingml/2006/main" xmlns:r="http://schemas.openxmlformats.org/officeDocument/2006/relationships" xmlns:p="http://schemas.openxmlformats.org/presentationml/2006/main">
   <p:cSld>
     <p:spTree>
@@ -9893,7 +10087,7 @@
           <a:p>
             <a:fld id="{6874CE7D-5D74-4EC3-A871-8F42005EC53C}" type="slidenum">
               <a:rPr lang="en-US" smtClean="0"/>
-              <a:t>17</a:t>
+              <a:t>18</a:t>
             </a:fld>
             <a:endParaRPr lang="en-US"/>
           </a:p>
@@ -9912,7 +10106,7 @@
 </p:sld>
 </file>
 
-<file path=ppt/slides/slide18.xml><?xml version="1.0" encoding="utf-8"?>
+<file path=ppt/slides/slide19.xml><?xml version="1.0" encoding="utf-8"?>
 <p:sld xmlns:a="http://schemas.openxmlformats.org/drawingml/2006/main" xmlns:r="http://schemas.openxmlformats.org/officeDocument/2006/relationships" xmlns:p="http://schemas.openxmlformats.org/presentationml/2006/main">
   <p:cSld>
     <p:spTree>
@@ -9982,7 +10176,7 @@
           <a:p>
             <a:r>
               <a:rPr lang="en-US" dirty="0"/>
-              <a:t>Expect more from your collections! </a:t>
+              <a:t>Expect more from your collections </a:t>
             </a:r>
           </a:p>
           <a:p>
@@ -9999,17 +10193,13 @@
           <a:p>
             <a:r>
               <a:rPr lang="en-US" dirty="0"/>
-              <a:t>Eclipse Collections offers you more features with less waste</a:t>
+              <a:t>Eclipse Collections – more features with less waste</a:t>
             </a:r>
           </a:p>
           <a:p>
             <a:r>
-              <a:rPr lang="en-US" dirty="0">
-                <a:solidFill>
-                  <a:srgbClr val="FF0000"/>
-                </a:solidFill>
-              </a:rPr>
-              <a:t>Think about your readers and yourself</a:t>
+              <a:rPr lang="en-US" dirty="0"/>
+              <a:t>Intention revealing code – easy to write, easy to read!</a:t>
             </a:r>
           </a:p>
           <a:p>
@@ -10182,118 +10372,6 @@
     <p:extLst>
       <p:ext uri="{BB962C8B-B14F-4D97-AF65-F5344CB8AC3E}">
         <p14:creationId xmlns:p14="http://schemas.microsoft.com/office/powerpoint/2010/main" val="1388079507"/>
-      </p:ext>
-    </p:extLst>
-  </p:cSld>
-  <p:clrMapOvr>
-    <a:masterClrMapping/>
-  </p:clrMapOvr>
-</p:sld>
-</file>
-
-<file path=ppt/slides/slide19.xml><?xml version="1.0" encoding="utf-8"?>
-<p:sld xmlns:a="http://schemas.openxmlformats.org/drawingml/2006/main" xmlns:r="http://schemas.openxmlformats.org/officeDocument/2006/relationships" xmlns:p="http://schemas.openxmlformats.org/presentationml/2006/main">
-  <p:cSld>
-    <p:spTree>
-      <p:nvGrpSpPr>
-        <p:cNvPr id="1" name=""/>
-        <p:cNvGrpSpPr/>
-        <p:nvPr/>
-      </p:nvGrpSpPr>
-      <p:grpSpPr>
-        <a:xfrm>
-          <a:off x="0" y="0"/>
-          <a:ext cx="0" cy="0"/>
-          <a:chOff x="0" y="0"/>
-          <a:chExt cx="0" cy="0"/>
-        </a:xfrm>
-      </p:grpSpPr>
-      <p:sp>
-        <p:nvSpPr>
-          <p:cNvPr id="5" name="Title 4">
-            <a:extLst>
-              <a:ext uri="{FF2B5EF4-FFF2-40B4-BE49-F238E27FC236}">
-                <a16:creationId xmlns:a16="http://schemas.microsoft.com/office/drawing/2014/main" id="{84B1840A-0A8F-15F7-2454-401F82DD6ED1}"/>
-              </a:ext>
-            </a:extLst>
-          </p:cNvPr>
-          <p:cNvSpPr>
-            <a:spLocks noGrp="1"/>
-          </p:cNvSpPr>
-          <p:nvPr>
-            <p:ph type="title"/>
-          </p:nvPr>
-        </p:nvSpPr>
-        <p:spPr/>
-        <p:txBody>
-          <a:bodyPr/>
-          <a:lstStyle/>
-          <a:p>
-            <a:r>
-              <a:rPr lang="en-US" dirty="0"/>
-              <a:t>Appendix</a:t>
-            </a:r>
-          </a:p>
-        </p:txBody>
-      </p:sp>
-      <p:sp>
-        <p:nvSpPr>
-          <p:cNvPr id="6" name="Text Placeholder 5">
-            <a:extLst>
-              <a:ext uri="{FF2B5EF4-FFF2-40B4-BE49-F238E27FC236}">
-                <a16:creationId xmlns:a16="http://schemas.microsoft.com/office/drawing/2014/main" id="{F044B8D3-5139-EEF2-C2FA-E3374121C1E8}"/>
-              </a:ext>
-            </a:extLst>
-          </p:cNvPr>
-          <p:cNvSpPr>
-            <a:spLocks noGrp="1"/>
-          </p:cNvSpPr>
-          <p:nvPr>
-            <p:ph type="body" idx="1"/>
-          </p:nvPr>
-        </p:nvSpPr>
-        <p:spPr/>
-        <p:txBody>
-          <a:bodyPr/>
-          <a:lstStyle/>
-          <a:p>
-            <a:endParaRPr lang="en-US"/>
-          </a:p>
-        </p:txBody>
-      </p:sp>
-      <p:sp>
-        <p:nvSpPr>
-          <p:cNvPr id="4" name="Slide Number Placeholder 3">
-            <a:extLst>
-              <a:ext uri="{FF2B5EF4-FFF2-40B4-BE49-F238E27FC236}">
-                <a16:creationId xmlns:a16="http://schemas.microsoft.com/office/drawing/2014/main" id="{ACDF35AA-5070-B51D-7492-7226CF8BBC6D}"/>
-              </a:ext>
-            </a:extLst>
-          </p:cNvPr>
-          <p:cNvSpPr>
-            <a:spLocks noGrp="1"/>
-          </p:cNvSpPr>
-          <p:nvPr>
-            <p:ph type="sldNum" sz="quarter" idx="12"/>
-          </p:nvPr>
-        </p:nvSpPr>
-        <p:spPr/>
-        <p:txBody>
-          <a:bodyPr/>
-          <a:lstStyle/>
-          <a:p>
-            <a:fld id="{6874CE7D-5D74-4EC3-A871-8F42005EC53C}" type="slidenum">
-              <a:rPr lang="en-US" smtClean="0"/>
-              <a:t>19</a:t>
-            </a:fld>
-            <a:endParaRPr lang="en-US"/>
-          </a:p>
-        </p:txBody>
-      </p:sp>
-    </p:spTree>
-    <p:extLst>
-      <p:ext uri="{BB962C8B-B14F-4D97-AF65-F5344CB8AC3E}">
-        <p14:creationId xmlns:p14="http://schemas.microsoft.com/office/powerpoint/2010/main" val="1671047315"/>
       </p:ext>
     </p:extLst>
   </p:cSld>
@@ -10651,6 +10729,118 @@
       </p:grpSpPr>
       <p:sp>
         <p:nvSpPr>
+          <p:cNvPr id="5" name="Title 4">
+            <a:extLst>
+              <a:ext uri="{FF2B5EF4-FFF2-40B4-BE49-F238E27FC236}">
+                <a16:creationId xmlns:a16="http://schemas.microsoft.com/office/drawing/2014/main" id="{84B1840A-0A8F-15F7-2454-401F82DD6ED1}"/>
+              </a:ext>
+            </a:extLst>
+          </p:cNvPr>
+          <p:cNvSpPr>
+            <a:spLocks noGrp="1"/>
+          </p:cNvSpPr>
+          <p:nvPr>
+            <p:ph type="title"/>
+          </p:nvPr>
+        </p:nvSpPr>
+        <p:spPr/>
+        <p:txBody>
+          <a:bodyPr/>
+          <a:lstStyle/>
+          <a:p>
+            <a:r>
+              <a:rPr lang="en-US" dirty="0"/>
+              <a:t>Appendix</a:t>
+            </a:r>
+          </a:p>
+        </p:txBody>
+      </p:sp>
+      <p:sp>
+        <p:nvSpPr>
+          <p:cNvPr id="6" name="Text Placeholder 5">
+            <a:extLst>
+              <a:ext uri="{FF2B5EF4-FFF2-40B4-BE49-F238E27FC236}">
+                <a16:creationId xmlns:a16="http://schemas.microsoft.com/office/drawing/2014/main" id="{F044B8D3-5139-EEF2-C2FA-E3374121C1E8}"/>
+              </a:ext>
+            </a:extLst>
+          </p:cNvPr>
+          <p:cNvSpPr>
+            <a:spLocks noGrp="1"/>
+          </p:cNvSpPr>
+          <p:nvPr>
+            <p:ph type="body" idx="1"/>
+          </p:nvPr>
+        </p:nvSpPr>
+        <p:spPr/>
+        <p:txBody>
+          <a:bodyPr/>
+          <a:lstStyle/>
+          <a:p>
+            <a:endParaRPr lang="en-US"/>
+          </a:p>
+        </p:txBody>
+      </p:sp>
+      <p:sp>
+        <p:nvSpPr>
+          <p:cNvPr id="4" name="Slide Number Placeholder 3">
+            <a:extLst>
+              <a:ext uri="{FF2B5EF4-FFF2-40B4-BE49-F238E27FC236}">
+                <a16:creationId xmlns:a16="http://schemas.microsoft.com/office/drawing/2014/main" id="{ACDF35AA-5070-B51D-7492-7226CF8BBC6D}"/>
+              </a:ext>
+            </a:extLst>
+          </p:cNvPr>
+          <p:cNvSpPr>
+            <a:spLocks noGrp="1"/>
+          </p:cNvSpPr>
+          <p:nvPr>
+            <p:ph type="sldNum" sz="quarter" idx="12"/>
+          </p:nvPr>
+        </p:nvSpPr>
+        <p:spPr/>
+        <p:txBody>
+          <a:bodyPr/>
+          <a:lstStyle/>
+          <a:p>
+            <a:fld id="{6874CE7D-5D74-4EC3-A871-8F42005EC53C}" type="slidenum">
+              <a:rPr lang="en-US" smtClean="0"/>
+              <a:t>20</a:t>
+            </a:fld>
+            <a:endParaRPr lang="en-US"/>
+          </a:p>
+        </p:txBody>
+      </p:sp>
+    </p:spTree>
+    <p:extLst>
+      <p:ext uri="{BB962C8B-B14F-4D97-AF65-F5344CB8AC3E}">
+        <p14:creationId xmlns:p14="http://schemas.microsoft.com/office/powerpoint/2010/main" val="1671047315"/>
+      </p:ext>
+    </p:extLst>
+  </p:cSld>
+  <p:clrMapOvr>
+    <a:masterClrMapping/>
+  </p:clrMapOvr>
+</p:sld>
+</file>
+
+<file path=ppt/slides/slide21.xml><?xml version="1.0" encoding="utf-8"?>
+<p:sld xmlns:a="http://schemas.openxmlformats.org/drawingml/2006/main" xmlns:r="http://schemas.openxmlformats.org/officeDocument/2006/relationships" xmlns:p="http://schemas.openxmlformats.org/presentationml/2006/main">
+  <p:cSld>
+    <p:spTree>
+      <p:nvGrpSpPr>
+        <p:cNvPr id="1" name=""/>
+        <p:cNvGrpSpPr/>
+        <p:nvPr/>
+      </p:nvGrpSpPr>
+      <p:grpSpPr>
+        <a:xfrm>
+          <a:off x="0" y="0"/>
+          <a:ext cx="0" cy="0"/>
+          <a:chOff x="0" y="0"/>
+          <a:chExt cx="0" cy="0"/>
+        </a:xfrm>
+      </p:grpSpPr>
+      <p:sp>
+        <p:nvSpPr>
           <p:cNvPr id="2" name="Title 1">
             <a:extLst>
               <a:ext uri="{FF2B5EF4-FFF2-40B4-BE49-F238E27FC236}">
@@ -10700,7 +10890,7 @@
           <a:p>
             <a:fld id="{6874CE7D-5D74-4EC3-A871-8F42005EC53C}" type="slidenum">
               <a:rPr lang="en-US" smtClean="0"/>
-              <a:t>20</a:t>
+              <a:t>21</a:t>
             </a:fld>
             <a:endParaRPr lang="en-US"/>
           </a:p>
@@ -10755,7 +10945,7 @@
 </p:sld>
 </file>
 
-<file path=ppt/slides/slide21.xml><?xml version="1.0" encoding="utf-8"?>
+<file path=ppt/slides/slide22.xml><?xml version="1.0" encoding="utf-8"?>
 <p:sld xmlns:a="http://schemas.openxmlformats.org/drawingml/2006/main" xmlns:r="http://schemas.openxmlformats.org/officeDocument/2006/relationships" xmlns:p="http://schemas.openxmlformats.org/presentationml/2006/main">
   <p:cSld>
     <p:spTree>
@@ -10869,7 +11059,7 @@
           <a:p>
             <a:fld id="{6874CE7D-5D74-4EC3-A871-8F42005EC53C}" type="slidenum">
               <a:rPr lang="en-US" smtClean="0"/>
-              <a:t>21</a:t>
+              <a:t>22</a:t>
             </a:fld>
             <a:endParaRPr lang="en-US"/>
           </a:p>
@@ -11480,7 +11670,7 @@
             <a:effectLst/>
             <a:extLst>
               <a:ext uri="{C572A759-6A51-4108-AA02-DFA0A04FC94B}">
-                <ma14:wrappingTextBoxFlag xmlns="" xmlns:ma14="http://schemas.microsoft.com/office/mac/drawingml/2011/main" val="1"/>
+                <ma14:wrappingTextBoxFlag xmlns:ma14="http://schemas.microsoft.com/office/mac/drawingml/2011/main" xmlns="" val="1"/>
               </a:ext>
             </a:extLst>
           </p:spPr>
@@ -11583,7 +11773,7 @@
             <a:effectLst/>
             <a:extLst>
               <a:ext uri="{C572A759-6A51-4108-AA02-DFA0A04FC94B}">
-                <ma14:wrappingTextBoxFlag xmlns="" xmlns:ma14="http://schemas.microsoft.com/office/mac/drawingml/2011/main" val="1"/>
+                <ma14:wrappingTextBoxFlag xmlns:ma14="http://schemas.microsoft.com/office/mac/drawingml/2011/main" xmlns="" val="1"/>
               </a:ext>
             </a:extLst>
           </p:spPr>
@@ -11687,7 +11877,7 @@
             <a:effectLst/>
             <a:extLst>
               <a:ext uri="{C572A759-6A51-4108-AA02-DFA0A04FC94B}">
-                <ma14:wrappingTextBoxFlag xmlns="" xmlns:ma14="http://schemas.microsoft.com/office/mac/drawingml/2011/main" val="1"/>
+                <ma14:wrappingTextBoxFlag xmlns:ma14="http://schemas.microsoft.com/office/mac/drawingml/2011/main" xmlns="" val="1"/>
               </a:ext>
             </a:extLst>
           </p:spPr>
@@ -11790,7 +11980,7 @@
             <a:effectLst/>
             <a:extLst>
               <a:ext uri="{C572A759-6A51-4108-AA02-DFA0A04FC94B}">
-                <ma14:wrappingTextBoxFlag xmlns="" xmlns:ma14="http://schemas.microsoft.com/office/mac/drawingml/2011/main" val="1"/>
+                <ma14:wrappingTextBoxFlag xmlns:ma14="http://schemas.microsoft.com/office/mac/drawingml/2011/main" xmlns="" val="1"/>
               </a:ext>
             </a:extLst>
           </p:spPr>
@@ -11893,7 +12083,7 @@
             <a:effectLst/>
             <a:extLst>
               <a:ext uri="{C572A759-6A51-4108-AA02-DFA0A04FC94B}">
-                <ma14:wrappingTextBoxFlag xmlns="" xmlns:ma14="http://schemas.microsoft.com/office/mac/drawingml/2011/main" val="1"/>
+                <ma14:wrappingTextBoxFlag xmlns:ma14="http://schemas.microsoft.com/office/mac/drawingml/2011/main" xmlns="" val="1"/>
               </a:ext>
             </a:extLst>
           </p:spPr>
@@ -12001,7 +12191,7 @@
             <a:effectLst/>
             <a:extLst>
               <a:ext uri="{C572A759-6A51-4108-AA02-DFA0A04FC94B}">
-                <ma14:wrappingTextBoxFlag xmlns="" xmlns:ma14="http://schemas.microsoft.com/office/mac/drawingml/2011/main" val="1"/>
+                <ma14:wrappingTextBoxFlag xmlns:ma14="http://schemas.microsoft.com/office/mac/drawingml/2011/main" xmlns="" val="1"/>
               </a:ext>
             </a:extLst>
           </p:spPr>
@@ -12104,7 +12294,7 @@
             <a:effectLst/>
             <a:extLst>
               <a:ext uri="{C572A759-6A51-4108-AA02-DFA0A04FC94B}">
-                <ma14:wrappingTextBoxFlag xmlns="" xmlns:ma14="http://schemas.microsoft.com/office/mac/drawingml/2011/main" val="1"/>
+                <ma14:wrappingTextBoxFlag xmlns:ma14="http://schemas.microsoft.com/office/mac/drawingml/2011/main" xmlns="" val="1"/>
               </a:ext>
             </a:extLst>
           </p:spPr>
@@ -12207,7 +12397,7 @@
             <a:effectLst/>
             <a:extLst>
               <a:ext uri="{C572A759-6A51-4108-AA02-DFA0A04FC94B}">
-                <ma14:wrappingTextBoxFlag xmlns="" xmlns:ma14="http://schemas.microsoft.com/office/mac/drawingml/2011/main" val="1"/>
+                <ma14:wrappingTextBoxFlag xmlns:ma14="http://schemas.microsoft.com/office/mac/drawingml/2011/main" xmlns="" val="1"/>
               </a:ext>
             </a:extLst>
           </p:spPr>
@@ -12321,7 +12511,7 @@
             <a:effectLst/>
             <a:extLst>
               <a:ext uri="{C572A759-6A51-4108-AA02-DFA0A04FC94B}">
-                <ma14:wrappingTextBoxFlag xmlns="" xmlns:ma14="http://schemas.microsoft.com/office/mac/drawingml/2011/main" val="1"/>
+                <ma14:wrappingTextBoxFlag xmlns:ma14="http://schemas.microsoft.com/office/mac/drawingml/2011/main" xmlns="" val="1"/>
               </a:ext>
             </a:extLst>
           </p:spPr>
@@ -12534,7 +12724,7 @@
               <a:effectLst/>
               <a:extLst>
                 <a:ext uri="{C572A759-6A51-4108-AA02-DFA0A04FC94B}">
-                  <ma14:wrappingTextBoxFlag xmlns="" xmlns:ma14="http://schemas.microsoft.com/office/mac/drawingml/2011/main" val="1"/>
+                  <ma14:wrappingTextBoxFlag xmlns:ma14="http://schemas.microsoft.com/office/mac/drawingml/2011/main" xmlns="" val="1"/>
                 </a:ext>
               </a:extLst>
             </p:spPr>
@@ -12638,7 +12828,7 @@
             <a:effectLst/>
             <a:extLst>
               <a:ext uri="{C572A759-6A51-4108-AA02-DFA0A04FC94B}">
-                <ma14:wrappingTextBoxFlag xmlns="" xmlns:ma14="http://schemas.microsoft.com/office/mac/drawingml/2011/main" val="1"/>
+                <ma14:wrappingTextBoxFlag xmlns:ma14="http://schemas.microsoft.com/office/mac/drawingml/2011/main" xmlns="" val="1"/>
               </a:ext>
             </a:extLst>
           </p:spPr>
@@ -12741,7 +12931,7 @@
             <a:effectLst/>
             <a:extLst>
               <a:ext uri="{C572A759-6A51-4108-AA02-DFA0A04FC94B}">
-                <ma14:wrappingTextBoxFlag xmlns="" xmlns:ma14="http://schemas.microsoft.com/office/mac/drawingml/2011/main" val="1"/>
+                <ma14:wrappingTextBoxFlag xmlns:ma14="http://schemas.microsoft.com/office/mac/drawingml/2011/main" xmlns="" val="1"/>
               </a:ext>
             </a:extLst>
           </p:spPr>
@@ -12898,7 +13088,7 @@
               <a:effectLst/>
               <a:extLst>
                 <a:ext uri="{C572A759-6A51-4108-AA02-DFA0A04FC94B}">
-                  <ma14:wrappingTextBoxFlag xmlns="" xmlns:ma14="http://schemas.microsoft.com/office/mac/drawingml/2011/main" val="1"/>
+                  <ma14:wrappingTextBoxFlag xmlns:ma14="http://schemas.microsoft.com/office/mac/drawingml/2011/main" xmlns="" val="1"/>
                 </a:ext>
               </a:extLst>
             </p:spPr>
@@ -13056,7 +13246,7 @@
               <a:effectLst/>
               <a:extLst>
                 <a:ext uri="{C572A759-6A51-4108-AA02-DFA0A04FC94B}">
-                  <ma14:wrappingTextBoxFlag xmlns="" xmlns:ma14="http://schemas.microsoft.com/office/mac/drawingml/2011/main" val="1"/>
+                  <ma14:wrappingTextBoxFlag xmlns:ma14="http://schemas.microsoft.com/office/mac/drawingml/2011/main" xmlns="" val="1"/>
                 </a:ext>
               </a:extLst>
             </p:spPr>
@@ -13462,7 +13652,7 @@
               <a:effectLst/>
               <a:extLst>
                 <a:ext uri="{C572A759-6A51-4108-AA02-DFA0A04FC94B}">
-                  <ma14:wrappingTextBoxFlag xmlns="" xmlns:ma14="http://schemas.microsoft.com/office/mac/drawingml/2011/main" val="1"/>
+                  <ma14:wrappingTextBoxFlag xmlns:ma14="http://schemas.microsoft.com/office/mac/drawingml/2011/main" xmlns="" val="1"/>
                 </a:ext>
               </a:extLst>
             </p:spPr>
@@ -13623,7 +13813,7 @@
               <a:effectLst/>
               <a:extLst>
                 <a:ext uri="{C572A759-6A51-4108-AA02-DFA0A04FC94B}">
-                  <ma14:wrappingTextBoxFlag xmlns="" xmlns:ma14="http://schemas.microsoft.com/office/mac/drawingml/2011/main" val="1"/>
+                  <ma14:wrappingTextBoxFlag xmlns:ma14="http://schemas.microsoft.com/office/mac/drawingml/2011/main" xmlns="" val="1"/>
                 </a:ext>
               </a:extLst>
             </p:spPr>
@@ -14020,7 +14210,7 @@
               <a:effectLst/>
               <a:extLst>
                 <a:ext uri="{C572A759-6A51-4108-AA02-DFA0A04FC94B}">
-                  <ma14:wrappingTextBoxFlag xmlns="" xmlns:ma14="http://schemas.microsoft.com/office/mac/drawingml/2011/main" val="1"/>
+                  <ma14:wrappingTextBoxFlag xmlns:ma14="http://schemas.microsoft.com/office/mac/drawingml/2011/main" xmlns="" val="1"/>
                 </a:ext>
               </a:extLst>
             </p:spPr>
@@ -14238,7 +14428,7 @@
               <a:effectLst/>
               <a:extLst>
                 <a:ext uri="{C572A759-6A51-4108-AA02-DFA0A04FC94B}">
-                  <ma14:wrappingTextBoxFlag xmlns="" xmlns:ma14="http://schemas.microsoft.com/office/mac/drawingml/2011/main" val="1"/>
+                  <ma14:wrappingTextBoxFlag xmlns:ma14="http://schemas.microsoft.com/office/mac/drawingml/2011/main" xmlns="" val="1"/>
                 </a:ext>
               </a:extLst>
             </p:spPr>
@@ -14406,7 +14596,7 @@
               <a:effectLst/>
               <a:extLst>
                 <a:ext uri="{C572A759-6A51-4108-AA02-DFA0A04FC94B}">
-                  <ma14:wrappingTextBoxFlag xmlns="" xmlns:ma14="http://schemas.microsoft.com/office/mac/drawingml/2011/main" val="1"/>
+                  <ma14:wrappingTextBoxFlag xmlns:ma14="http://schemas.microsoft.com/office/mac/drawingml/2011/main" xmlns="" val="1"/>
                 </a:ext>
               </a:extLst>
             </p:spPr>
@@ -15026,7 +15216,7 @@
               <a:effectLst/>
               <a:extLst>
                 <a:ext uri="{C572A759-6A51-4108-AA02-DFA0A04FC94B}">
-                  <ma14:wrappingTextBoxFlag xmlns="" xmlns:ma14="http://schemas.microsoft.com/office/mac/drawingml/2011/main" val="1"/>
+                  <ma14:wrappingTextBoxFlag xmlns:ma14="http://schemas.microsoft.com/office/mac/drawingml/2011/main" xmlns="" val="1"/>
                 </a:ext>
               </a:extLst>
             </p:spPr>
@@ -15079,7 +15269,7 @@
           </a:ln>
           <a:extLst>
             <a:ext uri="{C572A759-6A51-4108-AA02-DFA0A04FC94B}">
-              <ma14:wrappingTextBoxFlag xmlns="" xmlns:ma14="http://schemas.microsoft.com/office/mac/drawingml/2011/main" val="1"/>
+              <ma14:wrappingTextBoxFlag xmlns:ma14="http://schemas.microsoft.com/office/mac/drawingml/2011/main" xmlns="" val="1"/>
             </a:ext>
           </a:extLst>
         </p:spPr>
@@ -16454,7 +16644,7 @@
           </a:ln>
           <a:extLst>
             <a:ext uri="{C572A759-6A51-4108-AA02-DFA0A04FC94B}">
-              <ma14:wrappingTextBoxFlag xmlns="" xmlns:ma14="http://schemas.microsoft.com/office/mac/drawingml/2011/main" val="1"/>
+              <ma14:wrappingTextBoxFlag xmlns:ma14="http://schemas.microsoft.com/office/mac/drawingml/2011/main" xmlns="" val="1"/>
             </a:ext>
           </a:extLst>
         </p:spPr>
@@ -16827,7 +17017,7 @@
           </a:ln>
           <a:extLst>
             <a:ext uri="{C572A759-6A51-4108-AA02-DFA0A04FC94B}">
-              <ma14:wrappingTextBoxFlag xmlns="" xmlns:ma14="http://schemas.microsoft.com/office/mac/drawingml/2011/main" val="1"/>
+              <ma14:wrappingTextBoxFlag xmlns:ma14="http://schemas.microsoft.com/office/mac/drawingml/2011/main" xmlns="" val="1"/>
             </a:ext>
           </a:extLst>
         </p:spPr>
@@ -16887,7 +17077,7 @@
           </a:ln>
           <a:extLst>
             <a:ext uri="{C572A759-6A51-4108-AA02-DFA0A04FC94B}">
-              <ma14:wrappingTextBoxFlag xmlns="" xmlns:ma14="http://schemas.microsoft.com/office/mac/drawingml/2011/main" val="1"/>
+              <ma14:wrappingTextBoxFlag xmlns:ma14="http://schemas.microsoft.com/office/mac/drawingml/2011/main" xmlns="" val="1"/>
             </a:ext>
           </a:extLst>
         </p:spPr>
@@ -17244,7 +17434,7 @@
           <p:cNvPr id="2" name="Title 1">
             <a:extLst>
               <a:ext uri="{FF2B5EF4-FFF2-40B4-BE49-F238E27FC236}">
-                <a16:creationId xmlns:a16="http://schemas.microsoft.com/office/drawing/2014/main" id="{60A49C69-FBAB-CF94-2FE5-04FF22B836A0}"/>
+                <a16:creationId xmlns:a16="http://schemas.microsoft.com/office/drawing/2014/main" id="{78B990B6-0667-0702-98CB-3F59DB561E68}"/>
               </a:ext>
             </a:extLst>
           </p:cNvPr>
@@ -17262,7 +17452,7 @@
           <a:p>
             <a:r>
               <a:rPr lang="en-US" dirty="0"/>
-              <a:t>Comparing JDK and EC Set Factories</a:t>
+              <a:t>Evolving from JDK to EC Factories and Types</a:t>
             </a:r>
           </a:p>
         </p:txBody>
@@ -17272,7 +17462,7 @@
           <p:cNvPr id="3" name="Slide Number Placeholder 2">
             <a:extLst>
               <a:ext uri="{FF2B5EF4-FFF2-40B4-BE49-F238E27FC236}">
-                <a16:creationId xmlns:a16="http://schemas.microsoft.com/office/drawing/2014/main" id="{13066716-3408-779A-5E6C-F0A8F24D78BF}"/>
+                <a16:creationId xmlns:a16="http://schemas.microsoft.com/office/drawing/2014/main" id="{38C8BB24-7855-E523-8133-360E066252CA}"/>
               </a:ext>
             </a:extLst>
           </p:cNvPr>
@@ -17296,24 +17486,122 @@
           </a:p>
         </p:txBody>
       </p:sp>
-      <p:sp>
-        <p:nvSpPr>
-          <p:cNvPr id="5" name="TextBox 4">
+      <p:cxnSp>
+        <p:nvCxnSpPr>
+          <p:cNvPr id="7" name="Straight Arrow Connector 6">
             <a:extLst>
               <a:ext uri="{FF2B5EF4-FFF2-40B4-BE49-F238E27FC236}">
-                <a16:creationId xmlns:a16="http://schemas.microsoft.com/office/drawing/2014/main" id="{C6CEE6F6-EF64-28AD-414C-739235CDED32}"/>
+                <a16:creationId xmlns:a16="http://schemas.microsoft.com/office/drawing/2014/main" id="{32DE60E9-30C9-8C4B-7FA3-64A247631702}"/>
               </a:ext>
             </a:extLst>
           </p:cNvPr>
-          <p:cNvSpPr txBox="1">
-            <a:spLocks/>
-          </p:cNvSpPr>
+          <p:cNvCxnSpPr>
+            <a:cxnSpLocks/>
+            <a:stCxn id="51" idx="2"/>
+            <a:endCxn id="37" idx="0"/>
+          </p:cNvCxnSpPr>
+          <p:nvPr/>
+        </p:nvCxnSpPr>
+        <p:spPr>
+          <a:xfrm rot="5400000">
+            <a:off x="3778730" y="945531"/>
+            <a:ext cx="1343171" cy="2931801"/>
+          </a:xfrm>
+          <a:prstGeom prst="bentConnector3">
+            <a:avLst>
+              <a:gd name="adj1" fmla="val 50000"/>
+            </a:avLst>
+          </a:prstGeom>
+          <a:ln>
+            <a:solidFill>
+              <a:schemeClr val="accent6">
+                <a:lumMod val="50000"/>
+              </a:schemeClr>
+            </a:solidFill>
+            <a:tailEnd type="arrow" w="lg" len="lg"/>
+          </a:ln>
+        </p:spPr>
+        <p:style>
+          <a:lnRef idx="2">
+            <a:schemeClr val="accent1"/>
+          </a:lnRef>
+          <a:fillRef idx="0">
+            <a:schemeClr val="accent1"/>
+          </a:fillRef>
+          <a:effectRef idx="1">
+            <a:schemeClr val="accent1"/>
+          </a:effectRef>
+          <a:fontRef idx="minor">
+            <a:schemeClr val="tx1"/>
+          </a:fontRef>
+        </p:style>
+      </p:cxnSp>
+      <p:cxnSp>
+        <p:nvCxnSpPr>
+          <p:cNvPr id="8" name="Straight Arrow Connector 7">
+            <a:extLst>
+              <a:ext uri="{FF2B5EF4-FFF2-40B4-BE49-F238E27FC236}">
+                <a16:creationId xmlns:a16="http://schemas.microsoft.com/office/drawing/2014/main" id="{660EE34D-975E-93CD-57CD-7C8076449D3B}"/>
+              </a:ext>
+            </a:extLst>
+          </p:cNvPr>
+          <p:cNvCxnSpPr>
+            <a:cxnSpLocks/>
+            <a:stCxn id="52" idx="2"/>
+            <a:endCxn id="39" idx="0"/>
+          </p:cNvCxnSpPr>
+          <p:nvPr/>
+        </p:nvCxnSpPr>
+        <p:spPr>
+          <a:xfrm rot="16200000" flipH="1">
+            <a:off x="7059024" y="947081"/>
+            <a:ext cx="1343172" cy="2928700"/>
+          </a:xfrm>
+          <a:prstGeom prst="bentConnector3">
+            <a:avLst>
+              <a:gd name="adj1" fmla="val 50000"/>
+            </a:avLst>
+          </a:prstGeom>
+          <a:ln>
+            <a:solidFill>
+              <a:schemeClr val="accent6">
+                <a:lumMod val="50000"/>
+              </a:schemeClr>
+            </a:solidFill>
+            <a:tailEnd type="arrow" w="lg" len="lg"/>
+          </a:ln>
+        </p:spPr>
+        <p:style>
+          <a:lnRef idx="2">
+            <a:schemeClr val="accent1"/>
+          </a:lnRef>
+          <a:fillRef idx="0">
+            <a:schemeClr val="accent1"/>
+          </a:fillRef>
+          <a:effectRef idx="1">
+            <a:schemeClr val="accent1"/>
+          </a:effectRef>
+          <a:fontRef idx="minor">
+            <a:schemeClr val="tx1"/>
+          </a:fontRef>
+        </p:style>
+      </p:cxnSp>
+      <p:sp>
+        <p:nvSpPr>
+          <p:cNvPr id="12" name="TextBox 11">
+            <a:extLst>
+              <a:ext uri="{FF2B5EF4-FFF2-40B4-BE49-F238E27FC236}">
+                <a16:creationId xmlns:a16="http://schemas.microsoft.com/office/drawing/2014/main" id="{D8BF92E0-EFB8-CC61-9CCC-14775E91AC8D}"/>
+              </a:ext>
+            </a:extLst>
+          </p:cNvPr>
+          <p:cNvSpPr txBox="1"/>
           <p:nvPr/>
         </p:nvSpPr>
         <p:spPr>
           <a:xfrm>
-            <a:off x="838200" y="983598"/>
-            <a:ext cx="11158151" cy="5684505"/>
+            <a:off x="4194867" y="2040190"/>
+            <a:ext cx="1004506" cy="369332"/>
           </a:xfrm>
           <a:prstGeom prst="rect">
             <a:avLst/>
@@ -17321,163 +17609,3282 @@
           <a:noFill/>
         </p:spPr>
         <p:txBody>
-          <a:bodyPr wrap="square">
+          <a:bodyPr wrap="none" rtlCol="0">
             <a:spAutoFit/>
           </a:bodyPr>
           <a:lstStyle/>
           <a:p>
-            <a:pPr>
-              <a:lnSpc>
-                <a:spcPts val="1900"/>
-              </a:lnSpc>
-              <a:buNone/>
-            </a:pPr>
             <a:r>
-              <a:rPr lang="en-US" sz="1400" dirty="0">
-                <a:solidFill>
-                  <a:srgbClr val="808000"/>
-                </a:solidFill>
-                <a:effectLst/>
+              <a:rPr lang="en-US" dirty="0"/>
+              <a:t>Mutable</a:t>
+            </a:r>
+          </a:p>
+        </p:txBody>
+      </p:sp>
+      <p:sp>
+        <p:nvSpPr>
+          <p:cNvPr id="13" name="TextBox 12">
+            <a:extLst>
+              <a:ext uri="{FF2B5EF4-FFF2-40B4-BE49-F238E27FC236}">
+                <a16:creationId xmlns:a16="http://schemas.microsoft.com/office/drawing/2014/main" id="{917568BD-C56D-8F7B-1C76-BA7CF8A2709A}"/>
+              </a:ext>
+            </a:extLst>
+          </p:cNvPr>
+          <p:cNvSpPr txBox="1"/>
+          <p:nvPr/>
+        </p:nvSpPr>
+        <p:spPr>
+          <a:xfrm>
+            <a:off x="6983102" y="2040190"/>
+            <a:ext cx="1274708" cy="369332"/>
+          </a:xfrm>
+          <a:prstGeom prst="rect">
+            <a:avLst/>
+          </a:prstGeom>
+          <a:noFill/>
+        </p:spPr>
+        <p:txBody>
+          <a:bodyPr wrap="none" rtlCol="0">
+            <a:spAutoFit/>
+          </a:bodyPr>
+          <a:lstStyle/>
+          <a:p>
+            <a:r>
+              <a:rPr lang="en-US" dirty="0"/>
+              <a:t>Immutable</a:t>
+            </a:r>
+          </a:p>
+        </p:txBody>
+      </p:sp>
+      <p:graphicFrame>
+        <p:nvGraphicFramePr>
+          <p:cNvPr id="37" name="Table 36">
+            <a:extLst>
+              <a:ext uri="{FF2B5EF4-FFF2-40B4-BE49-F238E27FC236}">
+                <a16:creationId xmlns:a16="http://schemas.microsoft.com/office/drawing/2014/main" id="{14280C52-6178-113E-8062-B33F3BC12785}"/>
+              </a:ext>
+            </a:extLst>
+          </p:cNvPr>
+          <p:cNvGraphicFramePr>
+            <a:graphicFrameLocks noGrp="1"/>
+          </p:cNvGraphicFramePr>
+          <p:nvPr>
+            <p:extLst>
+              <p:ext uri="{D42A27DB-BD31-4B8C-83A1-F6EECF244321}">
+                <p14:modId xmlns:p14="http://schemas.microsoft.com/office/powerpoint/2010/main" val="2135031561"/>
+              </p:ext>
+            </p:extLst>
+          </p:nvPr>
+        </p:nvGraphicFramePr>
+        <p:xfrm>
+          <a:off x="378374" y="3083017"/>
+          <a:ext cx="5212080" cy="2895600"/>
+        </p:xfrm>
+        <a:graphic>
+          <a:graphicData uri="http://schemas.openxmlformats.org/drawingml/2006/table">
+            <a:tbl>
+              <a:tblPr firstRow="1" bandRow="1">
+                <a:tableStyleId>{5940675A-B579-460E-94D1-54222C63F5DA}</a:tableStyleId>
+              </a:tblPr>
+              <a:tblGrid>
+                <a:gridCol w="1742430">
+                  <a:extLst>
+                    <a:ext uri="{9D8B030D-6E8A-4147-A177-3AD203B41FA5}">
+                      <a16:colId xmlns:a16="http://schemas.microsoft.com/office/drawing/2014/main" val="2131242392"/>
+                    </a:ext>
+                  </a:extLst>
+                </a:gridCol>
+                <a:gridCol w="3469650">
+                  <a:extLst>
+                    <a:ext uri="{9D8B030D-6E8A-4147-A177-3AD203B41FA5}">
+                      <a16:colId xmlns:a16="http://schemas.microsoft.com/office/drawing/2014/main" val="2007210634"/>
+                    </a:ext>
+                  </a:extLst>
+                </a:gridCol>
+              </a:tblGrid>
+              <a:tr h="0">
+                <a:tc>
+                  <a:txBody>
+                    <a:bodyPr/>
+                    <a:lstStyle/>
+                    <a:p>
+                      <a:pPr marL="0" marR="0" lvl="0" indent="0" algn="ctr" defTabSz="914400" rtl="0" eaLnBrk="1" fontAlgn="auto" latinLnBrk="0" hangingPunct="1">
+                        <a:lnSpc>
+                          <a:spcPct val="100000"/>
+                        </a:lnSpc>
+                        <a:spcBef>
+                          <a:spcPts val="0"/>
+                        </a:spcBef>
+                        <a:spcAft>
+                          <a:spcPts val="0"/>
+                        </a:spcAft>
+                        <a:buClrTx/>
+                        <a:buSzTx/>
+                        <a:buFontTx/>
+                        <a:buNone/>
+                        <a:tabLst/>
+                        <a:defRPr/>
+                      </a:pPr>
+                      <a:endParaRPr lang="en-US" sz="1400" i="1" dirty="0">
+                        <a:solidFill>
+                          <a:srgbClr val="808080"/>
+                        </a:solidFill>
+                        <a:latin typeface="D2CodingLigature Nerd Font" panose="020B0609020101020101" pitchFamily="49" charset="-127"/>
+                        <a:ea typeface="D2CodingLigature Nerd Font" panose="020B0609020101020101" pitchFamily="49" charset="-127"/>
+                        <a:cs typeface="JetBrains Mono" panose="02000009000000000000" pitchFamily="49" charset="0"/>
+                      </a:endParaRPr>
+                    </a:p>
+                    <a:p>
+                      <a:pPr marL="0" marR="0" lvl="0" indent="0" algn="ctr" defTabSz="914400" rtl="0" eaLnBrk="1" fontAlgn="auto" latinLnBrk="0" hangingPunct="1">
+                        <a:lnSpc>
+                          <a:spcPct val="100000"/>
+                        </a:lnSpc>
+                        <a:spcBef>
+                          <a:spcPts val="0"/>
+                        </a:spcBef>
+                        <a:spcAft>
+                          <a:spcPts val="0"/>
+                        </a:spcAft>
+                        <a:buClrTx/>
+                        <a:buSzTx/>
+                        <a:buFontTx/>
+                        <a:buNone/>
+                        <a:tabLst/>
+                        <a:defRPr/>
+                      </a:pPr>
+                      <a:r>
+                        <a:rPr lang="en-US" sz="1400" i="1" dirty="0">
+                          <a:solidFill>
+                            <a:srgbClr val="808080"/>
+                          </a:solidFill>
+                          <a:latin typeface="D2CodingLigature Nerd Font" panose="020B0609020101020101" pitchFamily="49" charset="-127"/>
+                          <a:ea typeface="D2CodingLigature Nerd Font" panose="020B0609020101020101" pitchFamily="49" charset="-127"/>
+                          <a:cs typeface="JetBrains Mono" panose="02000009000000000000" pitchFamily="49" charset="0"/>
+                        </a:rPr>
+                        <a:t>// JDK Type</a:t>
+                      </a:r>
+                      <a:endParaRPr lang="en-US" sz="1400" dirty="0">
+                        <a:solidFill>
+                          <a:srgbClr val="0070FF"/>
+                        </a:solidFill>
+                        <a:latin typeface="D2CodingLigature Nerd Font" panose="020B0609020101020101" pitchFamily="49" charset="-127"/>
+                        <a:ea typeface="D2CodingLigature Nerd Font" panose="020B0609020101020101" pitchFamily="49" charset="-127"/>
+                        <a:cs typeface="JetBrains Mono" panose="02000009000000000000" pitchFamily="49" charset="0"/>
+                      </a:endParaRPr>
+                    </a:p>
+                  </a:txBody>
+                  <a:tcPr marL="45720" marR="45720">
+                    <a:lnL w="12700" cmpd="sng">
+                      <a:noFill/>
+                    </a:lnL>
+                    <a:lnR w="12700" cmpd="sng">
+                      <a:noFill/>
+                    </a:lnR>
+                    <a:lnT w="12700" cmpd="sng">
+                      <a:noFill/>
+                    </a:lnT>
+                    <a:lnB w="12700" cmpd="sng">
+                      <a:noFill/>
+                    </a:lnB>
+                    <a:lnTlToBr w="12700" cmpd="sng">
+                      <a:noFill/>
+                      <a:prstDash val="solid"/>
+                    </a:lnTlToBr>
+                    <a:lnBlToTr w="12700" cmpd="sng">
+                      <a:noFill/>
+                      <a:prstDash val="solid"/>
+                    </a:lnBlToTr>
+                  </a:tcPr>
+                </a:tc>
+                <a:tc>
+                  <a:txBody>
+                    <a:bodyPr/>
+                    <a:lstStyle/>
+                    <a:p>
+                      <a:pPr algn="ctr"/>
+                      <a:endParaRPr lang="en-US" sz="1400" i="1" dirty="0">
+                        <a:solidFill>
+                          <a:srgbClr val="808080"/>
+                        </a:solidFill>
+                        <a:latin typeface="D2CodingLigature Nerd Font" panose="020B0609020101020101" pitchFamily="49" charset="-127"/>
+                        <a:ea typeface="D2CodingLigature Nerd Font" panose="020B0609020101020101" pitchFamily="49" charset="-127"/>
+                        <a:cs typeface="JetBrains Mono" panose="02000009000000000000" pitchFamily="49" charset="0"/>
+                      </a:endParaRPr>
+                    </a:p>
+                    <a:p>
+                      <a:pPr algn="ctr"/>
+                      <a:r>
+                        <a:rPr lang="en-US" sz="1400" i="1" dirty="0">
+                          <a:solidFill>
+                            <a:srgbClr val="808080"/>
+                          </a:solidFill>
+                          <a:latin typeface="D2CodingLigature Nerd Font" panose="020B0609020101020101" pitchFamily="49" charset="-127"/>
+                          <a:ea typeface="D2CodingLigature Nerd Font" panose="020B0609020101020101" pitchFamily="49" charset="-127"/>
+                          <a:cs typeface="JetBrains Mono" panose="02000009000000000000" pitchFamily="49" charset="0"/>
+                        </a:rPr>
+                        <a:t>// JDK Implementation</a:t>
+                      </a:r>
+                      <a:endParaRPr lang="en-US" sz="1400" dirty="0">
+                        <a:solidFill>
+                          <a:srgbClr val="0070FF"/>
+                        </a:solidFill>
+                        <a:latin typeface="D2CodingLigature Nerd Font" panose="020B0609020101020101" pitchFamily="49" charset="-127"/>
+                        <a:ea typeface="D2CodingLigature Nerd Font" panose="020B0609020101020101" pitchFamily="49" charset="-127"/>
+                        <a:cs typeface="JetBrains Mono" panose="02000009000000000000" pitchFamily="49" charset="0"/>
+                      </a:endParaRPr>
+                    </a:p>
+                  </a:txBody>
+                  <a:tcPr marL="45720" marR="45720">
+                    <a:lnL w="12700" cmpd="sng">
+                      <a:noFill/>
+                    </a:lnL>
+                    <a:lnR w="12700" cmpd="sng">
+                      <a:noFill/>
+                    </a:lnR>
+                    <a:lnT w="12700" cmpd="sng">
+                      <a:noFill/>
+                    </a:lnT>
+                    <a:lnB w="12700" cmpd="sng">
+                      <a:noFill/>
+                    </a:lnB>
+                    <a:lnTlToBr w="12700" cmpd="sng">
+                      <a:noFill/>
+                      <a:prstDash val="solid"/>
+                    </a:lnTlToBr>
+                    <a:lnBlToTr w="12700" cmpd="sng">
+                      <a:noFill/>
+                      <a:prstDash val="solid"/>
+                    </a:lnBlToTr>
+                  </a:tcPr>
+                </a:tc>
+                <a:extLst>
+                  <a:ext uri="{0D108BD9-81ED-4DB2-BD59-A6C34878D82A}">
+                    <a16:rowId xmlns:a16="http://schemas.microsoft.com/office/drawing/2014/main" val="2692540784"/>
+                  </a:ext>
+                </a:extLst>
+              </a:tr>
+              <a:tr h="0">
+                <a:tc>
+                  <a:txBody>
+                    <a:bodyPr/>
+                    <a:lstStyle/>
+                    <a:p>
+                      <a:pPr algn="ctr"/>
+                      <a:r>
+                        <a:rPr lang="en-US" sz="1400" dirty="0">
+                          <a:solidFill>
+                            <a:srgbClr val="0070FF"/>
+                          </a:solidFill>
+                          <a:effectLst/>
+                          <a:latin typeface="D2CodingLigature Nerd Font" panose="020B0609020101020101" pitchFamily="49" charset="-127"/>
+                          <a:ea typeface="D2CodingLigature Nerd Font" panose="020B0609020101020101" pitchFamily="49" charset="-127"/>
+                          <a:cs typeface="JetBrains Mono" panose="02000009000000000000" pitchFamily="49" charset="0"/>
+                        </a:rPr>
+                        <a:t>Set</a:t>
+                      </a:r>
+                      <a:r>
+                        <a:rPr lang="en-US" sz="1400" dirty="0">
+                          <a:solidFill>
+                            <a:srgbClr val="000000"/>
+                          </a:solidFill>
+                          <a:effectLst/>
+                          <a:latin typeface="D2CodingLigature Nerd Font" panose="020B0609020101020101" pitchFamily="49" charset="-127"/>
+                          <a:ea typeface="D2CodingLigature Nerd Font" panose="020B0609020101020101" pitchFamily="49" charset="-127"/>
+                          <a:cs typeface="JetBrains Mono" panose="02000009000000000000" pitchFamily="49" charset="0"/>
+                        </a:rPr>
+                        <a:t>&lt;</a:t>
+                      </a:r>
+                      <a:r>
+                        <a:rPr lang="en-US" sz="1400" dirty="0">
+                          <a:solidFill>
+                            <a:srgbClr val="A10000"/>
+                          </a:solidFill>
+                          <a:effectLst/>
+                          <a:latin typeface="D2CodingLigature Nerd Font" panose="020B0609020101020101" pitchFamily="49" charset="-127"/>
+                          <a:ea typeface="D2CodingLigature Nerd Font" panose="020B0609020101020101" pitchFamily="49" charset="-127"/>
+                          <a:cs typeface="JetBrains Mono" panose="02000009000000000000" pitchFamily="49" charset="0"/>
+                        </a:rPr>
+                        <a:t>String</a:t>
+                      </a:r>
+                      <a:r>
+                        <a:rPr lang="en-US" sz="1400" dirty="0">
+                          <a:solidFill>
+                            <a:srgbClr val="000000"/>
+                          </a:solidFill>
+                          <a:effectLst/>
+                          <a:latin typeface="D2CodingLigature Nerd Font" panose="020B0609020101020101" pitchFamily="49" charset="-127"/>
+                          <a:ea typeface="D2CodingLigature Nerd Font" panose="020B0609020101020101" pitchFamily="49" charset="-127"/>
+                          <a:cs typeface="JetBrains Mono" panose="02000009000000000000" pitchFamily="49" charset="0"/>
+                        </a:rPr>
+                        <a:t>&gt; </a:t>
+                      </a:r>
+                      <a:endParaRPr lang="en-US" sz="1400" dirty="0">
+                        <a:latin typeface="D2CodingLigature Nerd Font" panose="020B0609020101020101" pitchFamily="49" charset="-127"/>
+                        <a:ea typeface="D2CodingLigature Nerd Font" panose="020B0609020101020101" pitchFamily="49" charset="-127"/>
+                      </a:endParaRPr>
+                    </a:p>
+                  </a:txBody>
+                  <a:tcPr marL="45720" marR="45720">
+                    <a:lnL w="12700" cmpd="sng">
+                      <a:noFill/>
+                    </a:lnL>
+                    <a:lnR w="12700" cmpd="sng">
+                      <a:noFill/>
+                    </a:lnR>
+                    <a:lnT w="12700" cmpd="sng">
+                      <a:noFill/>
+                    </a:lnT>
+                    <a:lnB w="6350" cap="flat" cmpd="sng" algn="ctr">
+                      <a:solidFill>
+                        <a:schemeClr val="tx1">
+                          <a:lumMod val="65000"/>
+                          <a:lumOff val="35000"/>
+                        </a:schemeClr>
+                      </a:solidFill>
+                      <a:prstDash val="solid"/>
+                      <a:round/>
+                      <a:headEnd type="none" w="med" len="med"/>
+                      <a:tailEnd type="none" w="med" len="med"/>
+                    </a:lnB>
+                    <a:lnTlToBr w="12700" cmpd="sng">
+                      <a:noFill/>
+                      <a:prstDash val="solid"/>
+                    </a:lnTlToBr>
+                    <a:lnBlToTr w="12700" cmpd="sng">
+                      <a:noFill/>
+                      <a:prstDash val="solid"/>
+                    </a:lnBlToTr>
+                  </a:tcPr>
+                </a:tc>
+                <a:tc>
+                  <a:txBody>
+                    <a:bodyPr/>
+                    <a:lstStyle/>
+                    <a:p>
+                      <a:pPr algn="ctr"/>
+                      <a:r>
+                        <a:rPr lang="en-US" sz="1400" dirty="0">
+                          <a:solidFill>
+                            <a:srgbClr val="530E80"/>
+                          </a:solidFill>
+                          <a:effectLst/>
+                          <a:latin typeface="D2CodingLigature Nerd Font" panose="020B0609020101020101" pitchFamily="49" charset="-127"/>
+                          <a:ea typeface="D2CodingLigature Nerd Font" panose="020B0609020101020101" pitchFamily="49" charset="-127"/>
+                          <a:cs typeface="JetBrains Mono" panose="02000009000000000000" pitchFamily="49" charset="0"/>
+                        </a:rPr>
+                        <a:t>new </a:t>
+                      </a:r>
+                      <a:r>
+                        <a:rPr lang="en-US" sz="1400" dirty="0">
+                          <a:solidFill>
+                            <a:srgbClr val="000000"/>
+                          </a:solidFill>
+                          <a:effectLst/>
+                          <a:latin typeface="D2CodingLigature Nerd Font" panose="020B0609020101020101" pitchFamily="49" charset="-127"/>
+                          <a:ea typeface="D2CodingLigature Nerd Font" panose="020B0609020101020101" pitchFamily="49" charset="-127"/>
+                          <a:cs typeface="JetBrains Mono" panose="02000009000000000000" pitchFamily="49" charset="0"/>
+                        </a:rPr>
+                        <a:t>HashSet&lt;&gt;(</a:t>
+                      </a:r>
+                      <a:r>
+                        <a:rPr lang="en-US" sz="1400" dirty="0" err="1">
+                          <a:solidFill>
+                            <a:srgbClr val="0070FF"/>
+                          </a:solidFill>
+                          <a:effectLst/>
+                          <a:latin typeface="D2CodingLigature Nerd Font" panose="020B0609020101020101" pitchFamily="49" charset="-127"/>
+                          <a:ea typeface="D2CodingLigature Nerd Font" panose="020B0609020101020101" pitchFamily="49" charset="-127"/>
+                          <a:cs typeface="JetBrains Mono" panose="02000009000000000000" pitchFamily="49" charset="0"/>
+                        </a:rPr>
+                        <a:t>List</a:t>
+                      </a:r>
+                      <a:r>
+                        <a:rPr lang="en-US" sz="1400" dirty="0" err="1">
+                          <a:solidFill>
+                            <a:srgbClr val="000000"/>
+                          </a:solidFill>
+                          <a:effectLst/>
+                          <a:latin typeface="D2CodingLigature Nerd Font" panose="020B0609020101020101" pitchFamily="49" charset="-127"/>
+                          <a:ea typeface="D2CodingLigature Nerd Font" panose="020B0609020101020101" pitchFamily="49" charset="-127"/>
+                          <a:cs typeface="JetBrains Mono" panose="02000009000000000000" pitchFamily="49" charset="0"/>
+                        </a:rPr>
+                        <a:t>.</a:t>
+                      </a:r>
+                      <a:r>
+                        <a:rPr lang="en-US" sz="1400" i="1" dirty="0" err="1">
+                          <a:solidFill>
+                            <a:srgbClr val="000000"/>
+                          </a:solidFill>
+                          <a:effectLst/>
+                          <a:latin typeface="D2CodingLigature Nerd Font" panose="020B0609020101020101" pitchFamily="49" charset="-127"/>
+                          <a:ea typeface="D2CodingLigature Nerd Font" panose="020B0609020101020101" pitchFamily="49" charset="-127"/>
+                          <a:cs typeface="JetBrains Mono" panose="02000009000000000000" pitchFamily="49" charset="0"/>
+                        </a:rPr>
+                        <a:t>of</a:t>
+                      </a:r>
+                      <a:r>
+                        <a:rPr lang="en-US" sz="1400" dirty="0">
+                          <a:solidFill>
+                            <a:srgbClr val="000000"/>
+                          </a:solidFill>
+                          <a:effectLst/>
+                          <a:latin typeface="D2CodingLigature Nerd Font" panose="020B0609020101020101" pitchFamily="49" charset="-127"/>
+                          <a:ea typeface="D2CodingLigature Nerd Font" panose="020B0609020101020101" pitchFamily="49" charset="-127"/>
+                          <a:cs typeface="JetBrains Mono" panose="02000009000000000000" pitchFamily="49" charset="0"/>
+                        </a:rPr>
+                        <a:t>(</a:t>
+                      </a:r>
+                      <a:r>
+                        <a:rPr lang="en-US" sz="1400" b="1" dirty="0">
+                          <a:solidFill>
+                            <a:srgbClr val="0B00CC"/>
+                          </a:solidFill>
+                          <a:effectLst/>
+                          <a:latin typeface="D2CodingLigature Nerd Font" panose="020B0609020101020101" pitchFamily="49" charset="-127"/>
+                          <a:ea typeface="D2CodingLigature Nerd Font" panose="020B0609020101020101" pitchFamily="49" charset="-127"/>
+                          <a:cs typeface="JetBrains Mono" panose="02000009000000000000" pitchFamily="49" charset="0"/>
+                        </a:rPr>
+                        <a:t>"1"</a:t>
+                      </a:r>
+                      <a:r>
+                        <a:rPr lang="en-US" sz="1400" dirty="0">
+                          <a:solidFill>
+                            <a:srgbClr val="000000"/>
+                          </a:solidFill>
+                          <a:effectLst/>
+                          <a:latin typeface="D2CodingLigature Nerd Font" panose="020B0609020101020101" pitchFamily="49" charset="-127"/>
+                          <a:ea typeface="D2CodingLigature Nerd Font" panose="020B0609020101020101" pitchFamily="49" charset="-127"/>
+                          <a:cs typeface="JetBrains Mono" panose="02000009000000000000" pitchFamily="49" charset="0"/>
+                        </a:rPr>
+                        <a:t>, </a:t>
+                      </a:r>
+                      <a:r>
+                        <a:rPr lang="en-US" sz="1400" b="1" dirty="0">
+                          <a:solidFill>
+                            <a:srgbClr val="0B00CC"/>
+                          </a:solidFill>
+                          <a:effectLst/>
+                          <a:latin typeface="D2CodingLigature Nerd Font" panose="020B0609020101020101" pitchFamily="49" charset="-127"/>
+                          <a:ea typeface="D2CodingLigature Nerd Font" panose="020B0609020101020101" pitchFamily="49" charset="-127"/>
+                          <a:cs typeface="JetBrains Mono" panose="02000009000000000000" pitchFamily="49" charset="0"/>
+                        </a:rPr>
+                        <a:t>"2"</a:t>
+                      </a:r>
+                      <a:r>
+                        <a:rPr lang="en-US" sz="1400" dirty="0">
+                          <a:solidFill>
+                            <a:srgbClr val="000000"/>
+                          </a:solidFill>
+                          <a:effectLst/>
+                          <a:latin typeface="D2CodingLigature Nerd Font" panose="020B0609020101020101" pitchFamily="49" charset="-127"/>
+                          <a:ea typeface="D2CodingLigature Nerd Font" panose="020B0609020101020101" pitchFamily="49" charset="-127"/>
+                          <a:cs typeface="JetBrains Mono" panose="02000009000000000000" pitchFamily="49" charset="0"/>
+                        </a:rPr>
+                        <a:t>, </a:t>
+                      </a:r>
+                      <a:r>
+                        <a:rPr lang="en-US" sz="1400" b="1" dirty="0">
+                          <a:solidFill>
+                            <a:srgbClr val="0B00CC"/>
+                          </a:solidFill>
+                          <a:effectLst/>
+                          <a:latin typeface="D2CodingLigature Nerd Font" panose="020B0609020101020101" pitchFamily="49" charset="-127"/>
+                          <a:ea typeface="D2CodingLigature Nerd Font" panose="020B0609020101020101" pitchFamily="49" charset="-127"/>
+                          <a:cs typeface="JetBrains Mono" panose="02000009000000000000" pitchFamily="49" charset="0"/>
+                        </a:rPr>
+                        <a:t>"3"</a:t>
+                      </a:r>
+                      <a:r>
+                        <a:rPr lang="en-US" sz="1400" dirty="0">
+                          <a:solidFill>
+                            <a:srgbClr val="000000"/>
+                          </a:solidFill>
+                          <a:effectLst/>
+                          <a:latin typeface="D2CodingLigature Nerd Font" panose="020B0609020101020101" pitchFamily="49" charset="-127"/>
+                          <a:ea typeface="D2CodingLigature Nerd Font" panose="020B0609020101020101" pitchFamily="49" charset="-127"/>
+                          <a:cs typeface="JetBrains Mono" panose="02000009000000000000" pitchFamily="49" charset="0"/>
+                        </a:rPr>
+                        <a:t>));</a:t>
+                      </a:r>
+                      <a:endParaRPr lang="en-US" sz="1400" dirty="0">
+                        <a:latin typeface="D2CodingLigature Nerd Font" panose="020B0609020101020101" pitchFamily="49" charset="-127"/>
+                        <a:ea typeface="D2CodingLigature Nerd Font" panose="020B0609020101020101" pitchFamily="49" charset="-127"/>
+                      </a:endParaRPr>
+                    </a:p>
+                  </a:txBody>
+                  <a:tcPr marL="45720" marR="45720">
+                    <a:lnL w="12700" cmpd="sng">
+                      <a:noFill/>
+                    </a:lnL>
+                    <a:lnR w="12700" cmpd="sng">
+                      <a:noFill/>
+                    </a:lnR>
+                    <a:lnT w="12700" cmpd="sng">
+                      <a:noFill/>
+                    </a:lnT>
+                    <a:lnB w="6350" cap="flat" cmpd="sng" algn="ctr">
+                      <a:solidFill>
+                        <a:schemeClr val="tx1">
+                          <a:lumMod val="65000"/>
+                          <a:lumOff val="35000"/>
+                        </a:schemeClr>
+                      </a:solidFill>
+                      <a:prstDash val="solid"/>
+                      <a:round/>
+                      <a:headEnd type="none" w="med" len="med"/>
+                      <a:tailEnd type="none" w="med" len="med"/>
+                    </a:lnB>
+                    <a:lnTlToBr w="12700" cmpd="sng">
+                      <a:noFill/>
+                      <a:prstDash val="solid"/>
+                    </a:lnTlToBr>
+                    <a:lnBlToTr w="12700" cmpd="sng">
+                      <a:noFill/>
+                      <a:prstDash val="solid"/>
+                    </a:lnBlToTr>
+                  </a:tcPr>
+                </a:tc>
+                <a:extLst>
+                  <a:ext uri="{0D108BD9-81ED-4DB2-BD59-A6C34878D82A}">
+                    <a16:rowId xmlns:a16="http://schemas.microsoft.com/office/drawing/2014/main" val="5481530"/>
+                  </a:ext>
+                </a:extLst>
+              </a:tr>
+              <a:tr h="0">
+                <a:tc>
+                  <a:txBody>
+                    <a:bodyPr/>
+                    <a:lstStyle/>
+                    <a:p>
+                      <a:pPr marL="0" marR="0" lvl="0" indent="0" algn="ctr" defTabSz="914400" rtl="0" eaLnBrk="1" fontAlgn="auto" latinLnBrk="0" hangingPunct="1">
+                        <a:lnSpc>
+                          <a:spcPct val="100000"/>
+                        </a:lnSpc>
+                        <a:spcBef>
+                          <a:spcPts val="0"/>
+                        </a:spcBef>
+                        <a:spcAft>
+                          <a:spcPts val="0"/>
+                        </a:spcAft>
+                        <a:buClrTx/>
+                        <a:buSzTx/>
+                        <a:buFontTx/>
+                        <a:buNone/>
+                        <a:tabLst/>
+                        <a:defRPr/>
+                      </a:pPr>
+                      <a:endParaRPr lang="en-US" sz="1400" i="1" dirty="0">
+                        <a:solidFill>
+                          <a:srgbClr val="808080"/>
+                        </a:solidFill>
+                        <a:latin typeface="D2CodingLigature Nerd Font" panose="020B0609020101020101" pitchFamily="49" charset="-127"/>
+                        <a:ea typeface="D2CodingLigature Nerd Font" panose="020B0609020101020101" pitchFamily="49" charset="-127"/>
+                        <a:cs typeface="JetBrains Mono" panose="02000009000000000000" pitchFamily="49" charset="0"/>
+                      </a:endParaRPr>
+                    </a:p>
+                    <a:p>
+                      <a:pPr marL="0" marR="0" lvl="0" indent="0" algn="ctr" defTabSz="914400" rtl="0" eaLnBrk="1" fontAlgn="auto" latinLnBrk="0" hangingPunct="1">
+                        <a:lnSpc>
+                          <a:spcPct val="100000"/>
+                        </a:lnSpc>
+                        <a:spcBef>
+                          <a:spcPts val="0"/>
+                        </a:spcBef>
+                        <a:spcAft>
+                          <a:spcPts val="0"/>
+                        </a:spcAft>
+                        <a:buClrTx/>
+                        <a:buSzTx/>
+                        <a:buFontTx/>
+                        <a:buNone/>
+                        <a:tabLst/>
+                        <a:defRPr/>
+                      </a:pPr>
+                      <a:endParaRPr lang="en-US" sz="1400" i="1" dirty="0">
+                        <a:solidFill>
+                          <a:srgbClr val="808080"/>
+                        </a:solidFill>
+                        <a:latin typeface="D2CodingLigature Nerd Font" panose="020B0609020101020101" pitchFamily="49" charset="-127"/>
+                        <a:ea typeface="D2CodingLigature Nerd Font" panose="020B0609020101020101" pitchFamily="49" charset="-127"/>
+                        <a:cs typeface="JetBrains Mono" panose="02000009000000000000" pitchFamily="49" charset="0"/>
+                      </a:endParaRPr>
+                    </a:p>
+                    <a:p>
+                      <a:pPr marL="0" marR="0" lvl="0" indent="0" algn="ctr" defTabSz="914400" rtl="0" eaLnBrk="1" fontAlgn="auto" latinLnBrk="0" hangingPunct="1">
+                        <a:lnSpc>
+                          <a:spcPct val="100000"/>
+                        </a:lnSpc>
+                        <a:spcBef>
+                          <a:spcPts val="0"/>
+                        </a:spcBef>
+                        <a:spcAft>
+                          <a:spcPts val="0"/>
+                        </a:spcAft>
+                        <a:buClrTx/>
+                        <a:buSzTx/>
+                        <a:buFontTx/>
+                        <a:buNone/>
+                        <a:tabLst/>
+                        <a:defRPr/>
+                      </a:pPr>
+                      <a:r>
+                        <a:rPr lang="en-US" sz="1400" i="1" dirty="0">
+                          <a:solidFill>
+                            <a:srgbClr val="808080"/>
+                          </a:solidFill>
+                          <a:latin typeface="D2CodingLigature Nerd Font" panose="020B0609020101020101" pitchFamily="49" charset="-127"/>
+                          <a:ea typeface="D2CodingLigature Nerd Font" panose="020B0609020101020101" pitchFamily="49" charset="-127"/>
+                          <a:cs typeface="JetBrains Mono" panose="02000009000000000000" pitchFamily="49" charset="0"/>
+                        </a:rPr>
+                        <a:t>// JDK Type</a:t>
+                      </a:r>
+                      <a:endParaRPr lang="en-US" sz="1400" dirty="0">
+                        <a:solidFill>
+                          <a:srgbClr val="0070FF"/>
+                        </a:solidFill>
+                        <a:latin typeface="D2CodingLigature Nerd Font" panose="020B0609020101020101" pitchFamily="49" charset="-127"/>
+                        <a:ea typeface="D2CodingLigature Nerd Font" panose="020B0609020101020101" pitchFamily="49" charset="-127"/>
+                        <a:cs typeface="JetBrains Mono" panose="02000009000000000000" pitchFamily="49" charset="0"/>
+                      </a:endParaRPr>
+                    </a:p>
+                  </a:txBody>
+                  <a:tcPr marL="45720" marR="45720">
+                    <a:lnL w="12700" cmpd="sng">
+                      <a:noFill/>
+                    </a:lnL>
+                    <a:lnR w="12700" cmpd="sng">
+                      <a:noFill/>
+                    </a:lnR>
+                    <a:lnT w="6350" cap="flat" cmpd="sng" algn="ctr">
+                      <a:solidFill>
+                        <a:schemeClr val="tx1">
+                          <a:lumMod val="65000"/>
+                          <a:lumOff val="35000"/>
+                        </a:schemeClr>
+                      </a:solidFill>
+                      <a:prstDash val="solid"/>
+                      <a:round/>
+                      <a:headEnd type="none" w="med" len="med"/>
+                      <a:tailEnd type="none" w="med" len="med"/>
+                    </a:lnT>
+                    <a:lnB w="12700" cmpd="sng">
+                      <a:noFill/>
+                    </a:lnB>
+                    <a:lnTlToBr w="12700" cmpd="sng">
+                      <a:noFill/>
+                      <a:prstDash val="solid"/>
+                    </a:lnTlToBr>
+                    <a:lnBlToTr w="12700" cmpd="sng">
+                      <a:noFill/>
+                      <a:prstDash val="solid"/>
+                    </a:lnBlToTr>
+                  </a:tcPr>
+                </a:tc>
+                <a:tc>
+                  <a:txBody>
+                    <a:bodyPr/>
+                    <a:lstStyle/>
+                    <a:p>
+                      <a:pPr algn="ctr"/>
+                      <a:endParaRPr lang="en-US" sz="1400" dirty="0">
+                        <a:latin typeface="D2CodingLigature Nerd Font" panose="020B0609020101020101" pitchFamily="49" charset="-127"/>
+                        <a:ea typeface="D2CodingLigature Nerd Font" panose="020B0609020101020101" pitchFamily="49" charset="-127"/>
+                      </a:endParaRPr>
+                    </a:p>
+                    <a:p>
+                      <a:pPr marL="0" marR="0" lvl="0" indent="0" algn="ctr" defTabSz="914400" rtl="0" eaLnBrk="1" fontAlgn="auto" latinLnBrk="0" hangingPunct="1">
+                        <a:lnSpc>
+                          <a:spcPct val="100000"/>
+                        </a:lnSpc>
+                        <a:spcBef>
+                          <a:spcPts val="0"/>
+                        </a:spcBef>
+                        <a:spcAft>
+                          <a:spcPts val="0"/>
+                        </a:spcAft>
+                        <a:buClrTx/>
+                        <a:buSzTx/>
+                        <a:buFontTx/>
+                        <a:buNone/>
+                        <a:tabLst/>
+                        <a:defRPr/>
+                      </a:pPr>
+                      <a:endParaRPr lang="en-US" sz="1400" i="1" dirty="0">
+                        <a:solidFill>
+                          <a:srgbClr val="808080"/>
+                        </a:solidFill>
+                        <a:latin typeface="D2CodingLigature Nerd Font" panose="020B0609020101020101" pitchFamily="49" charset="-127"/>
+                        <a:ea typeface="D2CodingLigature Nerd Font" panose="020B0609020101020101" pitchFamily="49" charset="-127"/>
+                        <a:cs typeface="JetBrains Mono" panose="02000009000000000000" pitchFamily="49" charset="0"/>
+                      </a:endParaRPr>
+                    </a:p>
+                    <a:p>
+                      <a:pPr marL="0" marR="0" lvl="0" indent="0" algn="ctr" defTabSz="914400" rtl="0" eaLnBrk="1" fontAlgn="auto" latinLnBrk="0" hangingPunct="1">
+                        <a:lnSpc>
+                          <a:spcPct val="100000"/>
+                        </a:lnSpc>
+                        <a:spcBef>
+                          <a:spcPts val="0"/>
+                        </a:spcBef>
+                        <a:spcAft>
+                          <a:spcPts val="0"/>
+                        </a:spcAft>
+                        <a:buClrTx/>
+                        <a:buSzTx/>
+                        <a:buFontTx/>
+                        <a:buNone/>
+                        <a:tabLst/>
+                        <a:defRPr/>
+                      </a:pPr>
+                      <a:r>
+                        <a:rPr lang="en-US" sz="1400" b="1" i="1" dirty="0">
+                          <a:solidFill>
+                            <a:srgbClr val="F69200"/>
+                          </a:solidFill>
+                          <a:latin typeface="D2CodingLigature Nerd Font" panose="020B0609020101020101" pitchFamily="49" charset="-127"/>
+                          <a:ea typeface="D2CodingLigature Nerd Font" panose="020B0609020101020101" pitchFamily="49" charset="-127"/>
+                          <a:cs typeface="JetBrains Mono" panose="02000009000000000000" pitchFamily="49" charset="0"/>
+                        </a:rPr>
+                        <a:t>// EC Implementation</a:t>
+                      </a:r>
+                      <a:endParaRPr lang="en-US" sz="1400" b="1" dirty="0">
+                        <a:solidFill>
+                          <a:srgbClr val="F69200"/>
+                        </a:solidFill>
+                        <a:latin typeface="D2CodingLigature Nerd Font" panose="020B0609020101020101" pitchFamily="49" charset="-127"/>
+                        <a:ea typeface="D2CodingLigature Nerd Font" panose="020B0609020101020101" pitchFamily="49" charset="-127"/>
+                        <a:cs typeface="JetBrains Mono" panose="02000009000000000000" pitchFamily="49" charset="0"/>
+                      </a:endParaRPr>
+                    </a:p>
+                  </a:txBody>
+                  <a:tcPr marL="45720" marR="45720">
+                    <a:lnL w="12700" cmpd="sng">
+                      <a:noFill/>
+                    </a:lnL>
+                    <a:lnR w="12700" cmpd="sng">
+                      <a:noFill/>
+                    </a:lnR>
+                    <a:lnT w="6350" cap="flat" cmpd="sng" algn="ctr">
+                      <a:solidFill>
+                        <a:schemeClr val="tx1">
+                          <a:lumMod val="65000"/>
+                          <a:lumOff val="35000"/>
+                        </a:schemeClr>
+                      </a:solidFill>
+                      <a:prstDash val="solid"/>
+                      <a:round/>
+                      <a:headEnd type="none" w="med" len="med"/>
+                      <a:tailEnd type="none" w="med" len="med"/>
+                    </a:lnT>
+                    <a:lnB w="12700" cmpd="sng">
+                      <a:noFill/>
+                    </a:lnB>
+                    <a:lnTlToBr w="12700" cmpd="sng">
+                      <a:noFill/>
+                      <a:prstDash val="solid"/>
+                    </a:lnTlToBr>
+                    <a:lnBlToTr w="12700" cmpd="sng">
+                      <a:noFill/>
+                      <a:prstDash val="solid"/>
+                    </a:lnBlToTr>
+                  </a:tcPr>
+                </a:tc>
+                <a:extLst>
+                  <a:ext uri="{0D108BD9-81ED-4DB2-BD59-A6C34878D82A}">
+                    <a16:rowId xmlns:a16="http://schemas.microsoft.com/office/drawing/2014/main" val="1015679293"/>
+                  </a:ext>
+                </a:extLst>
+              </a:tr>
+              <a:tr h="0">
+                <a:tc>
+                  <a:txBody>
+                    <a:bodyPr/>
+                    <a:lstStyle/>
+                    <a:p>
+                      <a:pPr algn="ctr"/>
+                      <a:r>
+                        <a:rPr lang="en-US" sz="1400" dirty="0">
+                          <a:solidFill>
+                            <a:srgbClr val="0070FF"/>
+                          </a:solidFill>
+                          <a:effectLst/>
+                          <a:latin typeface="D2CodingLigature Nerd Font" panose="020B0609020101020101" pitchFamily="49" charset="-127"/>
+                          <a:ea typeface="D2CodingLigature Nerd Font" panose="020B0609020101020101" pitchFamily="49" charset="-127"/>
+                          <a:cs typeface="JetBrains Mono" panose="02000009000000000000" pitchFamily="49" charset="0"/>
+                        </a:rPr>
+                        <a:t>Set</a:t>
+                      </a:r>
+                      <a:r>
+                        <a:rPr lang="en-US" sz="1400" dirty="0">
+                          <a:solidFill>
+                            <a:srgbClr val="000000"/>
+                          </a:solidFill>
+                          <a:effectLst/>
+                          <a:latin typeface="D2CodingLigature Nerd Font" panose="020B0609020101020101" pitchFamily="49" charset="-127"/>
+                          <a:ea typeface="D2CodingLigature Nerd Font" panose="020B0609020101020101" pitchFamily="49" charset="-127"/>
+                          <a:cs typeface="JetBrains Mono" panose="02000009000000000000" pitchFamily="49" charset="0"/>
+                        </a:rPr>
+                        <a:t>&lt;</a:t>
+                      </a:r>
+                      <a:r>
+                        <a:rPr lang="en-US" sz="1400" dirty="0">
+                          <a:solidFill>
+                            <a:srgbClr val="A10000"/>
+                          </a:solidFill>
+                          <a:effectLst/>
+                          <a:latin typeface="D2CodingLigature Nerd Font" panose="020B0609020101020101" pitchFamily="49" charset="-127"/>
+                          <a:ea typeface="D2CodingLigature Nerd Font" panose="020B0609020101020101" pitchFamily="49" charset="-127"/>
+                          <a:cs typeface="JetBrains Mono" panose="02000009000000000000" pitchFamily="49" charset="0"/>
+                        </a:rPr>
+                        <a:t>String</a:t>
+                      </a:r>
+                      <a:r>
+                        <a:rPr lang="en-US" sz="1400" dirty="0">
+                          <a:solidFill>
+                            <a:srgbClr val="000000"/>
+                          </a:solidFill>
+                          <a:effectLst/>
+                          <a:latin typeface="D2CodingLigature Nerd Font" panose="020B0609020101020101" pitchFamily="49" charset="-127"/>
+                          <a:ea typeface="D2CodingLigature Nerd Font" panose="020B0609020101020101" pitchFamily="49" charset="-127"/>
+                          <a:cs typeface="JetBrains Mono" panose="02000009000000000000" pitchFamily="49" charset="0"/>
+                        </a:rPr>
+                        <a:t>&gt; </a:t>
+                      </a:r>
+                      <a:endParaRPr lang="en-US" sz="1400" dirty="0">
+                        <a:latin typeface="D2CodingLigature Nerd Font" panose="020B0609020101020101" pitchFamily="49" charset="-127"/>
+                        <a:ea typeface="D2CodingLigature Nerd Font" panose="020B0609020101020101" pitchFamily="49" charset="-127"/>
+                      </a:endParaRPr>
+                    </a:p>
+                  </a:txBody>
+                  <a:tcPr marL="45720" marR="45720">
+                    <a:lnL w="12700" cmpd="sng">
+                      <a:noFill/>
+                    </a:lnL>
+                    <a:lnR w="12700" cmpd="sng">
+                      <a:noFill/>
+                    </a:lnR>
+                    <a:lnT w="12700" cmpd="sng">
+                      <a:noFill/>
+                    </a:lnT>
+                    <a:lnB w="6350" cap="flat" cmpd="sng" algn="ctr">
+                      <a:solidFill>
+                        <a:schemeClr val="tx1">
+                          <a:lumMod val="65000"/>
+                          <a:lumOff val="35000"/>
+                        </a:schemeClr>
+                      </a:solidFill>
+                      <a:prstDash val="solid"/>
+                      <a:round/>
+                      <a:headEnd type="none" w="med" len="med"/>
+                      <a:tailEnd type="none" w="med" len="med"/>
+                    </a:lnB>
+                    <a:lnTlToBr w="12700" cmpd="sng">
+                      <a:noFill/>
+                      <a:prstDash val="solid"/>
+                    </a:lnTlToBr>
+                    <a:lnBlToTr w="12700" cmpd="sng">
+                      <a:noFill/>
+                      <a:prstDash val="solid"/>
+                    </a:lnBlToTr>
+                  </a:tcPr>
+                </a:tc>
+                <a:tc>
+                  <a:txBody>
+                    <a:bodyPr/>
+                    <a:lstStyle/>
+                    <a:p>
+                      <a:pPr algn="ctr"/>
+                      <a:r>
+                        <a:rPr lang="en-US" sz="1400" dirty="0" err="1">
+                          <a:solidFill>
+                            <a:srgbClr val="A10000"/>
+                          </a:solidFill>
+                          <a:effectLst/>
+                          <a:latin typeface="D2CodingLigature Nerd Font" panose="020B0609020101020101" pitchFamily="49" charset="-127"/>
+                          <a:ea typeface="D2CodingLigature Nerd Font" panose="020B0609020101020101" pitchFamily="49" charset="-127"/>
+                          <a:cs typeface="JetBrains Mono" panose="02000009000000000000" pitchFamily="49" charset="0"/>
+                        </a:rPr>
+                        <a:t>Sets</a:t>
+                      </a:r>
+                      <a:r>
+                        <a:rPr lang="en-US" sz="1400" dirty="0" err="1">
+                          <a:solidFill>
+                            <a:srgbClr val="000000"/>
+                          </a:solidFill>
+                          <a:effectLst/>
+                          <a:latin typeface="D2CodingLigature Nerd Font" panose="020B0609020101020101" pitchFamily="49" charset="-127"/>
+                          <a:ea typeface="D2CodingLigature Nerd Font" panose="020B0609020101020101" pitchFamily="49" charset="-127"/>
+                          <a:cs typeface="JetBrains Mono" panose="02000009000000000000" pitchFamily="49" charset="0"/>
+                        </a:rPr>
+                        <a:t>.</a:t>
+                      </a:r>
+                      <a:r>
+                        <a:rPr lang="en-US" sz="1400" b="0" i="1" dirty="0" err="1">
+                          <a:solidFill>
+                            <a:srgbClr val="660E7A"/>
+                          </a:solidFill>
+                          <a:effectLst/>
+                          <a:latin typeface="D2CodingLigature Nerd Font" panose="020B0609020101020101" pitchFamily="49" charset="-127"/>
+                          <a:ea typeface="D2CodingLigature Nerd Font" panose="020B0609020101020101" pitchFamily="49" charset="-127"/>
+                          <a:cs typeface="JetBrains Mono" panose="02000009000000000000" pitchFamily="49" charset="0"/>
+                        </a:rPr>
+                        <a:t>mutable</a:t>
+                      </a:r>
+                      <a:r>
+                        <a:rPr lang="en-US" sz="1400" dirty="0" err="1">
+                          <a:solidFill>
+                            <a:srgbClr val="000000"/>
+                          </a:solidFill>
+                          <a:effectLst/>
+                          <a:latin typeface="D2CodingLigature Nerd Font" panose="020B0609020101020101" pitchFamily="49" charset="-127"/>
+                          <a:ea typeface="D2CodingLigature Nerd Font" panose="020B0609020101020101" pitchFamily="49" charset="-127"/>
+                          <a:cs typeface="JetBrains Mono" panose="02000009000000000000" pitchFamily="49" charset="0"/>
+                        </a:rPr>
+                        <a:t>.of</a:t>
+                      </a:r>
+                      <a:r>
+                        <a:rPr lang="en-US" sz="1400" dirty="0">
+                          <a:solidFill>
+                            <a:srgbClr val="000000"/>
+                          </a:solidFill>
+                          <a:effectLst/>
+                          <a:latin typeface="D2CodingLigature Nerd Font" panose="020B0609020101020101" pitchFamily="49" charset="-127"/>
+                          <a:ea typeface="D2CodingLigature Nerd Font" panose="020B0609020101020101" pitchFamily="49" charset="-127"/>
+                          <a:cs typeface="JetBrains Mono" panose="02000009000000000000" pitchFamily="49" charset="0"/>
+                        </a:rPr>
+                        <a:t>(</a:t>
+                      </a:r>
+                      <a:r>
+                        <a:rPr lang="en-US" sz="1400" b="1" dirty="0">
+                          <a:solidFill>
+                            <a:srgbClr val="0B00CC"/>
+                          </a:solidFill>
+                          <a:effectLst/>
+                          <a:latin typeface="D2CodingLigature Nerd Font" panose="020B0609020101020101" pitchFamily="49" charset="-127"/>
+                          <a:ea typeface="D2CodingLigature Nerd Font" panose="020B0609020101020101" pitchFamily="49" charset="-127"/>
+                          <a:cs typeface="JetBrains Mono" panose="02000009000000000000" pitchFamily="49" charset="0"/>
+                        </a:rPr>
+                        <a:t>"1"</a:t>
+                      </a:r>
+                      <a:r>
+                        <a:rPr lang="en-US" sz="1400" dirty="0">
+                          <a:solidFill>
+                            <a:srgbClr val="000000"/>
+                          </a:solidFill>
+                          <a:effectLst/>
+                          <a:latin typeface="D2CodingLigature Nerd Font" panose="020B0609020101020101" pitchFamily="49" charset="-127"/>
+                          <a:ea typeface="D2CodingLigature Nerd Font" panose="020B0609020101020101" pitchFamily="49" charset="-127"/>
+                          <a:cs typeface="JetBrains Mono" panose="02000009000000000000" pitchFamily="49" charset="0"/>
+                        </a:rPr>
+                        <a:t>, </a:t>
+                      </a:r>
+                      <a:r>
+                        <a:rPr lang="en-US" sz="1400" b="1" dirty="0">
+                          <a:solidFill>
+                            <a:srgbClr val="0B00CC"/>
+                          </a:solidFill>
+                          <a:effectLst/>
+                          <a:latin typeface="D2CodingLigature Nerd Font" panose="020B0609020101020101" pitchFamily="49" charset="-127"/>
+                          <a:ea typeface="D2CodingLigature Nerd Font" panose="020B0609020101020101" pitchFamily="49" charset="-127"/>
+                          <a:cs typeface="JetBrains Mono" panose="02000009000000000000" pitchFamily="49" charset="0"/>
+                        </a:rPr>
+                        <a:t>"2"</a:t>
+                      </a:r>
+                      <a:r>
+                        <a:rPr lang="en-US" sz="1400" dirty="0">
+                          <a:solidFill>
+                            <a:srgbClr val="000000"/>
+                          </a:solidFill>
+                          <a:effectLst/>
+                          <a:latin typeface="D2CodingLigature Nerd Font" panose="020B0609020101020101" pitchFamily="49" charset="-127"/>
+                          <a:ea typeface="D2CodingLigature Nerd Font" panose="020B0609020101020101" pitchFamily="49" charset="-127"/>
+                          <a:cs typeface="JetBrains Mono" panose="02000009000000000000" pitchFamily="49" charset="0"/>
+                        </a:rPr>
+                        <a:t>, </a:t>
+                      </a:r>
+                      <a:r>
+                        <a:rPr lang="en-US" sz="1400" b="1" dirty="0">
+                          <a:solidFill>
+                            <a:srgbClr val="0B00CC"/>
+                          </a:solidFill>
+                          <a:effectLst/>
+                          <a:latin typeface="D2CodingLigature Nerd Font" panose="020B0609020101020101" pitchFamily="49" charset="-127"/>
+                          <a:ea typeface="D2CodingLigature Nerd Font" panose="020B0609020101020101" pitchFamily="49" charset="-127"/>
+                          <a:cs typeface="JetBrains Mono" panose="02000009000000000000" pitchFamily="49" charset="0"/>
+                        </a:rPr>
+                        <a:t>"3"</a:t>
+                      </a:r>
+                      <a:r>
+                        <a:rPr lang="en-US" sz="1400" dirty="0">
+                          <a:solidFill>
+                            <a:srgbClr val="000000"/>
+                          </a:solidFill>
+                          <a:effectLst/>
+                          <a:latin typeface="D2CodingLigature Nerd Font" panose="020B0609020101020101" pitchFamily="49" charset="-127"/>
+                          <a:ea typeface="D2CodingLigature Nerd Font" panose="020B0609020101020101" pitchFamily="49" charset="-127"/>
+                          <a:cs typeface="JetBrains Mono" panose="02000009000000000000" pitchFamily="49" charset="0"/>
+                        </a:rPr>
+                        <a:t>);</a:t>
+                      </a:r>
+                      <a:endParaRPr lang="en-US" sz="1400" dirty="0">
+                        <a:latin typeface="D2CodingLigature Nerd Font" panose="020B0609020101020101" pitchFamily="49" charset="-127"/>
+                        <a:ea typeface="D2CodingLigature Nerd Font" panose="020B0609020101020101" pitchFamily="49" charset="-127"/>
+                      </a:endParaRPr>
+                    </a:p>
+                  </a:txBody>
+                  <a:tcPr marL="45720" marR="45720">
+                    <a:lnL w="12700" cmpd="sng">
+                      <a:noFill/>
+                    </a:lnL>
+                    <a:lnR w="12700" cmpd="sng">
+                      <a:noFill/>
+                    </a:lnR>
+                    <a:lnT w="12700" cmpd="sng">
+                      <a:noFill/>
+                    </a:lnT>
+                    <a:lnB w="6350" cap="flat" cmpd="sng" algn="ctr">
+                      <a:solidFill>
+                        <a:schemeClr val="tx1">
+                          <a:lumMod val="65000"/>
+                          <a:lumOff val="35000"/>
+                        </a:schemeClr>
+                      </a:solidFill>
+                      <a:prstDash val="solid"/>
+                      <a:round/>
+                      <a:headEnd type="none" w="med" len="med"/>
+                      <a:tailEnd type="none" w="med" len="med"/>
+                    </a:lnB>
+                    <a:lnTlToBr w="12700" cmpd="sng">
+                      <a:noFill/>
+                      <a:prstDash val="solid"/>
+                    </a:lnTlToBr>
+                    <a:lnBlToTr w="12700" cmpd="sng">
+                      <a:noFill/>
+                      <a:prstDash val="solid"/>
+                    </a:lnBlToTr>
+                  </a:tcPr>
+                </a:tc>
+                <a:extLst>
+                  <a:ext uri="{0D108BD9-81ED-4DB2-BD59-A6C34878D82A}">
+                    <a16:rowId xmlns:a16="http://schemas.microsoft.com/office/drawing/2014/main" val="3002945833"/>
+                  </a:ext>
+                </a:extLst>
+              </a:tr>
+              <a:tr h="0">
+                <a:tc>
+                  <a:txBody>
+                    <a:bodyPr/>
+                    <a:lstStyle/>
+                    <a:p>
+                      <a:pPr marL="0" marR="0" lvl="0" indent="0" algn="ctr" defTabSz="914400" rtl="0" eaLnBrk="1" fontAlgn="auto" latinLnBrk="0" hangingPunct="1">
+                        <a:lnSpc>
+                          <a:spcPct val="100000"/>
+                        </a:lnSpc>
+                        <a:spcBef>
+                          <a:spcPts val="0"/>
+                        </a:spcBef>
+                        <a:spcAft>
+                          <a:spcPts val="0"/>
+                        </a:spcAft>
+                        <a:buClrTx/>
+                        <a:buSzTx/>
+                        <a:buFontTx/>
+                        <a:buNone/>
+                        <a:tabLst/>
+                        <a:defRPr/>
+                      </a:pPr>
+                      <a:endParaRPr lang="en-US" sz="1400" i="1" dirty="0">
+                        <a:solidFill>
+                          <a:srgbClr val="808080"/>
+                        </a:solidFill>
+                        <a:latin typeface="D2CodingLigature Nerd Font" panose="020B0609020101020101" pitchFamily="49" charset="-127"/>
+                        <a:ea typeface="D2CodingLigature Nerd Font" panose="020B0609020101020101" pitchFamily="49" charset="-127"/>
+                        <a:cs typeface="JetBrains Mono" panose="02000009000000000000" pitchFamily="49" charset="0"/>
+                      </a:endParaRPr>
+                    </a:p>
+                    <a:p>
+                      <a:pPr marL="0" marR="0" lvl="0" indent="0" algn="ctr" defTabSz="914400" rtl="0" eaLnBrk="1" fontAlgn="auto" latinLnBrk="0" hangingPunct="1">
+                        <a:lnSpc>
+                          <a:spcPct val="100000"/>
+                        </a:lnSpc>
+                        <a:spcBef>
+                          <a:spcPts val="0"/>
+                        </a:spcBef>
+                        <a:spcAft>
+                          <a:spcPts val="0"/>
+                        </a:spcAft>
+                        <a:buClrTx/>
+                        <a:buSzTx/>
+                        <a:buFontTx/>
+                        <a:buNone/>
+                        <a:tabLst/>
+                        <a:defRPr/>
+                      </a:pPr>
+                      <a:endParaRPr lang="en-US" sz="1400" i="1" dirty="0">
+                        <a:solidFill>
+                          <a:srgbClr val="808080"/>
+                        </a:solidFill>
+                        <a:latin typeface="D2CodingLigature Nerd Font" panose="020B0609020101020101" pitchFamily="49" charset="-127"/>
+                        <a:ea typeface="D2CodingLigature Nerd Font" panose="020B0609020101020101" pitchFamily="49" charset="-127"/>
+                        <a:cs typeface="JetBrains Mono" panose="02000009000000000000" pitchFamily="49" charset="0"/>
+                      </a:endParaRPr>
+                    </a:p>
+                    <a:p>
+                      <a:pPr marL="0" marR="0" lvl="0" indent="0" algn="ctr" defTabSz="914400" rtl="0" eaLnBrk="1" fontAlgn="auto" latinLnBrk="0" hangingPunct="1">
+                        <a:lnSpc>
+                          <a:spcPct val="100000"/>
+                        </a:lnSpc>
+                        <a:spcBef>
+                          <a:spcPts val="0"/>
+                        </a:spcBef>
+                        <a:spcAft>
+                          <a:spcPts val="0"/>
+                        </a:spcAft>
+                        <a:buClrTx/>
+                        <a:buSzTx/>
+                        <a:buFontTx/>
+                        <a:buNone/>
+                        <a:tabLst/>
+                        <a:defRPr/>
+                      </a:pPr>
+                      <a:r>
+                        <a:rPr lang="en-US" sz="1400" b="1" i="1" dirty="0">
+                          <a:solidFill>
+                            <a:srgbClr val="FF9900"/>
+                          </a:solidFill>
+                          <a:latin typeface="D2CodingLigature Nerd Font" panose="020B0609020101020101" pitchFamily="49" charset="-127"/>
+                          <a:ea typeface="D2CodingLigature Nerd Font" panose="020B0609020101020101" pitchFamily="49" charset="-127"/>
+                          <a:cs typeface="JetBrains Mono" panose="02000009000000000000" pitchFamily="49" charset="0"/>
+                        </a:rPr>
+                        <a:t>// EC Type</a:t>
+                      </a:r>
+                      <a:endParaRPr lang="en-US" sz="1400" b="1" dirty="0">
+                        <a:solidFill>
+                          <a:srgbClr val="FF9900"/>
+                        </a:solidFill>
+                        <a:latin typeface="D2CodingLigature Nerd Font" panose="020B0609020101020101" pitchFamily="49" charset="-127"/>
+                        <a:ea typeface="D2CodingLigature Nerd Font" panose="020B0609020101020101" pitchFamily="49" charset="-127"/>
+                        <a:cs typeface="JetBrains Mono" panose="02000009000000000000" pitchFamily="49" charset="0"/>
+                      </a:endParaRPr>
+                    </a:p>
+                  </a:txBody>
+                  <a:tcPr marL="45720" marR="45720">
+                    <a:lnL w="12700" cmpd="sng">
+                      <a:noFill/>
+                    </a:lnL>
+                    <a:lnR w="12700" cmpd="sng">
+                      <a:noFill/>
+                    </a:lnR>
+                    <a:lnT w="6350" cap="flat" cmpd="sng" algn="ctr">
+                      <a:solidFill>
+                        <a:schemeClr val="tx1">
+                          <a:lumMod val="65000"/>
+                          <a:lumOff val="35000"/>
+                        </a:schemeClr>
+                      </a:solidFill>
+                      <a:prstDash val="solid"/>
+                      <a:round/>
+                      <a:headEnd type="none" w="med" len="med"/>
+                      <a:tailEnd type="none" w="med" len="med"/>
+                    </a:lnT>
+                    <a:lnB w="12700" cmpd="sng">
+                      <a:noFill/>
+                    </a:lnB>
+                    <a:lnTlToBr w="12700" cmpd="sng">
+                      <a:noFill/>
+                      <a:prstDash val="solid"/>
+                    </a:lnTlToBr>
+                    <a:lnBlToTr w="12700" cmpd="sng">
+                      <a:noFill/>
+                      <a:prstDash val="solid"/>
+                    </a:lnBlToTr>
+                  </a:tcPr>
+                </a:tc>
+                <a:tc>
+                  <a:txBody>
+                    <a:bodyPr/>
+                    <a:lstStyle/>
+                    <a:p>
+                      <a:pPr algn="ctr"/>
+                      <a:endParaRPr lang="en-US" sz="1400" dirty="0">
+                        <a:latin typeface="D2CodingLigature Nerd Font" panose="020B0609020101020101" pitchFamily="49" charset="-127"/>
+                        <a:ea typeface="D2CodingLigature Nerd Font" panose="020B0609020101020101" pitchFamily="49" charset="-127"/>
+                      </a:endParaRPr>
+                    </a:p>
+                    <a:p>
+                      <a:pPr algn="ctr"/>
+                      <a:endParaRPr lang="en-US" sz="1400" dirty="0">
+                        <a:latin typeface="D2CodingLigature Nerd Font" panose="020B0609020101020101" pitchFamily="49" charset="-127"/>
+                        <a:ea typeface="D2CodingLigature Nerd Font" panose="020B0609020101020101" pitchFamily="49" charset="-127"/>
+                      </a:endParaRPr>
+                    </a:p>
+                    <a:p>
+                      <a:pPr marL="0" marR="0" lvl="0" indent="0" algn="ctr" defTabSz="914400" rtl="0" eaLnBrk="1" fontAlgn="auto" latinLnBrk="0" hangingPunct="1">
+                        <a:lnSpc>
+                          <a:spcPct val="100000"/>
+                        </a:lnSpc>
+                        <a:spcBef>
+                          <a:spcPts val="0"/>
+                        </a:spcBef>
+                        <a:spcAft>
+                          <a:spcPts val="0"/>
+                        </a:spcAft>
+                        <a:buClrTx/>
+                        <a:buSzTx/>
+                        <a:buFontTx/>
+                        <a:buNone/>
+                        <a:tabLst/>
+                        <a:defRPr/>
+                      </a:pPr>
+                      <a:r>
+                        <a:rPr lang="en-US" sz="1400" b="1" i="1" dirty="0">
+                          <a:solidFill>
+                            <a:srgbClr val="FF9900"/>
+                          </a:solidFill>
+                          <a:latin typeface="D2CodingLigature Nerd Font" panose="020B0609020101020101" pitchFamily="49" charset="-127"/>
+                          <a:ea typeface="D2CodingLigature Nerd Font" panose="020B0609020101020101" pitchFamily="49" charset="-127"/>
+                          <a:cs typeface="JetBrains Mono" panose="02000009000000000000" pitchFamily="49" charset="0"/>
+                        </a:rPr>
+                        <a:t>// EC Implementation</a:t>
+                      </a:r>
+                      <a:endParaRPr lang="en-US" sz="1400" b="1" dirty="0">
+                        <a:solidFill>
+                          <a:srgbClr val="FF9900"/>
+                        </a:solidFill>
+                        <a:latin typeface="D2CodingLigature Nerd Font" panose="020B0609020101020101" pitchFamily="49" charset="-127"/>
+                        <a:ea typeface="D2CodingLigature Nerd Font" panose="020B0609020101020101" pitchFamily="49" charset="-127"/>
+                        <a:cs typeface="JetBrains Mono" panose="02000009000000000000" pitchFamily="49" charset="0"/>
+                      </a:endParaRPr>
+                    </a:p>
+                  </a:txBody>
+                  <a:tcPr marL="45720" marR="45720">
+                    <a:lnL w="12700" cmpd="sng">
+                      <a:noFill/>
+                    </a:lnL>
+                    <a:lnR w="12700" cmpd="sng">
+                      <a:noFill/>
+                    </a:lnR>
+                    <a:lnT w="6350" cap="flat" cmpd="sng" algn="ctr">
+                      <a:solidFill>
+                        <a:schemeClr val="tx1">
+                          <a:lumMod val="65000"/>
+                          <a:lumOff val="35000"/>
+                        </a:schemeClr>
+                      </a:solidFill>
+                      <a:prstDash val="solid"/>
+                      <a:round/>
+                      <a:headEnd type="none" w="med" len="med"/>
+                      <a:tailEnd type="none" w="med" len="med"/>
+                    </a:lnT>
+                    <a:lnB w="12700" cmpd="sng">
+                      <a:noFill/>
+                    </a:lnB>
+                    <a:lnTlToBr w="12700" cmpd="sng">
+                      <a:noFill/>
+                      <a:prstDash val="solid"/>
+                    </a:lnTlToBr>
+                    <a:lnBlToTr w="12700" cmpd="sng">
+                      <a:noFill/>
+                      <a:prstDash val="solid"/>
+                    </a:lnBlToTr>
+                  </a:tcPr>
+                </a:tc>
+                <a:extLst>
+                  <a:ext uri="{0D108BD9-81ED-4DB2-BD59-A6C34878D82A}">
+                    <a16:rowId xmlns:a16="http://schemas.microsoft.com/office/drawing/2014/main" val="3547383470"/>
+                  </a:ext>
+                </a:extLst>
+              </a:tr>
+              <a:tr h="0">
+                <a:tc>
+                  <a:txBody>
+                    <a:bodyPr/>
+                    <a:lstStyle/>
+                    <a:p>
+                      <a:pPr algn="ctr"/>
+                      <a:r>
+                        <a:rPr lang="en-US" sz="1400" dirty="0" err="1">
+                          <a:solidFill>
+                            <a:srgbClr val="0070FF"/>
+                          </a:solidFill>
+                          <a:effectLst/>
+                          <a:latin typeface="D2CodingLigature Nerd Font" panose="020B0609020101020101" pitchFamily="49" charset="-127"/>
+                          <a:ea typeface="D2CodingLigature Nerd Font" panose="020B0609020101020101" pitchFamily="49" charset="-127"/>
+                          <a:cs typeface="JetBrains Mono" panose="02000009000000000000" pitchFamily="49" charset="0"/>
+                        </a:rPr>
+                        <a:t>MutableSet</a:t>
+                      </a:r>
+                      <a:r>
+                        <a:rPr lang="en-US" sz="1400" dirty="0">
+                          <a:solidFill>
+                            <a:srgbClr val="000000"/>
+                          </a:solidFill>
+                          <a:effectLst/>
+                          <a:latin typeface="D2CodingLigature Nerd Font" panose="020B0609020101020101" pitchFamily="49" charset="-127"/>
+                          <a:ea typeface="D2CodingLigature Nerd Font" panose="020B0609020101020101" pitchFamily="49" charset="-127"/>
+                          <a:cs typeface="JetBrains Mono" panose="02000009000000000000" pitchFamily="49" charset="0"/>
+                        </a:rPr>
+                        <a:t>&lt;</a:t>
+                      </a:r>
+                      <a:r>
+                        <a:rPr lang="en-US" sz="1400" dirty="0">
+                          <a:solidFill>
+                            <a:srgbClr val="A10000"/>
+                          </a:solidFill>
+                          <a:effectLst/>
+                          <a:latin typeface="D2CodingLigature Nerd Font" panose="020B0609020101020101" pitchFamily="49" charset="-127"/>
+                          <a:ea typeface="D2CodingLigature Nerd Font" panose="020B0609020101020101" pitchFamily="49" charset="-127"/>
+                          <a:cs typeface="JetBrains Mono" panose="02000009000000000000" pitchFamily="49" charset="0"/>
+                        </a:rPr>
+                        <a:t>String</a:t>
+                      </a:r>
+                      <a:r>
+                        <a:rPr lang="en-US" sz="1400" dirty="0">
+                          <a:solidFill>
+                            <a:srgbClr val="000000"/>
+                          </a:solidFill>
+                          <a:effectLst/>
+                          <a:latin typeface="D2CodingLigature Nerd Font" panose="020B0609020101020101" pitchFamily="49" charset="-127"/>
+                          <a:ea typeface="D2CodingLigature Nerd Font" panose="020B0609020101020101" pitchFamily="49" charset="-127"/>
+                          <a:cs typeface="JetBrains Mono" panose="02000009000000000000" pitchFamily="49" charset="0"/>
+                        </a:rPr>
+                        <a:t>&gt; </a:t>
+                      </a:r>
+                      <a:endParaRPr lang="en-US" sz="1400" dirty="0">
+                        <a:latin typeface="D2CodingLigature Nerd Font" panose="020B0609020101020101" pitchFamily="49" charset="-127"/>
+                        <a:ea typeface="D2CodingLigature Nerd Font" panose="020B0609020101020101" pitchFamily="49" charset="-127"/>
+                      </a:endParaRPr>
+                    </a:p>
+                  </a:txBody>
+                  <a:tcPr marL="45720" marR="45720">
+                    <a:lnL w="12700" cmpd="sng">
+                      <a:noFill/>
+                    </a:lnL>
+                    <a:lnR w="12700" cmpd="sng">
+                      <a:noFill/>
+                    </a:lnR>
+                    <a:lnT w="12700" cmpd="sng">
+                      <a:noFill/>
+                    </a:lnT>
+                    <a:lnB w="6350" cap="flat" cmpd="sng" algn="ctr">
+                      <a:solidFill>
+                        <a:schemeClr val="tx1">
+                          <a:lumMod val="65000"/>
+                          <a:lumOff val="35000"/>
+                        </a:schemeClr>
+                      </a:solidFill>
+                      <a:prstDash val="solid"/>
+                      <a:round/>
+                      <a:headEnd type="none" w="med" len="med"/>
+                      <a:tailEnd type="none" w="med" len="med"/>
+                    </a:lnB>
+                    <a:lnTlToBr w="12700" cmpd="sng">
+                      <a:noFill/>
+                      <a:prstDash val="solid"/>
+                    </a:lnTlToBr>
+                    <a:lnBlToTr w="12700" cmpd="sng">
+                      <a:noFill/>
+                      <a:prstDash val="solid"/>
+                    </a:lnBlToTr>
+                  </a:tcPr>
+                </a:tc>
+                <a:tc>
+                  <a:txBody>
+                    <a:bodyPr/>
+                    <a:lstStyle/>
+                    <a:p>
+                      <a:pPr marL="0" marR="0" lvl="0" indent="0" algn="ctr" defTabSz="914400" rtl="0" eaLnBrk="1" fontAlgn="auto" latinLnBrk="0" hangingPunct="1">
+                        <a:lnSpc>
+                          <a:spcPct val="100000"/>
+                        </a:lnSpc>
+                        <a:spcBef>
+                          <a:spcPts val="0"/>
+                        </a:spcBef>
+                        <a:spcAft>
+                          <a:spcPts val="0"/>
+                        </a:spcAft>
+                        <a:buClrTx/>
+                        <a:buSzTx/>
+                        <a:buFontTx/>
+                        <a:buNone/>
+                        <a:tabLst/>
+                        <a:defRPr/>
+                      </a:pPr>
+                      <a:r>
+                        <a:rPr lang="en-US" sz="1400" dirty="0" err="1">
+                          <a:solidFill>
+                            <a:srgbClr val="A10000"/>
+                          </a:solidFill>
+                          <a:effectLst/>
+                          <a:latin typeface="D2CodingLigature Nerd Font" panose="020B0609020101020101" pitchFamily="49" charset="-127"/>
+                          <a:ea typeface="D2CodingLigature Nerd Font" panose="020B0609020101020101" pitchFamily="49" charset="-127"/>
+                          <a:cs typeface="JetBrains Mono" panose="02000009000000000000" pitchFamily="49" charset="0"/>
+                        </a:rPr>
+                        <a:t>Sets</a:t>
+                      </a:r>
+                      <a:r>
+                        <a:rPr lang="en-US" sz="1400" dirty="0" err="1">
+                          <a:solidFill>
+                            <a:srgbClr val="000000"/>
+                          </a:solidFill>
+                          <a:effectLst/>
+                          <a:latin typeface="D2CodingLigature Nerd Font" panose="020B0609020101020101" pitchFamily="49" charset="-127"/>
+                          <a:ea typeface="D2CodingLigature Nerd Font" panose="020B0609020101020101" pitchFamily="49" charset="-127"/>
+                          <a:cs typeface="JetBrains Mono" panose="02000009000000000000" pitchFamily="49" charset="0"/>
+                        </a:rPr>
+                        <a:t>.</a:t>
+                      </a:r>
+                      <a:r>
+                        <a:rPr lang="en-US" sz="1400" b="0" i="1" dirty="0" err="1">
+                          <a:solidFill>
+                            <a:srgbClr val="660E7A"/>
+                          </a:solidFill>
+                          <a:effectLst/>
+                          <a:latin typeface="D2CodingLigature Nerd Font" panose="020B0609020101020101" pitchFamily="49" charset="-127"/>
+                          <a:ea typeface="D2CodingLigature Nerd Font" panose="020B0609020101020101" pitchFamily="49" charset="-127"/>
+                          <a:cs typeface="JetBrains Mono" panose="02000009000000000000" pitchFamily="49" charset="0"/>
+                        </a:rPr>
+                        <a:t>mutable</a:t>
+                      </a:r>
+                      <a:r>
+                        <a:rPr lang="en-US" sz="1400" dirty="0" err="1">
+                          <a:solidFill>
+                            <a:srgbClr val="000000"/>
+                          </a:solidFill>
+                          <a:effectLst/>
+                          <a:latin typeface="D2CodingLigature Nerd Font" panose="020B0609020101020101" pitchFamily="49" charset="-127"/>
+                          <a:ea typeface="D2CodingLigature Nerd Font" panose="020B0609020101020101" pitchFamily="49" charset="-127"/>
+                          <a:cs typeface="JetBrains Mono" panose="02000009000000000000" pitchFamily="49" charset="0"/>
+                        </a:rPr>
+                        <a:t>.of</a:t>
+                      </a:r>
+                      <a:r>
+                        <a:rPr lang="en-US" sz="1400" dirty="0">
+                          <a:solidFill>
+                            <a:srgbClr val="000000"/>
+                          </a:solidFill>
+                          <a:effectLst/>
+                          <a:latin typeface="D2CodingLigature Nerd Font" panose="020B0609020101020101" pitchFamily="49" charset="-127"/>
+                          <a:ea typeface="D2CodingLigature Nerd Font" panose="020B0609020101020101" pitchFamily="49" charset="-127"/>
+                          <a:cs typeface="JetBrains Mono" panose="02000009000000000000" pitchFamily="49" charset="0"/>
+                        </a:rPr>
+                        <a:t>(</a:t>
+                      </a:r>
+                      <a:r>
+                        <a:rPr lang="en-US" sz="1400" b="1" dirty="0">
+                          <a:solidFill>
+                            <a:srgbClr val="0B00CC"/>
+                          </a:solidFill>
+                          <a:effectLst/>
+                          <a:latin typeface="D2CodingLigature Nerd Font" panose="020B0609020101020101" pitchFamily="49" charset="-127"/>
+                          <a:ea typeface="D2CodingLigature Nerd Font" panose="020B0609020101020101" pitchFamily="49" charset="-127"/>
+                          <a:cs typeface="JetBrains Mono" panose="02000009000000000000" pitchFamily="49" charset="0"/>
+                        </a:rPr>
+                        <a:t>"1"</a:t>
+                      </a:r>
+                      <a:r>
+                        <a:rPr lang="en-US" sz="1400" dirty="0">
+                          <a:solidFill>
+                            <a:srgbClr val="000000"/>
+                          </a:solidFill>
+                          <a:effectLst/>
+                          <a:latin typeface="D2CodingLigature Nerd Font" panose="020B0609020101020101" pitchFamily="49" charset="-127"/>
+                          <a:ea typeface="D2CodingLigature Nerd Font" panose="020B0609020101020101" pitchFamily="49" charset="-127"/>
+                          <a:cs typeface="JetBrains Mono" panose="02000009000000000000" pitchFamily="49" charset="0"/>
+                        </a:rPr>
+                        <a:t>, </a:t>
+                      </a:r>
+                      <a:r>
+                        <a:rPr lang="en-US" sz="1400" b="1" dirty="0">
+                          <a:solidFill>
+                            <a:srgbClr val="0B00CC"/>
+                          </a:solidFill>
+                          <a:effectLst/>
+                          <a:latin typeface="D2CodingLigature Nerd Font" panose="020B0609020101020101" pitchFamily="49" charset="-127"/>
+                          <a:ea typeface="D2CodingLigature Nerd Font" panose="020B0609020101020101" pitchFamily="49" charset="-127"/>
+                          <a:cs typeface="JetBrains Mono" panose="02000009000000000000" pitchFamily="49" charset="0"/>
+                        </a:rPr>
+                        <a:t>"2"</a:t>
+                      </a:r>
+                      <a:r>
+                        <a:rPr lang="en-US" sz="1400" dirty="0">
+                          <a:solidFill>
+                            <a:srgbClr val="000000"/>
+                          </a:solidFill>
+                          <a:effectLst/>
+                          <a:latin typeface="D2CodingLigature Nerd Font" panose="020B0609020101020101" pitchFamily="49" charset="-127"/>
+                          <a:ea typeface="D2CodingLigature Nerd Font" panose="020B0609020101020101" pitchFamily="49" charset="-127"/>
+                          <a:cs typeface="JetBrains Mono" panose="02000009000000000000" pitchFamily="49" charset="0"/>
+                        </a:rPr>
+                        <a:t>, </a:t>
+                      </a:r>
+                      <a:r>
+                        <a:rPr lang="en-US" sz="1400" b="1" dirty="0">
+                          <a:solidFill>
+                            <a:srgbClr val="0B00CC"/>
+                          </a:solidFill>
+                          <a:effectLst/>
+                          <a:latin typeface="D2CodingLigature Nerd Font" panose="020B0609020101020101" pitchFamily="49" charset="-127"/>
+                          <a:ea typeface="D2CodingLigature Nerd Font" panose="020B0609020101020101" pitchFamily="49" charset="-127"/>
+                          <a:cs typeface="JetBrains Mono" panose="02000009000000000000" pitchFamily="49" charset="0"/>
+                        </a:rPr>
+                        <a:t>"3"</a:t>
+                      </a:r>
+                      <a:r>
+                        <a:rPr lang="en-US" sz="1400" dirty="0">
+                          <a:solidFill>
+                            <a:srgbClr val="000000"/>
+                          </a:solidFill>
+                          <a:effectLst/>
+                          <a:latin typeface="D2CodingLigature Nerd Font" panose="020B0609020101020101" pitchFamily="49" charset="-127"/>
+                          <a:ea typeface="D2CodingLigature Nerd Font" panose="020B0609020101020101" pitchFamily="49" charset="-127"/>
+                          <a:cs typeface="JetBrains Mono" panose="02000009000000000000" pitchFamily="49" charset="0"/>
+                        </a:rPr>
+                        <a:t>);</a:t>
+                      </a:r>
+                      <a:endParaRPr lang="en-US" sz="1400" dirty="0">
+                        <a:latin typeface="D2CodingLigature Nerd Font" panose="020B0609020101020101" pitchFamily="49" charset="-127"/>
+                        <a:ea typeface="D2CodingLigature Nerd Font" panose="020B0609020101020101" pitchFamily="49" charset="-127"/>
+                      </a:endParaRPr>
+                    </a:p>
+                  </a:txBody>
+                  <a:tcPr marL="45720" marR="45720">
+                    <a:lnL w="12700" cmpd="sng">
+                      <a:noFill/>
+                    </a:lnL>
+                    <a:lnR w="12700" cmpd="sng">
+                      <a:noFill/>
+                    </a:lnR>
+                    <a:lnT w="12700" cmpd="sng">
+                      <a:noFill/>
+                    </a:lnT>
+                    <a:lnB w="6350" cap="flat" cmpd="sng" algn="ctr">
+                      <a:solidFill>
+                        <a:schemeClr val="tx1">
+                          <a:lumMod val="65000"/>
+                          <a:lumOff val="35000"/>
+                        </a:schemeClr>
+                      </a:solidFill>
+                      <a:prstDash val="solid"/>
+                      <a:round/>
+                      <a:headEnd type="none" w="med" len="med"/>
+                      <a:tailEnd type="none" w="med" len="med"/>
+                    </a:lnB>
+                    <a:lnTlToBr w="12700" cmpd="sng">
+                      <a:noFill/>
+                      <a:prstDash val="solid"/>
+                    </a:lnTlToBr>
+                    <a:lnBlToTr w="12700" cmpd="sng">
+                      <a:noFill/>
+                      <a:prstDash val="solid"/>
+                    </a:lnBlToTr>
+                  </a:tcPr>
+                </a:tc>
+                <a:extLst>
+                  <a:ext uri="{0D108BD9-81ED-4DB2-BD59-A6C34878D82A}">
+                    <a16:rowId xmlns:a16="http://schemas.microsoft.com/office/drawing/2014/main" val="2004203896"/>
+                  </a:ext>
+                </a:extLst>
+              </a:tr>
+            </a:tbl>
+          </a:graphicData>
+        </a:graphic>
+      </p:graphicFrame>
+      <p:graphicFrame>
+        <p:nvGraphicFramePr>
+          <p:cNvPr id="39" name="Table 38">
+            <a:extLst>
+              <a:ext uri="{FF2B5EF4-FFF2-40B4-BE49-F238E27FC236}">
+                <a16:creationId xmlns:a16="http://schemas.microsoft.com/office/drawing/2014/main" id="{95589FC3-72A7-E0AE-7908-D283DC361C5D}"/>
+              </a:ext>
+            </a:extLst>
+          </p:cNvPr>
+          <p:cNvGraphicFramePr>
+            <a:graphicFrameLocks noGrp="1"/>
+          </p:cNvGraphicFramePr>
+          <p:nvPr>
+            <p:extLst>
+              <p:ext uri="{D42A27DB-BD31-4B8C-83A1-F6EECF244321}">
+                <p14:modId xmlns:p14="http://schemas.microsoft.com/office/powerpoint/2010/main" val="396285313"/>
+              </p:ext>
+            </p:extLst>
+          </p:nvPr>
+        </p:nvGraphicFramePr>
+        <p:xfrm>
+          <a:off x="6588920" y="3083017"/>
+          <a:ext cx="5212081" cy="2895600"/>
+        </p:xfrm>
+        <a:graphic>
+          <a:graphicData uri="http://schemas.openxmlformats.org/drawingml/2006/table">
+            <a:tbl>
+              <a:tblPr firstRow="1" bandRow="1">
+                <a:tableStyleId>{5940675A-B579-460E-94D1-54222C63F5DA}</a:tableStyleId>
+              </a:tblPr>
+              <a:tblGrid>
+                <a:gridCol w="1932614">
+                  <a:extLst>
+                    <a:ext uri="{9D8B030D-6E8A-4147-A177-3AD203B41FA5}">
+                      <a16:colId xmlns:a16="http://schemas.microsoft.com/office/drawing/2014/main" val="195687094"/>
+                    </a:ext>
+                  </a:extLst>
+                </a:gridCol>
+                <a:gridCol w="3279467">
+                  <a:extLst>
+                    <a:ext uri="{9D8B030D-6E8A-4147-A177-3AD203B41FA5}">
+                      <a16:colId xmlns:a16="http://schemas.microsoft.com/office/drawing/2014/main" val="60489753"/>
+                    </a:ext>
+                  </a:extLst>
+                </a:gridCol>
+              </a:tblGrid>
+              <a:tr h="0">
+                <a:tc>
+                  <a:txBody>
+                    <a:bodyPr/>
+                    <a:lstStyle/>
+                    <a:p>
+                      <a:pPr marL="0" marR="0" lvl="0" indent="0" algn="ctr" defTabSz="914400" rtl="0" eaLnBrk="1" fontAlgn="auto" latinLnBrk="0" hangingPunct="1">
+                        <a:lnSpc>
+                          <a:spcPct val="100000"/>
+                        </a:lnSpc>
+                        <a:spcBef>
+                          <a:spcPts val="0"/>
+                        </a:spcBef>
+                        <a:spcAft>
+                          <a:spcPts val="0"/>
+                        </a:spcAft>
+                        <a:buClrTx/>
+                        <a:buSzTx/>
+                        <a:buFontTx/>
+                        <a:buNone/>
+                        <a:tabLst/>
+                        <a:defRPr/>
+                      </a:pPr>
+                      <a:endParaRPr lang="en-US" sz="1400" i="1" dirty="0">
+                        <a:solidFill>
+                          <a:srgbClr val="808080"/>
+                        </a:solidFill>
+                        <a:latin typeface="D2CodingLigature Nerd Font" panose="020B0609020101020101" pitchFamily="49" charset="-127"/>
+                        <a:ea typeface="D2CodingLigature Nerd Font" panose="020B0609020101020101" pitchFamily="49" charset="-127"/>
+                        <a:cs typeface="JetBrains Mono" panose="02000009000000000000" pitchFamily="49" charset="0"/>
+                      </a:endParaRPr>
+                    </a:p>
+                    <a:p>
+                      <a:pPr marL="0" marR="0" lvl="0" indent="0" algn="ctr" defTabSz="914400" rtl="0" eaLnBrk="1" fontAlgn="auto" latinLnBrk="0" hangingPunct="1">
+                        <a:lnSpc>
+                          <a:spcPct val="100000"/>
+                        </a:lnSpc>
+                        <a:spcBef>
+                          <a:spcPts val="0"/>
+                        </a:spcBef>
+                        <a:spcAft>
+                          <a:spcPts val="0"/>
+                        </a:spcAft>
+                        <a:buClrTx/>
+                        <a:buSzTx/>
+                        <a:buFontTx/>
+                        <a:buNone/>
+                        <a:tabLst/>
+                        <a:defRPr/>
+                      </a:pPr>
+                      <a:r>
+                        <a:rPr lang="en-US" sz="1400" i="1" dirty="0">
+                          <a:solidFill>
+                            <a:srgbClr val="808080"/>
+                          </a:solidFill>
+                          <a:latin typeface="D2CodingLigature Nerd Font" panose="020B0609020101020101" pitchFamily="49" charset="-127"/>
+                          <a:ea typeface="D2CodingLigature Nerd Font" panose="020B0609020101020101" pitchFamily="49" charset="-127"/>
+                          <a:cs typeface="JetBrains Mono" panose="02000009000000000000" pitchFamily="49" charset="0"/>
+                        </a:rPr>
+                        <a:t>// JDK Type</a:t>
+                      </a:r>
+                      <a:endParaRPr lang="en-US" sz="1400" dirty="0">
+                        <a:solidFill>
+                          <a:srgbClr val="0070FF"/>
+                        </a:solidFill>
+                        <a:latin typeface="D2CodingLigature Nerd Font" panose="020B0609020101020101" pitchFamily="49" charset="-127"/>
+                        <a:ea typeface="D2CodingLigature Nerd Font" panose="020B0609020101020101" pitchFamily="49" charset="-127"/>
+                        <a:cs typeface="JetBrains Mono" panose="02000009000000000000" pitchFamily="49" charset="0"/>
+                      </a:endParaRPr>
+                    </a:p>
+                  </a:txBody>
+                  <a:tcPr marL="45720" marR="45720">
+                    <a:lnL w="12700" cmpd="sng">
+                      <a:noFill/>
+                    </a:lnL>
+                    <a:lnR w="12700" cmpd="sng">
+                      <a:noFill/>
+                    </a:lnR>
+                    <a:lnT w="12700" cmpd="sng">
+                      <a:noFill/>
+                    </a:lnT>
+                    <a:lnB w="12700" cmpd="sng">
+                      <a:noFill/>
+                    </a:lnB>
+                    <a:lnTlToBr w="12700" cmpd="sng">
+                      <a:noFill/>
+                      <a:prstDash val="solid"/>
+                    </a:lnTlToBr>
+                    <a:lnBlToTr w="12700" cmpd="sng">
+                      <a:noFill/>
+                      <a:prstDash val="solid"/>
+                    </a:lnBlToTr>
+                  </a:tcPr>
+                </a:tc>
+                <a:tc>
+                  <a:txBody>
+                    <a:bodyPr/>
+                    <a:lstStyle/>
+                    <a:p>
+                      <a:pPr algn="ctr"/>
+                      <a:endParaRPr lang="en-US" sz="1400" i="1" dirty="0">
+                        <a:solidFill>
+                          <a:srgbClr val="808080"/>
+                        </a:solidFill>
+                        <a:latin typeface="D2CodingLigature Nerd Font" panose="020B0609020101020101" pitchFamily="49" charset="-127"/>
+                        <a:ea typeface="D2CodingLigature Nerd Font" panose="020B0609020101020101" pitchFamily="49" charset="-127"/>
+                        <a:cs typeface="JetBrains Mono" panose="02000009000000000000" pitchFamily="49" charset="0"/>
+                      </a:endParaRPr>
+                    </a:p>
+                    <a:p>
+                      <a:pPr algn="ctr"/>
+                      <a:r>
+                        <a:rPr lang="en-US" sz="1400" i="1" dirty="0">
+                          <a:solidFill>
+                            <a:srgbClr val="808080"/>
+                          </a:solidFill>
+                          <a:latin typeface="D2CodingLigature Nerd Font" panose="020B0609020101020101" pitchFamily="49" charset="-127"/>
+                          <a:ea typeface="D2CodingLigature Nerd Font" panose="020B0609020101020101" pitchFamily="49" charset="-127"/>
+                          <a:cs typeface="JetBrains Mono" panose="02000009000000000000" pitchFamily="49" charset="0"/>
+                        </a:rPr>
+                        <a:t>// JDK Implementation</a:t>
+                      </a:r>
+                      <a:endParaRPr lang="en-US" sz="1400" dirty="0">
+                        <a:solidFill>
+                          <a:srgbClr val="0070FF"/>
+                        </a:solidFill>
+                        <a:latin typeface="D2CodingLigature Nerd Font" panose="020B0609020101020101" pitchFamily="49" charset="-127"/>
+                        <a:ea typeface="D2CodingLigature Nerd Font" panose="020B0609020101020101" pitchFamily="49" charset="-127"/>
+                        <a:cs typeface="JetBrains Mono" panose="02000009000000000000" pitchFamily="49" charset="0"/>
+                      </a:endParaRPr>
+                    </a:p>
+                  </a:txBody>
+                  <a:tcPr marL="45720" marR="45720">
+                    <a:lnL w="12700" cmpd="sng">
+                      <a:noFill/>
+                    </a:lnL>
+                    <a:lnR w="12700" cmpd="sng">
+                      <a:noFill/>
+                    </a:lnR>
+                    <a:lnT w="12700" cmpd="sng">
+                      <a:noFill/>
+                    </a:lnT>
+                    <a:lnB w="12700" cmpd="sng">
+                      <a:noFill/>
+                    </a:lnB>
+                    <a:lnTlToBr w="12700" cmpd="sng">
+                      <a:noFill/>
+                      <a:prstDash val="solid"/>
+                    </a:lnTlToBr>
+                    <a:lnBlToTr w="12700" cmpd="sng">
+                      <a:noFill/>
+                      <a:prstDash val="solid"/>
+                    </a:lnBlToTr>
+                  </a:tcPr>
+                </a:tc>
+                <a:extLst>
+                  <a:ext uri="{0D108BD9-81ED-4DB2-BD59-A6C34878D82A}">
+                    <a16:rowId xmlns:a16="http://schemas.microsoft.com/office/drawing/2014/main" val="432955028"/>
+                  </a:ext>
+                </a:extLst>
+              </a:tr>
+              <a:tr h="0">
+                <a:tc>
+                  <a:txBody>
+                    <a:bodyPr/>
+                    <a:lstStyle/>
+                    <a:p>
+                      <a:pPr algn="ctr"/>
+                      <a:r>
+                        <a:rPr lang="en-US" sz="1400" dirty="0">
+                          <a:solidFill>
+                            <a:srgbClr val="0070FF"/>
+                          </a:solidFill>
+                          <a:effectLst/>
+                          <a:latin typeface="D2CodingLigature Nerd Font" panose="020B0609020101020101" pitchFamily="49" charset="-127"/>
+                          <a:ea typeface="D2CodingLigature Nerd Font" panose="020B0609020101020101" pitchFamily="49" charset="-127"/>
+                          <a:cs typeface="JetBrains Mono" panose="02000009000000000000" pitchFamily="49" charset="0"/>
+                        </a:rPr>
+                        <a:t>Set</a:t>
+                      </a:r>
+                      <a:r>
+                        <a:rPr lang="en-US" sz="1400" dirty="0">
+                          <a:solidFill>
+                            <a:srgbClr val="000000"/>
+                          </a:solidFill>
+                          <a:effectLst/>
+                          <a:latin typeface="D2CodingLigature Nerd Font" panose="020B0609020101020101" pitchFamily="49" charset="-127"/>
+                          <a:ea typeface="D2CodingLigature Nerd Font" panose="020B0609020101020101" pitchFamily="49" charset="-127"/>
+                          <a:cs typeface="JetBrains Mono" panose="02000009000000000000" pitchFamily="49" charset="0"/>
+                        </a:rPr>
+                        <a:t>&lt;</a:t>
+                      </a:r>
+                      <a:r>
+                        <a:rPr lang="en-US" sz="1400" dirty="0">
+                          <a:solidFill>
+                            <a:srgbClr val="A10000"/>
+                          </a:solidFill>
+                          <a:effectLst/>
+                          <a:latin typeface="D2CodingLigature Nerd Font" panose="020B0609020101020101" pitchFamily="49" charset="-127"/>
+                          <a:ea typeface="D2CodingLigature Nerd Font" panose="020B0609020101020101" pitchFamily="49" charset="-127"/>
+                          <a:cs typeface="JetBrains Mono" panose="02000009000000000000" pitchFamily="49" charset="0"/>
+                        </a:rPr>
+                        <a:t>String</a:t>
+                      </a:r>
+                      <a:r>
+                        <a:rPr lang="en-US" sz="1400" dirty="0">
+                          <a:solidFill>
+                            <a:srgbClr val="000000"/>
+                          </a:solidFill>
+                          <a:effectLst/>
+                          <a:latin typeface="D2CodingLigature Nerd Font" panose="020B0609020101020101" pitchFamily="49" charset="-127"/>
+                          <a:ea typeface="D2CodingLigature Nerd Font" panose="020B0609020101020101" pitchFamily="49" charset="-127"/>
+                          <a:cs typeface="JetBrains Mono" panose="02000009000000000000" pitchFamily="49" charset="0"/>
+                        </a:rPr>
+                        <a:t>&gt; </a:t>
+                      </a:r>
+                      <a:endParaRPr lang="en-US" sz="1400" dirty="0">
+                        <a:latin typeface="D2CodingLigature Nerd Font" panose="020B0609020101020101" pitchFamily="49" charset="-127"/>
+                        <a:ea typeface="D2CodingLigature Nerd Font" panose="020B0609020101020101" pitchFamily="49" charset="-127"/>
+                      </a:endParaRPr>
+                    </a:p>
+                  </a:txBody>
+                  <a:tcPr marL="45720" marR="45720">
+                    <a:lnL w="12700" cmpd="sng">
+                      <a:noFill/>
+                    </a:lnL>
+                    <a:lnR w="12700" cmpd="sng">
+                      <a:noFill/>
+                    </a:lnR>
+                    <a:lnT w="12700" cmpd="sng">
+                      <a:noFill/>
+                    </a:lnT>
+                    <a:lnB w="6350" cap="flat" cmpd="sng" algn="ctr">
+                      <a:solidFill>
+                        <a:schemeClr val="tx1">
+                          <a:lumMod val="65000"/>
+                          <a:lumOff val="35000"/>
+                        </a:schemeClr>
+                      </a:solidFill>
+                      <a:prstDash val="solid"/>
+                      <a:round/>
+                      <a:headEnd type="none" w="med" len="med"/>
+                      <a:tailEnd type="none" w="med" len="med"/>
+                    </a:lnB>
+                    <a:lnTlToBr w="12700" cmpd="sng">
+                      <a:noFill/>
+                      <a:prstDash val="solid"/>
+                    </a:lnTlToBr>
+                    <a:lnBlToTr w="12700" cmpd="sng">
+                      <a:noFill/>
+                      <a:prstDash val="solid"/>
+                    </a:lnBlToTr>
+                  </a:tcPr>
+                </a:tc>
+                <a:tc>
+                  <a:txBody>
+                    <a:bodyPr/>
+                    <a:lstStyle/>
+                    <a:p>
+                      <a:pPr algn="ctr"/>
+                      <a:r>
+                        <a:rPr lang="en-US" sz="1400" dirty="0" err="1">
+                          <a:solidFill>
+                            <a:srgbClr val="0070FF"/>
+                          </a:solidFill>
+                          <a:effectLst/>
+                          <a:latin typeface="D2CodingLigature Nerd Font" panose="020B0609020101020101" pitchFamily="49" charset="-127"/>
+                          <a:ea typeface="D2CodingLigature Nerd Font" panose="020B0609020101020101" pitchFamily="49" charset="-127"/>
+                          <a:cs typeface="JetBrains Mono" panose="02000009000000000000" pitchFamily="49" charset="0"/>
+                        </a:rPr>
+                        <a:t>Set</a:t>
+                      </a:r>
+                      <a:r>
+                        <a:rPr lang="en-US" sz="1400" dirty="0" err="1">
+                          <a:solidFill>
+                            <a:srgbClr val="000000"/>
+                          </a:solidFill>
+                          <a:effectLst/>
+                          <a:latin typeface="D2CodingLigature Nerd Font" panose="020B0609020101020101" pitchFamily="49" charset="-127"/>
+                          <a:ea typeface="D2CodingLigature Nerd Font" panose="020B0609020101020101" pitchFamily="49" charset="-127"/>
+                          <a:cs typeface="JetBrains Mono" panose="02000009000000000000" pitchFamily="49" charset="0"/>
+                        </a:rPr>
+                        <a:t>.</a:t>
+                      </a:r>
+                      <a:r>
+                        <a:rPr lang="en-US" sz="1400" i="1" dirty="0" err="1">
+                          <a:solidFill>
+                            <a:srgbClr val="000000"/>
+                          </a:solidFill>
+                          <a:effectLst/>
+                          <a:latin typeface="D2CodingLigature Nerd Font" panose="020B0609020101020101" pitchFamily="49" charset="-127"/>
+                          <a:ea typeface="D2CodingLigature Nerd Font" panose="020B0609020101020101" pitchFamily="49" charset="-127"/>
+                          <a:cs typeface="JetBrains Mono" panose="02000009000000000000" pitchFamily="49" charset="0"/>
+                        </a:rPr>
+                        <a:t>of</a:t>
+                      </a:r>
+                      <a:r>
+                        <a:rPr lang="en-US" sz="1400" dirty="0">
+                          <a:solidFill>
+                            <a:srgbClr val="000000"/>
+                          </a:solidFill>
+                          <a:effectLst/>
+                          <a:latin typeface="D2CodingLigature Nerd Font" panose="020B0609020101020101" pitchFamily="49" charset="-127"/>
+                          <a:ea typeface="D2CodingLigature Nerd Font" panose="020B0609020101020101" pitchFamily="49" charset="-127"/>
+                          <a:cs typeface="JetBrains Mono" panose="02000009000000000000" pitchFamily="49" charset="0"/>
+                        </a:rPr>
+                        <a:t>(</a:t>
+                      </a:r>
+                      <a:r>
+                        <a:rPr lang="en-US" sz="1400" b="1" dirty="0">
+                          <a:solidFill>
+                            <a:srgbClr val="0B00CC"/>
+                          </a:solidFill>
+                          <a:effectLst/>
+                          <a:latin typeface="D2CodingLigature Nerd Font" panose="020B0609020101020101" pitchFamily="49" charset="-127"/>
+                          <a:ea typeface="D2CodingLigature Nerd Font" panose="020B0609020101020101" pitchFamily="49" charset="-127"/>
+                          <a:cs typeface="JetBrains Mono" panose="02000009000000000000" pitchFamily="49" charset="0"/>
+                        </a:rPr>
+                        <a:t>"1"</a:t>
+                      </a:r>
+                      <a:r>
+                        <a:rPr lang="en-US" sz="1400" dirty="0">
+                          <a:solidFill>
+                            <a:srgbClr val="000000"/>
+                          </a:solidFill>
+                          <a:effectLst/>
+                          <a:latin typeface="D2CodingLigature Nerd Font" panose="020B0609020101020101" pitchFamily="49" charset="-127"/>
+                          <a:ea typeface="D2CodingLigature Nerd Font" panose="020B0609020101020101" pitchFamily="49" charset="-127"/>
+                          <a:cs typeface="JetBrains Mono" panose="02000009000000000000" pitchFamily="49" charset="0"/>
+                        </a:rPr>
+                        <a:t>, </a:t>
+                      </a:r>
+                      <a:r>
+                        <a:rPr lang="en-US" sz="1400" b="1" dirty="0">
+                          <a:solidFill>
+                            <a:srgbClr val="0B00CC"/>
+                          </a:solidFill>
+                          <a:effectLst/>
+                          <a:latin typeface="D2CodingLigature Nerd Font" panose="020B0609020101020101" pitchFamily="49" charset="-127"/>
+                          <a:ea typeface="D2CodingLigature Nerd Font" panose="020B0609020101020101" pitchFamily="49" charset="-127"/>
+                          <a:cs typeface="JetBrains Mono" panose="02000009000000000000" pitchFamily="49" charset="0"/>
+                        </a:rPr>
+                        <a:t>"2"</a:t>
+                      </a:r>
+                      <a:r>
+                        <a:rPr lang="en-US" sz="1400" dirty="0">
+                          <a:solidFill>
+                            <a:srgbClr val="000000"/>
+                          </a:solidFill>
+                          <a:effectLst/>
+                          <a:latin typeface="D2CodingLigature Nerd Font" panose="020B0609020101020101" pitchFamily="49" charset="-127"/>
+                          <a:ea typeface="D2CodingLigature Nerd Font" panose="020B0609020101020101" pitchFamily="49" charset="-127"/>
+                          <a:cs typeface="JetBrains Mono" panose="02000009000000000000" pitchFamily="49" charset="0"/>
+                        </a:rPr>
+                        <a:t>, </a:t>
+                      </a:r>
+                      <a:r>
+                        <a:rPr lang="en-US" sz="1400" b="1" dirty="0">
+                          <a:solidFill>
+                            <a:srgbClr val="0B00CC"/>
+                          </a:solidFill>
+                          <a:effectLst/>
+                          <a:latin typeface="D2CodingLigature Nerd Font" panose="020B0609020101020101" pitchFamily="49" charset="-127"/>
+                          <a:ea typeface="D2CodingLigature Nerd Font" panose="020B0609020101020101" pitchFamily="49" charset="-127"/>
+                          <a:cs typeface="JetBrains Mono" panose="02000009000000000000" pitchFamily="49" charset="0"/>
+                        </a:rPr>
+                        <a:t>"3"</a:t>
+                      </a:r>
+                      <a:r>
+                        <a:rPr lang="en-US" sz="1400" dirty="0">
+                          <a:solidFill>
+                            <a:srgbClr val="000000"/>
+                          </a:solidFill>
+                          <a:effectLst/>
+                          <a:latin typeface="D2CodingLigature Nerd Font" panose="020B0609020101020101" pitchFamily="49" charset="-127"/>
+                          <a:ea typeface="D2CodingLigature Nerd Font" panose="020B0609020101020101" pitchFamily="49" charset="-127"/>
+                          <a:cs typeface="JetBrains Mono" panose="02000009000000000000" pitchFamily="49" charset="0"/>
+                        </a:rPr>
+                        <a:t>);</a:t>
+                      </a:r>
+                      <a:endParaRPr lang="en-US" sz="1400" dirty="0">
+                        <a:latin typeface="D2CodingLigature Nerd Font" panose="020B0609020101020101" pitchFamily="49" charset="-127"/>
+                        <a:ea typeface="D2CodingLigature Nerd Font" panose="020B0609020101020101" pitchFamily="49" charset="-127"/>
+                      </a:endParaRPr>
+                    </a:p>
+                  </a:txBody>
+                  <a:tcPr marL="45720" marR="45720">
+                    <a:lnL w="12700" cmpd="sng">
+                      <a:noFill/>
+                    </a:lnL>
+                    <a:lnR w="12700" cmpd="sng">
+                      <a:noFill/>
+                    </a:lnR>
+                    <a:lnT w="12700" cmpd="sng">
+                      <a:noFill/>
+                    </a:lnT>
+                    <a:lnB w="6350" cap="flat" cmpd="sng" algn="ctr">
+                      <a:solidFill>
+                        <a:schemeClr val="tx1">
+                          <a:lumMod val="65000"/>
+                          <a:lumOff val="35000"/>
+                        </a:schemeClr>
+                      </a:solidFill>
+                      <a:prstDash val="solid"/>
+                      <a:round/>
+                      <a:headEnd type="none" w="med" len="med"/>
+                      <a:tailEnd type="none" w="med" len="med"/>
+                    </a:lnB>
+                    <a:lnTlToBr w="12700" cmpd="sng">
+                      <a:noFill/>
+                      <a:prstDash val="solid"/>
+                    </a:lnTlToBr>
+                    <a:lnBlToTr w="12700" cmpd="sng">
+                      <a:noFill/>
+                      <a:prstDash val="solid"/>
+                    </a:lnBlToTr>
+                  </a:tcPr>
+                </a:tc>
+                <a:extLst>
+                  <a:ext uri="{0D108BD9-81ED-4DB2-BD59-A6C34878D82A}">
+                    <a16:rowId xmlns:a16="http://schemas.microsoft.com/office/drawing/2014/main" val="2455612947"/>
+                  </a:ext>
+                </a:extLst>
+              </a:tr>
+              <a:tr h="0">
+                <a:tc>
+                  <a:txBody>
+                    <a:bodyPr/>
+                    <a:lstStyle/>
+                    <a:p>
+                      <a:pPr marL="0" marR="0" lvl="0" indent="0" algn="ctr" defTabSz="914400" rtl="0" eaLnBrk="1" fontAlgn="auto" latinLnBrk="0" hangingPunct="1">
+                        <a:lnSpc>
+                          <a:spcPct val="100000"/>
+                        </a:lnSpc>
+                        <a:spcBef>
+                          <a:spcPts val="0"/>
+                        </a:spcBef>
+                        <a:spcAft>
+                          <a:spcPts val="0"/>
+                        </a:spcAft>
+                        <a:buClrTx/>
+                        <a:buSzTx/>
+                        <a:buFontTx/>
+                        <a:buNone/>
+                        <a:tabLst/>
+                        <a:defRPr/>
+                      </a:pPr>
+                      <a:endParaRPr lang="en-US" sz="1400" i="1" dirty="0">
+                        <a:solidFill>
+                          <a:srgbClr val="808080"/>
+                        </a:solidFill>
+                        <a:latin typeface="D2CodingLigature Nerd Font" panose="020B0609020101020101" pitchFamily="49" charset="-127"/>
+                        <a:ea typeface="D2CodingLigature Nerd Font" panose="020B0609020101020101" pitchFamily="49" charset="-127"/>
+                        <a:cs typeface="JetBrains Mono" panose="02000009000000000000" pitchFamily="49" charset="0"/>
+                      </a:endParaRPr>
+                    </a:p>
+                    <a:p>
+                      <a:pPr marL="0" marR="0" lvl="0" indent="0" algn="ctr" defTabSz="914400" rtl="0" eaLnBrk="1" fontAlgn="auto" latinLnBrk="0" hangingPunct="1">
+                        <a:lnSpc>
+                          <a:spcPct val="100000"/>
+                        </a:lnSpc>
+                        <a:spcBef>
+                          <a:spcPts val="0"/>
+                        </a:spcBef>
+                        <a:spcAft>
+                          <a:spcPts val="0"/>
+                        </a:spcAft>
+                        <a:buClrTx/>
+                        <a:buSzTx/>
+                        <a:buFontTx/>
+                        <a:buNone/>
+                        <a:tabLst/>
+                        <a:defRPr/>
+                      </a:pPr>
+                      <a:endParaRPr lang="en-US" sz="1400" i="1" dirty="0">
+                        <a:solidFill>
+                          <a:srgbClr val="808080"/>
+                        </a:solidFill>
+                        <a:latin typeface="D2CodingLigature Nerd Font" panose="020B0609020101020101" pitchFamily="49" charset="-127"/>
+                        <a:ea typeface="D2CodingLigature Nerd Font" panose="020B0609020101020101" pitchFamily="49" charset="-127"/>
+                        <a:cs typeface="JetBrains Mono" panose="02000009000000000000" pitchFamily="49" charset="0"/>
+                      </a:endParaRPr>
+                    </a:p>
+                    <a:p>
+                      <a:pPr marL="0" marR="0" lvl="0" indent="0" algn="ctr" defTabSz="914400" rtl="0" eaLnBrk="1" fontAlgn="auto" latinLnBrk="0" hangingPunct="1">
+                        <a:lnSpc>
+                          <a:spcPct val="100000"/>
+                        </a:lnSpc>
+                        <a:spcBef>
+                          <a:spcPts val="0"/>
+                        </a:spcBef>
+                        <a:spcAft>
+                          <a:spcPts val="0"/>
+                        </a:spcAft>
+                        <a:buClrTx/>
+                        <a:buSzTx/>
+                        <a:buFontTx/>
+                        <a:buNone/>
+                        <a:tabLst/>
+                        <a:defRPr/>
+                      </a:pPr>
+                      <a:r>
+                        <a:rPr lang="en-US" sz="1400" i="1" dirty="0">
+                          <a:solidFill>
+                            <a:srgbClr val="808080"/>
+                          </a:solidFill>
+                          <a:latin typeface="D2CodingLigature Nerd Font" panose="020B0609020101020101" pitchFamily="49" charset="-127"/>
+                          <a:ea typeface="D2CodingLigature Nerd Font" panose="020B0609020101020101" pitchFamily="49" charset="-127"/>
+                          <a:cs typeface="JetBrains Mono" panose="02000009000000000000" pitchFamily="49" charset="0"/>
+                        </a:rPr>
+                        <a:t>// JDK Type</a:t>
+                      </a:r>
+                      <a:endParaRPr lang="en-US" sz="1400" dirty="0">
+                        <a:solidFill>
+                          <a:srgbClr val="0070FF"/>
+                        </a:solidFill>
+                        <a:latin typeface="D2CodingLigature Nerd Font" panose="020B0609020101020101" pitchFamily="49" charset="-127"/>
+                        <a:ea typeface="D2CodingLigature Nerd Font" panose="020B0609020101020101" pitchFamily="49" charset="-127"/>
+                        <a:cs typeface="JetBrains Mono" panose="02000009000000000000" pitchFamily="49" charset="0"/>
+                      </a:endParaRPr>
+                    </a:p>
+                  </a:txBody>
+                  <a:tcPr marL="45720" marR="45720">
+                    <a:lnL w="12700" cmpd="sng">
+                      <a:noFill/>
+                    </a:lnL>
+                    <a:lnR w="12700" cmpd="sng">
+                      <a:noFill/>
+                    </a:lnR>
+                    <a:lnT w="6350" cap="flat" cmpd="sng" algn="ctr">
+                      <a:solidFill>
+                        <a:schemeClr val="tx1">
+                          <a:lumMod val="65000"/>
+                          <a:lumOff val="35000"/>
+                        </a:schemeClr>
+                      </a:solidFill>
+                      <a:prstDash val="solid"/>
+                      <a:round/>
+                      <a:headEnd type="none" w="med" len="med"/>
+                      <a:tailEnd type="none" w="med" len="med"/>
+                    </a:lnT>
+                    <a:lnB w="12700" cmpd="sng">
+                      <a:noFill/>
+                    </a:lnB>
+                    <a:lnTlToBr w="12700" cmpd="sng">
+                      <a:noFill/>
+                      <a:prstDash val="solid"/>
+                    </a:lnTlToBr>
+                    <a:lnBlToTr w="12700" cmpd="sng">
+                      <a:noFill/>
+                      <a:prstDash val="solid"/>
+                    </a:lnBlToTr>
+                  </a:tcPr>
+                </a:tc>
+                <a:tc>
+                  <a:txBody>
+                    <a:bodyPr/>
+                    <a:lstStyle/>
+                    <a:p>
+                      <a:pPr algn="ctr"/>
+                      <a:endParaRPr lang="en-US" sz="1400" dirty="0">
+                        <a:latin typeface="D2CodingLigature Nerd Font" panose="020B0609020101020101" pitchFamily="49" charset="-127"/>
+                        <a:ea typeface="D2CodingLigature Nerd Font" panose="020B0609020101020101" pitchFamily="49" charset="-127"/>
+                      </a:endParaRPr>
+                    </a:p>
+                    <a:p>
+                      <a:pPr marL="0" marR="0" lvl="0" indent="0" algn="ctr" defTabSz="914400" rtl="0" eaLnBrk="1" fontAlgn="auto" latinLnBrk="0" hangingPunct="1">
+                        <a:lnSpc>
+                          <a:spcPct val="100000"/>
+                        </a:lnSpc>
+                        <a:spcBef>
+                          <a:spcPts val="0"/>
+                        </a:spcBef>
+                        <a:spcAft>
+                          <a:spcPts val="0"/>
+                        </a:spcAft>
+                        <a:buClrTx/>
+                        <a:buSzTx/>
+                        <a:buFontTx/>
+                        <a:buNone/>
+                        <a:tabLst/>
+                        <a:defRPr/>
+                      </a:pPr>
+                      <a:endParaRPr lang="en-US" sz="1400" i="1" dirty="0">
+                        <a:solidFill>
+                          <a:srgbClr val="808080"/>
+                        </a:solidFill>
+                        <a:latin typeface="D2CodingLigature Nerd Font" panose="020B0609020101020101" pitchFamily="49" charset="-127"/>
+                        <a:ea typeface="D2CodingLigature Nerd Font" panose="020B0609020101020101" pitchFamily="49" charset="-127"/>
+                        <a:cs typeface="JetBrains Mono" panose="02000009000000000000" pitchFamily="49" charset="0"/>
+                      </a:endParaRPr>
+                    </a:p>
+                    <a:p>
+                      <a:pPr marL="0" marR="0" lvl="0" indent="0" algn="ctr" defTabSz="914400" rtl="0" eaLnBrk="1" fontAlgn="auto" latinLnBrk="0" hangingPunct="1">
+                        <a:lnSpc>
+                          <a:spcPct val="100000"/>
+                        </a:lnSpc>
+                        <a:spcBef>
+                          <a:spcPts val="0"/>
+                        </a:spcBef>
+                        <a:spcAft>
+                          <a:spcPts val="0"/>
+                        </a:spcAft>
+                        <a:buClrTx/>
+                        <a:buSzTx/>
+                        <a:buFontTx/>
+                        <a:buNone/>
+                        <a:tabLst/>
+                        <a:defRPr/>
+                      </a:pPr>
+                      <a:r>
+                        <a:rPr lang="en-US" sz="1400" b="1" i="1" dirty="0">
+                          <a:solidFill>
+                            <a:srgbClr val="FF9900"/>
+                          </a:solidFill>
+                          <a:latin typeface="D2CodingLigature Nerd Font" panose="020B0609020101020101" pitchFamily="49" charset="-127"/>
+                          <a:ea typeface="D2CodingLigature Nerd Font" panose="020B0609020101020101" pitchFamily="49" charset="-127"/>
+                          <a:cs typeface="JetBrains Mono" panose="02000009000000000000" pitchFamily="49" charset="0"/>
+                        </a:rPr>
+                        <a:t>// EC Implementation</a:t>
+                      </a:r>
+                      <a:endParaRPr lang="en-US" sz="1400" b="1" dirty="0">
+                        <a:solidFill>
+                          <a:srgbClr val="FF9900"/>
+                        </a:solidFill>
+                        <a:latin typeface="D2CodingLigature Nerd Font" panose="020B0609020101020101" pitchFamily="49" charset="-127"/>
+                        <a:ea typeface="D2CodingLigature Nerd Font" panose="020B0609020101020101" pitchFamily="49" charset="-127"/>
+                        <a:cs typeface="JetBrains Mono" panose="02000009000000000000" pitchFamily="49" charset="0"/>
+                      </a:endParaRPr>
+                    </a:p>
+                  </a:txBody>
+                  <a:tcPr marL="45720" marR="45720">
+                    <a:lnL w="12700" cmpd="sng">
+                      <a:noFill/>
+                    </a:lnL>
+                    <a:lnR w="12700" cmpd="sng">
+                      <a:noFill/>
+                    </a:lnR>
+                    <a:lnT w="6350" cap="flat" cmpd="sng" algn="ctr">
+                      <a:solidFill>
+                        <a:schemeClr val="tx1">
+                          <a:lumMod val="65000"/>
+                          <a:lumOff val="35000"/>
+                        </a:schemeClr>
+                      </a:solidFill>
+                      <a:prstDash val="solid"/>
+                      <a:round/>
+                      <a:headEnd type="none" w="med" len="med"/>
+                      <a:tailEnd type="none" w="med" len="med"/>
+                    </a:lnT>
+                    <a:lnB w="12700" cmpd="sng">
+                      <a:noFill/>
+                    </a:lnB>
+                    <a:lnTlToBr w="12700" cmpd="sng">
+                      <a:noFill/>
+                      <a:prstDash val="solid"/>
+                    </a:lnTlToBr>
+                    <a:lnBlToTr w="12700" cmpd="sng">
+                      <a:noFill/>
+                      <a:prstDash val="solid"/>
+                    </a:lnBlToTr>
+                  </a:tcPr>
+                </a:tc>
+                <a:extLst>
+                  <a:ext uri="{0D108BD9-81ED-4DB2-BD59-A6C34878D82A}">
+                    <a16:rowId xmlns:a16="http://schemas.microsoft.com/office/drawing/2014/main" val="1332509447"/>
+                  </a:ext>
+                </a:extLst>
+              </a:tr>
+              <a:tr h="0">
+                <a:tc>
+                  <a:txBody>
+                    <a:bodyPr/>
+                    <a:lstStyle/>
+                    <a:p>
+                      <a:pPr algn="ctr"/>
+                      <a:r>
+                        <a:rPr lang="en-US" sz="1400" dirty="0">
+                          <a:solidFill>
+                            <a:srgbClr val="0070FF"/>
+                          </a:solidFill>
+                          <a:effectLst/>
+                          <a:latin typeface="D2CodingLigature Nerd Font" panose="020B0609020101020101" pitchFamily="49" charset="-127"/>
+                          <a:ea typeface="D2CodingLigature Nerd Font" panose="020B0609020101020101" pitchFamily="49" charset="-127"/>
+                          <a:cs typeface="JetBrains Mono" panose="02000009000000000000" pitchFamily="49" charset="0"/>
+                        </a:rPr>
+                        <a:t>Set</a:t>
+                      </a:r>
+                      <a:r>
+                        <a:rPr lang="en-US" sz="1400" dirty="0">
+                          <a:solidFill>
+                            <a:srgbClr val="000000"/>
+                          </a:solidFill>
+                          <a:effectLst/>
+                          <a:latin typeface="D2CodingLigature Nerd Font" panose="020B0609020101020101" pitchFamily="49" charset="-127"/>
+                          <a:ea typeface="D2CodingLigature Nerd Font" panose="020B0609020101020101" pitchFamily="49" charset="-127"/>
+                          <a:cs typeface="JetBrains Mono" panose="02000009000000000000" pitchFamily="49" charset="0"/>
+                        </a:rPr>
+                        <a:t>&lt;</a:t>
+                      </a:r>
+                      <a:r>
+                        <a:rPr lang="en-US" sz="1400" dirty="0">
+                          <a:solidFill>
+                            <a:srgbClr val="A10000"/>
+                          </a:solidFill>
+                          <a:effectLst/>
+                          <a:latin typeface="D2CodingLigature Nerd Font" panose="020B0609020101020101" pitchFamily="49" charset="-127"/>
+                          <a:ea typeface="D2CodingLigature Nerd Font" panose="020B0609020101020101" pitchFamily="49" charset="-127"/>
+                          <a:cs typeface="JetBrains Mono" panose="02000009000000000000" pitchFamily="49" charset="0"/>
+                        </a:rPr>
+                        <a:t>String</a:t>
+                      </a:r>
+                      <a:r>
+                        <a:rPr lang="en-US" sz="1400" dirty="0">
+                          <a:solidFill>
+                            <a:srgbClr val="000000"/>
+                          </a:solidFill>
+                          <a:effectLst/>
+                          <a:latin typeface="D2CodingLigature Nerd Font" panose="020B0609020101020101" pitchFamily="49" charset="-127"/>
+                          <a:ea typeface="D2CodingLigature Nerd Font" panose="020B0609020101020101" pitchFamily="49" charset="-127"/>
+                          <a:cs typeface="JetBrains Mono" panose="02000009000000000000" pitchFamily="49" charset="0"/>
+                        </a:rPr>
+                        <a:t>&gt; </a:t>
+                      </a:r>
+                      <a:endParaRPr lang="en-US" sz="1400" dirty="0">
+                        <a:latin typeface="D2CodingLigature Nerd Font" panose="020B0609020101020101" pitchFamily="49" charset="-127"/>
+                        <a:ea typeface="D2CodingLigature Nerd Font" panose="020B0609020101020101" pitchFamily="49" charset="-127"/>
+                      </a:endParaRPr>
+                    </a:p>
+                  </a:txBody>
+                  <a:tcPr marL="45720" marR="45720">
+                    <a:lnL w="12700" cmpd="sng">
+                      <a:noFill/>
+                    </a:lnL>
+                    <a:lnR w="12700" cmpd="sng">
+                      <a:noFill/>
+                    </a:lnR>
+                    <a:lnT w="12700" cmpd="sng">
+                      <a:noFill/>
+                    </a:lnT>
+                    <a:lnB w="6350" cap="flat" cmpd="sng" algn="ctr">
+                      <a:solidFill>
+                        <a:schemeClr val="tx1">
+                          <a:lumMod val="65000"/>
+                          <a:lumOff val="35000"/>
+                        </a:schemeClr>
+                      </a:solidFill>
+                      <a:prstDash val="solid"/>
+                      <a:round/>
+                      <a:headEnd type="none" w="med" len="med"/>
+                      <a:tailEnd type="none" w="med" len="med"/>
+                    </a:lnB>
+                    <a:lnTlToBr w="12700" cmpd="sng">
+                      <a:noFill/>
+                      <a:prstDash val="solid"/>
+                    </a:lnTlToBr>
+                    <a:lnBlToTr w="12700" cmpd="sng">
+                      <a:noFill/>
+                      <a:prstDash val="solid"/>
+                    </a:lnBlToTr>
+                  </a:tcPr>
+                </a:tc>
+                <a:tc>
+                  <a:txBody>
+                    <a:bodyPr/>
+                    <a:lstStyle/>
+                    <a:p>
+                      <a:pPr algn="ctr"/>
+                      <a:r>
+                        <a:rPr lang="en-US" sz="1400" dirty="0" err="1">
+                          <a:solidFill>
+                            <a:srgbClr val="A10000"/>
+                          </a:solidFill>
+                          <a:effectLst/>
+                          <a:latin typeface="D2CodingLigature Nerd Font" panose="020B0609020101020101" pitchFamily="49" charset="-127"/>
+                          <a:ea typeface="D2CodingLigature Nerd Font" panose="020B0609020101020101" pitchFamily="49" charset="-127"/>
+                          <a:cs typeface="JetBrains Mono" panose="02000009000000000000" pitchFamily="49" charset="0"/>
+                        </a:rPr>
+                        <a:t>Sets</a:t>
+                      </a:r>
+                      <a:r>
+                        <a:rPr lang="en-US" sz="1400" dirty="0" err="1">
+                          <a:solidFill>
+                            <a:srgbClr val="000000"/>
+                          </a:solidFill>
+                          <a:effectLst/>
+                          <a:latin typeface="D2CodingLigature Nerd Font" panose="020B0609020101020101" pitchFamily="49" charset="-127"/>
+                          <a:ea typeface="D2CodingLigature Nerd Font" panose="020B0609020101020101" pitchFamily="49" charset="-127"/>
+                          <a:cs typeface="JetBrains Mono" panose="02000009000000000000" pitchFamily="49" charset="0"/>
+                        </a:rPr>
+                        <a:t>.</a:t>
+                      </a:r>
+                      <a:r>
+                        <a:rPr lang="en-US" sz="1400" b="0" i="1" dirty="0" err="1">
+                          <a:solidFill>
+                            <a:srgbClr val="660E7A"/>
+                          </a:solidFill>
+                          <a:effectLst/>
+                          <a:latin typeface="D2CodingLigature Nerd Font" panose="020B0609020101020101" pitchFamily="49" charset="-127"/>
+                          <a:ea typeface="D2CodingLigature Nerd Font" panose="020B0609020101020101" pitchFamily="49" charset="-127"/>
+                          <a:cs typeface="JetBrains Mono" panose="02000009000000000000" pitchFamily="49" charset="0"/>
+                        </a:rPr>
+                        <a:t>immutable</a:t>
+                      </a:r>
+                      <a:r>
+                        <a:rPr lang="en-US" sz="1400" dirty="0" err="1">
+                          <a:solidFill>
+                            <a:srgbClr val="000000"/>
+                          </a:solidFill>
+                          <a:effectLst/>
+                          <a:latin typeface="D2CodingLigature Nerd Font" panose="020B0609020101020101" pitchFamily="49" charset="-127"/>
+                          <a:ea typeface="D2CodingLigature Nerd Font" panose="020B0609020101020101" pitchFamily="49" charset="-127"/>
+                          <a:cs typeface="JetBrains Mono" panose="02000009000000000000" pitchFamily="49" charset="0"/>
+                        </a:rPr>
+                        <a:t>.of</a:t>
+                      </a:r>
+                      <a:r>
+                        <a:rPr lang="en-US" sz="1400" dirty="0">
+                          <a:solidFill>
+                            <a:srgbClr val="000000"/>
+                          </a:solidFill>
+                          <a:effectLst/>
+                          <a:latin typeface="D2CodingLigature Nerd Font" panose="020B0609020101020101" pitchFamily="49" charset="-127"/>
+                          <a:ea typeface="D2CodingLigature Nerd Font" panose="020B0609020101020101" pitchFamily="49" charset="-127"/>
+                          <a:cs typeface="JetBrains Mono" panose="02000009000000000000" pitchFamily="49" charset="0"/>
+                        </a:rPr>
+                        <a:t>(</a:t>
+                      </a:r>
+                      <a:r>
+                        <a:rPr lang="en-US" sz="1400" b="1" dirty="0">
+                          <a:solidFill>
+                            <a:srgbClr val="0B00CC"/>
+                          </a:solidFill>
+                          <a:effectLst/>
+                          <a:latin typeface="D2CodingLigature Nerd Font" panose="020B0609020101020101" pitchFamily="49" charset="-127"/>
+                          <a:ea typeface="D2CodingLigature Nerd Font" panose="020B0609020101020101" pitchFamily="49" charset="-127"/>
+                          <a:cs typeface="JetBrains Mono" panose="02000009000000000000" pitchFamily="49" charset="0"/>
+                        </a:rPr>
+                        <a:t>"1"</a:t>
+                      </a:r>
+                      <a:r>
+                        <a:rPr lang="en-US" sz="1400" dirty="0">
+                          <a:solidFill>
+                            <a:srgbClr val="000000"/>
+                          </a:solidFill>
+                          <a:effectLst/>
+                          <a:latin typeface="D2CodingLigature Nerd Font" panose="020B0609020101020101" pitchFamily="49" charset="-127"/>
+                          <a:ea typeface="D2CodingLigature Nerd Font" panose="020B0609020101020101" pitchFamily="49" charset="-127"/>
+                          <a:cs typeface="JetBrains Mono" panose="02000009000000000000" pitchFamily="49" charset="0"/>
+                        </a:rPr>
+                        <a:t>, </a:t>
+                      </a:r>
+                      <a:r>
+                        <a:rPr lang="en-US" sz="1400" b="1" dirty="0">
+                          <a:solidFill>
+                            <a:srgbClr val="0B00CC"/>
+                          </a:solidFill>
+                          <a:effectLst/>
+                          <a:latin typeface="D2CodingLigature Nerd Font" panose="020B0609020101020101" pitchFamily="49" charset="-127"/>
+                          <a:ea typeface="D2CodingLigature Nerd Font" panose="020B0609020101020101" pitchFamily="49" charset="-127"/>
+                          <a:cs typeface="JetBrains Mono" panose="02000009000000000000" pitchFamily="49" charset="0"/>
+                        </a:rPr>
+                        <a:t>"2"</a:t>
+                      </a:r>
+                      <a:r>
+                        <a:rPr lang="en-US" sz="1400" dirty="0">
+                          <a:solidFill>
+                            <a:srgbClr val="000000"/>
+                          </a:solidFill>
+                          <a:effectLst/>
+                          <a:latin typeface="D2CodingLigature Nerd Font" panose="020B0609020101020101" pitchFamily="49" charset="-127"/>
+                          <a:ea typeface="D2CodingLigature Nerd Font" panose="020B0609020101020101" pitchFamily="49" charset="-127"/>
+                          <a:cs typeface="JetBrains Mono" panose="02000009000000000000" pitchFamily="49" charset="0"/>
+                        </a:rPr>
+                        <a:t>, </a:t>
+                      </a:r>
+                      <a:r>
+                        <a:rPr lang="en-US" sz="1400" b="1" dirty="0">
+                          <a:solidFill>
+                            <a:srgbClr val="0B00CC"/>
+                          </a:solidFill>
+                          <a:effectLst/>
+                          <a:latin typeface="D2CodingLigature Nerd Font" panose="020B0609020101020101" pitchFamily="49" charset="-127"/>
+                          <a:ea typeface="D2CodingLigature Nerd Font" panose="020B0609020101020101" pitchFamily="49" charset="-127"/>
+                          <a:cs typeface="JetBrains Mono" panose="02000009000000000000" pitchFamily="49" charset="0"/>
+                        </a:rPr>
+                        <a:t>"3"</a:t>
+                      </a:r>
+                      <a:r>
+                        <a:rPr lang="en-US" sz="1400" dirty="0">
+                          <a:solidFill>
+                            <a:srgbClr val="000000"/>
+                          </a:solidFill>
+                          <a:effectLst/>
+                          <a:latin typeface="D2CodingLigature Nerd Font" panose="020B0609020101020101" pitchFamily="49" charset="-127"/>
+                          <a:ea typeface="D2CodingLigature Nerd Font" panose="020B0609020101020101" pitchFamily="49" charset="-127"/>
+                          <a:cs typeface="JetBrains Mono" panose="02000009000000000000" pitchFamily="49" charset="0"/>
+                        </a:rPr>
+                        <a:t>);</a:t>
+                      </a:r>
+                      <a:endParaRPr lang="en-US" sz="1400" dirty="0">
+                        <a:latin typeface="D2CodingLigature Nerd Font" panose="020B0609020101020101" pitchFamily="49" charset="-127"/>
+                        <a:ea typeface="D2CodingLigature Nerd Font" panose="020B0609020101020101" pitchFamily="49" charset="-127"/>
+                      </a:endParaRPr>
+                    </a:p>
+                  </a:txBody>
+                  <a:tcPr marL="45720" marR="45720">
+                    <a:lnL w="12700" cmpd="sng">
+                      <a:noFill/>
+                    </a:lnL>
+                    <a:lnR w="12700" cmpd="sng">
+                      <a:noFill/>
+                    </a:lnR>
+                    <a:lnT w="12700" cmpd="sng">
+                      <a:noFill/>
+                    </a:lnT>
+                    <a:lnB w="6350" cap="flat" cmpd="sng" algn="ctr">
+                      <a:solidFill>
+                        <a:schemeClr val="tx1">
+                          <a:lumMod val="65000"/>
+                          <a:lumOff val="35000"/>
+                        </a:schemeClr>
+                      </a:solidFill>
+                      <a:prstDash val="solid"/>
+                      <a:round/>
+                      <a:headEnd type="none" w="med" len="med"/>
+                      <a:tailEnd type="none" w="med" len="med"/>
+                    </a:lnB>
+                    <a:lnTlToBr w="12700" cmpd="sng">
+                      <a:noFill/>
+                      <a:prstDash val="solid"/>
+                    </a:lnTlToBr>
+                    <a:lnBlToTr w="12700" cmpd="sng">
+                      <a:noFill/>
+                      <a:prstDash val="solid"/>
+                    </a:lnBlToTr>
+                  </a:tcPr>
+                </a:tc>
+                <a:extLst>
+                  <a:ext uri="{0D108BD9-81ED-4DB2-BD59-A6C34878D82A}">
+                    <a16:rowId xmlns:a16="http://schemas.microsoft.com/office/drawing/2014/main" val="3847850457"/>
+                  </a:ext>
+                </a:extLst>
+              </a:tr>
+              <a:tr h="0">
+                <a:tc>
+                  <a:txBody>
+                    <a:bodyPr/>
+                    <a:lstStyle/>
+                    <a:p>
+                      <a:pPr marL="0" marR="0" lvl="0" indent="0" algn="ctr" defTabSz="914400" rtl="0" eaLnBrk="1" fontAlgn="auto" latinLnBrk="0" hangingPunct="1">
+                        <a:lnSpc>
+                          <a:spcPct val="100000"/>
+                        </a:lnSpc>
+                        <a:spcBef>
+                          <a:spcPts val="0"/>
+                        </a:spcBef>
+                        <a:spcAft>
+                          <a:spcPts val="0"/>
+                        </a:spcAft>
+                        <a:buClrTx/>
+                        <a:buSzTx/>
+                        <a:buFontTx/>
+                        <a:buNone/>
+                        <a:tabLst/>
+                        <a:defRPr/>
+                      </a:pPr>
+                      <a:endParaRPr lang="en-US" sz="1400" i="1" dirty="0">
+                        <a:solidFill>
+                          <a:srgbClr val="808080"/>
+                        </a:solidFill>
+                        <a:latin typeface="D2CodingLigature Nerd Font" panose="020B0609020101020101" pitchFamily="49" charset="-127"/>
+                        <a:ea typeface="D2CodingLigature Nerd Font" panose="020B0609020101020101" pitchFamily="49" charset="-127"/>
+                        <a:cs typeface="JetBrains Mono" panose="02000009000000000000" pitchFamily="49" charset="0"/>
+                      </a:endParaRPr>
+                    </a:p>
+                    <a:p>
+                      <a:pPr marL="0" marR="0" lvl="0" indent="0" algn="ctr" defTabSz="914400" rtl="0" eaLnBrk="1" fontAlgn="auto" latinLnBrk="0" hangingPunct="1">
+                        <a:lnSpc>
+                          <a:spcPct val="100000"/>
+                        </a:lnSpc>
+                        <a:spcBef>
+                          <a:spcPts val="0"/>
+                        </a:spcBef>
+                        <a:spcAft>
+                          <a:spcPts val="0"/>
+                        </a:spcAft>
+                        <a:buClrTx/>
+                        <a:buSzTx/>
+                        <a:buFontTx/>
+                        <a:buNone/>
+                        <a:tabLst/>
+                        <a:defRPr/>
+                      </a:pPr>
+                      <a:endParaRPr lang="en-US" sz="1400" i="1" dirty="0">
+                        <a:solidFill>
+                          <a:srgbClr val="808080"/>
+                        </a:solidFill>
+                        <a:latin typeface="D2CodingLigature Nerd Font" panose="020B0609020101020101" pitchFamily="49" charset="-127"/>
+                        <a:ea typeface="D2CodingLigature Nerd Font" panose="020B0609020101020101" pitchFamily="49" charset="-127"/>
+                        <a:cs typeface="JetBrains Mono" panose="02000009000000000000" pitchFamily="49" charset="0"/>
+                      </a:endParaRPr>
+                    </a:p>
+                    <a:p>
+                      <a:pPr marL="0" marR="0" lvl="0" indent="0" algn="ctr" defTabSz="914400" rtl="0" eaLnBrk="1" fontAlgn="auto" latinLnBrk="0" hangingPunct="1">
+                        <a:lnSpc>
+                          <a:spcPct val="100000"/>
+                        </a:lnSpc>
+                        <a:spcBef>
+                          <a:spcPts val="0"/>
+                        </a:spcBef>
+                        <a:spcAft>
+                          <a:spcPts val="0"/>
+                        </a:spcAft>
+                        <a:buClrTx/>
+                        <a:buSzTx/>
+                        <a:buFontTx/>
+                        <a:buNone/>
+                        <a:tabLst/>
+                        <a:defRPr/>
+                      </a:pPr>
+                      <a:r>
+                        <a:rPr lang="en-US" sz="1400" b="1" i="1" dirty="0">
+                          <a:solidFill>
+                            <a:srgbClr val="FF9900"/>
+                          </a:solidFill>
+                          <a:latin typeface="D2CodingLigature Nerd Font" panose="020B0609020101020101" pitchFamily="49" charset="-127"/>
+                          <a:ea typeface="D2CodingLigature Nerd Font" panose="020B0609020101020101" pitchFamily="49" charset="-127"/>
+                          <a:cs typeface="JetBrains Mono" panose="02000009000000000000" pitchFamily="49" charset="0"/>
+                        </a:rPr>
+                        <a:t>// EC Type</a:t>
+                      </a:r>
+                      <a:endParaRPr lang="en-US" sz="1400" b="1" dirty="0">
+                        <a:solidFill>
+                          <a:srgbClr val="FF9900"/>
+                        </a:solidFill>
+                        <a:latin typeface="D2CodingLigature Nerd Font" panose="020B0609020101020101" pitchFamily="49" charset="-127"/>
+                        <a:ea typeface="D2CodingLigature Nerd Font" panose="020B0609020101020101" pitchFamily="49" charset="-127"/>
+                        <a:cs typeface="JetBrains Mono" panose="02000009000000000000" pitchFamily="49" charset="0"/>
+                      </a:endParaRPr>
+                    </a:p>
+                  </a:txBody>
+                  <a:tcPr marL="45720" marR="45720">
+                    <a:lnL w="12700" cmpd="sng">
+                      <a:noFill/>
+                    </a:lnL>
+                    <a:lnR w="12700" cmpd="sng">
+                      <a:noFill/>
+                    </a:lnR>
+                    <a:lnT w="6350" cap="flat" cmpd="sng" algn="ctr">
+                      <a:solidFill>
+                        <a:schemeClr val="tx1">
+                          <a:lumMod val="65000"/>
+                          <a:lumOff val="35000"/>
+                        </a:schemeClr>
+                      </a:solidFill>
+                      <a:prstDash val="solid"/>
+                      <a:round/>
+                      <a:headEnd type="none" w="med" len="med"/>
+                      <a:tailEnd type="none" w="med" len="med"/>
+                    </a:lnT>
+                    <a:lnB w="12700" cmpd="sng">
+                      <a:noFill/>
+                    </a:lnB>
+                    <a:lnTlToBr w="12700" cmpd="sng">
+                      <a:noFill/>
+                      <a:prstDash val="solid"/>
+                    </a:lnTlToBr>
+                    <a:lnBlToTr w="12700" cmpd="sng">
+                      <a:noFill/>
+                      <a:prstDash val="solid"/>
+                    </a:lnBlToTr>
+                  </a:tcPr>
+                </a:tc>
+                <a:tc>
+                  <a:txBody>
+                    <a:bodyPr/>
+                    <a:lstStyle/>
+                    <a:p>
+                      <a:pPr algn="ctr"/>
+                      <a:endParaRPr lang="en-US" sz="1400" dirty="0">
+                        <a:latin typeface="D2CodingLigature Nerd Font" panose="020B0609020101020101" pitchFamily="49" charset="-127"/>
+                        <a:ea typeface="D2CodingLigature Nerd Font" panose="020B0609020101020101" pitchFamily="49" charset="-127"/>
+                      </a:endParaRPr>
+                    </a:p>
+                    <a:p>
+                      <a:pPr marL="0" marR="0" lvl="0" indent="0" algn="ctr" defTabSz="914400" rtl="0" eaLnBrk="1" fontAlgn="auto" latinLnBrk="0" hangingPunct="1">
+                        <a:lnSpc>
+                          <a:spcPct val="100000"/>
+                        </a:lnSpc>
+                        <a:spcBef>
+                          <a:spcPts val="0"/>
+                        </a:spcBef>
+                        <a:spcAft>
+                          <a:spcPts val="0"/>
+                        </a:spcAft>
+                        <a:buClrTx/>
+                        <a:buSzTx/>
+                        <a:buFontTx/>
+                        <a:buNone/>
+                        <a:tabLst/>
+                        <a:defRPr/>
+                      </a:pPr>
+                      <a:endParaRPr lang="en-US" sz="1400" i="1" dirty="0">
+                        <a:solidFill>
+                          <a:srgbClr val="808080"/>
+                        </a:solidFill>
+                        <a:latin typeface="D2CodingLigature Nerd Font" panose="020B0609020101020101" pitchFamily="49" charset="-127"/>
+                        <a:ea typeface="D2CodingLigature Nerd Font" panose="020B0609020101020101" pitchFamily="49" charset="-127"/>
+                        <a:cs typeface="JetBrains Mono" panose="02000009000000000000" pitchFamily="49" charset="0"/>
+                      </a:endParaRPr>
+                    </a:p>
+                    <a:p>
+                      <a:pPr marL="0" marR="0" lvl="0" indent="0" algn="ctr" defTabSz="914400" rtl="0" eaLnBrk="1" fontAlgn="auto" latinLnBrk="0" hangingPunct="1">
+                        <a:lnSpc>
+                          <a:spcPct val="100000"/>
+                        </a:lnSpc>
+                        <a:spcBef>
+                          <a:spcPts val="0"/>
+                        </a:spcBef>
+                        <a:spcAft>
+                          <a:spcPts val="0"/>
+                        </a:spcAft>
+                        <a:buClrTx/>
+                        <a:buSzTx/>
+                        <a:buFontTx/>
+                        <a:buNone/>
+                        <a:tabLst/>
+                        <a:defRPr/>
+                      </a:pPr>
+                      <a:r>
+                        <a:rPr lang="en-US" sz="1400" b="1" i="1" dirty="0">
+                          <a:solidFill>
+                            <a:srgbClr val="FF9900"/>
+                          </a:solidFill>
+                          <a:latin typeface="D2CodingLigature Nerd Font" panose="020B0609020101020101" pitchFamily="49" charset="-127"/>
+                          <a:ea typeface="D2CodingLigature Nerd Font" panose="020B0609020101020101" pitchFamily="49" charset="-127"/>
+                          <a:cs typeface="JetBrains Mono" panose="02000009000000000000" pitchFamily="49" charset="0"/>
+                        </a:rPr>
+                        <a:t>// EC Implementation</a:t>
+                      </a:r>
+                      <a:endParaRPr lang="en-US" sz="1400" b="1" dirty="0">
+                        <a:solidFill>
+                          <a:srgbClr val="FF9900"/>
+                        </a:solidFill>
+                        <a:latin typeface="D2CodingLigature Nerd Font" panose="020B0609020101020101" pitchFamily="49" charset="-127"/>
+                        <a:ea typeface="D2CodingLigature Nerd Font" panose="020B0609020101020101" pitchFamily="49" charset="-127"/>
+                        <a:cs typeface="JetBrains Mono" panose="02000009000000000000" pitchFamily="49" charset="0"/>
+                      </a:endParaRPr>
+                    </a:p>
+                  </a:txBody>
+                  <a:tcPr marL="45720" marR="45720">
+                    <a:lnL w="12700" cmpd="sng">
+                      <a:noFill/>
+                    </a:lnL>
+                    <a:lnR w="12700" cmpd="sng">
+                      <a:noFill/>
+                    </a:lnR>
+                    <a:lnT w="6350" cap="flat" cmpd="sng" algn="ctr">
+                      <a:solidFill>
+                        <a:schemeClr val="tx1">
+                          <a:lumMod val="65000"/>
+                          <a:lumOff val="35000"/>
+                        </a:schemeClr>
+                      </a:solidFill>
+                      <a:prstDash val="solid"/>
+                      <a:round/>
+                      <a:headEnd type="none" w="med" len="med"/>
+                      <a:tailEnd type="none" w="med" len="med"/>
+                    </a:lnT>
+                    <a:lnB w="12700" cmpd="sng">
+                      <a:noFill/>
+                    </a:lnB>
+                    <a:lnTlToBr w="12700" cmpd="sng">
+                      <a:noFill/>
+                      <a:prstDash val="solid"/>
+                    </a:lnTlToBr>
+                    <a:lnBlToTr w="12700" cmpd="sng">
+                      <a:noFill/>
+                      <a:prstDash val="solid"/>
+                    </a:lnBlToTr>
+                  </a:tcPr>
+                </a:tc>
+                <a:extLst>
+                  <a:ext uri="{0D108BD9-81ED-4DB2-BD59-A6C34878D82A}">
+                    <a16:rowId xmlns:a16="http://schemas.microsoft.com/office/drawing/2014/main" val="2267735198"/>
+                  </a:ext>
+                </a:extLst>
+              </a:tr>
+              <a:tr h="0">
+                <a:tc>
+                  <a:txBody>
+                    <a:bodyPr/>
+                    <a:lstStyle/>
+                    <a:p>
+                      <a:pPr algn="ctr"/>
+                      <a:r>
+                        <a:rPr lang="en-US" sz="1400" dirty="0" err="1">
+                          <a:solidFill>
+                            <a:srgbClr val="0070FF"/>
+                          </a:solidFill>
+                          <a:effectLst/>
+                          <a:latin typeface="D2CodingLigature Nerd Font" panose="020B0609020101020101" pitchFamily="49" charset="-127"/>
+                          <a:ea typeface="D2CodingLigature Nerd Font" panose="020B0609020101020101" pitchFamily="49" charset="-127"/>
+                          <a:cs typeface="JetBrains Mono" panose="02000009000000000000" pitchFamily="49" charset="0"/>
+                        </a:rPr>
+                        <a:t>ImmutableSet</a:t>
+                      </a:r>
+                      <a:r>
+                        <a:rPr lang="en-US" sz="1400" dirty="0">
+                          <a:solidFill>
+                            <a:srgbClr val="000000"/>
+                          </a:solidFill>
+                          <a:effectLst/>
+                          <a:latin typeface="D2CodingLigature Nerd Font" panose="020B0609020101020101" pitchFamily="49" charset="-127"/>
+                          <a:ea typeface="D2CodingLigature Nerd Font" panose="020B0609020101020101" pitchFamily="49" charset="-127"/>
+                          <a:cs typeface="JetBrains Mono" panose="02000009000000000000" pitchFamily="49" charset="0"/>
+                        </a:rPr>
+                        <a:t>&lt;</a:t>
+                      </a:r>
+                      <a:r>
+                        <a:rPr lang="en-US" sz="1400" dirty="0">
+                          <a:solidFill>
+                            <a:srgbClr val="A10000"/>
+                          </a:solidFill>
+                          <a:effectLst/>
+                          <a:latin typeface="D2CodingLigature Nerd Font" panose="020B0609020101020101" pitchFamily="49" charset="-127"/>
+                          <a:ea typeface="D2CodingLigature Nerd Font" panose="020B0609020101020101" pitchFamily="49" charset="-127"/>
+                          <a:cs typeface="JetBrains Mono" panose="02000009000000000000" pitchFamily="49" charset="0"/>
+                        </a:rPr>
+                        <a:t>String</a:t>
+                      </a:r>
+                      <a:r>
+                        <a:rPr lang="en-US" sz="1400" dirty="0">
+                          <a:solidFill>
+                            <a:srgbClr val="000000"/>
+                          </a:solidFill>
+                          <a:effectLst/>
+                          <a:latin typeface="D2CodingLigature Nerd Font" panose="020B0609020101020101" pitchFamily="49" charset="-127"/>
+                          <a:ea typeface="D2CodingLigature Nerd Font" panose="020B0609020101020101" pitchFamily="49" charset="-127"/>
+                          <a:cs typeface="JetBrains Mono" panose="02000009000000000000" pitchFamily="49" charset="0"/>
+                        </a:rPr>
+                        <a:t>&gt; </a:t>
+                      </a:r>
+                      <a:endParaRPr lang="en-US" sz="1400" dirty="0">
+                        <a:latin typeface="D2CodingLigature Nerd Font" panose="020B0609020101020101" pitchFamily="49" charset="-127"/>
+                        <a:ea typeface="D2CodingLigature Nerd Font" panose="020B0609020101020101" pitchFamily="49" charset="-127"/>
+                      </a:endParaRPr>
+                    </a:p>
+                  </a:txBody>
+                  <a:tcPr marL="45720" marR="45720">
+                    <a:lnL w="12700" cmpd="sng">
+                      <a:noFill/>
+                    </a:lnL>
+                    <a:lnR w="12700" cmpd="sng">
+                      <a:noFill/>
+                    </a:lnR>
+                    <a:lnT w="12700" cmpd="sng">
+                      <a:noFill/>
+                    </a:lnT>
+                    <a:lnB w="6350" cap="flat" cmpd="sng" algn="ctr">
+                      <a:solidFill>
+                        <a:schemeClr val="tx1">
+                          <a:lumMod val="65000"/>
+                          <a:lumOff val="35000"/>
+                        </a:schemeClr>
+                      </a:solidFill>
+                      <a:prstDash val="solid"/>
+                      <a:round/>
+                      <a:headEnd type="none" w="med" len="med"/>
+                      <a:tailEnd type="none" w="med" len="med"/>
+                    </a:lnB>
+                    <a:lnTlToBr w="12700" cmpd="sng">
+                      <a:noFill/>
+                      <a:prstDash val="solid"/>
+                    </a:lnTlToBr>
+                    <a:lnBlToTr w="12700" cmpd="sng">
+                      <a:noFill/>
+                      <a:prstDash val="solid"/>
+                    </a:lnBlToTr>
+                  </a:tcPr>
+                </a:tc>
+                <a:tc>
+                  <a:txBody>
+                    <a:bodyPr/>
+                    <a:lstStyle/>
+                    <a:p>
+                      <a:pPr marL="0" marR="0" lvl="0" indent="0" algn="ctr" defTabSz="914400" rtl="0" eaLnBrk="1" fontAlgn="auto" latinLnBrk="0" hangingPunct="1">
+                        <a:lnSpc>
+                          <a:spcPct val="100000"/>
+                        </a:lnSpc>
+                        <a:spcBef>
+                          <a:spcPts val="0"/>
+                        </a:spcBef>
+                        <a:spcAft>
+                          <a:spcPts val="0"/>
+                        </a:spcAft>
+                        <a:buClrTx/>
+                        <a:buSzTx/>
+                        <a:buFontTx/>
+                        <a:buNone/>
+                        <a:tabLst/>
+                        <a:defRPr/>
+                      </a:pPr>
+                      <a:r>
+                        <a:rPr lang="en-US" sz="1400" dirty="0" err="1">
+                          <a:solidFill>
+                            <a:srgbClr val="A10000"/>
+                          </a:solidFill>
+                          <a:effectLst/>
+                          <a:latin typeface="D2CodingLigature Nerd Font" panose="020B0609020101020101" pitchFamily="49" charset="-127"/>
+                          <a:ea typeface="D2CodingLigature Nerd Font" panose="020B0609020101020101" pitchFamily="49" charset="-127"/>
+                          <a:cs typeface="JetBrains Mono" panose="02000009000000000000" pitchFamily="49" charset="0"/>
+                        </a:rPr>
+                        <a:t>Sets</a:t>
+                      </a:r>
+                      <a:r>
+                        <a:rPr lang="en-US" sz="1400" dirty="0" err="1">
+                          <a:solidFill>
+                            <a:srgbClr val="000000"/>
+                          </a:solidFill>
+                          <a:effectLst/>
+                          <a:latin typeface="D2CodingLigature Nerd Font" panose="020B0609020101020101" pitchFamily="49" charset="-127"/>
+                          <a:ea typeface="D2CodingLigature Nerd Font" panose="020B0609020101020101" pitchFamily="49" charset="-127"/>
+                          <a:cs typeface="JetBrains Mono" panose="02000009000000000000" pitchFamily="49" charset="0"/>
+                        </a:rPr>
+                        <a:t>.</a:t>
+                      </a:r>
+                      <a:r>
+                        <a:rPr lang="en-US" sz="1400" b="0" i="1" dirty="0" err="1">
+                          <a:solidFill>
+                            <a:srgbClr val="660E7A"/>
+                          </a:solidFill>
+                          <a:effectLst/>
+                          <a:latin typeface="D2CodingLigature Nerd Font" panose="020B0609020101020101" pitchFamily="49" charset="-127"/>
+                          <a:ea typeface="D2CodingLigature Nerd Font" panose="020B0609020101020101" pitchFamily="49" charset="-127"/>
+                          <a:cs typeface="JetBrains Mono" panose="02000009000000000000" pitchFamily="49" charset="0"/>
+                        </a:rPr>
+                        <a:t>immutable</a:t>
+                      </a:r>
+                      <a:r>
+                        <a:rPr lang="en-US" sz="1400" dirty="0" err="1">
+                          <a:solidFill>
+                            <a:srgbClr val="000000"/>
+                          </a:solidFill>
+                          <a:effectLst/>
+                          <a:latin typeface="D2CodingLigature Nerd Font" panose="020B0609020101020101" pitchFamily="49" charset="-127"/>
+                          <a:ea typeface="D2CodingLigature Nerd Font" panose="020B0609020101020101" pitchFamily="49" charset="-127"/>
+                          <a:cs typeface="JetBrains Mono" panose="02000009000000000000" pitchFamily="49" charset="0"/>
+                        </a:rPr>
+                        <a:t>.of</a:t>
+                      </a:r>
+                      <a:r>
+                        <a:rPr lang="en-US" sz="1400" dirty="0">
+                          <a:solidFill>
+                            <a:srgbClr val="000000"/>
+                          </a:solidFill>
+                          <a:effectLst/>
+                          <a:latin typeface="D2CodingLigature Nerd Font" panose="020B0609020101020101" pitchFamily="49" charset="-127"/>
+                          <a:ea typeface="D2CodingLigature Nerd Font" panose="020B0609020101020101" pitchFamily="49" charset="-127"/>
+                          <a:cs typeface="JetBrains Mono" panose="02000009000000000000" pitchFamily="49" charset="0"/>
+                        </a:rPr>
+                        <a:t>(</a:t>
+                      </a:r>
+                      <a:r>
+                        <a:rPr lang="en-US" sz="1400" b="1" dirty="0">
+                          <a:solidFill>
+                            <a:srgbClr val="0B00CC"/>
+                          </a:solidFill>
+                          <a:effectLst/>
+                          <a:latin typeface="D2CodingLigature Nerd Font" panose="020B0609020101020101" pitchFamily="49" charset="-127"/>
+                          <a:ea typeface="D2CodingLigature Nerd Font" panose="020B0609020101020101" pitchFamily="49" charset="-127"/>
+                          <a:cs typeface="JetBrains Mono" panose="02000009000000000000" pitchFamily="49" charset="0"/>
+                        </a:rPr>
+                        <a:t>"1"</a:t>
+                      </a:r>
+                      <a:r>
+                        <a:rPr lang="en-US" sz="1400" dirty="0">
+                          <a:solidFill>
+                            <a:srgbClr val="000000"/>
+                          </a:solidFill>
+                          <a:effectLst/>
+                          <a:latin typeface="D2CodingLigature Nerd Font" panose="020B0609020101020101" pitchFamily="49" charset="-127"/>
+                          <a:ea typeface="D2CodingLigature Nerd Font" panose="020B0609020101020101" pitchFamily="49" charset="-127"/>
+                          <a:cs typeface="JetBrains Mono" panose="02000009000000000000" pitchFamily="49" charset="0"/>
+                        </a:rPr>
+                        <a:t>, </a:t>
+                      </a:r>
+                      <a:r>
+                        <a:rPr lang="en-US" sz="1400" b="1" dirty="0">
+                          <a:solidFill>
+                            <a:srgbClr val="0B00CC"/>
+                          </a:solidFill>
+                          <a:effectLst/>
+                          <a:latin typeface="D2CodingLigature Nerd Font" panose="020B0609020101020101" pitchFamily="49" charset="-127"/>
+                          <a:ea typeface="D2CodingLigature Nerd Font" panose="020B0609020101020101" pitchFamily="49" charset="-127"/>
+                          <a:cs typeface="JetBrains Mono" panose="02000009000000000000" pitchFamily="49" charset="0"/>
+                        </a:rPr>
+                        <a:t>"2"</a:t>
+                      </a:r>
+                      <a:r>
+                        <a:rPr lang="en-US" sz="1400" dirty="0">
+                          <a:solidFill>
+                            <a:srgbClr val="000000"/>
+                          </a:solidFill>
+                          <a:effectLst/>
+                          <a:latin typeface="D2CodingLigature Nerd Font" panose="020B0609020101020101" pitchFamily="49" charset="-127"/>
+                          <a:ea typeface="D2CodingLigature Nerd Font" panose="020B0609020101020101" pitchFamily="49" charset="-127"/>
+                          <a:cs typeface="JetBrains Mono" panose="02000009000000000000" pitchFamily="49" charset="0"/>
+                        </a:rPr>
+                        <a:t>, </a:t>
+                      </a:r>
+                      <a:r>
+                        <a:rPr lang="en-US" sz="1400" b="1" dirty="0">
+                          <a:solidFill>
+                            <a:srgbClr val="0B00CC"/>
+                          </a:solidFill>
+                          <a:effectLst/>
+                          <a:latin typeface="D2CodingLigature Nerd Font" panose="020B0609020101020101" pitchFamily="49" charset="-127"/>
+                          <a:ea typeface="D2CodingLigature Nerd Font" panose="020B0609020101020101" pitchFamily="49" charset="-127"/>
+                          <a:cs typeface="JetBrains Mono" panose="02000009000000000000" pitchFamily="49" charset="0"/>
+                        </a:rPr>
+                        <a:t>"3"</a:t>
+                      </a:r>
+                      <a:r>
+                        <a:rPr lang="en-US" sz="1400" dirty="0">
+                          <a:solidFill>
+                            <a:srgbClr val="000000"/>
+                          </a:solidFill>
+                          <a:effectLst/>
+                          <a:latin typeface="D2CodingLigature Nerd Font" panose="020B0609020101020101" pitchFamily="49" charset="-127"/>
+                          <a:ea typeface="D2CodingLigature Nerd Font" panose="020B0609020101020101" pitchFamily="49" charset="-127"/>
+                          <a:cs typeface="JetBrains Mono" panose="02000009000000000000" pitchFamily="49" charset="0"/>
+                        </a:rPr>
+                        <a:t>);</a:t>
+                      </a:r>
+                      <a:endParaRPr lang="en-US" sz="1400" dirty="0">
+                        <a:latin typeface="D2CodingLigature Nerd Font" panose="020B0609020101020101" pitchFamily="49" charset="-127"/>
+                        <a:ea typeface="D2CodingLigature Nerd Font" panose="020B0609020101020101" pitchFamily="49" charset="-127"/>
+                      </a:endParaRPr>
+                    </a:p>
+                  </a:txBody>
+                  <a:tcPr marL="45720" marR="45720">
+                    <a:lnL w="12700" cmpd="sng">
+                      <a:noFill/>
+                    </a:lnL>
+                    <a:lnR w="12700" cmpd="sng">
+                      <a:noFill/>
+                    </a:lnR>
+                    <a:lnT w="12700" cmpd="sng">
+                      <a:noFill/>
+                    </a:lnT>
+                    <a:lnB w="6350" cap="flat" cmpd="sng" algn="ctr">
+                      <a:solidFill>
+                        <a:schemeClr val="tx1">
+                          <a:lumMod val="65000"/>
+                          <a:lumOff val="35000"/>
+                        </a:schemeClr>
+                      </a:solidFill>
+                      <a:prstDash val="solid"/>
+                      <a:round/>
+                      <a:headEnd type="none" w="med" len="med"/>
+                      <a:tailEnd type="none" w="med" len="med"/>
+                    </a:lnB>
+                    <a:lnTlToBr w="12700" cmpd="sng">
+                      <a:noFill/>
+                      <a:prstDash val="solid"/>
+                    </a:lnTlToBr>
+                    <a:lnBlToTr w="12700" cmpd="sng">
+                      <a:noFill/>
+                      <a:prstDash val="solid"/>
+                    </a:lnBlToTr>
+                  </a:tcPr>
+                </a:tc>
+                <a:extLst>
+                  <a:ext uri="{0D108BD9-81ED-4DB2-BD59-A6C34878D82A}">
+                    <a16:rowId xmlns:a16="http://schemas.microsoft.com/office/drawing/2014/main" val="1740934610"/>
+                  </a:ext>
+                </a:extLst>
+              </a:tr>
+            </a:tbl>
+          </a:graphicData>
+        </a:graphic>
+      </p:graphicFrame>
+      <p:sp>
+        <p:nvSpPr>
+          <p:cNvPr id="51" name="Rectangle 50">
+            <a:extLst>
+              <a:ext uri="{FF2B5EF4-FFF2-40B4-BE49-F238E27FC236}">
+                <a16:creationId xmlns:a16="http://schemas.microsoft.com/office/drawing/2014/main" id="{A62EB326-A1CC-3F70-3387-229CA7125CDE}"/>
+              </a:ext>
+            </a:extLst>
+          </p:cNvPr>
+          <p:cNvSpPr/>
+          <p:nvPr/>
+        </p:nvSpPr>
+        <p:spPr>
+          <a:xfrm>
+            <a:off x="5736431" y="1370514"/>
+            <a:ext cx="359568" cy="369332"/>
+          </a:xfrm>
+          <a:prstGeom prst="rect">
+            <a:avLst/>
+          </a:prstGeom>
+        </p:spPr>
+        <p:style>
+          <a:lnRef idx="2">
+            <a:schemeClr val="accent1">
+              <a:shade val="15000"/>
+            </a:schemeClr>
+          </a:lnRef>
+          <a:fillRef idx="1">
+            <a:schemeClr val="accent1"/>
+          </a:fillRef>
+          <a:effectRef idx="0">
+            <a:schemeClr val="accent1"/>
+          </a:effectRef>
+          <a:fontRef idx="minor">
+            <a:schemeClr val="lt1"/>
+          </a:fontRef>
+        </p:style>
+        <p:txBody>
+          <a:bodyPr rtlCol="0" anchor="ctr"/>
+          <a:lstStyle/>
+          <a:p>
+            <a:pPr algn="ctr"/>
+            <a:endParaRPr lang="en-US"/>
+          </a:p>
+        </p:txBody>
+      </p:sp>
+      <p:sp>
+        <p:nvSpPr>
+          <p:cNvPr id="52" name="Rectangle 51">
+            <a:extLst>
+              <a:ext uri="{FF2B5EF4-FFF2-40B4-BE49-F238E27FC236}">
+                <a16:creationId xmlns:a16="http://schemas.microsoft.com/office/drawing/2014/main" id="{FD9F9071-8F59-5CC9-B5DB-12963D3B16D4}"/>
+              </a:ext>
+            </a:extLst>
+          </p:cNvPr>
+          <p:cNvSpPr/>
+          <p:nvPr/>
+        </p:nvSpPr>
+        <p:spPr>
+          <a:xfrm>
+            <a:off x="6086476" y="1370513"/>
+            <a:ext cx="359568" cy="369332"/>
+          </a:xfrm>
+          <a:prstGeom prst="rect">
+            <a:avLst/>
+          </a:prstGeom>
+        </p:spPr>
+        <p:style>
+          <a:lnRef idx="2">
+            <a:schemeClr val="accent1">
+              <a:shade val="15000"/>
+            </a:schemeClr>
+          </a:lnRef>
+          <a:fillRef idx="1">
+            <a:schemeClr val="accent1"/>
+          </a:fillRef>
+          <a:effectRef idx="0">
+            <a:schemeClr val="accent1"/>
+          </a:effectRef>
+          <a:fontRef idx="minor">
+            <a:schemeClr val="lt1"/>
+          </a:fontRef>
+        </p:style>
+        <p:txBody>
+          <a:bodyPr rtlCol="0" anchor="ctr"/>
+          <a:lstStyle/>
+          <a:p>
+            <a:pPr algn="ctr"/>
+            <a:endParaRPr lang="en-US"/>
+          </a:p>
+        </p:txBody>
+      </p:sp>
+      <p:sp>
+        <p:nvSpPr>
+          <p:cNvPr id="4" name="Rectangle 3">
+            <a:extLst>
+              <a:ext uri="{FF2B5EF4-FFF2-40B4-BE49-F238E27FC236}">
+                <a16:creationId xmlns:a16="http://schemas.microsoft.com/office/drawing/2014/main" id="{7280D213-724F-2252-1314-BF176C7C8F9E}"/>
+              </a:ext>
+            </a:extLst>
+          </p:cNvPr>
+          <p:cNvSpPr/>
+          <p:nvPr/>
+        </p:nvSpPr>
+        <p:spPr>
+          <a:xfrm>
+            <a:off x="5199373" y="1239934"/>
+            <a:ext cx="1793254" cy="731520"/>
+          </a:xfrm>
+          <a:prstGeom prst="rect">
+            <a:avLst/>
+          </a:prstGeom>
+          <a:solidFill>
+            <a:schemeClr val="bg1"/>
+          </a:solidFill>
+          <a:ln>
+            <a:noFill/>
+          </a:ln>
+        </p:spPr>
+        <p:style>
+          <a:lnRef idx="2">
+            <a:schemeClr val="accent1">
+              <a:shade val="15000"/>
+            </a:schemeClr>
+          </a:lnRef>
+          <a:fillRef idx="1">
+            <a:schemeClr val="accent1"/>
+          </a:fillRef>
+          <a:effectRef idx="0">
+            <a:schemeClr val="accent1"/>
+          </a:effectRef>
+          <a:fontRef idx="minor">
+            <a:schemeClr val="lt1"/>
+          </a:fontRef>
+        </p:style>
+        <p:txBody>
+          <a:bodyPr rtlCol="0" anchor="ctr"/>
+          <a:lstStyle/>
+          <a:p>
+            <a:r>
+              <a:rPr lang="en-US" i="1" dirty="0">
+                <a:solidFill>
+                  <a:srgbClr val="808080"/>
+                </a:solidFill>
                 <a:latin typeface="JetBrains Mono" panose="02000009000000000000" pitchFamily="49" charset="0"/>
                 <a:ea typeface="JetBrains Mono" panose="02000009000000000000" pitchFamily="49" charset="0"/>
                 <a:cs typeface="JetBrains Mono" panose="02000009000000000000" pitchFamily="49" charset="0"/>
               </a:rPr>
-              <a:t>@Test</a:t>
+              <a:t>// JDK Type</a:t>
             </a:r>
-            <a:br>
-              <a:rPr lang="en-US" sz="1400" dirty="0">
-                <a:solidFill>
-                  <a:srgbClr val="808000"/>
-                </a:solidFill>
-                <a:effectLst/>
-                <a:latin typeface="JetBrains Mono" panose="02000009000000000000" pitchFamily="49" charset="0"/>
-                <a:ea typeface="JetBrains Mono" panose="02000009000000000000" pitchFamily="49" charset="0"/>
-                <a:cs typeface="JetBrains Mono" panose="02000009000000000000" pitchFamily="49" charset="0"/>
-              </a:rPr>
-            </a:br>
+            <a:endParaRPr lang="en-US" dirty="0">
+              <a:solidFill>
+                <a:srgbClr val="0070FF"/>
+              </a:solidFill>
+              <a:latin typeface="JetBrains Mono" panose="02000009000000000000" pitchFamily="49" charset="0"/>
+              <a:ea typeface="JetBrains Mono" panose="02000009000000000000" pitchFamily="49" charset="0"/>
+              <a:cs typeface="JetBrains Mono" panose="02000009000000000000" pitchFamily="49" charset="0"/>
+            </a:endParaRPr>
+          </a:p>
+          <a:p>
             <a:r>
-              <a:rPr lang="en-US" sz="1400" dirty="0">
-                <a:solidFill>
-                  <a:srgbClr val="530E80"/>
-                </a:solidFill>
-                <a:effectLst/>
-                <a:latin typeface="JetBrains Mono" panose="02000009000000000000" pitchFamily="49" charset="0"/>
-                <a:ea typeface="JetBrains Mono" panose="02000009000000000000" pitchFamily="49" charset="0"/>
-                <a:cs typeface="JetBrains Mono" panose="02000009000000000000" pitchFamily="49" charset="0"/>
-              </a:rPr>
-              <a:t>public void </a:t>
-            </a:r>
-            <a:r>
-              <a:rPr lang="en-US" sz="1400" dirty="0" err="1">
-                <a:solidFill>
-                  <a:srgbClr val="000000"/>
-                </a:solidFill>
-                <a:effectLst/>
-                <a:latin typeface="JetBrains Mono" panose="02000009000000000000" pitchFamily="49" charset="0"/>
-                <a:ea typeface="JetBrains Mono" panose="02000009000000000000" pitchFamily="49" charset="0"/>
-                <a:cs typeface="JetBrains Mono" panose="02000009000000000000" pitchFamily="49" charset="0"/>
-              </a:rPr>
-              <a:t>setFactories</a:t>
-            </a:r>
-            <a:r>
-              <a:rPr lang="en-US" sz="1400" dirty="0">
-                <a:solidFill>
-                  <a:srgbClr val="000000"/>
-                </a:solidFill>
-                <a:effectLst/>
-                <a:latin typeface="JetBrains Mono" panose="02000009000000000000" pitchFamily="49" charset="0"/>
-                <a:ea typeface="JetBrains Mono" panose="02000009000000000000" pitchFamily="49" charset="0"/>
-                <a:cs typeface="JetBrains Mono" panose="02000009000000000000" pitchFamily="49" charset="0"/>
-              </a:rPr>
-              <a:t>()</a:t>
-            </a:r>
-            <a:br>
-              <a:rPr lang="en-US" sz="1400" dirty="0">
-                <a:solidFill>
-                  <a:srgbClr val="000000"/>
-                </a:solidFill>
-                <a:effectLst/>
-                <a:latin typeface="JetBrains Mono" panose="02000009000000000000" pitchFamily="49" charset="0"/>
-                <a:ea typeface="JetBrains Mono" panose="02000009000000000000" pitchFamily="49" charset="0"/>
-                <a:cs typeface="JetBrains Mono" panose="02000009000000000000" pitchFamily="49" charset="0"/>
-              </a:rPr>
-            </a:br>
-            <a:r>
-              <a:rPr lang="en-US" sz="1400" dirty="0">
-                <a:solidFill>
-                  <a:srgbClr val="000000"/>
-                </a:solidFill>
-                <a:effectLst/>
-                <a:latin typeface="JetBrains Mono" panose="02000009000000000000" pitchFamily="49" charset="0"/>
-                <a:ea typeface="JetBrains Mono" panose="02000009000000000000" pitchFamily="49" charset="0"/>
-                <a:cs typeface="JetBrains Mono" panose="02000009000000000000" pitchFamily="49" charset="0"/>
-              </a:rPr>
-              <a:t>{</a:t>
-            </a:r>
-            <a:br>
-              <a:rPr lang="en-US" sz="1400" dirty="0">
-                <a:solidFill>
-                  <a:srgbClr val="000000"/>
-                </a:solidFill>
-                <a:effectLst/>
-                <a:latin typeface="JetBrains Mono" panose="02000009000000000000" pitchFamily="49" charset="0"/>
-                <a:ea typeface="JetBrains Mono" panose="02000009000000000000" pitchFamily="49" charset="0"/>
-                <a:cs typeface="JetBrains Mono" panose="02000009000000000000" pitchFamily="49" charset="0"/>
-              </a:rPr>
-            </a:br>
-            <a:r>
-              <a:rPr lang="en-US" sz="1400" dirty="0">
-                <a:solidFill>
-                  <a:srgbClr val="000000"/>
-                </a:solidFill>
-                <a:effectLst/>
-                <a:latin typeface="JetBrains Mono" panose="02000009000000000000" pitchFamily="49" charset="0"/>
-                <a:ea typeface="JetBrains Mono" panose="02000009000000000000" pitchFamily="49" charset="0"/>
-                <a:cs typeface="JetBrains Mono" panose="02000009000000000000" pitchFamily="49" charset="0"/>
-              </a:rPr>
-              <a:t>    </a:t>
-            </a:r>
-            <a:r>
-              <a:rPr lang="en-US" sz="1400" i="1" dirty="0">
-                <a:solidFill>
-                  <a:srgbClr val="808080"/>
-                </a:solidFill>
-                <a:effectLst/>
-                <a:latin typeface="JetBrains Mono" panose="02000009000000000000" pitchFamily="49" charset="0"/>
-                <a:ea typeface="JetBrains Mono" panose="02000009000000000000" pitchFamily="49" charset="0"/>
-                <a:cs typeface="JetBrains Mono" panose="02000009000000000000" pitchFamily="49" charset="0"/>
-              </a:rPr>
-              <a:t>// JDK Types</a:t>
-            </a:r>
-            <a:br>
-              <a:rPr lang="en-US" sz="1400" i="1" dirty="0">
-                <a:solidFill>
-                  <a:srgbClr val="808080"/>
-                </a:solidFill>
-                <a:effectLst/>
-                <a:latin typeface="JetBrains Mono" panose="02000009000000000000" pitchFamily="49" charset="0"/>
-                <a:ea typeface="JetBrains Mono" panose="02000009000000000000" pitchFamily="49" charset="0"/>
-                <a:cs typeface="JetBrains Mono" panose="02000009000000000000" pitchFamily="49" charset="0"/>
-              </a:rPr>
-            </a:br>
-            <a:r>
-              <a:rPr lang="en-US" sz="1400" i="1" dirty="0">
-                <a:solidFill>
-                  <a:srgbClr val="808080"/>
-                </a:solidFill>
-                <a:effectLst/>
-                <a:latin typeface="JetBrains Mono" panose="02000009000000000000" pitchFamily="49" charset="0"/>
-                <a:ea typeface="JetBrains Mono" panose="02000009000000000000" pitchFamily="49" charset="0"/>
-                <a:cs typeface="JetBrains Mono" panose="02000009000000000000" pitchFamily="49" charset="0"/>
-              </a:rPr>
-              <a:t>    </a:t>
-            </a:r>
-            <a:r>
-              <a:rPr lang="en-US" sz="1400" dirty="0">
+              <a:rPr lang="en-US" dirty="0">
                 <a:solidFill>
                   <a:srgbClr val="0070FF"/>
                 </a:solidFill>
-                <a:effectLst/>
                 <a:latin typeface="JetBrains Mono" panose="02000009000000000000" pitchFamily="49" charset="0"/>
                 <a:ea typeface="JetBrains Mono" panose="02000009000000000000" pitchFamily="49" charset="0"/>
                 <a:cs typeface="JetBrains Mono" panose="02000009000000000000" pitchFamily="49" charset="0"/>
@@ -17485,11 +20892,10 @@
               <a:t>Set</a:t>
             </a:r>
             <a:r>
-              <a:rPr lang="en-US" sz="1400" dirty="0">
+              <a:rPr lang="en-US" dirty="0">
                 <a:solidFill>
                   <a:srgbClr val="000000"/>
                 </a:solidFill>
-                <a:effectLst/>
                 <a:latin typeface="JetBrains Mono" panose="02000009000000000000" pitchFamily="49" charset="0"/>
                 <a:ea typeface="JetBrains Mono" panose="02000009000000000000" pitchFamily="49" charset="0"/>
                 <a:cs typeface="JetBrains Mono" panose="02000009000000000000" pitchFamily="49" charset="0"/>
@@ -17497,11 +20903,10 @@
               <a:t>&lt;</a:t>
             </a:r>
             <a:r>
-              <a:rPr lang="en-US" sz="1400" dirty="0">
+              <a:rPr lang="en-US" dirty="0">
                 <a:solidFill>
                   <a:srgbClr val="A10000"/>
                 </a:solidFill>
-                <a:effectLst/>
                 <a:latin typeface="JetBrains Mono" panose="02000009000000000000" pitchFamily="49" charset="0"/>
                 <a:ea typeface="JetBrains Mono" panose="02000009000000000000" pitchFamily="49" charset="0"/>
                 <a:cs typeface="JetBrains Mono" panose="02000009000000000000" pitchFamily="49" charset="0"/>
@@ -17509,1749 +20914,310 @@
               <a:t>String</a:t>
             </a:r>
             <a:r>
-              <a:rPr lang="en-US" sz="1400" dirty="0">
+              <a:rPr lang="en-US" dirty="0">
                 <a:solidFill>
                   <a:srgbClr val="000000"/>
                 </a:solidFill>
-                <a:effectLst/>
                 <a:latin typeface="JetBrains Mono" panose="02000009000000000000" pitchFamily="49" charset="0"/>
                 <a:ea typeface="JetBrains Mono" panose="02000009000000000000" pitchFamily="49" charset="0"/>
                 <a:cs typeface="JetBrains Mono" panose="02000009000000000000" pitchFamily="49" charset="0"/>
               </a:rPr>
-              <a:t>&gt; </a:t>
+              <a:t>&gt;</a:t>
             </a:r>
-            <a:r>
-              <a:rPr lang="en-US" sz="1400" dirty="0" err="1">
-                <a:solidFill>
-                  <a:srgbClr val="000000"/>
-                </a:solidFill>
-                <a:effectLst/>
-                <a:latin typeface="JetBrains Mono" panose="02000009000000000000" pitchFamily="49" charset="0"/>
-                <a:ea typeface="JetBrains Mono" panose="02000009000000000000" pitchFamily="49" charset="0"/>
-                <a:cs typeface="JetBrains Mono" panose="02000009000000000000" pitchFamily="49" charset="0"/>
-              </a:rPr>
-              <a:t>jdkMutableSet</a:t>
-            </a:r>
-            <a:r>
-              <a:rPr lang="en-US" sz="1400" dirty="0">
-                <a:solidFill>
-                  <a:srgbClr val="000000"/>
-                </a:solidFill>
-                <a:effectLst/>
-                <a:latin typeface="JetBrains Mono" panose="02000009000000000000" pitchFamily="49" charset="0"/>
-                <a:ea typeface="JetBrains Mono" panose="02000009000000000000" pitchFamily="49" charset="0"/>
-                <a:cs typeface="JetBrains Mono" panose="02000009000000000000" pitchFamily="49" charset="0"/>
-              </a:rPr>
-              <a:t> = </a:t>
-            </a:r>
-            <a:r>
-              <a:rPr lang="en-US" sz="1400" dirty="0">
-                <a:solidFill>
-                  <a:srgbClr val="530E80"/>
-                </a:solidFill>
-                <a:effectLst/>
-                <a:latin typeface="JetBrains Mono" panose="02000009000000000000" pitchFamily="49" charset="0"/>
-                <a:ea typeface="JetBrains Mono" panose="02000009000000000000" pitchFamily="49" charset="0"/>
-                <a:cs typeface="JetBrains Mono" panose="02000009000000000000" pitchFamily="49" charset="0"/>
-              </a:rPr>
-              <a:t>new </a:t>
-            </a:r>
-            <a:r>
-              <a:rPr lang="en-US" sz="1400" dirty="0">
-                <a:solidFill>
-                  <a:srgbClr val="000000"/>
-                </a:solidFill>
-                <a:effectLst/>
-                <a:latin typeface="JetBrains Mono" panose="02000009000000000000" pitchFamily="49" charset="0"/>
-                <a:ea typeface="JetBrains Mono" panose="02000009000000000000" pitchFamily="49" charset="0"/>
-                <a:cs typeface="JetBrains Mono" panose="02000009000000000000" pitchFamily="49" charset="0"/>
-              </a:rPr>
-              <a:t>HashSet&lt;&gt;(</a:t>
-            </a:r>
-            <a:r>
-              <a:rPr lang="en-US" sz="1400" dirty="0" err="1">
-                <a:solidFill>
-                  <a:srgbClr val="0070FF"/>
-                </a:solidFill>
-                <a:effectLst/>
-                <a:latin typeface="JetBrains Mono" panose="02000009000000000000" pitchFamily="49" charset="0"/>
-                <a:ea typeface="JetBrains Mono" panose="02000009000000000000" pitchFamily="49" charset="0"/>
-                <a:cs typeface="JetBrains Mono" panose="02000009000000000000" pitchFamily="49" charset="0"/>
-              </a:rPr>
-              <a:t>List</a:t>
-            </a:r>
-            <a:r>
-              <a:rPr lang="en-US" sz="1400" dirty="0" err="1">
-                <a:solidFill>
-                  <a:srgbClr val="000000"/>
-                </a:solidFill>
-                <a:effectLst/>
-                <a:latin typeface="JetBrains Mono" panose="02000009000000000000" pitchFamily="49" charset="0"/>
-                <a:ea typeface="JetBrains Mono" panose="02000009000000000000" pitchFamily="49" charset="0"/>
-                <a:cs typeface="JetBrains Mono" panose="02000009000000000000" pitchFamily="49" charset="0"/>
-              </a:rPr>
-              <a:t>.</a:t>
-            </a:r>
-            <a:r>
-              <a:rPr lang="en-US" sz="1400" i="1" dirty="0" err="1">
-                <a:solidFill>
-                  <a:srgbClr val="000000"/>
-                </a:solidFill>
-                <a:effectLst/>
-                <a:latin typeface="JetBrains Mono" panose="02000009000000000000" pitchFamily="49" charset="0"/>
-                <a:ea typeface="JetBrains Mono" panose="02000009000000000000" pitchFamily="49" charset="0"/>
-                <a:cs typeface="JetBrains Mono" panose="02000009000000000000" pitchFamily="49" charset="0"/>
-              </a:rPr>
-              <a:t>of</a:t>
-            </a:r>
-            <a:r>
-              <a:rPr lang="en-US" sz="1400" dirty="0">
-                <a:solidFill>
-                  <a:srgbClr val="000000"/>
-                </a:solidFill>
-                <a:effectLst/>
-                <a:latin typeface="JetBrains Mono" panose="02000009000000000000" pitchFamily="49" charset="0"/>
-                <a:ea typeface="JetBrains Mono" panose="02000009000000000000" pitchFamily="49" charset="0"/>
-                <a:cs typeface="JetBrains Mono" panose="02000009000000000000" pitchFamily="49" charset="0"/>
-              </a:rPr>
-              <a:t>(</a:t>
-            </a:r>
-            <a:r>
-              <a:rPr lang="en-US" sz="1400" b="1" dirty="0">
-                <a:solidFill>
-                  <a:srgbClr val="0B00CC"/>
-                </a:solidFill>
-                <a:effectLst/>
-                <a:latin typeface="JetBrains Mono" panose="02000009000000000000" pitchFamily="49" charset="0"/>
-                <a:ea typeface="JetBrains Mono" panose="02000009000000000000" pitchFamily="49" charset="0"/>
-                <a:cs typeface="JetBrains Mono" panose="02000009000000000000" pitchFamily="49" charset="0"/>
-              </a:rPr>
-              <a:t>"1"</a:t>
-            </a:r>
-            <a:r>
-              <a:rPr lang="en-US" sz="1400" dirty="0">
-                <a:solidFill>
-                  <a:srgbClr val="000000"/>
-                </a:solidFill>
-                <a:effectLst/>
-                <a:latin typeface="JetBrains Mono" panose="02000009000000000000" pitchFamily="49" charset="0"/>
-                <a:ea typeface="JetBrains Mono" panose="02000009000000000000" pitchFamily="49" charset="0"/>
-                <a:cs typeface="JetBrains Mono" panose="02000009000000000000" pitchFamily="49" charset="0"/>
-              </a:rPr>
-              <a:t>, </a:t>
-            </a:r>
-            <a:r>
-              <a:rPr lang="en-US" sz="1400" b="1" dirty="0">
-                <a:solidFill>
-                  <a:srgbClr val="0B00CC"/>
-                </a:solidFill>
-                <a:effectLst/>
-                <a:latin typeface="JetBrains Mono" panose="02000009000000000000" pitchFamily="49" charset="0"/>
-                <a:ea typeface="JetBrains Mono" panose="02000009000000000000" pitchFamily="49" charset="0"/>
-                <a:cs typeface="JetBrains Mono" panose="02000009000000000000" pitchFamily="49" charset="0"/>
-              </a:rPr>
-              <a:t>"2"</a:t>
-            </a:r>
-            <a:r>
-              <a:rPr lang="en-US" sz="1400" dirty="0">
-                <a:solidFill>
-                  <a:srgbClr val="000000"/>
-                </a:solidFill>
-                <a:effectLst/>
-                <a:latin typeface="JetBrains Mono" panose="02000009000000000000" pitchFamily="49" charset="0"/>
-                <a:ea typeface="JetBrains Mono" panose="02000009000000000000" pitchFamily="49" charset="0"/>
-                <a:cs typeface="JetBrains Mono" panose="02000009000000000000" pitchFamily="49" charset="0"/>
-              </a:rPr>
-              <a:t>, </a:t>
-            </a:r>
-            <a:r>
-              <a:rPr lang="en-US" sz="1400" b="1" dirty="0">
-                <a:solidFill>
-                  <a:srgbClr val="0B00CC"/>
-                </a:solidFill>
-                <a:effectLst/>
-                <a:latin typeface="JetBrains Mono" panose="02000009000000000000" pitchFamily="49" charset="0"/>
-                <a:ea typeface="JetBrains Mono" panose="02000009000000000000" pitchFamily="49" charset="0"/>
-                <a:cs typeface="JetBrains Mono" panose="02000009000000000000" pitchFamily="49" charset="0"/>
-              </a:rPr>
-              <a:t>"3"</a:t>
-            </a:r>
-            <a:r>
-              <a:rPr lang="en-US" sz="1400" dirty="0">
-                <a:solidFill>
-                  <a:srgbClr val="000000"/>
-                </a:solidFill>
-                <a:effectLst/>
-                <a:latin typeface="JetBrains Mono" panose="02000009000000000000" pitchFamily="49" charset="0"/>
-                <a:ea typeface="JetBrains Mono" panose="02000009000000000000" pitchFamily="49" charset="0"/>
-                <a:cs typeface="JetBrains Mono" panose="02000009000000000000" pitchFamily="49" charset="0"/>
-              </a:rPr>
-              <a:t>));</a:t>
-            </a:r>
-            <a:br>
-              <a:rPr lang="en-US" sz="1400" dirty="0">
-                <a:solidFill>
-                  <a:srgbClr val="000000"/>
-                </a:solidFill>
-                <a:effectLst/>
-                <a:latin typeface="JetBrains Mono" panose="02000009000000000000" pitchFamily="49" charset="0"/>
-                <a:ea typeface="JetBrains Mono" panose="02000009000000000000" pitchFamily="49" charset="0"/>
-                <a:cs typeface="JetBrains Mono" panose="02000009000000000000" pitchFamily="49" charset="0"/>
-              </a:rPr>
-            </a:br>
-            <a:r>
-              <a:rPr lang="en-US" sz="1400" dirty="0">
-                <a:solidFill>
-                  <a:srgbClr val="000000"/>
-                </a:solidFill>
-                <a:effectLst/>
-                <a:latin typeface="JetBrains Mono" panose="02000009000000000000" pitchFamily="49" charset="0"/>
-                <a:ea typeface="JetBrains Mono" panose="02000009000000000000" pitchFamily="49" charset="0"/>
-                <a:cs typeface="JetBrains Mono" panose="02000009000000000000" pitchFamily="49" charset="0"/>
-              </a:rPr>
-              <a:t>    </a:t>
-            </a:r>
-            <a:r>
-              <a:rPr lang="en-US" sz="1400" dirty="0">
-                <a:solidFill>
-                  <a:srgbClr val="0070FF"/>
-                </a:solidFill>
-                <a:effectLst/>
-                <a:latin typeface="JetBrains Mono" panose="02000009000000000000" pitchFamily="49" charset="0"/>
-                <a:ea typeface="JetBrains Mono" panose="02000009000000000000" pitchFamily="49" charset="0"/>
-                <a:cs typeface="JetBrains Mono" panose="02000009000000000000" pitchFamily="49" charset="0"/>
-              </a:rPr>
-              <a:t>Set</a:t>
-            </a:r>
-            <a:r>
-              <a:rPr lang="en-US" sz="1400" dirty="0">
-                <a:solidFill>
-                  <a:srgbClr val="000000"/>
-                </a:solidFill>
-                <a:effectLst/>
-                <a:latin typeface="JetBrains Mono" panose="02000009000000000000" pitchFamily="49" charset="0"/>
-                <a:ea typeface="JetBrains Mono" panose="02000009000000000000" pitchFamily="49" charset="0"/>
-                <a:cs typeface="JetBrains Mono" panose="02000009000000000000" pitchFamily="49" charset="0"/>
-              </a:rPr>
-              <a:t>&lt;</a:t>
-            </a:r>
-            <a:r>
-              <a:rPr lang="en-US" sz="1400" dirty="0">
-                <a:solidFill>
-                  <a:srgbClr val="A10000"/>
-                </a:solidFill>
-                <a:effectLst/>
-                <a:latin typeface="JetBrains Mono" panose="02000009000000000000" pitchFamily="49" charset="0"/>
-                <a:ea typeface="JetBrains Mono" panose="02000009000000000000" pitchFamily="49" charset="0"/>
-                <a:cs typeface="JetBrains Mono" panose="02000009000000000000" pitchFamily="49" charset="0"/>
-              </a:rPr>
-              <a:t>String</a:t>
-            </a:r>
-            <a:r>
-              <a:rPr lang="en-US" sz="1400" dirty="0">
-                <a:solidFill>
-                  <a:srgbClr val="000000"/>
-                </a:solidFill>
-                <a:effectLst/>
-                <a:latin typeface="JetBrains Mono" panose="02000009000000000000" pitchFamily="49" charset="0"/>
-                <a:ea typeface="JetBrains Mono" panose="02000009000000000000" pitchFamily="49" charset="0"/>
-                <a:cs typeface="JetBrains Mono" panose="02000009000000000000" pitchFamily="49" charset="0"/>
-              </a:rPr>
-              <a:t>&gt; </a:t>
-            </a:r>
-            <a:r>
-              <a:rPr lang="en-US" sz="1400" dirty="0" err="1">
-                <a:solidFill>
-                  <a:srgbClr val="000000"/>
-                </a:solidFill>
-                <a:effectLst/>
-                <a:latin typeface="JetBrains Mono" panose="02000009000000000000" pitchFamily="49" charset="0"/>
-                <a:ea typeface="JetBrains Mono" panose="02000009000000000000" pitchFamily="49" charset="0"/>
-                <a:cs typeface="JetBrains Mono" panose="02000009000000000000" pitchFamily="49" charset="0"/>
-              </a:rPr>
-              <a:t>jdkImmutableSet</a:t>
-            </a:r>
-            <a:r>
-              <a:rPr lang="en-US" sz="1400" dirty="0">
-                <a:solidFill>
-                  <a:srgbClr val="000000"/>
-                </a:solidFill>
-                <a:effectLst/>
-                <a:latin typeface="JetBrains Mono" panose="02000009000000000000" pitchFamily="49" charset="0"/>
-                <a:ea typeface="JetBrains Mono" panose="02000009000000000000" pitchFamily="49" charset="0"/>
-                <a:cs typeface="JetBrains Mono" panose="02000009000000000000" pitchFamily="49" charset="0"/>
-              </a:rPr>
-              <a:t> = </a:t>
-            </a:r>
-            <a:r>
-              <a:rPr lang="en-US" sz="1400" dirty="0" err="1">
-                <a:solidFill>
-                  <a:srgbClr val="0070FF"/>
-                </a:solidFill>
-                <a:effectLst/>
-                <a:latin typeface="JetBrains Mono" panose="02000009000000000000" pitchFamily="49" charset="0"/>
-                <a:ea typeface="JetBrains Mono" panose="02000009000000000000" pitchFamily="49" charset="0"/>
-                <a:cs typeface="JetBrains Mono" panose="02000009000000000000" pitchFamily="49" charset="0"/>
-              </a:rPr>
-              <a:t>Set</a:t>
-            </a:r>
-            <a:r>
-              <a:rPr lang="en-US" sz="1400" dirty="0" err="1">
-                <a:solidFill>
-                  <a:srgbClr val="000000"/>
-                </a:solidFill>
-                <a:effectLst/>
-                <a:latin typeface="JetBrains Mono" panose="02000009000000000000" pitchFamily="49" charset="0"/>
-                <a:ea typeface="JetBrains Mono" panose="02000009000000000000" pitchFamily="49" charset="0"/>
-                <a:cs typeface="JetBrains Mono" panose="02000009000000000000" pitchFamily="49" charset="0"/>
-              </a:rPr>
-              <a:t>.</a:t>
-            </a:r>
-            <a:r>
-              <a:rPr lang="en-US" sz="1400" i="1" dirty="0" err="1">
-                <a:solidFill>
-                  <a:srgbClr val="000000"/>
-                </a:solidFill>
-                <a:effectLst/>
-                <a:latin typeface="JetBrains Mono" panose="02000009000000000000" pitchFamily="49" charset="0"/>
-                <a:ea typeface="JetBrains Mono" panose="02000009000000000000" pitchFamily="49" charset="0"/>
-                <a:cs typeface="JetBrains Mono" panose="02000009000000000000" pitchFamily="49" charset="0"/>
-              </a:rPr>
-              <a:t>of</a:t>
-            </a:r>
-            <a:r>
-              <a:rPr lang="en-US" sz="1400" dirty="0">
-                <a:solidFill>
-                  <a:srgbClr val="000000"/>
-                </a:solidFill>
-                <a:effectLst/>
-                <a:latin typeface="JetBrains Mono" panose="02000009000000000000" pitchFamily="49" charset="0"/>
-                <a:ea typeface="JetBrains Mono" panose="02000009000000000000" pitchFamily="49" charset="0"/>
-                <a:cs typeface="JetBrains Mono" panose="02000009000000000000" pitchFamily="49" charset="0"/>
-              </a:rPr>
-              <a:t>(</a:t>
-            </a:r>
-            <a:r>
-              <a:rPr lang="en-US" sz="1400" b="1" dirty="0">
-                <a:solidFill>
-                  <a:srgbClr val="0B00CC"/>
-                </a:solidFill>
-                <a:effectLst/>
-                <a:latin typeface="JetBrains Mono" panose="02000009000000000000" pitchFamily="49" charset="0"/>
-                <a:ea typeface="JetBrains Mono" panose="02000009000000000000" pitchFamily="49" charset="0"/>
-                <a:cs typeface="JetBrains Mono" panose="02000009000000000000" pitchFamily="49" charset="0"/>
-              </a:rPr>
-              <a:t>"1"</a:t>
-            </a:r>
-            <a:r>
-              <a:rPr lang="en-US" sz="1400" dirty="0">
-                <a:solidFill>
-                  <a:srgbClr val="000000"/>
-                </a:solidFill>
-                <a:effectLst/>
-                <a:latin typeface="JetBrains Mono" panose="02000009000000000000" pitchFamily="49" charset="0"/>
-                <a:ea typeface="JetBrains Mono" panose="02000009000000000000" pitchFamily="49" charset="0"/>
-                <a:cs typeface="JetBrains Mono" panose="02000009000000000000" pitchFamily="49" charset="0"/>
-              </a:rPr>
-              <a:t>, </a:t>
-            </a:r>
-            <a:r>
-              <a:rPr lang="en-US" sz="1400" b="1" dirty="0">
-                <a:solidFill>
-                  <a:srgbClr val="0B00CC"/>
-                </a:solidFill>
-                <a:effectLst/>
-                <a:latin typeface="JetBrains Mono" panose="02000009000000000000" pitchFamily="49" charset="0"/>
-                <a:ea typeface="JetBrains Mono" panose="02000009000000000000" pitchFamily="49" charset="0"/>
-                <a:cs typeface="JetBrains Mono" panose="02000009000000000000" pitchFamily="49" charset="0"/>
-              </a:rPr>
-              <a:t>"2"</a:t>
-            </a:r>
-            <a:r>
-              <a:rPr lang="en-US" sz="1400" dirty="0">
-                <a:solidFill>
-                  <a:srgbClr val="000000"/>
-                </a:solidFill>
-                <a:effectLst/>
-                <a:latin typeface="JetBrains Mono" panose="02000009000000000000" pitchFamily="49" charset="0"/>
-                <a:ea typeface="JetBrains Mono" panose="02000009000000000000" pitchFamily="49" charset="0"/>
-                <a:cs typeface="JetBrains Mono" panose="02000009000000000000" pitchFamily="49" charset="0"/>
-              </a:rPr>
-              <a:t>, </a:t>
-            </a:r>
-            <a:r>
-              <a:rPr lang="en-US" sz="1400" b="1" dirty="0">
-                <a:solidFill>
-                  <a:srgbClr val="0B00CC"/>
-                </a:solidFill>
-                <a:effectLst/>
-                <a:latin typeface="JetBrains Mono" panose="02000009000000000000" pitchFamily="49" charset="0"/>
-                <a:ea typeface="JetBrains Mono" panose="02000009000000000000" pitchFamily="49" charset="0"/>
-                <a:cs typeface="JetBrains Mono" panose="02000009000000000000" pitchFamily="49" charset="0"/>
-              </a:rPr>
-              <a:t>"3"</a:t>
-            </a:r>
-            <a:r>
-              <a:rPr lang="en-US" sz="1400" dirty="0">
-                <a:solidFill>
-                  <a:srgbClr val="000000"/>
-                </a:solidFill>
-                <a:effectLst/>
-                <a:latin typeface="JetBrains Mono" panose="02000009000000000000" pitchFamily="49" charset="0"/>
-                <a:ea typeface="JetBrains Mono" panose="02000009000000000000" pitchFamily="49" charset="0"/>
-                <a:cs typeface="JetBrains Mono" panose="02000009000000000000" pitchFamily="49" charset="0"/>
-              </a:rPr>
-              <a:t>);</a:t>
-            </a:r>
-            <a:br>
-              <a:rPr lang="en-US" sz="1400" dirty="0">
-                <a:solidFill>
-                  <a:srgbClr val="000000"/>
-                </a:solidFill>
-                <a:effectLst/>
-                <a:latin typeface="JetBrains Mono" panose="02000009000000000000" pitchFamily="49" charset="0"/>
-                <a:ea typeface="JetBrains Mono" panose="02000009000000000000" pitchFamily="49" charset="0"/>
-                <a:cs typeface="JetBrains Mono" panose="02000009000000000000" pitchFamily="49" charset="0"/>
-              </a:rPr>
-            </a:br>
-            <a:br>
-              <a:rPr lang="en-US" sz="1400" dirty="0">
-                <a:solidFill>
-                  <a:srgbClr val="000000"/>
-                </a:solidFill>
-                <a:effectLst/>
-                <a:latin typeface="JetBrains Mono" panose="02000009000000000000" pitchFamily="49" charset="0"/>
-                <a:ea typeface="JetBrains Mono" panose="02000009000000000000" pitchFamily="49" charset="0"/>
-                <a:cs typeface="JetBrains Mono" panose="02000009000000000000" pitchFamily="49" charset="0"/>
-              </a:rPr>
-            </a:br>
-            <a:r>
-              <a:rPr lang="en-US" sz="1400" dirty="0">
-                <a:solidFill>
-                  <a:srgbClr val="000000"/>
-                </a:solidFill>
-                <a:effectLst/>
-                <a:latin typeface="JetBrains Mono" panose="02000009000000000000" pitchFamily="49" charset="0"/>
-                <a:ea typeface="JetBrains Mono" panose="02000009000000000000" pitchFamily="49" charset="0"/>
-                <a:cs typeface="JetBrains Mono" panose="02000009000000000000" pitchFamily="49" charset="0"/>
-              </a:rPr>
-              <a:t>    </a:t>
-            </a:r>
-            <a:r>
-              <a:rPr lang="en-US" sz="1400" i="1" dirty="0">
-                <a:solidFill>
-                  <a:srgbClr val="808080"/>
-                </a:solidFill>
-                <a:effectLst/>
-                <a:latin typeface="JetBrains Mono" panose="02000009000000000000" pitchFamily="49" charset="0"/>
-                <a:ea typeface="JetBrains Mono" panose="02000009000000000000" pitchFamily="49" charset="0"/>
-                <a:cs typeface="JetBrains Mono" panose="02000009000000000000" pitchFamily="49" charset="0"/>
-              </a:rPr>
-              <a:t>// Eclipse Collections Types</a:t>
-            </a:r>
-            <a:br>
-              <a:rPr lang="en-US" sz="1400" i="1" dirty="0">
-                <a:solidFill>
-                  <a:srgbClr val="808080"/>
-                </a:solidFill>
-                <a:effectLst/>
-                <a:latin typeface="JetBrains Mono" panose="02000009000000000000" pitchFamily="49" charset="0"/>
-                <a:ea typeface="JetBrains Mono" panose="02000009000000000000" pitchFamily="49" charset="0"/>
-                <a:cs typeface="JetBrains Mono" panose="02000009000000000000" pitchFamily="49" charset="0"/>
-              </a:rPr>
-            </a:br>
-            <a:r>
-              <a:rPr lang="en-US" sz="1400" i="1" dirty="0">
-                <a:solidFill>
-                  <a:srgbClr val="808080"/>
-                </a:solidFill>
-                <a:effectLst/>
-                <a:latin typeface="JetBrains Mono" panose="02000009000000000000" pitchFamily="49" charset="0"/>
-                <a:ea typeface="JetBrains Mono" panose="02000009000000000000" pitchFamily="49" charset="0"/>
-                <a:cs typeface="JetBrains Mono" panose="02000009000000000000" pitchFamily="49" charset="0"/>
-              </a:rPr>
-              <a:t>    </a:t>
-            </a:r>
-            <a:r>
-              <a:rPr lang="en-US" sz="1400" dirty="0" err="1">
-                <a:solidFill>
-                  <a:srgbClr val="0070FF"/>
-                </a:solidFill>
-                <a:effectLst/>
-                <a:latin typeface="JetBrains Mono" panose="02000009000000000000" pitchFamily="49" charset="0"/>
-                <a:ea typeface="JetBrains Mono" panose="02000009000000000000" pitchFamily="49" charset="0"/>
-                <a:cs typeface="JetBrains Mono" panose="02000009000000000000" pitchFamily="49" charset="0"/>
-              </a:rPr>
-              <a:t>MutableSet</a:t>
-            </a:r>
-            <a:r>
-              <a:rPr lang="en-US" sz="1400" dirty="0">
-                <a:solidFill>
-                  <a:srgbClr val="000000"/>
-                </a:solidFill>
-                <a:effectLst/>
-                <a:latin typeface="JetBrains Mono" panose="02000009000000000000" pitchFamily="49" charset="0"/>
-                <a:ea typeface="JetBrains Mono" panose="02000009000000000000" pitchFamily="49" charset="0"/>
-                <a:cs typeface="JetBrains Mono" panose="02000009000000000000" pitchFamily="49" charset="0"/>
-              </a:rPr>
-              <a:t>&lt;</a:t>
-            </a:r>
-            <a:r>
-              <a:rPr lang="en-US" sz="1400" dirty="0">
-                <a:solidFill>
-                  <a:srgbClr val="A10000"/>
-                </a:solidFill>
-                <a:effectLst/>
-                <a:latin typeface="JetBrains Mono" panose="02000009000000000000" pitchFamily="49" charset="0"/>
-                <a:ea typeface="JetBrains Mono" panose="02000009000000000000" pitchFamily="49" charset="0"/>
-                <a:cs typeface="JetBrains Mono" panose="02000009000000000000" pitchFamily="49" charset="0"/>
-              </a:rPr>
-              <a:t>String</a:t>
-            </a:r>
-            <a:r>
-              <a:rPr lang="en-US" sz="1400" dirty="0">
-                <a:solidFill>
-                  <a:srgbClr val="000000"/>
-                </a:solidFill>
-                <a:effectLst/>
-                <a:latin typeface="JetBrains Mono" panose="02000009000000000000" pitchFamily="49" charset="0"/>
-                <a:ea typeface="JetBrains Mono" panose="02000009000000000000" pitchFamily="49" charset="0"/>
-                <a:cs typeface="JetBrains Mono" panose="02000009000000000000" pitchFamily="49" charset="0"/>
-              </a:rPr>
-              <a:t>&gt; ecMutableSet1 = </a:t>
-            </a:r>
-            <a:r>
-              <a:rPr lang="en-US" sz="1400" dirty="0" err="1">
-                <a:solidFill>
-                  <a:srgbClr val="A10000"/>
-                </a:solidFill>
-                <a:effectLst/>
-                <a:latin typeface="JetBrains Mono" panose="02000009000000000000" pitchFamily="49" charset="0"/>
-                <a:ea typeface="JetBrains Mono" panose="02000009000000000000" pitchFamily="49" charset="0"/>
-                <a:cs typeface="JetBrains Mono" panose="02000009000000000000" pitchFamily="49" charset="0"/>
-              </a:rPr>
-              <a:t>Sets</a:t>
-            </a:r>
-            <a:r>
-              <a:rPr lang="en-US" sz="1400" dirty="0" err="1">
-                <a:solidFill>
-                  <a:srgbClr val="000000"/>
-                </a:solidFill>
-                <a:effectLst/>
-                <a:latin typeface="JetBrains Mono" panose="02000009000000000000" pitchFamily="49" charset="0"/>
-                <a:ea typeface="JetBrains Mono" panose="02000009000000000000" pitchFamily="49" charset="0"/>
-                <a:cs typeface="JetBrains Mono" panose="02000009000000000000" pitchFamily="49" charset="0"/>
-              </a:rPr>
-              <a:t>.</a:t>
-            </a:r>
-            <a:r>
-              <a:rPr lang="en-US" sz="1400" b="1" i="1" dirty="0" err="1">
-                <a:solidFill>
-                  <a:srgbClr val="660E7A"/>
-                </a:solidFill>
-                <a:effectLst/>
-                <a:latin typeface="JetBrains Mono" panose="02000009000000000000" pitchFamily="49" charset="0"/>
-                <a:ea typeface="JetBrains Mono" panose="02000009000000000000" pitchFamily="49" charset="0"/>
-                <a:cs typeface="JetBrains Mono" panose="02000009000000000000" pitchFamily="49" charset="0"/>
-              </a:rPr>
-              <a:t>mutable</a:t>
-            </a:r>
-            <a:r>
-              <a:rPr lang="en-US" sz="1400" dirty="0" err="1">
-                <a:solidFill>
-                  <a:srgbClr val="000000"/>
-                </a:solidFill>
-                <a:effectLst/>
-                <a:latin typeface="JetBrains Mono" panose="02000009000000000000" pitchFamily="49" charset="0"/>
-                <a:ea typeface="JetBrains Mono" panose="02000009000000000000" pitchFamily="49" charset="0"/>
-                <a:cs typeface="JetBrains Mono" panose="02000009000000000000" pitchFamily="49" charset="0"/>
-              </a:rPr>
-              <a:t>.of</a:t>
-            </a:r>
-            <a:r>
-              <a:rPr lang="en-US" sz="1400" dirty="0">
-                <a:solidFill>
-                  <a:srgbClr val="000000"/>
-                </a:solidFill>
-                <a:effectLst/>
-                <a:latin typeface="JetBrains Mono" panose="02000009000000000000" pitchFamily="49" charset="0"/>
-                <a:ea typeface="JetBrains Mono" panose="02000009000000000000" pitchFamily="49" charset="0"/>
-                <a:cs typeface="JetBrains Mono" panose="02000009000000000000" pitchFamily="49" charset="0"/>
-              </a:rPr>
-              <a:t>(</a:t>
-            </a:r>
-            <a:r>
-              <a:rPr lang="en-US" sz="1400" b="1" dirty="0">
-                <a:solidFill>
-                  <a:srgbClr val="0B00CC"/>
-                </a:solidFill>
-                <a:effectLst/>
-                <a:latin typeface="JetBrains Mono" panose="02000009000000000000" pitchFamily="49" charset="0"/>
-                <a:ea typeface="JetBrains Mono" panose="02000009000000000000" pitchFamily="49" charset="0"/>
-                <a:cs typeface="JetBrains Mono" panose="02000009000000000000" pitchFamily="49" charset="0"/>
-              </a:rPr>
-              <a:t>"1"</a:t>
-            </a:r>
-            <a:r>
-              <a:rPr lang="en-US" sz="1400" dirty="0">
-                <a:solidFill>
-                  <a:srgbClr val="000000"/>
-                </a:solidFill>
-                <a:effectLst/>
-                <a:latin typeface="JetBrains Mono" panose="02000009000000000000" pitchFamily="49" charset="0"/>
-                <a:ea typeface="JetBrains Mono" panose="02000009000000000000" pitchFamily="49" charset="0"/>
-                <a:cs typeface="JetBrains Mono" panose="02000009000000000000" pitchFamily="49" charset="0"/>
-              </a:rPr>
-              <a:t>, </a:t>
-            </a:r>
-            <a:r>
-              <a:rPr lang="en-US" sz="1400" b="1" dirty="0">
-                <a:solidFill>
-                  <a:srgbClr val="0B00CC"/>
-                </a:solidFill>
-                <a:effectLst/>
-                <a:latin typeface="JetBrains Mono" panose="02000009000000000000" pitchFamily="49" charset="0"/>
-                <a:ea typeface="JetBrains Mono" panose="02000009000000000000" pitchFamily="49" charset="0"/>
-                <a:cs typeface="JetBrains Mono" panose="02000009000000000000" pitchFamily="49" charset="0"/>
-              </a:rPr>
-              <a:t>"2"</a:t>
-            </a:r>
-            <a:r>
-              <a:rPr lang="en-US" sz="1400" dirty="0">
-                <a:solidFill>
-                  <a:srgbClr val="000000"/>
-                </a:solidFill>
-                <a:effectLst/>
-                <a:latin typeface="JetBrains Mono" panose="02000009000000000000" pitchFamily="49" charset="0"/>
-                <a:ea typeface="JetBrains Mono" panose="02000009000000000000" pitchFamily="49" charset="0"/>
-                <a:cs typeface="JetBrains Mono" panose="02000009000000000000" pitchFamily="49" charset="0"/>
-              </a:rPr>
-              <a:t>, </a:t>
-            </a:r>
-            <a:r>
-              <a:rPr lang="en-US" sz="1400" b="1" dirty="0">
-                <a:solidFill>
-                  <a:srgbClr val="0B00CC"/>
-                </a:solidFill>
-                <a:effectLst/>
-                <a:latin typeface="JetBrains Mono" panose="02000009000000000000" pitchFamily="49" charset="0"/>
-                <a:ea typeface="JetBrains Mono" panose="02000009000000000000" pitchFamily="49" charset="0"/>
-                <a:cs typeface="JetBrains Mono" panose="02000009000000000000" pitchFamily="49" charset="0"/>
-              </a:rPr>
-              <a:t>"3"</a:t>
-            </a:r>
-            <a:r>
-              <a:rPr lang="en-US" sz="1400" dirty="0">
-                <a:solidFill>
-                  <a:srgbClr val="000000"/>
-                </a:solidFill>
-                <a:effectLst/>
-                <a:latin typeface="JetBrains Mono" panose="02000009000000000000" pitchFamily="49" charset="0"/>
-                <a:ea typeface="JetBrains Mono" panose="02000009000000000000" pitchFamily="49" charset="0"/>
-                <a:cs typeface="JetBrains Mono" panose="02000009000000000000" pitchFamily="49" charset="0"/>
-              </a:rPr>
-              <a:t>);</a:t>
-            </a:r>
-            <a:br>
-              <a:rPr lang="en-US" sz="1400" dirty="0">
-                <a:solidFill>
-                  <a:srgbClr val="000000"/>
-                </a:solidFill>
-                <a:effectLst/>
-                <a:latin typeface="JetBrains Mono" panose="02000009000000000000" pitchFamily="49" charset="0"/>
-                <a:ea typeface="JetBrains Mono" panose="02000009000000000000" pitchFamily="49" charset="0"/>
-                <a:cs typeface="JetBrains Mono" panose="02000009000000000000" pitchFamily="49" charset="0"/>
-              </a:rPr>
-            </a:br>
-            <a:r>
-              <a:rPr lang="en-US" sz="1400" dirty="0">
-                <a:solidFill>
-                  <a:srgbClr val="000000"/>
-                </a:solidFill>
-                <a:effectLst/>
-                <a:latin typeface="JetBrains Mono" panose="02000009000000000000" pitchFamily="49" charset="0"/>
-                <a:ea typeface="JetBrains Mono" panose="02000009000000000000" pitchFamily="49" charset="0"/>
-                <a:cs typeface="JetBrains Mono" panose="02000009000000000000" pitchFamily="49" charset="0"/>
-              </a:rPr>
-              <a:t>    </a:t>
-            </a:r>
-            <a:r>
-              <a:rPr lang="en-US" sz="1400" dirty="0" err="1">
-                <a:solidFill>
-                  <a:srgbClr val="0070FF"/>
-                </a:solidFill>
-                <a:effectLst/>
-                <a:latin typeface="JetBrains Mono" panose="02000009000000000000" pitchFamily="49" charset="0"/>
-                <a:ea typeface="JetBrains Mono" panose="02000009000000000000" pitchFamily="49" charset="0"/>
-                <a:cs typeface="JetBrains Mono" panose="02000009000000000000" pitchFamily="49" charset="0"/>
-              </a:rPr>
-              <a:t>ImmutableSet</a:t>
-            </a:r>
-            <a:r>
-              <a:rPr lang="en-US" sz="1400" dirty="0">
-                <a:solidFill>
-                  <a:srgbClr val="000000"/>
-                </a:solidFill>
-                <a:effectLst/>
-                <a:latin typeface="JetBrains Mono" panose="02000009000000000000" pitchFamily="49" charset="0"/>
-                <a:ea typeface="JetBrains Mono" panose="02000009000000000000" pitchFamily="49" charset="0"/>
-                <a:cs typeface="JetBrains Mono" panose="02000009000000000000" pitchFamily="49" charset="0"/>
-              </a:rPr>
-              <a:t>&lt;</a:t>
-            </a:r>
-            <a:r>
-              <a:rPr lang="en-US" sz="1400" dirty="0">
-                <a:solidFill>
-                  <a:srgbClr val="A10000"/>
-                </a:solidFill>
-                <a:effectLst/>
-                <a:latin typeface="JetBrains Mono" panose="02000009000000000000" pitchFamily="49" charset="0"/>
-                <a:ea typeface="JetBrains Mono" panose="02000009000000000000" pitchFamily="49" charset="0"/>
-                <a:cs typeface="JetBrains Mono" panose="02000009000000000000" pitchFamily="49" charset="0"/>
-              </a:rPr>
-              <a:t>String</a:t>
-            </a:r>
-            <a:r>
-              <a:rPr lang="en-US" sz="1400" dirty="0">
-                <a:solidFill>
-                  <a:srgbClr val="000000"/>
-                </a:solidFill>
-                <a:effectLst/>
-                <a:latin typeface="JetBrains Mono" panose="02000009000000000000" pitchFamily="49" charset="0"/>
-                <a:ea typeface="JetBrains Mono" panose="02000009000000000000" pitchFamily="49" charset="0"/>
-                <a:cs typeface="JetBrains Mono" panose="02000009000000000000" pitchFamily="49" charset="0"/>
-              </a:rPr>
-              <a:t>&gt; ecImmutableSet1 = </a:t>
-            </a:r>
-            <a:r>
-              <a:rPr lang="en-US" sz="1400" dirty="0" err="1">
-                <a:solidFill>
-                  <a:srgbClr val="A10000"/>
-                </a:solidFill>
-                <a:effectLst/>
-                <a:latin typeface="JetBrains Mono" panose="02000009000000000000" pitchFamily="49" charset="0"/>
-                <a:ea typeface="JetBrains Mono" panose="02000009000000000000" pitchFamily="49" charset="0"/>
-                <a:cs typeface="JetBrains Mono" panose="02000009000000000000" pitchFamily="49" charset="0"/>
-              </a:rPr>
-              <a:t>Sets</a:t>
-            </a:r>
-            <a:r>
-              <a:rPr lang="en-US" sz="1400" dirty="0" err="1">
-                <a:solidFill>
-                  <a:srgbClr val="000000"/>
-                </a:solidFill>
-                <a:effectLst/>
-                <a:latin typeface="JetBrains Mono" panose="02000009000000000000" pitchFamily="49" charset="0"/>
-                <a:ea typeface="JetBrains Mono" panose="02000009000000000000" pitchFamily="49" charset="0"/>
-                <a:cs typeface="JetBrains Mono" panose="02000009000000000000" pitchFamily="49" charset="0"/>
-              </a:rPr>
-              <a:t>.</a:t>
-            </a:r>
-            <a:r>
-              <a:rPr lang="en-US" sz="1400" b="1" i="1" dirty="0" err="1">
-                <a:solidFill>
-                  <a:srgbClr val="660E7A"/>
-                </a:solidFill>
-                <a:effectLst/>
-                <a:latin typeface="JetBrains Mono" panose="02000009000000000000" pitchFamily="49" charset="0"/>
-                <a:ea typeface="JetBrains Mono" panose="02000009000000000000" pitchFamily="49" charset="0"/>
-                <a:cs typeface="JetBrains Mono" panose="02000009000000000000" pitchFamily="49" charset="0"/>
-              </a:rPr>
-              <a:t>immutable</a:t>
-            </a:r>
-            <a:r>
-              <a:rPr lang="en-US" sz="1400" dirty="0" err="1">
-                <a:solidFill>
-                  <a:srgbClr val="000000"/>
-                </a:solidFill>
-                <a:effectLst/>
-                <a:latin typeface="JetBrains Mono" panose="02000009000000000000" pitchFamily="49" charset="0"/>
-                <a:ea typeface="JetBrains Mono" panose="02000009000000000000" pitchFamily="49" charset="0"/>
-                <a:cs typeface="JetBrains Mono" panose="02000009000000000000" pitchFamily="49" charset="0"/>
-              </a:rPr>
-              <a:t>.of</a:t>
-            </a:r>
-            <a:r>
-              <a:rPr lang="en-US" sz="1400" dirty="0">
-                <a:solidFill>
-                  <a:srgbClr val="000000"/>
-                </a:solidFill>
-                <a:effectLst/>
-                <a:latin typeface="JetBrains Mono" panose="02000009000000000000" pitchFamily="49" charset="0"/>
-                <a:ea typeface="JetBrains Mono" panose="02000009000000000000" pitchFamily="49" charset="0"/>
-                <a:cs typeface="JetBrains Mono" panose="02000009000000000000" pitchFamily="49" charset="0"/>
-              </a:rPr>
-              <a:t>(</a:t>
-            </a:r>
-            <a:r>
-              <a:rPr lang="en-US" sz="1400" b="1" dirty="0">
-                <a:solidFill>
-                  <a:srgbClr val="0B00CC"/>
-                </a:solidFill>
-                <a:effectLst/>
-                <a:latin typeface="JetBrains Mono" panose="02000009000000000000" pitchFamily="49" charset="0"/>
-                <a:ea typeface="JetBrains Mono" panose="02000009000000000000" pitchFamily="49" charset="0"/>
-                <a:cs typeface="JetBrains Mono" panose="02000009000000000000" pitchFamily="49" charset="0"/>
-              </a:rPr>
-              <a:t>"1"</a:t>
-            </a:r>
-            <a:r>
-              <a:rPr lang="en-US" sz="1400" dirty="0">
-                <a:solidFill>
-                  <a:srgbClr val="000000"/>
-                </a:solidFill>
-                <a:effectLst/>
-                <a:latin typeface="JetBrains Mono" panose="02000009000000000000" pitchFamily="49" charset="0"/>
-                <a:ea typeface="JetBrains Mono" panose="02000009000000000000" pitchFamily="49" charset="0"/>
-                <a:cs typeface="JetBrains Mono" panose="02000009000000000000" pitchFamily="49" charset="0"/>
-              </a:rPr>
-              <a:t>, </a:t>
-            </a:r>
-            <a:r>
-              <a:rPr lang="en-US" sz="1400" b="1" dirty="0">
-                <a:solidFill>
-                  <a:srgbClr val="0B00CC"/>
-                </a:solidFill>
-                <a:effectLst/>
-                <a:latin typeface="JetBrains Mono" panose="02000009000000000000" pitchFamily="49" charset="0"/>
-                <a:ea typeface="JetBrains Mono" panose="02000009000000000000" pitchFamily="49" charset="0"/>
-                <a:cs typeface="JetBrains Mono" panose="02000009000000000000" pitchFamily="49" charset="0"/>
-              </a:rPr>
-              <a:t>"2"</a:t>
-            </a:r>
-            <a:r>
-              <a:rPr lang="en-US" sz="1400" dirty="0">
-                <a:solidFill>
-                  <a:srgbClr val="000000"/>
-                </a:solidFill>
-                <a:effectLst/>
-                <a:latin typeface="JetBrains Mono" panose="02000009000000000000" pitchFamily="49" charset="0"/>
-                <a:ea typeface="JetBrains Mono" panose="02000009000000000000" pitchFamily="49" charset="0"/>
-                <a:cs typeface="JetBrains Mono" panose="02000009000000000000" pitchFamily="49" charset="0"/>
-              </a:rPr>
-              <a:t>, </a:t>
-            </a:r>
-            <a:r>
-              <a:rPr lang="en-US" sz="1400" b="1" dirty="0">
-                <a:solidFill>
-                  <a:srgbClr val="0B00CC"/>
-                </a:solidFill>
-                <a:effectLst/>
-                <a:latin typeface="JetBrains Mono" panose="02000009000000000000" pitchFamily="49" charset="0"/>
-                <a:ea typeface="JetBrains Mono" panose="02000009000000000000" pitchFamily="49" charset="0"/>
-                <a:cs typeface="JetBrains Mono" panose="02000009000000000000" pitchFamily="49" charset="0"/>
-              </a:rPr>
-              <a:t>"3"</a:t>
-            </a:r>
-            <a:r>
-              <a:rPr lang="en-US" sz="1400" dirty="0">
-                <a:solidFill>
-                  <a:srgbClr val="000000"/>
-                </a:solidFill>
-                <a:effectLst/>
-                <a:latin typeface="JetBrains Mono" panose="02000009000000000000" pitchFamily="49" charset="0"/>
-                <a:ea typeface="JetBrains Mono" panose="02000009000000000000" pitchFamily="49" charset="0"/>
-                <a:cs typeface="JetBrains Mono" panose="02000009000000000000" pitchFamily="49" charset="0"/>
-              </a:rPr>
-              <a:t>);</a:t>
-            </a:r>
-            <a:br>
-              <a:rPr lang="en-US" sz="1400" dirty="0">
-                <a:solidFill>
-                  <a:srgbClr val="000000"/>
-                </a:solidFill>
-                <a:effectLst/>
-                <a:latin typeface="JetBrains Mono" panose="02000009000000000000" pitchFamily="49" charset="0"/>
-                <a:ea typeface="JetBrains Mono" panose="02000009000000000000" pitchFamily="49" charset="0"/>
-                <a:cs typeface="JetBrains Mono" panose="02000009000000000000" pitchFamily="49" charset="0"/>
-              </a:rPr>
-            </a:br>
-            <a:br>
-              <a:rPr lang="en-US" sz="1400" dirty="0">
-                <a:solidFill>
-                  <a:srgbClr val="000000"/>
-                </a:solidFill>
-                <a:effectLst/>
-                <a:latin typeface="JetBrains Mono" panose="02000009000000000000" pitchFamily="49" charset="0"/>
-                <a:ea typeface="JetBrains Mono" panose="02000009000000000000" pitchFamily="49" charset="0"/>
-                <a:cs typeface="JetBrains Mono" panose="02000009000000000000" pitchFamily="49" charset="0"/>
-              </a:rPr>
-            </a:br>
-            <a:r>
-              <a:rPr lang="en-US" sz="1400" dirty="0">
-                <a:solidFill>
-                  <a:srgbClr val="000000"/>
-                </a:solidFill>
-                <a:effectLst/>
-                <a:latin typeface="JetBrains Mono" panose="02000009000000000000" pitchFamily="49" charset="0"/>
-                <a:ea typeface="JetBrains Mono" panose="02000009000000000000" pitchFamily="49" charset="0"/>
-                <a:cs typeface="JetBrains Mono" panose="02000009000000000000" pitchFamily="49" charset="0"/>
-              </a:rPr>
-              <a:t>    </a:t>
-            </a:r>
-            <a:r>
-              <a:rPr lang="en-US" sz="1400" i="1" dirty="0">
-                <a:solidFill>
-                  <a:srgbClr val="808080"/>
-                </a:solidFill>
-                <a:effectLst/>
-                <a:latin typeface="JetBrains Mono" panose="02000009000000000000" pitchFamily="49" charset="0"/>
-                <a:ea typeface="JetBrains Mono" panose="02000009000000000000" pitchFamily="49" charset="0"/>
-                <a:cs typeface="JetBrains Mono" panose="02000009000000000000" pitchFamily="49" charset="0"/>
-              </a:rPr>
-              <a:t>// Eclipse Collections using JDK Types</a:t>
-            </a:r>
-            <a:br>
-              <a:rPr lang="en-US" sz="1400" i="1" dirty="0">
-                <a:solidFill>
-                  <a:srgbClr val="808080"/>
-                </a:solidFill>
-                <a:effectLst/>
-                <a:latin typeface="JetBrains Mono" panose="02000009000000000000" pitchFamily="49" charset="0"/>
-                <a:ea typeface="JetBrains Mono" panose="02000009000000000000" pitchFamily="49" charset="0"/>
-                <a:cs typeface="JetBrains Mono" panose="02000009000000000000" pitchFamily="49" charset="0"/>
-              </a:rPr>
-            </a:br>
-            <a:r>
-              <a:rPr lang="en-US" sz="1400" i="1" dirty="0">
-                <a:solidFill>
-                  <a:srgbClr val="808080"/>
-                </a:solidFill>
-                <a:effectLst/>
-                <a:latin typeface="JetBrains Mono" panose="02000009000000000000" pitchFamily="49" charset="0"/>
-                <a:ea typeface="JetBrains Mono" panose="02000009000000000000" pitchFamily="49" charset="0"/>
-                <a:cs typeface="JetBrains Mono" panose="02000009000000000000" pitchFamily="49" charset="0"/>
-              </a:rPr>
-              <a:t>    </a:t>
-            </a:r>
-            <a:r>
-              <a:rPr lang="en-US" sz="1400" dirty="0">
-                <a:solidFill>
-                  <a:srgbClr val="0070FF"/>
-                </a:solidFill>
-                <a:effectLst/>
-                <a:latin typeface="JetBrains Mono" panose="02000009000000000000" pitchFamily="49" charset="0"/>
-                <a:ea typeface="JetBrains Mono" panose="02000009000000000000" pitchFamily="49" charset="0"/>
-                <a:cs typeface="JetBrains Mono" panose="02000009000000000000" pitchFamily="49" charset="0"/>
-              </a:rPr>
-              <a:t>Set</a:t>
-            </a:r>
-            <a:r>
-              <a:rPr lang="en-US" sz="1400" dirty="0">
-                <a:solidFill>
-                  <a:srgbClr val="000000"/>
-                </a:solidFill>
-                <a:effectLst/>
-                <a:latin typeface="JetBrains Mono" panose="02000009000000000000" pitchFamily="49" charset="0"/>
-                <a:ea typeface="JetBrains Mono" panose="02000009000000000000" pitchFamily="49" charset="0"/>
-                <a:cs typeface="JetBrains Mono" panose="02000009000000000000" pitchFamily="49" charset="0"/>
-              </a:rPr>
-              <a:t>&lt;</a:t>
-            </a:r>
-            <a:r>
-              <a:rPr lang="en-US" sz="1400" dirty="0">
-                <a:solidFill>
-                  <a:srgbClr val="A10000"/>
-                </a:solidFill>
-                <a:effectLst/>
-                <a:latin typeface="JetBrains Mono" panose="02000009000000000000" pitchFamily="49" charset="0"/>
-                <a:ea typeface="JetBrains Mono" panose="02000009000000000000" pitchFamily="49" charset="0"/>
-                <a:cs typeface="JetBrains Mono" panose="02000009000000000000" pitchFamily="49" charset="0"/>
-              </a:rPr>
-              <a:t>String</a:t>
-            </a:r>
-            <a:r>
-              <a:rPr lang="en-US" sz="1400" dirty="0">
-                <a:solidFill>
-                  <a:srgbClr val="000000"/>
-                </a:solidFill>
-                <a:effectLst/>
-                <a:latin typeface="JetBrains Mono" panose="02000009000000000000" pitchFamily="49" charset="0"/>
-                <a:ea typeface="JetBrains Mono" panose="02000009000000000000" pitchFamily="49" charset="0"/>
-                <a:cs typeface="JetBrains Mono" panose="02000009000000000000" pitchFamily="49" charset="0"/>
-              </a:rPr>
-              <a:t>&gt; ecMutableSet2 = ecMutableSet1;</a:t>
-            </a:r>
-            <a:br>
-              <a:rPr lang="en-US" sz="1400" dirty="0">
-                <a:solidFill>
-                  <a:srgbClr val="000000"/>
-                </a:solidFill>
-                <a:effectLst/>
-                <a:latin typeface="JetBrains Mono" panose="02000009000000000000" pitchFamily="49" charset="0"/>
-                <a:ea typeface="JetBrains Mono" panose="02000009000000000000" pitchFamily="49" charset="0"/>
-                <a:cs typeface="JetBrains Mono" panose="02000009000000000000" pitchFamily="49" charset="0"/>
-              </a:rPr>
-            </a:br>
-            <a:r>
-              <a:rPr lang="en-US" sz="1400" dirty="0">
-                <a:solidFill>
-                  <a:srgbClr val="000000"/>
-                </a:solidFill>
-                <a:effectLst/>
-                <a:latin typeface="JetBrains Mono" panose="02000009000000000000" pitchFamily="49" charset="0"/>
-                <a:ea typeface="JetBrains Mono" panose="02000009000000000000" pitchFamily="49" charset="0"/>
-                <a:cs typeface="JetBrains Mono" panose="02000009000000000000" pitchFamily="49" charset="0"/>
-              </a:rPr>
-              <a:t>    </a:t>
-            </a:r>
-            <a:r>
-              <a:rPr lang="en-US" sz="1400" dirty="0">
-                <a:solidFill>
-                  <a:srgbClr val="0070FF"/>
-                </a:solidFill>
-                <a:effectLst/>
-                <a:latin typeface="JetBrains Mono" panose="02000009000000000000" pitchFamily="49" charset="0"/>
-                <a:ea typeface="JetBrains Mono" panose="02000009000000000000" pitchFamily="49" charset="0"/>
-                <a:cs typeface="JetBrains Mono" panose="02000009000000000000" pitchFamily="49" charset="0"/>
-              </a:rPr>
-              <a:t>Set</a:t>
-            </a:r>
-            <a:r>
-              <a:rPr lang="en-US" sz="1400" dirty="0">
-                <a:solidFill>
-                  <a:srgbClr val="000000"/>
-                </a:solidFill>
-                <a:effectLst/>
-                <a:latin typeface="JetBrains Mono" panose="02000009000000000000" pitchFamily="49" charset="0"/>
-                <a:ea typeface="JetBrains Mono" panose="02000009000000000000" pitchFamily="49" charset="0"/>
-                <a:cs typeface="JetBrains Mono" panose="02000009000000000000" pitchFamily="49" charset="0"/>
-              </a:rPr>
-              <a:t>&lt;</a:t>
-            </a:r>
-            <a:r>
-              <a:rPr lang="en-US" sz="1400" dirty="0">
-                <a:solidFill>
-                  <a:srgbClr val="A10000"/>
-                </a:solidFill>
-                <a:effectLst/>
-                <a:latin typeface="JetBrains Mono" panose="02000009000000000000" pitchFamily="49" charset="0"/>
-                <a:ea typeface="JetBrains Mono" panose="02000009000000000000" pitchFamily="49" charset="0"/>
-                <a:cs typeface="JetBrains Mono" panose="02000009000000000000" pitchFamily="49" charset="0"/>
-              </a:rPr>
-              <a:t>String</a:t>
-            </a:r>
-            <a:r>
-              <a:rPr lang="en-US" sz="1400" dirty="0">
-                <a:solidFill>
-                  <a:srgbClr val="000000"/>
-                </a:solidFill>
-                <a:effectLst/>
-                <a:latin typeface="JetBrains Mono" panose="02000009000000000000" pitchFamily="49" charset="0"/>
-                <a:ea typeface="JetBrains Mono" panose="02000009000000000000" pitchFamily="49" charset="0"/>
-                <a:cs typeface="JetBrains Mono" panose="02000009000000000000" pitchFamily="49" charset="0"/>
-              </a:rPr>
-              <a:t>&gt; ecImmutableSet2 = ecImmutableSet1.castToSet();</a:t>
-            </a:r>
-            <a:br>
-              <a:rPr lang="en-US" sz="1400" dirty="0">
-                <a:solidFill>
-                  <a:srgbClr val="000000"/>
-                </a:solidFill>
-                <a:effectLst/>
-                <a:latin typeface="JetBrains Mono" panose="02000009000000000000" pitchFamily="49" charset="0"/>
-                <a:ea typeface="JetBrains Mono" panose="02000009000000000000" pitchFamily="49" charset="0"/>
-                <a:cs typeface="JetBrains Mono" panose="02000009000000000000" pitchFamily="49" charset="0"/>
-              </a:rPr>
-            </a:br>
-            <a:br>
-              <a:rPr lang="en-US" sz="1400" dirty="0">
-                <a:solidFill>
-                  <a:srgbClr val="000000"/>
-                </a:solidFill>
-                <a:effectLst/>
-                <a:latin typeface="JetBrains Mono" panose="02000009000000000000" pitchFamily="49" charset="0"/>
-                <a:ea typeface="JetBrains Mono" panose="02000009000000000000" pitchFamily="49" charset="0"/>
-                <a:cs typeface="JetBrains Mono" panose="02000009000000000000" pitchFamily="49" charset="0"/>
-              </a:rPr>
-            </a:br>
-            <a:r>
-              <a:rPr lang="en-US" sz="1400" dirty="0">
-                <a:solidFill>
-                  <a:srgbClr val="000000"/>
-                </a:solidFill>
-                <a:effectLst/>
-                <a:latin typeface="JetBrains Mono" panose="02000009000000000000" pitchFamily="49" charset="0"/>
-                <a:ea typeface="JetBrains Mono" panose="02000009000000000000" pitchFamily="49" charset="0"/>
-                <a:cs typeface="JetBrains Mono" panose="02000009000000000000" pitchFamily="49" charset="0"/>
-              </a:rPr>
-              <a:t>    </a:t>
-            </a:r>
-            <a:r>
-              <a:rPr lang="en-US" sz="1400" i="1" dirty="0">
-                <a:solidFill>
-                  <a:srgbClr val="808080"/>
-                </a:solidFill>
-                <a:effectLst/>
-                <a:latin typeface="JetBrains Mono" panose="02000009000000000000" pitchFamily="49" charset="0"/>
-                <a:ea typeface="JetBrains Mono" panose="02000009000000000000" pitchFamily="49" charset="0"/>
-                <a:cs typeface="JetBrains Mono" panose="02000009000000000000" pitchFamily="49" charset="0"/>
-              </a:rPr>
-              <a:t>// Testing JDK and Eclipse Collections Set Types for Equality</a:t>
-            </a:r>
-            <a:br>
-              <a:rPr lang="en-US" sz="1400" i="1" dirty="0">
-                <a:solidFill>
-                  <a:srgbClr val="808080"/>
-                </a:solidFill>
-                <a:effectLst/>
-                <a:latin typeface="JetBrains Mono" panose="02000009000000000000" pitchFamily="49" charset="0"/>
-                <a:ea typeface="JetBrains Mono" panose="02000009000000000000" pitchFamily="49" charset="0"/>
-                <a:cs typeface="JetBrains Mono" panose="02000009000000000000" pitchFamily="49" charset="0"/>
-              </a:rPr>
-            </a:br>
-            <a:r>
-              <a:rPr lang="en-US" sz="1400" i="1" dirty="0">
-                <a:solidFill>
-                  <a:srgbClr val="808080"/>
-                </a:solidFill>
-                <a:effectLst/>
-                <a:latin typeface="JetBrains Mono" panose="02000009000000000000" pitchFamily="49" charset="0"/>
-                <a:ea typeface="JetBrains Mono" panose="02000009000000000000" pitchFamily="49" charset="0"/>
-                <a:cs typeface="JetBrains Mono" panose="02000009000000000000" pitchFamily="49" charset="0"/>
-              </a:rPr>
-              <a:t>    </a:t>
-            </a:r>
-            <a:r>
-              <a:rPr lang="en-US" sz="1400" dirty="0">
-                <a:solidFill>
-                  <a:srgbClr val="530E80"/>
-                </a:solidFill>
-                <a:effectLst/>
-                <a:latin typeface="JetBrains Mono" panose="02000009000000000000" pitchFamily="49" charset="0"/>
-                <a:ea typeface="JetBrains Mono" panose="02000009000000000000" pitchFamily="49" charset="0"/>
-                <a:cs typeface="JetBrains Mono" panose="02000009000000000000" pitchFamily="49" charset="0"/>
-              </a:rPr>
-              <a:t>var </a:t>
-            </a:r>
-            <a:r>
-              <a:rPr lang="en-US" sz="1400" dirty="0" err="1">
-                <a:solidFill>
-                  <a:srgbClr val="000000"/>
-                </a:solidFill>
-                <a:effectLst/>
-                <a:latin typeface="JetBrains Mono" panose="02000009000000000000" pitchFamily="49" charset="0"/>
-                <a:ea typeface="JetBrains Mono" panose="02000009000000000000" pitchFamily="49" charset="0"/>
-                <a:cs typeface="JetBrains Mono" panose="02000009000000000000" pitchFamily="49" charset="0"/>
-              </a:rPr>
-              <a:t>jdkSets</a:t>
-            </a:r>
-            <a:r>
-              <a:rPr lang="en-US" sz="1400" dirty="0">
-                <a:solidFill>
-                  <a:srgbClr val="000000"/>
-                </a:solidFill>
-                <a:effectLst/>
-                <a:latin typeface="JetBrains Mono" panose="02000009000000000000" pitchFamily="49" charset="0"/>
-                <a:ea typeface="JetBrains Mono" panose="02000009000000000000" pitchFamily="49" charset="0"/>
-                <a:cs typeface="JetBrains Mono" panose="02000009000000000000" pitchFamily="49" charset="0"/>
-              </a:rPr>
-              <a:t> = </a:t>
-            </a:r>
-            <a:r>
-              <a:rPr lang="en-US" sz="1400" dirty="0" err="1">
-                <a:solidFill>
-                  <a:srgbClr val="A10000"/>
-                </a:solidFill>
-                <a:effectLst/>
-                <a:latin typeface="JetBrains Mono" panose="02000009000000000000" pitchFamily="49" charset="0"/>
-                <a:ea typeface="JetBrains Mono" panose="02000009000000000000" pitchFamily="49" charset="0"/>
-                <a:cs typeface="JetBrains Mono" panose="02000009000000000000" pitchFamily="49" charset="0"/>
-              </a:rPr>
-              <a:t>Sets</a:t>
-            </a:r>
-            <a:r>
-              <a:rPr lang="en-US" sz="1400" dirty="0" err="1">
-                <a:solidFill>
-                  <a:srgbClr val="000000"/>
-                </a:solidFill>
-                <a:effectLst/>
-                <a:latin typeface="JetBrains Mono" panose="02000009000000000000" pitchFamily="49" charset="0"/>
-                <a:ea typeface="JetBrains Mono" panose="02000009000000000000" pitchFamily="49" charset="0"/>
-                <a:cs typeface="JetBrains Mono" panose="02000009000000000000" pitchFamily="49" charset="0"/>
-              </a:rPr>
-              <a:t>.</a:t>
-            </a:r>
-            <a:r>
-              <a:rPr lang="en-US" sz="1400" b="1" i="1" dirty="0" err="1">
-                <a:solidFill>
-                  <a:srgbClr val="660E7A"/>
-                </a:solidFill>
-                <a:effectLst/>
-                <a:latin typeface="JetBrains Mono" panose="02000009000000000000" pitchFamily="49" charset="0"/>
-                <a:ea typeface="JetBrains Mono" panose="02000009000000000000" pitchFamily="49" charset="0"/>
-                <a:cs typeface="JetBrains Mono" panose="02000009000000000000" pitchFamily="49" charset="0"/>
-              </a:rPr>
-              <a:t>mutable</a:t>
-            </a:r>
-            <a:r>
-              <a:rPr lang="en-US" sz="1400" dirty="0" err="1">
-                <a:solidFill>
-                  <a:srgbClr val="000000"/>
-                </a:solidFill>
-                <a:effectLst/>
-                <a:latin typeface="JetBrains Mono" panose="02000009000000000000" pitchFamily="49" charset="0"/>
-                <a:ea typeface="JetBrains Mono" panose="02000009000000000000" pitchFamily="49" charset="0"/>
-                <a:cs typeface="JetBrains Mono" panose="02000009000000000000" pitchFamily="49" charset="0"/>
-              </a:rPr>
-              <a:t>.of</a:t>
-            </a:r>
-            <a:r>
-              <a:rPr lang="en-US" sz="1400" dirty="0">
-                <a:solidFill>
-                  <a:srgbClr val="000000"/>
-                </a:solidFill>
-                <a:effectLst/>
-                <a:latin typeface="JetBrains Mono" panose="02000009000000000000" pitchFamily="49" charset="0"/>
-                <a:ea typeface="JetBrains Mono" panose="02000009000000000000" pitchFamily="49" charset="0"/>
-                <a:cs typeface="JetBrains Mono" panose="02000009000000000000" pitchFamily="49" charset="0"/>
-              </a:rPr>
-              <a:t>(</a:t>
-            </a:r>
-            <a:r>
-              <a:rPr lang="en-US" sz="1400" dirty="0" err="1">
-                <a:solidFill>
-                  <a:srgbClr val="000000"/>
-                </a:solidFill>
-                <a:effectLst/>
-                <a:latin typeface="JetBrains Mono" panose="02000009000000000000" pitchFamily="49" charset="0"/>
-                <a:ea typeface="JetBrains Mono" panose="02000009000000000000" pitchFamily="49" charset="0"/>
-                <a:cs typeface="JetBrains Mono" panose="02000009000000000000" pitchFamily="49" charset="0"/>
-              </a:rPr>
-              <a:t>jdkImmutableSet</a:t>
-            </a:r>
-            <a:r>
-              <a:rPr lang="en-US" sz="1400" dirty="0">
-                <a:solidFill>
-                  <a:srgbClr val="000000"/>
-                </a:solidFill>
-                <a:effectLst/>
-                <a:latin typeface="JetBrains Mono" panose="02000009000000000000" pitchFamily="49" charset="0"/>
-                <a:ea typeface="JetBrains Mono" panose="02000009000000000000" pitchFamily="49" charset="0"/>
-                <a:cs typeface="JetBrains Mono" panose="02000009000000000000" pitchFamily="49" charset="0"/>
-              </a:rPr>
-              <a:t>, </a:t>
-            </a:r>
-            <a:r>
-              <a:rPr lang="en-US" sz="1400" dirty="0" err="1">
-                <a:solidFill>
-                  <a:srgbClr val="000000"/>
-                </a:solidFill>
-                <a:effectLst/>
-                <a:latin typeface="JetBrains Mono" panose="02000009000000000000" pitchFamily="49" charset="0"/>
-                <a:ea typeface="JetBrains Mono" panose="02000009000000000000" pitchFamily="49" charset="0"/>
-                <a:cs typeface="JetBrains Mono" panose="02000009000000000000" pitchFamily="49" charset="0"/>
-              </a:rPr>
-              <a:t>jdkMutableSet</a:t>
-            </a:r>
-            <a:r>
-              <a:rPr lang="en-US" sz="1400" dirty="0">
-                <a:solidFill>
-                  <a:srgbClr val="000000"/>
-                </a:solidFill>
-                <a:effectLst/>
-                <a:latin typeface="JetBrains Mono" panose="02000009000000000000" pitchFamily="49" charset="0"/>
-                <a:ea typeface="JetBrains Mono" panose="02000009000000000000" pitchFamily="49" charset="0"/>
-                <a:cs typeface="JetBrains Mono" panose="02000009000000000000" pitchFamily="49" charset="0"/>
-              </a:rPr>
-              <a:t>);</a:t>
-            </a:r>
-            <a:br>
-              <a:rPr lang="en-US" sz="1400" dirty="0">
-                <a:solidFill>
-                  <a:srgbClr val="000000"/>
-                </a:solidFill>
-                <a:effectLst/>
-                <a:latin typeface="JetBrains Mono" panose="02000009000000000000" pitchFamily="49" charset="0"/>
-                <a:ea typeface="JetBrains Mono" panose="02000009000000000000" pitchFamily="49" charset="0"/>
-                <a:cs typeface="JetBrains Mono" panose="02000009000000000000" pitchFamily="49" charset="0"/>
-              </a:rPr>
-            </a:br>
-            <a:r>
-              <a:rPr lang="en-US" sz="1400" dirty="0">
-                <a:solidFill>
-                  <a:srgbClr val="000000"/>
-                </a:solidFill>
-                <a:effectLst/>
-                <a:latin typeface="JetBrains Mono" panose="02000009000000000000" pitchFamily="49" charset="0"/>
-                <a:ea typeface="JetBrains Mono" panose="02000009000000000000" pitchFamily="49" charset="0"/>
-                <a:cs typeface="JetBrains Mono" panose="02000009000000000000" pitchFamily="49" charset="0"/>
-              </a:rPr>
-              <a:t>    </a:t>
-            </a:r>
-            <a:r>
-              <a:rPr lang="en-US" sz="1400" dirty="0">
-                <a:solidFill>
-                  <a:srgbClr val="530E80"/>
-                </a:solidFill>
-                <a:effectLst/>
-                <a:latin typeface="JetBrains Mono" panose="02000009000000000000" pitchFamily="49" charset="0"/>
-                <a:ea typeface="JetBrains Mono" panose="02000009000000000000" pitchFamily="49" charset="0"/>
-                <a:cs typeface="JetBrains Mono" panose="02000009000000000000" pitchFamily="49" charset="0"/>
-              </a:rPr>
-              <a:t>var </a:t>
-            </a:r>
-            <a:r>
-              <a:rPr lang="en-US" sz="1400" dirty="0" err="1">
-                <a:solidFill>
-                  <a:srgbClr val="000000"/>
-                </a:solidFill>
-                <a:effectLst/>
-                <a:latin typeface="JetBrains Mono" panose="02000009000000000000" pitchFamily="49" charset="0"/>
-                <a:ea typeface="JetBrains Mono" panose="02000009000000000000" pitchFamily="49" charset="0"/>
-                <a:cs typeface="JetBrains Mono" panose="02000009000000000000" pitchFamily="49" charset="0"/>
-              </a:rPr>
-              <a:t>ecSets</a:t>
-            </a:r>
-            <a:r>
-              <a:rPr lang="en-US" sz="1400" dirty="0">
-                <a:solidFill>
-                  <a:srgbClr val="000000"/>
-                </a:solidFill>
-                <a:effectLst/>
-                <a:latin typeface="JetBrains Mono" panose="02000009000000000000" pitchFamily="49" charset="0"/>
-                <a:ea typeface="JetBrains Mono" panose="02000009000000000000" pitchFamily="49" charset="0"/>
-                <a:cs typeface="JetBrains Mono" panose="02000009000000000000" pitchFamily="49" charset="0"/>
-              </a:rPr>
-              <a:t> = </a:t>
-            </a:r>
-            <a:r>
-              <a:rPr lang="en-US" sz="1400" dirty="0" err="1">
-                <a:solidFill>
-                  <a:srgbClr val="A10000"/>
-                </a:solidFill>
-                <a:effectLst/>
-                <a:latin typeface="JetBrains Mono" panose="02000009000000000000" pitchFamily="49" charset="0"/>
-                <a:ea typeface="JetBrains Mono" panose="02000009000000000000" pitchFamily="49" charset="0"/>
-                <a:cs typeface="JetBrains Mono" panose="02000009000000000000" pitchFamily="49" charset="0"/>
-              </a:rPr>
-              <a:t>Sets</a:t>
-            </a:r>
-            <a:r>
-              <a:rPr lang="en-US" sz="1400" dirty="0" err="1">
-                <a:solidFill>
-                  <a:srgbClr val="000000"/>
-                </a:solidFill>
-                <a:effectLst/>
-                <a:latin typeface="JetBrains Mono" panose="02000009000000000000" pitchFamily="49" charset="0"/>
-                <a:ea typeface="JetBrains Mono" panose="02000009000000000000" pitchFamily="49" charset="0"/>
-                <a:cs typeface="JetBrains Mono" panose="02000009000000000000" pitchFamily="49" charset="0"/>
-              </a:rPr>
-              <a:t>.</a:t>
-            </a:r>
-            <a:r>
-              <a:rPr lang="en-US" sz="1400" b="1" i="1" dirty="0" err="1">
-                <a:solidFill>
-                  <a:srgbClr val="660E7A"/>
-                </a:solidFill>
-                <a:effectLst/>
-                <a:latin typeface="JetBrains Mono" panose="02000009000000000000" pitchFamily="49" charset="0"/>
-                <a:ea typeface="JetBrains Mono" panose="02000009000000000000" pitchFamily="49" charset="0"/>
-                <a:cs typeface="JetBrains Mono" panose="02000009000000000000" pitchFamily="49" charset="0"/>
-              </a:rPr>
-              <a:t>mutable</a:t>
-            </a:r>
-            <a:r>
-              <a:rPr lang="en-US" sz="1400" dirty="0" err="1">
-                <a:solidFill>
-                  <a:srgbClr val="000000"/>
-                </a:solidFill>
-                <a:effectLst/>
-                <a:latin typeface="JetBrains Mono" panose="02000009000000000000" pitchFamily="49" charset="0"/>
-                <a:ea typeface="JetBrains Mono" panose="02000009000000000000" pitchFamily="49" charset="0"/>
-                <a:cs typeface="JetBrains Mono" panose="02000009000000000000" pitchFamily="49" charset="0"/>
-              </a:rPr>
-              <a:t>.of</a:t>
-            </a:r>
-            <a:r>
-              <a:rPr lang="en-US" sz="1400" dirty="0">
-                <a:solidFill>
-                  <a:srgbClr val="000000"/>
-                </a:solidFill>
-                <a:effectLst/>
-                <a:latin typeface="JetBrains Mono" panose="02000009000000000000" pitchFamily="49" charset="0"/>
-                <a:ea typeface="JetBrains Mono" panose="02000009000000000000" pitchFamily="49" charset="0"/>
-                <a:cs typeface="JetBrains Mono" panose="02000009000000000000" pitchFamily="49" charset="0"/>
-              </a:rPr>
-              <a:t>(ecMutableSet1, ecImmutableSet1, ecMutableSet2, ecImmutableSet2);</a:t>
-            </a:r>
-            <a:br>
-              <a:rPr lang="en-US" sz="1400" dirty="0">
-                <a:solidFill>
-                  <a:srgbClr val="000000"/>
-                </a:solidFill>
-                <a:effectLst/>
-                <a:latin typeface="JetBrains Mono" panose="02000009000000000000" pitchFamily="49" charset="0"/>
-                <a:ea typeface="JetBrains Mono" panose="02000009000000000000" pitchFamily="49" charset="0"/>
-                <a:cs typeface="JetBrains Mono" panose="02000009000000000000" pitchFamily="49" charset="0"/>
-              </a:rPr>
-            </a:br>
-            <a:endParaRPr lang="en-US" sz="1400" dirty="0">
+            <a:endParaRPr lang="en-US" dirty="0">
               <a:solidFill>
-                <a:srgbClr val="000000"/>
+                <a:schemeClr val="tx1"/>
               </a:solidFill>
-              <a:effectLst/>
-              <a:latin typeface="JetBrains Mono" panose="02000009000000000000" pitchFamily="49" charset="0"/>
-              <a:ea typeface="JetBrains Mono" panose="02000009000000000000" pitchFamily="49" charset="0"/>
-              <a:cs typeface="JetBrains Mono" panose="02000009000000000000" pitchFamily="49" charset="0"/>
             </a:endParaRPr>
           </a:p>
+        </p:txBody>
+      </p:sp>
+      <p:sp>
+        <p:nvSpPr>
+          <p:cNvPr id="55" name="Oval 54">
+            <a:extLst>
+              <a:ext uri="{FF2B5EF4-FFF2-40B4-BE49-F238E27FC236}">
+                <a16:creationId xmlns:a16="http://schemas.microsoft.com/office/drawing/2014/main" id="{91235CCB-890F-42AA-3B47-5A51683A625C}"/>
+              </a:ext>
+            </a:extLst>
+          </p:cNvPr>
+          <p:cNvSpPr/>
+          <p:nvPr/>
+        </p:nvSpPr>
+        <p:spPr>
+          <a:xfrm>
+            <a:off x="5730240" y="3540748"/>
+            <a:ext cx="731520" cy="731520"/>
+          </a:xfrm>
+          <a:prstGeom prst="ellipse">
+            <a:avLst/>
+          </a:prstGeom>
+          <a:solidFill>
+            <a:schemeClr val="accent6">
+              <a:lumMod val="50000"/>
+            </a:schemeClr>
+          </a:solidFill>
+          <a:ln>
+            <a:noFill/>
+          </a:ln>
+        </p:spPr>
+        <p:style>
+          <a:lnRef idx="2">
+            <a:schemeClr val="accent1">
+              <a:shade val="15000"/>
+            </a:schemeClr>
+          </a:lnRef>
+          <a:fillRef idx="1">
+            <a:schemeClr val="accent1"/>
+          </a:fillRef>
+          <a:effectRef idx="0">
+            <a:schemeClr val="accent1"/>
+          </a:effectRef>
+          <a:fontRef idx="minor">
+            <a:schemeClr val="lt1"/>
+          </a:fontRef>
+        </p:style>
+        <p:txBody>
+          <a:bodyPr wrap="none" lIns="0" rIns="0" rtlCol="0" anchor="ctr"/>
+          <a:lstStyle/>
           <a:p>
-            <a:pPr>
-              <a:lnSpc>
-                <a:spcPts val="1900"/>
-              </a:lnSpc>
-              <a:buNone/>
-            </a:pPr>
             <a:r>
-              <a:rPr lang="en-US" sz="1400" dirty="0">
-                <a:solidFill>
-                  <a:srgbClr val="000000"/>
-                </a:solidFill>
-                <a:effectLst/>
-                <a:latin typeface="JetBrains Mono" panose="02000009000000000000" pitchFamily="49" charset="0"/>
-                <a:ea typeface="JetBrains Mono" panose="02000009000000000000" pitchFamily="49" charset="0"/>
-                <a:cs typeface="JetBrains Mono" panose="02000009000000000000" pitchFamily="49" charset="0"/>
-              </a:rPr>
-              <a:t>    </a:t>
-            </a:r>
-            <a:r>
-              <a:rPr lang="en-US" sz="1400" dirty="0">
-                <a:solidFill>
-                  <a:schemeClr val="bg2">
-                    <a:lumMod val="50000"/>
-                  </a:schemeClr>
-                </a:solidFill>
-                <a:effectLst/>
-                <a:latin typeface="JetBrains Mono" panose="02000009000000000000" pitchFamily="49" charset="0"/>
-                <a:ea typeface="JetBrains Mono" panose="02000009000000000000" pitchFamily="49" charset="0"/>
-                <a:cs typeface="JetBrains Mono" panose="02000009000000000000" pitchFamily="49" charset="0"/>
-              </a:rPr>
-              <a:t>// Eclipse Collection </a:t>
-            </a:r>
-            <a:r>
-              <a:rPr lang="en-US" sz="1400" dirty="0" err="1">
-                <a:solidFill>
-                  <a:schemeClr val="bg2">
-                    <a:lumMod val="50000"/>
-                  </a:schemeClr>
-                </a:solidFill>
-                <a:effectLst/>
-                <a:latin typeface="JetBrains Mono" panose="02000009000000000000" pitchFamily="49" charset="0"/>
-                <a:ea typeface="JetBrains Mono" panose="02000009000000000000" pitchFamily="49" charset="0"/>
-                <a:cs typeface="JetBrains Mono" panose="02000009000000000000" pitchFamily="49" charset="0"/>
-              </a:rPr>
-              <a:t>SetIterable</a:t>
-            </a:r>
-            <a:r>
-              <a:rPr lang="en-US" sz="1400" dirty="0">
-                <a:solidFill>
-                  <a:schemeClr val="bg2">
-                    <a:lumMod val="50000"/>
-                  </a:schemeClr>
-                </a:solidFill>
-                <a:effectLst/>
-                <a:latin typeface="JetBrains Mono" panose="02000009000000000000" pitchFamily="49" charset="0"/>
-                <a:ea typeface="JetBrains Mono" panose="02000009000000000000" pitchFamily="49" charset="0"/>
-                <a:cs typeface="JetBrains Mono" panose="02000009000000000000" pitchFamily="49" charset="0"/>
-              </a:rPr>
-              <a:t> type defines methods like </a:t>
-            </a:r>
-            <a:r>
-              <a:rPr lang="en-US" sz="1400" dirty="0" err="1">
-                <a:solidFill>
-                  <a:schemeClr val="bg2">
-                    <a:lumMod val="50000"/>
-                  </a:schemeClr>
-                </a:solidFill>
-                <a:effectLst/>
-                <a:latin typeface="JetBrains Mono" panose="02000009000000000000" pitchFamily="49" charset="0"/>
-                <a:ea typeface="JetBrains Mono" panose="02000009000000000000" pitchFamily="49" charset="0"/>
-                <a:cs typeface="JetBrains Mono" panose="02000009000000000000" pitchFamily="49" charset="0"/>
-              </a:rPr>
-              <a:t>cartesianProduct</a:t>
-            </a:r>
-            <a:r>
-              <a:rPr lang="en-US" sz="1400" dirty="0">
-                <a:solidFill>
-                  <a:schemeClr val="bg2">
-                    <a:lumMod val="50000"/>
-                  </a:schemeClr>
-                </a:solidFill>
-                <a:effectLst/>
-                <a:latin typeface="JetBrains Mono" panose="02000009000000000000" pitchFamily="49" charset="0"/>
-                <a:ea typeface="JetBrains Mono" panose="02000009000000000000" pitchFamily="49" charset="0"/>
-                <a:cs typeface="JetBrains Mono" panose="02000009000000000000" pitchFamily="49" charset="0"/>
-              </a:rPr>
-              <a:t>()</a:t>
-            </a:r>
-          </a:p>
-          <a:p>
-            <a:pPr>
-              <a:lnSpc>
-                <a:spcPts val="1900"/>
-              </a:lnSpc>
-              <a:buNone/>
-            </a:pPr>
-            <a:r>
-              <a:rPr lang="en-US" sz="1400" dirty="0">
-                <a:solidFill>
-                  <a:srgbClr val="000000"/>
-                </a:solidFill>
-                <a:effectLst/>
-                <a:latin typeface="JetBrains Mono" panose="02000009000000000000" pitchFamily="49" charset="0"/>
-                <a:ea typeface="JetBrains Mono" panose="02000009000000000000" pitchFamily="49" charset="0"/>
-                <a:cs typeface="JetBrains Mono" panose="02000009000000000000" pitchFamily="49" charset="0"/>
-              </a:rPr>
-              <a:t>    </a:t>
-            </a:r>
-            <a:r>
-              <a:rPr lang="en-US" sz="1400" dirty="0" err="1">
-                <a:solidFill>
-                  <a:srgbClr val="000000"/>
-                </a:solidFill>
-                <a:effectLst/>
-                <a:latin typeface="JetBrains Mono" panose="02000009000000000000" pitchFamily="49" charset="0"/>
-                <a:ea typeface="JetBrains Mono" panose="02000009000000000000" pitchFamily="49" charset="0"/>
-                <a:cs typeface="JetBrains Mono" panose="02000009000000000000" pitchFamily="49" charset="0"/>
-              </a:rPr>
-              <a:t>jdkSets.cartesianProduct</a:t>
-            </a:r>
-            <a:r>
-              <a:rPr lang="en-US" sz="1400" dirty="0">
-                <a:solidFill>
-                  <a:srgbClr val="000000"/>
-                </a:solidFill>
-                <a:effectLst/>
-                <a:latin typeface="JetBrains Mono" panose="02000009000000000000" pitchFamily="49" charset="0"/>
-                <a:ea typeface="JetBrains Mono" panose="02000009000000000000" pitchFamily="49" charset="0"/>
-                <a:cs typeface="JetBrains Mono" panose="02000009000000000000" pitchFamily="49" charset="0"/>
-              </a:rPr>
-              <a:t>(</a:t>
-            </a:r>
-            <a:r>
-              <a:rPr lang="en-US" sz="1400" dirty="0" err="1">
-                <a:solidFill>
-                  <a:srgbClr val="000000"/>
-                </a:solidFill>
-                <a:effectLst/>
-                <a:latin typeface="JetBrains Mono" panose="02000009000000000000" pitchFamily="49" charset="0"/>
-                <a:ea typeface="JetBrains Mono" panose="02000009000000000000" pitchFamily="49" charset="0"/>
-                <a:cs typeface="JetBrains Mono" panose="02000009000000000000" pitchFamily="49" charset="0"/>
-              </a:rPr>
-              <a:t>ecSets</a:t>
-            </a:r>
-            <a:r>
-              <a:rPr lang="en-US" sz="1400" dirty="0">
-                <a:solidFill>
-                  <a:srgbClr val="000000"/>
-                </a:solidFill>
-                <a:effectLst/>
-                <a:latin typeface="JetBrains Mono" panose="02000009000000000000" pitchFamily="49" charset="0"/>
-                <a:ea typeface="JetBrains Mono" panose="02000009000000000000" pitchFamily="49" charset="0"/>
-                <a:cs typeface="JetBrains Mono" panose="02000009000000000000" pitchFamily="49" charset="0"/>
-              </a:rPr>
-              <a:t>)</a:t>
-            </a:r>
-            <a:br>
-              <a:rPr lang="en-US" sz="1400" dirty="0">
-                <a:solidFill>
-                  <a:srgbClr val="000000"/>
-                </a:solidFill>
-                <a:effectLst/>
-                <a:latin typeface="JetBrains Mono" panose="02000009000000000000" pitchFamily="49" charset="0"/>
-                <a:ea typeface="JetBrains Mono" panose="02000009000000000000" pitchFamily="49" charset="0"/>
-                <a:cs typeface="JetBrains Mono" panose="02000009000000000000" pitchFamily="49" charset="0"/>
-              </a:rPr>
-            </a:br>
-            <a:r>
-              <a:rPr lang="en-US" sz="1400" dirty="0">
-                <a:solidFill>
-                  <a:srgbClr val="000000"/>
-                </a:solidFill>
-                <a:effectLst/>
-                <a:latin typeface="JetBrains Mono" panose="02000009000000000000" pitchFamily="49" charset="0"/>
-                <a:ea typeface="JetBrains Mono" panose="02000009000000000000" pitchFamily="49" charset="0"/>
-                <a:cs typeface="JetBrains Mono" panose="02000009000000000000" pitchFamily="49" charset="0"/>
-              </a:rPr>
-              <a:t>            .</a:t>
-            </a:r>
-            <a:r>
-              <a:rPr lang="en-US" sz="1400" dirty="0" err="1">
-                <a:solidFill>
-                  <a:srgbClr val="000000"/>
-                </a:solidFill>
-                <a:effectLst/>
-                <a:latin typeface="JetBrains Mono" panose="02000009000000000000" pitchFamily="49" charset="0"/>
-                <a:ea typeface="JetBrains Mono" panose="02000009000000000000" pitchFamily="49" charset="0"/>
-                <a:cs typeface="JetBrains Mono" panose="02000009000000000000" pitchFamily="49" charset="0"/>
-              </a:rPr>
-              <a:t>forEach</a:t>
-            </a:r>
-            <a:r>
-              <a:rPr lang="en-US" sz="1400" dirty="0">
-                <a:solidFill>
-                  <a:srgbClr val="000000"/>
-                </a:solidFill>
-                <a:effectLst/>
-                <a:latin typeface="JetBrains Mono" panose="02000009000000000000" pitchFamily="49" charset="0"/>
-                <a:ea typeface="JetBrains Mono" panose="02000009000000000000" pitchFamily="49" charset="0"/>
-                <a:cs typeface="JetBrains Mono" panose="02000009000000000000" pitchFamily="49" charset="0"/>
-              </a:rPr>
-              <a:t>(</a:t>
-            </a:r>
-            <a:r>
-              <a:rPr lang="en-US" sz="1400" dirty="0">
-                <a:solidFill>
-                  <a:srgbClr val="009911"/>
-                </a:solidFill>
-                <a:effectLst/>
-                <a:latin typeface="JetBrains Mono" panose="02000009000000000000" pitchFamily="49" charset="0"/>
-                <a:ea typeface="JetBrains Mono" panose="02000009000000000000" pitchFamily="49" charset="0"/>
-                <a:cs typeface="JetBrains Mono" panose="02000009000000000000" pitchFamily="49" charset="0"/>
-              </a:rPr>
-              <a:t>pair </a:t>
-            </a:r>
-            <a:r>
-              <a:rPr lang="en-US" sz="1400" dirty="0">
-                <a:solidFill>
-                  <a:srgbClr val="000000"/>
-                </a:solidFill>
-                <a:effectLst/>
-                <a:latin typeface="JetBrains Mono" panose="02000009000000000000" pitchFamily="49" charset="0"/>
-                <a:ea typeface="JetBrains Mono" panose="02000009000000000000" pitchFamily="49" charset="0"/>
-                <a:cs typeface="JetBrains Mono" panose="02000009000000000000" pitchFamily="49" charset="0"/>
-              </a:rPr>
-              <a:t>-&gt; </a:t>
-            </a:r>
-            <a:r>
-              <a:rPr lang="en-US" sz="1400" i="1" dirty="0" err="1">
-                <a:solidFill>
-                  <a:srgbClr val="000000"/>
-                </a:solidFill>
-                <a:effectLst/>
-                <a:latin typeface="JetBrains Mono" panose="02000009000000000000" pitchFamily="49" charset="0"/>
-                <a:ea typeface="JetBrains Mono" panose="02000009000000000000" pitchFamily="49" charset="0"/>
-                <a:cs typeface="JetBrains Mono" panose="02000009000000000000" pitchFamily="49" charset="0"/>
-              </a:rPr>
-              <a:t>assertEquals</a:t>
-            </a:r>
-            <a:r>
-              <a:rPr lang="en-US" sz="1400" dirty="0">
-                <a:solidFill>
-                  <a:srgbClr val="000000"/>
-                </a:solidFill>
-                <a:effectLst/>
-                <a:latin typeface="JetBrains Mono" panose="02000009000000000000" pitchFamily="49" charset="0"/>
-                <a:ea typeface="JetBrains Mono" panose="02000009000000000000" pitchFamily="49" charset="0"/>
-                <a:cs typeface="JetBrains Mono" panose="02000009000000000000" pitchFamily="49" charset="0"/>
-              </a:rPr>
-              <a:t>(</a:t>
-            </a:r>
-            <a:r>
-              <a:rPr lang="en-US" sz="1400" dirty="0" err="1">
-                <a:solidFill>
-                  <a:srgbClr val="009911"/>
-                </a:solidFill>
-                <a:effectLst/>
-                <a:latin typeface="JetBrains Mono" panose="02000009000000000000" pitchFamily="49" charset="0"/>
-                <a:ea typeface="JetBrains Mono" panose="02000009000000000000" pitchFamily="49" charset="0"/>
-                <a:cs typeface="JetBrains Mono" panose="02000009000000000000" pitchFamily="49" charset="0"/>
-              </a:rPr>
-              <a:t>pair</a:t>
-            </a:r>
-            <a:r>
-              <a:rPr lang="en-US" sz="1400" dirty="0" err="1">
-                <a:solidFill>
-                  <a:srgbClr val="000000"/>
-                </a:solidFill>
-                <a:effectLst/>
-                <a:latin typeface="JetBrains Mono" panose="02000009000000000000" pitchFamily="49" charset="0"/>
-                <a:ea typeface="JetBrains Mono" panose="02000009000000000000" pitchFamily="49" charset="0"/>
-                <a:cs typeface="JetBrains Mono" panose="02000009000000000000" pitchFamily="49" charset="0"/>
-              </a:rPr>
-              <a:t>.getOne</a:t>
-            </a:r>
-            <a:r>
-              <a:rPr lang="en-US" sz="1400" dirty="0">
-                <a:solidFill>
-                  <a:srgbClr val="000000"/>
-                </a:solidFill>
-                <a:effectLst/>
-                <a:latin typeface="JetBrains Mono" panose="02000009000000000000" pitchFamily="49" charset="0"/>
-                <a:ea typeface="JetBrains Mono" panose="02000009000000000000" pitchFamily="49" charset="0"/>
-                <a:cs typeface="JetBrains Mono" panose="02000009000000000000" pitchFamily="49" charset="0"/>
-              </a:rPr>
-              <a:t>(), </a:t>
-            </a:r>
-            <a:r>
-              <a:rPr lang="en-US" sz="1400" dirty="0" err="1">
-                <a:solidFill>
-                  <a:srgbClr val="009911"/>
-                </a:solidFill>
-                <a:effectLst/>
-                <a:latin typeface="JetBrains Mono" panose="02000009000000000000" pitchFamily="49" charset="0"/>
-                <a:ea typeface="JetBrains Mono" panose="02000009000000000000" pitchFamily="49" charset="0"/>
-                <a:cs typeface="JetBrains Mono" panose="02000009000000000000" pitchFamily="49" charset="0"/>
-              </a:rPr>
-              <a:t>pair</a:t>
-            </a:r>
-            <a:r>
-              <a:rPr lang="en-US" sz="1400" dirty="0" err="1">
-                <a:solidFill>
-                  <a:srgbClr val="000000"/>
-                </a:solidFill>
-                <a:effectLst/>
-                <a:latin typeface="JetBrains Mono" panose="02000009000000000000" pitchFamily="49" charset="0"/>
-                <a:ea typeface="JetBrains Mono" panose="02000009000000000000" pitchFamily="49" charset="0"/>
-                <a:cs typeface="JetBrains Mono" panose="02000009000000000000" pitchFamily="49" charset="0"/>
-              </a:rPr>
-              <a:t>.getTwo</a:t>
-            </a:r>
-            <a:r>
-              <a:rPr lang="en-US" sz="1400" dirty="0">
-                <a:solidFill>
-                  <a:srgbClr val="000000"/>
-                </a:solidFill>
-                <a:effectLst/>
-                <a:latin typeface="JetBrains Mono" panose="02000009000000000000" pitchFamily="49" charset="0"/>
-                <a:ea typeface="JetBrains Mono" panose="02000009000000000000" pitchFamily="49" charset="0"/>
-                <a:cs typeface="JetBrains Mono" panose="02000009000000000000" pitchFamily="49" charset="0"/>
-              </a:rPr>
-              <a:t>()));</a:t>
-            </a:r>
-            <a:br>
-              <a:rPr lang="en-US" sz="1400" dirty="0">
-                <a:solidFill>
-                  <a:srgbClr val="000000"/>
-                </a:solidFill>
-                <a:effectLst/>
-                <a:latin typeface="JetBrains Mono" panose="02000009000000000000" pitchFamily="49" charset="0"/>
-                <a:ea typeface="JetBrains Mono" panose="02000009000000000000" pitchFamily="49" charset="0"/>
-                <a:cs typeface="JetBrains Mono" panose="02000009000000000000" pitchFamily="49" charset="0"/>
-              </a:rPr>
-            </a:br>
-            <a:r>
-              <a:rPr lang="en-US" sz="1400" dirty="0">
-                <a:solidFill>
-                  <a:srgbClr val="000000"/>
-                </a:solidFill>
-                <a:effectLst/>
-                <a:latin typeface="JetBrains Mono" panose="02000009000000000000" pitchFamily="49" charset="0"/>
-                <a:ea typeface="JetBrains Mono" panose="02000009000000000000" pitchFamily="49" charset="0"/>
-                <a:cs typeface="JetBrains Mono" panose="02000009000000000000" pitchFamily="49" charset="0"/>
-              </a:rPr>
-              <a:t>}</a:t>
+              <a:rPr lang="en-US" dirty="0"/>
+              <a:t>Start</a:t>
             </a:r>
           </a:p>
         </p:txBody>
       </p:sp>
       <p:sp>
         <p:nvSpPr>
-          <p:cNvPr id="4" name="TextBox 3">
+          <p:cNvPr id="56" name="Oval 55">
             <a:extLst>
               <a:ext uri="{FF2B5EF4-FFF2-40B4-BE49-F238E27FC236}">
-                <a16:creationId xmlns:a16="http://schemas.microsoft.com/office/drawing/2014/main" id="{5C06906A-E138-4DEF-1058-A158B4B49AE5}"/>
+                <a16:creationId xmlns:a16="http://schemas.microsoft.com/office/drawing/2014/main" id="{B411F28A-C79D-029D-FE04-A477E9D91E9F}"/>
+              </a:ext>
+            </a:extLst>
+          </p:cNvPr>
+          <p:cNvSpPr/>
+          <p:nvPr/>
+        </p:nvSpPr>
+        <p:spPr>
+          <a:xfrm>
+            <a:off x="5730240" y="4573681"/>
+            <a:ext cx="731520" cy="731520"/>
+          </a:xfrm>
+          <a:prstGeom prst="ellipse">
+            <a:avLst/>
+          </a:prstGeom>
+          <a:solidFill>
+            <a:schemeClr val="accent6">
+              <a:lumMod val="50000"/>
+            </a:schemeClr>
+          </a:solidFill>
+          <a:ln>
+            <a:noFill/>
+          </a:ln>
+        </p:spPr>
+        <p:style>
+          <a:lnRef idx="2">
+            <a:schemeClr val="accent1">
+              <a:shade val="15000"/>
+            </a:schemeClr>
+          </a:lnRef>
+          <a:fillRef idx="1">
+            <a:schemeClr val="accent1"/>
+          </a:fillRef>
+          <a:effectRef idx="0">
+            <a:schemeClr val="accent1"/>
+          </a:effectRef>
+          <a:fontRef idx="minor">
+            <a:schemeClr val="lt1"/>
+          </a:fontRef>
+        </p:style>
+        <p:txBody>
+          <a:bodyPr wrap="none" lIns="0" rIns="0" rtlCol="0" anchor="ctr"/>
+          <a:lstStyle/>
+          <a:p>
+            <a:pPr algn="ctr"/>
+            <a:r>
+              <a:rPr lang="en-US" dirty="0"/>
+              <a:t>Step</a:t>
+            </a:r>
+            <a:br>
+              <a:rPr lang="en-US" dirty="0"/>
+            </a:br>
+            <a:r>
+              <a:rPr lang="en-US" dirty="0"/>
+              <a:t>1</a:t>
+            </a:r>
+          </a:p>
+        </p:txBody>
+      </p:sp>
+      <p:sp>
+        <p:nvSpPr>
+          <p:cNvPr id="57" name="Oval 56">
+            <a:extLst>
+              <a:ext uri="{FF2B5EF4-FFF2-40B4-BE49-F238E27FC236}">
+                <a16:creationId xmlns:a16="http://schemas.microsoft.com/office/drawing/2014/main" id="{FCE8453F-24E6-0DF4-E2AC-4B45AAD212FD}"/>
+              </a:ext>
+            </a:extLst>
+          </p:cNvPr>
+          <p:cNvSpPr/>
+          <p:nvPr/>
+        </p:nvSpPr>
+        <p:spPr>
+          <a:xfrm>
+            <a:off x="5730240" y="5610056"/>
+            <a:ext cx="731520" cy="731520"/>
+          </a:xfrm>
+          <a:prstGeom prst="ellipse">
+            <a:avLst/>
+          </a:prstGeom>
+          <a:solidFill>
+            <a:schemeClr val="accent6">
+              <a:lumMod val="50000"/>
+            </a:schemeClr>
+          </a:solidFill>
+          <a:ln>
+            <a:noFill/>
+          </a:ln>
+        </p:spPr>
+        <p:style>
+          <a:lnRef idx="2">
+            <a:schemeClr val="accent1">
+              <a:shade val="15000"/>
+            </a:schemeClr>
+          </a:lnRef>
+          <a:fillRef idx="1">
+            <a:schemeClr val="accent1"/>
+          </a:fillRef>
+          <a:effectRef idx="0">
+            <a:schemeClr val="accent1"/>
+          </a:effectRef>
+          <a:fontRef idx="minor">
+            <a:schemeClr val="lt1"/>
+          </a:fontRef>
+        </p:style>
+        <p:txBody>
+          <a:bodyPr wrap="none" lIns="0" rIns="0" rtlCol="0" anchor="ctr"/>
+          <a:lstStyle/>
+          <a:p>
+            <a:pPr algn="ctr"/>
+            <a:r>
+              <a:rPr lang="en-US" dirty="0"/>
+              <a:t>Step</a:t>
+            </a:r>
+            <a:br>
+              <a:rPr lang="en-US" dirty="0"/>
+            </a:br>
+            <a:r>
+              <a:rPr lang="en-US" dirty="0"/>
+              <a:t>2</a:t>
+            </a:r>
+          </a:p>
+        </p:txBody>
+      </p:sp>
+      <p:cxnSp>
+        <p:nvCxnSpPr>
+          <p:cNvPr id="58" name="Straight Arrow Connector 7">
+            <a:extLst>
+              <a:ext uri="{FF2B5EF4-FFF2-40B4-BE49-F238E27FC236}">
+                <a16:creationId xmlns:a16="http://schemas.microsoft.com/office/drawing/2014/main" id="{B4B6569C-FBD8-4402-3A7F-30D5F46CE1D0}"/>
+              </a:ext>
+            </a:extLst>
+          </p:cNvPr>
+          <p:cNvCxnSpPr>
+            <a:cxnSpLocks/>
+            <a:stCxn id="55" idx="4"/>
+            <a:endCxn id="56" idx="0"/>
+          </p:cNvCxnSpPr>
+          <p:nvPr/>
+        </p:nvCxnSpPr>
+        <p:spPr>
+          <a:xfrm>
+            <a:off x="6096000" y="4272268"/>
+            <a:ext cx="0" cy="301413"/>
+          </a:xfrm>
+          <a:prstGeom prst="straightConnector1">
+            <a:avLst/>
+          </a:prstGeom>
+          <a:ln>
+            <a:solidFill>
+              <a:schemeClr val="accent6">
+                <a:lumMod val="50000"/>
+              </a:schemeClr>
+            </a:solidFill>
+            <a:tailEnd type="arrow" w="lg" len="lg"/>
+          </a:ln>
+        </p:spPr>
+        <p:style>
+          <a:lnRef idx="2">
+            <a:schemeClr val="accent1"/>
+          </a:lnRef>
+          <a:fillRef idx="0">
+            <a:schemeClr val="accent1"/>
+          </a:fillRef>
+          <a:effectRef idx="1">
+            <a:schemeClr val="accent1"/>
+          </a:effectRef>
+          <a:fontRef idx="minor">
+            <a:schemeClr val="tx1"/>
+          </a:fontRef>
+        </p:style>
+      </p:cxnSp>
+      <p:cxnSp>
+        <p:nvCxnSpPr>
+          <p:cNvPr id="61" name="Straight Arrow Connector 7">
+            <a:extLst>
+              <a:ext uri="{FF2B5EF4-FFF2-40B4-BE49-F238E27FC236}">
+                <a16:creationId xmlns:a16="http://schemas.microsoft.com/office/drawing/2014/main" id="{5FA79BAF-0A55-B427-FC5A-5D046BA0258F}"/>
+              </a:ext>
+            </a:extLst>
+          </p:cNvPr>
+          <p:cNvCxnSpPr>
+            <a:cxnSpLocks/>
+            <a:stCxn id="56" idx="4"/>
+            <a:endCxn id="57" idx="0"/>
+          </p:cNvCxnSpPr>
+          <p:nvPr/>
+        </p:nvCxnSpPr>
+        <p:spPr>
+          <a:xfrm>
+            <a:off x="6096000" y="5305201"/>
+            <a:ext cx="0" cy="304855"/>
+          </a:xfrm>
+          <a:prstGeom prst="straightConnector1">
+            <a:avLst/>
+          </a:prstGeom>
+          <a:ln>
+            <a:solidFill>
+              <a:schemeClr val="accent6">
+                <a:lumMod val="50000"/>
+              </a:schemeClr>
+            </a:solidFill>
+            <a:tailEnd type="arrow" w="lg" len="lg"/>
+          </a:ln>
+        </p:spPr>
+        <p:style>
+          <a:lnRef idx="2">
+            <a:schemeClr val="accent1"/>
+          </a:lnRef>
+          <a:fillRef idx="0">
+            <a:schemeClr val="accent1"/>
+          </a:fillRef>
+          <a:effectRef idx="1">
+            <a:schemeClr val="accent1"/>
+          </a:effectRef>
+          <a:fontRef idx="minor">
+            <a:schemeClr val="tx1"/>
+          </a:fontRef>
+        </p:style>
+      </p:cxnSp>
+      <p:sp>
+        <p:nvSpPr>
+          <p:cNvPr id="65" name="TextBox 64">
+            <a:extLst>
+              <a:ext uri="{FF2B5EF4-FFF2-40B4-BE49-F238E27FC236}">
+                <a16:creationId xmlns:a16="http://schemas.microsoft.com/office/drawing/2014/main" id="{112DA848-C6D3-FBE2-0169-BBB99D7F1A01}"/>
               </a:ext>
             </a:extLst>
           </p:cNvPr>
@@ -19309,7 +21275,7 @@
     </p:spTree>
     <p:extLst>
       <p:ext uri="{BB962C8B-B14F-4D97-AF65-F5344CB8AC3E}">
-        <p14:creationId xmlns:p14="http://schemas.microsoft.com/office/powerpoint/2010/main" val="2861380186"/>
+        <p14:creationId xmlns:p14="http://schemas.microsoft.com/office/powerpoint/2010/main" val="4155907964"/>
       </p:ext>
     </p:extLst>
   </p:cSld>
@@ -19443,7 +21409,7 @@
           </a:ln>
           <a:extLst>
             <a:ext uri="{C572A759-6A51-4108-AA02-DFA0A04FC94B}">
-              <ma14:wrappingTextBoxFlag xmlns:lc="http://schemas.openxmlformats.org/drawingml/2006/lockedCanvas" xmlns="" xmlns:m="http://schemas.openxmlformats.org/officeDocument/2006/math" xmlns:a14="http://schemas.microsoft.com/office/drawing/2010/main" xmlns:ma14="http://schemas.microsoft.com/office/mac/drawingml/2011/main" val="1"/>
+              <ma14:wrappingTextBoxFlag xmlns:ma14="http://schemas.microsoft.com/office/mac/drawingml/2011/main" xmlns:a14="http://schemas.microsoft.com/office/drawing/2010/main" xmlns:m="http://schemas.openxmlformats.org/officeDocument/2006/math" xmlns="" xmlns:lc="http://schemas.openxmlformats.org/drawingml/2006/lockedCanvas" val="1"/>
             </a:ext>
           </a:extLst>
         </p:spPr>
@@ -19811,7 +21777,7 @@
           </a:ln>
           <a:extLst>
             <a:ext uri="{C572A759-6A51-4108-AA02-DFA0A04FC94B}">
-              <ma14:wrappingTextBoxFlag xmlns:lc="http://schemas.openxmlformats.org/drawingml/2006/lockedCanvas" xmlns="" xmlns:m="http://schemas.openxmlformats.org/officeDocument/2006/math" xmlns:a14="http://schemas.microsoft.com/office/drawing/2010/main" xmlns:ma14="http://schemas.microsoft.com/office/mac/drawingml/2011/main" val="1"/>
+              <ma14:wrappingTextBoxFlag xmlns:ma14="http://schemas.microsoft.com/office/mac/drawingml/2011/main" xmlns:a14="http://schemas.microsoft.com/office/drawing/2010/main" xmlns:m="http://schemas.openxmlformats.org/officeDocument/2006/math" xmlns="" xmlns:lc="http://schemas.openxmlformats.org/drawingml/2006/lockedCanvas" val="1"/>
             </a:ext>
           </a:extLst>
         </p:spPr>
@@ -20178,7 +22144,7 @@
           </a:ln>
           <a:extLst>
             <a:ext uri="{C572A759-6A51-4108-AA02-DFA0A04FC94B}">
-              <ma14:wrappingTextBoxFlag xmlns:lc="http://schemas.openxmlformats.org/drawingml/2006/lockedCanvas" xmlns="" xmlns:m="http://schemas.openxmlformats.org/officeDocument/2006/math" xmlns:a14="http://schemas.microsoft.com/office/drawing/2010/main" xmlns:ma14="http://schemas.microsoft.com/office/mac/drawingml/2011/main" val="1"/>
+              <ma14:wrappingTextBoxFlag xmlns:ma14="http://schemas.microsoft.com/office/mac/drawingml/2011/main" xmlns:a14="http://schemas.microsoft.com/office/drawing/2010/main" xmlns:m="http://schemas.openxmlformats.org/officeDocument/2006/math" xmlns="" xmlns:lc="http://schemas.openxmlformats.org/drawingml/2006/lockedCanvas" val="1"/>
             </a:ext>
           </a:extLst>
         </p:spPr>
@@ -20535,7 +22501,7 @@
           </a:ln>
           <a:extLst>
             <a:ext uri="{C572A759-6A51-4108-AA02-DFA0A04FC94B}">
-              <ma14:wrappingTextBoxFlag xmlns:lc="http://schemas.openxmlformats.org/drawingml/2006/lockedCanvas" xmlns="" xmlns:m="http://schemas.openxmlformats.org/officeDocument/2006/math" xmlns:a14="http://schemas.microsoft.com/office/drawing/2010/main" xmlns:ma14="http://schemas.microsoft.com/office/mac/drawingml/2011/main" val="1"/>
+              <ma14:wrappingTextBoxFlag xmlns:ma14="http://schemas.microsoft.com/office/mac/drawingml/2011/main" xmlns:a14="http://schemas.microsoft.com/office/drawing/2010/main" xmlns:m="http://schemas.openxmlformats.org/officeDocument/2006/math" xmlns="" xmlns:lc="http://schemas.openxmlformats.org/drawingml/2006/lockedCanvas" val="1"/>
             </a:ext>
           </a:extLst>
         </p:spPr>
@@ -20884,7 +22850,7 @@
           </a:ln>
           <a:extLst>
             <a:ext uri="{C572A759-6A51-4108-AA02-DFA0A04FC94B}">
-              <ma14:wrappingTextBoxFlag xmlns:lc="http://schemas.openxmlformats.org/drawingml/2006/lockedCanvas" xmlns="" xmlns:m="http://schemas.openxmlformats.org/officeDocument/2006/math" xmlns:a14="http://schemas.microsoft.com/office/drawing/2010/main" xmlns:ma14="http://schemas.microsoft.com/office/mac/drawingml/2011/main" val="1"/>
+              <ma14:wrappingTextBoxFlag xmlns:ma14="http://schemas.microsoft.com/office/mac/drawingml/2011/main" xmlns:a14="http://schemas.microsoft.com/office/drawing/2010/main" xmlns:m="http://schemas.openxmlformats.org/officeDocument/2006/math" xmlns="" xmlns:lc="http://schemas.openxmlformats.org/drawingml/2006/lockedCanvas" val="1"/>
             </a:ext>
           </a:extLst>
         </p:spPr>
@@ -21241,7 +23207,7 @@
           </a:ln>
           <a:extLst>
             <a:ext uri="{C572A759-6A51-4108-AA02-DFA0A04FC94B}">
-              <ma14:wrappingTextBoxFlag xmlns:lc="http://schemas.openxmlformats.org/drawingml/2006/lockedCanvas" xmlns="" xmlns:m="http://schemas.openxmlformats.org/officeDocument/2006/math" xmlns:a14="http://schemas.microsoft.com/office/drawing/2010/main" xmlns:ma14="http://schemas.microsoft.com/office/mac/drawingml/2011/main" val="1"/>
+              <ma14:wrappingTextBoxFlag xmlns:ma14="http://schemas.microsoft.com/office/mac/drawingml/2011/main" xmlns:a14="http://schemas.microsoft.com/office/drawing/2010/main" xmlns:m="http://schemas.openxmlformats.org/officeDocument/2006/math" xmlns="" xmlns:lc="http://schemas.openxmlformats.org/drawingml/2006/lockedCanvas" val="1"/>
             </a:ext>
           </a:extLst>
         </p:spPr>
@@ -21590,7 +23556,7 @@
           </a:ln>
           <a:extLst>
             <a:ext uri="{C572A759-6A51-4108-AA02-DFA0A04FC94B}">
-              <ma14:wrappingTextBoxFlag xmlns:lc="http://schemas.openxmlformats.org/drawingml/2006/lockedCanvas" xmlns="" xmlns:m="http://schemas.openxmlformats.org/officeDocument/2006/math" xmlns:a14="http://schemas.microsoft.com/office/drawing/2010/main" xmlns:ma14="http://schemas.microsoft.com/office/mac/drawingml/2011/main" val="1"/>
+              <ma14:wrappingTextBoxFlag xmlns:ma14="http://schemas.microsoft.com/office/mac/drawingml/2011/main" xmlns:a14="http://schemas.microsoft.com/office/drawing/2010/main" xmlns:m="http://schemas.openxmlformats.org/officeDocument/2006/math" xmlns="" xmlns:lc="http://schemas.openxmlformats.org/drawingml/2006/lockedCanvas" val="1"/>
             </a:ext>
           </a:extLst>
         </p:spPr>
@@ -21954,7 +23920,7 @@
           </a:ln>
           <a:extLst>
             <a:ext uri="{C572A759-6A51-4108-AA02-DFA0A04FC94B}">
-              <ma14:wrappingTextBoxFlag xmlns:lc="http://schemas.openxmlformats.org/drawingml/2006/lockedCanvas" xmlns="" xmlns:m="http://schemas.openxmlformats.org/officeDocument/2006/math" xmlns:a14="http://schemas.microsoft.com/office/drawing/2010/main" xmlns:ma14="http://schemas.microsoft.com/office/mac/drawingml/2011/main" val="1"/>
+              <ma14:wrappingTextBoxFlag xmlns:ma14="http://schemas.microsoft.com/office/mac/drawingml/2011/main" xmlns:a14="http://schemas.microsoft.com/office/drawing/2010/main" xmlns:m="http://schemas.openxmlformats.org/officeDocument/2006/math" xmlns="" xmlns:lc="http://schemas.openxmlformats.org/drawingml/2006/lockedCanvas" val="1"/>
             </a:ext>
           </a:extLst>
         </p:spPr>
@@ -22293,7 +24259,7 @@
           </a:ln>
           <a:extLst>
             <a:ext uri="{C572A759-6A51-4108-AA02-DFA0A04FC94B}">
-              <ma14:wrappingTextBoxFlag xmlns:lc="http://schemas.openxmlformats.org/drawingml/2006/lockedCanvas" xmlns="" xmlns:m="http://schemas.openxmlformats.org/officeDocument/2006/math" xmlns:a14="http://schemas.microsoft.com/office/drawing/2010/main" xmlns:ma14="http://schemas.microsoft.com/office/mac/drawingml/2011/main" val="1"/>
+              <ma14:wrappingTextBoxFlag xmlns:ma14="http://schemas.microsoft.com/office/mac/drawingml/2011/main" xmlns:a14="http://schemas.microsoft.com/office/drawing/2010/main" xmlns:m="http://schemas.openxmlformats.org/officeDocument/2006/math" xmlns="" xmlns:lc="http://schemas.openxmlformats.org/drawingml/2006/lockedCanvas" val="1"/>
             </a:ext>
           </a:extLst>
         </p:spPr>
@@ -22632,7 +24598,7 @@
           </a:ln>
           <a:extLst>
             <a:ext uri="{C572A759-6A51-4108-AA02-DFA0A04FC94B}">
-              <ma14:wrappingTextBoxFlag xmlns:lc="http://schemas.openxmlformats.org/drawingml/2006/lockedCanvas" xmlns="" xmlns:m="http://schemas.openxmlformats.org/officeDocument/2006/math" xmlns:a14="http://schemas.microsoft.com/office/drawing/2010/main" xmlns:ma14="http://schemas.microsoft.com/office/mac/drawingml/2011/main" val="1"/>
+              <ma14:wrappingTextBoxFlag xmlns:ma14="http://schemas.microsoft.com/office/mac/drawingml/2011/main" xmlns:a14="http://schemas.microsoft.com/office/drawing/2010/main" xmlns:m="http://schemas.openxmlformats.org/officeDocument/2006/math" xmlns="" xmlns:lc="http://schemas.openxmlformats.org/drawingml/2006/lockedCanvas" val="1"/>
             </a:ext>
           </a:extLst>
         </p:spPr>
@@ -22971,7 +24937,7 @@
           </a:ln>
           <a:extLst>
             <a:ext uri="{C572A759-6A51-4108-AA02-DFA0A04FC94B}">
-              <ma14:wrappingTextBoxFlag xmlns:lc="http://schemas.openxmlformats.org/drawingml/2006/lockedCanvas" xmlns="" xmlns:m="http://schemas.openxmlformats.org/officeDocument/2006/math" xmlns:a14="http://schemas.microsoft.com/office/drawing/2010/main" xmlns:ma14="http://schemas.microsoft.com/office/mac/drawingml/2011/main" val="1"/>
+              <ma14:wrappingTextBoxFlag xmlns:ma14="http://schemas.microsoft.com/office/mac/drawingml/2011/main" xmlns:a14="http://schemas.microsoft.com/office/drawing/2010/main" xmlns:m="http://schemas.openxmlformats.org/officeDocument/2006/math" xmlns="" xmlns:lc="http://schemas.openxmlformats.org/drawingml/2006/lockedCanvas" val="1"/>
             </a:ext>
           </a:extLst>
         </p:spPr>
@@ -23340,7 +25306,7 @@
           </a:ln>
           <a:extLst>
             <a:ext uri="{C572A759-6A51-4108-AA02-DFA0A04FC94B}">
-              <ma14:wrappingTextBoxFlag xmlns:lc="http://schemas.openxmlformats.org/drawingml/2006/lockedCanvas" xmlns="" xmlns:m="http://schemas.openxmlformats.org/officeDocument/2006/math" xmlns:a14="http://schemas.microsoft.com/office/drawing/2010/main" xmlns:ma14="http://schemas.microsoft.com/office/mac/drawingml/2011/main" val="1"/>
+              <ma14:wrappingTextBoxFlag xmlns:ma14="http://schemas.microsoft.com/office/mac/drawingml/2011/main" xmlns:a14="http://schemas.microsoft.com/office/drawing/2010/main" xmlns:m="http://schemas.openxmlformats.org/officeDocument/2006/math" xmlns="" xmlns:lc="http://schemas.openxmlformats.org/drawingml/2006/lockedCanvas" val="1"/>
             </a:ext>
           </a:extLst>
         </p:spPr>
@@ -23697,7 +25663,7 @@
           </a:ln>
           <a:extLst>
             <a:ext uri="{C572A759-6A51-4108-AA02-DFA0A04FC94B}">
-              <ma14:wrappingTextBoxFlag xmlns:lc="http://schemas.openxmlformats.org/drawingml/2006/lockedCanvas" xmlns="" xmlns:m="http://schemas.openxmlformats.org/officeDocument/2006/math" xmlns:a14="http://schemas.microsoft.com/office/drawing/2010/main" xmlns:ma14="http://schemas.microsoft.com/office/mac/drawingml/2011/main" val="1"/>
+              <ma14:wrappingTextBoxFlag xmlns:ma14="http://schemas.microsoft.com/office/mac/drawingml/2011/main" xmlns:a14="http://schemas.microsoft.com/office/drawing/2010/main" xmlns:m="http://schemas.openxmlformats.org/officeDocument/2006/math" xmlns="" xmlns:lc="http://schemas.openxmlformats.org/drawingml/2006/lockedCanvas" val="1"/>
             </a:ext>
           </a:extLst>
         </p:spPr>
@@ -24036,7 +26002,7 @@
           </a:ln>
           <a:extLst>
             <a:ext uri="{C572A759-6A51-4108-AA02-DFA0A04FC94B}">
-              <ma14:wrappingTextBoxFlag xmlns:lc="http://schemas.openxmlformats.org/drawingml/2006/lockedCanvas" xmlns="" xmlns:m="http://schemas.openxmlformats.org/officeDocument/2006/math" xmlns:a14="http://schemas.microsoft.com/office/drawing/2010/main" xmlns:ma14="http://schemas.microsoft.com/office/mac/drawingml/2011/main" val="1"/>
+              <ma14:wrappingTextBoxFlag xmlns:ma14="http://schemas.microsoft.com/office/mac/drawingml/2011/main" xmlns:a14="http://schemas.microsoft.com/office/drawing/2010/main" xmlns:m="http://schemas.openxmlformats.org/officeDocument/2006/math" xmlns="" xmlns:lc="http://schemas.openxmlformats.org/drawingml/2006/lockedCanvas" val="1"/>
             </a:ext>
           </a:extLst>
         </p:spPr>
@@ -24375,7 +26341,7 @@
           </a:ln>
           <a:extLst>
             <a:ext uri="{C572A759-6A51-4108-AA02-DFA0A04FC94B}">
-              <ma14:wrappingTextBoxFlag xmlns:lc="http://schemas.openxmlformats.org/drawingml/2006/lockedCanvas" xmlns="" xmlns:m="http://schemas.openxmlformats.org/officeDocument/2006/math" xmlns:a14="http://schemas.microsoft.com/office/drawing/2010/main" xmlns:ma14="http://schemas.microsoft.com/office/mac/drawingml/2011/main" val="1"/>
+              <ma14:wrappingTextBoxFlag xmlns:ma14="http://schemas.microsoft.com/office/mac/drawingml/2011/main" xmlns:a14="http://schemas.microsoft.com/office/drawing/2010/main" xmlns:m="http://schemas.openxmlformats.org/officeDocument/2006/math" xmlns="" xmlns:lc="http://schemas.openxmlformats.org/drawingml/2006/lockedCanvas" val="1"/>
             </a:ext>
           </a:extLst>
         </p:spPr>
@@ -24717,7 +26683,7 @@
           </a:ln>
           <a:extLst>
             <a:ext uri="{C572A759-6A51-4108-AA02-DFA0A04FC94B}">
-              <ma14:wrappingTextBoxFlag xmlns:lc="http://schemas.openxmlformats.org/drawingml/2006/lockedCanvas" xmlns="" xmlns:m="http://schemas.openxmlformats.org/officeDocument/2006/math" xmlns:a14="http://schemas.microsoft.com/office/drawing/2010/main" xmlns:ma14="http://schemas.microsoft.com/office/mac/drawingml/2011/main" val="1"/>
+              <ma14:wrappingTextBoxFlag xmlns:ma14="http://schemas.microsoft.com/office/mac/drawingml/2011/main" xmlns:a14="http://schemas.microsoft.com/office/drawing/2010/main" xmlns:m="http://schemas.openxmlformats.org/officeDocument/2006/math" xmlns="" xmlns:lc="http://schemas.openxmlformats.org/drawingml/2006/lockedCanvas" val="1"/>
             </a:ext>
           </a:extLst>
         </p:spPr>
@@ -25758,7 +27724,7 @@
           </a:ln>
           <a:extLst>
             <a:ext uri="{C572A759-6A51-4108-AA02-DFA0A04FC94B}">
-              <ma14:wrappingTextBoxFlag xmlns:lc="http://schemas.openxmlformats.org/drawingml/2006/lockedCanvas" xmlns="" xmlns:m="http://schemas.openxmlformats.org/officeDocument/2006/math" xmlns:a14="http://schemas.microsoft.com/office/drawing/2010/main" xmlns:ma14="http://schemas.microsoft.com/office/mac/drawingml/2011/main" val="1"/>
+              <ma14:wrappingTextBoxFlag xmlns:ma14="http://schemas.microsoft.com/office/mac/drawingml/2011/main" xmlns:a14="http://schemas.microsoft.com/office/drawing/2010/main" xmlns:m="http://schemas.openxmlformats.org/officeDocument/2006/math" xmlns="" xmlns:lc="http://schemas.openxmlformats.org/drawingml/2006/lockedCanvas" val="1"/>
             </a:ext>
           </a:extLst>
         </p:spPr>
@@ -26115,7 +28081,7 @@
           </a:ln>
           <a:extLst>
             <a:ext uri="{C572A759-6A51-4108-AA02-DFA0A04FC94B}">
-              <ma14:wrappingTextBoxFlag xmlns:lc="http://schemas.openxmlformats.org/drawingml/2006/lockedCanvas" xmlns="" xmlns:m="http://schemas.openxmlformats.org/officeDocument/2006/math" xmlns:a14="http://schemas.microsoft.com/office/drawing/2010/main" xmlns:ma14="http://schemas.microsoft.com/office/mac/drawingml/2011/main" val="1"/>
+              <ma14:wrappingTextBoxFlag xmlns:ma14="http://schemas.microsoft.com/office/mac/drawingml/2011/main" xmlns:a14="http://schemas.microsoft.com/office/drawing/2010/main" xmlns:m="http://schemas.openxmlformats.org/officeDocument/2006/math" xmlns="" xmlns:lc="http://schemas.openxmlformats.org/drawingml/2006/lockedCanvas" val="1"/>
             </a:ext>
           </a:extLst>
         </p:spPr>
@@ -26669,7 +28635,7 @@
               <a:effectLst/>
               <a:extLst>
                 <a:ext uri="{C572A759-6A51-4108-AA02-DFA0A04FC94B}">
-                  <ma14:wrappingTextBoxFlag xmlns="" xmlns:ma14="http://schemas.microsoft.com/office/mac/drawingml/2011/main" val="1"/>
+                  <ma14:wrappingTextBoxFlag xmlns:ma14="http://schemas.microsoft.com/office/mac/drawingml/2011/main" xmlns="" val="1"/>
                 </a:ext>
               </a:extLst>
             </p:spPr>
@@ -26720,7 +28686,7 @@
             <a:effectLst/>
             <a:extLst>
               <a:ext uri="{C572A759-6A51-4108-AA02-DFA0A04FC94B}">
-                <ma14:wrappingTextBoxFlag xmlns="" xmlns:ma14="http://schemas.microsoft.com/office/mac/drawingml/2011/main" val="1"/>
+                <ma14:wrappingTextBoxFlag xmlns:ma14="http://schemas.microsoft.com/office/mac/drawingml/2011/main" xmlns="" val="1"/>
               </a:ext>
             </a:extLst>
           </p:spPr>
@@ -26943,7 +28909,7 @@
               <a:effectLst/>
               <a:extLst>
                 <a:ext uri="{C572A759-6A51-4108-AA02-DFA0A04FC94B}">
-                  <ma14:wrappingTextBoxFlag xmlns="" xmlns:ma14="http://schemas.microsoft.com/office/mac/drawingml/2011/main" val="1"/>
+                  <ma14:wrappingTextBoxFlag xmlns:ma14="http://schemas.microsoft.com/office/mac/drawingml/2011/main" xmlns="" val="1"/>
                 </a:ext>
               </a:extLst>
             </p:spPr>
@@ -26994,7 +28960,7 @@
             <a:effectLst/>
             <a:extLst>
               <a:ext uri="{C572A759-6A51-4108-AA02-DFA0A04FC94B}">
-                <ma14:wrappingTextBoxFlag xmlns="" xmlns:ma14="http://schemas.microsoft.com/office/mac/drawingml/2011/main" val="1"/>
+                <ma14:wrappingTextBoxFlag xmlns:ma14="http://schemas.microsoft.com/office/mac/drawingml/2011/main" xmlns="" val="1"/>
               </a:ext>
             </a:extLst>
           </p:spPr>
@@ -27172,7 +29138,7 @@
               <a:effectLst/>
               <a:extLst>
                 <a:ext uri="{C572A759-6A51-4108-AA02-DFA0A04FC94B}">
-                  <ma14:wrappingTextBoxFlag xmlns="" xmlns:ma14="http://schemas.microsoft.com/office/mac/drawingml/2011/main" val="1"/>
+                  <ma14:wrappingTextBoxFlag xmlns:ma14="http://schemas.microsoft.com/office/mac/drawingml/2011/main" xmlns="" val="1"/>
                 </a:ext>
               </a:extLst>
             </p:spPr>
@@ -27223,7 +29189,7 @@
             <a:effectLst/>
             <a:extLst>
               <a:ext uri="{C572A759-6A51-4108-AA02-DFA0A04FC94B}">
-                <ma14:wrappingTextBoxFlag xmlns="" xmlns:ma14="http://schemas.microsoft.com/office/mac/drawingml/2011/main" val="1"/>
+                <ma14:wrappingTextBoxFlag xmlns:ma14="http://schemas.microsoft.com/office/mac/drawingml/2011/main" xmlns="" val="1"/>
               </a:ext>
             </a:extLst>
           </p:spPr>
@@ -27502,7 +29468,7 @@
               <a:effectLst/>
               <a:extLst>
                 <a:ext uri="{C572A759-6A51-4108-AA02-DFA0A04FC94B}">
-                  <ma14:wrappingTextBoxFlag xmlns="" xmlns:ma14="http://schemas.microsoft.com/office/mac/drawingml/2011/main" val="1"/>
+                  <ma14:wrappingTextBoxFlag xmlns:ma14="http://schemas.microsoft.com/office/mac/drawingml/2011/main" xmlns="" val="1"/>
                 </a:ext>
               </a:extLst>
             </p:spPr>
@@ -27553,7 +29519,7 @@
             <a:effectLst/>
             <a:extLst>
               <a:ext uri="{C572A759-6A51-4108-AA02-DFA0A04FC94B}">
-                <ma14:wrappingTextBoxFlag xmlns="" xmlns:ma14="http://schemas.microsoft.com/office/mac/drawingml/2011/main" val="1"/>
+                <ma14:wrappingTextBoxFlag xmlns:ma14="http://schemas.microsoft.com/office/mac/drawingml/2011/main" xmlns="" val="1"/>
               </a:ext>
             </a:extLst>
           </p:spPr>
@@ -27771,7 +29737,7 @@
               <a:effectLst/>
               <a:extLst>
                 <a:ext uri="{C572A759-6A51-4108-AA02-DFA0A04FC94B}">
-                  <ma14:wrappingTextBoxFlag xmlns="" xmlns:ma14="http://schemas.microsoft.com/office/mac/drawingml/2011/main" val="1"/>
+                  <ma14:wrappingTextBoxFlag xmlns:ma14="http://schemas.microsoft.com/office/mac/drawingml/2011/main" xmlns="" val="1"/>
                 </a:ext>
               </a:extLst>
             </p:spPr>
@@ -27825,7 +29791,7 @@
             <a:effectLst/>
             <a:extLst>
               <a:ext uri="{C572A759-6A51-4108-AA02-DFA0A04FC94B}">
-                <ma14:wrappingTextBoxFlag xmlns="" xmlns:ma14="http://schemas.microsoft.com/office/mac/drawingml/2011/main" val="1"/>
+                <ma14:wrappingTextBoxFlag xmlns:ma14="http://schemas.microsoft.com/office/mac/drawingml/2011/main" xmlns="" val="1"/>
               </a:ext>
             </a:extLst>
           </p:spPr>
@@ -28030,7 +29996,7 @@
               <a:effectLst/>
               <a:extLst>
                 <a:ext uri="{C572A759-6A51-4108-AA02-DFA0A04FC94B}">
-                  <ma14:wrappingTextBoxFlag xmlns="" xmlns:ma14="http://schemas.microsoft.com/office/mac/drawingml/2011/main" val="1"/>
+                  <ma14:wrappingTextBoxFlag xmlns:ma14="http://schemas.microsoft.com/office/mac/drawingml/2011/main" xmlns="" val="1"/>
                 </a:ext>
               </a:extLst>
             </p:spPr>
@@ -28084,7 +30050,7 @@
             <a:effectLst/>
             <a:extLst>
               <a:ext uri="{C572A759-6A51-4108-AA02-DFA0A04FC94B}">
-                <ma14:wrappingTextBoxFlag xmlns="" xmlns:ma14="http://schemas.microsoft.com/office/mac/drawingml/2011/main" val="1"/>
+                <ma14:wrappingTextBoxFlag xmlns:ma14="http://schemas.microsoft.com/office/mac/drawingml/2011/main" xmlns="" val="1"/>
               </a:ext>
             </a:extLst>
           </p:spPr>
@@ -28326,7 +30292,7 @@
               <a:effectLst/>
               <a:extLst>
                 <a:ext uri="{C572A759-6A51-4108-AA02-DFA0A04FC94B}">
-                  <ma14:wrappingTextBoxFlag xmlns="" xmlns:ma14="http://schemas.microsoft.com/office/mac/drawingml/2011/main" val="1"/>
+                  <ma14:wrappingTextBoxFlag xmlns:ma14="http://schemas.microsoft.com/office/mac/drawingml/2011/main" xmlns="" val="1"/>
                 </a:ext>
               </a:extLst>
             </p:spPr>
@@ -28384,7 +30350,7 @@
             <a:effectLst/>
             <a:extLst>
               <a:ext uri="{C572A759-6A51-4108-AA02-DFA0A04FC94B}">
-                <ma14:wrappingTextBoxFlag xmlns="" xmlns:ma14="http://schemas.microsoft.com/office/mac/drawingml/2011/main" val="1"/>
+                <ma14:wrappingTextBoxFlag xmlns:ma14="http://schemas.microsoft.com/office/mac/drawingml/2011/main" xmlns="" val="1"/>
               </a:ext>
             </a:extLst>
           </p:spPr>

--- a/RefactorToEcIntro.pptx
+++ b/RefactorToEcIntro.pptx
@@ -218,7 +218,7 @@
           <a:p>
             <a:fld id="{8CCF7272-9B1D-4C9A-BAA4-A2C3BF62B1D2}" type="datetimeFigureOut">
               <a:rPr lang="en-US" smtClean="0"/>
-              <a:t>9/24/2025</a:t>
+              <a:t>9/25/2025</a:t>
             </a:fld>
             <a:endParaRPr lang="en-US"/>
           </a:p>
@@ -512,6 +512,90 @@
             <p:ph type="sldImg"/>
           </p:nvPr>
         </p:nvSpPr>
+        <p:spPr/>
+      </p:sp>
+      <p:sp>
+        <p:nvSpPr>
+          <p:cNvPr id="3" name="Notes Placeholder 2"/>
+          <p:cNvSpPr>
+            <a:spLocks noGrp="1"/>
+          </p:cNvSpPr>
+          <p:nvPr>
+            <p:ph type="body" idx="1"/>
+          </p:nvPr>
+        </p:nvSpPr>
+        <p:spPr/>
+        <p:txBody>
+          <a:bodyPr/>
+          <a:lstStyle/>
+          <a:p>
+            <a:endParaRPr lang="en-US"/>
+          </a:p>
+        </p:txBody>
+      </p:sp>
+      <p:sp>
+        <p:nvSpPr>
+          <p:cNvPr id="4" name="Slide Number Placeholder 3"/>
+          <p:cNvSpPr>
+            <a:spLocks noGrp="1"/>
+          </p:cNvSpPr>
+          <p:nvPr>
+            <p:ph type="sldNum" sz="quarter" idx="5"/>
+          </p:nvPr>
+        </p:nvSpPr>
+        <p:spPr/>
+        <p:txBody>
+          <a:bodyPr/>
+          <a:lstStyle/>
+          <a:p>
+            <a:fld id="{3009100B-F611-4B83-9AF4-01D82287C5E3}" type="slidenum">
+              <a:rPr lang="en-US" smtClean="0"/>
+              <a:t>6</a:t>
+            </a:fld>
+            <a:endParaRPr lang="en-US"/>
+          </a:p>
+        </p:txBody>
+      </p:sp>
+    </p:spTree>
+    <p:extLst>
+      <p:ext uri="{BB962C8B-B14F-4D97-AF65-F5344CB8AC3E}">
+        <p14:creationId xmlns:p14="http://schemas.microsoft.com/office/powerpoint/2010/main" val="568039167"/>
+      </p:ext>
+    </p:extLst>
+  </p:cSld>
+  <p:clrMapOvr>
+    <a:masterClrMapping/>
+  </p:clrMapOvr>
+</p:notes>
+</file>
+
+<file path=ppt/notesSlides/notesSlide2.xml><?xml version="1.0" encoding="utf-8"?>
+<p:notes xmlns:a="http://schemas.openxmlformats.org/drawingml/2006/main" xmlns:r="http://schemas.openxmlformats.org/officeDocument/2006/relationships" xmlns:p="http://schemas.openxmlformats.org/presentationml/2006/main">
+  <p:cSld>
+    <p:spTree>
+      <p:nvGrpSpPr>
+        <p:cNvPr id="1" name=""/>
+        <p:cNvGrpSpPr/>
+        <p:nvPr/>
+      </p:nvGrpSpPr>
+      <p:grpSpPr>
+        <a:xfrm>
+          <a:off x="0" y="0"/>
+          <a:ext cx="0" cy="0"/>
+          <a:chOff x="0" y="0"/>
+          <a:chExt cx="0" cy="0"/>
+        </a:xfrm>
+      </p:grpSpPr>
+      <p:sp>
+        <p:nvSpPr>
+          <p:cNvPr id="2" name="Slide Image Placeholder 1"/>
+          <p:cNvSpPr>
+            <a:spLocks noGrp="1" noRot="1" noChangeAspect="1"/>
+          </p:cNvSpPr>
+          <p:nvPr>
+            <p:ph type="sldImg"/>
+          </p:nvPr>
+        </p:nvSpPr>
         <p:spPr>
           <a:xfrm>
             <a:off x="381000" y="685800"/>
@@ -551,7 +635,7 @@
 </p:notes>
 </file>
 
-<file path=ppt/notesSlides/notesSlide2.xml><?xml version="1.0" encoding="utf-8"?>
+<file path=ppt/notesSlides/notesSlide3.xml><?xml version="1.0" encoding="utf-8"?>
 <p:notes xmlns:a="http://schemas.openxmlformats.org/drawingml/2006/main" xmlns:r="http://schemas.openxmlformats.org/officeDocument/2006/relationships" xmlns:p="http://schemas.openxmlformats.org/presentationml/2006/main">
   <p:cSld>
     <p:spTree>
@@ -782,7 +866,7 @@
           <a:p>
             <a:fld id="{A978A291-C87E-4583-AB2D-5CAEB7F4C3DE}" type="datetime1">
               <a:rPr lang="en-US" smtClean="0"/>
-              <a:t>9/24/2025</a:t>
+              <a:t>9/25/2025</a:t>
             </a:fld>
             <a:endParaRPr lang="en-US"/>
           </a:p>
@@ -980,7 +1064,7 @@
           <a:p>
             <a:fld id="{D9948513-3721-474C-BE80-7871409E66CD}" type="datetime1">
               <a:rPr lang="en-US" smtClean="0"/>
-              <a:t>9/24/2025</a:t>
+              <a:t>9/25/2025</a:t>
             </a:fld>
             <a:endParaRPr lang="en-US"/>
           </a:p>
@@ -1188,7 +1272,7 @@
           <a:p>
             <a:fld id="{9C3FEB91-5253-4CC2-B144-C35513BB77D7}" type="datetime1">
               <a:rPr lang="en-US" smtClean="0"/>
-              <a:t>9/24/2025</a:t>
+              <a:t>9/25/2025</a:t>
             </a:fld>
             <a:endParaRPr lang="en-US"/>
           </a:p>
@@ -1386,7 +1470,7 @@
           <a:p>
             <a:fld id="{09779B33-F1DD-498D-93C7-6B8EC548F6D2}" type="datetime1">
               <a:rPr lang="en-US" smtClean="0"/>
-              <a:t>9/24/2025</a:t>
+              <a:t>9/25/2025</a:t>
             </a:fld>
             <a:endParaRPr lang="en-US"/>
           </a:p>
@@ -1696,7 +1780,7 @@
           <a:p>
             <a:fld id="{6820CCE4-48AB-4521-B222-52BFE717148C}" type="datetime1">
               <a:rPr lang="en-US" smtClean="0"/>
-              <a:t>9/24/2025</a:t>
+              <a:t>9/25/2025</a:t>
             </a:fld>
             <a:endParaRPr lang="en-US"/>
           </a:p>
@@ -1961,7 +2045,7 @@
           <a:p>
             <a:fld id="{A3A19DA7-183B-4551-9BD3-7C8E51B9184E}" type="datetime1">
               <a:rPr lang="en-US" smtClean="0"/>
-              <a:t>9/24/2025</a:t>
+              <a:t>9/25/2025</a:t>
             </a:fld>
             <a:endParaRPr lang="en-US"/>
           </a:p>
@@ -2373,7 +2457,7 @@
           <a:p>
             <a:fld id="{4A926BFC-E9D5-40BE-8176-572BC6F88714}" type="datetime1">
               <a:rPr lang="en-US" smtClean="0"/>
-              <a:t>9/24/2025</a:t>
+              <a:t>9/25/2025</a:t>
             </a:fld>
             <a:endParaRPr lang="en-US"/>
           </a:p>
@@ -2514,7 +2598,7 @@
           <a:p>
             <a:fld id="{605F6A97-0388-4AFE-AA88-9F8EE659E9FB}" type="datetime1">
               <a:rPr lang="en-US" smtClean="0"/>
-              <a:t>9/24/2025</a:t>
+              <a:t>9/25/2025</a:t>
             </a:fld>
             <a:endParaRPr lang="en-US"/>
           </a:p>
@@ -2662,7 +2746,7 @@
           <a:p>
             <a:fld id="{97CBCB5A-D4E0-47ED-AB71-73E5049E5258}" type="datetime1">
               <a:rPr lang="en-US" smtClean="0"/>
-              <a:t>9/24/2025</a:t>
+              <a:t>9/25/2025</a:t>
             </a:fld>
             <a:endParaRPr lang="en-US"/>
           </a:p>
@@ -2973,7 +3057,7 @@
           <a:p>
             <a:fld id="{62FB721B-115B-4B8B-AFC8-140F455CE774}" type="datetime1">
               <a:rPr lang="en-US" smtClean="0"/>
-              <a:t>9/24/2025</a:t>
+              <a:t>9/25/2025</a:t>
             </a:fld>
             <a:endParaRPr lang="en-US"/>
           </a:p>
@@ -3261,7 +3345,7 @@
           <a:p>
             <a:fld id="{E32E6149-AA0E-47F5-B01B-3D90BEF64480}" type="datetime1">
               <a:rPr lang="en-US" smtClean="0"/>
-              <a:t>9/24/2025</a:t>
+              <a:t>9/25/2025</a:t>
             </a:fld>
             <a:endParaRPr lang="en-US"/>
           </a:p>
@@ -3503,7 +3587,7 @@
           <a:p>
             <a:fld id="{B9BE06C6-629D-4C3F-AD68-BEBDFC283B8F}" type="datetime1">
               <a:rPr lang="en-US" smtClean="0"/>
-              <a:t>9/24/2025</a:t>
+              <a:t>9/25/2025</a:t>
             </a:fld>
             <a:endParaRPr lang="en-US"/>
           </a:p>
@@ -4227,7 +4311,7 @@
           </a:ln>
           <a:extLst>
             <a:ext uri="{C572A759-6A51-4108-AA02-DFA0A04FC94B}">
-              <ma14:wrappingTextBoxFlag xmlns:ma14="http://schemas.microsoft.com/office/mac/drawingml/2011/main" xmlns="" val="1"/>
+              <ma14:wrappingTextBoxFlag xmlns="" xmlns:ma14="http://schemas.microsoft.com/office/mac/drawingml/2011/main" val="1"/>
             </a:ext>
           </a:extLst>
         </p:spPr>
@@ -11670,7 +11754,7 @@
             <a:effectLst/>
             <a:extLst>
               <a:ext uri="{C572A759-6A51-4108-AA02-DFA0A04FC94B}">
-                <ma14:wrappingTextBoxFlag xmlns:ma14="http://schemas.microsoft.com/office/mac/drawingml/2011/main" xmlns="" val="1"/>
+                <ma14:wrappingTextBoxFlag xmlns="" xmlns:ma14="http://schemas.microsoft.com/office/mac/drawingml/2011/main" val="1"/>
               </a:ext>
             </a:extLst>
           </p:spPr>
@@ -11773,7 +11857,7 @@
             <a:effectLst/>
             <a:extLst>
               <a:ext uri="{C572A759-6A51-4108-AA02-DFA0A04FC94B}">
-                <ma14:wrappingTextBoxFlag xmlns:ma14="http://schemas.microsoft.com/office/mac/drawingml/2011/main" xmlns="" val="1"/>
+                <ma14:wrappingTextBoxFlag xmlns="" xmlns:ma14="http://schemas.microsoft.com/office/mac/drawingml/2011/main" val="1"/>
               </a:ext>
             </a:extLst>
           </p:spPr>
@@ -11877,7 +11961,7 @@
             <a:effectLst/>
             <a:extLst>
               <a:ext uri="{C572A759-6A51-4108-AA02-DFA0A04FC94B}">
-                <ma14:wrappingTextBoxFlag xmlns:ma14="http://schemas.microsoft.com/office/mac/drawingml/2011/main" xmlns="" val="1"/>
+                <ma14:wrappingTextBoxFlag xmlns="" xmlns:ma14="http://schemas.microsoft.com/office/mac/drawingml/2011/main" val="1"/>
               </a:ext>
             </a:extLst>
           </p:spPr>
@@ -11980,7 +12064,7 @@
             <a:effectLst/>
             <a:extLst>
               <a:ext uri="{C572A759-6A51-4108-AA02-DFA0A04FC94B}">
-                <ma14:wrappingTextBoxFlag xmlns:ma14="http://schemas.microsoft.com/office/mac/drawingml/2011/main" xmlns="" val="1"/>
+                <ma14:wrappingTextBoxFlag xmlns="" xmlns:ma14="http://schemas.microsoft.com/office/mac/drawingml/2011/main" val="1"/>
               </a:ext>
             </a:extLst>
           </p:spPr>
@@ -12083,7 +12167,7 @@
             <a:effectLst/>
             <a:extLst>
               <a:ext uri="{C572A759-6A51-4108-AA02-DFA0A04FC94B}">
-                <ma14:wrappingTextBoxFlag xmlns:ma14="http://schemas.microsoft.com/office/mac/drawingml/2011/main" xmlns="" val="1"/>
+                <ma14:wrappingTextBoxFlag xmlns="" xmlns:ma14="http://schemas.microsoft.com/office/mac/drawingml/2011/main" val="1"/>
               </a:ext>
             </a:extLst>
           </p:spPr>
@@ -12191,7 +12275,7 @@
             <a:effectLst/>
             <a:extLst>
               <a:ext uri="{C572A759-6A51-4108-AA02-DFA0A04FC94B}">
-                <ma14:wrappingTextBoxFlag xmlns:ma14="http://schemas.microsoft.com/office/mac/drawingml/2011/main" xmlns="" val="1"/>
+                <ma14:wrappingTextBoxFlag xmlns="" xmlns:ma14="http://schemas.microsoft.com/office/mac/drawingml/2011/main" val="1"/>
               </a:ext>
             </a:extLst>
           </p:spPr>
@@ -12294,7 +12378,7 @@
             <a:effectLst/>
             <a:extLst>
               <a:ext uri="{C572A759-6A51-4108-AA02-DFA0A04FC94B}">
-                <ma14:wrappingTextBoxFlag xmlns:ma14="http://schemas.microsoft.com/office/mac/drawingml/2011/main" xmlns="" val="1"/>
+                <ma14:wrappingTextBoxFlag xmlns="" xmlns:ma14="http://schemas.microsoft.com/office/mac/drawingml/2011/main" val="1"/>
               </a:ext>
             </a:extLst>
           </p:spPr>
@@ -12397,7 +12481,7 @@
             <a:effectLst/>
             <a:extLst>
               <a:ext uri="{C572A759-6A51-4108-AA02-DFA0A04FC94B}">
-                <ma14:wrappingTextBoxFlag xmlns:ma14="http://schemas.microsoft.com/office/mac/drawingml/2011/main" xmlns="" val="1"/>
+                <ma14:wrappingTextBoxFlag xmlns="" xmlns:ma14="http://schemas.microsoft.com/office/mac/drawingml/2011/main" val="1"/>
               </a:ext>
             </a:extLst>
           </p:spPr>
@@ -12511,7 +12595,7 @@
             <a:effectLst/>
             <a:extLst>
               <a:ext uri="{C572A759-6A51-4108-AA02-DFA0A04FC94B}">
-                <ma14:wrappingTextBoxFlag xmlns:ma14="http://schemas.microsoft.com/office/mac/drawingml/2011/main" xmlns="" val="1"/>
+                <ma14:wrappingTextBoxFlag xmlns="" xmlns:ma14="http://schemas.microsoft.com/office/mac/drawingml/2011/main" val="1"/>
               </a:ext>
             </a:extLst>
           </p:spPr>
@@ -12724,7 +12808,7 @@
               <a:effectLst/>
               <a:extLst>
                 <a:ext uri="{C572A759-6A51-4108-AA02-DFA0A04FC94B}">
-                  <ma14:wrappingTextBoxFlag xmlns:ma14="http://schemas.microsoft.com/office/mac/drawingml/2011/main" xmlns="" val="1"/>
+                  <ma14:wrappingTextBoxFlag xmlns="" xmlns:ma14="http://schemas.microsoft.com/office/mac/drawingml/2011/main" val="1"/>
                 </a:ext>
               </a:extLst>
             </p:spPr>
@@ -12828,7 +12912,7 @@
             <a:effectLst/>
             <a:extLst>
               <a:ext uri="{C572A759-6A51-4108-AA02-DFA0A04FC94B}">
-                <ma14:wrappingTextBoxFlag xmlns:ma14="http://schemas.microsoft.com/office/mac/drawingml/2011/main" xmlns="" val="1"/>
+                <ma14:wrappingTextBoxFlag xmlns="" xmlns:ma14="http://schemas.microsoft.com/office/mac/drawingml/2011/main" val="1"/>
               </a:ext>
             </a:extLst>
           </p:spPr>
@@ -12931,7 +13015,7 @@
             <a:effectLst/>
             <a:extLst>
               <a:ext uri="{C572A759-6A51-4108-AA02-DFA0A04FC94B}">
-                <ma14:wrappingTextBoxFlag xmlns:ma14="http://schemas.microsoft.com/office/mac/drawingml/2011/main" xmlns="" val="1"/>
+                <ma14:wrappingTextBoxFlag xmlns="" xmlns:ma14="http://schemas.microsoft.com/office/mac/drawingml/2011/main" val="1"/>
               </a:ext>
             </a:extLst>
           </p:spPr>
@@ -13088,7 +13172,7 @@
               <a:effectLst/>
               <a:extLst>
                 <a:ext uri="{C572A759-6A51-4108-AA02-DFA0A04FC94B}">
-                  <ma14:wrappingTextBoxFlag xmlns:ma14="http://schemas.microsoft.com/office/mac/drawingml/2011/main" xmlns="" val="1"/>
+                  <ma14:wrappingTextBoxFlag xmlns="" xmlns:ma14="http://schemas.microsoft.com/office/mac/drawingml/2011/main" val="1"/>
                 </a:ext>
               </a:extLst>
             </p:spPr>
@@ -13246,7 +13330,7 @@
               <a:effectLst/>
               <a:extLst>
                 <a:ext uri="{C572A759-6A51-4108-AA02-DFA0A04FC94B}">
-                  <ma14:wrappingTextBoxFlag xmlns:ma14="http://schemas.microsoft.com/office/mac/drawingml/2011/main" xmlns="" val="1"/>
+                  <ma14:wrappingTextBoxFlag xmlns="" xmlns:ma14="http://schemas.microsoft.com/office/mac/drawingml/2011/main" val="1"/>
                 </a:ext>
               </a:extLst>
             </p:spPr>
@@ -13652,7 +13736,7 @@
               <a:effectLst/>
               <a:extLst>
                 <a:ext uri="{C572A759-6A51-4108-AA02-DFA0A04FC94B}">
-                  <ma14:wrappingTextBoxFlag xmlns:ma14="http://schemas.microsoft.com/office/mac/drawingml/2011/main" xmlns="" val="1"/>
+                  <ma14:wrappingTextBoxFlag xmlns="" xmlns:ma14="http://schemas.microsoft.com/office/mac/drawingml/2011/main" val="1"/>
                 </a:ext>
               </a:extLst>
             </p:spPr>
@@ -13813,7 +13897,7 @@
               <a:effectLst/>
               <a:extLst>
                 <a:ext uri="{C572A759-6A51-4108-AA02-DFA0A04FC94B}">
-                  <ma14:wrappingTextBoxFlag xmlns:ma14="http://schemas.microsoft.com/office/mac/drawingml/2011/main" xmlns="" val="1"/>
+                  <ma14:wrappingTextBoxFlag xmlns="" xmlns:ma14="http://schemas.microsoft.com/office/mac/drawingml/2011/main" val="1"/>
                 </a:ext>
               </a:extLst>
             </p:spPr>
@@ -14210,7 +14294,7 @@
               <a:effectLst/>
               <a:extLst>
                 <a:ext uri="{C572A759-6A51-4108-AA02-DFA0A04FC94B}">
-                  <ma14:wrappingTextBoxFlag xmlns:ma14="http://schemas.microsoft.com/office/mac/drawingml/2011/main" xmlns="" val="1"/>
+                  <ma14:wrappingTextBoxFlag xmlns="" xmlns:ma14="http://schemas.microsoft.com/office/mac/drawingml/2011/main" val="1"/>
                 </a:ext>
               </a:extLst>
             </p:spPr>
@@ -14428,7 +14512,7 @@
               <a:effectLst/>
               <a:extLst>
                 <a:ext uri="{C572A759-6A51-4108-AA02-DFA0A04FC94B}">
-                  <ma14:wrappingTextBoxFlag xmlns:ma14="http://schemas.microsoft.com/office/mac/drawingml/2011/main" xmlns="" val="1"/>
+                  <ma14:wrappingTextBoxFlag xmlns="" xmlns:ma14="http://schemas.microsoft.com/office/mac/drawingml/2011/main" val="1"/>
                 </a:ext>
               </a:extLst>
             </p:spPr>
@@ -14596,7 +14680,7 @@
               <a:effectLst/>
               <a:extLst>
                 <a:ext uri="{C572A759-6A51-4108-AA02-DFA0A04FC94B}">
-                  <ma14:wrappingTextBoxFlag xmlns:ma14="http://schemas.microsoft.com/office/mac/drawingml/2011/main" xmlns="" val="1"/>
+                  <ma14:wrappingTextBoxFlag xmlns="" xmlns:ma14="http://schemas.microsoft.com/office/mac/drawingml/2011/main" val="1"/>
                 </a:ext>
               </a:extLst>
             </p:spPr>
@@ -15216,7 +15300,7 @@
               <a:effectLst/>
               <a:extLst>
                 <a:ext uri="{C572A759-6A51-4108-AA02-DFA0A04FC94B}">
-                  <ma14:wrappingTextBoxFlag xmlns:ma14="http://schemas.microsoft.com/office/mac/drawingml/2011/main" xmlns="" val="1"/>
+                  <ma14:wrappingTextBoxFlag xmlns="" xmlns:ma14="http://schemas.microsoft.com/office/mac/drawingml/2011/main" val="1"/>
                 </a:ext>
               </a:extLst>
             </p:spPr>
@@ -15269,7 +15353,7 @@
           </a:ln>
           <a:extLst>
             <a:ext uri="{C572A759-6A51-4108-AA02-DFA0A04FC94B}">
-              <ma14:wrappingTextBoxFlag xmlns:ma14="http://schemas.microsoft.com/office/mac/drawingml/2011/main" xmlns="" val="1"/>
+              <ma14:wrappingTextBoxFlag xmlns="" xmlns:ma14="http://schemas.microsoft.com/office/mac/drawingml/2011/main" val="1"/>
             </a:ext>
           </a:extLst>
         </p:spPr>
@@ -16644,7 +16728,7 @@
           </a:ln>
           <a:extLst>
             <a:ext uri="{C572A759-6A51-4108-AA02-DFA0A04FC94B}">
-              <ma14:wrappingTextBoxFlag xmlns:ma14="http://schemas.microsoft.com/office/mac/drawingml/2011/main" xmlns="" val="1"/>
+              <ma14:wrappingTextBoxFlag xmlns="" xmlns:ma14="http://schemas.microsoft.com/office/mac/drawingml/2011/main" val="1"/>
             </a:ext>
           </a:extLst>
         </p:spPr>
@@ -17017,7 +17101,7 @@
           </a:ln>
           <a:extLst>
             <a:ext uri="{C572A759-6A51-4108-AA02-DFA0A04FC94B}">
-              <ma14:wrappingTextBoxFlag xmlns:ma14="http://schemas.microsoft.com/office/mac/drawingml/2011/main" xmlns="" val="1"/>
+              <ma14:wrappingTextBoxFlag xmlns="" xmlns:ma14="http://schemas.microsoft.com/office/mac/drawingml/2011/main" val="1"/>
             </a:ext>
           </a:extLst>
         </p:spPr>
@@ -17077,7 +17161,7 @@
           </a:ln>
           <a:extLst>
             <a:ext uri="{C572A759-6A51-4108-AA02-DFA0A04FC94B}">
-              <ma14:wrappingTextBoxFlag xmlns:ma14="http://schemas.microsoft.com/office/mac/drawingml/2011/main" xmlns="" val="1"/>
+              <ma14:wrappingTextBoxFlag xmlns="" xmlns:ma14="http://schemas.microsoft.com/office/mac/drawingml/2011/main" val="1"/>
             </a:ext>
           </a:extLst>
         </p:spPr>
@@ -17671,7 +17755,7 @@
           <p:nvPr>
             <p:extLst>
               <p:ext uri="{D42A27DB-BD31-4B8C-83A1-F6EECF244321}">
-                <p14:modId xmlns:p14="http://schemas.microsoft.com/office/powerpoint/2010/main" val="2135031561"/>
+                <p14:modId xmlns:p14="http://schemas.microsoft.com/office/powerpoint/2010/main" val="3755200237"/>
               </p:ext>
             </p:extLst>
           </p:nvPr>
@@ -18104,7 +18188,7 @@
                           <a:ea typeface="D2CodingLigature Nerd Font" panose="020B0609020101020101" pitchFamily="49" charset="-127"/>
                           <a:cs typeface="JetBrains Mono" panose="02000009000000000000" pitchFamily="49" charset="0"/>
                         </a:rPr>
-                        <a:t>));</a:t>
+                        <a:t>))</a:t>
                       </a:r>
                       <a:endParaRPr lang="en-US" sz="1400" dirty="0">
                         <a:latin typeface="D2CodingLigature Nerd Font" panose="020B0609020101020101" pitchFamily="49" charset="-127"/>
@@ -18624,7 +18708,7 @@
                           <a:ea typeface="D2CodingLigature Nerd Font" panose="020B0609020101020101" pitchFamily="49" charset="-127"/>
                           <a:cs typeface="JetBrains Mono" panose="02000009000000000000" pitchFamily="49" charset="0"/>
                         </a:rPr>
-                        <a:t>);</a:t>
+                        <a:t>)</a:t>
                       </a:r>
                       <a:endParaRPr lang="en-US" sz="1400" dirty="0">
                         <a:latin typeface="D2CodingLigature Nerd Font" panose="020B0609020101020101" pitchFamily="49" charset="-127"/>
@@ -19140,7 +19224,7 @@
                           <a:ea typeface="D2CodingLigature Nerd Font" panose="020B0609020101020101" pitchFamily="49" charset="-127"/>
                           <a:cs typeface="JetBrains Mono" panose="02000009000000000000" pitchFamily="49" charset="0"/>
                         </a:rPr>
-                        <a:t>);</a:t>
+                        <a:t>)</a:t>
                       </a:r>
                       <a:endParaRPr lang="en-US" sz="1400" dirty="0">
                         <a:latin typeface="D2CodingLigature Nerd Font" panose="020B0609020101020101" pitchFamily="49" charset="-127"/>
@@ -19205,7 +19289,7 @@
           <p:nvPr>
             <p:extLst>
               <p:ext uri="{D42A27DB-BD31-4B8C-83A1-F6EECF244321}">
-                <p14:modId xmlns:p14="http://schemas.microsoft.com/office/powerpoint/2010/main" val="396285313"/>
+                <p14:modId xmlns:p14="http://schemas.microsoft.com/office/powerpoint/2010/main" val="3074478095"/>
               </p:ext>
             </p:extLst>
           </p:nvPr>
@@ -19614,7 +19698,7 @@
                           <a:ea typeface="D2CodingLigature Nerd Font" panose="020B0609020101020101" pitchFamily="49" charset="-127"/>
                           <a:cs typeface="JetBrains Mono" panose="02000009000000000000" pitchFamily="49" charset="0"/>
                         </a:rPr>
-                        <a:t>);</a:t>
+                        <a:t>)</a:t>
                       </a:r>
                       <a:endParaRPr lang="en-US" sz="1400" dirty="0">
                         <a:latin typeface="D2CodingLigature Nerd Font" panose="020B0609020101020101" pitchFamily="49" charset="-127"/>
@@ -19665,33 +19749,6 @@
                   <a:txBody>
                     <a:bodyPr/>
                     <a:lstStyle/>
-                    <a:p>
-                      <a:pPr marL="0" marR="0" lvl="0" indent="0" algn="ctr" defTabSz="914400" rtl="0" eaLnBrk="1" fontAlgn="auto" latinLnBrk="0" hangingPunct="1">
-                        <a:lnSpc>
-                          <a:spcPct val="100000"/>
-                        </a:lnSpc>
-                        <a:spcBef>
-                          <a:spcPts val="0"/>
-                        </a:spcBef>
-                        <a:spcAft>
-                          <a:spcPts val="0"/>
-                        </a:spcAft>
-                        <a:buClrTx/>
-                        <a:buSzTx/>
-                        <a:buFontTx/>
-                        <a:buNone/>
-                        <a:tabLst/>
-                        <a:defRPr/>
-                      </a:pPr>
-                      <a:endParaRPr lang="en-US" sz="1400" i="1" dirty="0">
-                        <a:solidFill>
-                          <a:srgbClr val="808080"/>
-                        </a:solidFill>
-                        <a:latin typeface="D2CodingLigature Nerd Font" panose="020B0609020101020101" pitchFamily="49" charset="-127"/>
-                        <a:ea typeface="D2CodingLigature Nerd Font" panose="020B0609020101020101" pitchFamily="49" charset="-127"/>
-                        <a:cs typeface="JetBrains Mono" panose="02000009000000000000" pitchFamily="49" charset="0"/>
-                      </a:endParaRPr>
-                    </a:p>
                     <a:p>
                       <a:pPr marL="0" marR="0" lvl="0" indent="0" algn="ctr" defTabSz="914400" rtl="0" eaLnBrk="1" fontAlgn="auto" latinLnBrk="0" hangingPunct="1">
                         <a:lnSpc>
@@ -19794,13 +19851,6 @@
                   <a:txBody>
                     <a:bodyPr/>
                     <a:lstStyle/>
-                    <a:p>
-                      <a:pPr algn="ctr"/>
-                      <a:endParaRPr lang="en-US" sz="1400" dirty="0">
-                        <a:latin typeface="D2CodingLigature Nerd Font" panose="020B0609020101020101" pitchFamily="49" charset="-127"/>
-                        <a:ea typeface="D2CodingLigature Nerd Font" panose="020B0609020101020101" pitchFamily="49" charset="-127"/>
-                      </a:endParaRPr>
-                    </a:p>
                     <a:p>
                       <a:pPr marL="0" marR="0" lvl="0" indent="0" algn="ctr" defTabSz="914400" rtl="0" eaLnBrk="1" fontAlgn="auto" latinLnBrk="0" hangingPunct="1">
                         <a:lnSpc>
@@ -20134,7 +20184,48 @@
                           <a:ea typeface="D2CodingLigature Nerd Font" panose="020B0609020101020101" pitchFamily="49" charset="-127"/>
                           <a:cs typeface="JetBrains Mono" panose="02000009000000000000" pitchFamily="49" charset="0"/>
                         </a:rPr>
-                        <a:t>);</a:t>
+                        <a:t>)</a:t>
+                      </a:r>
+                      <a:br>
+                        <a:rPr lang="en-US" sz="1400" dirty="0">
+                          <a:solidFill>
+                            <a:srgbClr val="000000"/>
+                          </a:solidFill>
+                          <a:effectLst/>
+                          <a:latin typeface="D2CodingLigature Nerd Font" panose="020B0609020101020101" pitchFamily="49" charset="-127"/>
+                          <a:ea typeface="D2CodingLigature Nerd Font" panose="020B0609020101020101" pitchFamily="49" charset="-127"/>
+                          <a:cs typeface="JetBrains Mono" panose="02000009000000000000" pitchFamily="49" charset="0"/>
+                        </a:rPr>
+                      </a:br>
+                      <a:r>
+                        <a:rPr lang="en-US" sz="1400" dirty="0">
+                          <a:solidFill>
+                            <a:srgbClr val="000000"/>
+                          </a:solidFill>
+                          <a:effectLst/>
+                          <a:latin typeface="Consolas" panose="020B0609020204030204" pitchFamily="49" charset="0"/>
+                        </a:rPr>
+                        <a:t>.</a:t>
+                      </a:r>
+                      <a:r>
+                        <a:rPr lang="en-US" sz="1400" dirty="0" err="1">
+                          <a:solidFill>
+                            <a:srgbClr val="000000"/>
+                          </a:solidFill>
+                          <a:effectLst/>
+                          <a:latin typeface="Consolas" panose="020B0609020204030204" pitchFamily="49" charset="0"/>
+                        </a:rPr>
+                        <a:t>castToSet</a:t>
+                      </a:r>
+                      <a:r>
+                        <a:rPr lang="en-US" sz="1400" dirty="0">
+                          <a:solidFill>
+                            <a:srgbClr val="000000"/>
+                          </a:solidFill>
+                          <a:effectLst/>
+                          <a:latin typeface="Consolas" panose="020B0609020204030204" pitchFamily="49" charset="0"/>
+                        </a:rPr>
+                        <a:t>()</a:t>
                       </a:r>
                       <a:endParaRPr lang="en-US" sz="1400" dirty="0">
                         <a:latin typeface="D2CodingLigature Nerd Font" panose="020B0609020101020101" pitchFamily="49" charset="-127"/>
@@ -20315,10 +20406,30 @@
                     <a:bodyPr/>
                     <a:lstStyle/>
                     <a:p>
-                      <a:pPr algn="ctr"/>
-                      <a:endParaRPr lang="en-US" sz="1400" dirty="0">
+                      <a:pPr marL="0" marR="0" lvl="0" indent="0" algn="ctr" defTabSz="914400" rtl="0" eaLnBrk="1" fontAlgn="auto" latinLnBrk="0" hangingPunct="1">
+                        <a:lnSpc>
+                          <a:spcPct val="100000"/>
+                        </a:lnSpc>
+                        <a:spcBef>
+                          <a:spcPts val="0"/>
+                        </a:spcBef>
+                        <a:spcAft>
+                          <a:spcPts val="0"/>
+                        </a:spcAft>
+                        <a:buClrTx/>
+                        <a:buSzTx/>
+                        <a:buFontTx/>
+                        <a:buNone/>
+                        <a:tabLst/>
+                        <a:defRPr/>
+                      </a:pPr>
+                      <a:endParaRPr lang="en-US" sz="1400" i="1" dirty="0">
+                        <a:solidFill>
+                          <a:srgbClr val="808080"/>
+                        </a:solidFill>
                         <a:latin typeface="D2CodingLigature Nerd Font" panose="020B0609020101020101" pitchFamily="49" charset="-127"/>
                         <a:ea typeface="D2CodingLigature Nerd Font" panose="020B0609020101020101" pitchFamily="49" charset="-127"/>
+                        <a:cs typeface="JetBrains Mono" panose="02000009000000000000" pitchFamily="49" charset="0"/>
                       </a:endParaRPr>
                     </a:p>
                     <a:p>
@@ -20670,7 +20781,7 @@
                           <a:ea typeface="D2CodingLigature Nerd Font" panose="020B0609020101020101" pitchFamily="49" charset="-127"/>
                           <a:cs typeface="JetBrains Mono" panose="02000009000000000000" pitchFamily="49" charset="0"/>
                         </a:rPr>
-                        <a:t>);</a:t>
+                        <a:t>)</a:t>
                       </a:r>
                       <a:endParaRPr lang="en-US" sz="1400" dirty="0">
                         <a:latin typeface="D2CodingLigature Nerd Font" panose="020B0609020101020101" pitchFamily="49" charset="-127"/>
@@ -21409,7 +21520,7 @@
           </a:ln>
           <a:extLst>
             <a:ext uri="{C572A759-6A51-4108-AA02-DFA0A04FC94B}">
-              <ma14:wrappingTextBoxFlag xmlns:ma14="http://schemas.microsoft.com/office/mac/drawingml/2011/main" xmlns:a14="http://schemas.microsoft.com/office/drawing/2010/main" xmlns:m="http://schemas.openxmlformats.org/officeDocument/2006/math" xmlns="" xmlns:lc="http://schemas.openxmlformats.org/drawingml/2006/lockedCanvas" val="1"/>
+              <ma14:wrappingTextBoxFlag xmlns:lc="http://schemas.openxmlformats.org/drawingml/2006/lockedCanvas" xmlns="" xmlns:m="http://schemas.openxmlformats.org/officeDocument/2006/math" xmlns:a14="http://schemas.microsoft.com/office/drawing/2010/main" xmlns:ma14="http://schemas.microsoft.com/office/mac/drawingml/2011/main" val="1"/>
             </a:ext>
           </a:extLst>
         </p:spPr>
@@ -21777,7 +21888,7 @@
           </a:ln>
           <a:extLst>
             <a:ext uri="{C572A759-6A51-4108-AA02-DFA0A04FC94B}">
-              <ma14:wrappingTextBoxFlag xmlns:ma14="http://schemas.microsoft.com/office/mac/drawingml/2011/main" xmlns:a14="http://schemas.microsoft.com/office/drawing/2010/main" xmlns:m="http://schemas.openxmlformats.org/officeDocument/2006/math" xmlns="" xmlns:lc="http://schemas.openxmlformats.org/drawingml/2006/lockedCanvas" val="1"/>
+              <ma14:wrappingTextBoxFlag xmlns:lc="http://schemas.openxmlformats.org/drawingml/2006/lockedCanvas" xmlns="" xmlns:m="http://schemas.openxmlformats.org/officeDocument/2006/math" xmlns:a14="http://schemas.microsoft.com/office/drawing/2010/main" xmlns:ma14="http://schemas.microsoft.com/office/mac/drawingml/2011/main" val="1"/>
             </a:ext>
           </a:extLst>
         </p:spPr>
@@ -22144,7 +22255,7 @@
           </a:ln>
           <a:extLst>
             <a:ext uri="{C572A759-6A51-4108-AA02-DFA0A04FC94B}">
-              <ma14:wrappingTextBoxFlag xmlns:ma14="http://schemas.microsoft.com/office/mac/drawingml/2011/main" xmlns:a14="http://schemas.microsoft.com/office/drawing/2010/main" xmlns:m="http://schemas.openxmlformats.org/officeDocument/2006/math" xmlns="" xmlns:lc="http://schemas.openxmlformats.org/drawingml/2006/lockedCanvas" val="1"/>
+              <ma14:wrappingTextBoxFlag xmlns:lc="http://schemas.openxmlformats.org/drawingml/2006/lockedCanvas" xmlns="" xmlns:m="http://schemas.openxmlformats.org/officeDocument/2006/math" xmlns:a14="http://schemas.microsoft.com/office/drawing/2010/main" xmlns:ma14="http://schemas.microsoft.com/office/mac/drawingml/2011/main" val="1"/>
             </a:ext>
           </a:extLst>
         </p:spPr>
@@ -22501,7 +22612,7 @@
           </a:ln>
           <a:extLst>
             <a:ext uri="{C572A759-6A51-4108-AA02-DFA0A04FC94B}">
-              <ma14:wrappingTextBoxFlag xmlns:ma14="http://schemas.microsoft.com/office/mac/drawingml/2011/main" xmlns:a14="http://schemas.microsoft.com/office/drawing/2010/main" xmlns:m="http://schemas.openxmlformats.org/officeDocument/2006/math" xmlns="" xmlns:lc="http://schemas.openxmlformats.org/drawingml/2006/lockedCanvas" val="1"/>
+              <ma14:wrappingTextBoxFlag xmlns:lc="http://schemas.openxmlformats.org/drawingml/2006/lockedCanvas" xmlns="" xmlns:m="http://schemas.openxmlformats.org/officeDocument/2006/math" xmlns:a14="http://schemas.microsoft.com/office/drawing/2010/main" xmlns:ma14="http://schemas.microsoft.com/office/mac/drawingml/2011/main" val="1"/>
             </a:ext>
           </a:extLst>
         </p:spPr>
@@ -22850,7 +22961,7 @@
           </a:ln>
           <a:extLst>
             <a:ext uri="{C572A759-6A51-4108-AA02-DFA0A04FC94B}">
-              <ma14:wrappingTextBoxFlag xmlns:ma14="http://schemas.microsoft.com/office/mac/drawingml/2011/main" xmlns:a14="http://schemas.microsoft.com/office/drawing/2010/main" xmlns:m="http://schemas.openxmlformats.org/officeDocument/2006/math" xmlns="" xmlns:lc="http://schemas.openxmlformats.org/drawingml/2006/lockedCanvas" val="1"/>
+              <ma14:wrappingTextBoxFlag xmlns:lc="http://schemas.openxmlformats.org/drawingml/2006/lockedCanvas" xmlns="" xmlns:m="http://schemas.openxmlformats.org/officeDocument/2006/math" xmlns:a14="http://schemas.microsoft.com/office/drawing/2010/main" xmlns:ma14="http://schemas.microsoft.com/office/mac/drawingml/2011/main" val="1"/>
             </a:ext>
           </a:extLst>
         </p:spPr>
@@ -23207,7 +23318,7 @@
           </a:ln>
           <a:extLst>
             <a:ext uri="{C572A759-6A51-4108-AA02-DFA0A04FC94B}">
-              <ma14:wrappingTextBoxFlag xmlns:ma14="http://schemas.microsoft.com/office/mac/drawingml/2011/main" xmlns:a14="http://schemas.microsoft.com/office/drawing/2010/main" xmlns:m="http://schemas.openxmlformats.org/officeDocument/2006/math" xmlns="" xmlns:lc="http://schemas.openxmlformats.org/drawingml/2006/lockedCanvas" val="1"/>
+              <ma14:wrappingTextBoxFlag xmlns:lc="http://schemas.openxmlformats.org/drawingml/2006/lockedCanvas" xmlns="" xmlns:m="http://schemas.openxmlformats.org/officeDocument/2006/math" xmlns:a14="http://schemas.microsoft.com/office/drawing/2010/main" xmlns:ma14="http://schemas.microsoft.com/office/mac/drawingml/2011/main" val="1"/>
             </a:ext>
           </a:extLst>
         </p:spPr>
@@ -23556,7 +23667,7 @@
           </a:ln>
           <a:extLst>
             <a:ext uri="{C572A759-6A51-4108-AA02-DFA0A04FC94B}">
-              <ma14:wrappingTextBoxFlag xmlns:ma14="http://schemas.microsoft.com/office/mac/drawingml/2011/main" xmlns:a14="http://schemas.microsoft.com/office/drawing/2010/main" xmlns:m="http://schemas.openxmlformats.org/officeDocument/2006/math" xmlns="" xmlns:lc="http://schemas.openxmlformats.org/drawingml/2006/lockedCanvas" val="1"/>
+              <ma14:wrappingTextBoxFlag xmlns:lc="http://schemas.openxmlformats.org/drawingml/2006/lockedCanvas" xmlns="" xmlns:m="http://schemas.openxmlformats.org/officeDocument/2006/math" xmlns:a14="http://schemas.microsoft.com/office/drawing/2010/main" xmlns:ma14="http://schemas.microsoft.com/office/mac/drawingml/2011/main" val="1"/>
             </a:ext>
           </a:extLst>
         </p:spPr>
@@ -23920,7 +24031,7 @@
           </a:ln>
           <a:extLst>
             <a:ext uri="{C572A759-6A51-4108-AA02-DFA0A04FC94B}">
-              <ma14:wrappingTextBoxFlag xmlns:ma14="http://schemas.microsoft.com/office/mac/drawingml/2011/main" xmlns:a14="http://schemas.microsoft.com/office/drawing/2010/main" xmlns:m="http://schemas.openxmlformats.org/officeDocument/2006/math" xmlns="" xmlns:lc="http://schemas.openxmlformats.org/drawingml/2006/lockedCanvas" val="1"/>
+              <ma14:wrappingTextBoxFlag xmlns:lc="http://schemas.openxmlformats.org/drawingml/2006/lockedCanvas" xmlns="" xmlns:m="http://schemas.openxmlformats.org/officeDocument/2006/math" xmlns:a14="http://schemas.microsoft.com/office/drawing/2010/main" xmlns:ma14="http://schemas.microsoft.com/office/mac/drawingml/2011/main" val="1"/>
             </a:ext>
           </a:extLst>
         </p:spPr>
@@ -24259,7 +24370,7 @@
           </a:ln>
           <a:extLst>
             <a:ext uri="{C572A759-6A51-4108-AA02-DFA0A04FC94B}">
-              <ma14:wrappingTextBoxFlag xmlns:ma14="http://schemas.microsoft.com/office/mac/drawingml/2011/main" xmlns:a14="http://schemas.microsoft.com/office/drawing/2010/main" xmlns:m="http://schemas.openxmlformats.org/officeDocument/2006/math" xmlns="" xmlns:lc="http://schemas.openxmlformats.org/drawingml/2006/lockedCanvas" val="1"/>
+              <ma14:wrappingTextBoxFlag xmlns:lc="http://schemas.openxmlformats.org/drawingml/2006/lockedCanvas" xmlns="" xmlns:m="http://schemas.openxmlformats.org/officeDocument/2006/math" xmlns:a14="http://schemas.microsoft.com/office/drawing/2010/main" xmlns:ma14="http://schemas.microsoft.com/office/mac/drawingml/2011/main" val="1"/>
             </a:ext>
           </a:extLst>
         </p:spPr>
@@ -24598,7 +24709,7 @@
           </a:ln>
           <a:extLst>
             <a:ext uri="{C572A759-6A51-4108-AA02-DFA0A04FC94B}">
-              <ma14:wrappingTextBoxFlag xmlns:ma14="http://schemas.microsoft.com/office/mac/drawingml/2011/main" xmlns:a14="http://schemas.microsoft.com/office/drawing/2010/main" xmlns:m="http://schemas.openxmlformats.org/officeDocument/2006/math" xmlns="" xmlns:lc="http://schemas.openxmlformats.org/drawingml/2006/lockedCanvas" val="1"/>
+              <ma14:wrappingTextBoxFlag xmlns:lc="http://schemas.openxmlformats.org/drawingml/2006/lockedCanvas" xmlns="" xmlns:m="http://schemas.openxmlformats.org/officeDocument/2006/math" xmlns:a14="http://schemas.microsoft.com/office/drawing/2010/main" xmlns:ma14="http://schemas.microsoft.com/office/mac/drawingml/2011/main" val="1"/>
             </a:ext>
           </a:extLst>
         </p:spPr>
@@ -24937,7 +25048,7 @@
           </a:ln>
           <a:extLst>
             <a:ext uri="{C572A759-6A51-4108-AA02-DFA0A04FC94B}">
-              <ma14:wrappingTextBoxFlag xmlns:ma14="http://schemas.microsoft.com/office/mac/drawingml/2011/main" xmlns:a14="http://schemas.microsoft.com/office/drawing/2010/main" xmlns:m="http://schemas.openxmlformats.org/officeDocument/2006/math" xmlns="" xmlns:lc="http://schemas.openxmlformats.org/drawingml/2006/lockedCanvas" val="1"/>
+              <ma14:wrappingTextBoxFlag xmlns:lc="http://schemas.openxmlformats.org/drawingml/2006/lockedCanvas" xmlns="" xmlns:m="http://schemas.openxmlformats.org/officeDocument/2006/math" xmlns:a14="http://schemas.microsoft.com/office/drawing/2010/main" xmlns:ma14="http://schemas.microsoft.com/office/mac/drawingml/2011/main" val="1"/>
             </a:ext>
           </a:extLst>
         </p:spPr>
@@ -25306,7 +25417,7 @@
           </a:ln>
           <a:extLst>
             <a:ext uri="{C572A759-6A51-4108-AA02-DFA0A04FC94B}">
-              <ma14:wrappingTextBoxFlag xmlns:ma14="http://schemas.microsoft.com/office/mac/drawingml/2011/main" xmlns:a14="http://schemas.microsoft.com/office/drawing/2010/main" xmlns:m="http://schemas.openxmlformats.org/officeDocument/2006/math" xmlns="" xmlns:lc="http://schemas.openxmlformats.org/drawingml/2006/lockedCanvas" val="1"/>
+              <ma14:wrappingTextBoxFlag xmlns:lc="http://schemas.openxmlformats.org/drawingml/2006/lockedCanvas" xmlns="" xmlns:m="http://schemas.openxmlformats.org/officeDocument/2006/math" xmlns:a14="http://schemas.microsoft.com/office/drawing/2010/main" xmlns:ma14="http://schemas.microsoft.com/office/mac/drawingml/2011/main" val="1"/>
             </a:ext>
           </a:extLst>
         </p:spPr>
@@ -25663,7 +25774,7 @@
           </a:ln>
           <a:extLst>
             <a:ext uri="{C572A759-6A51-4108-AA02-DFA0A04FC94B}">
-              <ma14:wrappingTextBoxFlag xmlns:ma14="http://schemas.microsoft.com/office/mac/drawingml/2011/main" xmlns:a14="http://schemas.microsoft.com/office/drawing/2010/main" xmlns:m="http://schemas.openxmlformats.org/officeDocument/2006/math" xmlns="" xmlns:lc="http://schemas.openxmlformats.org/drawingml/2006/lockedCanvas" val="1"/>
+              <ma14:wrappingTextBoxFlag xmlns:lc="http://schemas.openxmlformats.org/drawingml/2006/lockedCanvas" xmlns="" xmlns:m="http://schemas.openxmlformats.org/officeDocument/2006/math" xmlns:a14="http://schemas.microsoft.com/office/drawing/2010/main" xmlns:ma14="http://schemas.microsoft.com/office/mac/drawingml/2011/main" val="1"/>
             </a:ext>
           </a:extLst>
         </p:spPr>
@@ -26002,7 +26113,7 @@
           </a:ln>
           <a:extLst>
             <a:ext uri="{C572A759-6A51-4108-AA02-DFA0A04FC94B}">
-              <ma14:wrappingTextBoxFlag xmlns:ma14="http://schemas.microsoft.com/office/mac/drawingml/2011/main" xmlns:a14="http://schemas.microsoft.com/office/drawing/2010/main" xmlns:m="http://schemas.openxmlformats.org/officeDocument/2006/math" xmlns="" xmlns:lc="http://schemas.openxmlformats.org/drawingml/2006/lockedCanvas" val="1"/>
+              <ma14:wrappingTextBoxFlag xmlns:lc="http://schemas.openxmlformats.org/drawingml/2006/lockedCanvas" xmlns="" xmlns:m="http://schemas.openxmlformats.org/officeDocument/2006/math" xmlns:a14="http://schemas.microsoft.com/office/drawing/2010/main" xmlns:ma14="http://schemas.microsoft.com/office/mac/drawingml/2011/main" val="1"/>
             </a:ext>
           </a:extLst>
         </p:spPr>
@@ -26341,7 +26452,7 @@
           </a:ln>
           <a:extLst>
             <a:ext uri="{C572A759-6A51-4108-AA02-DFA0A04FC94B}">
-              <ma14:wrappingTextBoxFlag xmlns:ma14="http://schemas.microsoft.com/office/mac/drawingml/2011/main" xmlns:a14="http://schemas.microsoft.com/office/drawing/2010/main" xmlns:m="http://schemas.openxmlformats.org/officeDocument/2006/math" xmlns="" xmlns:lc="http://schemas.openxmlformats.org/drawingml/2006/lockedCanvas" val="1"/>
+              <ma14:wrappingTextBoxFlag xmlns:lc="http://schemas.openxmlformats.org/drawingml/2006/lockedCanvas" xmlns="" xmlns:m="http://schemas.openxmlformats.org/officeDocument/2006/math" xmlns:a14="http://schemas.microsoft.com/office/drawing/2010/main" xmlns:ma14="http://schemas.microsoft.com/office/mac/drawingml/2011/main" val="1"/>
             </a:ext>
           </a:extLst>
         </p:spPr>
@@ -26683,7 +26794,7 @@
           </a:ln>
           <a:extLst>
             <a:ext uri="{C572A759-6A51-4108-AA02-DFA0A04FC94B}">
-              <ma14:wrappingTextBoxFlag xmlns:ma14="http://schemas.microsoft.com/office/mac/drawingml/2011/main" xmlns:a14="http://schemas.microsoft.com/office/drawing/2010/main" xmlns:m="http://schemas.openxmlformats.org/officeDocument/2006/math" xmlns="" xmlns:lc="http://schemas.openxmlformats.org/drawingml/2006/lockedCanvas" val="1"/>
+              <ma14:wrappingTextBoxFlag xmlns:lc="http://schemas.openxmlformats.org/drawingml/2006/lockedCanvas" xmlns="" xmlns:m="http://schemas.openxmlformats.org/officeDocument/2006/math" xmlns:a14="http://schemas.microsoft.com/office/drawing/2010/main" xmlns:ma14="http://schemas.microsoft.com/office/mac/drawingml/2011/main" val="1"/>
             </a:ext>
           </a:extLst>
         </p:spPr>
@@ -27724,7 +27835,7 @@
           </a:ln>
           <a:extLst>
             <a:ext uri="{C572A759-6A51-4108-AA02-DFA0A04FC94B}">
-              <ma14:wrappingTextBoxFlag xmlns:ma14="http://schemas.microsoft.com/office/mac/drawingml/2011/main" xmlns:a14="http://schemas.microsoft.com/office/drawing/2010/main" xmlns:m="http://schemas.openxmlformats.org/officeDocument/2006/math" xmlns="" xmlns:lc="http://schemas.openxmlformats.org/drawingml/2006/lockedCanvas" val="1"/>
+              <ma14:wrappingTextBoxFlag xmlns:lc="http://schemas.openxmlformats.org/drawingml/2006/lockedCanvas" xmlns="" xmlns:m="http://schemas.openxmlformats.org/officeDocument/2006/math" xmlns:a14="http://schemas.microsoft.com/office/drawing/2010/main" xmlns:ma14="http://schemas.microsoft.com/office/mac/drawingml/2011/main" val="1"/>
             </a:ext>
           </a:extLst>
         </p:spPr>
@@ -28081,7 +28192,7 @@
           </a:ln>
           <a:extLst>
             <a:ext uri="{C572A759-6A51-4108-AA02-DFA0A04FC94B}">
-              <ma14:wrappingTextBoxFlag xmlns:ma14="http://schemas.microsoft.com/office/mac/drawingml/2011/main" xmlns:a14="http://schemas.microsoft.com/office/drawing/2010/main" xmlns:m="http://schemas.openxmlformats.org/officeDocument/2006/math" xmlns="" xmlns:lc="http://schemas.openxmlformats.org/drawingml/2006/lockedCanvas" val="1"/>
+              <ma14:wrappingTextBoxFlag xmlns:lc="http://schemas.openxmlformats.org/drawingml/2006/lockedCanvas" xmlns="" xmlns:m="http://schemas.openxmlformats.org/officeDocument/2006/math" xmlns:a14="http://schemas.microsoft.com/office/drawing/2010/main" xmlns:ma14="http://schemas.microsoft.com/office/mac/drawingml/2011/main" val="1"/>
             </a:ext>
           </a:extLst>
         </p:spPr>
@@ -28635,7 +28746,7 @@
               <a:effectLst/>
               <a:extLst>
                 <a:ext uri="{C572A759-6A51-4108-AA02-DFA0A04FC94B}">
-                  <ma14:wrappingTextBoxFlag xmlns:ma14="http://schemas.microsoft.com/office/mac/drawingml/2011/main" xmlns="" val="1"/>
+                  <ma14:wrappingTextBoxFlag xmlns="" xmlns:ma14="http://schemas.microsoft.com/office/mac/drawingml/2011/main" val="1"/>
                 </a:ext>
               </a:extLst>
             </p:spPr>
@@ -28686,7 +28797,7 @@
             <a:effectLst/>
             <a:extLst>
               <a:ext uri="{C572A759-6A51-4108-AA02-DFA0A04FC94B}">
-                <ma14:wrappingTextBoxFlag xmlns:ma14="http://schemas.microsoft.com/office/mac/drawingml/2011/main" xmlns="" val="1"/>
+                <ma14:wrappingTextBoxFlag xmlns="" xmlns:ma14="http://schemas.microsoft.com/office/mac/drawingml/2011/main" val="1"/>
               </a:ext>
             </a:extLst>
           </p:spPr>
@@ -28909,7 +29020,7 @@
               <a:effectLst/>
               <a:extLst>
                 <a:ext uri="{C572A759-6A51-4108-AA02-DFA0A04FC94B}">
-                  <ma14:wrappingTextBoxFlag xmlns:ma14="http://schemas.microsoft.com/office/mac/drawingml/2011/main" xmlns="" val="1"/>
+                  <ma14:wrappingTextBoxFlag xmlns="" xmlns:ma14="http://schemas.microsoft.com/office/mac/drawingml/2011/main" val="1"/>
                 </a:ext>
               </a:extLst>
             </p:spPr>
@@ -28960,7 +29071,7 @@
             <a:effectLst/>
             <a:extLst>
               <a:ext uri="{C572A759-6A51-4108-AA02-DFA0A04FC94B}">
-                <ma14:wrappingTextBoxFlag xmlns:ma14="http://schemas.microsoft.com/office/mac/drawingml/2011/main" xmlns="" val="1"/>
+                <ma14:wrappingTextBoxFlag xmlns="" xmlns:ma14="http://schemas.microsoft.com/office/mac/drawingml/2011/main" val="1"/>
               </a:ext>
             </a:extLst>
           </p:spPr>
@@ -29138,7 +29249,7 @@
               <a:effectLst/>
               <a:extLst>
                 <a:ext uri="{C572A759-6A51-4108-AA02-DFA0A04FC94B}">
-                  <ma14:wrappingTextBoxFlag xmlns:ma14="http://schemas.microsoft.com/office/mac/drawingml/2011/main" xmlns="" val="1"/>
+                  <ma14:wrappingTextBoxFlag xmlns="" xmlns:ma14="http://schemas.microsoft.com/office/mac/drawingml/2011/main" val="1"/>
                 </a:ext>
               </a:extLst>
             </p:spPr>
@@ -29189,7 +29300,7 @@
             <a:effectLst/>
             <a:extLst>
               <a:ext uri="{C572A759-6A51-4108-AA02-DFA0A04FC94B}">
-                <ma14:wrappingTextBoxFlag xmlns:ma14="http://schemas.microsoft.com/office/mac/drawingml/2011/main" xmlns="" val="1"/>
+                <ma14:wrappingTextBoxFlag xmlns="" xmlns:ma14="http://schemas.microsoft.com/office/mac/drawingml/2011/main" val="1"/>
               </a:ext>
             </a:extLst>
           </p:spPr>
@@ -29468,7 +29579,7 @@
               <a:effectLst/>
               <a:extLst>
                 <a:ext uri="{C572A759-6A51-4108-AA02-DFA0A04FC94B}">
-                  <ma14:wrappingTextBoxFlag xmlns:ma14="http://schemas.microsoft.com/office/mac/drawingml/2011/main" xmlns="" val="1"/>
+                  <ma14:wrappingTextBoxFlag xmlns="" xmlns:ma14="http://schemas.microsoft.com/office/mac/drawingml/2011/main" val="1"/>
                 </a:ext>
               </a:extLst>
             </p:spPr>
@@ -29519,7 +29630,7 @@
             <a:effectLst/>
             <a:extLst>
               <a:ext uri="{C572A759-6A51-4108-AA02-DFA0A04FC94B}">
-                <ma14:wrappingTextBoxFlag xmlns:ma14="http://schemas.microsoft.com/office/mac/drawingml/2011/main" xmlns="" val="1"/>
+                <ma14:wrappingTextBoxFlag xmlns="" xmlns:ma14="http://schemas.microsoft.com/office/mac/drawingml/2011/main" val="1"/>
               </a:ext>
             </a:extLst>
           </p:spPr>
@@ -29737,7 +29848,7 @@
               <a:effectLst/>
               <a:extLst>
                 <a:ext uri="{C572A759-6A51-4108-AA02-DFA0A04FC94B}">
-                  <ma14:wrappingTextBoxFlag xmlns:ma14="http://schemas.microsoft.com/office/mac/drawingml/2011/main" xmlns="" val="1"/>
+                  <ma14:wrappingTextBoxFlag xmlns="" xmlns:ma14="http://schemas.microsoft.com/office/mac/drawingml/2011/main" val="1"/>
                 </a:ext>
               </a:extLst>
             </p:spPr>
@@ -29791,7 +29902,7 @@
             <a:effectLst/>
             <a:extLst>
               <a:ext uri="{C572A759-6A51-4108-AA02-DFA0A04FC94B}">
-                <ma14:wrappingTextBoxFlag xmlns:ma14="http://schemas.microsoft.com/office/mac/drawingml/2011/main" xmlns="" val="1"/>
+                <ma14:wrappingTextBoxFlag xmlns="" xmlns:ma14="http://schemas.microsoft.com/office/mac/drawingml/2011/main" val="1"/>
               </a:ext>
             </a:extLst>
           </p:spPr>
@@ -29996,7 +30107,7 @@
               <a:effectLst/>
               <a:extLst>
                 <a:ext uri="{C572A759-6A51-4108-AA02-DFA0A04FC94B}">
-                  <ma14:wrappingTextBoxFlag xmlns:ma14="http://schemas.microsoft.com/office/mac/drawingml/2011/main" xmlns="" val="1"/>
+                  <ma14:wrappingTextBoxFlag xmlns="" xmlns:ma14="http://schemas.microsoft.com/office/mac/drawingml/2011/main" val="1"/>
                 </a:ext>
               </a:extLst>
             </p:spPr>
@@ -30050,7 +30161,7 @@
             <a:effectLst/>
             <a:extLst>
               <a:ext uri="{C572A759-6A51-4108-AA02-DFA0A04FC94B}">
-                <ma14:wrappingTextBoxFlag xmlns:ma14="http://schemas.microsoft.com/office/mac/drawingml/2011/main" xmlns="" val="1"/>
+                <ma14:wrappingTextBoxFlag xmlns="" xmlns:ma14="http://schemas.microsoft.com/office/mac/drawingml/2011/main" val="1"/>
               </a:ext>
             </a:extLst>
           </p:spPr>
@@ -30292,7 +30403,7 @@
               <a:effectLst/>
               <a:extLst>
                 <a:ext uri="{C572A759-6A51-4108-AA02-DFA0A04FC94B}">
-                  <ma14:wrappingTextBoxFlag xmlns:ma14="http://schemas.microsoft.com/office/mac/drawingml/2011/main" xmlns="" val="1"/>
+                  <ma14:wrappingTextBoxFlag xmlns="" xmlns:ma14="http://schemas.microsoft.com/office/mac/drawingml/2011/main" val="1"/>
                 </a:ext>
               </a:extLst>
             </p:spPr>
@@ -30350,7 +30461,7 @@
             <a:effectLst/>
             <a:extLst>
               <a:ext uri="{C572A759-6A51-4108-AA02-DFA0A04FC94B}">
-                <ma14:wrappingTextBoxFlag xmlns:ma14="http://schemas.microsoft.com/office/mac/drawingml/2011/main" xmlns="" val="1"/>
+                <ma14:wrappingTextBoxFlag xmlns="" xmlns:ma14="http://schemas.microsoft.com/office/mac/drawingml/2011/main" val="1"/>
               </a:ext>
             </a:extLst>
           </p:spPr>

--- a/RefactorToEcIntro.pptx
+++ b/RefactorToEcIntro.pptx
@@ -5,7 +5,7 @@
     <p:sldMasterId id="2147483648" r:id="rId1"/>
   </p:sldMasterIdLst>
   <p:notesMasterIdLst>
-    <p:notesMasterId r:id="rId24"/>
+    <p:notesMasterId r:id="rId25"/>
   </p:notesMasterIdLst>
   <p:sldIdLst>
     <p:sldId id="334" r:id="rId2"/>
@@ -13,23 +13,24 @@
     <p:sldId id="258" r:id="rId4"/>
     <p:sldId id="259" r:id="rId5"/>
     <p:sldId id="260" r:id="rId6"/>
-    <p:sldId id="346" r:id="rId7"/>
-    <p:sldId id="338" r:id="rId8"/>
-    <p:sldId id="261" r:id="rId9"/>
-    <p:sldId id="343" r:id="rId10"/>
-    <p:sldId id="263" r:id="rId11"/>
-    <p:sldId id="344" r:id="rId12"/>
-    <p:sldId id="347" r:id="rId13"/>
-    <p:sldId id="270" r:id="rId14"/>
-    <p:sldId id="271" r:id="rId15"/>
-    <p:sldId id="264" r:id="rId16"/>
-    <p:sldId id="333" r:id="rId17"/>
-    <p:sldId id="308" r:id="rId18"/>
-    <p:sldId id="309" r:id="rId19"/>
-    <p:sldId id="336" r:id="rId20"/>
-    <p:sldId id="339" r:id="rId21"/>
-    <p:sldId id="340" r:id="rId22"/>
-    <p:sldId id="341" r:id="rId23"/>
+    <p:sldId id="349" r:id="rId7"/>
+    <p:sldId id="348" r:id="rId8"/>
+    <p:sldId id="338" r:id="rId9"/>
+    <p:sldId id="261" r:id="rId10"/>
+    <p:sldId id="343" r:id="rId11"/>
+    <p:sldId id="263" r:id="rId12"/>
+    <p:sldId id="344" r:id="rId13"/>
+    <p:sldId id="347" r:id="rId14"/>
+    <p:sldId id="270" r:id="rId15"/>
+    <p:sldId id="271" r:id="rId16"/>
+    <p:sldId id="264" r:id="rId17"/>
+    <p:sldId id="333" r:id="rId18"/>
+    <p:sldId id="308" r:id="rId19"/>
+    <p:sldId id="309" r:id="rId20"/>
+    <p:sldId id="336" r:id="rId21"/>
+    <p:sldId id="339" r:id="rId22"/>
+    <p:sldId id="340" r:id="rId23"/>
+    <p:sldId id="341" r:id="rId24"/>
   </p:sldIdLst>
   <p:sldSz cx="12192000" cy="6858000"/>
   <p:notesSz cx="6858000" cy="9144000"/>
@@ -218,7 +219,7 @@
           <a:p>
             <a:fld id="{8CCF7272-9B1D-4C9A-BAA4-A2C3BF62B1D2}" type="datetimeFigureOut">
               <a:rPr lang="en-US" smtClean="0"/>
-              <a:t>9/25/2025</a:t>
+              <a:t>9/26/2025</a:t>
             </a:fld>
             <a:endParaRPr lang="en-US"/>
           </a:p>
@@ -574,6 +575,114 @@
   <p:cSld>
     <p:spTree>
       <p:nvGrpSpPr>
+        <p:cNvPr id="1" name="">
+          <a:extLst>
+            <a:ext uri="{FF2B5EF4-FFF2-40B4-BE49-F238E27FC236}">
+              <a16:creationId xmlns:a16="http://schemas.microsoft.com/office/drawing/2014/main" id="{A50877B5-DBE6-3F46-B290-E941D6ED0856}"/>
+            </a:ext>
+          </a:extLst>
+        </p:cNvPr>
+        <p:cNvGrpSpPr/>
+        <p:nvPr/>
+      </p:nvGrpSpPr>
+      <p:grpSpPr>
+        <a:xfrm>
+          <a:off x="0" y="0"/>
+          <a:ext cx="0" cy="0"/>
+          <a:chOff x="0" y="0"/>
+          <a:chExt cx="0" cy="0"/>
+        </a:xfrm>
+      </p:grpSpPr>
+      <p:sp>
+        <p:nvSpPr>
+          <p:cNvPr id="2" name="Slide Image Placeholder 1">
+            <a:extLst>
+              <a:ext uri="{FF2B5EF4-FFF2-40B4-BE49-F238E27FC236}">
+                <a16:creationId xmlns:a16="http://schemas.microsoft.com/office/drawing/2014/main" id="{2B8D97D8-1881-94D9-5C3F-017AAD3BC369}"/>
+              </a:ext>
+            </a:extLst>
+          </p:cNvPr>
+          <p:cNvSpPr>
+            <a:spLocks noGrp="1" noRot="1" noChangeAspect="1"/>
+          </p:cNvSpPr>
+          <p:nvPr>
+            <p:ph type="sldImg"/>
+          </p:nvPr>
+        </p:nvSpPr>
+        <p:spPr/>
+      </p:sp>
+      <p:sp>
+        <p:nvSpPr>
+          <p:cNvPr id="3" name="Notes Placeholder 2">
+            <a:extLst>
+              <a:ext uri="{FF2B5EF4-FFF2-40B4-BE49-F238E27FC236}">
+                <a16:creationId xmlns:a16="http://schemas.microsoft.com/office/drawing/2014/main" id="{2DFD83FF-B319-E078-A02D-D484E56B255A}"/>
+              </a:ext>
+            </a:extLst>
+          </p:cNvPr>
+          <p:cNvSpPr>
+            <a:spLocks noGrp="1"/>
+          </p:cNvSpPr>
+          <p:nvPr>
+            <p:ph type="body" idx="1"/>
+          </p:nvPr>
+        </p:nvSpPr>
+        <p:spPr/>
+        <p:txBody>
+          <a:bodyPr/>
+          <a:lstStyle/>
+          <a:p>
+            <a:endParaRPr lang="en-US"/>
+          </a:p>
+        </p:txBody>
+      </p:sp>
+      <p:sp>
+        <p:nvSpPr>
+          <p:cNvPr id="4" name="Slide Number Placeholder 3">
+            <a:extLst>
+              <a:ext uri="{FF2B5EF4-FFF2-40B4-BE49-F238E27FC236}">
+                <a16:creationId xmlns:a16="http://schemas.microsoft.com/office/drawing/2014/main" id="{F749EC34-11B5-9226-36CB-9EDDE40E0A87}"/>
+              </a:ext>
+            </a:extLst>
+          </p:cNvPr>
+          <p:cNvSpPr>
+            <a:spLocks noGrp="1"/>
+          </p:cNvSpPr>
+          <p:nvPr>
+            <p:ph type="sldNum" sz="quarter" idx="5"/>
+          </p:nvPr>
+        </p:nvSpPr>
+        <p:spPr/>
+        <p:txBody>
+          <a:bodyPr/>
+          <a:lstStyle/>
+          <a:p>
+            <a:fld id="{3009100B-F611-4B83-9AF4-01D82287C5E3}" type="slidenum">
+              <a:rPr lang="en-US" smtClean="0"/>
+              <a:t>7</a:t>
+            </a:fld>
+            <a:endParaRPr lang="en-US"/>
+          </a:p>
+        </p:txBody>
+      </p:sp>
+    </p:spTree>
+    <p:extLst>
+      <p:ext uri="{BB962C8B-B14F-4D97-AF65-F5344CB8AC3E}">
+        <p14:creationId xmlns:p14="http://schemas.microsoft.com/office/powerpoint/2010/main" val="1529216874"/>
+      </p:ext>
+    </p:extLst>
+  </p:cSld>
+  <p:clrMapOvr>
+    <a:masterClrMapping/>
+  </p:clrMapOvr>
+</p:notes>
+</file>
+
+<file path=ppt/notesSlides/notesSlide3.xml><?xml version="1.0" encoding="utf-8"?>
+<p:notes xmlns:a="http://schemas.openxmlformats.org/drawingml/2006/main" xmlns:r="http://schemas.openxmlformats.org/officeDocument/2006/relationships" xmlns:p="http://schemas.openxmlformats.org/presentationml/2006/main">
+  <p:cSld>
+    <p:spTree>
+      <p:nvGrpSpPr>
         <p:cNvPr id="1" name=""/>
         <p:cNvGrpSpPr/>
         <p:nvPr/>
@@ -635,7 +744,7 @@
 </p:notes>
 </file>
 
-<file path=ppt/notesSlides/notesSlide3.xml><?xml version="1.0" encoding="utf-8"?>
+<file path=ppt/notesSlides/notesSlide4.xml><?xml version="1.0" encoding="utf-8"?>
 <p:notes xmlns:a="http://schemas.openxmlformats.org/drawingml/2006/main" xmlns:r="http://schemas.openxmlformats.org/officeDocument/2006/relationships" xmlns:p="http://schemas.openxmlformats.org/presentationml/2006/main">
   <p:cSld>
     <p:spTree>
@@ -700,7 +809,7 @@
           <a:p>
             <a:fld id="{3009100B-F611-4B83-9AF4-01D82287C5E3}" type="slidenum">
               <a:rPr lang="en-US" smtClean="0"/>
-              <a:t>16</a:t>
+              <a:t>17</a:t>
             </a:fld>
             <a:endParaRPr lang="en-US"/>
           </a:p>
@@ -866,7 +975,7 @@
           <a:p>
             <a:fld id="{A978A291-C87E-4583-AB2D-5CAEB7F4C3DE}" type="datetime1">
               <a:rPr lang="en-US" smtClean="0"/>
-              <a:t>9/25/2025</a:t>
+              <a:t>9/26/2025</a:t>
             </a:fld>
             <a:endParaRPr lang="en-US"/>
           </a:p>
@@ -1064,7 +1173,7 @@
           <a:p>
             <a:fld id="{D9948513-3721-474C-BE80-7871409E66CD}" type="datetime1">
               <a:rPr lang="en-US" smtClean="0"/>
-              <a:t>9/25/2025</a:t>
+              <a:t>9/26/2025</a:t>
             </a:fld>
             <a:endParaRPr lang="en-US"/>
           </a:p>
@@ -1272,7 +1381,7 @@
           <a:p>
             <a:fld id="{9C3FEB91-5253-4CC2-B144-C35513BB77D7}" type="datetime1">
               <a:rPr lang="en-US" smtClean="0"/>
-              <a:t>9/25/2025</a:t>
+              <a:t>9/26/2025</a:t>
             </a:fld>
             <a:endParaRPr lang="en-US"/>
           </a:p>
@@ -1470,7 +1579,7 @@
           <a:p>
             <a:fld id="{09779B33-F1DD-498D-93C7-6B8EC548F6D2}" type="datetime1">
               <a:rPr lang="en-US" smtClean="0"/>
-              <a:t>9/25/2025</a:t>
+              <a:t>9/26/2025</a:t>
             </a:fld>
             <a:endParaRPr lang="en-US"/>
           </a:p>
@@ -1780,7 +1889,7 @@
           <a:p>
             <a:fld id="{6820CCE4-48AB-4521-B222-52BFE717148C}" type="datetime1">
               <a:rPr lang="en-US" smtClean="0"/>
-              <a:t>9/25/2025</a:t>
+              <a:t>9/26/2025</a:t>
             </a:fld>
             <a:endParaRPr lang="en-US"/>
           </a:p>
@@ -2045,7 +2154,7 @@
           <a:p>
             <a:fld id="{A3A19DA7-183B-4551-9BD3-7C8E51B9184E}" type="datetime1">
               <a:rPr lang="en-US" smtClean="0"/>
-              <a:t>9/25/2025</a:t>
+              <a:t>9/26/2025</a:t>
             </a:fld>
             <a:endParaRPr lang="en-US"/>
           </a:p>
@@ -2457,7 +2566,7 @@
           <a:p>
             <a:fld id="{4A926BFC-E9D5-40BE-8176-572BC6F88714}" type="datetime1">
               <a:rPr lang="en-US" smtClean="0"/>
-              <a:t>9/25/2025</a:t>
+              <a:t>9/26/2025</a:t>
             </a:fld>
             <a:endParaRPr lang="en-US"/>
           </a:p>
@@ -2598,7 +2707,7 @@
           <a:p>
             <a:fld id="{605F6A97-0388-4AFE-AA88-9F8EE659E9FB}" type="datetime1">
               <a:rPr lang="en-US" smtClean="0"/>
-              <a:t>9/25/2025</a:t>
+              <a:t>9/26/2025</a:t>
             </a:fld>
             <a:endParaRPr lang="en-US"/>
           </a:p>
@@ -2746,7 +2855,7 @@
           <a:p>
             <a:fld id="{97CBCB5A-D4E0-47ED-AB71-73E5049E5258}" type="datetime1">
               <a:rPr lang="en-US" smtClean="0"/>
-              <a:t>9/25/2025</a:t>
+              <a:t>9/26/2025</a:t>
             </a:fld>
             <a:endParaRPr lang="en-US"/>
           </a:p>
@@ -3057,7 +3166,7 @@
           <a:p>
             <a:fld id="{62FB721B-115B-4B8B-AFC8-140F455CE774}" type="datetime1">
               <a:rPr lang="en-US" smtClean="0"/>
-              <a:t>9/25/2025</a:t>
+              <a:t>9/26/2025</a:t>
             </a:fld>
             <a:endParaRPr lang="en-US"/>
           </a:p>
@@ -3345,7 +3454,7 @@
           <a:p>
             <a:fld id="{E32E6149-AA0E-47F5-B01B-3D90BEF64480}" type="datetime1">
               <a:rPr lang="en-US" smtClean="0"/>
-              <a:t>9/25/2025</a:t>
+              <a:t>9/26/2025</a:t>
             </a:fld>
             <a:endParaRPr lang="en-US"/>
           </a:p>
@@ -3587,7 +3696,7 @@
           <a:p>
             <a:fld id="{B9BE06C6-629D-4C3F-AD68-BEBDFC283B8F}" type="datetime1">
               <a:rPr lang="en-US" smtClean="0"/>
-              <a:t>9/25/2025</a:t>
+              <a:t>9/26/2025</a:t>
             </a:fld>
             <a:endParaRPr lang="en-US"/>
           </a:p>
@@ -4311,7 +4420,7 @@
           </a:ln>
           <a:extLst>
             <a:ext uri="{C572A759-6A51-4108-AA02-DFA0A04FC94B}">
-              <ma14:wrappingTextBoxFlag xmlns="" xmlns:ma14="http://schemas.microsoft.com/office/mac/drawingml/2011/main" val="1"/>
+              <ma14:wrappingTextBoxFlag xmlns:ma14="http://schemas.microsoft.com/office/mac/drawingml/2011/main" xmlns="" val="1"/>
             </a:ext>
           </a:extLst>
         </p:spPr>
@@ -4688,6 +4797,363 @@
       </p:grpSpPr>
       <p:sp>
         <p:nvSpPr>
+          <p:cNvPr id="2" name="Title 1">
+            <a:extLst>
+              <a:ext uri="{FF2B5EF4-FFF2-40B4-BE49-F238E27FC236}">
+                <a16:creationId xmlns:a16="http://schemas.microsoft.com/office/drawing/2014/main" id="{247C0EFB-FEBF-51F4-14C4-31463B2F5A8B}"/>
+              </a:ext>
+            </a:extLst>
+          </p:cNvPr>
+          <p:cNvSpPr>
+            <a:spLocks noGrp="1"/>
+          </p:cNvSpPr>
+          <p:nvPr>
+            <p:ph type="title"/>
+          </p:nvPr>
+        </p:nvSpPr>
+        <p:spPr>
+          <a:xfrm>
+            <a:off x="838200" y="228600"/>
+            <a:ext cx="10515600" cy="822960"/>
+          </a:xfrm>
+        </p:spPr>
+        <p:txBody>
+          <a:bodyPr/>
+          <a:lstStyle/>
+          <a:p>
+            <a:r>
+              <a:rPr lang="en-US" dirty="0"/>
+              <a:t>Simulating Method Categories in IntelliJ</a:t>
+            </a:r>
+          </a:p>
+        </p:txBody>
+      </p:sp>
+      <p:pic>
+        <p:nvPicPr>
+          <p:cNvPr id="5" name="Picture 4">
+            <a:extLst>
+              <a:ext uri="{FF2B5EF4-FFF2-40B4-BE49-F238E27FC236}">
+                <a16:creationId xmlns:a16="http://schemas.microsoft.com/office/drawing/2014/main" id="{B9E541C5-0700-ACBB-5D6C-5D47E474AE78}"/>
+              </a:ext>
+            </a:extLst>
+          </p:cNvPr>
+          <p:cNvPicPr>
+            <a:picLocks noChangeAspect="1"/>
+          </p:cNvPicPr>
+          <p:nvPr/>
+        </p:nvPicPr>
+        <p:blipFill>
+          <a:blip r:embed="rId2" cstate="print">
+            <a:extLst>
+              <a:ext uri="{28A0092B-C50C-407E-A947-70E740481C1C}">
+                <a14:useLocalDpi xmlns:a14="http://schemas.microsoft.com/office/drawing/2010/main" val="0"/>
+              </a:ext>
+            </a:extLst>
+          </a:blip>
+          <a:stretch>
+            <a:fillRect/>
+          </a:stretch>
+        </p:blipFill>
+        <p:spPr>
+          <a:xfrm>
+            <a:off x="838200" y="1513324"/>
+            <a:ext cx="7772400" cy="4708783"/>
+          </a:xfrm>
+          <a:prstGeom prst="rect">
+            <a:avLst/>
+          </a:prstGeom>
+        </p:spPr>
+      </p:pic>
+      <p:sp>
+        <p:nvSpPr>
+          <p:cNvPr id="6" name="TextBox 5">
+            <a:extLst>
+              <a:ext uri="{FF2B5EF4-FFF2-40B4-BE49-F238E27FC236}">
+                <a16:creationId xmlns:a16="http://schemas.microsoft.com/office/drawing/2014/main" id="{207EEA28-248E-27BD-0AC3-AC7DB5307E67}"/>
+              </a:ext>
+            </a:extLst>
+          </p:cNvPr>
+          <p:cNvSpPr txBox="1"/>
+          <p:nvPr/>
+        </p:nvSpPr>
+        <p:spPr>
+          <a:xfrm>
+            <a:off x="0" y="6126480"/>
+            <a:ext cx="731520" cy="584775"/>
+          </a:xfrm>
+          <a:prstGeom prst="rect">
+            <a:avLst/>
+          </a:prstGeom>
+          <a:noFill/>
+          <a:ln w="12700" cap="flat">
+            <a:noFill/>
+            <a:miter lim="400000"/>
+          </a:ln>
+          <a:effectLst/>
+          <a:sp3d/>
+        </p:spPr>
+        <p:style>
+          <a:lnRef idx="0">
+            <a:scrgbClr r="0" g="0" b="0"/>
+          </a:lnRef>
+          <a:fillRef idx="0">
+            <a:scrgbClr r="0" g="0" b="0"/>
+          </a:fillRef>
+          <a:effectRef idx="0">
+            <a:scrgbClr r="0" g="0" b="0"/>
+          </a:effectRef>
+          <a:fontRef idx="none"/>
+        </p:style>
+        <p:txBody>
+          <a:bodyPr wrap="square">
+            <a:spAutoFit/>
+          </a:bodyPr>
+          <a:lstStyle/>
+          <a:p>
+            <a:r>
+              <a:rPr lang="en-US" sz="3200" b="0" i="0" u="none" strike="noStrike" dirty="0">
+                <a:solidFill>
+                  <a:srgbClr val="000000"/>
+                </a:solidFill>
+                <a:effectLst/>
+                <a:latin typeface="Arial" panose="020B0604020202020204" pitchFamily="34" charset="0"/>
+              </a:rPr>
+              <a:t>🐿️</a:t>
+            </a:r>
+            <a:endParaRPr lang="en-US" sz="3200" dirty="0"/>
+          </a:p>
+        </p:txBody>
+      </p:sp>
+      <p:sp>
+        <p:nvSpPr>
+          <p:cNvPr id="3" name="Slide Number Placeholder 2">
+            <a:extLst>
+              <a:ext uri="{FF2B5EF4-FFF2-40B4-BE49-F238E27FC236}">
+                <a16:creationId xmlns:a16="http://schemas.microsoft.com/office/drawing/2014/main" id="{06321D37-A392-03EE-586D-5FAD9C6A6E0D}"/>
+              </a:ext>
+            </a:extLst>
+          </p:cNvPr>
+          <p:cNvSpPr>
+            <a:spLocks noGrp="1"/>
+          </p:cNvSpPr>
+          <p:nvPr>
+            <p:ph type="sldNum" sz="quarter" idx="12"/>
+          </p:nvPr>
+        </p:nvSpPr>
+        <p:spPr/>
+        <p:txBody>
+          <a:bodyPr/>
+          <a:lstStyle/>
+          <a:p>
+            <a:fld id="{6874CE7D-5D74-4EC3-A871-8F42005EC53C}" type="slidenum">
+              <a:rPr lang="en-US" smtClean="0"/>
+              <a:t>10</a:t>
+            </a:fld>
+            <a:endParaRPr lang="en-US"/>
+          </a:p>
+        </p:txBody>
+      </p:sp>
+      <p:sp>
+        <p:nvSpPr>
+          <p:cNvPr id="4" name="TextBox 3">
+            <a:extLst>
+              <a:ext uri="{FF2B5EF4-FFF2-40B4-BE49-F238E27FC236}">
+                <a16:creationId xmlns:a16="http://schemas.microsoft.com/office/drawing/2014/main" id="{D06CED0B-071D-42E7-AF1F-66B77D6AD5B3}"/>
+              </a:ext>
+            </a:extLst>
+          </p:cNvPr>
+          <p:cNvSpPr txBox="1"/>
+          <p:nvPr/>
+        </p:nvSpPr>
+        <p:spPr>
+          <a:xfrm>
+            <a:off x="838200" y="1097776"/>
+            <a:ext cx="4229043" cy="369332"/>
+          </a:xfrm>
+          <a:prstGeom prst="rect">
+            <a:avLst/>
+          </a:prstGeom>
+          <a:noFill/>
+        </p:spPr>
+        <p:txBody>
+          <a:bodyPr wrap="none" rtlCol="0">
+            <a:spAutoFit/>
+          </a:bodyPr>
+          <a:lstStyle/>
+          <a:p>
+            <a:pPr marL="285750" indent="-285750">
+              <a:buFont typeface="Arial" panose="020B0604020202020204" pitchFamily="34" charset="0"/>
+              <a:buChar char="•"/>
+            </a:pPr>
+            <a:r>
+              <a:rPr lang="en-US" dirty="0"/>
+              <a:t>Using </a:t>
+            </a:r>
+            <a:r>
+              <a:rPr lang="en-US" b="1" dirty="0"/>
+              <a:t>Custom Code Folding Regions</a:t>
+            </a:r>
+          </a:p>
+        </p:txBody>
+      </p:sp>
+      <p:pic>
+        <p:nvPicPr>
+          <p:cNvPr id="9" name="Picture 8" descr="A screenshot of a computer code&#10;&#10;AI-generated content may be incorrect.">
+            <a:extLst>
+              <a:ext uri="{FF2B5EF4-FFF2-40B4-BE49-F238E27FC236}">
+                <a16:creationId xmlns:a16="http://schemas.microsoft.com/office/drawing/2014/main" id="{D9A31B18-ECB7-A23A-9950-4393F056BD57}"/>
+              </a:ext>
+            </a:extLst>
+          </p:cNvPr>
+          <p:cNvPicPr>
+            <a:picLocks noChangeAspect="1"/>
+          </p:cNvPicPr>
+          <p:nvPr/>
+        </p:nvPicPr>
+        <p:blipFill>
+          <a:blip r:embed="rId3">
+            <a:extLst>
+              <a:ext uri="{28A0092B-C50C-407E-A947-70E740481C1C}">
+                <a14:useLocalDpi xmlns:a14="http://schemas.microsoft.com/office/drawing/2010/main" val="0"/>
+              </a:ext>
+            </a:extLst>
+          </a:blip>
+          <a:stretch>
+            <a:fillRect/>
+          </a:stretch>
+        </p:blipFill>
+        <p:spPr>
+          <a:xfrm>
+            <a:off x="6372963" y="1060309"/>
+            <a:ext cx="4587479" cy="5296041"/>
+          </a:xfrm>
+          <a:prstGeom prst="rect">
+            <a:avLst/>
+          </a:prstGeom>
+          <a:ln w="25400">
+            <a:solidFill>
+              <a:schemeClr val="accent1"/>
+            </a:solidFill>
+          </a:ln>
+          <a:effectLst>
+            <a:softEdge rad="0"/>
+          </a:effectLst>
+        </p:spPr>
+      </p:pic>
+      <p:cxnSp>
+        <p:nvCxnSpPr>
+          <p:cNvPr id="11" name="Straight Arrow Connector 10">
+            <a:extLst>
+              <a:ext uri="{FF2B5EF4-FFF2-40B4-BE49-F238E27FC236}">
+                <a16:creationId xmlns:a16="http://schemas.microsoft.com/office/drawing/2014/main" id="{081A2A41-9C6A-43D2-8239-27968DE6245B}"/>
+              </a:ext>
+            </a:extLst>
+          </p:cNvPr>
+          <p:cNvCxnSpPr>
+            <a:cxnSpLocks/>
+          </p:cNvCxnSpPr>
+          <p:nvPr/>
+        </p:nvCxnSpPr>
+        <p:spPr>
+          <a:xfrm flipV="1">
+            <a:off x="3416643" y="1334530"/>
+            <a:ext cx="2910016" cy="1075038"/>
+          </a:xfrm>
+          <a:prstGeom prst="straightConnector1">
+            <a:avLst/>
+          </a:prstGeom>
+          <a:ln>
+            <a:tailEnd type="triangle"/>
+          </a:ln>
+        </p:spPr>
+        <p:style>
+          <a:lnRef idx="2">
+            <a:schemeClr val="accent1"/>
+          </a:lnRef>
+          <a:fillRef idx="0">
+            <a:schemeClr val="accent1"/>
+          </a:fillRef>
+          <a:effectRef idx="1">
+            <a:schemeClr val="accent1"/>
+          </a:effectRef>
+          <a:fontRef idx="minor">
+            <a:schemeClr val="tx1"/>
+          </a:fontRef>
+        </p:style>
+      </p:cxnSp>
+      <p:cxnSp>
+        <p:nvCxnSpPr>
+          <p:cNvPr id="12" name="Straight Arrow Connector 11">
+            <a:extLst>
+              <a:ext uri="{FF2B5EF4-FFF2-40B4-BE49-F238E27FC236}">
+                <a16:creationId xmlns:a16="http://schemas.microsoft.com/office/drawing/2014/main" id="{E8630C00-5E55-5BF6-F05F-92601C82362D}"/>
+              </a:ext>
+            </a:extLst>
+          </p:cNvPr>
+          <p:cNvCxnSpPr>
+            <a:cxnSpLocks/>
+          </p:cNvCxnSpPr>
+          <p:nvPr/>
+        </p:nvCxnSpPr>
+        <p:spPr>
+          <a:xfrm>
+            <a:off x="3416643" y="2409568"/>
+            <a:ext cx="2910016" cy="3651421"/>
+          </a:xfrm>
+          <a:prstGeom prst="straightConnector1">
+            <a:avLst/>
+          </a:prstGeom>
+          <a:ln>
+            <a:tailEnd type="triangle"/>
+          </a:ln>
+        </p:spPr>
+        <p:style>
+          <a:lnRef idx="2">
+            <a:schemeClr val="accent1"/>
+          </a:lnRef>
+          <a:fillRef idx="0">
+            <a:schemeClr val="accent1"/>
+          </a:fillRef>
+          <a:effectRef idx="1">
+            <a:schemeClr val="accent1"/>
+          </a:effectRef>
+          <a:fontRef idx="minor">
+            <a:schemeClr val="tx1"/>
+          </a:fontRef>
+        </p:style>
+      </p:cxnSp>
+    </p:spTree>
+    <p:extLst>
+      <p:ext uri="{BB962C8B-B14F-4D97-AF65-F5344CB8AC3E}">
+        <p14:creationId xmlns:p14="http://schemas.microsoft.com/office/powerpoint/2010/main" val="1256773908"/>
+      </p:ext>
+    </p:extLst>
+  </p:cSld>
+  <p:clrMapOvr>
+    <a:masterClrMapping/>
+  </p:clrMapOvr>
+</p:sld>
+</file>
+
+<file path=ppt/slides/slide11.xml><?xml version="1.0" encoding="utf-8"?>
+<p:sld xmlns:a="http://schemas.openxmlformats.org/drawingml/2006/main" xmlns:r="http://schemas.openxmlformats.org/officeDocument/2006/relationships" xmlns:p="http://schemas.openxmlformats.org/presentationml/2006/main">
+  <p:cSld>
+    <p:spTree>
+      <p:nvGrpSpPr>
+        <p:cNvPr id="1" name=""/>
+        <p:cNvGrpSpPr/>
+        <p:nvPr/>
+      </p:nvGrpSpPr>
+      <p:grpSpPr>
+        <a:xfrm>
+          <a:off x="0" y="0"/>
+          <a:ext cx="0" cy="0"/>
+          <a:chOff x="0" y="0"/>
+          <a:chExt cx="0" cy="0"/>
+        </a:xfrm>
+      </p:grpSpPr>
+      <p:sp>
+        <p:nvSpPr>
           <p:cNvPr id="295" name="Title 1"/>
           <p:cNvSpPr txBox="1">
             <a:spLocks noGrp="1"/>
@@ -4738,7 +5204,7 @@
           <a:p>
             <a:fld id="{6874CE7D-5D74-4EC3-A871-8F42005EC53C}" type="slidenum">
               <a:rPr lang="en-US" smtClean="0"/>
-              <a:t>10</a:t>
+              <a:t>11</a:t>
             </a:fld>
             <a:endParaRPr lang="en-US"/>
           </a:p>
@@ -4752,7 +5218,7 @@
 </p:sld>
 </file>
 
-<file path=ppt/slides/slide11.xml><?xml version="1.0" encoding="utf-8"?>
+<file path=ppt/slides/slide12.xml><?xml version="1.0" encoding="utf-8"?>
 <p:sld xmlns:a="http://schemas.openxmlformats.org/drawingml/2006/main" xmlns:r="http://schemas.openxmlformats.org/officeDocument/2006/relationships" xmlns:p="http://schemas.openxmlformats.org/presentationml/2006/main">
   <p:cSld>
     <p:spTree>
@@ -5298,7 +5764,7 @@
           <a:p>
             <a:fld id="{6874CE7D-5D74-4EC3-A871-8F42005EC53C}" type="slidenum">
               <a:rPr lang="en-US" smtClean="0"/>
-              <a:t>11</a:t>
+              <a:t>12</a:t>
             </a:fld>
             <a:endParaRPr lang="en-US"/>
           </a:p>
@@ -5317,7 +5783,7 @@
 </p:sld>
 </file>
 
-<file path=ppt/slides/slide12.xml><?xml version="1.0" encoding="utf-8"?>
+<file path=ppt/slides/slide13.xml><?xml version="1.0" encoding="utf-8"?>
 <p:sld xmlns:a="http://schemas.openxmlformats.org/drawingml/2006/main" xmlns:r="http://schemas.openxmlformats.org/officeDocument/2006/relationships" xmlns:p="http://schemas.openxmlformats.org/presentationml/2006/main">
   <p:cSld>
     <p:spTree>
@@ -5395,7 +5861,7 @@
           <a:p>
             <a:fld id="{6874CE7D-5D74-4EC3-A871-8F42005EC53C}" type="slidenum">
               <a:rPr lang="en-US" smtClean="0"/>
-              <a:t>12</a:t>
+              <a:t>13</a:t>
             </a:fld>
             <a:endParaRPr lang="en-US"/>
           </a:p>
@@ -5510,7 +5976,7 @@
 </p:sld>
 </file>
 
-<file path=ppt/slides/slide13.xml><?xml version="1.0" encoding="utf-8"?>
+<file path=ppt/slides/slide14.xml><?xml version="1.0" encoding="utf-8"?>
 <p:sld xmlns:a="http://schemas.openxmlformats.org/drawingml/2006/main" xmlns:r="http://schemas.openxmlformats.org/officeDocument/2006/relationships" xmlns:p="http://schemas.openxmlformats.org/presentationml/2006/main">
   <p:cSld>
     <p:spTree>
@@ -5679,7 +6145,7 @@
           <a:p>
             <a:fld id="{6874CE7D-5D74-4EC3-A871-8F42005EC53C}" type="slidenum">
               <a:rPr lang="en-US" smtClean="0"/>
-              <a:t>13</a:t>
+              <a:t>14</a:t>
             </a:fld>
             <a:endParaRPr lang="en-US"/>
           </a:p>
@@ -5698,7 +6164,7 @@
 </p:sld>
 </file>
 
-<file path=ppt/slides/slide14.xml><?xml version="1.0" encoding="utf-8"?>
+<file path=ppt/slides/slide15.xml><?xml version="1.0" encoding="utf-8"?>
 <p:sld xmlns:a="http://schemas.openxmlformats.org/drawingml/2006/main" xmlns:r="http://schemas.openxmlformats.org/officeDocument/2006/relationships" xmlns:p="http://schemas.openxmlformats.org/presentationml/2006/main">
   <p:cSld>
     <p:spTree>
@@ -5883,7 +6349,7 @@
           <a:p>
             <a:fld id="{6874CE7D-5D74-4EC3-A871-8F42005EC53C}" type="slidenum">
               <a:rPr lang="en-US" smtClean="0"/>
-              <a:t>14</a:t>
+              <a:t>15</a:t>
             </a:fld>
             <a:endParaRPr lang="en-US"/>
           </a:p>
@@ -5902,7 +6368,7 @@
 </p:sld>
 </file>
 
-<file path=ppt/slides/slide15.xml><?xml version="1.0" encoding="utf-8"?>
+<file path=ppt/slides/slide16.xml><?xml version="1.0" encoding="utf-8"?>
 <p:sld xmlns:a="http://schemas.openxmlformats.org/drawingml/2006/main" xmlns:r="http://schemas.openxmlformats.org/officeDocument/2006/relationships" xmlns:p="http://schemas.openxmlformats.org/presentationml/2006/main">
   <p:cSld>
     <p:spTree>
@@ -6077,7 +6543,7 @@
           <a:p>
             <a:fld id="{6874CE7D-5D74-4EC3-A871-8F42005EC53C}" type="slidenum">
               <a:rPr lang="en-US" smtClean="0"/>
-              <a:t>15</a:t>
+              <a:t>16</a:t>
             </a:fld>
             <a:endParaRPr lang="en-US"/>
           </a:p>
@@ -6091,7 +6557,7 @@
 </p:sld>
 </file>
 
-<file path=ppt/slides/slide16.xml><?xml version="1.0" encoding="utf-8"?>
+<file path=ppt/slides/slide17.xml><?xml version="1.0" encoding="utf-8"?>
 <p:sld xmlns:a="http://schemas.openxmlformats.org/drawingml/2006/main" xmlns:r="http://schemas.openxmlformats.org/officeDocument/2006/relationships" xmlns:p="http://schemas.openxmlformats.org/presentationml/2006/main">
   <p:cSld>
     <p:spTree>
@@ -9715,7 +10181,7 @@
           <a:p>
             <a:fld id="{6874CE7D-5D74-4EC3-A871-8F42005EC53C}" type="slidenum">
               <a:rPr lang="en-US" smtClean="0"/>
-              <a:t>16</a:t>
+              <a:t>17</a:t>
             </a:fld>
             <a:endParaRPr lang="en-US"/>
           </a:p>
@@ -9734,7 +10200,7 @@
 </p:sld>
 </file>
 
-<file path=ppt/slides/slide17.xml><?xml version="1.0" encoding="utf-8"?>
+<file path=ppt/slides/slide18.xml><?xml version="1.0" encoding="utf-8"?>
 <p:sld xmlns:a="http://schemas.openxmlformats.org/drawingml/2006/main" xmlns:r="http://schemas.openxmlformats.org/officeDocument/2006/relationships" xmlns:p="http://schemas.openxmlformats.org/presentationml/2006/main">
   <p:cSld>
     <p:spTree>
@@ -9943,7 +10409,7 @@
           <a:p>
             <a:fld id="{6874CE7D-5D74-4EC3-A871-8F42005EC53C}" type="slidenum">
               <a:rPr lang="en-US" smtClean="0"/>
-              <a:t>17</a:t>
+              <a:t>18</a:t>
             </a:fld>
             <a:endParaRPr lang="en-US"/>
           </a:p>
@@ -9962,7 +10428,7 @@
 </p:sld>
 </file>
 
-<file path=ppt/slides/slide18.xml><?xml version="1.0" encoding="utf-8"?>
+<file path=ppt/slides/slide19.xml><?xml version="1.0" encoding="utf-8"?>
 <p:sld xmlns:a="http://schemas.openxmlformats.org/drawingml/2006/main" xmlns:r="http://schemas.openxmlformats.org/officeDocument/2006/relationships" xmlns:p="http://schemas.openxmlformats.org/presentationml/2006/main">
   <p:cSld>
     <p:spTree>
@@ -10171,7 +10637,7 @@
           <a:p>
             <a:fld id="{6874CE7D-5D74-4EC3-A871-8F42005EC53C}" type="slidenum">
               <a:rPr lang="en-US" smtClean="0"/>
-              <a:t>18</a:t>
+              <a:t>19</a:t>
             </a:fld>
             <a:endParaRPr lang="en-US"/>
           </a:p>
@@ -10181,281 +10647,6 @@
     <p:extLst>
       <p:ext uri="{BB962C8B-B14F-4D97-AF65-F5344CB8AC3E}">
         <p14:creationId xmlns:p14="http://schemas.microsoft.com/office/powerpoint/2010/main" val="2680959741"/>
-      </p:ext>
-    </p:extLst>
-  </p:cSld>
-  <p:clrMapOvr>
-    <a:masterClrMapping/>
-  </p:clrMapOvr>
-</p:sld>
-</file>
-
-<file path=ppt/slides/slide19.xml><?xml version="1.0" encoding="utf-8"?>
-<p:sld xmlns:a="http://schemas.openxmlformats.org/drawingml/2006/main" xmlns:r="http://schemas.openxmlformats.org/officeDocument/2006/relationships" xmlns:p="http://schemas.openxmlformats.org/presentationml/2006/main">
-  <p:cSld>
-    <p:spTree>
-      <p:nvGrpSpPr>
-        <p:cNvPr id="1" name=""/>
-        <p:cNvGrpSpPr/>
-        <p:nvPr/>
-      </p:nvGrpSpPr>
-      <p:grpSpPr>
-        <a:xfrm>
-          <a:off x="0" y="0"/>
-          <a:ext cx="0" cy="0"/>
-          <a:chOff x="0" y="0"/>
-          <a:chExt cx="0" cy="0"/>
-        </a:xfrm>
-      </p:grpSpPr>
-      <p:sp>
-        <p:nvSpPr>
-          <p:cNvPr id="2" name="Title 1">
-            <a:extLst>
-              <a:ext uri="{FF2B5EF4-FFF2-40B4-BE49-F238E27FC236}">
-                <a16:creationId xmlns:a16="http://schemas.microsoft.com/office/drawing/2014/main" id="{8DA5C3F1-CC2A-F123-BDD7-5E7E9C6E9D56}"/>
-              </a:ext>
-            </a:extLst>
-          </p:cNvPr>
-          <p:cNvSpPr>
-            <a:spLocks noGrp="1"/>
-          </p:cNvSpPr>
-          <p:nvPr>
-            <p:ph type="title"/>
-          </p:nvPr>
-        </p:nvSpPr>
-        <p:spPr/>
-        <p:txBody>
-          <a:bodyPr/>
-          <a:lstStyle/>
-          <a:p>
-            <a:r>
-              <a:rPr lang="en-US" dirty="0"/>
-              <a:t>Takeaways</a:t>
-            </a:r>
-          </a:p>
-        </p:txBody>
-      </p:sp>
-      <p:sp>
-        <p:nvSpPr>
-          <p:cNvPr id="3" name="Content Placeholder 2">
-            <a:extLst>
-              <a:ext uri="{FF2B5EF4-FFF2-40B4-BE49-F238E27FC236}">
-                <a16:creationId xmlns:a16="http://schemas.microsoft.com/office/drawing/2014/main" id="{D89EB467-ACEC-2CB6-FD26-728501ED3DE8}"/>
-              </a:ext>
-            </a:extLst>
-          </p:cNvPr>
-          <p:cNvSpPr>
-            <a:spLocks noGrp="1"/>
-          </p:cNvSpPr>
-          <p:nvPr>
-            <p:ph idx="1"/>
-          </p:nvPr>
-        </p:nvSpPr>
-        <p:spPr/>
-        <p:txBody>
-          <a:bodyPr>
-            <a:normAutofit/>
-          </a:bodyPr>
-          <a:lstStyle/>
-          <a:p>
-            <a:r>
-              <a:rPr lang="en-US" dirty="0"/>
-              <a:t>Expect more from your collections </a:t>
-            </a:r>
-          </a:p>
-          <a:p>
-            <a:r>
-              <a:rPr lang="en-US" dirty="0"/>
-              <a:t>Memory is an expensive resource – use it wisely</a:t>
-            </a:r>
-            <a:endParaRPr lang="en-US" dirty="0">
-              <a:solidFill>
-                <a:srgbClr val="FF0000"/>
-              </a:solidFill>
-            </a:endParaRPr>
-          </a:p>
-          <a:p>
-            <a:r>
-              <a:rPr lang="en-US" dirty="0"/>
-              <a:t>Eclipse Collections – more features with less waste</a:t>
-            </a:r>
-          </a:p>
-          <a:p>
-            <a:r>
-              <a:rPr lang="en-US" dirty="0"/>
-              <a:t>Intention revealing code – easy to write, easy to read!</a:t>
-            </a:r>
-          </a:p>
-          <a:p>
-            <a:r>
-              <a:rPr lang="en-US" dirty="0"/>
-              <a:t>Many learning resources available</a:t>
-            </a:r>
-          </a:p>
-          <a:p>
-            <a:pPr lvl="1"/>
-            <a:r>
-              <a:rPr lang="en-US" dirty="0"/>
-              <a:t>Source code w/ Reference Guide in </a:t>
-            </a:r>
-            <a:r>
-              <a:rPr lang="en-US" dirty="0" err="1"/>
-              <a:t>AsciiDoc</a:t>
-            </a:r>
-            <a:endParaRPr lang="en-US" dirty="0"/>
-          </a:p>
-          <a:p>
-            <a:pPr lvl="2"/>
-            <a:r>
-              <a:rPr lang="en-US" dirty="0">
-                <a:hlinkClick r:id="rId2"/>
-              </a:rPr>
-              <a:t>https://github.com/eclipse-collections/eclipse-collections</a:t>
-            </a:r>
-            <a:r>
-              <a:rPr lang="en-US" dirty="0"/>
-              <a:t> </a:t>
-            </a:r>
-          </a:p>
-          <a:p>
-            <a:pPr lvl="1"/>
-            <a:r>
-              <a:rPr lang="en-US" dirty="0"/>
-              <a:t>Code katas </a:t>
-            </a:r>
-          </a:p>
-          <a:p>
-            <a:pPr lvl="2"/>
-            <a:r>
-              <a:rPr lang="en-US" dirty="0">
-                <a:hlinkClick r:id="rId3"/>
-              </a:rPr>
-              <a:t>https://github.com/eclipse-collections/eclipse-collections-kata</a:t>
-            </a:r>
-            <a:r>
-              <a:rPr lang="en-US" dirty="0"/>
-              <a:t>  </a:t>
-            </a:r>
-          </a:p>
-          <a:p>
-            <a:pPr lvl="1"/>
-            <a:r>
-              <a:rPr lang="en-US" dirty="0"/>
-              <a:t>Book: Eclipse Collections Categorically</a:t>
-            </a:r>
-          </a:p>
-        </p:txBody>
-      </p:sp>
-      <p:pic>
-        <p:nvPicPr>
-          <p:cNvPr id="13" name="Picture 12">
-            <a:extLst>
-              <a:ext uri="{FF2B5EF4-FFF2-40B4-BE49-F238E27FC236}">
-                <a16:creationId xmlns:a16="http://schemas.microsoft.com/office/drawing/2014/main" id="{66A072D1-8C1B-C6A1-8390-02C3F89D971A}"/>
-              </a:ext>
-            </a:extLst>
-          </p:cNvPr>
-          <p:cNvPicPr>
-            <a:picLocks noChangeAspect="1"/>
-          </p:cNvPicPr>
-          <p:nvPr/>
-        </p:nvPicPr>
-        <p:blipFill>
-          <a:blip r:embed="rId4"/>
-          <a:stretch>
-            <a:fillRect/>
-          </a:stretch>
-        </p:blipFill>
-        <p:spPr>
-          <a:xfrm rot="305461">
-            <a:off x="9300580" y="3661858"/>
-            <a:ext cx="2113053" cy="2607681"/>
-          </a:xfrm>
-          <a:prstGeom prst="rect">
-            <a:avLst/>
-          </a:prstGeom>
-          <a:ln>
-            <a:noFill/>
-          </a:ln>
-          <a:effectLst>
-            <a:outerShdw blurRad="190500" algn="tl" rotWithShape="0">
-              <a:srgbClr val="000000">
-                <a:alpha val="70000"/>
-              </a:srgbClr>
-            </a:outerShdw>
-          </a:effectLst>
-          <a:scene3d>
-            <a:camera prst="perspectiveAbove">
-              <a:rot lat="0" lon="0" rev="0"/>
-            </a:camera>
-            <a:lightRig rig="threePt" dir="t"/>
-          </a:scene3d>
-        </p:spPr>
-      </p:pic>
-      <p:sp>
-        <p:nvSpPr>
-          <p:cNvPr id="4" name="TextBox 3">
-            <a:extLst>
-              <a:ext uri="{FF2B5EF4-FFF2-40B4-BE49-F238E27FC236}">
-                <a16:creationId xmlns:a16="http://schemas.microsoft.com/office/drawing/2014/main" id="{2DCEAE4B-1338-54D5-01E4-C5F93152FED3}"/>
-              </a:ext>
-            </a:extLst>
-          </p:cNvPr>
-          <p:cNvSpPr txBox="1"/>
-          <p:nvPr/>
-        </p:nvSpPr>
-        <p:spPr>
-          <a:xfrm>
-            <a:off x="0" y="6126480"/>
-            <a:ext cx="731520" cy="584775"/>
-          </a:xfrm>
-          <a:prstGeom prst="rect">
-            <a:avLst/>
-          </a:prstGeom>
-          <a:noFill/>
-          <a:ln w="12700" cap="flat">
-            <a:noFill/>
-            <a:miter lim="400000"/>
-          </a:ln>
-          <a:effectLst/>
-          <a:sp3d/>
-        </p:spPr>
-        <p:style>
-          <a:lnRef idx="0">
-            <a:scrgbClr r="0" g="0" b="0"/>
-          </a:lnRef>
-          <a:fillRef idx="0">
-            <a:scrgbClr r="0" g="0" b="0"/>
-          </a:fillRef>
-          <a:effectRef idx="0">
-            <a:scrgbClr r="0" g="0" b="0"/>
-          </a:effectRef>
-          <a:fontRef idx="none"/>
-        </p:style>
-        <p:txBody>
-          <a:bodyPr wrap="square">
-            <a:spAutoFit/>
-          </a:bodyPr>
-          <a:lstStyle/>
-          <a:p>
-            <a:r>
-              <a:rPr lang="en-US" sz="3200" b="0" i="0" u="none" strike="noStrike" dirty="0">
-                <a:solidFill>
-                  <a:srgbClr val="000000"/>
-                </a:solidFill>
-                <a:effectLst/>
-                <a:latin typeface="Arial" panose="020B0604020202020204" pitchFamily="34" charset="0"/>
-              </a:rPr>
-              <a:t>🐿️</a:t>
-            </a:r>
-            <a:endParaRPr lang="en-US" sz="3200" dirty="0"/>
-          </a:p>
-        </p:txBody>
-      </p:sp>
-    </p:spTree>
-    <p:extLst>
-      <p:ext uri="{BB962C8B-B14F-4D97-AF65-F5344CB8AC3E}">
-        <p14:creationId xmlns:p14="http://schemas.microsoft.com/office/powerpoint/2010/main" val="1388079507"/>
       </p:ext>
     </p:extLst>
   </p:cSld>
@@ -10813,6 +11004,281 @@
       </p:grpSpPr>
       <p:sp>
         <p:nvSpPr>
+          <p:cNvPr id="2" name="Title 1">
+            <a:extLst>
+              <a:ext uri="{FF2B5EF4-FFF2-40B4-BE49-F238E27FC236}">
+                <a16:creationId xmlns:a16="http://schemas.microsoft.com/office/drawing/2014/main" id="{8DA5C3F1-CC2A-F123-BDD7-5E7E9C6E9D56}"/>
+              </a:ext>
+            </a:extLst>
+          </p:cNvPr>
+          <p:cNvSpPr>
+            <a:spLocks noGrp="1"/>
+          </p:cNvSpPr>
+          <p:nvPr>
+            <p:ph type="title"/>
+          </p:nvPr>
+        </p:nvSpPr>
+        <p:spPr/>
+        <p:txBody>
+          <a:bodyPr/>
+          <a:lstStyle/>
+          <a:p>
+            <a:r>
+              <a:rPr lang="en-US" dirty="0"/>
+              <a:t>Takeaways</a:t>
+            </a:r>
+          </a:p>
+        </p:txBody>
+      </p:sp>
+      <p:sp>
+        <p:nvSpPr>
+          <p:cNvPr id="3" name="Content Placeholder 2">
+            <a:extLst>
+              <a:ext uri="{FF2B5EF4-FFF2-40B4-BE49-F238E27FC236}">
+                <a16:creationId xmlns:a16="http://schemas.microsoft.com/office/drawing/2014/main" id="{D89EB467-ACEC-2CB6-FD26-728501ED3DE8}"/>
+              </a:ext>
+            </a:extLst>
+          </p:cNvPr>
+          <p:cNvSpPr>
+            <a:spLocks noGrp="1"/>
+          </p:cNvSpPr>
+          <p:nvPr>
+            <p:ph idx="1"/>
+          </p:nvPr>
+        </p:nvSpPr>
+        <p:spPr/>
+        <p:txBody>
+          <a:bodyPr>
+            <a:normAutofit/>
+          </a:bodyPr>
+          <a:lstStyle/>
+          <a:p>
+            <a:r>
+              <a:rPr lang="en-US" dirty="0"/>
+              <a:t>Expect more from your collections </a:t>
+            </a:r>
+          </a:p>
+          <a:p>
+            <a:r>
+              <a:rPr lang="en-US" dirty="0"/>
+              <a:t>Memory is an expensive resource – use it wisely</a:t>
+            </a:r>
+            <a:endParaRPr lang="en-US" dirty="0">
+              <a:solidFill>
+                <a:srgbClr val="FF0000"/>
+              </a:solidFill>
+            </a:endParaRPr>
+          </a:p>
+          <a:p>
+            <a:r>
+              <a:rPr lang="en-US" dirty="0"/>
+              <a:t>Eclipse Collections – more features with less waste</a:t>
+            </a:r>
+          </a:p>
+          <a:p>
+            <a:r>
+              <a:rPr lang="en-US" dirty="0"/>
+              <a:t>Intention revealing code – easy to write, easy to read!</a:t>
+            </a:r>
+          </a:p>
+          <a:p>
+            <a:r>
+              <a:rPr lang="en-US" dirty="0"/>
+              <a:t>Many learning resources available</a:t>
+            </a:r>
+          </a:p>
+          <a:p>
+            <a:pPr lvl="1"/>
+            <a:r>
+              <a:rPr lang="en-US" dirty="0"/>
+              <a:t>Source code w/ Reference Guide in </a:t>
+            </a:r>
+            <a:r>
+              <a:rPr lang="en-US" dirty="0" err="1"/>
+              <a:t>AsciiDoc</a:t>
+            </a:r>
+            <a:endParaRPr lang="en-US" dirty="0"/>
+          </a:p>
+          <a:p>
+            <a:pPr lvl="2"/>
+            <a:r>
+              <a:rPr lang="en-US" dirty="0">
+                <a:hlinkClick r:id="rId2"/>
+              </a:rPr>
+              <a:t>https://github.com/eclipse-collections/eclipse-collections</a:t>
+            </a:r>
+            <a:r>
+              <a:rPr lang="en-US" dirty="0"/>
+              <a:t> </a:t>
+            </a:r>
+          </a:p>
+          <a:p>
+            <a:pPr lvl="1"/>
+            <a:r>
+              <a:rPr lang="en-US" dirty="0"/>
+              <a:t>Code katas </a:t>
+            </a:r>
+          </a:p>
+          <a:p>
+            <a:pPr lvl="2"/>
+            <a:r>
+              <a:rPr lang="en-US" dirty="0">
+                <a:hlinkClick r:id="rId3"/>
+              </a:rPr>
+              <a:t>https://github.com/eclipse-collections/eclipse-collections-kata</a:t>
+            </a:r>
+            <a:r>
+              <a:rPr lang="en-US" dirty="0"/>
+              <a:t>  </a:t>
+            </a:r>
+          </a:p>
+          <a:p>
+            <a:pPr lvl="1"/>
+            <a:r>
+              <a:rPr lang="en-US" dirty="0"/>
+              <a:t>Book: Eclipse Collections Categorically</a:t>
+            </a:r>
+          </a:p>
+        </p:txBody>
+      </p:sp>
+      <p:pic>
+        <p:nvPicPr>
+          <p:cNvPr id="13" name="Picture 12">
+            <a:extLst>
+              <a:ext uri="{FF2B5EF4-FFF2-40B4-BE49-F238E27FC236}">
+                <a16:creationId xmlns:a16="http://schemas.microsoft.com/office/drawing/2014/main" id="{66A072D1-8C1B-C6A1-8390-02C3F89D971A}"/>
+              </a:ext>
+            </a:extLst>
+          </p:cNvPr>
+          <p:cNvPicPr>
+            <a:picLocks noChangeAspect="1"/>
+          </p:cNvPicPr>
+          <p:nvPr/>
+        </p:nvPicPr>
+        <p:blipFill>
+          <a:blip r:embed="rId4"/>
+          <a:stretch>
+            <a:fillRect/>
+          </a:stretch>
+        </p:blipFill>
+        <p:spPr>
+          <a:xfrm rot="305461">
+            <a:off x="9300580" y="3661858"/>
+            <a:ext cx="2113053" cy="2607681"/>
+          </a:xfrm>
+          <a:prstGeom prst="rect">
+            <a:avLst/>
+          </a:prstGeom>
+          <a:ln>
+            <a:noFill/>
+          </a:ln>
+          <a:effectLst>
+            <a:outerShdw blurRad="190500" algn="tl" rotWithShape="0">
+              <a:srgbClr val="000000">
+                <a:alpha val="70000"/>
+              </a:srgbClr>
+            </a:outerShdw>
+          </a:effectLst>
+          <a:scene3d>
+            <a:camera prst="perspectiveAbove">
+              <a:rot lat="0" lon="0" rev="0"/>
+            </a:camera>
+            <a:lightRig rig="threePt" dir="t"/>
+          </a:scene3d>
+        </p:spPr>
+      </p:pic>
+      <p:sp>
+        <p:nvSpPr>
+          <p:cNvPr id="4" name="TextBox 3">
+            <a:extLst>
+              <a:ext uri="{FF2B5EF4-FFF2-40B4-BE49-F238E27FC236}">
+                <a16:creationId xmlns:a16="http://schemas.microsoft.com/office/drawing/2014/main" id="{2DCEAE4B-1338-54D5-01E4-C5F93152FED3}"/>
+              </a:ext>
+            </a:extLst>
+          </p:cNvPr>
+          <p:cNvSpPr txBox="1"/>
+          <p:nvPr/>
+        </p:nvSpPr>
+        <p:spPr>
+          <a:xfrm>
+            <a:off x="0" y="6126480"/>
+            <a:ext cx="731520" cy="584775"/>
+          </a:xfrm>
+          <a:prstGeom prst="rect">
+            <a:avLst/>
+          </a:prstGeom>
+          <a:noFill/>
+          <a:ln w="12700" cap="flat">
+            <a:noFill/>
+            <a:miter lim="400000"/>
+          </a:ln>
+          <a:effectLst/>
+          <a:sp3d/>
+        </p:spPr>
+        <p:style>
+          <a:lnRef idx="0">
+            <a:scrgbClr r="0" g="0" b="0"/>
+          </a:lnRef>
+          <a:fillRef idx="0">
+            <a:scrgbClr r="0" g="0" b="0"/>
+          </a:fillRef>
+          <a:effectRef idx="0">
+            <a:scrgbClr r="0" g="0" b="0"/>
+          </a:effectRef>
+          <a:fontRef idx="none"/>
+        </p:style>
+        <p:txBody>
+          <a:bodyPr wrap="square">
+            <a:spAutoFit/>
+          </a:bodyPr>
+          <a:lstStyle/>
+          <a:p>
+            <a:r>
+              <a:rPr lang="en-US" sz="3200" b="0" i="0" u="none" strike="noStrike" dirty="0">
+                <a:solidFill>
+                  <a:srgbClr val="000000"/>
+                </a:solidFill>
+                <a:effectLst/>
+                <a:latin typeface="Arial" panose="020B0604020202020204" pitchFamily="34" charset="0"/>
+              </a:rPr>
+              <a:t>🐿️</a:t>
+            </a:r>
+            <a:endParaRPr lang="en-US" sz="3200" dirty="0"/>
+          </a:p>
+        </p:txBody>
+      </p:sp>
+    </p:spTree>
+    <p:extLst>
+      <p:ext uri="{BB962C8B-B14F-4D97-AF65-F5344CB8AC3E}">
+        <p14:creationId xmlns:p14="http://schemas.microsoft.com/office/powerpoint/2010/main" val="1388079507"/>
+      </p:ext>
+    </p:extLst>
+  </p:cSld>
+  <p:clrMapOvr>
+    <a:masterClrMapping/>
+  </p:clrMapOvr>
+</p:sld>
+</file>
+
+<file path=ppt/slides/slide21.xml><?xml version="1.0" encoding="utf-8"?>
+<p:sld xmlns:a="http://schemas.openxmlformats.org/drawingml/2006/main" xmlns:r="http://schemas.openxmlformats.org/officeDocument/2006/relationships" xmlns:p="http://schemas.openxmlformats.org/presentationml/2006/main">
+  <p:cSld>
+    <p:spTree>
+      <p:nvGrpSpPr>
+        <p:cNvPr id="1" name=""/>
+        <p:cNvGrpSpPr/>
+        <p:nvPr/>
+      </p:nvGrpSpPr>
+      <p:grpSpPr>
+        <a:xfrm>
+          <a:off x="0" y="0"/>
+          <a:ext cx="0" cy="0"/>
+          <a:chOff x="0" y="0"/>
+          <a:chExt cx="0" cy="0"/>
+        </a:xfrm>
+      </p:grpSpPr>
+      <p:sp>
+        <p:nvSpPr>
           <p:cNvPr id="5" name="Title 4">
             <a:extLst>
               <a:ext uri="{FF2B5EF4-FFF2-40B4-BE49-F238E27FC236}">
@@ -10887,7 +11353,7 @@
           <a:p>
             <a:fld id="{6874CE7D-5D74-4EC3-A871-8F42005EC53C}" type="slidenum">
               <a:rPr lang="en-US" smtClean="0"/>
-              <a:t>20</a:t>
+              <a:t>21</a:t>
             </a:fld>
             <a:endParaRPr lang="en-US"/>
           </a:p>
@@ -10906,7 +11372,7 @@
 </p:sld>
 </file>
 
-<file path=ppt/slides/slide21.xml><?xml version="1.0" encoding="utf-8"?>
+<file path=ppt/slides/slide22.xml><?xml version="1.0" encoding="utf-8"?>
 <p:sld xmlns:a="http://schemas.openxmlformats.org/drawingml/2006/main" xmlns:r="http://schemas.openxmlformats.org/officeDocument/2006/relationships" xmlns:p="http://schemas.openxmlformats.org/presentationml/2006/main">
   <p:cSld>
     <p:spTree>
@@ -10974,7 +11440,7 @@
           <a:p>
             <a:fld id="{6874CE7D-5D74-4EC3-A871-8F42005EC53C}" type="slidenum">
               <a:rPr lang="en-US" smtClean="0"/>
-              <a:t>21</a:t>
+              <a:t>22</a:t>
             </a:fld>
             <a:endParaRPr lang="en-US"/>
           </a:p>
@@ -11029,7 +11495,7 @@
 </p:sld>
 </file>
 
-<file path=ppt/slides/slide22.xml><?xml version="1.0" encoding="utf-8"?>
+<file path=ppt/slides/slide23.xml><?xml version="1.0" encoding="utf-8"?>
 <p:sld xmlns:a="http://schemas.openxmlformats.org/drawingml/2006/main" xmlns:r="http://schemas.openxmlformats.org/officeDocument/2006/relationships" xmlns:p="http://schemas.openxmlformats.org/presentationml/2006/main">
   <p:cSld>
     <p:spTree>
@@ -11143,7 +11609,7 @@
           <a:p>
             <a:fld id="{6874CE7D-5D74-4EC3-A871-8F42005EC53C}" type="slidenum">
               <a:rPr lang="en-US" smtClean="0"/>
-              <a:t>22</a:t>
+              <a:t>23</a:t>
             </a:fld>
             <a:endParaRPr lang="en-US"/>
           </a:p>
@@ -11754,7 +12220,7 @@
             <a:effectLst/>
             <a:extLst>
               <a:ext uri="{C572A759-6A51-4108-AA02-DFA0A04FC94B}">
-                <ma14:wrappingTextBoxFlag xmlns="" xmlns:ma14="http://schemas.microsoft.com/office/mac/drawingml/2011/main" val="1"/>
+                <ma14:wrappingTextBoxFlag xmlns:ma14="http://schemas.microsoft.com/office/mac/drawingml/2011/main" xmlns="" val="1"/>
               </a:ext>
             </a:extLst>
           </p:spPr>
@@ -11857,7 +12323,7 @@
             <a:effectLst/>
             <a:extLst>
               <a:ext uri="{C572A759-6A51-4108-AA02-DFA0A04FC94B}">
-                <ma14:wrappingTextBoxFlag xmlns="" xmlns:ma14="http://schemas.microsoft.com/office/mac/drawingml/2011/main" val="1"/>
+                <ma14:wrappingTextBoxFlag xmlns:ma14="http://schemas.microsoft.com/office/mac/drawingml/2011/main" xmlns="" val="1"/>
               </a:ext>
             </a:extLst>
           </p:spPr>
@@ -11961,7 +12427,7 @@
             <a:effectLst/>
             <a:extLst>
               <a:ext uri="{C572A759-6A51-4108-AA02-DFA0A04FC94B}">
-                <ma14:wrappingTextBoxFlag xmlns="" xmlns:ma14="http://schemas.microsoft.com/office/mac/drawingml/2011/main" val="1"/>
+                <ma14:wrappingTextBoxFlag xmlns:ma14="http://schemas.microsoft.com/office/mac/drawingml/2011/main" xmlns="" val="1"/>
               </a:ext>
             </a:extLst>
           </p:spPr>
@@ -12064,7 +12530,7 @@
             <a:effectLst/>
             <a:extLst>
               <a:ext uri="{C572A759-6A51-4108-AA02-DFA0A04FC94B}">
-                <ma14:wrappingTextBoxFlag xmlns="" xmlns:ma14="http://schemas.microsoft.com/office/mac/drawingml/2011/main" val="1"/>
+                <ma14:wrappingTextBoxFlag xmlns:ma14="http://schemas.microsoft.com/office/mac/drawingml/2011/main" xmlns="" val="1"/>
               </a:ext>
             </a:extLst>
           </p:spPr>
@@ -12167,7 +12633,7 @@
             <a:effectLst/>
             <a:extLst>
               <a:ext uri="{C572A759-6A51-4108-AA02-DFA0A04FC94B}">
-                <ma14:wrappingTextBoxFlag xmlns="" xmlns:ma14="http://schemas.microsoft.com/office/mac/drawingml/2011/main" val="1"/>
+                <ma14:wrappingTextBoxFlag xmlns:ma14="http://schemas.microsoft.com/office/mac/drawingml/2011/main" xmlns="" val="1"/>
               </a:ext>
             </a:extLst>
           </p:spPr>
@@ -12275,7 +12741,7 @@
             <a:effectLst/>
             <a:extLst>
               <a:ext uri="{C572A759-6A51-4108-AA02-DFA0A04FC94B}">
-                <ma14:wrappingTextBoxFlag xmlns="" xmlns:ma14="http://schemas.microsoft.com/office/mac/drawingml/2011/main" val="1"/>
+                <ma14:wrappingTextBoxFlag xmlns:ma14="http://schemas.microsoft.com/office/mac/drawingml/2011/main" xmlns="" val="1"/>
               </a:ext>
             </a:extLst>
           </p:spPr>
@@ -12378,7 +12844,7 @@
             <a:effectLst/>
             <a:extLst>
               <a:ext uri="{C572A759-6A51-4108-AA02-DFA0A04FC94B}">
-                <ma14:wrappingTextBoxFlag xmlns="" xmlns:ma14="http://schemas.microsoft.com/office/mac/drawingml/2011/main" val="1"/>
+                <ma14:wrappingTextBoxFlag xmlns:ma14="http://schemas.microsoft.com/office/mac/drawingml/2011/main" xmlns="" val="1"/>
               </a:ext>
             </a:extLst>
           </p:spPr>
@@ -12481,7 +12947,7 @@
             <a:effectLst/>
             <a:extLst>
               <a:ext uri="{C572A759-6A51-4108-AA02-DFA0A04FC94B}">
-                <ma14:wrappingTextBoxFlag xmlns="" xmlns:ma14="http://schemas.microsoft.com/office/mac/drawingml/2011/main" val="1"/>
+                <ma14:wrappingTextBoxFlag xmlns:ma14="http://schemas.microsoft.com/office/mac/drawingml/2011/main" xmlns="" val="1"/>
               </a:ext>
             </a:extLst>
           </p:spPr>
@@ -12595,7 +13061,7 @@
             <a:effectLst/>
             <a:extLst>
               <a:ext uri="{C572A759-6A51-4108-AA02-DFA0A04FC94B}">
-                <ma14:wrappingTextBoxFlag xmlns="" xmlns:ma14="http://schemas.microsoft.com/office/mac/drawingml/2011/main" val="1"/>
+                <ma14:wrappingTextBoxFlag xmlns:ma14="http://schemas.microsoft.com/office/mac/drawingml/2011/main" xmlns="" val="1"/>
               </a:ext>
             </a:extLst>
           </p:spPr>
@@ -12808,7 +13274,7 @@
               <a:effectLst/>
               <a:extLst>
                 <a:ext uri="{C572A759-6A51-4108-AA02-DFA0A04FC94B}">
-                  <ma14:wrappingTextBoxFlag xmlns="" xmlns:ma14="http://schemas.microsoft.com/office/mac/drawingml/2011/main" val="1"/>
+                  <ma14:wrappingTextBoxFlag xmlns:ma14="http://schemas.microsoft.com/office/mac/drawingml/2011/main" xmlns="" val="1"/>
                 </a:ext>
               </a:extLst>
             </p:spPr>
@@ -12912,7 +13378,7 @@
             <a:effectLst/>
             <a:extLst>
               <a:ext uri="{C572A759-6A51-4108-AA02-DFA0A04FC94B}">
-                <ma14:wrappingTextBoxFlag xmlns="" xmlns:ma14="http://schemas.microsoft.com/office/mac/drawingml/2011/main" val="1"/>
+                <ma14:wrappingTextBoxFlag xmlns:ma14="http://schemas.microsoft.com/office/mac/drawingml/2011/main" xmlns="" val="1"/>
               </a:ext>
             </a:extLst>
           </p:spPr>
@@ -13015,7 +13481,7 @@
             <a:effectLst/>
             <a:extLst>
               <a:ext uri="{C572A759-6A51-4108-AA02-DFA0A04FC94B}">
-                <ma14:wrappingTextBoxFlag xmlns="" xmlns:ma14="http://schemas.microsoft.com/office/mac/drawingml/2011/main" val="1"/>
+                <ma14:wrappingTextBoxFlag xmlns:ma14="http://schemas.microsoft.com/office/mac/drawingml/2011/main" xmlns="" val="1"/>
               </a:ext>
             </a:extLst>
           </p:spPr>
@@ -13172,7 +13638,7 @@
               <a:effectLst/>
               <a:extLst>
                 <a:ext uri="{C572A759-6A51-4108-AA02-DFA0A04FC94B}">
-                  <ma14:wrappingTextBoxFlag xmlns="" xmlns:ma14="http://schemas.microsoft.com/office/mac/drawingml/2011/main" val="1"/>
+                  <ma14:wrappingTextBoxFlag xmlns:ma14="http://schemas.microsoft.com/office/mac/drawingml/2011/main" xmlns="" val="1"/>
                 </a:ext>
               </a:extLst>
             </p:spPr>
@@ -13330,7 +13796,7 @@
               <a:effectLst/>
               <a:extLst>
                 <a:ext uri="{C572A759-6A51-4108-AA02-DFA0A04FC94B}">
-                  <ma14:wrappingTextBoxFlag xmlns="" xmlns:ma14="http://schemas.microsoft.com/office/mac/drawingml/2011/main" val="1"/>
+                  <ma14:wrappingTextBoxFlag xmlns:ma14="http://schemas.microsoft.com/office/mac/drawingml/2011/main" xmlns="" val="1"/>
                 </a:ext>
               </a:extLst>
             </p:spPr>
@@ -13736,7 +14202,7 @@
               <a:effectLst/>
               <a:extLst>
                 <a:ext uri="{C572A759-6A51-4108-AA02-DFA0A04FC94B}">
-                  <ma14:wrappingTextBoxFlag xmlns="" xmlns:ma14="http://schemas.microsoft.com/office/mac/drawingml/2011/main" val="1"/>
+                  <ma14:wrappingTextBoxFlag xmlns:ma14="http://schemas.microsoft.com/office/mac/drawingml/2011/main" xmlns="" val="1"/>
                 </a:ext>
               </a:extLst>
             </p:spPr>
@@ -13897,7 +14363,7 @@
               <a:effectLst/>
               <a:extLst>
                 <a:ext uri="{C572A759-6A51-4108-AA02-DFA0A04FC94B}">
-                  <ma14:wrappingTextBoxFlag xmlns="" xmlns:ma14="http://schemas.microsoft.com/office/mac/drawingml/2011/main" val="1"/>
+                  <ma14:wrappingTextBoxFlag xmlns:ma14="http://schemas.microsoft.com/office/mac/drawingml/2011/main" xmlns="" val="1"/>
                 </a:ext>
               </a:extLst>
             </p:spPr>
@@ -14294,7 +14760,7 @@
               <a:effectLst/>
               <a:extLst>
                 <a:ext uri="{C572A759-6A51-4108-AA02-DFA0A04FC94B}">
-                  <ma14:wrappingTextBoxFlag xmlns="" xmlns:ma14="http://schemas.microsoft.com/office/mac/drawingml/2011/main" val="1"/>
+                  <ma14:wrappingTextBoxFlag xmlns:ma14="http://schemas.microsoft.com/office/mac/drawingml/2011/main" xmlns="" val="1"/>
                 </a:ext>
               </a:extLst>
             </p:spPr>
@@ -14512,7 +14978,7 @@
               <a:effectLst/>
               <a:extLst>
                 <a:ext uri="{C572A759-6A51-4108-AA02-DFA0A04FC94B}">
-                  <ma14:wrappingTextBoxFlag xmlns="" xmlns:ma14="http://schemas.microsoft.com/office/mac/drawingml/2011/main" val="1"/>
+                  <ma14:wrappingTextBoxFlag xmlns:ma14="http://schemas.microsoft.com/office/mac/drawingml/2011/main" xmlns="" val="1"/>
                 </a:ext>
               </a:extLst>
             </p:spPr>
@@ -14680,7 +15146,7 @@
               <a:effectLst/>
               <a:extLst>
                 <a:ext uri="{C572A759-6A51-4108-AA02-DFA0A04FC94B}">
-                  <ma14:wrappingTextBoxFlag xmlns="" xmlns:ma14="http://schemas.microsoft.com/office/mac/drawingml/2011/main" val="1"/>
+                  <ma14:wrappingTextBoxFlag xmlns:ma14="http://schemas.microsoft.com/office/mac/drawingml/2011/main" xmlns="" val="1"/>
                 </a:ext>
               </a:extLst>
             </p:spPr>
@@ -15300,7 +15766,7 @@
               <a:effectLst/>
               <a:extLst>
                 <a:ext uri="{C572A759-6A51-4108-AA02-DFA0A04FC94B}">
-                  <ma14:wrappingTextBoxFlag xmlns="" xmlns:ma14="http://schemas.microsoft.com/office/mac/drawingml/2011/main" val="1"/>
+                  <ma14:wrappingTextBoxFlag xmlns:ma14="http://schemas.microsoft.com/office/mac/drawingml/2011/main" xmlns="" val="1"/>
                 </a:ext>
               </a:extLst>
             </p:spPr>
@@ -15353,7 +15819,7 @@
           </a:ln>
           <a:extLst>
             <a:ext uri="{C572A759-6A51-4108-AA02-DFA0A04FC94B}">
-              <ma14:wrappingTextBoxFlag xmlns="" xmlns:ma14="http://schemas.microsoft.com/office/mac/drawingml/2011/main" val="1"/>
+              <ma14:wrappingTextBoxFlag xmlns:ma14="http://schemas.microsoft.com/office/mac/drawingml/2011/main" xmlns="" val="1"/>
             </a:ext>
           </a:extLst>
         </p:spPr>
@@ -16728,7 +17194,7 @@
           </a:ln>
           <a:extLst>
             <a:ext uri="{C572A759-6A51-4108-AA02-DFA0A04FC94B}">
-              <ma14:wrappingTextBoxFlag xmlns="" xmlns:ma14="http://schemas.microsoft.com/office/mac/drawingml/2011/main" val="1"/>
+              <ma14:wrappingTextBoxFlag xmlns:ma14="http://schemas.microsoft.com/office/mac/drawingml/2011/main" xmlns="" val="1"/>
             </a:ext>
           </a:extLst>
         </p:spPr>
@@ -17101,7 +17567,7 @@
           </a:ln>
           <a:extLst>
             <a:ext uri="{C572A759-6A51-4108-AA02-DFA0A04FC94B}">
-              <ma14:wrappingTextBoxFlag xmlns="" xmlns:ma14="http://schemas.microsoft.com/office/mac/drawingml/2011/main" val="1"/>
+              <ma14:wrappingTextBoxFlag xmlns:ma14="http://schemas.microsoft.com/office/mac/drawingml/2011/main" xmlns="" val="1"/>
             </a:ext>
           </a:extLst>
         </p:spPr>
@@ -17161,7 +17627,7 @@
           </a:ln>
           <a:extLst>
             <a:ext uri="{C572A759-6A51-4108-AA02-DFA0A04FC94B}">
-              <ma14:wrappingTextBoxFlag xmlns="" xmlns:ma14="http://schemas.microsoft.com/office/mac/drawingml/2011/main" val="1"/>
+              <ma14:wrappingTextBoxFlag xmlns:ma14="http://schemas.microsoft.com/office/mac/drawingml/2011/main" xmlns="" val="1"/>
             </a:ext>
           </a:extLst>
         </p:spPr>
@@ -17752,13 +18218,7 @@
           <p:cNvGraphicFramePr>
             <a:graphicFrameLocks noGrp="1"/>
           </p:cNvGraphicFramePr>
-          <p:nvPr>
-            <p:extLst>
-              <p:ext uri="{D42A27DB-BD31-4B8C-83A1-F6EECF244321}">
-                <p14:modId xmlns:p14="http://schemas.microsoft.com/office/powerpoint/2010/main" val="3755200237"/>
-              </p:ext>
-            </p:extLst>
-          </p:nvPr>
+          <p:nvPr/>
         </p:nvGraphicFramePr>
         <p:xfrm>
           <a:off x="378374" y="3083017"/>
@@ -19286,13 +19746,7 @@
           <p:cNvGraphicFramePr>
             <a:graphicFrameLocks noGrp="1"/>
           </p:cNvGraphicFramePr>
-          <p:nvPr>
-            <p:extLst>
-              <p:ext uri="{D42A27DB-BD31-4B8C-83A1-F6EECF244321}">
-                <p14:modId xmlns:p14="http://schemas.microsoft.com/office/powerpoint/2010/main" val="3074478095"/>
-              </p:ext>
-            </p:extLst>
-          </p:nvPr>
+          <p:nvPr/>
         </p:nvGraphicFramePr>
         <p:xfrm>
           <a:off x="6588920" y="3083017"/>
@@ -20970,6 +21424,7 @@
           <a:bodyPr rtlCol="0" anchor="ctr"/>
           <a:lstStyle/>
           <a:p>
+            <a:pPr algn="ctr"/>
             <a:r>
               <a:rPr lang="en-US" i="1" dirty="0">
                 <a:solidFill>
@@ -20991,6 +21446,7 @@
             </a:endParaRPr>
           </a:p>
           <a:p>
+            <a:pPr algn="ctr"/>
             <a:r>
               <a:rPr lang="en-US" dirty="0">
                 <a:solidFill>
@@ -21383,10 +21839,49 @@
           </a:p>
         </p:txBody>
       </p:sp>
+      <p:sp>
+        <p:nvSpPr>
+          <p:cNvPr id="5" name="TextBox 4">
+            <a:hlinkClick r:id="rId3"/>
+            <a:extLst>
+              <a:ext uri="{FF2B5EF4-FFF2-40B4-BE49-F238E27FC236}">
+                <a16:creationId xmlns:a16="http://schemas.microsoft.com/office/drawing/2014/main" id="{6EE611B0-890B-C492-9390-B15884DECB3E}"/>
+              </a:ext>
+            </a:extLst>
+          </p:cNvPr>
+          <p:cNvSpPr txBox="1"/>
+          <p:nvPr/>
+        </p:nvSpPr>
+        <p:spPr>
+          <a:xfrm>
+            <a:off x="3143025" y="2565822"/>
+            <a:ext cx="5905947" cy="369332"/>
+          </a:xfrm>
+          <a:prstGeom prst="rect">
+            <a:avLst/>
+          </a:prstGeom>
+          <a:noFill/>
+        </p:spPr>
+        <p:txBody>
+          <a:bodyPr wrap="square" rtlCol="0" anchor="t" anchorCtr="0">
+            <a:spAutoFit/>
+          </a:bodyPr>
+          <a:lstStyle/>
+          <a:p>
+            <a:r>
+              <a:rPr lang="en-US" dirty="0">
+                <a:hlinkClick r:id="rId3"/>
+              </a:rPr>
+              <a:t>How do you know if a collection is mutable or immutable?</a:t>
+            </a:r>
+            <a:endParaRPr lang="en-US" dirty="0"/>
+          </a:p>
+        </p:txBody>
+      </p:sp>
     </p:spTree>
     <p:extLst>
       <p:ext uri="{BB962C8B-B14F-4D97-AF65-F5344CB8AC3E}">
-        <p14:creationId xmlns:p14="http://schemas.microsoft.com/office/powerpoint/2010/main" val="4155907964"/>
+        <p14:creationId xmlns:p14="http://schemas.microsoft.com/office/powerpoint/2010/main" val="1897576157"/>
       </p:ext>
     </p:extLst>
   </p:cSld>
@@ -21397,6 +21892,4251 @@
 </file>
 
 <file path=ppt/slides/slide7.xml><?xml version="1.0" encoding="utf-8"?>
+<p:sld xmlns:a="http://schemas.openxmlformats.org/drawingml/2006/main" xmlns:r="http://schemas.openxmlformats.org/officeDocument/2006/relationships" xmlns:p="http://schemas.openxmlformats.org/presentationml/2006/main">
+  <p:cSld>
+    <p:spTree>
+      <p:nvGrpSpPr>
+        <p:cNvPr id="1" name="">
+          <a:extLst>
+            <a:ext uri="{FF2B5EF4-FFF2-40B4-BE49-F238E27FC236}">
+              <a16:creationId xmlns:a16="http://schemas.microsoft.com/office/drawing/2014/main" id="{AD49853E-7839-D887-1C2A-D24B07D3136F}"/>
+            </a:ext>
+          </a:extLst>
+        </p:cNvPr>
+        <p:cNvGrpSpPr/>
+        <p:nvPr/>
+      </p:nvGrpSpPr>
+      <p:grpSpPr>
+        <a:xfrm>
+          <a:off x="0" y="0"/>
+          <a:ext cx="0" cy="0"/>
+          <a:chOff x="0" y="0"/>
+          <a:chExt cx="0" cy="0"/>
+        </a:xfrm>
+      </p:grpSpPr>
+      <p:sp>
+        <p:nvSpPr>
+          <p:cNvPr id="2" name="Title 1">
+            <a:extLst>
+              <a:ext uri="{FF2B5EF4-FFF2-40B4-BE49-F238E27FC236}">
+                <a16:creationId xmlns:a16="http://schemas.microsoft.com/office/drawing/2014/main" id="{D589C4B6-4478-A74D-210A-D9CE9FF42E9A}"/>
+              </a:ext>
+            </a:extLst>
+          </p:cNvPr>
+          <p:cNvSpPr>
+            <a:spLocks noGrp="1"/>
+          </p:cNvSpPr>
+          <p:nvPr>
+            <p:ph type="title"/>
+          </p:nvPr>
+        </p:nvSpPr>
+        <p:spPr/>
+        <p:txBody>
+          <a:bodyPr/>
+          <a:lstStyle/>
+          <a:p>
+            <a:r>
+              <a:rPr lang="en-US" dirty="0"/>
+              <a:t>Evolving from JDK to EC Factories and Types</a:t>
+            </a:r>
+          </a:p>
+        </p:txBody>
+      </p:sp>
+      <p:sp>
+        <p:nvSpPr>
+          <p:cNvPr id="3" name="Slide Number Placeholder 2">
+            <a:extLst>
+              <a:ext uri="{FF2B5EF4-FFF2-40B4-BE49-F238E27FC236}">
+                <a16:creationId xmlns:a16="http://schemas.microsoft.com/office/drawing/2014/main" id="{E1ED3636-499F-38AE-530C-1CB3854F850A}"/>
+              </a:ext>
+            </a:extLst>
+          </p:cNvPr>
+          <p:cNvSpPr>
+            <a:spLocks noGrp="1"/>
+          </p:cNvSpPr>
+          <p:nvPr>
+            <p:ph type="sldNum" sz="quarter" idx="12"/>
+          </p:nvPr>
+        </p:nvSpPr>
+        <p:spPr/>
+        <p:txBody>
+          <a:bodyPr/>
+          <a:lstStyle/>
+          <a:p>
+            <a:fld id="{6874CE7D-5D74-4EC3-A871-8F42005EC53C}" type="slidenum">
+              <a:rPr lang="en-US" smtClean="0"/>
+              <a:t>7</a:t>
+            </a:fld>
+            <a:endParaRPr lang="en-US" dirty="0"/>
+          </a:p>
+        </p:txBody>
+      </p:sp>
+      <p:cxnSp>
+        <p:nvCxnSpPr>
+          <p:cNvPr id="7" name="Straight Arrow Connector 6">
+            <a:extLst>
+              <a:ext uri="{FF2B5EF4-FFF2-40B4-BE49-F238E27FC236}">
+                <a16:creationId xmlns:a16="http://schemas.microsoft.com/office/drawing/2014/main" id="{8684827B-D3BF-B9DC-A0AC-E3F53F2F913E}"/>
+              </a:ext>
+            </a:extLst>
+          </p:cNvPr>
+          <p:cNvCxnSpPr>
+            <a:cxnSpLocks/>
+            <a:stCxn id="51" idx="2"/>
+            <a:endCxn id="37" idx="0"/>
+          </p:cNvCxnSpPr>
+          <p:nvPr/>
+        </p:nvCxnSpPr>
+        <p:spPr>
+          <a:xfrm rot="5400000">
+            <a:off x="3778730" y="945531"/>
+            <a:ext cx="1343171" cy="2931801"/>
+          </a:xfrm>
+          <a:prstGeom prst="bentConnector3">
+            <a:avLst>
+              <a:gd name="adj1" fmla="val 50000"/>
+            </a:avLst>
+          </a:prstGeom>
+          <a:ln>
+            <a:solidFill>
+              <a:schemeClr val="accent6">
+                <a:lumMod val="50000"/>
+              </a:schemeClr>
+            </a:solidFill>
+            <a:tailEnd type="arrow" w="lg" len="lg"/>
+          </a:ln>
+        </p:spPr>
+        <p:style>
+          <a:lnRef idx="2">
+            <a:schemeClr val="accent1"/>
+          </a:lnRef>
+          <a:fillRef idx="0">
+            <a:schemeClr val="accent1"/>
+          </a:fillRef>
+          <a:effectRef idx="1">
+            <a:schemeClr val="accent1"/>
+          </a:effectRef>
+          <a:fontRef idx="minor">
+            <a:schemeClr val="tx1"/>
+          </a:fontRef>
+        </p:style>
+      </p:cxnSp>
+      <p:cxnSp>
+        <p:nvCxnSpPr>
+          <p:cNvPr id="8" name="Straight Arrow Connector 7">
+            <a:extLst>
+              <a:ext uri="{FF2B5EF4-FFF2-40B4-BE49-F238E27FC236}">
+                <a16:creationId xmlns:a16="http://schemas.microsoft.com/office/drawing/2014/main" id="{3C771E80-3764-7E52-FFAF-C24D515794ED}"/>
+              </a:ext>
+            </a:extLst>
+          </p:cNvPr>
+          <p:cNvCxnSpPr>
+            <a:cxnSpLocks/>
+            <a:stCxn id="52" idx="2"/>
+            <a:endCxn id="39" idx="0"/>
+          </p:cNvCxnSpPr>
+          <p:nvPr/>
+        </p:nvCxnSpPr>
+        <p:spPr>
+          <a:xfrm rot="16200000" flipH="1">
+            <a:off x="7059024" y="947081"/>
+            <a:ext cx="1343172" cy="2928700"/>
+          </a:xfrm>
+          <a:prstGeom prst="bentConnector3">
+            <a:avLst>
+              <a:gd name="adj1" fmla="val 50000"/>
+            </a:avLst>
+          </a:prstGeom>
+          <a:ln>
+            <a:solidFill>
+              <a:schemeClr val="accent6">
+                <a:lumMod val="50000"/>
+              </a:schemeClr>
+            </a:solidFill>
+            <a:tailEnd type="arrow" w="lg" len="lg"/>
+          </a:ln>
+        </p:spPr>
+        <p:style>
+          <a:lnRef idx="2">
+            <a:schemeClr val="accent1"/>
+          </a:lnRef>
+          <a:fillRef idx="0">
+            <a:schemeClr val="accent1"/>
+          </a:fillRef>
+          <a:effectRef idx="1">
+            <a:schemeClr val="accent1"/>
+          </a:effectRef>
+          <a:fontRef idx="minor">
+            <a:schemeClr val="tx1"/>
+          </a:fontRef>
+        </p:style>
+      </p:cxnSp>
+      <p:sp>
+        <p:nvSpPr>
+          <p:cNvPr id="12" name="TextBox 11">
+            <a:extLst>
+              <a:ext uri="{FF2B5EF4-FFF2-40B4-BE49-F238E27FC236}">
+                <a16:creationId xmlns:a16="http://schemas.microsoft.com/office/drawing/2014/main" id="{A39997FA-CCE1-18EE-E455-93CA7652B7A9}"/>
+              </a:ext>
+            </a:extLst>
+          </p:cNvPr>
+          <p:cNvSpPr txBox="1"/>
+          <p:nvPr/>
+        </p:nvSpPr>
+        <p:spPr>
+          <a:xfrm>
+            <a:off x="4194867" y="2040190"/>
+            <a:ext cx="1004506" cy="369332"/>
+          </a:xfrm>
+          <a:prstGeom prst="rect">
+            <a:avLst/>
+          </a:prstGeom>
+          <a:noFill/>
+        </p:spPr>
+        <p:txBody>
+          <a:bodyPr wrap="none" rtlCol="0">
+            <a:spAutoFit/>
+          </a:bodyPr>
+          <a:lstStyle/>
+          <a:p>
+            <a:r>
+              <a:rPr lang="en-US" dirty="0"/>
+              <a:t>Mutable</a:t>
+            </a:r>
+          </a:p>
+        </p:txBody>
+      </p:sp>
+      <p:sp>
+        <p:nvSpPr>
+          <p:cNvPr id="13" name="TextBox 12">
+            <a:extLst>
+              <a:ext uri="{FF2B5EF4-FFF2-40B4-BE49-F238E27FC236}">
+                <a16:creationId xmlns:a16="http://schemas.microsoft.com/office/drawing/2014/main" id="{70AE386F-B7B1-DCF9-0709-4D7A514B50C2}"/>
+              </a:ext>
+            </a:extLst>
+          </p:cNvPr>
+          <p:cNvSpPr txBox="1"/>
+          <p:nvPr/>
+        </p:nvSpPr>
+        <p:spPr>
+          <a:xfrm>
+            <a:off x="6983102" y="2040190"/>
+            <a:ext cx="1274708" cy="369332"/>
+          </a:xfrm>
+          <a:prstGeom prst="rect">
+            <a:avLst/>
+          </a:prstGeom>
+          <a:noFill/>
+        </p:spPr>
+        <p:txBody>
+          <a:bodyPr wrap="none" rtlCol="0">
+            <a:spAutoFit/>
+          </a:bodyPr>
+          <a:lstStyle/>
+          <a:p>
+            <a:r>
+              <a:rPr lang="en-US" dirty="0"/>
+              <a:t>Immutable</a:t>
+            </a:r>
+          </a:p>
+        </p:txBody>
+      </p:sp>
+      <p:graphicFrame>
+        <p:nvGraphicFramePr>
+          <p:cNvPr id="37" name="Table 36">
+            <a:extLst>
+              <a:ext uri="{FF2B5EF4-FFF2-40B4-BE49-F238E27FC236}">
+                <a16:creationId xmlns:a16="http://schemas.microsoft.com/office/drawing/2014/main" id="{A7495635-7E97-97CD-0E4E-4D814ADDE551}"/>
+              </a:ext>
+            </a:extLst>
+          </p:cNvPr>
+          <p:cNvGraphicFramePr>
+            <a:graphicFrameLocks noGrp="1"/>
+          </p:cNvGraphicFramePr>
+          <p:nvPr>
+            <p:extLst>
+              <p:ext uri="{D42A27DB-BD31-4B8C-83A1-F6EECF244321}">
+                <p14:modId xmlns:p14="http://schemas.microsoft.com/office/powerpoint/2010/main" val="961775478"/>
+              </p:ext>
+            </p:extLst>
+          </p:nvPr>
+        </p:nvGraphicFramePr>
+        <p:xfrm>
+          <a:off x="378374" y="3083017"/>
+          <a:ext cx="5212080" cy="2895600"/>
+        </p:xfrm>
+        <a:graphic>
+          <a:graphicData uri="http://schemas.openxmlformats.org/drawingml/2006/table">
+            <a:tbl>
+              <a:tblPr firstRow="1" bandRow="1">
+                <a:tableStyleId>{5940675A-B579-460E-94D1-54222C63F5DA}</a:tableStyleId>
+              </a:tblPr>
+              <a:tblGrid>
+                <a:gridCol w="1721889">
+                  <a:extLst>
+                    <a:ext uri="{9D8B030D-6E8A-4147-A177-3AD203B41FA5}">
+                      <a16:colId xmlns:a16="http://schemas.microsoft.com/office/drawing/2014/main" val="2131242392"/>
+                    </a:ext>
+                  </a:extLst>
+                </a:gridCol>
+                <a:gridCol w="214312">
+                  <a:extLst>
+                    <a:ext uri="{9D8B030D-6E8A-4147-A177-3AD203B41FA5}">
+                      <a16:colId xmlns:a16="http://schemas.microsoft.com/office/drawing/2014/main" val="1191194110"/>
+                    </a:ext>
+                  </a:extLst>
+                </a:gridCol>
+                <a:gridCol w="3275879">
+                  <a:extLst>
+                    <a:ext uri="{9D8B030D-6E8A-4147-A177-3AD203B41FA5}">
+                      <a16:colId xmlns:a16="http://schemas.microsoft.com/office/drawing/2014/main" val="2007210634"/>
+                    </a:ext>
+                  </a:extLst>
+                </a:gridCol>
+              </a:tblGrid>
+              <a:tr h="0">
+                <a:tc>
+                  <a:txBody>
+                    <a:bodyPr/>
+                    <a:lstStyle/>
+                    <a:p>
+                      <a:pPr marL="0" marR="0" lvl="0" indent="0" algn="ctr" defTabSz="914400" rtl="0" eaLnBrk="1" fontAlgn="auto" latinLnBrk="0" hangingPunct="1">
+                        <a:lnSpc>
+                          <a:spcPct val="100000"/>
+                        </a:lnSpc>
+                        <a:spcBef>
+                          <a:spcPts val="0"/>
+                        </a:spcBef>
+                        <a:spcAft>
+                          <a:spcPts val="0"/>
+                        </a:spcAft>
+                        <a:buClrTx/>
+                        <a:buSzTx/>
+                        <a:buFontTx/>
+                        <a:buNone/>
+                        <a:tabLst/>
+                        <a:defRPr/>
+                      </a:pPr>
+                      <a:endParaRPr lang="en-US" sz="1400" i="1" dirty="0">
+                        <a:solidFill>
+                          <a:srgbClr val="808080"/>
+                        </a:solidFill>
+                        <a:latin typeface="D2CodingLigature Nerd Font" panose="020B0609020101020101" pitchFamily="49" charset="-127"/>
+                        <a:ea typeface="D2CodingLigature Nerd Font" panose="020B0609020101020101" pitchFamily="49" charset="-127"/>
+                        <a:cs typeface="JetBrains Mono" panose="02000009000000000000" pitchFamily="49" charset="0"/>
+                      </a:endParaRPr>
+                    </a:p>
+                    <a:p>
+                      <a:pPr marL="0" marR="0" lvl="0" indent="0" algn="ctr" defTabSz="914400" rtl="0" eaLnBrk="1" fontAlgn="auto" latinLnBrk="0" hangingPunct="1">
+                        <a:lnSpc>
+                          <a:spcPct val="100000"/>
+                        </a:lnSpc>
+                        <a:spcBef>
+                          <a:spcPts val="0"/>
+                        </a:spcBef>
+                        <a:spcAft>
+                          <a:spcPts val="0"/>
+                        </a:spcAft>
+                        <a:buClrTx/>
+                        <a:buSzTx/>
+                        <a:buFontTx/>
+                        <a:buNone/>
+                        <a:tabLst/>
+                        <a:defRPr/>
+                      </a:pPr>
+                      <a:r>
+                        <a:rPr lang="en-US" sz="1400" i="1" dirty="0">
+                          <a:solidFill>
+                            <a:srgbClr val="808080"/>
+                          </a:solidFill>
+                          <a:latin typeface="D2CodingLigature Nerd Font" panose="020B0609020101020101" pitchFamily="49" charset="-127"/>
+                          <a:ea typeface="D2CodingLigature Nerd Font" panose="020B0609020101020101" pitchFamily="49" charset="-127"/>
+                          <a:cs typeface="JetBrains Mono" panose="02000009000000000000" pitchFamily="49" charset="0"/>
+                        </a:rPr>
+                        <a:t>// JDK Type</a:t>
+                      </a:r>
+                    </a:p>
+                  </a:txBody>
+                  <a:tcPr marL="45720" marR="45720">
+                    <a:lnL w="12700" cmpd="sng">
+                      <a:noFill/>
+                    </a:lnL>
+                    <a:lnR w="12700" cmpd="sng">
+                      <a:noFill/>
+                    </a:lnR>
+                    <a:lnT w="12700" cmpd="sng">
+                      <a:noFill/>
+                    </a:lnT>
+                    <a:lnB w="12700" cmpd="sng">
+                      <a:noFill/>
+                    </a:lnB>
+                    <a:lnTlToBr w="12700" cmpd="sng">
+                      <a:noFill/>
+                      <a:prstDash val="solid"/>
+                    </a:lnTlToBr>
+                    <a:lnBlToTr w="12700" cmpd="sng">
+                      <a:noFill/>
+                      <a:prstDash val="solid"/>
+                    </a:lnBlToTr>
+                  </a:tcPr>
+                </a:tc>
+                <a:tc gridSpan="2">
+                  <a:txBody>
+                    <a:bodyPr/>
+                    <a:lstStyle/>
+                    <a:p>
+                      <a:pPr algn="ctr"/>
+                      <a:endParaRPr lang="en-US" sz="1400" i="1" dirty="0">
+                        <a:solidFill>
+                          <a:srgbClr val="808080"/>
+                        </a:solidFill>
+                        <a:latin typeface="D2CodingLigature Nerd Font" panose="020B0609020101020101" pitchFamily="49" charset="-127"/>
+                        <a:ea typeface="D2CodingLigature Nerd Font" panose="020B0609020101020101" pitchFamily="49" charset="-127"/>
+                        <a:cs typeface="JetBrains Mono" panose="02000009000000000000" pitchFamily="49" charset="0"/>
+                      </a:endParaRPr>
+                    </a:p>
+                    <a:p>
+                      <a:pPr algn="ctr"/>
+                      <a:r>
+                        <a:rPr lang="en-US" sz="1400" i="1" dirty="0">
+                          <a:solidFill>
+                            <a:srgbClr val="808080"/>
+                          </a:solidFill>
+                          <a:latin typeface="D2CodingLigature Nerd Font" panose="020B0609020101020101" pitchFamily="49" charset="-127"/>
+                          <a:ea typeface="D2CodingLigature Nerd Font" panose="020B0609020101020101" pitchFamily="49" charset="-127"/>
+                          <a:cs typeface="JetBrains Mono" panose="02000009000000000000" pitchFamily="49" charset="0"/>
+                        </a:rPr>
+                        <a:t>// JDK Implementation</a:t>
+                      </a:r>
+                      <a:endParaRPr lang="en-US" sz="1400" dirty="0">
+                        <a:solidFill>
+                          <a:srgbClr val="0070FF"/>
+                        </a:solidFill>
+                        <a:latin typeface="D2CodingLigature Nerd Font" panose="020B0609020101020101" pitchFamily="49" charset="-127"/>
+                        <a:ea typeface="D2CodingLigature Nerd Font" panose="020B0609020101020101" pitchFamily="49" charset="-127"/>
+                        <a:cs typeface="JetBrains Mono" panose="02000009000000000000" pitchFamily="49" charset="0"/>
+                      </a:endParaRPr>
+                    </a:p>
+                  </a:txBody>
+                  <a:tcPr marL="0" marR="0">
+                    <a:lnL w="12700" cmpd="sng">
+                      <a:noFill/>
+                    </a:lnL>
+                    <a:lnR w="12700" cmpd="sng">
+                      <a:noFill/>
+                    </a:lnR>
+                    <a:lnT w="12700" cmpd="sng">
+                      <a:noFill/>
+                    </a:lnT>
+                    <a:lnB w="12700" cmpd="sng">
+                      <a:noFill/>
+                    </a:lnB>
+                    <a:lnTlToBr w="12700" cmpd="sng">
+                      <a:noFill/>
+                      <a:prstDash val="solid"/>
+                    </a:lnTlToBr>
+                    <a:lnBlToTr w="12700" cmpd="sng">
+                      <a:noFill/>
+                      <a:prstDash val="solid"/>
+                    </a:lnBlToTr>
+                  </a:tcPr>
+                </a:tc>
+                <a:tc hMerge="1">
+                  <a:txBody>
+                    <a:bodyPr/>
+                    <a:lstStyle/>
+                    <a:p>
+                      <a:endParaRPr dirty="0"/>
+                    </a:p>
+                  </a:txBody>
+                  <a:tcPr marL="45720" marR="45720">
+                    <a:lnL w="12700" cmpd="sng">
+                      <a:noFill/>
+                    </a:lnL>
+                    <a:lnR w="12700" cmpd="sng">
+                      <a:noFill/>
+                    </a:lnR>
+                    <a:lnT w="12700" cmpd="sng">
+                      <a:noFill/>
+                    </a:lnT>
+                    <a:lnB w="12700" cmpd="sng">
+                      <a:noFill/>
+                    </a:lnB>
+                    <a:lnTlToBr w="12700" cmpd="sng">
+                      <a:noFill/>
+                      <a:prstDash val="solid"/>
+                    </a:lnTlToBr>
+                    <a:lnBlToTr w="12700" cmpd="sng">
+                      <a:noFill/>
+                      <a:prstDash val="solid"/>
+                    </a:lnBlToTr>
+                  </a:tcPr>
+                </a:tc>
+                <a:extLst>
+                  <a:ext uri="{0D108BD9-81ED-4DB2-BD59-A6C34878D82A}">
+                    <a16:rowId xmlns:a16="http://schemas.microsoft.com/office/drawing/2014/main" val="2692540784"/>
+                  </a:ext>
+                </a:extLst>
+              </a:tr>
+              <a:tr h="0">
+                <a:tc>
+                  <a:txBody>
+                    <a:bodyPr/>
+                    <a:lstStyle/>
+                    <a:p>
+                      <a:pPr algn="ctr"/>
+                      <a:r>
+                        <a:rPr lang="en-US" sz="1400" dirty="0">
+                          <a:solidFill>
+                            <a:srgbClr val="0070FF"/>
+                          </a:solidFill>
+                          <a:effectLst/>
+                          <a:latin typeface="D2CodingLigature Nerd Font" panose="020B0609020101020101" pitchFamily="49" charset="-127"/>
+                          <a:ea typeface="D2CodingLigature Nerd Font" panose="020B0609020101020101" pitchFamily="49" charset="-127"/>
+                          <a:cs typeface="JetBrains Mono" panose="02000009000000000000" pitchFamily="49" charset="0"/>
+                        </a:rPr>
+                        <a:t>List</a:t>
+                      </a:r>
+                      <a:r>
+                        <a:rPr lang="en-US" sz="1400" dirty="0">
+                          <a:solidFill>
+                            <a:srgbClr val="000000"/>
+                          </a:solidFill>
+                          <a:effectLst/>
+                          <a:latin typeface="D2CodingLigature Nerd Font" panose="020B0609020101020101" pitchFamily="49" charset="-127"/>
+                          <a:ea typeface="D2CodingLigature Nerd Font" panose="020B0609020101020101" pitchFamily="49" charset="-127"/>
+                          <a:cs typeface="JetBrains Mono" panose="02000009000000000000" pitchFamily="49" charset="0"/>
+                        </a:rPr>
+                        <a:t>&lt;</a:t>
+                      </a:r>
+                      <a:r>
+                        <a:rPr lang="en-US" sz="1400" dirty="0">
+                          <a:solidFill>
+                            <a:srgbClr val="A10000"/>
+                          </a:solidFill>
+                          <a:effectLst/>
+                          <a:latin typeface="D2CodingLigature Nerd Font" panose="020B0609020101020101" pitchFamily="49" charset="-127"/>
+                          <a:ea typeface="D2CodingLigature Nerd Font" panose="020B0609020101020101" pitchFamily="49" charset="-127"/>
+                          <a:cs typeface="JetBrains Mono" panose="02000009000000000000" pitchFamily="49" charset="0"/>
+                        </a:rPr>
+                        <a:t>String</a:t>
+                      </a:r>
+                      <a:r>
+                        <a:rPr lang="en-US" sz="1400" dirty="0">
+                          <a:solidFill>
+                            <a:srgbClr val="000000"/>
+                          </a:solidFill>
+                          <a:effectLst/>
+                          <a:latin typeface="D2CodingLigature Nerd Font" panose="020B0609020101020101" pitchFamily="49" charset="-127"/>
+                          <a:ea typeface="D2CodingLigature Nerd Font" panose="020B0609020101020101" pitchFamily="49" charset="-127"/>
+                          <a:cs typeface="JetBrains Mono" panose="02000009000000000000" pitchFamily="49" charset="0"/>
+                        </a:rPr>
+                        <a:t>&gt; </a:t>
+                      </a:r>
+                      <a:endParaRPr lang="en-US" sz="1400" dirty="0">
+                        <a:latin typeface="D2CodingLigature Nerd Font" panose="020B0609020101020101" pitchFamily="49" charset="-127"/>
+                        <a:ea typeface="D2CodingLigature Nerd Font" panose="020B0609020101020101" pitchFamily="49" charset="-127"/>
+                      </a:endParaRPr>
+                    </a:p>
+                  </a:txBody>
+                  <a:tcPr marL="45720" marR="45720">
+                    <a:lnL w="12700" cmpd="sng">
+                      <a:noFill/>
+                    </a:lnL>
+                    <a:lnR w="12700" cmpd="sng">
+                      <a:noFill/>
+                    </a:lnR>
+                    <a:lnT w="12700" cmpd="sng">
+                      <a:noFill/>
+                    </a:lnT>
+                    <a:lnB w="6350" cap="flat" cmpd="sng" algn="ctr">
+                      <a:solidFill>
+                        <a:schemeClr val="tx1">
+                          <a:lumMod val="65000"/>
+                          <a:lumOff val="35000"/>
+                        </a:schemeClr>
+                      </a:solidFill>
+                      <a:prstDash val="solid"/>
+                      <a:round/>
+                      <a:headEnd type="none" w="med" len="med"/>
+                      <a:tailEnd type="none" w="med" len="med"/>
+                    </a:lnB>
+                    <a:lnTlToBr w="12700" cmpd="sng">
+                      <a:noFill/>
+                      <a:prstDash val="solid"/>
+                    </a:lnTlToBr>
+                    <a:lnBlToTr w="12700" cmpd="sng">
+                      <a:noFill/>
+                      <a:prstDash val="solid"/>
+                    </a:lnBlToTr>
+                  </a:tcPr>
+                </a:tc>
+                <a:tc gridSpan="2">
+                  <a:txBody>
+                    <a:bodyPr/>
+                    <a:lstStyle/>
+                    <a:p>
+                      <a:pPr algn="ctr"/>
+                      <a:r>
+                        <a:rPr lang="en-US" sz="1400" dirty="0">
+                          <a:solidFill>
+                            <a:srgbClr val="530E80"/>
+                          </a:solidFill>
+                          <a:effectLst/>
+                          <a:latin typeface="D2CodingLigature Nerd Font" panose="020B0609020101020101" pitchFamily="49" charset="-127"/>
+                          <a:ea typeface="D2CodingLigature Nerd Font" panose="020B0609020101020101" pitchFamily="49" charset="-127"/>
+                          <a:cs typeface="JetBrains Mono" panose="02000009000000000000" pitchFamily="49" charset="0"/>
+                        </a:rPr>
+                        <a:t>new </a:t>
+                      </a:r>
+                      <a:r>
+                        <a:rPr lang="en-US" sz="1400" dirty="0" err="1">
+                          <a:solidFill>
+                            <a:srgbClr val="000000"/>
+                          </a:solidFill>
+                          <a:effectLst/>
+                          <a:latin typeface="D2CodingLigature Nerd Font" panose="020B0609020101020101" pitchFamily="49" charset="-127"/>
+                          <a:ea typeface="D2CodingLigature Nerd Font" panose="020B0609020101020101" pitchFamily="49" charset="-127"/>
+                          <a:cs typeface="JetBrains Mono" panose="02000009000000000000" pitchFamily="49" charset="0"/>
+                        </a:rPr>
+                        <a:t>ArrayList</a:t>
+                      </a:r>
+                      <a:r>
+                        <a:rPr lang="en-US" sz="1400" dirty="0">
+                          <a:solidFill>
+                            <a:srgbClr val="000000"/>
+                          </a:solidFill>
+                          <a:effectLst/>
+                          <a:latin typeface="D2CodingLigature Nerd Font" panose="020B0609020101020101" pitchFamily="49" charset="-127"/>
+                          <a:ea typeface="D2CodingLigature Nerd Font" panose="020B0609020101020101" pitchFamily="49" charset="-127"/>
+                          <a:cs typeface="JetBrains Mono" panose="02000009000000000000" pitchFamily="49" charset="0"/>
+                        </a:rPr>
+                        <a:t>&lt;&gt;(</a:t>
+                      </a:r>
+                      <a:r>
+                        <a:rPr lang="en-US" sz="1400" dirty="0" err="1">
+                          <a:solidFill>
+                            <a:srgbClr val="0070FF"/>
+                          </a:solidFill>
+                          <a:effectLst/>
+                          <a:latin typeface="D2CodingLigature Nerd Font" panose="020B0609020101020101" pitchFamily="49" charset="-127"/>
+                          <a:ea typeface="D2CodingLigature Nerd Font" panose="020B0609020101020101" pitchFamily="49" charset="-127"/>
+                          <a:cs typeface="JetBrains Mono" panose="02000009000000000000" pitchFamily="49" charset="0"/>
+                        </a:rPr>
+                        <a:t>List</a:t>
+                      </a:r>
+                      <a:r>
+                        <a:rPr lang="en-US" sz="1400" dirty="0" err="1">
+                          <a:solidFill>
+                            <a:srgbClr val="000000"/>
+                          </a:solidFill>
+                          <a:effectLst/>
+                          <a:latin typeface="D2CodingLigature Nerd Font" panose="020B0609020101020101" pitchFamily="49" charset="-127"/>
+                          <a:ea typeface="D2CodingLigature Nerd Font" panose="020B0609020101020101" pitchFamily="49" charset="-127"/>
+                          <a:cs typeface="JetBrains Mono" panose="02000009000000000000" pitchFamily="49" charset="0"/>
+                        </a:rPr>
+                        <a:t>.</a:t>
+                      </a:r>
+                      <a:r>
+                        <a:rPr lang="en-US" sz="1400" i="1" dirty="0" err="1">
+                          <a:solidFill>
+                            <a:srgbClr val="000000"/>
+                          </a:solidFill>
+                          <a:effectLst/>
+                          <a:latin typeface="D2CodingLigature Nerd Font" panose="020B0609020101020101" pitchFamily="49" charset="-127"/>
+                          <a:ea typeface="D2CodingLigature Nerd Font" panose="020B0609020101020101" pitchFamily="49" charset="-127"/>
+                          <a:cs typeface="JetBrains Mono" panose="02000009000000000000" pitchFamily="49" charset="0"/>
+                        </a:rPr>
+                        <a:t>of</a:t>
+                      </a:r>
+                      <a:r>
+                        <a:rPr lang="en-US" sz="1400" dirty="0">
+                          <a:solidFill>
+                            <a:srgbClr val="000000"/>
+                          </a:solidFill>
+                          <a:effectLst/>
+                          <a:latin typeface="D2CodingLigature Nerd Font" panose="020B0609020101020101" pitchFamily="49" charset="-127"/>
+                          <a:ea typeface="D2CodingLigature Nerd Font" panose="020B0609020101020101" pitchFamily="49" charset="-127"/>
+                          <a:cs typeface="JetBrains Mono" panose="02000009000000000000" pitchFamily="49" charset="0"/>
+                        </a:rPr>
+                        <a:t>(</a:t>
+                      </a:r>
+                      <a:r>
+                        <a:rPr lang="en-US" sz="1400" b="1" dirty="0">
+                          <a:solidFill>
+                            <a:srgbClr val="0B00CC"/>
+                          </a:solidFill>
+                          <a:effectLst/>
+                          <a:latin typeface="D2CodingLigature Nerd Font" panose="020B0609020101020101" pitchFamily="49" charset="-127"/>
+                          <a:ea typeface="D2CodingLigature Nerd Font" panose="020B0609020101020101" pitchFamily="49" charset="-127"/>
+                          <a:cs typeface="JetBrains Mono" panose="02000009000000000000" pitchFamily="49" charset="0"/>
+                        </a:rPr>
+                        <a:t>"1"</a:t>
+                      </a:r>
+                      <a:r>
+                        <a:rPr lang="en-US" sz="1400" dirty="0">
+                          <a:solidFill>
+                            <a:srgbClr val="000000"/>
+                          </a:solidFill>
+                          <a:effectLst/>
+                          <a:latin typeface="D2CodingLigature Nerd Font" panose="020B0609020101020101" pitchFamily="49" charset="-127"/>
+                          <a:ea typeface="D2CodingLigature Nerd Font" panose="020B0609020101020101" pitchFamily="49" charset="-127"/>
+                          <a:cs typeface="JetBrains Mono" panose="02000009000000000000" pitchFamily="49" charset="0"/>
+                        </a:rPr>
+                        <a:t>, </a:t>
+                      </a:r>
+                      <a:r>
+                        <a:rPr lang="en-US" sz="1400" b="1" dirty="0">
+                          <a:solidFill>
+                            <a:srgbClr val="0B00CC"/>
+                          </a:solidFill>
+                          <a:effectLst/>
+                          <a:latin typeface="D2CodingLigature Nerd Font" panose="020B0609020101020101" pitchFamily="49" charset="-127"/>
+                          <a:ea typeface="D2CodingLigature Nerd Font" panose="020B0609020101020101" pitchFamily="49" charset="-127"/>
+                          <a:cs typeface="JetBrains Mono" panose="02000009000000000000" pitchFamily="49" charset="0"/>
+                        </a:rPr>
+                        <a:t>"2"</a:t>
+                      </a:r>
+                      <a:r>
+                        <a:rPr lang="en-US" sz="1400" dirty="0">
+                          <a:solidFill>
+                            <a:srgbClr val="000000"/>
+                          </a:solidFill>
+                          <a:effectLst/>
+                          <a:latin typeface="D2CodingLigature Nerd Font" panose="020B0609020101020101" pitchFamily="49" charset="-127"/>
+                          <a:ea typeface="D2CodingLigature Nerd Font" panose="020B0609020101020101" pitchFamily="49" charset="-127"/>
+                          <a:cs typeface="JetBrains Mono" panose="02000009000000000000" pitchFamily="49" charset="0"/>
+                        </a:rPr>
+                        <a:t>, </a:t>
+                      </a:r>
+                      <a:r>
+                        <a:rPr lang="en-US" sz="1400" b="1" dirty="0">
+                          <a:solidFill>
+                            <a:srgbClr val="0B00CC"/>
+                          </a:solidFill>
+                          <a:effectLst/>
+                          <a:latin typeface="D2CodingLigature Nerd Font" panose="020B0609020101020101" pitchFamily="49" charset="-127"/>
+                          <a:ea typeface="D2CodingLigature Nerd Font" panose="020B0609020101020101" pitchFamily="49" charset="-127"/>
+                          <a:cs typeface="JetBrains Mono" panose="02000009000000000000" pitchFamily="49" charset="0"/>
+                        </a:rPr>
+                        <a:t>"3"</a:t>
+                      </a:r>
+                      <a:r>
+                        <a:rPr lang="en-US" sz="1400" dirty="0">
+                          <a:solidFill>
+                            <a:srgbClr val="000000"/>
+                          </a:solidFill>
+                          <a:effectLst/>
+                          <a:latin typeface="D2CodingLigature Nerd Font" panose="020B0609020101020101" pitchFamily="49" charset="-127"/>
+                          <a:ea typeface="D2CodingLigature Nerd Font" panose="020B0609020101020101" pitchFamily="49" charset="-127"/>
+                          <a:cs typeface="JetBrains Mono" panose="02000009000000000000" pitchFamily="49" charset="0"/>
+                        </a:rPr>
+                        <a:t>))</a:t>
+                      </a:r>
+                      <a:endParaRPr lang="en-US" sz="1400" dirty="0">
+                        <a:latin typeface="D2CodingLigature Nerd Font" panose="020B0609020101020101" pitchFamily="49" charset="-127"/>
+                        <a:ea typeface="D2CodingLigature Nerd Font" panose="020B0609020101020101" pitchFamily="49" charset="-127"/>
+                      </a:endParaRPr>
+                    </a:p>
+                  </a:txBody>
+                  <a:tcPr marL="0" marR="0">
+                    <a:lnL w="12700" cmpd="sng">
+                      <a:noFill/>
+                    </a:lnL>
+                    <a:lnR w="12700" cmpd="sng">
+                      <a:noFill/>
+                    </a:lnR>
+                    <a:lnT w="12700" cmpd="sng">
+                      <a:noFill/>
+                    </a:lnT>
+                    <a:lnB w="6350" cap="flat" cmpd="sng" algn="ctr">
+                      <a:solidFill>
+                        <a:schemeClr val="tx1">
+                          <a:lumMod val="65000"/>
+                          <a:lumOff val="35000"/>
+                        </a:schemeClr>
+                      </a:solidFill>
+                      <a:prstDash val="solid"/>
+                      <a:round/>
+                      <a:headEnd type="none" w="med" len="med"/>
+                      <a:tailEnd type="none" w="med" len="med"/>
+                    </a:lnB>
+                    <a:lnTlToBr w="12700" cmpd="sng">
+                      <a:noFill/>
+                      <a:prstDash val="solid"/>
+                    </a:lnTlToBr>
+                    <a:lnBlToTr w="12700" cmpd="sng">
+                      <a:noFill/>
+                      <a:prstDash val="solid"/>
+                    </a:lnBlToTr>
+                  </a:tcPr>
+                </a:tc>
+                <a:tc hMerge="1">
+                  <a:txBody>
+                    <a:bodyPr/>
+                    <a:lstStyle/>
+                    <a:p>
+                      <a:endParaRPr dirty="0"/>
+                    </a:p>
+                  </a:txBody>
+                  <a:tcPr marL="45720" marR="45720">
+                    <a:lnL w="12700" cmpd="sng">
+                      <a:noFill/>
+                    </a:lnL>
+                    <a:lnR w="12700" cmpd="sng">
+                      <a:noFill/>
+                    </a:lnR>
+                    <a:lnT w="12700" cmpd="sng">
+                      <a:noFill/>
+                    </a:lnT>
+                    <a:lnB w="6350" cap="flat" cmpd="sng" algn="ctr">
+                      <a:solidFill>
+                        <a:schemeClr val="tx1">
+                          <a:lumMod val="65000"/>
+                          <a:lumOff val="35000"/>
+                        </a:schemeClr>
+                      </a:solidFill>
+                      <a:prstDash val="solid"/>
+                      <a:round/>
+                      <a:headEnd type="none" w="med" len="med"/>
+                      <a:tailEnd type="none" w="med" len="med"/>
+                    </a:lnB>
+                    <a:lnTlToBr w="12700" cmpd="sng">
+                      <a:noFill/>
+                      <a:prstDash val="solid"/>
+                    </a:lnTlToBr>
+                    <a:lnBlToTr w="12700" cmpd="sng">
+                      <a:noFill/>
+                      <a:prstDash val="solid"/>
+                    </a:lnBlToTr>
+                  </a:tcPr>
+                </a:tc>
+                <a:extLst>
+                  <a:ext uri="{0D108BD9-81ED-4DB2-BD59-A6C34878D82A}">
+                    <a16:rowId xmlns:a16="http://schemas.microsoft.com/office/drawing/2014/main" val="5481530"/>
+                  </a:ext>
+                </a:extLst>
+              </a:tr>
+              <a:tr h="0">
+                <a:tc gridSpan="2">
+                  <a:txBody>
+                    <a:bodyPr/>
+                    <a:lstStyle/>
+                    <a:p>
+                      <a:pPr marL="0" marR="0" lvl="0" indent="0" algn="ctr" defTabSz="914400" rtl="0" eaLnBrk="1" fontAlgn="auto" latinLnBrk="0" hangingPunct="1">
+                        <a:lnSpc>
+                          <a:spcPct val="100000"/>
+                        </a:lnSpc>
+                        <a:spcBef>
+                          <a:spcPts val="0"/>
+                        </a:spcBef>
+                        <a:spcAft>
+                          <a:spcPts val="0"/>
+                        </a:spcAft>
+                        <a:buClrTx/>
+                        <a:buSzTx/>
+                        <a:buFontTx/>
+                        <a:buNone/>
+                        <a:tabLst/>
+                        <a:defRPr/>
+                      </a:pPr>
+                      <a:endParaRPr lang="en-US" sz="1400" i="1" dirty="0">
+                        <a:solidFill>
+                          <a:srgbClr val="808080"/>
+                        </a:solidFill>
+                        <a:latin typeface="D2CodingLigature Nerd Font" panose="020B0609020101020101" pitchFamily="49" charset="-127"/>
+                        <a:ea typeface="D2CodingLigature Nerd Font" panose="020B0609020101020101" pitchFamily="49" charset="-127"/>
+                        <a:cs typeface="JetBrains Mono" panose="02000009000000000000" pitchFamily="49" charset="0"/>
+                      </a:endParaRPr>
+                    </a:p>
+                    <a:p>
+                      <a:pPr marL="0" marR="0" lvl="0" indent="0" algn="ctr" defTabSz="914400" rtl="0" eaLnBrk="1" fontAlgn="auto" latinLnBrk="0" hangingPunct="1">
+                        <a:lnSpc>
+                          <a:spcPct val="100000"/>
+                        </a:lnSpc>
+                        <a:spcBef>
+                          <a:spcPts val="0"/>
+                        </a:spcBef>
+                        <a:spcAft>
+                          <a:spcPts val="0"/>
+                        </a:spcAft>
+                        <a:buClrTx/>
+                        <a:buSzTx/>
+                        <a:buFontTx/>
+                        <a:buNone/>
+                        <a:tabLst/>
+                        <a:defRPr/>
+                      </a:pPr>
+                      <a:endParaRPr lang="en-US" sz="1400" i="1" dirty="0">
+                        <a:solidFill>
+                          <a:srgbClr val="808080"/>
+                        </a:solidFill>
+                        <a:latin typeface="D2CodingLigature Nerd Font" panose="020B0609020101020101" pitchFamily="49" charset="-127"/>
+                        <a:ea typeface="D2CodingLigature Nerd Font" panose="020B0609020101020101" pitchFamily="49" charset="-127"/>
+                        <a:cs typeface="JetBrains Mono" panose="02000009000000000000" pitchFamily="49" charset="0"/>
+                      </a:endParaRPr>
+                    </a:p>
+                    <a:p>
+                      <a:pPr marL="0" marR="0" lvl="0" indent="0" algn="ctr" defTabSz="914400" rtl="0" eaLnBrk="1" fontAlgn="auto" latinLnBrk="0" hangingPunct="1">
+                        <a:lnSpc>
+                          <a:spcPct val="100000"/>
+                        </a:lnSpc>
+                        <a:spcBef>
+                          <a:spcPts val="0"/>
+                        </a:spcBef>
+                        <a:spcAft>
+                          <a:spcPts val="0"/>
+                        </a:spcAft>
+                        <a:buClrTx/>
+                        <a:buSzTx/>
+                        <a:buFontTx/>
+                        <a:buNone/>
+                        <a:tabLst/>
+                        <a:defRPr/>
+                      </a:pPr>
+                      <a:r>
+                        <a:rPr lang="en-US" sz="1400" i="1" dirty="0">
+                          <a:solidFill>
+                            <a:srgbClr val="808080"/>
+                          </a:solidFill>
+                          <a:latin typeface="D2CodingLigature Nerd Font" panose="020B0609020101020101" pitchFamily="49" charset="-127"/>
+                          <a:ea typeface="D2CodingLigature Nerd Font" panose="020B0609020101020101" pitchFamily="49" charset="-127"/>
+                          <a:cs typeface="JetBrains Mono" panose="02000009000000000000" pitchFamily="49" charset="0"/>
+                        </a:rPr>
+                        <a:t>// JDK Type</a:t>
+                      </a:r>
+                      <a:endParaRPr lang="en-US" sz="1400" dirty="0">
+                        <a:solidFill>
+                          <a:srgbClr val="0070FF"/>
+                        </a:solidFill>
+                        <a:latin typeface="D2CodingLigature Nerd Font" panose="020B0609020101020101" pitchFamily="49" charset="-127"/>
+                        <a:ea typeface="D2CodingLigature Nerd Font" panose="020B0609020101020101" pitchFamily="49" charset="-127"/>
+                        <a:cs typeface="JetBrains Mono" panose="02000009000000000000" pitchFamily="49" charset="0"/>
+                      </a:endParaRPr>
+                    </a:p>
+                  </a:txBody>
+                  <a:tcPr marL="45720" marR="45720">
+                    <a:lnL w="12700" cmpd="sng">
+                      <a:noFill/>
+                    </a:lnL>
+                    <a:lnR w="12700" cmpd="sng">
+                      <a:noFill/>
+                    </a:lnR>
+                    <a:lnT w="6350" cap="flat" cmpd="sng" algn="ctr">
+                      <a:solidFill>
+                        <a:schemeClr val="tx1">
+                          <a:lumMod val="65000"/>
+                          <a:lumOff val="35000"/>
+                        </a:schemeClr>
+                      </a:solidFill>
+                      <a:prstDash val="solid"/>
+                      <a:round/>
+                      <a:headEnd type="none" w="med" len="med"/>
+                      <a:tailEnd type="none" w="med" len="med"/>
+                    </a:lnT>
+                    <a:lnB w="12700" cmpd="sng">
+                      <a:noFill/>
+                    </a:lnB>
+                    <a:lnTlToBr w="12700" cmpd="sng">
+                      <a:noFill/>
+                      <a:prstDash val="solid"/>
+                    </a:lnTlToBr>
+                    <a:lnBlToTr w="12700" cmpd="sng">
+                      <a:noFill/>
+                      <a:prstDash val="solid"/>
+                    </a:lnBlToTr>
+                  </a:tcPr>
+                </a:tc>
+                <a:tc hMerge="1">
+                  <a:txBody>
+                    <a:bodyPr/>
+                    <a:lstStyle/>
+                    <a:p>
+                      <a:pPr marL="0" marR="0" lvl="0" indent="0" algn="ctr" defTabSz="914400" rtl="0" eaLnBrk="1" fontAlgn="auto" latinLnBrk="0" hangingPunct="1">
+                        <a:lnSpc>
+                          <a:spcPct val="100000"/>
+                        </a:lnSpc>
+                        <a:spcBef>
+                          <a:spcPts val="0"/>
+                        </a:spcBef>
+                        <a:spcAft>
+                          <a:spcPts val="0"/>
+                        </a:spcAft>
+                        <a:buClrTx/>
+                        <a:buSzTx/>
+                        <a:buFontTx/>
+                        <a:buNone/>
+                        <a:tabLst/>
+                        <a:defRPr/>
+                      </a:pPr>
+                      <a:endParaRPr lang="en-US" sz="1400" dirty="0">
+                        <a:solidFill>
+                          <a:srgbClr val="0070FF"/>
+                        </a:solidFill>
+                        <a:latin typeface="D2CodingLigature Nerd Font" panose="020B0609020101020101" pitchFamily="49" charset="-127"/>
+                        <a:ea typeface="D2CodingLigature Nerd Font" panose="020B0609020101020101" pitchFamily="49" charset="-127"/>
+                        <a:cs typeface="JetBrains Mono" panose="02000009000000000000" pitchFamily="49" charset="0"/>
+                      </a:endParaRPr>
+                    </a:p>
+                  </a:txBody>
+                  <a:tcPr marL="45720" marR="45720">
+                    <a:lnL w="12700" cmpd="sng">
+                      <a:noFill/>
+                    </a:lnL>
+                    <a:lnR w="12700" cmpd="sng">
+                      <a:noFill/>
+                    </a:lnR>
+                    <a:lnT w="6350" cap="flat" cmpd="sng" algn="ctr">
+                      <a:solidFill>
+                        <a:schemeClr val="tx1">
+                          <a:lumMod val="65000"/>
+                          <a:lumOff val="35000"/>
+                        </a:schemeClr>
+                      </a:solidFill>
+                      <a:prstDash val="solid"/>
+                      <a:round/>
+                      <a:headEnd type="none" w="med" len="med"/>
+                      <a:tailEnd type="none" w="med" len="med"/>
+                    </a:lnT>
+                    <a:lnB w="12700" cmpd="sng">
+                      <a:noFill/>
+                    </a:lnB>
+                    <a:lnTlToBr w="12700" cmpd="sng">
+                      <a:noFill/>
+                      <a:prstDash val="solid"/>
+                    </a:lnTlToBr>
+                    <a:lnBlToTr w="12700" cmpd="sng">
+                      <a:noFill/>
+                      <a:prstDash val="solid"/>
+                    </a:lnBlToTr>
+                  </a:tcPr>
+                </a:tc>
+                <a:tc>
+                  <a:txBody>
+                    <a:bodyPr/>
+                    <a:lstStyle/>
+                    <a:p>
+                      <a:pPr algn="ctr"/>
+                      <a:endParaRPr lang="en-US" sz="1400" dirty="0">
+                        <a:latin typeface="D2CodingLigature Nerd Font" panose="020B0609020101020101" pitchFamily="49" charset="-127"/>
+                        <a:ea typeface="D2CodingLigature Nerd Font" panose="020B0609020101020101" pitchFamily="49" charset="-127"/>
+                      </a:endParaRPr>
+                    </a:p>
+                    <a:p>
+                      <a:pPr marL="0" marR="0" lvl="0" indent="0" algn="ctr" defTabSz="914400" rtl="0" eaLnBrk="1" fontAlgn="auto" latinLnBrk="0" hangingPunct="1">
+                        <a:lnSpc>
+                          <a:spcPct val="100000"/>
+                        </a:lnSpc>
+                        <a:spcBef>
+                          <a:spcPts val="0"/>
+                        </a:spcBef>
+                        <a:spcAft>
+                          <a:spcPts val="0"/>
+                        </a:spcAft>
+                        <a:buClrTx/>
+                        <a:buSzTx/>
+                        <a:buFontTx/>
+                        <a:buNone/>
+                        <a:tabLst/>
+                        <a:defRPr/>
+                      </a:pPr>
+                      <a:endParaRPr lang="en-US" sz="1400" i="1" dirty="0">
+                        <a:solidFill>
+                          <a:srgbClr val="808080"/>
+                        </a:solidFill>
+                        <a:latin typeface="D2CodingLigature Nerd Font" panose="020B0609020101020101" pitchFamily="49" charset="-127"/>
+                        <a:ea typeface="D2CodingLigature Nerd Font" panose="020B0609020101020101" pitchFamily="49" charset="-127"/>
+                        <a:cs typeface="JetBrains Mono" panose="02000009000000000000" pitchFamily="49" charset="0"/>
+                      </a:endParaRPr>
+                    </a:p>
+                    <a:p>
+                      <a:pPr marL="0" marR="0" lvl="0" indent="0" algn="ctr" defTabSz="914400" rtl="0" eaLnBrk="1" fontAlgn="auto" latinLnBrk="0" hangingPunct="1">
+                        <a:lnSpc>
+                          <a:spcPct val="100000"/>
+                        </a:lnSpc>
+                        <a:spcBef>
+                          <a:spcPts val="0"/>
+                        </a:spcBef>
+                        <a:spcAft>
+                          <a:spcPts val="0"/>
+                        </a:spcAft>
+                        <a:buClrTx/>
+                        <a:buSzTx/>
+                        <a:buFontTx/>
+                        <a:buNone/>
+                        <a:tabLst/>
+                        <a:defRPr/>
+                      </a:pPr>
+                      <a:r>
+                        <a:rPr lang="en-US" sz="1400" b="1" i="1" dirty="0">
+                          <a:solidFill>
+                            <a:srgbClr val="F69200"/>
+                          </a:solidFill>
+                          <a:latin typeface="D2CodingLigature Nerd Font" panose="020B0609020101020101" pitchFamily="49" charset="-127"/>
+                          <a:ea typeface="D2CodingLigature Nerd Font" panose="020B0609020101020101" pitchFamily="49" charset="-127"/>
+                          <a:cs typeface="JetBrains Mono" panose="02000009000000000000" pitchFamily="49" charset="0"/>
+                        </a:rPr>
+                        <a:t>// EC Implementation</a:t>
+                      </a:r>
+                      <a:endParaRPr lang="en-US" sz="1400" b="1" dirty="0">
+                        <a:solidFill>
+                          <a:srgbClr val="F69200"/>
+                        </a:solidFill>
+                        <a:latin typeface="D2CodingLigature Nerd Font" panose="020B0609020101020101" pitchFamily="49" charset="-127"/>
+                        <a:ea typeface="D2CodingLigature Nerd Font" panose="020B0609020101020101" pitchFamily="49" charset="-127"/>
+                        <a:cs typeface="JetBrains Mono" panose="02000009000000000000" pitchFamily="49" charset="0"/>
+                      </a:endParaRPr>
+                    </a:p>
+                  </a:txBody>
+                  <a:tcPr marL="45720" marR="45720">
+                    <a:lnL w="12700" cmpd="sng">
+                      <a:noFill/>
+                    </a:lnL>
+                    <a:lnR w="12700" cmpd="sng">
+                      <a:noFill/>
+                    </a:lnR>
+                    <a:lnT w="6350" cap="flat" cmpd="sng" algn="ctr">
+                      <a:solidFill>
+                        <a:schemeClr val="tx1">
+                          <a:lumMod val="65000"/>
+                          <a:lumOff val="35000"/>
+                        </a:schemeClr>
+                      </a:solidFill>
+                      <a:prstDash val="solid"/>
+                      <a:round/>
+                      <a:headEnd type="none" w="med" len="med"/>
+                      <a:tailEnd type="none" w="med" len="med"/>
+                    </a:lnT>
+                    <a:lnB w="12700" cmpd="sng">
+                      <a:noFill/>
+                    </a:lnB>
+                    <a:lnTlToBr w="12700" cmpd="sng">
+                      <a:noFill/>
+                      <a:prstDash val="solid"/>
+                    </a:lnTlToBr>
+                    <a:lnBlToTr w="12700" cmpd="sng">
+                      <a:noFill/>
+                      <a:prstDash val="solid"/>
+                    </a:lnBlToTr>
+                  </a:tcPr>
+                </a:tc>
+                <a:extLst>
+                  <a:ext uri="{0D108BD9-81ED-4DB2-BD59-A6C34878D82A}">
+                    <a16:rowId xmlns:a16="http://schemas.microsoft.com/office/drawing/2014/main" val="1015679293"/>
+                  </a:ext>
+                </a:extLst>
+              </a:tr>
+              <a:tr h="0">
+                <a:tc gridSpan="2">
+                  <a:txBody>
+                    <a:bodyPr/>
+                    <a:lstStyle/>
+                    <a:p>
+                      <a:pPr algn="ctr"/>
+                      <a:r>
+                        <a:rPr lang="en-US" sz="1400" dirty="0">
+                          <a:solidFill>
+                            <a:srgbClr val="0070FF"/>
+                          </a:solidFill>
+                          <a:effectLst/>
+                          <a:latin typeface="D2CodingLigature Nerd Font" panose="020B0609020101020101" pitchFamily="49" charset="-127"/>
+                          <a:ea typeface="D2CodingLigature Nerd Font" panose="020B0609020101020101" pitchFamily="49" charset="-127"/>
+                          <a:cs typeface="JetBrains Mono" panose="02000009000000000000" pitchFamily="49" charset="0"/>
+                        </a:rPr>
+                        <a:t>List</a:t>
+                      </a:r>
+                      <a:r>
+                        <a:rPr lang="en-US" sz="1400" dirty="0">
+                          <a:solidFill>
+                            <a:srgbClr val="000000"/>
+                          </a:solidFill>
+                          <a:effectLst/>
+                          <a:latin typeface="D2CodingLigature Nerd Font" panose="020B0609020101020101" pitchFamily="49" charset="-127"/>
+                          <a:ea typeface="D2CodingLigature Nerd Font" panose="020B0609020101020101" pitchFamily="49" charset="-127"/>
+                          <a:cs typeface="JetBrains Mono" panose="02000009000000000000" pitchFamily="49" charset="0"/>
+                        </a:rPr>
+                        <a:t>&lt;</a:t>
+                      </a:r>
+                      <a:r>
+                        <a:rPr lang="en-US" sz="1400" dirty="0">
+                          <a:solidFill>
+                            <a:srgbClr val="A10000"/>
+                          </a:solidFill>
+                          <a:effectLst/>
+                          <a:latin typeface="D2CodingLigature Nerd Font" panose="020B0609020101020101" pitchFamily="49" charset="-127"/>
+                          <a:ea typeface="D2CodingLigature Nerd Font" panose="020B0609020101020101" pitchFamily="49" charset="-127"/>
+                          <a:cs typeface="JetBrains Mono" panose="02000009000000000000" pitchFamily="49" charset="0"/>
+                        </a:rPr>
+                        <a:t>String</a:t>
+                      </a:r>
+                      <a:r>
+                        <a:rPr lang="en-US" sz="1400" dirty="0">
+                          <a:solidFill>
+                            <a:srgbClr val="000000"/>
+                          </a:solidFill>
+                          <a:effectLst/>
+                          <a:latin typeface="D2CodingLigature Nerd Font" panose="020B0609020101020101" pitchFamily="49" charset="-127"/>
+                          <a:ea typeface="D2CodingLigature Nerd Font" panose="020B0609020101020101" pitchFamily="49" charset="-127"/>
+                          <a:cs typeface="JetBrains Mono" panose="02000009000000000000" pitchFamily="49" charset="0"/>
+                        </a:rPr>
+                        <a:t>&gt; </a:t>
+                      </a:r>
+                      <a:endParaRPr lang="en-US" sz="1400" dirty="0">
+                        <a:latin typeface="D2CodingLigature Nerd Font" panose="020B0609020101020101" pitchFamily="49" charset="-127"/>
+                        <a:ea typeface="D2CodingLigature Nerd Font" panose="020B0609020101020101" pitchFamily="49" charset="-127"/>
+                      </a:endParaRPr>
+                    </a:p>
+                  </a:txBody>
+                  <a:tcPr marL="45720" marR="45720">
+                    <a:lnL w="12700" cmpd="sng">
+                      <a:noFill/>
+                    </a:lnL>
+                    <a:lnR w="12700" cmpd="sng">
+                      <a:noFill/>
+                    </a:lnR>
+                    <a:lnT w="12700" cmpd="sng">
+                      <a:noFill/>
+                    </a:lnT>
+                    <a:lnB w="6350" cap="flat" cmpd="sng" algn="ctr">
+                      <a:solidFill>
+                        <a:schemeClr val="tx1">
+                          <a:lumMod val="65000"/>
+                          <a:lumOff val="35000"/>
+                        </a:schemeClr>
+                      </a:solidFill>
+                      <a:prstDash val="solid"/>
+                      <a:round/>
+                      <a:headEnd type="none" w="med" len="med"/>
+                      <a:tailEnd type="none" w="med" len="med"/>
+                    </a:lnB>
+                    <a:lnTlToBr w="12700" cmpd="sng">
+                      <a:noFill/>
+                      <a:prstDash val="solid"/>
+                    </a:lnTlToBr>
+                    <a:lnBlToTr w="12700" cmpd="sng">
+                      <a:noFill/>
+                      <a:prstDash val="solid"/>
+                    </a:lnBlToTr>
+                  </a:tcPr>
+                </a:tc>
+                <a:tc hMerge="1">
+                  <a:txBody>
+                    <a:bodyPr/>
+                    <a:lstStyle/>
+                    <a:p>
+                      <a:pPr algn="ctr"/>
+                      <a:endParaRPr lang="en-US" sz="1400" dirty="0">
+                        <a:latin typeface="D2CodingLigature Nerd Font" panose="020B0609020101020101" pitchFamily="49" charset="-127"/>
+                        <a:ea typeface="D2CodingLigature Nerd Font" panose="020B0609020101020101" pitchFamily="49" charset="-127"/>
+                      </a:endParaRPr>
+                    </a:p>
+                  </a:txBody>
+                  <a:tcPr marL="45720" marR="45720">
+                    <a:lnL w="12700" cmpd="sng">
+                      <a:noFill/>
+                    </a:lnL>
+                    <a:lnR w="12700" cmpd="sng">
+                      <a:noFill/>
+                    </a:lnR>
+                    <a:lnT w="12700" cmpd="sng">
+                      <a:noFill/>
+                    </a:lnT>
+                    <a:lnB w="6350" cap="flat" cmpd="sng" algn="ctr">
+                      <a:solidFill>
+                        <a:schemeClr val="tx1">
+                          <a:lumMod val="65000"/>
+                          <a:lumOff val="35000"/>
+                        </a:schemeClr>
+                      </a:solidFill>
+                      <a:prstDash val="solid"/>
+                      <a:round/>
+                      <a:headEnd type="none" w="med" len="med"/>
+                      <a:tailEnd type="none" w="med" len="med"/>
+                    </a:lnB>
+                    <a:lnTlToBr w="12700" cmpd="sng">
+                      <a:noFill/>
+                      <a:prstDash val="solid"/>
+                    </a:lnTlToBr>
+                    <a:lnBlToTr w="12700" cmpd="sng">
+                      <a:noFill/>
+                      <a:prstDash val="solid"/>
+                    </a:lnBlToTr>
+                  </a:tcPr>
+                </a:tc>
+                <a:tc>
+                  <a:txBody>
+                    <a:bodyPr/>
+                    <a:lstStyle/>
+                    <a:p>
+                      <a:pPr algn="ctr"/>
+                      <a:r>
+                        <a:rPr lang="en-US" sz="1400" dirty="0" err="1">
+                          <a:solidFill>
+                            <a:srgbClr val="A10000"/>
+                          </a:solidFill>
+                          <a:effectLst/>
+                          <a:latin typeface="D2CodingLigature Nerd Font" panose="020B0609020101020101" pitchFamily="49" charset="-127"/>
+                          <a:ea typeface="D2CodingLigature Nerd Font" panose="020B0609020101020101" pitchFamily="49" charset="-127"/>
+                          <a:cs typeface="JetBrains Mono" panose="02000009000000000000" pitchFamily="49" charset="0"/>
+                        </a:rPr>
+                        <a:t>Lists</a:t>
+                      </a:r>
+                      <a:r>
+                        <a:rPr lang="en-US" sz="1400" dirty="0" err="1">
+                          <a:solidFill>
+                            <a:srgbClr val="000000"/>
+                          </a:solidFill>
+                          <a:effectLst/>
+                          <a:latin typeface="D2CodingLigature Nerd Font" panose="020B0609020101020101" pitchFamily="49" charset="-127"/>
+                          <a:ea typeface="D2CodingLigature Nerd Font" panose="020B0609020101020101" pitchFamily="49" charset="-127"/>
+                          <a:cs typeface="JetBrains Mono" panose="02000009000000000000" pitchFamily="49" charset="0"/>
+                        </a:rPr>
+                        <a:t>.</a:t>
+                      </a:r>
+                      <a:r>
+                        <a:rPr lang="en-US" sz="1400" b="0" i="1" dirty="0" err="1">
+                          <a:solidFill>
+                            <a:srgbClr val="660E7A"/>
+                          </a:solidFill>
+                          <a:effectLst/>
+                          <a:latin typeface="D2CodingLigature Nerd Font" panose="020B0609020101020101" pitchFamily="49" charset="-127"/>
+                          <a:ea typeface="D2CodingLigature Nerd Font" panose="020B0609020101020101" pitchFamily="49" charset="-127"/>
+                          <a:cs typeface="JetBrains Mono" panose="02000009000000000000" pitchFamily="49" charset="0"/>
+                        </a:rPr>
+                        <a:t>mutable</a:t>
+                      </a:r>
+                      <a:r>
+                        <a:rPr lang="en-US" sz="1400" dirty="0" err="1">
+                          <a:solidFill>
+                            <a:srgbClr val="000000"/>
+                          </a:solidFill>
+                          <a:effectLst/>
+                          <a:latin typeface="D2CodingLigature Nerd Font" panose="020B0609020101020101" pitchFamily="49" charset="-127"/>
+                          <a:ea typeface="D2CodingLigature Nerd Font" panose="020B0609020101020101" pitchFamily="49" charset="-127"/>
+                          <a:cs typeface="JetBrains Mono" panose="02000009000000000000" pitchFamily="49" charset="0"/>
+                        </a:rPr>
+                        <a:t>.of</a:t>
+                      </a:r>
+                      <a:r>
+                        <a:rPr lang="en-US" sz="1400" dirty="0">
+                          <a:solidFill>
+                            <a:srgbClr val="000000"/>
+                          </a:solidFill>
+                          <a:effectLst/>
+                          <a:latin typeface="D2CodingLigature Nerd Font" panose="020B0609020101020101" pitchFamily="49" charset="-127"/>
+                          <a:ea typeface="D2CodingLigature Nerd Font" panose="020B0609020101020101" pitchFamily="49" charset="-127"/>
+                          <a:cs typeface="JetBrains Mono" panose="02000009000000000000" pitchFamily="49" charset="0"/>
+                        </a:rPr>
+                        <a:t>(</a:t>
+                      </a:r>
+                      <a:r>
+                        <a:rPr lang="en-US" sz="1400" b="1" dirty="0">
+                          <a:solidFill>
+                            <a:srgbClr val="0B00CC"/>
+                          </a:solidFill>
+                          <a:effectLst/>
+                          <a:latin typeface="D2CodingLigature Nerd Font" panose="020B0609020101020101" pitchFamily="49" charset="-127"/>
+                          <a:ea typeface="D2CodingLigature Nerd Font" panose="020B0609020101020101" pitchFamily="49" charset="-127"/>
+                          <a:cs typeface="JetBrains Mono" panose="02000009000000000000" pitchFamily="49" charset="0"/>
+                        </a:rPr>
+                        <a:t>"1"</a:t>
+                      </a:r>
+                      <a:r>
+                        <a:rPr lang="en-US" sz="1400" dirty="0">
+                          <a:solidFill>
+                            <a:srgbClr val="000000"/>
+                          </a:solidFill>
+                          <a:effectLst/>
+                          <a:latin typeface="D2CodingLigature Nerd Font" panose="020B0609020101020101" pitchFamily="49" charset="-127"/>
+                          <a:ea typeface="D2CodingLigature Nerd Font" panose="020B0609020101020101" pitchFamily="49" charset="-127"/>
+                          <a:cs typeface="JetBrains Mono" panose="02000009000000000000" pitchFamily="49" charset="0"/>
+                        </a:rPr>
+                        <a:t>, </a:t>
+                      </a:r>
+                      <a:r>
+                        <a:rPr lang="en-US" sz="1400" b="1" dirty="0">
+                          <a:solidFill>
+                            <a:srgbClr val="0B00CC"/>
+                          </a:solidFill>
+                          <a:effectLst/>
+                          <a:latin typeface="D2CodingLigature Nerd Font" panose="020B0609020101020101" pitchFamily="49" charset="-127"/>
+                          <a:ea typeface="D2CodingLigature Nerd Font" panose="020B0609020101020101" pitchFamily="49" charset="-127"/>
+                          <a:cs typeface="JetBrains Mono" panose="02000009000000000000" pitchFamily="49" charset="0"/>
+                        </a:rPr>
+                        <a:t>"2"</a:t>
+                      </a:r>
+                      <a:r>
+                        <a:rPr lang="en-US" sz="1400" dirty="0">
+                          <a:solidFill>
+                            <a:srgbClr val="000000"/>
+                          </a:solidFill>
+                          <a:effectLst/>
+                          <a:latin typeface="D2CodingLigature Nerd Font" panose="020B0609020101020101" pitchFamily="49" charset="-127"/>
+                          <a:ea typeface="D2CodingLigature Nerd Font" panose="020B0609020101020101" pitchFamily="49" charset="-127"/>
+                          <a:cs typeface="JetBrains Mono" panose="02000009000000000000" pitchFamily="49" charset="0"/>
+                        </a:rPr>
+                        <a:t>, </a:t>
+                      </a:r>
+                      <a:r>
+                        <a:rPr lang="en-US" sz="1400" b="1" dirty="0">
+                          <a:solidFill>
+                            <a:srgbClr val="0B00CC"/>
+                          </a:solidFill>
+                          <a:effectLst/>
+                          <a:latin typeface="D2CodingLigature Nerd Font" panose="020B0609020101020101" pitchFamily="49" charset="-127"/>
+                          <a:ea typeface="D2CodingLigature Nerd Font" panose="020B0609020101020101" pitchFamily="49" charset="-127"/>
+                          <a:cs typeface="JetBrains Mono" panose="02000009000000000000" pitchFamily="49" charset="0"/>
+                        </a:rPr>
+                        <a:t>"3"</a:t>
+                      </a:r>
+                      <a:r>
+                        <a:rPr lang="en-US" sz="1400" dirty="0">
+                          <a:solidFill>
+                            <a:srgbClr val="000000"/>
+                          </a:solidFill>
+                          <a:effectLst/>
+                          <a:latin typeface="D2CodingLigature Nerd Font" panose="020B0609020101020101" pitchFamily="49" charset="-127"/>
+                          <a:ea typeface="D2CodingLigature Nerd Font" panose="020B0609020101020101" pitchFamily="49" charset="-127"/>
+                          <a:cs typeface="JetBrains Mono" panose="02000009000000000000" pitchFamily="49" charset="0"/>
+                        </a:rPr>
+                        <a:t>)</a:t>
+                      </a:r>
+                      <a:endParaRPr lang="en-US" sz="1400" dirty="0">
+                        <a:latin typeface="D2CodingLigature Nerd Font" panose="020B0609020101020101" pitchFamily="49" charset="-127"/>
+                        <a:ea typeface="D2CodingLigature Nerd Font" panose="020B0609020101020101" pitchFamily="49" charset="-127"/>
+                      </a:endParaRPr>
+                    </a:p>
+                  </a:txBody>
+                  <a:tcPr marL="45720" marR="45720">
+                    <a:lnL w="12700" cmpd="sng">
+                      <a:noFill/>
+                    </a:lnL>
+                    <a:lnR w="12700" cmpd="sng">
+                      <a:noFill/>
+                    </a:lnR>
+                    <a:lnT w="12700" cmpd="sng">
+                      <a:noFill/>
+                    </a:lnT>
+                    <a:lnB w="6350" cap="flat" cmpd="sng" algn="ctr">
+                      <a:solidFill>
+                        <a:schemeClr val="tx1">
+                          <a:lumMod val="65000"/>
+                          <a:lumOff val="35000"/>
+                        </a:schemeClr>
+                      </a:solidFill>
+                      <a:prstDash val="solid"/>
+                      <a:round/>
+                      <a:headEnd type="none" w="med" len="med"/>
+                      <a:tailEnd type="none" w="med" len="med"/>
+                    </a:lnB>
+                    <a:lnTlToBr w="12700" cmpd="sng">
+                      <a:noFill/>
+                      <a:prstDash val="solid"/>
+                    </a:lnTlToBr>
+                    <a:lnBlToTr w="12700" cmpd="sng">
+                      <a:noFill/>
+                      <a:prstDash val="solid"/>
+                    </a:lnBlToTr>
+                  </a:tcPr>
+                </a:tc>
+                <a:extLst>
+                  <a:ext uri="{0D108BD9-81ED-4DB2-BD59-A6C34878D82A}">
+                    <a16:rowId xmlns:a16="http://schemas.microsoft.com/office/drawing/2014/main" val="3002945833"/>
+                  </a:ext>
+                </a:extLst>
+              </a:tr>
+              <a:tr h="0">
+                <a:tc gridSpan="2">
+                  <a:txBody>
+                    <a:bodyPr/>
+                    <a:lstStyle/>
+                    <a:p>
+                      <a:pPr marL="0" marR="0" lvl="0" indent="0" algn="ctr" defTabSz="914400" rtl="0" eaLnBrk="1" fontAlgn="auto" latinLnBrk="0" hangingPunct="1">
+                        <a:lnSpc>
+                          <a:spcPct val="100000"/>
+                        </a:lnSpc>
+                        <a:spcBef>
+                          <a:spcPts val="0"/>
+                        </a:spcBef>
+                        <a:spcAft>
+                          <a:spcPts val="0"/>
+                        </a:spcAft>
+                        <a:buClrTx/>
+                        <a:buSzTx/>
+                        <a:buFontTx/>
+                        <a:buNone/>
+                        <a:tabLst/>
+                        <a:defRPr/>
+                      </a:pPr>
+                      <a:endParaRPr lang="en-US" sz="1400" i="1" dirty="0">
+                        <a:solidFill>
+                          <a:srgbClr val="808080"/>
+                        </a:solidFill>
+                        <a:latin typeface="D2CodingLigature Nerd Font" panose="020B0609020101020101" pitchFamily="49" charset="-127"/>
+                        <a:ea typeface="D2CodingLigature Nerd Font" panose="020B0609020101020101" pitchFamily="49" charset="-127"/>
+                        <a:cs typeface="JetBrains Mono" panose="02000009000000000000" pitchFamily="49" charset="0"/>
+                      </a:endParaRPr>
+                    </a:p>
+                    <a:p>
+                      <a:pPr marL="0" marR="0" lvl="0" indent="0" algn="ctr" defTabSz="914400" rtl="0" eaLnBrk="1" fontAlgn="auto" latinLnBrk="0" hangingPunct="1">
+                        <a:lnSpc>
+                          <a:spcPct val="100000"/>
+                        </a:lnSpc>
+                        <a:spcBef>
+                          <a:spcPts val="0"/>
+                        </a:spcBef>
+                        <a:spcAft>
+                          <a:spcPts val="0"/>
+                        </a:spcAft>
+                        <a:buClrTx/>
+                        <a:buSzTx/>
+                        <a:buFontTx/>
+                        <a:buNone/>
+                        <a:tabLst/>
+                        <a:defRPr/>
+                      </a:pPr>
+                      <a:endParaRPr lang="en-US" sz="1400" i="1" dirty="0">
+                        <a:solidFill>
+                          <a:srgbClr val="808080"/>
+                        </a:solidFill>
+                        <a:latin typeface="D2CodingLigature Nerd Font" panose="020B0609020101020101" pitchFamily="49" charset="-127"/>
+                        <a:ea typeface="D2CodingLigature Nerd Font" panose="020B0609020101020101" pitchFamily="49" charset="-127"/>
+                        <a:cs typeface="JetBrains Mono" panose="02000009000000000000" pitchFamily="49" charset="0"/>
+                      </a:endParaRPr>
+                    </a:p>
+                    <a:p>
+                      <a:pPr marL="0" marR="0" lvl="0" indent="0" algn="ctr" defTabSz="914400" rtl="0" eaLnBrk="1" fontAlgn="auto" latinLnBrk="0" hangingPunct="1">
+                        <a:lnSpc>
+                          <a:spcPct val="100000"/>
+                        </a:lnSpc>
+                        <a:spcBef>
+                          <a:spcPts val="0"/>
+                        </a:spcBef>
+                        <a:spcAft>
+                          <a:spcPts val="0"/>
+                        </a:spcAft>
+                        <a:buClrTx/>
+                        <a:buSzTx/>
+                        <a:buFontTx/>
+                        <a:buNone/>
+                        <a:tabLst/>
+                        <a:defRPr/>
+                      </a:pPr>
+                      <a:r>
+                        <a:rPr lang="en-US" sz="1400" b="1" i="1" dirty="0">
+                          <a:solidFill>
+                            <a:srgbClr val="FF9900"/>
+                          </a:solidFill>
+                          <a:latin typeface="D2CodingLigature Nerd Font" panose="020B0609020101020101" pitchFamily="49" charset="-127"/>
+                          <a:ea typeface="D2CodingLigature Nerd Font" panose="020B0609020101020101" pitchFamily="49" charset="-127"/>
+                          <a:cs typeface="JetBrains Mono" panose="02000009000000000000" pitchFamily="49" charset="0"/>
+                        </a:rPr>
+                        <a:t>// EC Type</a:t>
+                      </a:r>
+                      <a:endParaRPr lang="en-US" sz="1400" b="1" dirty="0">
+                        <a:solidFill>
+                          <a:srgbClr val="FF9900"/>
+                        </a:solidFill>
+                        <a:latin typeface="D2CodingLigature Nerd Font" panose="020B0609020101020101" pitchFamily="49" charset="-127"/>
+                        <a:ea typeface="D2CodingLigature Nerd Font" panose="020B0609020101020101" pitchFamily="49" charset="-127"/>
+                        <a:cs typeface="JetBrains Mono" panose="02000009000000000000" pitchFamily="49" charset="0"/>
+                      </a:endParaRPr>
+                    </a:p>
+                  </a:txBody>
+                  <a:tcPr marL="45720" marR="45720">
+                    <a:lnL w="12700" cmpd="sng">
+                      <a:noFill/>
+                    </a:lnL>
+                    <a:lnR w="12700" cmpd="sng">
+                      <a:noFill/>
+                    </a:lnR>
+                    <a:lnT w="6350" cap="flat" cmpd="sng" algn="ctr">
+                      <a:solidFill>
+                        <a:schemeClr val="tx1">
+                          <a:lumMod val="65000"/>
+                          <a:lumOff val="35000"/>
+                        </a:schemeClr>
+                      </a:solidFill>
+                      <a:prstDash val="solid"/>
+                      <a:round/>
+                      <a:headEnd type="none" w="med" len="med"/>
+                      <a:tailEnd type="none" w="med" len="med"/>
+                    </a:lnT>
+                    <a:lnB w="12700" cmpd="sng">
+                      <a:noFill/>
+                    </a:lnB>
+                    <a:lnTlToBr w="12700" cmpd="sng">
+                      <a:noFill/>
+                      <a:prstDash val="solid"/>
+                    </a:lnTlToBr>
+                    <a:lnBlToTr w="12700" cmpd="sng">
+                      <a:noFill/>
+                      <a:prstDash val="solid"/>
+                    </a:lnBlToTr>
+                  </a:tcPr>
+                </a:tc>
+                <a:tc hMerge="1">
+                  <a:txBody>
+                    <a:bodyPr/>
+                    <a:lstStyle/>
+                    <a:p>
+                      <a:pPr marL="0" marR="0" lvl="0" indent="0" algn="ctr" defTabSz="914400" rtl="0" eaLnBrk="1" fontAlgn="auto" latinLnBrk="0" hangingPunct="1">
+                        <a:lnSpc>
+                          <a:spcPct val="100000"/>
+                        </a:lnSpc>
+                        <a:spcBef>
+                          <a:spcPts val="0"/>
+                        </a:spcBef>
+                        <a:spcAft>
+                          <a:spcPts val="0"/>
+                        </a:spcAft>
+                        <a:buClrTx/>
+                        <a:buSzTx/>
+                        <a:buFontTx/>
+                        <a:buNone/>
+                        <a:tabLst/>
+                        <a:defRPr/>
+                      </a:pPr>
+                      <a:endParaRPr lang="en-US" sz="1400" b="1" dirty="0">
+                        <a:solidFill>
+                          <a:srgbClr val="FF9900"/>
+                        </a:solidFill>
+                        <a:latin typeface="D2CodingLigature Nerd Font" panose="020B0609020101020101" pitchFamily="49" charset="-127"/>
+                        <a:ea typeface="D2CodingLigature Nerd Font" panose="020B0609020101020101" pitchFamily="49" charset="-127"/>
+                        <a:cs typeface="JetBrains Mono" panose="02000009000000000000" pitchFamily="49" charset="0"/>
+                      </a:endParaRPr>
+                    </a:p>
+                  </a:txBody>
+                  <a:tcPr marL="45720" marR="45720">
+                    <a:lnL w="12700" cmpd="sng">
+                      <a:noFill/>
+                    </a:lnL>
+                    <a:lnR w="12700" cmpd="sng">
+                      <a:noFill/>
+                    </a:lnR>
+                    <a:lnT w="6350" cap="flat" cmpd="sng" algn="ctr">
+                      <a:solidFill>
+                        <a:schemeClr val="tx1">
+                          <a:lumMod val="65000"/>
+                          <a:lumOff val="35000"/>
+                        </a:schemeClr>
+                      </a:solidFill>
+                      <a:prstDash val="solid"/>
+                      <a:round/>
+                      <a:headEnd type="none" w="med" len="med"/>
+                      <a:tailEnd type="none" w="med" len="med"/>
+                    </a:lnT>
+                    <a:lnB w="12700" cmpd="sng">
+                      <a:noFill/>
+                    </a:lnB>
+                    <a:lnTlToBr w="12700" cmpd="sng">
+                      <a:noFill/>
+                      <a:prstDash val="solid"/>
+                    </a:lnTlToBr>
+                    <a:lnBlToTr w="12700" cmpd="sng">
+                      <a:noFill/>
+                      <a:prstDash val="solid"/>
+                    </a:lnBlToTr>
+                  </a:tcPr>
+                </a:tc>
+                <a:tc>
+                  <a:txBody>
+                    <a:bodyPr/>
+                    <a:lstStyle/>
+                    <a:p>
+                      <a:pPr algn="ctr"/>
+                      <a:endParaRPr lang="en-US" sz="1400" dirty="0">
+                        <a:latin typeface="D2CodingLigature Nerd Font" panose="020B0609020101020101" pitchFamily="49" charset="-127"/>
+                        <a:ea typeface="D2CodingLigature Nerd Font" panose="020B0609020101020101" pitchFamily="49" charset="-127"/>
+                      </a:endParaRPr>
+                    </a:p>
+                    <a:p>
+                      <a:pPr algn="ctr"/>
+                      <a:endParaRPr lang="en-US" sz="1400" dirty="0">
+                        <a:latin typeface="D2CodingLigature Nerd Font" panose="020B0609020101020101" pitchFamily="49" charset="-127"/>
+                        <a:ea typeface="D2CodingLigature Nerd Font" panose="020B0609020101020101" pitchFamily="49" charset="-127"/>
+                      </a:endParaRPr>
+                    </a:p>
+                    <a:p>
+                      <a:pPr marL="0" marR="0" lvl="0" indent="0" algn="ctr" defTabSz="914400" rtl="0" eaLnBrk="1" fontAlgn="auto" latinLnBrk="0" hangingPunct="1">
+                        <a:lnSpc>
+                          <a:spcPct val="100000"/>
+                        </a:lnSpc>
+                        <a:spcBef>
+                          <a:spcPts val="0"/>
+                        </a:spcBef>
+                        <a:spcAft>
+                          <a:spcPts val="0"/>
+                        </a:spcAft>
+                        <a:buClrTx/>
+                        <a:buSzTx/>
+                        <a:buFontTx/>
+                        <a:buNone/>
+                        <a:tabLst/>
+                        <a:defRPr/>
+                      </a:pPr>
+                      <a:r>
+                        <a:rPr lang="en-US" sz="1400" b="1" i="1" dirty="0">
+                          <a:solidFill>
+                            <a:srgbClr val="FF9900"/>
+                          </a:solidFill>
+                          <a:latin typeface="D2CodingLigature Nerd Font" panose="020B0609020101020101" pitchFamily="49" charset="-127"/>
+                          <a:ea typeface="D2CodingLigature Nerd Font" panose="020B0609020101020101" pitchFamily="49" charset="-127"/>
+                          <a:cs typeface="JetBrains Mono" panose="02000009000000000000" pitchFamily="49" charset="0"/>
+                        </a:rPr>
+                        <a:t>// EC Implementation</a:t>
+                      </a:r>
+                      <a:endParaRPr lang="en-US" sz="1400" b="1" dirty="0">
+                        <a:solidFill>
+                          <a:srgbClr val="FF9900"/>
+                        </a:solidFill>
+                        <a:latin typeface="D2CodingLigature Nerd Font" panose="020B0609020101020101" pitchFamily="49" charset="-127"/>
+                        <a:ea typeface="D2CodingLigature Nerd Font" panose="020B0609020101020101" pitchFamily="49" charset="-127"/>
+                        <a:cs typeface="JetBrains Mono" panose="02000009000000000000" pitchFamily="49" charset="0"/>
+                      </a:endParaRPr>
+                    </a:p>
+                  </a:txBody>
+                  <a:tcPr marL="45720" marR="45720">
+                    <a:lnL w="12700" cmpd="sng">
+                      <a:noFill/>
+                    </a:lnL>
+                    <a:lnR w="12700" cmpd="sng">
+                      <a:noFill/>
+                    </a:lnR>
+                    <a:lnT w="6350" cap="flat" cmpd="sng" algn="ctr">
+                      <a:solidFill>
+                        <a:schemeClr val="tx1">
+                          <a:lumMod val="65000"/>
+                          <a:lumOff val="35000"/>
+                        </a:schemeClr>
+                      </a:solidFill>
+                      <a:prstDash val="solid"/>
+                      <a:round/>
+                      <a:headEnd type="none" w="med" len="med"/>
+                      <a:tailEnd type="none" w="med" len="med"/>
+                    </a:lnT>
+                    <a:lnB w="12700" cmpd="sng">
+                      <a:noFill/>
+                    </a:lnB>
+                    <a:lnTlToBr w="12700" cmpd="sng">
+                      <a:noFill/>
+                      <a:prstDash val="solid"/>
+                    </a:lnTlToBr>
+                    <a:lnBlToTr w="12700" cmpd="sng">
+                      <a:noFill/>
+                      <a:prstDash val="solid"/>
+                    </a:lnBlToTr>
+                  </a:tcPr>
+                </a:tc>
+                <a:extLst>
+                  <a:ext uri="{0D108BD9-81ED-4DB2-BD59-A6C34878D82A}">
+                    <a16:rowId xmlns:a16="http://schemas.microsoft.com/office/drawing/2014/main" val="3547383470"/>
+                  </a:ext>
+                </a:extLst>
+              </a:tr>
+              <a:tr h="0">
+                <a:tc gridSpan="2">
+                  <a:txBody>
+                    <a:bodyPr/>
+                    <a:lstStyle/>
+                    <a:p>
+                      <a:pPr algn="ctr"/>
+                      <a:r>
+                        <a:rPr lang="en-US" sz="1400" dirty="0" err="1">
+                          <a:solidFill>
+                            <a:srgbClr val="0070FF"/>
+                          </a:solidFill>
+                          <a:effectLst/>
+                          <a:latin typeface="D2CodingLigature Nerd Font" panose="020B0609020101020101" pitchFamily="49" charset="-127"/>
+                          <a:ea typeface="D2CodingLigature Nerd Font" panose="020B0609020101020101" pitchFamily="49" charset="-127"/>
+                          <a:cs typeface="JetBrains Mono" panose="02000009000000000000" pitchFamily="49" charset="0"/>
+                        </a:rPr>
+                        <a:t>MutableList</a:t>
+                      </a:r>
+                      <a:r>
+                        <a:rPr lang="en-US" sz="1400" dirty="0">
+                          <a:solidFill>
+                            <a:srgbClr val="000000"/>
+                          </a:solidFill>
+                          <a:effectLst/>
+                          <a:latin typeface="D2CodingLigature Nerd Font" panose="020B0609020101020101" pitchFamily="49" charset="-127"/>
+                          <a:ea typeface="D2CodingLigature Nerd Font" panose="020B0609020101020101" pitchFamily="49" charset="-127"/>
+                          <a:cs typeface="JetBrains Mono" panose="02000009000000000000" pitchFamily="49" charset="0"/>
+                        </a:rPr>
+                        <a:t>&lt;</a:t>
+                      </a:r>
+                      <a:r>
+                        <a:rPr lang="en-US" sz="1400" dirty="0">
+                          <a:solidFill>
+                            <a:srgbClr val="A10000"/>
+                          </a:solidFill>
+                          <a:effectLst/>
+                          <a:latin typeface="D2CodingLigature Nerd Font" panose="020B0609020101020101" pitchFamily="49" charset="-127"/>
+                          <a:ea typeface="D2CodingLigature Nerd Font" panose="020B0609020101020101" pitchFamily="49" charset="-127"/>
+                          <a:cs typeface="JetBrains Mono" panose="02000009000000000000" pitchFamily="49" charset="0"/>
+                        </a:rPr>
+                        <a:t>String</a:t>
+                      </a:r>
+                      <a:r>
+                        <a:rPr lang="en-US" sz="1400" dirty="0">
+                          <a:solidFill>
+                            <a:srgbClr val="000000"/>
+                          </a:solidFill>
+                          <a:effectLst/>
+                          <a:latin typeface="D2CodingLigature Nerd Font" panose="020B0609020101020101" pitchFamily="49" charset="-127"/>
+                          <a:ea typeface="D2CodingLigature Nerd Font" panose="020B0609020101020101" pitchFamily="49" charset="-127"/>
+                          <a:cs typeface="JetBrains Mono" panose="02000009000000000000" pitchFamily="49" charset="0"/>
+                        </a:rPr>
+                        <a:t>&gt; </a:t>
+                      </a:r>
+                      <a:endParaRPr lang="en-US" sz="1400" dirty="0">
+                        <a:latin typeface="D2CodingLigature Nerd Font" panose="020B0609020101020101" pitchFamily="49" charset="-127"/>
+                        <a:ea typeface="D2CodingLigature Nerd Font" panose="020B0609020101020101" pitchFamily="49" charset="-127"/>
+                      </a:endParaRPr>
+                    </a:p>
+                  </a:txBody>
+                  <a:tcPr marL="45720" marR="45720">
+                    <a:lnL w="12700" cmpd="sng">
+                      <a:noFill/>
+                    </a:lnL>
+                    <a:lnR w="12700" cmpd="sng">
+                      <a:noFill/>
+                    </a:lnR>
+                    <a:lnT w="12700" cmpd="sng">
+                      <a:noFill/>
+                    </a:lnT>
+                    <a:lnB w="6350" cap="flat" cmpd="sng" algn="ctr">
+                      <a:solidFill>
+                        <a:schemeClr val="tx1">
+                          <a:lumMod val="65000"/>
+                          <a:lumOff val="35000"/>
+                        </a:schemeClr>
+                      </a:solidFill>
+                      <a:prstDash val="solid"/>
+                      <a:round/>
+                      <a:headEnd type="none" w="med" len="med"/>
+                      <a:tailEnd type="none" w="med" len="med"/>
+                    </a:lnB>
+                    <a:lnTlToBr w="12700" cmpd="sng">
+                      <a:noFill/>
+                      <a:prstDash val="solid"/>
+                    </a:lnTlToBr>
+                    <a:lnBlToTr w="12700" cmpd="sng">
+                      <a:noFill/>
+                      <a:prstDash val="solid"/>
+                    </a:lnBlToTr>
+                  </a:tcPr>
+                </a:tc>
+                <a:tc hMerge="1">
+                  <a:txBody>
+                    <a:bodyPr/>
+                    <a:lstStyle/>
+                    <a:p>
+                      <a:pPr algn="ctr"/>
+                      <a:endParaRPr lang="en-US" sz="1400" dirty="0">
+                        <a:latin typeface="D2CodingLigature Nerd Font" panose="020B0609020101020101" pitchFamily="49" charset="-127"/>
+                        <a:ea typeface="D2CodingLigature Nerd Font" panose="020B0609020101020101" pitchFamily="49" charset="-127"/>
+                      </a:endParaRPr>
+                    </a:p>
+                  </a:txBody>
+                  <a:tcPr marL="45720" marR="45720">
+                    <a:lnL w="12700" cmpd="sng">
+                      <a:noFill/>
+                    </a:lnL>
+                    <a:lnR w="12700" cmpd="sng">
+                      <a:noFill/>
+                    </a:lnR>
+                    <a:lnT w="12700" cmpd="sng">
+                      <a:noFill/>
+                    </a:lnT>
+                    <a:lnB w="6350" cap="flat" cmpd="sng" algn="ctr">
+                      <a:solidFill>
+                        <a:schemeClr val="tx1">
+                          <a:lumMod val="65000"/>
+                          <a:lumOff val="35000"/>
+                        </a:schemeClr>
+                      </a:solidFill>
+                      <a:prstDash val="solid"/>
+                      <a:round/>
+                      <a:headEnd type="none" w="med" len="med"/>
+                      <a:tailEnd type="none" w="med" len="med"/>
+                    </a:lnB>
+                    <a:lnTlToBr w="12700" cmpd="sng">
+                      <a:noFill/>
+                      <a:prstDash val="solid"/>
+                    </a:lnTlToBr>
+                    <a:lnBlToTr w="12700" cmpd="sng">
+                      <a:noFill/>
+                      <a:prstDash val="solid"/>
+                    </a:lnBlToTr>
+                  </a:tcPr>
+                </a:tc>
+                <a:tc>
+                  <a:txBody>
+                    <a:bodyPr/>
+                    <a:lstStyle/>
+                    <a:p>
+                      <a:pPr marL="0" marR="0" lvl="0" indent="0" algn="ctr" defTabSz="914400" rtl="0" eaLnBrk="1" fontAlgn="auto" latinLnBrk="0" hangingPunct="1">
+                        <a:lnSpc>
+                          <a:spcPct val="100000"/>
+                        </a:lnSpc>
+                        <a:spcBef>
+                          <a:spcPts val="0"/>
+                        </a:spcBef>
+                        <a:spcAft>
+                          <a:spcPts val="0"/>
+                        </a:spcAft>
+                        <a:buClrTx/>
+                        <a:buSzTx/>
+                        <a:buFontTx/>
+                        <a:buNone/>
+                        <a:tabLst/>
+                        <a:defRPr/>
+                      </a:pPr>
+                      <a:r>
+                        <a:rPr lang="en-US" sz="1400" dirty="0" err="1">
+                          <a:solidFill>
+                            <a:srgbClr val="A10000"/>
+                          </a:solidFill>
+                          <a:effectLst/>
+                          <a:latin typeface="D2CodingLigature Nerd Font" panose="020B0609020101020101" pitchFamily="49" charset="-127"/>
+                          <a:ea typeface="D2CodingLigature Nerd Font" panose="020B0609020101020101" pitchFamily="49" charset="-127"/>
+                          <a:cs typeface="JetBrains Mono" panose="02000009000000000000" pitchFamily="49" charset="0"/>
+                        </a:rPr>
+                        <a:t>Lists</a:t>
+                      </a:r>
+                      <a:r>
+                        <a:rPr lang="en-US" sz="1400" dirty="0" err="1">
+                          <a:solidFill>
+                            <a:srgbClr val="000000"/>
+                          </a:solidFill>
+                          <a:effectLst/>
+                          <a:latin typeface="D2CodingLigature Nerd Font" panose="020B0609020101020101" pitchFamily="49" charset="-127"/>
+                          <a:ea typeface="D2CodingLigature Nerd Font" panose="020B0609020101020101" pitchFamily="49" charset="-127"/>
+                          <a:cs typeface="JetBrains Mono" panose="02000009000000000000" pitchFamily="49" charset="0"/>
+                        </a:rPr>
+                        <a:t>.</a:t>
+                      </a:r>
+                      <a:r>
+                        <a:rPr lang="en-US" sz="1400" b="0" i="1" dirty="0" err="1">
+                          <a:solidFill>
+                            <a:srgbClr val="660E7A"/>
+                          </a:solidFill>
+                          <a:effectLst/>
+                          <a:latin typeface="D2CodingLigature Nerd Font" panose="020B0609020101020101" pitchFamily="49" charset="-127"/>
+                          <a:ea typeface="D2CodingLigature Nerd Font" panose="020B0609020101020101" pitchFamily="49" charset="-127"/>
+                          <a:cs typeface="JetBrains Mono" panose="02000009000000000000" pitchFamily="49" charset="0"/>
+                        </a:rPr>
+                        <a:t>mutable</a:t>
+                      </a:r>
+                      <a:r>
+                        <a:rPr lang="en-US" sz="1400" dirty="0" err="1">
+                          <a:solidFill>
+                            <a:srgbClr val="000000"/>
+                          </a:solidFill>
+                          <a:effectLst/>
+                          <a:latin typeface="D2CodingLigature Nerd Font" panose="020B0609020101020101" pitchFamily="49" charset="-127"/>
+                          <a:ea typeface="D2CodingLigature Nerd Font" panose="020B0609020101020101" pitchFamily="49" charset="-127"/>
+                          <a:cs typeface="JetBrains Mono" panose="02000009000000000000" pitchFamily="49" charset="0"/>
+                        </a:rPr>
+                        <a:t>.of</a:t>
+                      </a:r>
+                      <a:r>
+                        <a:rPr lang="en-US" sz="1400" dirty="0">
+                          <a:solidFill>
+                            <a:srgbClr val="000000"/>
+                          </a:solidFill>
+                          <a:effectLst/>
+                          <a:latin typeface="D2CodingLigature Nerd Font" panose="020B0609020101020101" pitchFamily="49" charset="-127"/>
+                          <a:ea typeface="D2CodingLigature Nerd Font" panose="020B0609020101020101" pitchFamily="49" charset="-127"/>
+                          <a:cs typeface="JetBrains Mono" panose="02000009000000000000" pitchFamily="49" charset="0"/>
+                        </a:rPr>
+                        <a:t>(</a:t>
+                      </a:r>
+                      <a:r>
+                        <a:rPr lang="en-US" sz="1400" b="1" dirty="0">
+                          <a:solidFill>
+                            <a:srgbClr val="0B00CC"/>
+                          </a:solidFill>
+                          <a:effectLst/>
+                          <a:latin typeface="D2CodingLigature Nerd Font" panose="020B0609020101020101" pitchFamily="49" charset="-127"/>
+                          <a:ea typeface="D2CodingLigature Nerd Font" panose="020B0609020101020101" pitchFamily="49" charset="-127"/>
+                          <a:cs typeface="JetBrains Mono" panose="02000009000000000000" pitchFamily="49" charset="0"/>
+                        </a:rPr>
+                        <a:t>"1"</a:t>
+                      </a:r>
+                      <a:r>
+                        <a:rPr lang="en-US" sz="1400" dirty="0">
+                          <a:solidFill>
+                            <a:srgbClr val="000000"/>
+                          </a:solidFill>
+                          <a:effectLst/>
+                          <a:latin typeface="D2CodingLigature Nerd Font" panose="020B0609020101020101" pitchFamily="49" charset="-127"/>
+                          <a:ea typeface="D2CodingLigature Nerd Font" panose="020B0609020101020101" pitchFamily="49" charset="-127"/>
+                          <a:cs typeface="JetBrains Mono" panose="02000009000000000000" pitchFamily="49" charset="0"/>
+                        </a:rPr>
+                        <a:t>, </a:t>
+                      </a:r>
+                      <a:r>
+                        <a:rPr lang="en-US" sz="1400" b="1" dirty="0">
+                          <a:solidFill>
+                            <a:srgbClr val="0B00CC"/>
+                          </a:solidFill>
+                          <a:effectLst/>
+                          <a:latin typeface="D2CodingLigature Nerd Font" panose="020B0609020101020101" pitchFamily="49" charset="-127"/>
+                          <a:ea typeface="D2CodingLigature Nerd Font" panose="020B0609020101020101" pitchFamily="49" charset="-127"/>
+                          <a:cs typeface="JetBrains Mono" panose="02000009000000000000" pitchFamily="49" charset="0"/>
+                        </a:rPr>
+                        <a:t>"2"</a:t>
+                      </a:r>
+                      <a:r>
+                        <a:rPr lang="en-US" sz="1400" dirty="0">
+                          <a:solidFill>
+                            <a:srgbClr val="000000"/>
+                          </a:solidFill>
+                          <a:effectLst/>
+                          <a:latin typeface="D2CodingLigature Nerd Font" panose="020B0609020101020101" pitchFamily="49" charset="-127"/>
+                          <a:ea typeface="D2CodingLigature Nerd Font" panose="020B0609020101020101" pitchFamily="49" charset="-127"/>
+                          <a:cs typeface="JetBrains Mono" panose="02000009000000000000" pitchFamily="49" charset="0"/>
+                        </a:rPr>
+                        <a:t>, </a:t>
+                      </a:r>
+                      <a:r>
+                        <a:rPr lang="en-US" sz="1400" b="1" dirty="0">
+                          <a:solidFill>
+                            <a:srgbClr val="0B00CC"/>
+                          </a:solidFill>
+                          <a:effectLst/>
+                          <a:latin typeface="D2CodingLigature Nerd Font" panose="020B0609020101020101" pitchFamily="49" charset="-127"/>
+                          <a:ea typeface="D2CodingLigature Nerd Font" panose="020B0609020101020101" pitchFamily="49" charset="-127"/>
+                          <a:cs typeface="JetBrains Mono" panose="02000009000000000000" pitchFamily="49" charset="0"/>
+                        </a:rPr>
+                        <a:t>"3"</a:t>
+                      </a:r>
+                      <a:r>
+                        <a:rPr lang="en-US" sz="1400" dirty="0">
+                          <a:solidFill>
+                            <a:srgbClr val="000000"/>
+                          </a:solidFill>
+                          <a:effectLst/>
+                          <a:latin typeface="D2CodingLigature Nerd Font" panose="020B0609020101020101" pitchFamily="49" charset="-127"/>
+                          <a:ea typeface="D2CodingLigature Nerd Font" panose="020B0609020101020101" pitchFamily="49" charset="-127"/>
+                          <a:cs typeface="JetBrains Mono" panose="02000009000000000000" pitchFamily="49" charset="0"/>
+                        </a:rPr>
+                        <a:t>)</a:t>
+                      </a:r>
+                      <a:endParaRPr lang="en-US" sz="1400" dirty="0">
+                        <a:latin typeface="D2CodingLigature Nerd Font" panose="020B0609020101020101" pitchFamily="49" charset="-127"/>
+                        <a:ea typeface="D2CodingLigature Nerd Font" panose="020B0609020101020101" pitchFamily="49" charset="-127"/>
+                      </a:endParaRPr>
+                    </a:p>
+                  </a:txBody>
+                  <a:tcPr marL="45720" marR="45720">
+                    <a:lnL w="12700" cmpd="sng">
+                      <a:noFill/>
+                    </a:lnL>
+                    <a:lnR w="12700" cmpd="sng">
+                      <a:noFill/>
+                    </a:lnR>
+                    <a:lnT w="12700" cmpd="sng">
+                      <a:noFill/>
+                    </a:lnT>
+                    <a:lnB w="6350" cap="flat" cmpd="sng" algn="ctr">
+                      <a:solidFill>
+                        <a:schemeClr val="tx1">
+                          <a:lumMod val="65000"/>
+                          <a:lumOff val="35000"/>
+                        </a:schemeClr>
+                      </a:solidFill>
+                      <a:prstDash val="solid"/>
+                      <a:round/>
+                      <a:headEnd type="none" w="med" len="med"/>
+                      <a:tailEnd type="none" w="med" len="med"/>
+                    </a:lnB>
+                    <a:lnTlToBr w="12700" cmpd="sng">
+                      <a:noFill/>
+                      <a:prstDash val="solid"/>
+                    </a:lnTlToBr>
+                    <a:lnBlToTr w="12700" cmpd="sng">
+                      <a:noFill/>
+                      <a:prstDash val="solid"/>
+                    </a:lnBlToTr>
+                  </a:tcPr>
+                </a:tc>
+                <a:extLst>
+                  <a:ext uri="{0D108BD9-81ED-4DB2-BD59-A6C34878D82A}">
+                    <a16:rowId xmlns:a16="http://schemas.microsoft.com/office/drawing/2014/main" val="2004203896"/>
+                  </a:ext>
+                </a:extLst>
+              </a:tr>
+            </a:tbl>
+          </a:graphicData>
+        </a:graphic>
+      </p:graphicFrame>
+      <p:graphicFrame>
+        <p:nvGraphicFramePr>
+          <p:cNvPr id="39" name="Table 38">
+            <a:extLst>
+              <a:ext uri="{FF2B5EF4-FFF2-40B4-BE49-F238E27FC236}">
+                <a16:creationId xmlns:a16="http://schemas.microsoft.com/office/drawing/2014/main" id="{239A8D97-FE28-7570-A56D-D7B1069A0A9E}"/>
+              </a:ext>
+            </a:extLst>
+          </p:cNvPr>
+          <p:cNvGraphicFramePr>
+            <a:graphicFrameLocks noGrp="1"/>
+          </p:cNvGraphicFramePr>
+          <p:nvPr>
+            <p:extLst>
+              <p:ext uri="{D42A27DB-BD31-4B8C-83A1-F6EECF244321}">
+                <p14:modId xmlns:p14="http://schemas.microsoft.com/office/powerpoint/2010/main" val="3141361740"/>
+              </p:ext>
+            </p:extLst>
+          </p:nvPr>
+        </p:nvGraphicFramePr>
+        <p:xfrm>
+          <a:off x="6588920" y="3083017"/>
+          <a:ext cx="5212081" cy="2895600"/>
+        </p:xfrm>
+        <a:graphic>
+          <a:graphicData uri="http://schemas.openxmlformats.org/drawingml/2006/table">
+            <a:tbl>
+              <a:tblPr firstRow="1" bandRow="1">
+                <a:tableStyleId>{5940675A-B579-460E-94D1-54222C63F5DA}</a:tableStyleId>
+              </a:tblPr>
+              <a:tblGrid>
+                <a:gridCol w="2004747">
+                  <a:extLst>
+                    <a:ext uri="{9D8B030D-6E8A-4147-A177-3AD203B41FA5}">
+                      <a16:colId xmlns:a16="http://schemas.microsoft.com/office/drawing/2014/main" val="195687094"/>
+                    </a:ext>
+                  </a:extLst>
+                </a:gridCol>
+                <a:gridCol w="3207334">
+                  <a:extLst>
+                    <a:ext uri="{9D8B030D-6E8A-4147-A177-3AD203B41FA5}">
+                      <a16:colId xmlns:a16="http://schemas.microsoft.com/office/drawing/2014/main" val="60489753"/>
+                    </a:ext>
+                  </a:extLst>
+                </a:gridCol>
+              </a:tblGrid>
+              <a:tr h="0">
+                <a:tc>
+                  <a:txBody>
+                    <a:bodyPr/>
+                    <a:lstStyle/>
+                    <a:p>
+                      <a:pPr marL="0" marR="0" lvl="0" indent="0" algn="ctr" defTabSz="914400" rtl="0" eaLnBrk="1" fontAlgn="auto" latinLnBrk="0" hangingPunct="1">
+                        <a:lnSpc>
+                          <a:spcPct val="100000"/>
+                        </a:lnSpc>
+                        <a:spcBef>
+                          <a:spcPts val="0"/>
+                        </a:spcBef>
+                        <a:spcAft>
+                          <a:spcPts val="0"/>
+                        </a:spcAft>
+                        <a:buClrTx/>
+                        <a:buSzTx/>
+                        <a:buFontTx/>
+                        <a:buNone/>
+                        <a:tabLst/>
+                        <a:defRPr/>
+                      </a:pPr>
+                      <a:endParaRPr lang="en-US" sz="1400" i="1" dirty="0">
+                        <a:solidFill>
+                          <a:srgbClr val="808080"/>
+                        </a:solidFill>
+                        <a:latin typeface="D2CodingLigature Nerd Font" panose="020B0609020101020101" pitchFamily="49" charset="-127"/>
+                        <a:ea typeface="D2CodingLigature Nerd Font" panose="020B0609020101020101" pitchFamily="49" charset="-127"/>
+                        <a:cs typeface="JetBrains Mono" panose="02000009000000000000" pitchFamily="49" charset="0"/>
+                      </a:endParaRPr>
+                    </a:p>
+                    <a:p>
+                      <a:pPr marL="0" marR="0" lvl="0" indent="0" algn="ctr" defTabSz="914400" rtl="0" eaLnBrk="1" fontAlgn="auto" latinLnBrk="0" hangingPunct="1">
+                        <a:lnSpc>
+                          <a:spcPct val="100000"/>
+                        </a:lnSpc>
+                        <a:spcBef>
+                          <a:spcPts val="0"/>
+                        </a:spcBef>
+                        <a:spcAft>
+                          <a:spcPts val="0"/>
+                        </a:spcAft>
+                        <a:buClrTx/>
+                        <a:buSzTx/>
+                        <a:buFontTx/>
+                        <a:buNone/>
+                        <a:tabLst/>
+                        <a:defRPr/>
+                      </a:pPr>
+                      <a:r>
+                        <a:rPr lang="en-US" sz="1400" i="1" dirty="0">
+                          <a:solidFill>
+                            <a:srgbClr val="808080"/>
+                          </a:solidFill>
+                          <a:latin typeface="D2CodingLigature Nerd Font" panose="020B0609020101020101" pitchFamily="49" charset="-127"/>
+                          <a:ea typeface="D2CodingLigature Nerd Font" panose="020B0609020101020101" pitchFamily="49" charset="-127"/>
+                          <a:cs typeface="JetBrains Mono" panose="02000009000000000000" pitchFamily="49" charset="0"/>
+                        </a:rPr>
+                        <a:t>// JDK Type</a:t>
+                      </a:r>
+                      <a:endParaRPr lang="en-US" sz="1400" dirty="0">
+                        <a:solidFill>
+                          <a:srgbClr val="0070FF"/>
+                        </a:solidFill>
+                        <a:latin typeface="D2CodingLigature Nerd Font" panose="020B0609020101020101" pitchFamily="49" charset="-127"/>
+                        <a:ea typeface="D2CodingLigature Nerd Font" panose="020B0609020101020101" pitchFamily="49" charset="-127"/>
+                        <a:cs typeface="JetBrains Mono" panose="02000009000000000000" pitchFamily="49" charset="0"/>
+                      </a:endParaRPr>
+                    </a:p>
+                  </a:txBody>
+                  <a:tcPr marL="45720" marR="45720">
+                    <a:lnL w="12700" cmpd="sng">
+                      <a:noFill/>
+                    </a:lnL>
+                    <a:lnR w="12700" cmpd="sng">
+                      <a:noFill/>
+                    </a:lnR>
+                    <a:lnT w="12700" cmpd="sng">
+                      <a:noFill/>
+                    </a:lnT>
+                    <a:lnB w="12700" cmpd="sng">
+                      <a:noFill/>
+                    </a:lnB>
+                    <a:lnTlToBr w="12700" cmpd="sng">
+                      <a:noFill/>
+                      <a:prstDash val="solid"/>
+                    </a:lnTlToBr>
+                    <a:lnBlToTr w="12700" cmpd="sng">
+                      <a:noFill/>
+                      <a:prstDash val="solid"/>
+                    </a:lnBlToTr>
+                  </a:tcPr>
+                </a:tc>
+                <a:tc>
+                  <a:txBody>
+                    <a:bodyPr/>
+                    <a:lstStyle/>
+                    <a:p>
+                      <a:pPr algn="ctr"/>
+                      <a:endParaRPr lang="en-US" sz="1400" i="1" dirty="0">
+                        <a:solidFill>
+                          <a:srgbClr val="808080"/>
+                        </a:solidFill>
+                        <a:latin typeface="D2CodingLigature Nerd Font" panose="020B0609020101020101" pitchFamily="49" charset="-127"/>
+                        <a:ea typeface="D2CodingLigature Nerd Font" panose="020B0609020101020101" pitchFamily="49" charset="-127"/>
+                        <a:cs typeface="JetBrains Mono" panose="02000009000000000000" pitchFamily="49" charset="0"/>
+                      </a:endParaRPr>
+                    </a:p>
+                    <a:p>
+                      <a:pPr algn="ctr"/>
+                      <a:r>
+                        <a:rPr lang="en-US" sz="1400" i="1" dirty="0">
+                          <a:solidFill>
+                            <a:srgbClr val="808080"/>
+                          </a:solidFill>
+                          <a:latin typeface="D2CodingLigature Nerd Font" panose="020B0609020101020101" pitchFamily="49" charset="-127"/>
+                          <a:ea typeface="D2CodingLigature Nerd Font" panose="020B0609020101020101" pitchFamily="49" charset="-127"/>
+                          <a:cs typeface="JetBrains Mono" panose="02000009000000000000" pitchFamily="49" charset="0"/>
+                        </a:rPr>
+                        <a:t>// JDK Implementation</a:t>
+                      </a:r>
+                      <a:endParaRPr lang="en-US" sz="1400" dirty="0">
+                        <a:solidFill>
+                          <a:srgbClr val="0070FF"/>
+                        </a:solidFill>
+                        <a:latin typeface="D2CodingLigature Nerd Font" panose="020B0609020101020101" pitchFamily="49" charset="-127"/>
+                        <a:ea typeface="D2CodingLigature Nerd Font" panose="020B0609020101020101" pitchFamily="49" charset="-127"/>
+                        <a:cs typeface="JetBrains Mono" panose="02000009000000000000" pitchFamily="49" charset="0"/>
+                      </a:endParaRPr>
+                    </a:p>
+                  </a:txBody>
+                  <a:tcPr marL="45720" marR="45720">
+                    <a:lnL w="12700" cmpd="sng">
+                      <a:noFill/>
+                    </a:lnL>
+                    <a:lnR w="12700" cmpd="sng">
+                      <a:noFill/>
+                    </a:lnR>
+                    <a:lnT w="12700" cmpd="sng">
+                      <a:noFill/>
+                    </a:lnT>
+                    <a:lnB w="12700" cmpd="sng">
+                      <a:noFill/>
+                    </a:lnB>
+                    <a:lnTlToBr w="12700" cmpd="sng">
+                      <a:noFill/>
+                      <a:prstDash val="solid"/>
+                    </a:lnTlToBr>
+                    <a:lnBlToTr w="12700" cmpd="sng">
+                      <a:noFill/>
+                      <a:prstDash val="solid"/>
+                    </a:lnBlToTr>
+                  </a:tcPr>
+                </a:tc>
+                <a:extLst>
+                  <a:ext uri="{0D108BD9-81ED-4DB2-BD59-A6C34878D82A}">
+                    <a16:rowId xmlns:a16="http://schemas.microsoft.com/office/drawing/2014/main" val="432955028"/>
+                  </a:ext>
+                </a:extLst>
+              </a:tr>
+              <a:tr h="0">
+                <a:tc>
+                  <a:txBody>
+                    <a:bodyPr/>
+                    <a:lstStyle/>
+                    <a:p>
+                      <a:pPr algn="ctr"/>
+                      <a:r>
+                        <a:rPr lang="en-US" sz="1400" dirty="0">
+                          <a:solidFill>
+                            <a:srgbClr val="0070FF"/>
+                          </a:solidFill>
+                          <a:effectLst/>
+                          <a:latin typeface="D2CodingLigature Nerd Font" panose="020B0609020101020101" pitchFamily="49" charset="-127"/>
+                          <a:ea typeface="D2CodingLigature Nerd Font" panose="020B0609020101020101" pitchFamily="49" charset="-127"/>
+                          <a:cs typeface="JetBrains Mono" panose="02000009000000000000" pitchFamily="49" charset="0"/>
+                        </a:rPr>
+                        <a:t>List</a:t>
+                      </a:r>
+                      <a:r>
+                        <a:rPr lang="en-US" sz="1400" dirty="0">
+                          <a:solidFill>
+                            <a:srgbClr val="000000"/>
+                          </a:solidFill>
+                          <a:effectLst/>
+                          <a:latin typeface="D2CodingLigature Nerd Font" panose="020B0609020101020101" pitchFamily="49" charset="-127"/>
+                          <a:ea typeface="D2CodingLigature Nerd Font" panose="020B0609020101020101" pitchFamily="49" charset="-127"/>
+                          <a:cs typeface="JetBrains Mono" panose="02000009000000000000" pitchFamily="49" charset="0"/>
+                        </a:rPr>
+                        <a:t>&lt;</a:t>
+                      </a:r>
+                      <a:r>
+                        <a:rPr lang="en-US" sz="1400" dirty="0">
+                          <a:solidFill>
+                            <a:srgbClr val="A10000"/>
+                          </a:solidFill>
+                          <a:effectLst/>
+                          <a:latin typeface="D2CodingLigature Nerd Font" panose="020B0609020101020101" pitchFamily="49" charset="-127"/>
+                          <a:ea typeface="D2CodingLigature Nerd Font" panose="020B0609020101020101" pitchFamily="49" charset="-127"/>
+                          <a:cs typeface="JetBrains Mono" panose="02000009000000000000" pitchFamily="49" charset="0"/>
+                        </a:rPr>
+                        <a:t>String</a:t>
+                      </a:r>
+                      <a:r>
+                        <a:rPr lang="en-US" sz="1400" dirty="0">
+                          <a:solidFill>
+                            <a:srgbClr val="000000"/>
+                          </a:solidFill>
+                          <a:effectLst/>
+                          <a:latin typeface="D2CodingLigature Nerd Font" panose="020B0609020101020101" pitchFamily="49" charset="-127"/>
+                          <a:ea typeface="D2CodingLigature Nerd Font" panose="020B0609020101020101" pitchFamily="49" charset="-127"/>
+                          <a:cs typeface="JetBrains Mono" panose="02000009000000000000" pitchFamily="49" charset="0"/>
+                        </a:rPr>
+                        <a:t>&gt; </a:t>
+                      </a:r>
+                      <a:endParaRPr lang="en-US" sz="1400" dirty="0">
+                        <a:latin typeface="D2CodingLigature Nerd Font" panose="020B0609020101020101" pitchFamily="49" charset="-127"/>
+                        <a:ea typeface="D2CodingLigature Nerd Font" panose="020B0609020101020101" pitchFamily="49" charset="-127"/>
+                      </a:endParaRPr>
+                    </a:p>
+                  </a:txBody>
+                  <a:tcPr marL="45720" marR="45720">
+                    <a:lnL w="12700" cmpd="sng">
+                      <a:noFill/>
+                    </a:lnL>
+                    <a:lnR w="12700" cmpd="sng">
+                      <a:noFill/>
+                    </a:lnR>
+                    <a:lnT w="12700" cmpd="sng">
+                      <a:noFill/>
+                    </a:lnT>
+                    <a:lnB w="6350" cap="flat" cmpd="sng" algn="ctr">
+                      <a:solidFill>
+                        <a:schemeClr val="tx1">
+                          <a:lumMod val="65000"/>
+                          <a:lumOff val="35000"/>
+                        </a:schemeClr>
+                      </a:solidFill>
+                      <a:prstDash val="solid"/>
+                      <a:round/>
+                      <a:headEnd type="none" w="med" len="med"/>
+                      <a:tailEnd type="none" w="med" len="med"/>
+                    </a:lnB>
+                    <a:lnTlToBr w="12700" cmpd="sng">
+                      <a:noFill/>
+                      <a:prstDash val="solid"/>
+                    </a:lnTlToBr>
+                    <a:lnBlToTr w="12700" cmpd="sng">
+                      <a:noFill/>
+                      <a:prstDash val="solid"/>
+                    </a:lnBlToTr>
+                  </a:tcPr>
+                </a:tc>
+                <a:tc>
+                  <a:txBody>
+                    <a:bodyPr/>
+                    <a:lstStyle/>
+                    <a:p>
+                      <a:pPr algn="ctr"/>
+                      <a:r>
+                        <a:rPr lang="en-US" sz="1400" dirty="0" err="1">
+                          <a:solidFill>
+                            <a:srgbClr val="0070FF"/>
+                          </a:solidFill>
+                          <a:effectLst/>
+                          <a:latin typeface="D2CodingLigature Nerd Font" panose="020B0609020101020101" pitchFamily="49" charset="-127"/>
+                          <a:ea typeface="D2CodingLigature Nerd Font" panose="020B0609020101020101" pitchFamily="49" charset="-127"/>
+                          <a:cs typeface="JetBrains Mono" panose="02000009000000000000" pitchFamily="49" charset="0"/>
+                        </a:rPr>
+                        <a:t>List</a:t>
+                      </a:r>
+                      <a:r>
+                        <a:rPr lang="en-US" sz="1400" dirty="0" err="1">
+                          <a:solidFill>
+                            <a:srgbClr val="000000"/>
+                          </a:solidFill>
+                          <a:effectLst/>
+                          <a:latin typeface="D2CodingLigature Nerd Font" panose="020B0609020101020101" pitchFamily="49" charset="-127"/>
+                          <a:ea typeface="D2CodingLigature Nerd Font" panose="020B0609020101020101" pitchFamily="49" charset="-127"/>
+                          <a:cs typeface="JetBrains Mono" panose="02000009000000000000" pitchFamily="49" charset="0"/>
+                        </a:rPr>
+                        <a:t>.</a:t>
+                      </a:r>
+                      <a:r>
+                        <a:rPr lang="en-US" sz="1400" i="1" dirty="0" err="1">
+                          <a:solidFill>
+                            <a:srgbClr val="000000"/>
+                          </a:solidFill>
+                          <a:effectLst/>
+                          <a:latin typeface="D2CodingLigature Nerd Font" panose="020B0609020101020101" pitchFamily="49" charset="-127"/>
+                          <a:ea typeface="D2CodingLigature Nerd Font" panose="020B0609020101020101" pitchFamily="49" charset="-127"/>
+                          <a:cs typeface="JetBrains Mono" panose="02000009000000000000" pitchFamily="49" charset="0"/>
+                        </a:rPr>
+                        <a:t>of</a:t>
+                      </a:r>
+                      <a:r>
+                        <a:rPr lang="en-US" sz="1400" dirty="0">
+                          <a:solidFill>
+                            <a:srgbClr val="000000"/>
+                          </a:solidFill>
+                          <a:effectLst/>
+                          <a:latin typeface="D2CodingLigature Nerd Font" panose="020B0609020101020101" pitchFamily="49" charset="-127"/>
+                          <a:ea typeface="D2CodingLigature Nerd Font" panose="020B0609020101020101" pitchFamily="49" charset="-127"/>
+                          <a:cs typeface="JetBrains Mono" panose="02000009000000000000" pitchFamily="49" charset="0"/>
+                        </a:rPr>
+                        <a:t>(</a:t>
+                      </a:r>
+                      <a:r>
+                        <a:rPr lang="en-US" sz="1400" b="1" dirty="0">
+                          <a:solidFill>
+                            <a:srgbClr val="0B00CC"/>
+                          </a:solidFill>
+                          <a:effectLst/>
+                          <a:latin typeface="D2CodingLigature Nerd Font" panose="020B0609020101020101" pitchFamily="49" charset="-127"/>
+                          <a:ea typeface="D2CodingLigature Nerd Font" panose="020B0609020101020101" pitchFamily="49" charset="-127"/>
+                          <a:cs typeface="JetBrains Mono" panose="02000009000000000000" pitchFamily="49" charset="0"/>
+                        </a:rPr>
+                        <a:t>"1"</a:t>
+                      </a:r>
+                      <a:r>
+                        <a:rPr lang="en-US" sz="1400" dirty="0">
+                          <a:solidFill>
+                            <a:srgbClr val="000000"/>
+                          </a:solidFill>
+                          <a:effectLst/>
+                          <a:latin typeface="D2CodingLigature Nerd Font" panose="020B0609020101020101" pitchFamily="49" charset="-127"/>
+                          <a:ea typeface="D2CodingLigature Nerd Font" panose="020B0609020101020101" pitchFamily="49" charset="-127"/>
+                          <a:cs typeface="JetBrains Mono" panose="02000009000000000000" pitchFamily="49" charset="0"/>
+                        </a:rPr>
+                        <a:t>, </a:t>
+                      </a:r>
+                      <a:r>
+                        <a:rPr lang="en-US" sz="1400" b="1" dirty="0">
+                          <a:solidFill>
+                            <a:srgbClr val="0B00CC"/>
+                          </a:solidFill>
+                          <a:effectLst/>
+                          <a:latin typeface="D2CodingLigature Nerd Font" panose="020B0609020101020101" pitchFamily="49" charset="-127"/>
+                          <a:ea typeface="D2CodingLigature Nerd Font" panose="020B0609020101020101" pitchFamily="49" charset="-127"/>
+                          <a:cs typeface="JetBrains Mono" panose="02000009000000000000" pitchFamily="49" charset="0"/>
+                        </a:rPr>
+                        <a:t>"2"</a:t>
+                      </a:r>
+                      <a:r>
+                        <a:rPr lang="en-US" sz="1400" dirty="0">
+                          <a:solidFill>
+                            <a:srgbClr val="000000"/>
+                          </a:solidFill>
+                          <a:effectLst/>
+                          <a:latin typeface="D2CodingLigature Nerd Font" panose="020B0609020101020101" pitchFamily="49" charset="-127"/>
+                          <a:ea typeface="D2CodingLigature Nerd Font" panose="020B0609020101020101" pitchFamily="49" charset="-127"/>
+                          <a:cs typeface="JetBrains Mono" panose="02000009000000000000" pitchFamily="49" charset="0"/>
+                        </a:rPr>
+                        <a:t>, </a:t>
+                      </a:r>
+                      <a:r>
+                        <a:rPr lang="en-US" sz="1400" b="1" dirty="0">
+                          <a:solidFill>
+                            <a:srgbClr val="0B00CC"/>
+                          </a:solidFill>
+                          <a:effectLst/>
+                          <a:latin typeface="D2CodingLigature Nerd Font" panose="020B0609020101020101" pitchFamily="49" charset="-127"/>
+                          <a:ea typeface="D2CodingLigature Nerd Font" panose="020B0609020101020101" pitchFamily="49" charset="-127"/>
+                          <a:cs typeface="JetBrains Mono" panose="02000009000000000000" pitchFamily="49" charset="0"/>
+                        </a:rPr>
+                        <a:t>"3"</a:t>
+                      </a:r>
+                      <a:r>
+                        <a:rPr lang="en-US" sz="1400" dirty="0">
+                          <a:solidFill>
+                            <a:srgbClr val="000000"/>
+                          </a:solidFill>
+                          <a:effectLst/>
+                          <a:latin typeface="D2CodingLigature Nerd Font" panose="020B0609020101020101" pitchFamily="49" charset="-127"/>
+                          <a:ea typeface="D2CodingLigature Nerd Font" panose="020B0609020101020101" pitchFamily="49" charset="-127"/>
+                          <a:cs typeface="JetBrains Mono" panose="02000009000000000000" pitchFamily="49" charset="0"/>
+                        </a:rPr>
+                        <a:t>)</a:t>
+                      </a:r>
+                      <a:endParaRPr lang="en-US" sz="1400" dirty="0">
+                        <a:latin typeface="D2CodingLigature Nerd Font" panose="020B0609020101020101" pitchFamily="49" charset="-127"/>
+                        <a:ea typeface="D2CodingLigature Nerd Font" panose="020B0609020101020101" pitchFamily="49" charset="-127"/>
+                      </a:endParaRPr>
+                    </a:p>
+                  </a:txBody>
+                  <a:tcPr marL="45720" marR="45720">
+                    <a:lnL w="12700" cmpd="sng">
+                      <a:noFill/>
+                    </a:lnL>
+                    <a:lnR w="12700" cmpd="sng">
+                      <a:noFill/>
+                    </a:lnR>
+                    <a:lnT w="12700" cmpd="sng">
+                      <a:noFill/>
+                    </a:lnT>
+                    <a:lnB w="6350" cap="flat" cmpd="sng" algn="ctr">
+                      <a:solidFill>
+                        <a:schemeClr val="tx1">
+                          <a:lumMod val="65000"/>
+                          <a:lumOff val="35000"/>
+                        </a:schemeClr>
+                      </a:solidFill>
+                      <a:prstDash val="solid"/>
+                      <a:round/>
+                      <a:headEnd type="none" w="med" len="med"/>
+                      <a:tailEnd type="none" w="med" len="med"/>
+                    </a:lnB>
+                    <a:lnTlToBr w="12700" cmpd="sng">
+                      <a:noFill/>
+                      <a:prstDash val="solid"/>
+                    </a:lnTlToBr>
+                    <a:lnBlToTr w="12700" cmpd="sng">
+                      <a:noFill/>
+                      <a:prstDash val="solid"/>
+                    </a:lnBlToTr>
+                  </a:tcPr>
+                </a:tc>
+                <a:extLst>
+                  <a:ext uri="{0D108BD9-81ED-4DB2-BD59-A6C34878D82A}">
+                    <a16:rowId xmlns:a16="http://schemas.microsoft.com/office/drawing/2014/main" val="2455612947"/>
+                  </a:ext>
+                </a:extLst>
+              </a:tr>
+              <a:tr h="0">
+                <a:tc>
+                  <a:txBody>
+                    <a:bodyPr/>
+                    <a:lstStyle/>
+                    <a:p>
+                      <a:pPr marL="0" marR="0" lvl="0" indent="0" algn="ctr" defTabSz="914400" rtl="0" eaLnBrk="1" fontAlgn="auto" latinLnBrk="0" hangingPunct="1">
+                        <a:lnSpc>
+                          <a:spcPct val="100000"/>
+                        </a:lnSpc>
+                        <a:spcBef>
+                          <a:spcPts val="0"/>
+                        </a:spcBef>
+                        <a:spcAft>
+                          <a:spcPts val="0"/>
+                        </a:spcAft>
+                        <a:buClrTx/>
+                        <a:buSzTx/>
+                        <a:buFontTx/>
+                        <a:buNone/>
+                        <a:tabLst/>
+                        <a:defRPr/>
+                      </a:pPr>
+                      <a:endParaRPr lang="en-US" sz="1400" i="1" dirty="0">
+                        <a:solidFill>
+                          <a:srgbClr val="808080"/>
+                        </a:solidFill>
+                        <a:latin typeface="D2CodingLigature Nerd Font" panose="020B0609020101020101" pitchFamily="49" charset="-127"/>
+                        <a:ea typeface="D2CodingLigature Nerd Font" panose="020B0609020101020101" pitchFamily="49" charset="-127"/>
+                        <a:cs typeface="JetBrains Mono" panose="02000009000000000000" pitchFamily="49" charset="0"/>
+                      </a:endParaRPr>
+                    </a:p>
+                    <a:p>
+                      <a:pPr marL="0" marR="0" lvl="0" indent="0" algn="ctr" defTabSz="914400" rtl="0" eaLnBrk="1" fontAlgn="auto" latinLnBrk="0" hangingPunct="1">
+                        <a:lnSpc>
+                          <a:spcPct val="100000"/>
+                        </a:lnSpc>
+                        <a:spcBef>
+                          <a:spcPts val="0"/>
+                        </a:spcBef>
+                        <a:spcAft>
+                          <a:spcPts val="0"/>
+                        </a:spcAft>
+                        <a:buClrTx/>
+                        <a:buSzTx/>
+                        <a:buFontTx/>
+                        <a:buNone/>
+                        <a:tabLst/>
+                        <a:defRPr/>
+                      </a:pPr>
+                      <a:r>
+                        <a:rPr lang="en-US" sz="1400" i="1" dirty="0">
+                          <a:solidFill>
+                            <a:srgbClr val="808080"/>
+                          </a:solidFill>
+                          <a:latin typeface="D2CodingLigature Nerd Font" panose="020B0609020101020101" pitchFamily="49" charset="-127"/>
+                          <a:ea typeface="D2CodingLigature Nerd Font" panose="020B0609020101020101" pitchFamily="49" charset="-127"/>
+                          <a:cs typeface="JetBrains Mono" panose="02000009000000000000" pitchFamily="49" charset="0"/>
+                        </a:rPr>
+                        <a:t>// JDK Type</a:t>
+                      </a:r>
+                      <a:endParaRPr lang="en-US" sz="1400" dirty="0">
+                        <a:solidFill>
+                          <a:srgbClr val="0070FF"/>
+                        </a:solidFill>
+                        <a:latin typeface="D2CodingLigature Nerd Font" panose="020B0609020101020101" pitchFamily="49" charset="-127"/>
+                        <a:ea typeface="D2CodingLigature Nerd Font" panose="020B0609020101020101" pitchFamily="49" charset="-127"/>
+                        <a:cs typeface="JetBrains Mono" panose="02000009000000000000" pitchFamily="49" charset="0"/>
+                      </a:endParaRPr>
+                    </a:p>
+                  </a:txBody>
+                  <a:tcPr marL="45720" marR="45720">
+                    <a:lnL w="12700" cmpd="sng">
+                      <a:noFill/>
+                    </a:lnL>
+                    <a:lnR w="12700" cmpd="sng">
+                      <a:noFill/>
+                    </a:lnR>
+                    <a:lnT w="6350" cap="flat" cmpd="sng" algn="ctr">
+                      <a:solidFill>
+                        <a:schemeClr val="tx1">
+                          <a:lumMod val="65000"/>
+                          <a:lumOff val="35000"/>
+                        </a:schemeClr>
+                      </a:solidFill>
+                      <a:prstDash val="solid"/>
+                      <a:round/>
+                      <a:headEnd type="none" w="med" len="med"/>
+                      <a:tailEnd type="none" w="med" len="med"/>
+                    </a:lnT>
+                    <a:lnB w="12700" cmpd="sng">
+                      <a:noFill/>
+                    </a:lnB>
+                    <a:lnTlToBr w="12700" cmpd="sng">
+                      <a:noFill/>
+                      <a:prstDash val="solid"/>
+                    </a:lnTlToBr>
+                    <a:lnBlToTr w="12700" cmpd="sng">
+                      <a:noFill/>
+                      <a:prstDash val="solid"/>
+                    </a:lnBlToTr>
+                  </a:tcPr>
+                </a:tc>
+                <a:tc>
+                  <a:txBody>
+                    <a:bodyPr/>
+                    <a:lstStyle/>
+                    <a:p>
+                      <a:pPr marL="0" marR="0" lvl="0" indent="0" algn="ctr" defTabSz="914400" rtl="0" eaLnBrk="1" fontAlgn="auto" latinLnBrk="0" hangingPunct="1">
+                        <a:lnSpc>
+                          <a:spcPct val="100000"/>
+                        </a:lnSpc>
+                        <a:spcBef>
+                          <a:spcPts val="0"/>
+                        </a:spcBef>
+                        <a:spcAft>
+                          <a:spcPts val="0"/>
+                        </a:spcAft>
+                        <a:buClrTx/>
+                        <a:buSzTx/>
+                        <a:buFontTx/>
+                        <a:buNone/>
+                        <a:tabLst/>
+                        <a:defRPr/>
+                      </a:pPr>
+                      <a:endParaRPr lang="en-US" sz="1400" i="1" dirty="0">
+                        <a:solidFill>
+                          <a:srgbClr val="808080"/>
+                        </a:solidFill>
+                        <a:latin typeface="D2CodingLigature Nerd Font" panose="020B0609020101020101" pitchFamily="49" charset="-127"/>
+                        <a:ea typeface="D2CodingLigature Nerd Font" panose="020B0609020101020101" pitchFamily="49" charset="-127"/>
+                        <a:cs typeface="JetBrains Mono" panose="02000009000000000000" pitchFamily="49" charset="0"/>
+                      </a:endParaRPr>
+                    </a:p>
+                    <a:p>
+                      <a:pPr marL="0" marR="0" lvl="0" indent="0" algn="ctr" defTabSz="914400" rtl="0" eaLnBrk="1" fontAlgn="auto" latinLnBrk="0" hangingPunct="1">
+                        <a:lnSpc>
+                          <a:spcPct val="100000"/>
+                        </a:lnSpc>
+                        <a:spcBef>
+                          <a:spcPts val="0"/>
+                        </a:spcBef>
+                        <a:spcAft>
+                          <a:spcPts val="0"/>
+                        </a:spcAft>
+                        <a:buClrTx/>
+                        <a:buSzTx/>
+                        <a:buFontTx/>
+                        <a:buNone/>
+                        <a:tabLst/>
+                        <a:defRPr/>
+                      </a:pPr>
+                      <a:r>
+                        <a:rPr lang="en-US" sz="1400" b="1" i="1" dirty="0">
+                          <a:solidFill>
+                            <a:srgbClr val="FF9900"/>
+                          </a:solidFill>
+                          <a:latin typeface="D2CodingLigature Nerd Font" panose="020B0609020101020101" pitchFamily="49" charset="-127"/>
+                          <a:ea typeface="D2CodingLigature Nerd Font" panose="020B0609020101020101" pitchFamily="49" charset="-127"/>
+                          <a:cs typeface="JetBrains Mono" panose="02000009000000000000" pitchFamily="49" charset="0"/>
+                        </a:rPr>
+                        <a:t>// EC Implementation</a:t>
+                      </a:r>
+                      <a:endParaRPr lang="en-US" sz="1400" b="1" dirty="0">
+                        <a:solidFill>
+                          <a:srgbClr val="FF9900"/>
+                        </a:solidFill>
+                        <a:latin typeface="D2CodingLigature Nerd Font" panose="020B0609020101020101" pitchFamily="49" charset="-127"/>
+                        <a:ea typeface="D2CodingLigature Nerd Font" panose="020B0609020101020101" pitchFamily="49" charset="-127"/>
+                        <a:cs typeface="JetBrains Mono" panose="02000009000000000000" pitchFamily="49" charset="0"/>
+                      </a:endParaRPr>
+                    </a:p>
+                  </a:txBody>
+                  <a:tcPr marL="45720" marR="45720">
+                    <a:lnL w="12700" cmpd="sng">
+                      <a:noFill/>
+                    </a:lnL>
+                    <a:lnR w="12700" cmpd="sng">
+                      <a:noFill/>
+                    </a:lnR>
+                    <a:lnT w="6350" cap="flat" cmpd="sng" algn="ctr">
+                      <a:solidFill>
+                        <a:schemeClr val="tx1">
+                          <a:lumMod val="65000"/>
+                          <a:lumOff val="35000"/>
+                        </a:schemeClr>
+                      </a:solidFill>
+                      <a:prstDash val="solid"/>
+                      <a:round/>
+                      <a:headEnd type="none" w="med" len="med"/>
+                      <a:tailEnd type="none" w="med" len="med"/>
+                    </a:lnT>
+                    <a:lnB w="12700" cmpd="sng">
+                      <a:noFill/>
+                    </a:lnB>
+                    <a:lnTlToBr w="12700" cmpd="sng">
+                      <a:noFill/>
+                      <a:prstDash val="solid"/>
+                    </a:lnTlToBr>
+                    <a:lnBlToTr w="12700" cmpd="sng">
+                      <a:noFill/>
+                      <a:prstDash val="solid"/>
+                    </a:lnBlToTr>
+                  </a:tcPr>
+                </a:tc>
+                <a:extLst>
+                  <a:ext uri="{0D108BD9-81ED-4DB2-BD59-A6C34878D82A}">
+                    <a16:rowId xmlns:a16="http://schemas.microsoft.com/office/drawing/2014/main" val="1332509447"/>
+                  </a:ext>
+                </a:extLst>
+              </a:tr>
+              <a:tr h="0">
+                <a:tc>
+                  <a:txBody>
+                    <a:bodyPr/>
+                    <a:lstStyle/>
+                    <a:p>
+                      <a:pPr algn="ctr"/>
+                      <a:r>
+                        <a:rPr lang="en-US" sz="1400" dirty="0">
+                          <a:solidFill>
+                            <a:srgbClr val="0070FF"/>
+                          </a:solidFill>
+                          <a:effectLst/>
+                          <a:latin typeface="D2CodingLigature Nerd Font" panose="020B0609020101020101" pitchFamily="49" charset="-127"/>
+                          <a:ea typeface="D2CodingLigature Nerd Font" panose="020B0609020101020101" pitchFamily="49" charset="-127"/>
+                          <a:cs typeface="JetBrains Mono" panose="02000009000000000000" pitchFamily="49" charset="0"/>
+                        </a:rPr>
+                        <a:t>List</a:t>
+                      </a:r>
+                      <a:r>
+                        <a:rPr lang="en-US" sz="1400" dirty="0">
+                          <a:solidFill>
+                            <a:srgbClr val="000000"/>
+                          </a:solidFill>
+                          <a:effectLst/>
+                          <a:latin typeface="D2CodingLigature Nerd Font" panose="020B0609020101020101" pitchFamily="49" charset="-127"/>
+                          <a:ea typeface="D2CodingLigature Nerd Font" panose="020B0609020101020101" pitchFamily="49" charset="-127"/>
+                          <a:cs typeface="JetBrains Mono" panose="02000009000000000000" pitchFamily="49" charset="0"/>
+                        </a:rPr>
+                        <a:t>&lt;</a:t>
+                      </a:r>
+                      <a:r>
+                        <a:rPr lang="en-US" sz="1400" dirty="0">
+                          <a:solidFill>
+                            <a:srgbClr val="A10000"/>
+                          </a:solidFill>
+                          <a:effectLst/>
+                          <a:latin typeface="D2CodingLigature Nerd Font" panose="020B0609020101020101" pitchFamily="49" charset="-127"/>
+                          <a:ea typeface="D2CodingLigature Nerd Font" panose="020B0609020101020101" pitchFamily="49" charset="-127"/>
+                          <a:cs typeface="JetBrains Mono" panose="02000009000000000000" pitchFamily="49" charset="0"/>
+                        </a:rPr>
+                        <a:t>String</a:t>
+                      </a:r>
+                      <a:r>
+                        <a:rPr lang="en-US" sz="1400" dirty="0">
+                          <a:solidFill>
+                            <a:srgbClr val="000000"/>
+                          </a:solidFill>
+                          <a:effectLst/>
+                          <a:latin typeface="D2CodingLigature Nerd Font" panose="020B0609020101020101" pitchFamily="49" charset="-127"/>
+                          <a:ea typeface="D2CodingLigature Nerd Font" panose="020B0609020101020101" pitchFamily="49" charset="-127"/>
+                          <a:cs typeface="JetBrains Mono" panose="02000009000000000000" pitchFamily="49" charset="0"/>
+                        </a:rPr>
+                        <a:t>&gt; </a:t>
+                      </a:r>
+                      <a:endParaRPr lang="en-US" sz="1400" dirty="0">
+                        <a:latin typeface="D2CodingLigature Nerd Font" panose="020B0609020101020101" pitchFamily="49" charset="-127"/>
+                        <a:ea typeface="D2CodingLigature Nerd Font" panose="020B0609020101020101" pitchFamily="49" charset="-127"/>
+                      </a:endParaRPr>
+                    </a:p>
+                  </a:txBody>
+                  <a:tcPr marL="45720" marR="45720">
+                    <a:lnL w="12700" cmpd="sng">
+                      <a:noFill/>
+                    </a:lnL>
+                    <a:lnR w="12700" cmpd="sng">
+                      <a:noFill/>
+                    </a:lnR>
+                    <a:lnT w="12700" cmpd="sng">
+                      <a:noFill/>
+                    </a:lnT>
+                    <a:lnB w="6350" cap="flat" cmpd="sng" algn="ctr">
+                      <a:solidFill>
+                        <a:schemeClr val="tx1">
+                          <a:lumMod val="65000"/>
+                          <a:lumOff val="35000"/>
+                        </a:schemeClr>
+                      </a:solidFill>
+                      <a:prstDash val="solid"/>
+                      <a:round/>
+                      <a:headEnd type="none" w="med" len="med"/>
+                      <a:tailEnd type="none" w="med" len="med"/>
+                    </a:lnB>
+                    <a:lnTlToBr w="12700" cmpd="sng">
+                      <a:noFill/>
+                      <a:prstDash val="solid"/>
+                    </a:lnTlToBr>
+                    <a:lnBlToTr w="12700" cmpd="sng">
+                      <a:noFill/>
+                      <a:prstDash val="solid"/>
+                    </a:lnBlToTr>
+                  </a:tcPr>
+                </a:tc>
+                <a:tc>
+                  <a:txBody>
+                    <a:bodyPr/>
+                    <a:lstStyle/>
+                    <a:p>
+                      <a:pPr algn="ctr"/>
+                      <a:r>
+                        <a:rPr lang="en-US" sz="1400" dirty="0" err="1">
+                          <a:solidFill>
+                            <a:srgbClr val="A10000"/>
+                          </a:solidFill>
+                          <a:effectLst/>
+                          <a:latin typeface="D2CodingLigature Nerd Font" panose="020B0609020101020101" pitchFamily="49" charset="-127"/>
+                          <a:ea typeface="D2CodingLigature Nerd Font" panose="020B0609020101020101" pitchFamily="49" charset="-127"/>
+                          <a:cs typeface="JetBrains Mono" panose="02000009000000000000" pitchFamily="49" charset="0"/>
+                        </a:rPr>
+                        <a:t>Lists</a:t>
+                      </a:r>
+                      <a:r>
+                        <a:rPr lang="en-US" sz="1400" dirty="0" err="1">
+                          <a:solidFill>
+                            <a:srgbClr val="000000"/>
+                          </a:solidFill>
+                          <a:effectLst/>
+                          <a:latin typeface="D2CodingLigature Nerd Font" panose="020B0609020101020101" pitchFamily="49" charset="-127"/>
+                          <a:ea typeface="D2CodingLigature Nerd Font" panose="020B0609020101020101" pitchFamily="49" charset="-127"/>
+                          <a:cs typeface="JetBrains Mono" panose="02000009000000000000" pitchFamily="49" charset="0"/>
+                        </a:rPr>
+                        <a:t>.</a:t>
+                      </a:r>
+                      <a:r>
+                        <a:rPr lang="en-US" sz="1400" b="0" i="1" dirty="0" err="1">
+                          <a:solidFill>
+                            <a:srgbClr val="660E7A"/>
+                          </a:solidFill>
+                          <a:effectLst/>
+                          <a:latin typeface="D2CodingLigature Nerd Font" panose="020B0609020101020101" pitchFamily="49" charset="-127"/>
+                          <a:ea typeface="D2CodingLigature Nerd Font" panose="020B0609020101020101" pitchFamily="49" charset="-127"/>
+                          <a:cs typeface="JetBrains Mono" panose="02000009000000000000" pitchFamily="49" charset="0"/>
+                        </a:rPr>
+                        <a:t>immutable</a:t>
+                      </a:r>
+                      <a:r>
+                        <a:rPr lang="en-US" sz="1400" dirty="0" err="1">
+                          <a:solidFill>
+                            <a:srgbClr val="000000"/>
+                          </a:solidFill>
+                          <a:effectLst/>
+                          <a:latin typeface="D2CodingLigature Nerd Font" panose="020B0609020101020101" pitchFamily="49" charset="-127"/>
+                          <a:ea typeface="D2CodingLigature Nerd Font" panose="020B0609020101020101" pitchFamily="49" charset="-127"/>
+                          <a:cs typeface="JetBrains Mono" panose="02000009000000000000" pitchFamily="49" charset="0"/>
+                        </a:rPr>
+                        <a:t>.of</a:t>
+                      </a:r>
+                      <a:r>
+                        <a:rPr lang="en-US" sz="1400" dirty="0">
+                          <a:solidFill>
+                            <a:srgbClr val="000000"/>
+                          </a:solidFill>
+                          <a:effectLst/>
+                          <a:latin typeface="D2CodingLigature Nerd Font" panose="020B0609020101020101" pitchFamily="49" charset="-127"/>
+                          <a:ea typeface="D2CodingLigature Nerd Font" panose="020B0609020101020101" pitchFamily="49" charset="-127"/>
+                          <a:cs typeface="JetBrains Mono" panose="02000009000000000000" pitchFamily="49" charset="0"/>
+                        </a:rPr>
+                        <a:t>(</a:t>
+                      </a:r>
+                      <a:r>
+                        <a:rPr lang="en-US" sz="1400" b="1" dirty="0">
+                          <a:solidFill>
+                            <a:srgbClr val="0B00CC"/>
+                          </a:solidFill>
+                          <a:effectLst/>
+                          <a:latin typeface="D2CodingLigature Nerd Font" panose="020B0609020101020101" pitchFamily="49" charset="-127"/>
+                          <a:ea typeface="D2CodingLigature Nerd Font" panose="020B0609020101020101" pitchFamily="49" charset="-127"/>
+                          <a:cs typeface="JetBrains Mono" panose="02000009000000000000" pitchFamily="49" charset="0"/>
+                        </a:rPr>
+                        <a:t>"1"</a:t>
+                      </a:r>
+                      <a:r>
+                        <a:rPr lang="en-US" sz="1400" dirty="0">
+                          <a:solidFill>
+                            <a:srgbClr val="000000"/>
+                          </a:solidFill>
+                          <a:effectLst/>
+                          <a:latin typeface="D2CodingLigature Nerd Font" panose="020B0609020101020101" pitchFamily="49" charset="-127"/>
+                          <a:ea typeface="D2CodingLigature Nerd Font" panose="020B0609020101020101" pitchFamily="49" charset="-127"/>
+                          <a:cs typeface="JetBrains Mono" panose="02000009000000000000" pitchFamily="49" charset="0"/>
+                        </a:rPr>
+                        <a:t>, </a:t>
+                      </a:r>
+                      <a:r>
+                        <a:rPr lang="en-US" sz="1400" b="1" dirty="0">
+                          <a:solidFill>
+                            <a:srgbClr val="0B00CC"/>
+                          </a:solidFill>
+                          <a:effectLst/>
+                          <a:latin typeface="D2CodingLigature Nerd Font" panose="020B0609020101020101" pitchFamily="49" charset="-127"/>
+                          <a:ea typeface="D2CodingLigature Nerd Font" panose="020B0609020101020101" pitchFamily="49" charset="-127"/>
+                          <a:cs typeface="JetBrains Mono" panose="02000009000000000000" pitchFamily="49" charset="0"/>
+                        </a:rPr>
+                        <a:t>"2"</a:t>
+                      </a:r>
+                      <a:r>
+                        <a:rPr lang="en-US" sz="1400" dirty="0">
+                          <a:solidFill>
+                            <a:srgbClr val="000000"/>
+                          </a:solidFill>
+                          <a:effectLst/>
+                          <a:latin typeface="D2CodingLigature Nerd Font" panose="020B0609020101020101" pitchFamily="49" charset="-127"/>
+                          <a:ea typeface="D2CodingLigature Nerd Font" panose="020B0609020101020101" pitchFamily="49" charset="-127"/>
+                          <a:cs typeface="JetBrains Mono" panose="02000009000000000000" pitchFamily="49" charset="0"/>
+                        </a:rPr>
+                        <a:t>, </a:t>
+                      </a:r>
+                      <a:r>
+                        <a:rPr lang="en-US" sz="1400" b="1" dirty="0">
+                          <a:solidFill>
+                            <a:srgbClr val="0B00CC"/>
+                          </a:solidFill>
+                          <a:effectLst/>
+                          <a:latin typeface="D2CodingLigature Nerd Font" panose="020B0609020101020101" pitchFamily="49" charset="-127"/>
+                          <a:ea typeface="D2CodingLigature Nerd Font" panose="020B0609020101020101" pitchFamily="49" charset="-127"/>
+                          <a:cs typeface="JetBrains Mono" panose="02000009000000000000" pitchFamily="49" charset="0"/>
+                        </a:rPr>
+                        <a:t>"3"</a:t>
+                      </a:r>
+                      <a:r>
+                        <a:rPr lang="en-US" sz="1400" dirty="0">
+                          <a:solidFill>
+                            <a:srgbClr val="000000"/>
+                          </a:solidFill>
+                          <a:effectLst/>
+                          <a:latin typeface="D2CodingLigature Nerd Font" panose="020B0609020101020101" pitchFamily="49" charset="-127"/>
+                          <a:ea typeface="D2CodingLigature Nerd Font" panose="020B0609020101020101" pitchFamily="49" charset="-127"/>
+                          <a:cs typeface="JetBrains Mono" panose="02000009000000000000" pitchFamily="49" charset="0"/>
+                        </a:rPr>
+                        <a:t>)</a:t>
+                      </a:r>
+                      <a:br>
+                        <a:rPr lang="en-US" sz="1400" dirty="0">
+                          <a:solidFill>
+                            <a:srgbClr val="000000"/>
+                          </a:solidFill>
+                          <a:effectLst/>
+                          <a:latin typeface="D2CodingLigature Nerd Font" panose="020B0609020101020101" pitchFamily="49" charset="-127"/>
+                          <a:ea typeface="D2CodingLigature Nerd Font" panose="020B0609020101020101" pitchFamily="49" charset="-127"/>
+                          <a:cs typeface="JetBrains Mono" panose="02000009000000000000" pitchFamily="49" charset="0"/>
+                        </a:rPr>
+                      </a:br>
+                      <a:r>
+                        <a:rPr lang="en-US" sz="1400" dirty="0">
+                          <a:solidFill>
+                            <a:srgbClr val="000000"/>
+                          </a:solidFill>
+                          <a:effectLst/>
+                          <a:latin typeface="Consolas" panose="020B0609020204030204" pitchFamily="49" charset="0"/>
+                        </a:rPr>
+                        <a:t>.</a:t>
+                      </a:r>
+                      <a:r>
+                        <a:rPr lang="en-US" sz="1400" dirty="0" err="1">
+                          <a:solidFill>
+                            <a:srgbClr val="000000"/>
+                          </a:solidFill>
+                          <a:effectLst/>
+                          <a:latin typeface="Consolas" panose="020B0609020204030204" pitchFamily="49" charset="0"/>
+                        </a:rPr>
+                        <a:t>castToList</a:t>
+                      </a:r>
+                      <a:r>
+                        <a:rPr lang="en-US" sz="1400" dirty="0">
+                          <a:solidFill>
+                            <a:srgbClr val="000000"/>
+                          </a:solidFill>
+                          <a:effectLst/>
+                          <a:latin typeface="Consolas" panose="020B0609020204030204" pitchFamily="49" charset="0"/>
+                        </a:rPr>
+                        <a:t>()</a:t>
+                      </a:r>
+                      <a:endParaRPr lang="en-US" sz="1400" dirty="0">
+                        <a:latin typeface="D2CodingLigature Nerd Font" panose="020B0609020101020101" pitchFamily="49" charset="-127"/>
+                        <a:ea typeface="D2CodingLigature Nerd Font" panose="020B0609020101020101" pitchFamily="49" charset="-127"/>
+                      </a:endParaRPr>
+                    </a:p>
+                  </a:txBody>
+                  <a:tcPr marL="45720" marR="45720">
+                    <a:lnL w="12700" cmpd="sng">
+                      <a:noFill/>
+                    </a:lnL>
+                    <a:lnR w="12700" cmpd="sng">
+                      <a:noFill/>
+                    </a:lnR>
+                    <a:lnT w="12700" cmpd="sng">
+                      <a:noFill/>
+                    </a:lnT>
+                    <a:lnB w="6350" cap="flat" cmpd="sng" algn="ctr">
+                      <a:solidFill>
+                        <a:schemeClr val="tx1">
+                          <a:lumMod val="65000"/>
+                          <a:lumOff val="35000"/>
+                        </a:schemeClr>
+                      </a:solidFill>
+                      <a:prstDash val="solid"/>
+                      <a:round/>
+                      <a:headEnd type="none" w="med" len="med"/>
+                      <a:tailEnd type="none" w="med" len="med"/>
+                    </a:lnB>
+                    <a:lnTlToBr w="12700" cmpd="sng">
+                      <a:noFill/>
+                      <a:prstDash val="solid"/>
+                    </a:lnTlToBr>
+                    <a:lnBlToTr w="12700" cmpd="sng">
+                      <a:noFill/>
+                      <a:prstDash val="solid"/>
+                    </a:lnBlToTr>
+                  </a:tcPr>
+                </a:tc>
+                <a:extLst>
+                  <a:ext uri="{0D108BD9-81ED-4DB2-BD59-A6C34878D82A}">
+                    <a16:rowId xmlns:a16="http://schemas.microsoft.com/office/drawing/2014/main" val="3847850457"/>
+                  </a:ext>
+                </a:extLst>
+              </a:tr>
+              <a:tr h="0">
+                <a:tc>
+                  <a:txBody>
+                    <a:bodyPr/>
+                    <a:lstStyle/>
+                    <a:p>
+                      <a:pPr marL="0" marR="0" lvl="0" indent="0" algn="ctr" defTabSz="914400" rtl="0" eaLnBrk="1" fontAlgn="auto" latinLnBrk="0" hangingPunct="1">
+                        <a:lnSpc>
+                          <a:spcPct val="100000"/>
+                        </a:lnSpc>
+                        <a:spcBef>
+                          <a:spcPts val="0"/>
+                        </a:spcBef>
+                        <a:spcAft>
+                          <a:spcPts val="0"/>
+                        </a:spcAft>
+                        <a:buClrTx/>
+                        <a:buSzTx/>
+                        <a:buFontTx/>
+                        <a:buNone/>
+                        <a:tabLst/>
+                        <a:defRPr/>
+                      </a:pPr>
+                      <a:endParaRPr lang="en-US" sz="1400" i="1" dirty="0">
+                        <a:solidFill>
+                          <a:srgbClr val="808080"/>
+                        </a:solidFill>
+                        <a:latin typeface="D2CodingLigature Nerd Font" panose="020B0609020101020101" pitchFamily="49" charset="-127"/>
+                        <a:ea typeface="D2CodingLigature Nerd Font" panose="020B0609020101020101" pitchFamily="49" charset="-127"/>
+                        <a:cs typeface="JetBrains Mono" panose="02000009000000000000" pitchFamily="49" charset="0"/>
+                      </a:endParaRPr>
+                    </a:p>
+                    <a:p>
+                      <a:pPr marL="0" marR="0" lvl="0" indent="0" algn="ctr" defTabSz="914400" rtl="0" eaLnBrk="1" fontAlgn="auto" latinLnBrk="0" hangingPunct="1">
+                        <a:lnSpc>
+                          <a:spcPct val="100000"/>
+                        </a:lnSpc>
+                        <a:spcBef>
+                          <a:spcPts val="0"/>
+                        </a:spcBef>
+                        <a:spcAft>
+                          <a:spcPts val="0"/>
+                        </a:spcAft>
+                        <a:buClrTx/>
+                        <a:buSzTx/>
+                        <a:buFontTx/>
+                        <a:buNone/>
+                        <a:tabLst/>
+                        <a:defRPr/>
+                      </a:pPr>
+                      <a:endParaRPr lang="en-US" sz="1400" i="1" dirty="0">
+                        <a:solidFill>
+                          <a:srgbClr val="808080"/>
+                        </a:solidFill>
+                        <a:latin typeface="D2CodingLigature Nerd Font" panose="020B0609020101020101" pitchFamily="49" charset="-127"/>
+                        <a:ea typeface="D2CodingLigature Nerd Font" panose="020B0609020101020101" pitchFamily="49" charset="-127"/>
+                        <a:cs typeface="JetBrains Mono" panose="02000009000000000000" pitchFamily="49" charset="0"/>
+                      </a:endParaRPr>
+                    </a:p>
+                    <a:p>
+                      <a:pPr marL="0" marR="0" lvl="0" indent="0" algn="ctr" defTabSz="914400" rtl="0" eaLnBrk="1" fontAlgn="auto" latinLnBrk="0" hangingPunct="1">
+                        <a:lnSpc>
+                          <a:spcPct val="100000"/>
+                        </a:lnSpc>
+                        <a:spcBef>
+                          <a:spcPts val="0"/>
+                        </a:spcBef>
+                        <a:spcAft>
+                          <a:spcPts val="0"/>
+                        </a:spcAft>
+                        <a:buClrTx/>
+                        <a:buSzTx/>
+                        <a:buFontTx/>
+                        <a:buNone/>
+                        <a:tabLst/>
+                        <a:defRPr/>
+                      </a:pPr>
+                      <a:r>
+                        <a:rPr lang="en-US" sz="1400" b="1" i="1" dirty="0">
+                          <a:solidFill>
+                            <a:srgbClr val="FF9900"/>
+                          </a:solidFill>
+                          <a:latin typeface="D2CodingLigature Nerd Font" panose="020B0609020101020101" pitchFamily="49" charset="-127"/>
+                          <a:ea typeface="D2CodingLigature Nerd Font" panose="020B0609020101020101" pitchFamily="49" charset="-127"/>
+                          <a:cs typeface="JetBrains Mono" panose="02000009000000000000" pitchFamily="49" charset="0"/>
+                        </a:rPr>
+                        <a:t>// EC Type</a:t>
+                      </a:r>
+                      <a:endParaRPr lang="en-US" sz="1400" b="1" dirty="0">
+                        <a:solidFill>
+                          <a:srgbClr val="FF9900"/>
+                        </a:solidFill>
+                        <a:latin typeface="D2CodingLigature Nerd Font" panose="020B0609020101020101" pitchFamily="49" charset="-127"/>
+                        <a:ea typeface="D2CodingLigature Nerd Font" panose="020B0609020101020101" pitchFamily="49" charset="-127"/>
+                        <a:cs typeface="JetBrains Mono" panose="02000009000000000000" pitchFamily="49" charset="0"/>
+                      </a:endParaRPr>
+                    </a:p>
+                  </a:txBody>
+                  <a:tcPr marL="45720" marR="45720">
+                    <a:lnL w="12700" cmpd="sng">
+                      <a:noFill/>
+                    </a:lnL>
+                    <a:lnR w="12700" cmpd="sng">
+                      <a:noFill/>
+                    </a:lnR>
+                    <a:lnT w="6350" cap="flat" cmpd="sng" algn="ctr">
+                      <a:solidFill>
+                        <a:schemeClr val="tx1">
+                          <a:lumMod val="65000"/>
+                          <a:lumOff val="35000"/>
+                        </a:schemeClr>
+                      </a:solidFill>
+                      <a:prstDash val="solid"/>
+                      <a:round/>
+                      <a:headEnd type="none" w="med" len="med"/>
+                      <a:tailEnd type="none" w="med" len="med"/>
+                    </a:lnT>
+                    <a:lnB w="12700" cmpd="sng">
+                      <a:noFill/>
+                    </a:lnB>
+                    <a:lnTlToBr w="12700" cmpd="sng">
+                      <a:noFill/>
+                      <a:prstDash val="solid"/>
+                    </a:lnTlToBr>
+                    <a:lnBlToTr w="12700" cmpd="sng">
+                      <a:noFill/>
+                      <a:prstDash val="solid"/>
+                    </a:lnBlToTr>
+                  </a:tcPr>
+                </a:tc>
+                <a:tc>
+                  <a:txBody>
+                    <a:bodyPr/>
+                    <a:lstStyle/>
+                    <a:p>
+                      <a:pPr marL="0" marR="0" lvl="0" indent="0" algn="ctr" defTabSz="914400" rtl="0" eaLnBrk="1" fontAlgn="auto" latinLnBrk="0" hangingPunct="1">
+                        <a:lnSpc>
+                          <a:spcPct val="100000"/>
+                        </a:lnSpc>
+                        <a:spcBef>
+                          <a:spcPts val="0"/>
+                        </a:spcBef>
+                        <a:spcAft>
+                          <a:spcPts val="0"/>
+                        </a:spcAft>
+                        <a:buClrTx/>
+                        <a:buSzTx/>
+                        <a:buFontTx/>
+                        <a:buNone/>
+                        <a:tabLst/>
+                        <a:defRPr/>
+                      </a:pPr>
+                      <a:endParaRPr lang="en-US" sz="1400" i="1" dirty="0">
+                        <a:solidFill>
+                          <a:srgbClr val="808080"/>
+                        </a:solidFill>
+                        <a:latin typeface="D2CodingLigature Nerd Font" panose="020B0609020101020101" pitchFamily="49" charset="-127"/>
+                        <a:ea typeface="D2CodingLigature Nerd Font" panose="020B0609020101020101" pitchFamily="49" charset="-127"/>
+                        <a:cs typeface="JetBrains Mono" panose="02000009000000000000" pitchFamily="49" charset="0"/>
+                      </a:endParaRPr>
+                    </a:p>
+                    <a:p>
+                      <a:pPr marL="0" marR="0" lvl="0" indent="0" algn="ctr" defTabSz="914400" rtl="0" eaLnBrk="1" fontAlgn="auto" latinLnBrk="0" hangingPunct="1">
+                        <a:lnSpc>
+                          <a:spcPct val="100000"/>
+                        </a:lnSpc>
+                        <a:spcBef>
+                          <a:spcPts val="0"/>
+                        </a:spcBef>
+                        <a:spcAft>
+                          <a:spcPts val="0"/>
+                        </a:spcAft>
+                        <a:buClrTx/>
+                        <a:buSzTx/>
+                        <a:buFontTx/>
+                        <a:buNone/>
+                        <a:tabLst/>
+                        <a:defRPr/>
+                      </a:pPr>
+                      <a:endParaRPr lang="en-US" sz="1400" i="1" dirty="0">
+                        <a:solidFill>
+                          <a:srgbClr val="808080"/>
+                        </a:solidFill>
+                        <a:latin typeface="D2CodingLigature Nerd Font" panose="020B0609020101020101" pitchFamily="49" charset="-127"/>
+                        <a:ea typeface="D2CodingLigature Nerd Font" panose="020B0609020101020101" pitchFamily="49" charset="-127"/>
+                        <a:cs typeface="JetBrains Mono" panose="02000009000000000000" pitchFamily="49" charset="0"/>
+                      </a:endParaRPr>
+                    </a:p>
+                    <a:p>
+                      <a:pPr marL="0" marR="0" lvl="0" indent="0" algn="ctr" defTabSz="914400" rtl="0" eaLnBrk="1" fontAlgn="auto" latinLnBrk="0" hangingPunct="1">
+                        <a:lnSpc>
+                          <a:spcPct val="100000"/>
+                        </a:lnSpc>
+                        <a:spcBef>
+                          <a:spcPts val="0"/>
+                        </a:spcBef>
+                        <a:spcAft>
+                          <a:spcPts val="0"/>
+                        </a:spcAft>
+                        <a:buClrTx/>
+                        <a:buSzTx/>
+                        <a:buFontTx/>
+                        <a:buNone/>
+                        <a:tabLst/>
+                        <a:defRPr/>
+                      </a:pPr>
+                      <a:r>
+                        <a:rPr lang="en-US" sz="1400" b="1" i="1" dirty="0">
+                          <a:solidFill>
+                            <a:srgbClr val="FF9900"/>
+                          </a:solidFill>
+                          <a:latin typeface="D2CodingLigature Nerd Font" panose="020B0609020101020101" pitchFamily="49" charset="-127"/>
+                          <a:ea typeface="D2CodingLigature Nerd Font" panose="020B0609020101020101" pitchFamily="49" charset="-127"/>
+                          <a:cs typeface="JetBrains Mono" panose="02000009000000000000" pitchFamily="49" charset="0"/>
+                        </a:rPr>
+                        <a:t>// EC Implementation</a:t>
+                      </a:r>
+                      <a:endParaRPr lang="en-US" sz="1400" b="1" dirty="0">
+                        <a:solidFill>
+                          <a:srgbClr val="FF9900"/>
+                        </a:solidFill>
+                        <a:latin typeface="D2CodingLigature Nerd Font" panose="020B0609020101020101" pitchFamily="49" charset="-127"/>
+                        <a:ea typeface="D2CodingLigature Nerd Font" panose="020B0609020101020101" pitchFamily="49" charset="-127"/>
+                        <a:cs typeface="JetBrains Mono" panose="02000009000000000000" pitchFamily="49" charset="0"/>
+                      </a:endParaRPr>
+                    </a:p>
+                  </a:txBody>
+                  <a:tcPr marL="45720" marR="45720">
+                    <a:lnL w="12700" cmpd="sng">
+                      <a:noFill/>
+                    </a:lnL>
+                    <a:lnR w="12700" cmpd="sng">
+                      <a:noFill/>
+                    </a:lnR>
+                    <a:lnT w="6350" cap="flat" cmpd="sng" algn="ctr">
+                      <a:solidFill>
+                        <a:schemeClr val="tx1">
+                          <a:lumMod val="65000"/>
+                          <a:lumOff val="35000"/>
+                        </a:schemeClr>
+                      </a:solidFill>
+                      <a:prstDash val="solid"/>
+                      <a:round/>
+                      <a:headEnd type="none" w="med" len="med"/>
+                      <a:tailEnd type="none" w="med" len="med"/>
+                    </a:lnT>
+                    <a:lnB w="12700" cmpd="sng">
+                      <a:noFill/>
+                    </a:lnB>
+                    <a:lnTlToBr w="12700" cmpd="sng">
+                      <a:noFill/>
+                      <a:prstDash val="solid"/>
+                    </a:lnTlToBr>
+                    <a:lnBlToTr w="12700" cmpd="sng">
+                      <a:noFill/>
+                      <a:prstDash val="solid"/>
+                    </a:lnBlToTr>
+                  </a:tcPr>
+                </a:tc>
+                <a:extLst>
+                  <a:ext uri="{0D108BD9-81ED-4DB2-BD59-A6C34878D82A}">
+                    <a16:rowId xmlns:a16="http://schemas.microsoft.com/office/drawing/2014/main" val="2267735198"/>
+                  </a:ext>
+                </a:extLst>
+              </a:tr>
+              <a:tr h="0">
+                <a:tc>
+                  <a:txBody>
+                    <a:bodyPr/>
+                    <a:lstStyle/>
+                    <a:p>
+                      <a:pPr algn="ctr"/>
+                      <a:r>
+                        <a:rPr lang="en-US" sz="1400" dirty="0" err="1">
+                          <a:solidFill>
+                            <a:srgbClr val="0070FF"/>
+                          </a:solidFill>
+                          <a:effectLst/>
+                          <a:latin typeface="D2CodingLigature Nerd Font" panose="020B0609020101020101" pitchFamily="49" charset="-127"/>
+                          <a:ea typeface="D2CodingLigature Nerd Font" panose="020B0609020101020101" pitchFamily="49" charset="-127"/>
+                          <a:cs typeface="JetBrains Mono" panose="02000009000000000000" pitchFamily="49" charset="0"/>
+                        </a:rPr>
+                        <a:t>ImmutableList</a:t>
+                      </a:r>
+                      <a:r>
+                        <a:rPr lang="en-US" sz="1400" dirty="0">
+                          <a:solidFill>
+                            <a:srgbClr val="000000"/>
+                          </a:solidFill>
+                          <a:effectLst/>
+                          <a:latin typeface="D2CodingLigature Nerd Font" panose="020B0609020101020101" pitchFamily="49" charset="-127"/>
+                          <a:ea typeface="D2CodingLigature Nerd Font" panose="020B0609020101020101" pitchFamily="49" charset="-127"/>
+                          <a:cs typeface="JetBrains Mono" panose="02000009000000000000" pitchFamily="49" charset="0"/>
+                        </a:rPr>
+                        <a:t>&lt;</a:t>
+                      </a:r>
+                      <a:r>
+                        <a:rPr lang="en-US" sz="1400" dirty="0">
+                          <a:solidFill>
+                            <a:srgbClr val="A10000"/>
+                          </a:solidFill>
+                          <a:effectLst/>
+                          <a:latin typeface="D2CodingLigature Nerd Font" panose="020B0609020101020101" pitchFamily="49" charset="-127"/>
+                          <a:ea typeface="D2CodingLigature Nerd Font" panose="020B0609020101020101" pitchFamily="49" charset="-127"/>
+                          <a:cs typeface="JetBrains Mono" panose="02000009000000000000" pitchFamily="49" charset="0"/>
+                        </a:rPr>
+                        <a:t>String</a:t>
+                      </a:r>
+                      <a:r>
+                        <a:rPr lang="en-US" sz="1400" dirty="0">
+                          <a:solidFill>
+                            <a:srgbClr val="000000"/>
+                          </a:solidFill>
+                          <a:effectLst/>
+                          <a:latin typeface="D2CodingLigature Nerd Font" panose="020B0609020101020101" pitchFamily="49" charset="-127"/>
+                          <a:ea typeface="D2CodingLigature Nerd Font" panose="020B0609020101020101" pitchFamily="49" charset="-127"/>
+                          <a:cs typeface="JetBrains Mono" panose="02000009000000000000" pitchFamily="49" charset="0"/>
+                        </a:rPr>
+                        <a:t>&gt; </a:t>
+                      </a:r>
+                      <a:endParaRPr lang="en-US" sz="1400" dirty="0">
+                        <a:latin typeface="D2CodingLigature Nerd Font" panose="020B0609020101020101" pitchFamily="49" charset="-127"/>
+                        <a:ea typeface="D2CodingLigature Nerd Font" panose="020B0609020101020101" pitchFamily="49" charset="-127"/>
+                      </a:endParaRPr>
+                    </a:p>
+                  </a:txBody>
+                  <a:tcPr marL="45720" marR="45720">
+                    <a:lnL w="12700" cmpd="sng">
+                      <a:noFill/>
+                    </a:lnL>
+                    <a:lnR w="12700" cmpd="sng">
+                      <a:noFill/>
+                    </a:lnR>
+                    <a:lnT w="12700" cmpd="sng">
+                      <a:noFill/>
+                    </a:lnT>
+                    <a:lnB w="6350" cap="flat" cmpd="sng" algn="ctr">
+                      <a:solidFill>
+                        <a:schemeClr val="tx1">
+                          <a:lumMod val="65000"/>
+                          <a:lumOff val="35000"/>
+                        </a:schemeClr>
+                      </a:solidFill>
+                      <a:prstDash val="solid"/>
+                      <a:round/>
+                      <a:headEnd type="none" w="med" len="med"/>
+                      <a:tailEnd type="none" w="med" len="med"/>
+                    </a:lnB>
+                    <a:lnTlToBr w="12700" cmpd="sng">
+                      <a:noFill/>
+                      <a:prstDash val="solid"/>
+                    </a:lnTlToBr>
+                    <a:lnBlToTr w="12700" cmpd="sng">
+                      <a:noFill/>
+                      <a:prstDash val="solid"/>
+                    </a:lnBlToTr>
+                  </a:tcPr>
+                </a:tc>
+                <a:tc>
+                  <a:txBody>
+                    <a:bodyPr/>
+                    <a:lstStyle/>
+                    <a:p>
+                      <a:pPr marL="0" marR="0" lvl="0" indent="0" algn="ctr" defTabSz="914400" rtl="0" eaLnBrk="1" fontAlgn="auto" latinLnBrk="0" hangingPunct="1">
+                        <a:lnSpc>
+                          <a:spcPct val="100000"/>
+                        </a:lnSpc>
+                        <a:spcBef>
+                          <a:spcPts val="0"/>
+                        </a:spcBef>
+                        <a:spcAft>
+                          <a:spcPts val="0"/>
+                        </a:spcAft>
+                        <a:buClrTx/>
+                        <a:buSzTx/>
+                        <a:buFontTx/>
+                        <a:buNone/>
+                        <a:tabLst/>
+                        <a:defRPr/>
+                      </a:pPr>
+                      <a:r>
+                        <a:rPr lang="en-US" sz="1400" dirty="0" err="1">
+                          <a:solidFill>
+                            <a:srgbClr val="A10000"/>
+                          </a:solidFill>
+                          <a:effectLst/>
+                          <a:latin typeface="D2CodingLigature Nerd Font" panose="020B0609020101020101" pitchFamily="49" charset="-127"/>
+                          <a:ea typeface="D2CodingLigature Nerd Font" panose="020B0609020101020101" pitchFamily="49" charset="-127"/>
+                          <a:cs typeface="JetBrains Mono" panose="02000009000000000000" pitchFamily="49" charset="0"/>
+                        </a:rPr>
+                        <a:t>Lists</a:t>
+                      </a:r>
+                      <a:r>
+                        <a:rPr lang="en-US" sz="1400" dirty="0" err="1">
+                          <a:solidFill>
+                            <a:srgbClr val="000000"/>
+                          </a:solidFill>
+                          <a:effectLst/>
+                          <a:latin typeface="D2CodingLigature Nerd Font" panose="020B0609020101020101" pitchFamily="49" charset="-127"/>
+                          <a:ea typeface="D2CodingLigature Nerd Font" panose="020B0609020101020101" pitchFamily="49" charset="-127"/>
+                          <a:cs typeface="JetBrains Mono" panose="02000009000000000000" pitchFamily="49" charset="0"/>
+                        </a:rPr>
+                        <a:t>.</a:t>
+                      </a:r>
+                      <a:r>
+                        <a:rPr lang="en-US" sz="1400" b="0" i="1" dirty="0" err="1">
+                          <a:solidFill>
+                            <a:srgbClr val="660E7A"/>
+                          </a:solidFill>
+                          <a:effectLst/>
+                          <a:latin typeface="D2CodingLigature Nerd Font" panose="020B0609020101020101" pitchFamily="49" charset="-127"/>
+                          <a:ea typeface="D2CodingLigature Nerd Font" panose="020B0609020101020101" pitchFamily="49" charset="-127"/>
+                          <a:cs typeface="JetBrains Mono" panose="02000009000000000000" pitchFamily="49" charset="0"/>
+                        </a:rPr>
+                        <a:t>immutable</a:t>
+                      </a:r>
+                      <a:r>
+                        <a:rPr lang="en-US" sz="1400" dirty="0" err="1">
+                          <a:solidFill>
+                            <a:srgbClr val="000000"/>
+                          </a:solidFill>
+                          <a:effectLst/>
+                          <a:latin typeface="D2CodingLigature Nerd Font" panose="020B0609020101020101" pitchFamily="49" charset="-127"/>
+                          <a:ea typeface="D2CodingLigature Nerd Font" panose="020B0609020101020101" pitchFamily="49" charset="-127"/>
+                          <a:cs typeface="JetBrains Mono" panose="02000009000000000000" pitchFamily="49" charset="0"/>
+                        </a:rPr>
+                        <a:t>.of</a:t>
+                      </a:r>
+                      <a:r>
+                        <a:rPr lang="en-US" sz="1400" dirty="0">
+                          <a:solidFill>
+                            <a:srgbClr val="000000"/>
+                          </a:solidFill>
+                          <a:effectLst/>
+                          <a:latin typeface="D2CodingLigature Nerd Font" panose="020B0609020101020101" pitchFamily="49" charset="-127"/>
+                          <a:ea typeface="D2CodingLigature Nerd Font" panose="020B0609020101020101" pitchFamily="49" charset="-127"/>
+                          <a:cs typeface="JetBrains Mono" panose="02000009000000000000" pitchFamily="49" charset="0"/>
+                        </a:rPr>
+                        <a:t>(</a:t>
+                      </a:r>
+                      <a:r>
+                        <a:rPr lang="en-US" sz="1400" b="1" dirty="0">
+                          <a:solidFill>
+                            <a:srgbClr val="0B00CC"/>
+                          </a:solidFill>
+                          <a:effectLst/>
+                          <a:latin typeface="D2CodingLigature Nerd Font" panose="020B0609020101020101" pitchFamily="49" charset="-127"/>
+                          <a:ea typeface="D2CodingLigature Nerd Font" panose="020B0609020101020101" pitchFamily="49" charset="-127"/>
+                          <a:cs typeface="JetBrains Mono" panose="02000009000000000000" pitchFamily="49" charset="0"/>
+                        </a:rPr>
+                        <a:t>"1"</a:t>
+                      </a:r>
+                      <a:r>
+                        <a:rPr lang="en-US" sz="1400" dirty="0">
+                          <a:solidFill>
+                            <a:srgbClr val="000000"/>
+                          </a:solidFill>
+                          <a:effectLst/>
+                          <a:latin typeface="D2CodingLigature Nerd Font" panose="020B0609020101020101" pitchFamily="49" charset="-127"/>
+                          <a:ea typeface="D2CodingLigature Nerd Font" panose="020B0609020101020101" pitchFamily="49" charset="-127"/>
+                          <a:cs typeface="JetBrains Mono" panose="02000009000000000000" pitchFamily="49" charset="0"/>
+                        </a:rPr>
+                        <a:t>, </a:t>
+                      </a:r>
+                      <a:r>
+                        <a:rPr lang="en-US" sz="1400" b="1" dirty="0">
+                          <a:solidFill>
+                            <a:srgbClr val="0B00CC"/>
+                          </a:solidFill>
+                          <a:effectLst/>
+                          <a:latin typeface="D2CodingLigature Nerd Font" panose="020B0609020101020101" pitchFamily="49" charset="-127"/>
+                          <a:ea typeface="D2CodingLigature Nerd Font" panose="020B0609020101020101" pitchFamily="49" charset="-127"/>
+                          <a:cs typeface="JetBrains Mono" panose="02000009000000000000" pitchFamily="49" charset="0"/>
+                        </a:rPr>
+                        <a:t>"2"</a:t>
+                      </a:r>
+                      <a:r>
+                        <a:rPr lang="en-US" sz="1400" dirty="0">
+                          <a:solidFill>
+                            <a:srgbClr val="000000"/>
+                          </a:solidFill>
+                          <a:effectLst/>
+                          <a:latin typeface="D2CodingLigature Nerd Font" panose="020B0609020101020101" pitchFamily="49" charset="-127"/>
+                          <a:ea typeface="D2CodingLigature Nerd Font" panose="020B0609020101020101" pitchFamily="49" charset="-127"/>
+                          <a:cs typeface="JetBrains Mono" panose="02000009000000000000" pitchFamily="49" charset="0"/>
+                        </a:rPr>
+                        <a:t>, </a:t>
+                      </a:r>
+                      <a:r>
+                        <a:rPr lang="en-US" sz="1400" b="1" dirty="0">
+                          <a:solidFill>
+                            <a:srgbClr val="0B00CC"/>
+                          </a:solidFill>
+                          <a:effectLst/>
+                          <a:latin typeface="D2CodingLigature Nerd Font" panose="020B0609020101020101" pitchFamily="49" charset="-127"/>
+                          <a:ea typeface="D2CodingLigature Nerd Font" panose="020B0609020101020101" pitchFamily="49" charset="-127"/>
+                          <a:cs typeface="JetBrains Mono" panose="02000009000000000000" pitchFamily="49" charset="0"/>
+                        </a:rPr>
+                        <a:t>"3"</a:t>
+                      </a:r>
+                      <a:r>
+                        <a:rPr lang="en-US" sz="1400" dirty="0">
+                          <a:solidFill>
+                            <a:srgbClr val="000000"/>
+                          </a:solidFill>
+                          <a:effectLst/>
+                          <a:latin typeface="D2CodingLigature Nerd Font" panose="020B0609020101020101" pitchFamily="49" charset="-127"/>
+                          <a:ea typeface="D2CodingLigature Nerd Font" panose="020B0609020101020101" pitchFamily="49" charset="-127"/>
+                          <a:cs typeface="JetBrains Mono" panose="02000009000000000000" pitchFamily="49" charset="0"/>
+                        </a:rPr>
+                        <a:t>)</a:t>
+                      </a:r>
+                      <a:endParaRPr lang="en-US" sz="1400" dirty="0">
+                        <a:latin typeface="D2CodingLigature Nerd Font" panose="020B0609020101020101" pitchFamily="49" charset="-127"/>
+                        <a:ea typeface="D2CodingLigature Nerd Font" panose="020B0609020101020101" pitchFamily="49" charset="-127"/>
+                      </a:endParaRPr>
+                    </a:p>
+                  </a:txBody>
+                  <a:tcPr marL="45720" marR="45720">
+                    <a:lnL w="12700" cmpd="sng">
+                      <a:noFill/>
+                    </a:lnL>
+                    <a:lnR w="12700" cmpd="sng">
+                      <a:noFill/>
+                    </a:lnR>
+                    <a:lnT w="12700" cmpd="sng">
+                      <a:noFill/>
+                    </a:lnT>
+                    <a:lnB w="6350" cap="flat" cmpd="sng" algn="ctr">
+                      <a:solidFill>
+                        <a:schemeClr val="tx1">
+                          <a:lumMod val="65000"/>
+                          <a:lumOff val="35000"/>
+                        </a:schemeClr>
+                      </a:solidFill>
+                      <a:prstDash val="solid"/>
+                      <a:round/>
+                      <a:headEnd type="none" w="med" len="med"/>
+                      <a:tailEnd type="none" w="med" len="med"/>
+                    </a:lnB>
+                    <a:lnTlToBr w="12700" cmpd="sng">
+                      <a:noFill/>
+                      <a:prstDash val="solid"/>
+                    </a:lnTlToBr>
+                    <a:lnBlToTr w="12700" cmpd="sng">
+                      <a:noFill/>
+                      <a:prstDash val="solid"/>
+                    </a:lnBlToTr>
+                  </a:tcPr>
+                </a:tc>
+                <a:extLst>
+                  <a:ext uri="{0D108BD9-81ED-4DB2-BD59-A6C34878D82A}">
+                    <a16:rowId xmlns:a16="http://schemas.microsoft.com/office/drawing/2014/main" val="1740934610"/>
+                  </a:ext>
+                </a:extLst>
+              </a:tr>
+            </a:tbl>
+          </a:graphicData>
+        </a:graphic>
+      </p:graphicFrame>
+      <p:sp>
+        <p:nvSpPr>
+          <p:cNvPr id="51" name="Rectangle 50">
+            <a:extLst>
+              <a:ext uri="{FF2B5EF4-FFF2-40B4-BE49-F238E27FC236}">
+                <a16:creationId xmlns:a16="http://schemas.microsoft.com/office/drawing/2014/main" id="{2A3057DF-4A2F-9016-72AB-E1086E1FC4E7}"/>
+              </a:ext>
+            </a:extLst>
+          </p:cNvPr>
+          <p:cNvSpPr/>
+          <p:nvPr/>
+        </p:nvSpPr>
+        <p:spPr>
+          <a:xfrm>
+            <a:off x="5736431" y="1370514"/>
+            <a:ext cx="359568" cy="369332"/>
+          </a:xfrm>
+          <a:prstGeom prst="rect">
+            <a:avLst/>
+          </a:prstGeom>
+        </p:spPr>
+        <p:style>
+          <a:lnRef idx="2">
+            <a:schemeClr val="accent1">
+              <a:shade val="15000"/>
+            </a:schemeClr>
+          </a:lnRef>
+          <a:fillRef idx="1">
+            <a:schemeClr val="accent1"/>
+          </a:fillRef>
+          <a:effectRef idx="0">
+            <a:schemeClr val="accent1"/>
+          </a:effectRef>
+          <a:fontRef idx="minor">
+            <a:schemeClr val="lt1"/>
+          </a:fontRef>
+        </p:style>
+        <p:txBody>
+          <a:bodyPr rtlCol="0" anchor="ctr"/>
+          <a:lstStyle/>
+          <a:p>
+            <a:pPr algn="ctr"/>
+            <a:endParaRPr lang="en-US"/>
+          </a:p>
+        </p:txBody>
+      </p:sp>
+      <p:sp>
+        <p:nvSpPr>
+          <p:cNvPr id="52" name="Rectangle 51">
+            <a:extLst>
+              <a:ext uri="{FF2B5EF4-FFF2-40B4-BE49-F238E27FC236}">
+                <a16:creationId xmlns:a16="http://schemas.microsoft.com/office/drawing/2014/main" id="{DAF6F63C-7E7E-DE85-6DDB-97CD9D3C4181}"/>
+              </a:ext>
+            </a:extLst>
+          </p:cNvPr>
+          <p:cNvSpPr/>
+          <p:nvPr/>
+        </p:nvSpPr>
+        <p:spPr>
+          <a:xfrm>
+            <a:off x="6086476" y="1370513"/>
+            <a:ext cx="359568" cy="369332"/>
+          </a:xfrm>
+          <a:prstGeom prst="rect">
+            <a:avLst/>
+          </a:prstGeom>
+        </p:spPr>
+        <p:style>
+          <a:lnRef idx="2">
+            <a:schemeClr val="accent1">
+              <a:shade val="15000"/>
+            </a:schemeClr>
+          </a:lnRef>
+          <a:fillRef idx="1">
+            <a:schemeClr val="accent1"/>
+          </a:fillRef>
+          <a:effectRef idx="0">
+            <a:schemeClr val="accent1"/>
+          </a:effectRef>
+          <a:fontRef idx="minor">
+            <a:schemeClr val="lt1"/>
+          </a:fontRef>
+        </p:style>
+        <p:txBody>
+          <a:bodyPr rtlCol="0" anchor="ctr"/>
+          <a:lstStyle/>
+          <a:p>
+            <a:pPr algn="ctr"/>
+            <a:endParaRPr lang="en-US"/>
+          </a:p>
+        </p:txBody>
+      </p:sp>
+      <p:sp>
+        <p:nvSpPr>
+          <p:cNvPr id="4" name="Rectangle 3">
+            <a:extLst>
+              <a:ext uri="{FF2B5EF4-FFF2-40B4-BE49-F238E27FC236}">
+                <a16:creationId xmlns:a16="http://schemas.microsoft.com/office/drawing/2014/main" id="{63F6803B-9BA2-6777-E3EE-576E169CD592}"/>
+              </a:ext>
+            </a:extLst>
+          </p:cNvPr>
+          <p:cNvSpPr/>
+          <p:nvPr/>
+        </p:nvSpPr>
+        <p:spPr>
+          <a:xfrm>
+            <a:off x="5141119" y="1239934"/>
+            <a:ext cx="1909762" cy="731520"/>
+          </a:xfrm>
+          <a:prstGeom prst="rect">
+            <a:avLst/>
+          </a:prstGeom>
+          <a:solidFill>
+            <a:schemeClr val="bg1"/>
+          </a:solidFill>
+          <a:ln>
+            <a:noFill/>
+          </a:ln>
+        </p:spPr>
+        <p:style>
+          <a:lnRef idx="2">
+            <a:schemeClr val="accent1">
+              <a:shade val="15000"/>
+            </a:schemeClr>
+          </a:lnRef>
+          <a:fillRef idx="1">
+            <a:schemeClr val="accent1"/>
+          </a:fillRef>
+          <a:effectRef idx="0">
+            <a:schemeClr val="accent1"/>
+          </a:effectRef>
+          <a:fontRef idx="minor">
+            <a:schemeClr val="lt1"/>
+          </a:fontRef>
+        </p:style>
+        <p:txBody>
+          <a:bodyPr rtlCol="0" anchor="ctr"/>
+          <a:lstStyle/>
+          <a:p>
+            <a:pPr algn="ctr"/>
+            <a:r>
+              <a:rPr lang="en-US" i="1" dirty="0">
+                <a:solidFill>
+                  <a:srgbClr val="808080"/>
+                </a:solidFill>
+                <a:latin typeface="JetBrains Mono" panose="02000009000000000000" pitchFamily="49" charset="0"/>
+                <a:ea typeface="JetBrains Mono" panose="02000009000000000000" pitchFamily="49" charset="0"/>
+                <a:cs typeface="JetBrains Mono" panose="02000009000000000000" pitchFamily="49" charset="0"/>
+              </a:rPr>
+              <a:t>// JDK Type</a:t>
+            </a:r>
+            <a:endParaRPr lang="en-US" dirty="0">
+              <a:solidFill>
+                <a:srgbClr val="0070FF"/>
+              </a:solidFill>
+              <a:latin typeface="JetBrains Mono" panose="02000009000000000000" pitchFamily="49" charset="0"/>
+              <a:ea typeface="JetBrains Mono" panose="02000009000000000000" pitchFamily="49" charset="0"/>
+              <a:cs typeface="JetBrains Mono" panose="02000009000000000000" pitchFamily="49" charset="0"/>
+            </a:endParaRPr>
+          </a:p>
+          <a:p>
+            <a:pPr algn="ctr"/>
+            <a:r>
+              <a:rPr lang="en-US" dirty="0">
+                <a:solidFill>
+                  <a:srgbClr val="0070FF"/>
+                </a:solidFill>
+                <a:latin typeface="JetBrains Mono" panose="02000009000000000000" pitchFamily="49" charset="0"/>
+                <a:ea typeface="JetBrains Mono" panose="02000009000000000000" pitchFamily="49" charset="0"/>
+                <a:cs typeface="JetBrains Mono" panose="02000009000000000000" pitchFamily="49" charset="0"/>
+              </a:rPr>
+              <a:t>List</a:t>
+            </a:r>
+            <a:r>
+              <a:rPr lang="en-US" dirty="0">
+                <a:solidFill>
+                  <a:srgbClr val="000000"/>
+                </a:solidFill>
+                <a:latin typeface="JetBrains Mono" panose="02000009000000000000" pitchFamily="49" charset="0"/>
+                <a:ea typeface="JetBrains Mono" panose="02000009000000000000" pitchFamily="49" charset="0"/>
+                <a:cs typeface="JetBrains Mono" panose="02000009000000000000" pitchFamily="49" charset="0"/>
+              </a:rPr>
+              <a:t>&lt;</a:t>
+            </a:r>
+            <a:r>
+              <a:rPr lang="en-US" dirty="0">
+                <a:solidFill>
+                  <a:srgbClr val="A10000"/>
+                </a:solidFill>
+                <a:latin typeface="JetBrains Mono" panose="02000009000000000000" pitchFamily="49" charset="0"/>
+                <a:ea typeface="JetBrains Mono" panose="02000009000000000000" pitchFamily="49" charset="0"/>
+                <a:cs typeface="JetBrains Mono" panose="02000009000000000000" pitchFamily="49" charset="0"/>
+              </a:rPr>
+              <a:t>String</a:t>
+            </a:r>
+            <a:r>
+              <a:rPr lang="en-US" dirty="0">
+                <a:solidFill>
+                  <a:srgbClr val="000000"/>
+                </a:solidFill>
+                <a:latin typeface="JetBrains Mono" panose="02000009000000000000" pitchFamily="49" charset="0"/>
+                <a:ea typeface="JetBrains Mono" panose="02000009000000000000" pitchFamily="49" charset="0"/>
+                <a:cs typeface="JetBrains Mono" panose="02000009000000000000" pitchFamily="49" charset="0"/>
+              </a:rPr>
+              <a:t>&gt;</a:t>
+            </a:r>
+            <a:endParaRPr lang="en-US" dirty="0">
+              <a:solidFill>
+                <a:schemeClr val="tx1"/>
+              </a:solidFill>
+            </a:endParaRPr>
+          </a:p>
+        </p:txBody>
+      </p:sp>
+      <p:sp>
+        <p:nvSpPr>
+          <p:cNvPr id="55" name="Oval 54">
+            <a:extLst>
+              <a:ext uri="{FF2B5EF4-FFF2-40B4-BE49-F238E27FC236}">
+                <a16:creationId xmlns:a16="http://schemas.microsoft.com/office/drawing/2014/main" id="{8C50DB08-F138-D440-00EF-ED7D284AF7CA}"/>
+              </a:ext>
+            </a:extLst>
+          </p:cNvPr>
+          <p:cNvSpPr/>
+          <p:nvPr/>
+        </p:nvSpPr>
+        <p:spPr>
+          <a:xfrm>
+            <a:off x="5730240" y="3540748"/>
+            <a:ext cx="731520" cy="731520"/>
+          </a:xfrm>
+          <a:prstGeom prst="ellipse">
+            <a:avLst/>
+          </a:prstGeom>
+          <a:solidFill>
+            <a:schemeClr val="accent6">
+              <a:lumMod val="50000"/>
+            </a:schemeClr>
+          </a:solidFill>
+          <a:ln>
+            <a:noFill/>
+          </a:ln>
+        </p:spPr>
+        <p:style>
+          <a:lnRef idx="2">
+            <a:schemeClr val="accent1">
+              <a:shade val="15000"/>
+            </a:schemeClr>
+          </a:lnRef>
+          <a:fillRef idx="1">
+            <a:schemeClr val="accent1"/>
+          </a:fillRef>
+          <a:effectRef idx="0">
+            <a:schemeClr val="accent1"/>
+          </a:effectRef>
+          <a:fontRef idx="minor">
+            <a:schemeClr val="lt1"/>
+          </a:fontRef>
+        </p:style>
+        <p:txBody>
+          <a:bodyPr wrap="none" lIns="0" rIns="0" rtlCol="0" anchor="ctr"/>
+          <a:lstStyle/>
+          <a:p>
+            <a:r>
+              <a:rPr lang="en-US" dirty="0"/>
+              <a:t>Start</a:t>
+            </a:r>
+          </a:p>
+        </p:txBody>
+      </p:sp>
+      <p:sp>
+        <p:nvSpPr>
+          <p:cNvPr id="56" name="Oval 55">
+            <a:extLst>
+              <a:ext uri="{FF2B5EF4-FFF2-40B4-BE49-F238E27FC236}">
+                <a16:creationId xmlns:a16="http://schemas.microsoft.com/office/drawing/2014/main" id="{592366FC-3468-A36B-3C68-933D79F6C99C}"/>
+              </a:ext>
+            </a:extLst>
+          </p:cNvPr>
+          <p:cNvSpPr/>
+          <p:nvPr/>
+        </p:nvSpPr>
+        <p:spPr>
+          <a:xfrm>
+            <a:off x="5730240" y="4573681"/>
+            <a:ext cx="731520" cy="731520"/>
+          </a:xfrm>
+          <a:prstGeom prst="ellipse">
+            <a:avLst/>
+          </a:prstGeom>
+          <a:solidFill>
+            <a:schemeClr val="accent6">
+              <a:lumMod val="50000"/>
+            </a:schemeClr>
+          </a:solidFill>
+          <a:ln>
+            <a:noFill/>
+          </a:ln>
+        </p:spPr>
+        <p:style>
+          <a:lnRef idx="2">
+            <a:schemeClr val="accent1">
+              <a:shade val="15000"/>
+            </a:schemeClr>
+          </a:lnRef>
+          <a:fillRef idx="1">
+            <a:schemeClr val="accent1"/>
+          </a:fillRef>
+          <a:effectRef idx="0">
+            <a:schemeClr val="accent1"/>
+          </a:effectRef>
+          <a:fontRef idx="minor">
+            <a:schemeClr val="lt1"/>
+          </a:fontRef>
+        </p:style>
+        <p:txBody>
+          <a:bodyPr wrap="none" lIns="0" rIns="0" rtlCol="0" anchor="ctr"/>
+          <a:lstStyle/>
+          <a:p>
+            <a:pPr algn="ctr"/>
+            <a:r>
+              <a:rPr lang="en-US" dirty="0"/>
+              <a:t>Step</a:t>
+            </a:r>
+            <a:br>
+              <a:rPr lang="en-US" dirty="0"/>
+            </a:br>
+            <a:r>
+              <a:rPr lang="en-US" dirty="0"/>
+              <a:t>1</a:t>
+            </a:r>
+          </a:p>
+        </p:txBody>
+      </p:sp>
+      <p:sp>
+        <p:nvSpPr>
+          <p:cNvPr id="57" name="Oval 56">
+            <a:extLst>
+              <a:ext uri="{FF2B5EF4-FFF2-40B4-BE49-F238E27FC236}">
+                <a16:creationId xmlns:a16="http://schemas.microsoft.com/office/drawing/2014/main" id="{7AEFA2C4-83FF-65AC-A449-2913E2D5B582}"/>
+              </a:ext>
+            </a:extLst>
+          </p:cNvPr>
+          <p:cNvSpPr/>
+          <p:nvPr/>
+        </p:nvSpPr>
+        <p:spPr>
+          <a:xfrm>
+            <a:off x="5730240" y="5610056"/>
+            <a:ext cx="731520" cy="731520"/>
+          </a:xfrm>
+          <a:prstGeom prst="ellipse">
+            <a:avLst/>
+          </a:prstGeom>
+          <a:solidFill>
+            <a:schemeClr val="accent6">
+              <a:lumMod val="50000"/>
+            </a:schemeClr>
+          </a:solidFill>
+          <a:ln>
+            <a:noFill/>
+          </a:ln>
+        </p:spPr>
+        <p:style>
+          <a:lnRef idx="2">
+            <a:schemeClr val="accent1">
+              <a:shade val="15000"/>
+            </a:schemeClr>
+          </a:lnRef>
+          <a:fillRef idx="1">
+            <a:schemeClr val="accent1"/>
+          </a:fillRef>
+          <a:effectRef idx="0">
+            <a:schemeClr val="accent1"/>
+          </a:effectRef>
+          <a:fontRef idx="minor">
+            <a:schemeClr val="lt1"/>
+          </a:fontRef>
+        </p:style>
+        <p:txBody>
+          <a:bodyPr wrap="none" lIns="0" rIns="0" rtlCol="0" anchor="ctr"/>
+          <a:lstStyle/>
+          <a:p>
+            <a:pPr algn="ctr"/>
+            <a:r>
+              <a:rPr lang="en-US" dirty="0"/>
+              <a:t>Step</a:t>
+            </a:r>
+            <a:br>
+              <a:rPr lang="en-US" dirty="0"/>
+            </a:br>
+            <a:r>
+              <a:rPr lang="en-US" dirty="0"/>
+              <a:t>2</a:t>
+            </a:r>
+          </a:p>
+        </p:txBody>
+      </p:sp>
+      <p:cxnSp>
+        <p:nvCxnSpPr>
+          <p:cNvPr id="58" name="Straight Arrow Connector 7">
+            <a:extLst>
+              <a:ext uri="{FF2B5EF4-FFF2-40B4-BE49-F238E27FC236}">
+                <a16:creationId xmlns:a16="http://schemas.microsoft.com/office/drawing/2014/main" id="{793EA71D-1835-59A2-65A3-2F458AA6D11C}"/>
+              </a:ext>
+            </a:extLst>
+          </p:cNvPr>
+          <p:cNvCxnSpPr>
+            <a:cxnSpLocks/>
+            <a:stCxn id="55" idx="4"/>
+            <a:endCxn id="56" idx="0"/>
+          </p:cNvCxnSpPr>
+          <p:nvPr/>
+        </p:nvCxnSpPr>
+        <p:spPr>
+          <a:xfrm>
+            <a:off x="6096000" y="4272268"/>
+            <a:ext cx="0" cy="301413"/>
+          </a:xfrm>
+          <a:prstGeom prst="straightConnector1">
+            <a:avLst/>
+          </a:prstGeom>
+          <a:ln>
+            <a:solidFill>
+              <a:schemeClr val="accent6">
+                <a:lumMod val="50000"/>
+              </a:schemeClr>
+            </a:solidFill>
+            <a:tailEnd type="arrow" w="lg" len="lg"/>
+          </a:ln>
+        </p:spPr>
+        <p:style>
+          <a:lnRef idx="2">
+            <a:schemeClr val="accent1"/>
+          </a:lnRef>
+          <a:fillRef idx="0">
+            <a:schemeClr val="accent1"/>
+          </a:fillRef>
+          <a:effectRef idx="1">
+            <a:schemeClr val="accent1"/>
+          </a:effectRef>
+          <a:fontRef idx="minor">
+            <a:schemeClr val="tx1"/>
+          </a:fontRef>
+        </p:style>
+      </p:cxnSp>
+      <p:cxnSp>
+        <p:nvCxnSpPr>
+          <p:cNvPr id="61" name="Straight Arrow Connector 7">
+            <a:extLst>
+              <a:ext uri="{FF2B5EF4-FFF2-40B4-BE49-F238E27FC236}">
+                <a16:creationId xmlns:a16="http://schemas.microsoft.com/office/drawing/2014/main" id="{8E487A91-B8AB-4D07-A88C-032B3087F382}"/>
+              </a:ext>
+            </a:extLst>
+          </p:cNvPr>
+          <p:cNvCxnSpPr>
+            <a:cxnSpLocks/>
+            <a:stCxn id="56" idx="4"/>
+            <a:endCxn id="57" idx="0"/>
+          </p:cNvCxnSpPr>
+          <p:nvPr/>
+        </p:nvCxnSpPr>
+        <p:spPr>
+          <a:xfrm>
+            <a:off x="6096000" y="5305201"/>
+            <a:ext cx="0" cy="304855"/>
+          </a:xfrm>
+          <a:prstGeom prst="straightConnector1">
+            <a:avLst/>
+          </a:prstGeom>
+          <a:ln>
+            <a:solidFill>
+              <a:schemeClr val="accent6">
+                <a:lumMod val="50000"/>
+              </a:schemeClr>
+            </a:solidFill>
+            <a:tailEnd type="arrow" w="lg" len="lg"/>
+          </a:ln>
+        </p:spPr>
+        <p:style>
+          <a:lnRef idx="2">
+            <a:schemeClr val="accent1"/>
+          </a:lnRef>
+          <a:fillRef idx="0">
+            <a:schemeClr val="accent1"/>
+          </a:fillRef>
+          <a:effectRef idx="1">
+            <a:schemeClr val="accent1"/>
+          </a:effectRef>
+          <a:fontRef idx="minor">
+            <a:schemeClr val="tx1"/>
+          </a:fontRef>
+        </p:style>
+      </p:cxnSp>
+      <p:sp>
+        <p:nvSpPr>
+          <p:cNvPr id="65" name="TextBox 64">
+            <a:extLst>
+              <a:ext uri="{FF2B5EF4-FFF2-40B4-BE49-F238E27FC236}">
+                <a16:creationId xmlns:a16="http://schemas.microsoft.com/office/drawing/2014/main" id="{6E06CAD2-DEA5-2D1B-FE01-AC7E9527D80A}"/>
+              </a:ext>
+            </a:extLst>
+          </p:cNvPr>
+          <p:cNvSpPr txBox="1"/>
+          <p:nvPr/>
+        </p:nvSpPr>
+        <p:spPr>
+          <a:xfrm>
+            <a:off x="0" y="6126480"/>
+            <a:ext cx="731520" cy="584775"/>
+          </a:xfrm>
+          <a:prstGeom prst="rect">
+            <a:avLst/>
+          </a:prstGeom>
+          <a:noFill/>
+          <a:ln w="12700" cap="flat">
+            <a:noFill/>
+            <a:miter lim="400000"/>
+          </a:ln>
+          <a:effectLst/>
+          <a:sp3d/>
+        </p:spPr>
+        <p:style>
+          <a:lnRef idx="0">
+            <a:scrgbClr r="0" g="0" b="0"/>
+          </a:lnRef>
+          <a:fillRef idx="0">
+            <a:scrgbClr r="0" g="0" b="0"/>
+          </a:fillRef>
+          <a:effectRef idx="0">
+            <a:scrgbClr r="0" g="0" b="0"/>
+          </a:effectRef>
+          <a:fontRef idx="none"/>
+        </p:style>
+        <p:txBody>
+          <a:bodyPr wrap="square">
+            <a:spAutoFit/>
+          </a:bodyPr>
+          <a:lstStyle/>
+          <a:p>
+            <a:r>
+              <a:rPr lang="en-US" sz="3200" b="0" i="0" u="none" strike="noStrike" dirty="0">
+                <a:solidFill>
+                  <a:srgbClr val="000000"/>
+                </a:solidFill>
+                <a:effectLst/>
+                <a:latin typeface="Arial" panose="020B0604020202020204" pitchFamily="34" charset="0"/>
+              </a:rPr>
+              <a:t>🐿️</a:t>
+            </a:r>
+            <a:endParaRPr lang="en-US" sz="3200" dirty="0"/>
+          </a:p>
+        </p:txBody>
+      </p:sp>
+      <p:sp>
+        <p:nvSpPr>
+          <p:cNvPr id="5" name="TextBox 4">
+            <a:hlinkClick r:id="rId3"/>
+            <a:extLst>
+              <a:ext uri="{FF2B5EF4-FFF2-40B4-BE49-F238E27FC236}">
+                <a16:creationId xmlns:a16="http://schemas.microsoft.com/office/drawing/2014/main" id="{7C78BBAF-C083-832D-12F8-8507D14D4CF4}"/>
+              </a:ext>
+            </a:extLst>
+          </p:cNvPr>
+          <p:cNvSpPr txBox="1"/>
+          <p:nvPr/>
+        </p:nvSpPr>
+        <p:spPr>
+          <a:xfrm>
+            <a:off x="3143025" y="2565822"/>
+            <a:ext cx="5905947" cy="369332"/>
+          </a:xfrm>
+          <a:prstGeom prst="rect">
+            <a:avLst/>
+          </a:prstGeom>
+          <a:noFill/>
+        </p:spPr>
+        <p:txBody>
+          <a:bodyPr wrap="square" rtlCol="0" anchor="t" anchorCtr="0">
+            <a:spAutoFit/>
+          </a:bodyPr>
+          <a:lstStyle/>
+          <a:p>
+            <a:r>
+              <a:rPr lang="en-US" dirty="0">
+                <a:hlinkClick r:id="rId3"/>
+              </a:rPr>
+              <a:t>How do you know if a collection is mutable or immutable?</a:t>
+            </a:r>
+            <a:endParaRPr lang="en-US" dirty="0"/>
+          </a:p>
+        </p:txBody>
+      </p:sp>
+    </p:spTree>
+    <p:extLst>
+      <p:ext uri="{BB962C8B-B14F-4D97-AF65-F5344CB8AC3E}">
+        <p14:creationId xmlns:p14="http://schemas.microsoft.com/office/powerpoint/2010/main" val="3484279551"/>
+      </p:ext>
+    </p:extLst>
+  </p:cSld>
+  <p:clrMapOvr>
+    <a:masterClrMapping/>
+  </p:clrMapOvr>
+</p:sld>
+</file>
+
+<file path=ppt/slides/slide8.xml><?xml version="1.0" encoding="utf-8"?>
 <p:sld xmlns:a="http://schemas.openxmlformats.org/drawingml/2006/main" xmlns:r="http://schemas.openxmlformats.org/officeDocument/2006/relationships" xmlns:p="http://schemas.openxmlformats.org/presentationml/2006/main">
   <p:cSld>
     <p:spTree>
@@ -21520,7 +26260,7 @@
           </a:ln>
           <a:extLst>
             <a:ext uri="{C572A759-6A51-4108-AA02-DFA0A04FC94B}">
-              <ma14:wrappingTextBoxFlag xmlns:lc="http://schemas.openxmlformats.org/drawingml/2006/lockedCanvas" xmlns="" xmlns:m="http://schemas.openxmlformats.org/officeDocument/2006/math" xmlns:a14="http://schemas.microsoft.com/office/drawing/2010/main" xmlns:ma14="http://schemas.microsoft.com/office/mac/drawingml/2011/main" val="1"/>
+              <ma14:wrappingTextBoxFlag xmlns:ma14="http://schemas.microsoft.com/office/mac/drawingml/2011/main" xmlns:a14="http://schemas.microsoft.com/office/drawing/2010/main" xmlns:m="http://schemas.openxmlformats.org/officeDocument/2006/math" xmlns="" xmlns:lc="http://schemas.openxmlformats.org/drawingml/2006/lockedCanvas" val="1"/>
             </a:ext>
           </a:extLst>
         </p:spPr>
@@ -21888,7 +26628,7 @@
           </a:ln>
           <a:extLst>
             <a:ext uri="{C572A759-6A51-4108-AA02-DFA0A04FC94B}">
-              <ma14:wrappingTextBoxFlag xmlns:lc="http://schemas.openxmlformats.org/drawingml/2006/lockedCanvas" xmlns="" xmlns:m="http://schemas.openxmlformats.org/officeDocument/2006/math" xmlns:a14="http://schemas.microsoft.com/office/drawing/2010/main" xmlns:ma14="http://schemas.microsoft.com/office/mac/drawingml/2011/main" val="1"/>
+              <ma14:wrappingTextBoxFlag xmlns:ma14="http://schemas.microsoft.com/office/mac/drawingml/2011/main" xmlns:a14="http://schemas.microsoft.com/office/drawing/2010/main" xmlns:m="http://schemas.openxmlformats.org/officeDocument/2006/math" xmlns="" xmlns:lc="http://schemas.openxmlformats.org/drawingml/2006/lockedCanvas" val="1"/>
             </a:ext>
           </a:extLst>
         </p:spPr>
@@ -22255,7 +26995,7 @@
           </a:ln>
           <a:extLst>
             <a:ext uri="{C572A759-6A51-4108-AA02-DFA0A04FC94B}">
-              <ma14:wrappingTextBoxFlag xmlns:lc="http://schemas.openxmlformats.org/drawingml/2006/lockedCanvas" xmlns="" xmlns:m="http://schemas.openxmlformats.org/officeDocument/2006/math" xmlns:a14="http://schemas.microsoft.com/office/drawing/2010/main" xmlns:ma14="http://schemas.microsoft.com/office/mac/drawingml/2011/main" val="1"/>
+              <ma14:wrappingTextBoxFlag xmlns:ma14="http://schemas.microsoft.com/office/mac/drawingml/2011/main" xmlns:a14="http://schemas.microsoft.com/office/drawing/2010/main" xmlns:m="http://schemas.openxmlformats.org/officeDocument/2006/math" xmlns="" xmlns:lc="http://schemas.openxmlformats.org/drawingml/2006/lockedCanvas" val="1"/>
             </a:ext>
           </a:extLst>
         </p:spPr>
@@ -22612,7 +27352,7 @@
           </a:ln>
           <a:extLst>
             <a:ext uri="{C572A759-6A51-4108-AA02-DFA0A04FC94B}">
-              <ma14:wrappingTextBoxFlag xmlns:lc="http://schemas.openxmlformats.org/drawingml/2006/lockedCanvas" xmlns="" xmlns:m="http://schemas.openxmlformats.org/officeDocument/2006/math" xmlns:a14="http://schemas.microsoft.com/office/drawing/2010/main" xmlns:ma14="http://schemas.microsoft.com/office/mac/drawingml/2011/main" val="1"/>
+              <ma14:wrappingTextBoxFlag xmlns:ma14="http://schemas.microsoft.com/office/mac/drawingml/2011/main" xmlns:a14="http://schemas.microsoft.com/office/drawing/2010/main" xmlns:m="http://schemas.openxmlformats.org/officeDocument/2006/math" xmlns="" xmlns:lc="http://schemas.openxmlformats.org/drawingml/2006/lockedCanvas" val="1"/>
             </a:ext>
           </a:extLst>
         </p:spPr>
@@ -22961,7 +27701,7 @@
           </a:ln>
           <a:extLst>
             <a:ext uri="{C572A759-6A51-4108-AA02-DFA0A04FC94B}">
-              <ma14:wrappingTextBoxFlag xmlns:lc="http://schemas.openxmlformats.org/drawingml/2006/lockedCanvas" xmlns="" xmlns:m="http://schemas.openxmlformats.org/officeDocument/2006/math" xmlns:a14="http://schemas.microsoft.com/office/drawing/2010/main" xmlns:ma14="http://schemas.microsoft.com/office/mac/drawingml/2011/main" val="1"/>
+              <ma14:wrappingTextBoxFlag xmlns:ma14="http://schemas.microsoft.com/office/mac/drawingml/2011/main" xmlns:a14="http://schemas.microsoft.com/office/drawing/2010/main" xmlns:m="http://schemas.openxmlformats.org/officeDocument/2006/math" xmlns="" xmlns:lc="http://schemas.openxmlformats.org/drawingml/2006/lockedCanvas" val="1"/>
             </a:ext>
           </a:extLst>
         </p:spPr>
@@ -23318,7 +28058,7 @@
           </a:ln>
           <a:extLst>
             <a:ext uri="{C572A759-6A51-4108-AA02-DFA0A04FC94B}">
-              <ma14:wrappingTextBoxFlag xmlns:lc="http://schemas.openxmlformats.org/drawingml/2006/lockedCanvas" xmlns="" xmlns:m="http://schemas.openxmlformats.org/officeDocument/2006/math" xmlns:a14="http://schemas.microsoft.com/office/drawing/2010/main" xmlns:ma14="http://schemas.microsoft.com/office/mac/drawingml/2011/main" val="1"/>
+              <ma14:wrappingTextBoxFlag xmlns:ma14="http://schemas.microsoft.com/office/mac/drawingml/2011/main" xmlns:a14="http://schemas.microsoft.com/office/drawing/2010/main" xmlns:m="http://schemas.openxmlformats.org/officeDocument/2006/math" xmlns="" xmlns:lc="http://schemas.openxmlformats.org/drawingml/2006/lockedCanvas" val="1"/>
             </a:ext>
           </a:extLst>
         </p:spPr>
@@ -23667,7 +28407,7 @@
           </a:ln>
           <a:extLst>
             <a:ext uri="{C572A759-6A51-4108-AA02-DFA0A04FC94B}">
-              <ma14:wrappingTextBoxFlag xmlns:lc="http://schemas.openxmlformats.org/drawingml/2006/lockedCanvas" xmlns="" xmlns:m="http://schemas.openxmlformats.org/officeDocument/2006/math" xmlns:a14="http://schemas.microsoft.com/office/drawing/2010/main" xmlns:ma14="http://schemas.microsoft.com/office/mac/drawingml/2011/main" val="1"/>
+              <ma14:wrappingTextBoxFlag xmlns:ma14="http://schemas.microsoft.com/office/mac/drawingml/2011/main" xmlns:a14="http://schemas.microsoft.com/office/drawing/2010/main" xmlns:m="http://schemas.openxmlformats.org/officeDocument/2006/math" xmlns="" xmlns:lc="http://schemas.openxmlformats.org/drawingml/2006/lockedCanvas" val="1"/>
             </a:ext>
           </a:extLst>
         </p:spPr>
@@ -24031,7 +28771,7 @@
           </a:ln>
           <a:extLst>
             <a:ext uri="{C572A759-6A51-4108-AA02-DFA0A04FC94B}">
-              <ma14:wrappingTextBoxFlag xmlns:lc="http://schemas.openxmlformats.org/drawingml/2006/lockedCanvas" xmlns="" xmlns:m="http://schemas.openxmlformats.org/officeDocument/2006/math" xmlns:a14="http://schemas.microsoft.com/office/drawing/2010/main" xmlns:ma14="http://schemas.microsoft.com/office/mac/drawingml/2011/main" val="1"/>
+              <ma14:wrappingTextBoxFlag xmlns:ma14="http://schemas.microsoft.com/office/mac/drawingml/2011/main" xmlns:a14="http://schemas.microsoft.com/office/drawing/2010/main" xmlns:m="http://schemas.openxmlformats.org/officeDocument/2006/math" xmlns="" xmlns:lc="http://schemas.openxmlformats.org/drawingml/2006/lockedCanvas" val="1"/>
             </a:ext>
           </a:extLst>
         </p:spPr>
@@ -24370,7 +29110,7 @@
           </a:ln>
           <a:extLst>
             <a:ext uri="{C572A759-6A51-4108-AA02-DFA0A04FC94B}">
-              <ma14:wrappingTextBoxFlag xmlns:lc="http://schemas.openxmlformats.org/drawingml/2006/lockedCanvas" xmlns="" xmlns:m="http://schemas.openxmlformats.org/officeDocument/2006/math" xmlns:a14="http://schemas.microsoft.com/office/drawing/2010/main" xmlns:ma14="http://schemas.microsoft.com/office/mac/drawingml/2011/main" val="1"/>
+              <ma14:wrappingTextBoxFlag xmlns:ma14="http://schemas.microsoft.com/office/mac/drawingml/2011/main" xmlns:a14="http://schemas.microsoft.com/office/drawing/2010/main" xmlns:m="http://schemas.openxmlformats.org/officeDocument/2006/math" xmlns="" xmlns:lc="http://schemas.openxmlformats.org/drawingml/2006/lockedCanvas" val="1"/>
             </a:ext>
           </a:extLst>
         </p:spPr>
@@ -24709,7 +29449,7 @@
           </a:ln>
           <a:extLst>
             <a:ext uri="{C572A759-6A51-4108-AA02-DFA0A04FC94B}">
-              <ma14:wrappingTextBoxFlag xmlns:lc="http://schemas.openxmlformats.org/drawingml/2006/lockedCanvas" xmlns="" xmlns:m="http://schemas.openxmlformats.org/officeDocument/2006/math" xmlns:a14="http://schemas.microsoft.com/office/drawing/2010/main" xmlns:ma14="http://schemas.microsoft.com/office/mac/drawingml/2011/main" val="1"/>
+              <ma14:wrappingTextBoxFlag xmlns:ma14="http://schemas.microsoft.com/office/mac/drawingml/2011/main" xmlns:a14="http://schemas.microsoft.com/office/drawing/2010/main" xmlns:m="http://schemas.openxmlformats.org/officeDocument/2006/math" xmlns="" xmlns:lc="http://schemas.openxmlformats.org/drawingml/2006/lockedCanvas" val="1"/>
             </a:ext>
           </a:extLst>
         </p:spPr>
@@ -25048,7 +29788,7 @@
           </a:ln>
           <a:extLst>
             <a:ext uri="{C572A759-6A51-4108-AA02-DFA0A04FC94B}">
-              <ma14:wrappingTextBoxFlag xmlns:lc="http://schemas.openxmlformats.org/drawingml/2006/lockedCanvas" xmlns="" xmlns:m="http://schemas.openxmlformats.org/officeDocument/2006/math" xmlns:a14="http://schemas.microsoft.com/office/drawing/2010/main" xmlns:ma14="http://schemas.microsoft.com/office/mac/drawingml/2011/main" val="1"/>
+              <ma14:wrappingTextBoxFlag xmlns:ma14="http://schemas.microsoft.com/office/mac/drawingml/2011/main" xmlns:a14="http://schemas.microsoft.com/office/drawing/2010/main" xmlns:m="http://schemas.openxmlformats.org/officeDocument/2006/math" xmlns="" xmlns:lc="http://schemas.openxmlformats.org/drawingml/2006/lockedCanvas" val="1"/>
             </a:ext>
           </a:extLst>
         </p:spPr>
@@ -25417,7 +30157,7 @@
           </a:ln>
           <a:extLst>
             <a:ext uri="{C572A759-6A51-4108-AA02-DFA0A04FC94B}">
-              <ma14:wrappingTextBoxFlag xmlns:lc="http://schemas.openxmlformats.org/drawingml/2006/lockedCanvas" xmlns="" xmlns:m="http://schemas.openxmlformats.org/officeDocument/2006/math" xmlns:a14="http://schemas.microsoft.com/office/drawing/2010/main" xmlns:ma14="http://schemas.microsoft.com/office/mac/drawingml/2011/main" val="1"/>
+              <ma14:wrappingTextBoxFlag xmlns:ma14="http://schemas.microsoft.com/office/mac/drawingml/2011/main" xmlns:a14="http://schemas.microsoft.com/office/drawing/2010/main" xmlns:m="http://schemas.openxmlformats.org/officeDocument/2006/math" xmlns="" xmlns:lc="http://schemas.openxmlformats.org/drawingml/2006/lockedCanvas" val="1"/>
             </a:ext>
           </a:extLst>
         </p:spPr>
@@ -25774,7 +30514,7 @@
           </a:ln>
           <a:extLst>
             <a:ext uri="{C572A759-6A51-4108-AA02-DFA0A04FC94B}">
-              <ma14:wrappingTextBoxFlag xmlns:lc="http://schemas.openxmlformats.org/drawingml/2006/lockedCanvas" xmlns="" xmlns:m="http://schemas.openxmlformats.org/officeDocument/2006/math" xmlns:a14="http://schemas.microsoft.com/office/drawing/2010/main" xmlns:ma14="http://schemas.microsoft.com/office/mac/drawingml/2011/main" val="1"/>
+              <ma14:wrappingTextBoxFlag xmlns:ma14="http://schemas.microsoft.com/office/mac/drawingml/2011/main" xmlns:a14="http://schemas.microsoft.com/office/drawing/2010/main" xmlns:m="http://schemas.openxmlformats.org/officeDocument/2006/math" xmlns="" xmlns:lc="http://schemas.openxmlformats.org/drawingml/2006/lockedCanvas" val="1"/>
             </a:ext>
           </a:extLst>
         </p:spPr>
@@ -26113,7 +30853,7 @@
           </a:ln>
           <a:extLst>
             <a:ext uri="{C572A759-6A51-4108-AA02-DFA0A04FC94B}">
-              <ma14:wrappingTextBoxFlag xmlns:lc="http://schemas.openxmlformats.org/drawingml/2006/lockedCanvas" xmlns="" xmlns:m="http://schemas.openxmlformats.org/officeDocument/2006/math" xmlns:a14="http://schemas.microsoft.com/office/drawing/2010/main" xmlns:ma14="http://schemas.microsoft.com/office/mac/drawingml/2011/main" val="1"/>
+              <ma14:wrappingTextBoxFlag xmlns:ma14="http://schemas.microsoft.com/office/mac/drawingml/2011/main" xmlns:a14="http://schemas.microsoft.com/office/drawing/2010/main" xmlns:m="http://schemas.openxmlformats.org/officeDocument/2006/math" xmlns="" xmlns:lc="http://schemas.openxmlformats.org/drawingml/2006/lockedCanvas" val="1"/>
             </a:ext>
           </a:extLst>
         </p:spPr>
@@ -26452,7 +31192,7 @@
           </a:ln>
           <a:extLst>
             <a:ext uri="{C572A759-6A51-4108-AA02-DFA0A04FC94B}">
-              <ma14:wrappingTextBoxFlag xmlns:lc="http://schemas.openxmlformats.org/drawingml/2006/lockedCanvas" xmlns="" xmlns:m="http://schemas.openxmlformats.org/officeDocument/2006/math" xmlns:a14="http://schemas.microsoft.com/office/drawing/2010/main" xmlns:ma14="http://schemas.microsoft.com/office/mac/drawingml/2011/main" val="1"/>
+              <ma14:wrappingTextBoxFlag xmlns:ma14="http://schemas.microsoft.com/office/mac/drawingml/2011/main" xmlns:a14="http://schemas.microsoft.com/office/drawing/2010/main" xmlns:m="http://schemas.openxmlformats.org/officeDocument/2006/math" xmlns="" xmlns:lc="http://schemas.openxmlformats.org/drawingml/2006/lockedCanvas" val="1"/>
             </a:ext>
           </a:extLst>
         </p:spPr>
@@ -26794,7 +31534,7 @@
           </a:ln>
           <a:extLst>
             <a:ext uri="{C572A759-6A51-4108-AA02-DFA0A04FC94B}">
-              <ma14:wrappingTextBoxFlag xmlns:lc="http://schemas.openxmlformats.org/drawingml/2006/lockedCanvas" xmlns="" xmlns:m="http://schemas.openxmlformats.org/officeDocument/2006/math" xmlns:a14="http://schemas.microsoft.com/office/drawing/2010/main" xmlns:ma14="http://schemas.microsoft.com/office/mac/drawingml/2011/main" val="1"/>
+              <ma14:wrappingTextBoxFlag xmlns:ma14="http://schemas.microsoft.com/office/mac/drawingml/2011/main" xmlns:a14="http://schemas.microsoft.com/office/drawing/2010/main" xmlns:m="http://schemas.openxmlformats.org/officeDocument/2006/math" xmlns="" xmlns:lc="http://schemas.openxmlformats.org/drawingml/2006/lockedCanvas" val="1"/>
             </a:ext>
           </a:extLst>
         </p:spPr>
@@ -27835,7 +32575,7 @@
           </a:ln>
           <a:extLst>
             <a:ext uri="{C572A759-6A51-4108-AA02-DFA0A04FC94B}">
-              <ma14:wrappingTextBoxFlag xmlns:lc="http://schemas.openxmlformats.org/drawingml/2006/lockedCanvas" xmlns="" xmlns:m="http://schemas.openxmlformats.org/officeDocument/2006/math" xmlns:a14="http://schemas.microsoft.com/office/drawing/2010/main" xmlns:ma14="http://schemas.microsoft.com/office/mac/drawingml/2011/main" val="1"/>
+              <ma14:wrappingTextBoxFlag xmlns:ma14="http://schemas.microsoft.com/office/mac/drawingml/2011/main" xmlns:a14="http://schemas.microsoft.com/office/drawing/2010/main" xmlns:m="http://schemas.openxmlformats.org/officeDocument/2006/math" xmlns="" xmlns:lc="http://schemas.openxmlformats.org/drawingml/2006/lockedCanvas" val="1"/>
             </a:ext>
           </a:extLst>
         </p:spPr>
@@ -28192,7 +32932,7 @@
           </a:ln>
           <a:extLst>
             <a:ext uri="{C572A759-6A51-4108-AA02-DFA0A04FC94B}">
-              <ma14:wrappingTextBoxFlag xmlns:lc="http://schemas.openxmlformats.org/drawingml/2006/lockedCanvas" xmlns="" xmlns:m="http://schemas.openxmlformats.org/officeDocument/2006/math" xmlns:a14="http://schemas.microsoft.com/office/drawing/2010/main" xmlns:ma14="http://schemas.microsoft.com/office/mac/drawingml/2011/main" val="1"/>
+              <ma14:wrappingTextBoxFlag xmlns:ma14="http://schemas.microsoft.com/office/mac/drawingml/2011/main" xmlns:a14="http://schemas.microsoft.com/office/drawing/2010/main" xmlns:m="http://schemas.openxmlformats.org/officeDocument/2006/math" xmlns="" xmlns:lc="http://schemas.openxmlformats.org/drawingml/2006/lockedCanvas" val="1"/>
             </a:ext>
           </a:extLst>
         </p:spPr>
@@ -28529,7 +33269,7 @@
           <a:p>
             <a:fld id="{6874CE7D-5D74-4EC3-A871-8F42005EC53C}" type="slidenum">
               <a:rPr lang="en-US" smtClean="0"/>
-              <a:t>7</a:t>
+              <a:t>8</a:t>
             </a:fld>
             <a:endParaRPr lang="en-US"/>
           </a:p>
@@ -28608,7 +33348,7 @@
 </p:sld>
 </file>
 
-<file path=ppt/slides/slide8.xml><?xml version="1.0" encoding="utf-8"?>
+<file path=ppt/slides/slide9.xml><?xml version="1.0" encoding="utf-8"?>
 <p:sld xmlns:a="http://schemas.openxmlformats.org/drawingml/2006/main" xmlns:r="http://schemas.openxmlformats.org/officeDocument/2006/relationships" xmlns:p="http://schemas.openxmlformats.org/presentationml/2006/main">
   <p:cSld>
     <p:spTree>
@@ -28746,7 +33486,7 @@
               <a:effectLst/>
               <a:extLst>
                 <a:ext uri="{C572A759-6A51-4108-AA02-DFA0A04FC94B}">
-                  <ma14:wrappingTextBoxFlag xmlns="" xmlns:ma14="http://schemas.microsoft.com/office/mac/drawingml/2011/main" val="1"/>
+                  <ma14:wrappingTextBoxFlag xmlns:ma14="http://schemas.microsoft.com/office/mac/drawingml/2011/main" xmlns="" val="1"/>
                 </a:ext>
               </a:extLst>
             </p:spPr>
@@ -28797,7 +33537,7 @@
             <a:effectLst/>
             <a:extLst>
               <a:ext uri="{C572A759-6A51-4108-AA02-DFA0A04FC94B}">
-                <ma14:wrappingTextBoxFlag xmlns="" xmlns:ma14="http://schemas.microsoft.com/office/mac/drawingml/2011/main" val="1"/>
+                <ma14:wrappingTextBoxFlag xmlns:ma14="http://schemas.microsoft.com/office/mac/drawingml/2011/main" xmlns="" val="1"/>
               </a:ext>
             </a:extLst>
           </p:spPr>
@@ -29020,7 +33760,7 @@
               <a:effectLst/>
               <a:extLst>
                 <a:ext uri="{C572A759-6A51-4108-AA02-DFA0A04FC94B}">
-                  <ma14:wrappingTextBoxFlag xmlns="" xmlns:ma14="http://schemas.microsoft.com/office/mac/drawingml/2011/main" val="1"/>
+                  <ma14:wrappingTextBoxFlag xmlns:ma14="http://schemas.microsoft.com/office/mac/drawingml/2011/main" xmlns="" val="1"/>
                 </a:ext>
               </a:extLst>
             </p:spPr>
@@ -29071,7 +33811,7 @@
             <a:effectLst/>
             <a:extLst>
               <a:ext uri="{C572A759-6A51-4108-AA02-DFA0A04FC94B}">
-                <ma14:wrappingTextBoxFlag xmlns="" xmlns:ma14="http://schemas.microsoft.com/office/mac/drawingml/2011/main" val="1"/>
+                <ma14:wrappingTextBoxFlag xmlns:ma14="http://schemas.microsoft.com/office/mac/drawingml/2011/main" xmlns="" val="1"/>
               </a:ext>
             </a:extLst>
           </p:spPr>
@@ -29249,7 +33989,7 @@
               <a:effectLst/>
               <a:extLst>
                 <a:ext uri="{C572A759-6A51-4108-AA02-DFA0A04FC94B}">
-                  <ma14:wrappingTextBoxFlag xmlns="" xmlns:ma14="http://schemas.microsoft.com/office/mac/drawingml/2011/main" val="1"/>
+                  <ma14:wrappingTextBoxFlag xmlns:ma14="http://schemas.microsoft.com/office/mac/drawingml/2011/main" xmlns="" val="1"/>
                 </a:ext>
               </a:extLst>
             </p:spPr>
@@ -29300,7 +34040,7 @@
             <a:effectLst/>
             <a:extLst>
               <a:ext uri="{C572A759-6A51-4108-AA02-DFA0A04FC94B}">
-                <ma14:wrappingTextBoxFlag xmlns="" xmlns:ma14="http://schemas.microsoft.com/office/mac/drawingml/2011/main" val="1"/>
+                <ma14:wrappingTextBoxFlag xmlns:ma14="http://schemas.microsoft.com/office/mac/drawingml/2011/main" xmlns="" val="1"/>
               </a:ext>
             </a:extLst>
           </p:spPr>
@@ -29579,7 +34319,7 @@
               <a:effectLst/>
               <a:extLst>
                 <a:ext uri="{C572A759-6A51-4108-AA02-DFA0A04FC94B}">
-                  <ma14:wrappingTextBoxFlag xmlns="" xmlns:ma14="http://schemas.microsoft.com/office/mac/drawingml/2011/main" val="1"/>
+                  <ma14:wrappingTextBoxFlag xmlns:ma14="http://schemas.microsoft.com/office/mac/drawingml/2011/main" xmlns="" val="1"/>
                 </a:ext>
               </a:extLst>
             </p:spPr>
@@ -29630,7 +34370,7 @@
             <a:effectLst/>
             <a:extLst>
               <a:ext uri="{C572A759-6A51-4108-AA02-DFA0A04FC94B}">
-                <ma14:wrappingTextBoxFlag xmlns="" xmlns:ma14="http://schemas.microsoft.com/office/mac/drawingml/2011/main" val="1"/>
+                <ma14:wrappingTextBoxFlag xmlns:ma14="http://schemas.microsoft.com/office/mac/drawingml/2011/main" xmlns="" val="1"/>
               </a:ext>
             </a:extLst>
           </p:spPr>
@@ -29848,7 +34588,7 @@
               <a:effectLst/>
               <a:extLst>
                 <a:ext uri="{C572A759-6A51-4108-AA02-DFA0A04FC94B}">
-                  <ma14:wrappingTextBoxFlag xmlns="" xmlns:ma14="http://schemas.microsoft.com/office/mac/drawingml/2011/main" val="1"/>
+                  <ma14:wrappingTextBoxFlag xmlns:ma14="http://schemas.microsoft.com/office/mac/drawingml/2011/main" xmlns="" val="1"/>
                 </a:ext>
               </a:extLst>
             </p:spPr>
@@ -29902,7 +34642,7 @@
             <a:effectLst/>
             <a:extLst>
               <a:ext uri="{C572A759-6A51-4108-AA02-DFA0A04FC94B}">
-                <ma14:wrappingTextBoxFlag xmlns="" xmlns:ma14="http://schemas.microsoft.com/office/mac/drawingml/2011/main" val="1"/>
+                <ma14:wrappingTextBoxFlag xmlns:ma14="http://schemas.microsoft.com/office/mac/drawingml/2011/main" xmlns="" val="1"/>
               </a:ext>
             </a:extLst>
           </p:spPr>
@@ -30107,7 +34847,7 @@
               <a:effectLst/>
               <a:extLst>
                 <a:ext uri="{C572A759-6A51-4108-AA02-DFA0A04FC94B}">
-                  <ma14:wrappingTextBoxFlag xmlns="" xmlns:ma14="http://schemas.microsoft.com/office/mac/drawingml/2011/main" val="1"/>
+                  <ma14:wrappingTextBoxFlag xmlns:ma14="http://schemas.microsoft.com/office/mac/drawingml/2011/main" xmlns="" val="1"/>
                 </a:ext>
               </a:extLst>
             </p:spPr>
@@ -30161,7 +34901,7 @@
             <a:effectLst/>
             <a:extLst>
               <a:ext uri="{C572A759-6A51-4108-AA02-DFA0A04FC94B}">
-                <ma14:wrappingTextBoxFlag xmlns="" xmlns:ma14="http://schemas.microsoft.com/office/mac/drawingml/2011/main" val="1"/>
+                <ma14:wrappingTextBoxFlag xmlns:ma14="http://schemas.microsoft.com/office/mac/drawingml/2011/main" xmlns="" val="1"/>
               </a:ext>
             </a:extLst>
           </p:spPr>
@@ -30403,7 +35143,7 @@
               <a:effectLst/>
               <a:extLst>
                 <a:ext uri="{C572A759-6A51-4108-AA02-DFA0A04FC94B}">
-                  <ma14:wrappingTextBoxFlag xmlns="" xmlns:ma14="http://schemas.microsoft.com/office/mac/drawingml/2011/main" val="1"/>
+                  <ma14:wrappingTextBoxFlag xmlns:ma14="http://schemas.microsoft.com/office/mac/drawingml/2011/main" xmlns="" val="1"/>
                 </a:ext>
               </a:extLst>
             </p:spPr>
@@ -30461,7 +35201,7 @@
             <a:effectLst/>
             <a:extLst>
               <a:ext uri="{C572A759-6A51-4108-AA02-DFA0A04FC94B}">
-                <ma14:wrappingTextBoxFlag xmlns="" xmlns:ma14="http://schemas.microsoft.com/office/mac/drawingml/2011/main" val="1"/>
+                <ma14:wrappingTextBoxFlag xmlns:ma14="http://schemas.microsoft.com/office/mac/drawingml/2011/main" xmlns="" val="1"/>
               </a:ext>
             </a:extLst>
           </p:spPr>
@@ -30674,370 +35414,13 @@
           <a:p>
             <a:fld id="{6874CE7D-5D74-4EC3-A871-8F42005EC53C}" type="slidenum">
               <a:rPr lang="en-US" smtClean="0"/>
-              <a:t>8</a:t>
+              <a:t>9</a:t>
             </a:fld>
             <a:endParaRPr lang="en-US"/>
           </a:p>
         </p:txBody>
       </p:sp>
     </p:spTree>
-  </p:cSld>
-  <p:clrMapOvr>
-    <a:masterClrMapping/>
-  </p:clrMapOvr>
-</p:sld>
-</file>
-
-<file path=ppt/slides/slide9.xml><?xml version="1.0" encoding="utf-8"?>
-<p:sld xmlns:a="http://schemas.openxmlformats.org/drawingml/2006/main" xmlns:r="http://schemas.openxmlformats.org/officeDocument/2006/relationships" xmlns:p="http://schemas.openxmlformats.org/presentationml/2006/main">
-  <p:cSld>
-    <p:spTree>
-      <p:nvGrpSpPr>
-        <p:cNvPr id="1" name=""/>
-        <p:cNvGrpSpPr/>
-        <p:nvPr/>
-      </p:nvGrpSpPr>
-      <p:grpSpPr>
-        <a:xfrm>
-          <a:off x="0" y="0"/>
-          <a:ext cx="0" cy="0"/>
-          <a:chOff x="0" y="0"/>
-          <a:chExt cx="0" cy="0"/>
-        </a:xfrm>
-      </p:grpSpPr>
-      <p:sp>
-        <p:nvSpPr>
-          <p:cNvPr id="2" name="Title 1">
-            <a:extLst>
-              <a:ext uri="{FF2B5EF4-FFF2-40B4-BE49-F238E27FC236}">
-                <a16:creationId xmlns:a16="http://schemas.microsoft.com/office/drawing/2014/main" id="{247C0EFB-FEBF-51F4-14C4-31463B2F5A8B}"/>
-              </a:ext>
-            </a:extLst>
-          </p:cNvPr>
-          <p:cNvSpPr>
-            <a:spLocks noGrp="1"/>
-          </p:cNvSpPr>
-          <p:nvPr>
-            <p:ph type="title"/>
-          </p:nvPr>
-        </p:nvSpPr>
-        <p:spPr>
-          <a:xfrm>
-            <a:off x="838200" y="228600"/>
-            <a:ext cx="10515600" cy="822960"/>
-          </a:xfrm>
-        </p:spPr>
-        <p:txBody>
-          <a:bodyPr/>
-          <a:lstStyle/>
-          <a:p>
-            <a:r>
-              <a:rPr lang="en-US" dirty="0"/>
-              <a:t>Simulating Method Categories in IntelliJ</a:t>
-            </a:r>
-          </a:p>
-        </p:txBody>
-      </p:sp>
-      <p:pic>
-        <p:nvPicPr>
-          <p:cNvPr id="5" name="Picture 4">
-            <a:extLst>
-              <a:ext uri="{FF2B5EF4-FFF2-40B4-BE49-F238E27FC236}">
-                <a16:creationId xmlns:a16="http://schemas.microsoft.com/office/drawing/2014/main" id="{B9E541C5-0700-ACBB-5D6C-5D47E474AE78}"/>
-              </a:ext>
-            </a:extLst>
-          </p:cNvPr>
-          <p:cNvPicPr>
-            <a:picLocks noChangeAspect="1"/>
-          </p:cNvPicPr>
-          <p:nvPr/>
-        </p:nvPicPr>
-        <p:blipFill>
-          <a:blip r:embed="rId2" cstate="print">
-            <a:extLst>
-              <a:ext uri="{28A0092B-C50C-407E-A947-70E740481C1C}">
-                <a14:useLocalDpi xmlns:a14="http://schemas.microsoft.com/office/drawing/2010/main" val="0"/>
-              </a:ext>
-            </a:extLst>
-          </a:blip>
-          <a:stretch>
-            <a:fillRect/>
-          </a:stretch>
-        </p:blipFill>
-        <p:spPr>
-          <a:xfrm>
-            <a:off x="838200" y="1513324"/>
-            <a:ext cx="7772400" cy="4708783"/>
-          </a:xfrm>
-          <a:prstGeom prst="rect">
-            <a:avLst/>
-          </a:prstGeom>
-        </p:spPr>
-      </p:pic>
-      <p:sp>
-        <p:nvSpPr>
-          <p:cNvPr id="6" name="TextBox 5">
-            <a:extLst>
-              <a:ext uri="{FF2B5EF4-FFF2-40B4-BE49-F238E27FC236}">
-                <a16:creationId xmlns:a16="http://schemas.microsoft.com/office/drawing/2014/main" id="{207EEA28-248E-27BD-0AC3-AC7DB5307E67}"/>
-              </a:ext>
-            </a:extLst>
-          </p:cNvPr>
-          <p:cNvSpPr txBox="1"/>
-          <p:nvPr/>
-        </p:nvSpPr>
-        <p:spPr>
-          <a:xfrm>
-            <a:off x="0" y="6126480"/>
-            <a:ext cx="731520" cy="584775"/>
-          </a:xfrm>
-          <a:prstGeom prst="rect">
-            <a:avLst/>
-          </a:prstGeom>
-          <a:noFill/>
-          <a:ln w="12700" cap="flat">
-            <a:noFill/>
-            <a:miter lim="400000"/>
-          </a:ln>
-          <a:effectLst/>
-          <a:sp3d/>
-        </p:spPr>
-        <p:style>
-          <a:lnRef idx="0">
-            <a:scrgbClr r="0" g="0" b="0"/>
-          </a:lnRef>
-          <a:fillRef idx="0">
-            <a:scrgbClr r="0" g="0" b="0"/>
-          </a:fillRef>
-          <a:effectRef idx="0">
-            <a:scrgbClr r="0" g="0" b="0"/>
-          </a:effectRef>
-          <a:fontRef idx="none"/>
-        </p:style>
-        <p:txBody>
-          <a:bodyPr wrap="square">
-            <a:spAutoFit/>
-          </a:bodyPr>
-          <a:lstStyle/>
-          <a:p>
-            <a:r>
-              <a:rPr lang="en-US" sz="3200" b="0" i="0" u="none" strike="noStrike" dirty="0">
-                <a:solidFill>
-                  <a:srgbClr val="000000"/>
-                </a:solidFill>
-                <a:effectLst/>
-                <a:latin typeface="Arial" panose="020B0604020202020204" pitchFamily="34" charset="0"/>
-              </a:rPr>
-              <a:t>🐿️</a:t>
-            </a:r>
-            <a:endParaRPr lang="en-US" sz="3200" dirty="0"/>
-          </a:p>
-        </p:txBody>
-      </p:sp>
-      <p:sp>
-        <p:nvSpPr>
-          <p:cNvPr id="3" name="Slide Number Placeholder 2">
-            <a:extLst>
-              <a:ext uri="{FF2B5EF4-FFF2-40B4-BE49-F238E27FC236}">
-                <a16:creationId xmlns:a16="http://schemas.microsoft.com/office/drawing/2014/main" id="{06321D37-A392-03EE-586D-5FAD9C6A6E0D}"/>
-              </a:ext>
-            </a:extLst>
-          </p:cNvPr>
-          <p:cNvSpPr>
-            <a:spLocks noGrp="1"/>
-          </p:cNvSpPr>
-          <p:nvPr>
-            <p:ph type="sldNum" sz="quarter" idx="12"/>
-          </p:nvPr>
-        </p:nvSpPr>
-        <p:spPr/>
-        <p:txBody>
-          <a:bodyPr/>
-          <a:lstStyle/>
-          <a:p>
-            <a:fld id="{6874CE7D-5D74-4EC3-A871-8F42005EC53C}" type="slidenum">
-              <a:rPr lang="en-US" smtClean="0"/>
-              <a:t>9</a:t>
-            </a:fld>
-            <a:endParaRPr lang="en-US"/>
-          </a:p>
-        </p:txBody>
-      </p:sp>
-      <p:sp>
-        <p:nvSpPr>
-          <p:cNvPr id="4" name="TextBox 3">
-            <a:extLst>
-              <a:ext uri="{FF2B5EF4-FFF2-40B4-BE49-F238E27FC236}">
-                <a16:creationId xmlns:a16="http://schemas.microsoft.com/office/drawing/2014/main" id="{D06CED0B-071D-42E7-AF1F-66B77D6AD5B3}"/>
-              </a:ext>
-            </a:extLst>
-          </p:cNvPr>
-          <p:cNvSpPr txBox="1"/>
-          <p:nvPr/>
-        </p:nvSpPr>
-        <p:spPr>
-          <a:xfrm>
-            <a:off x="838200" y="1097776"/>
-            <a:ext cx="4229043" cy="369332"/>
-          </a:xfrm>
-          <a:prstGeom prst="rect">
-            <a:avLst/>
-          </a:prstGeom>
-          <a:noFill/>
-        </p:spPr>
-        <p:txBody>
-          <a:bodyPr wrap="none" rtlCol="0">
-            <a:spAutoFit/>
-          </a:bodyPr>
-          <a:lstStyle/>
-          <a:p>
-            <a:pPr marL="285750" indent="-285750">
-              <a:buFont typeface="Arial" panose="020B0604020202020204" pitchFamily="34" charset="0"/>
-              <a:buChar char="•"/>
-            </a:pPr>
-            <a:r>
-              <a:rPr lang="en-US" dirty="0"/>
-              <a:t>Using </a:t>
-            </a:r>
-            <a:r>
-              <a:rPr lang="en-US" b="1" dirty="0"/>
-              <a:t>Custom Code Folding Regions</a:t>
-            </a:r>
-          </a:p>
-        </p:txBody>
-      </p:sp>
-      <p:pic>
-        <p:nvPicPr>
-          <p:cNvPr id="9" name="Picture 8" descr="A screenshot of a computer code&#10;&#10;AI-generated content may be incorrect.">
-            <a:extLst>
-              <a:ext uri="{FF2B5EF4-FFF2-40B4-BE49-F238E27FC236}">
-                <a16:creationId xmlns:a16="http://schemas.microsoft.com/office/drawing/2014/main" id="{D9A31B18-ECB7-A23A-9950-4393F056BD57}"/>
-              </a:ext>
-            </a:extLst>
-          </p:cNvPr>
-          <p:cNvPicPr>
-            <a:picLocks noChangeAspect="1"/>
-          </p:cNvPicPr>
-          <p:nvPr/>
-        </p:nvPicPr>
-        <p:blipFill>
-          <a:blip r:embed="rId3">
-            <a:extLst>
-              <a:ext uri="{28A0092B-C50C-407E-A947-70E740481C1C}">
-                <a14:useLocalDpi xmlns:a14="http://schemas.microsoft.com/office/drawing/2010/main" val="0"/>
-              </a:ext>
-            </a:extLst>
-          </a:blip>
-          <a:stretch>
-            <a:fillRect/>
-          </a:stretch>
-        </p:blipFill>
-        <p:spPr>
-          <a:xfrm>
-            <a:off x="6372963" y="1060309"/>
-            <a:ext cx="4587479" cy="5296041"/>
-          </a:xfrm>
-          <a:prstGeom prst="rect">
-            <a:avLst/>
-          </a:prstGeom>
-          <a:ln w="25400">
-            <a:solidFill>
-              <a:schemeClr val="accent1"/>
-            </a:solidFill>
-          </a:ln>
-          <a:effectLst>
-            <a:softEdge rad="0"/>
-          </a:effectLst>
-        </p:spPr>
-      </p:pic>
-      <p:cxnSp>
-        <p:nvCxnSpPr>
-          <p:cNvPr id="11" name="Straight Arrow Connector 10">
-            <a:extLst>
-              <a:ext uri="{FF2B5EF4-FFF2-40B4-BE49-F238E27FC236}">
-                <a16:creationId xmlns:a16="http://schemas.microsoft.com/office/drawing/2014/main" id="{081A2A41-9C6A-43D2-8239-27968DE6245B}"/>
-              </a:ext>
-            </a:extLst>
-          </p:cNvPr>
-          <p:cNvCxnSpPr>
-            <a:cxnSpLocks/>
-          </p:cNvCxnSpPr>
-          <p:nvPr/>
-        </p:nvCxnSpPr>
-        <p:spPr>
-          <a:xfrm flipV="1">
-            <a:off x="3416643" y="1334530"/>
-            <a:ext cx="2910016" cy="1075038"/>
-          </a:xfrm>
-          <a:prstGeom prst="straightConnector1">
-            <a:avLst/>
-          </a:prstGeom>
-          <a:ln>
-            <a:tailEnd type="triangle"/>
-          </a:ln>
-        </p:spPr>
-        <p:style>
-          <a:lnRef idx="2">
-            <a:schemeClr val="accent1"/>
-          </a:lnRef>
-          <a:fillRef idx="0">
-            <a:schemeClr val="accent1"/>
-          </a:fillRef>
-          <a:effectRef idx="1">
-            <a:schemeClr val="accent1"/>
-          </a:effectRef>
-          <a:fontRef idx="minor">
-            <a:schemeClr val="tx1"/>
-          </a:fontRef>
-        </p:style>
-      </p:cxnSp>
-      <p:cxnSp>
-        <p:nvCxnSpPr>
-          <p:cNvPr id="12" name="Straight Arrow Connector 11">
-            <a:extLst>
-              <a:ext uri="{FF2B5EF4-FFF2-40B4-BE49-F238E27FC236}">
-                <a16:creationId xmlns:a16="http://schemas.microsoft.com/office/drawing/2014/main" id="{E8630C00-5E55-5BF6-F05F-92601C82362D}"/>
-              </a:ext>
-            </a:extLst>
-          </p:cNvPr>
-          <p:cNvCxnSpPr>
-            <a:cxnSpLocks/>
-          </p:cNvCxnSpPr>
-          <p:nvPr/>
-        </p:nvCxnSpPr>
-        <p:spPr>
-          <a:xfrm>
-            <a:off x="3416643" y="2409568"/>
-            <a:ext cx="2910016" cy="3651421"/>
-          </a:xfrm>
-          <a:prstGeom prst="straightConnector1">
-            <a:avLst/>
-          </a:prstGeom>
-          <a:ln>
-            <a:tailEnd type="triangle"/>
-          </a:ln>
-        </p:spPr>
-        <p:style>
-          <a:lnRef idx="2">
-            <a:schemeClr val="accent1"/>
-          </a:lnRef>
-          <a:fillRef idx="0">
-            <a:schemeClr val="accent1"/>
-          </a:fillRef>
-          <a:effectRef idx="1">
-            <a:schemeClr val="accent1"/>
-          </a:effectRef>
-          <a:fontRef idx="minor">
-            <a:schemeClr val="tx1"/>
-          </a:fontRef>
-        </p:style>
-      </p:cxnSp>
-    </p:spTree>
-    <p:extLst>
-      <p:ext uri="{BB962C8B-B14F-4D97-AF65-F5344CB8AC3E}">
-        <p14:creationId xmlns:p14="http://schemas.microsoft.com/office/powerpoint/2010/main" val="1256773908"/>
-      </p:ext>
-    </p:extLst>
   </p:cSld>
   <p:clrMapOvr>
     <a:masterClrMapping/>

--- a/RefactorToEcIntro.pptx
+++ b/RefactorToEcIntro.pptx
@@ -219,7 +219,7 @@
           <a:p>
             <a:fld id="{8CCF7272-9B1D-4C9A-BAA4-A2C3BF62B1D2}" type="datetimeFigureOut">
               <a:rPr lang="en-US" smtClean="0"/>
-              <a:t>9/26/2025</a:t>
+              <a:t>9/27/2025</a:t>
             </a:fld>
             <a:endParaRPr lang="en-US"/>
           </a:p>
@@ -973,9 +973,9 @@
           <a:bodyPr/>
           <a:lstStyle/>
           <a:p>
-            <a:fld id="{A978A291-C87E-4583-AB2D-5CAEB7F4C3DE}" type="datetime1">
+            <a:fld id="{68BAE448-34E0-46DC-9FDB-1B326907CA84}" type="datetime1">
               <a:rPr lang="en-US" smtClean="0"/>
-              <a:t>9/26/2025</a:t>
+              <a:t>9/27/2025</a:t>
             </a:fld>
             <a:endParaRPr lang="en-US"/>
           </a:p>
@@ -1171,9 +1171,9 @@
           <a:bodyPr/>
           <a:lstStyle/>
           <a:p>
-            <a:fld id="{D9948513-3721-474C-BE80-7871409E66CD}" type="datetime1">
+            <a:fld id="{BAC0C9A0-71EB-4C46-BFAE-DCF0AF3A0EC8}" type="datetime1">
               <a:rPr lang="en-US" smtClean="0"/>
-              <a:t>9/26/2025</a:t>
+              <a:t>9/27/2025</a:t>
             </a:fld>
             <a:endParaRPr lang="en-US"/>
           </a:p>
@@ -1379,9 +1379,9 @@
           <a:bodyPr/>
           <a:lstStyle/>
           <a:p>
-            <a:fld id="{9C3FEB91-5253-4CC2-B144-C35513BB77D7}" type="datetime1">
+            <a:fld id="{AB43F7C9-88A6-4437-8948-DF2F3F9B25C1}" type="datetime1">
               <a:rPr lang="en-US" smtClean="0"/>
-              <a:t>9/26/2025</a:t>
+              <a:t>9/27/2025</a:t>
             </a:fld>
             <a:endParaRPr lang="en-US"/>
           </a:p>
@@ -1577,9 +1577,9 @@
           <a:bodyPr/>
           <a:lstStyle/>
           <a:p>
-            <a:fld id="{09779B33-F1DD-498D-93C7-6B8EC548F6D2}" type="datetime1">
+            <a:fld id="{3B0593FE-CF93-4F9B-AC56-75BC55C6F32F}" type="datetime1">
               <a:rPr lang="en-US" smtClean="0"/>
-              <a:t>9/26/2025</a:t>
+              <a:t>9/27/2025</a:t>
             </a:fld>
             <a:endParaRPr lang="en-US"/>
           </a:p>
@@ -1887,9 +1887,9 @@
           <a:bodyPr/>
           <a:lstStyle/>
           <a:p>
-            <a:fld id="{6820CCE4-48AB-4521-B222-52BFE717148C}" type="datetime1">
+            <a:fld id="{54C29679-8FFF-4A98-A10B-7B9208840F9A}" type="datetime1">
               <a:rPr lang="en-US" smtClean="0"/>
-              <a:t>9/26/2025</a:t>
+              <a:t>9/27/2025</a:t>
             </a:fld>
             <a:endParaRPr lang="en-US"/>
           </a:p>
@@ -2152,9 +2152,9 @@
           <a:bodyPr/>
           <a:lstStyle/>
           <a:p>
-            <a:fld id="{A3A19DA7-183B-4551-9BD3-7C8E51B9184E}" type="datetime1">
+            <a:fld id="{C616605E-1528-4FCA-84AE-4988E530378F}" type="datetime1">
               <a:rPr lang="en-US" smtClean="0"/>
-              <a:t>9/26/2025</a:t>
+              <a:t>9/27/2025</a:t>
             </a:fld>
             <a:endParaRPr lang="en-US"/>
           </a:p>
@@ -2564,9 +2564,9 @@
           <a:bodyPr/>
           <a:lstStyle/>
           <a:p>
-            <a:fld id="{4A926BFC-E9D5-40BE-8176-572BC6F88714}" type="datetime1">
+            <a:fld id="{5C967F88-E15A-423E-8C0E-ED81B2AD200B}" type="datetime1">
               <a:rPr lang="en-US" smtClean="0"/>
-              <a:t>9/26/2025</a:t>
+              <a:t>9/27/2025</a:t>
             </a:fld>
             <a:endParaRPr lang="en-US"/>
           </a:p>
@@ -2705,9 +2705,9 @@
           <a:bodyPr/>
           <a:lstStyle/>
           <a:p>
-            <a:fld id="{605F6A97-0388-4AFE-AA88-9F8EE659E9FB}" type="datetime1">
+            <a:fld id="{7B77AEE9-0B70-4E11-9251-71473506E641}" type="datetime1">
               <a:rPr lang="en-US" smtClean="0"/>
-              <a:t>9/26/2025</a:t>
+              <a:t>9/27/2025</a:t>
             </a:fld>
             <a:endParaRPr lang="en-US"/>
           </a:p>
@@ -2853,9 +2853,9 @@
           <a:bodyPr/>
           <a:lstStyle/>
           <a:p>
-            <a:fld id="{97CBCB5A-D4E0-47ED-AB71-73E5049E5258}" type="datetime1">
+            <a:fld id="{D39A6C2F-4429-4DEF-9F7B-968D133361D9}" type="datetime1">
               <a:rPr lang="en-US" smtClean="0"/>
-              <a:t>9/26/2025</a:t>
+              <a:t>9/27/2025</a:t>
             </a:fld>
             <a:endParaRPr lang="en-US"/>
           </a:p>
@@ -3164,9 +3164,9 @@
           <a:bodyPr/>
           <a:lstStyle/>
           <a:p>
-            <a:fld id="{62FB721B-115B-4B8B-AFC8-140F455CE774}" type="datetime1">
+            <a:fld id="{E6A7DD99-E1A7-4CEB-A5F5-1115ADD4759D}" type="datetime1">
               <a:rPr lang="en-US" smtClean="0"/>
-              <a:t>9/26/2025</a:t>
+              <a:t>9/27/2025</a:t>
             </a:fld>
             <a:endParaRPr lang="en-US"/>
           </a:p>
@@ -3452,9 +3452,9 @@
           <a:bodyPr/>
           <a:lstStyle/>
           <a:p>
-            <a:fld id="{E32E6149-AA0E-47F5-B01B-3D90BEF64480}" type="datetime1">
+            <a:fld id="{4D6AC830-A156-4095-8DF1-654325C78F63}" type="datetime1">
               <a:rPr lang="en-US" smtClean="0"/>
-              <a:t>9/26/2025</a:t>
+              <a:t>9/27/2025</a:t>
             </a:fld>
             <a:endParaRPr lang="en-US"/>
           </a:p>
@@ -3694,9 +3694,9 @@
             </a:lvl1pPr>
           </a:lstStyle>
           <a:p>
-            <a:fld id="{B9BE06C6-629D-4C3F-AD68-BEBDFC283B8F}" type="datetime1">
+            <a:fld id="{F83568D0-A24C-431A-888C-8829CA6D36F6}" type="datetime1">
               <a:rPr lang="en-US" smtClean="0"/>
-              <a:t>9/26/2025</a:t>
+              <a:t>9/27/2025</a:t>
             </a:fld>
             <a:endParaRPr lang="en-US"/>
           </a:p>
@@ -4420,7 +4420,7 @@
           </a:ln>
           <a:extLst>
             <a:ext uri="{C572A759-6A51-4108-AA02-DFA0A04FC94B}">
-              <ma14:wrappingTextBoxFlag xmlns:ma14="http://schemas.microsoft.com/office/mac/drawingml/2011/main" xmlns="" val="1"/>
+              <ma14:wrappingTextBoxFlag xmlns="" xmlns:ma14="http://schemas.microsoft.com/office/mac/drawingml/2011/main" val="1"/>
             </a:ext>
           </a:extLst>
         </p:spPr>
@@ -11084,7 +11084,7 @@
           <a:p>
             <a:r>
               <a:rPr lang="en-US" dirty="0"/>
-              <a:t>Many learning resources available</a:t>
+              <a:t>Many resources available</a:t>
             </a:r>
           </a:p>
           <a:p>
@@ -11247,6 +11247,242 @@
           </a:p>
         </p:txBody>
       </p:sp>
+      <p:sp>
+        <p:nvSpPr>
+          <p:cNvPr id="5" name="Slide Number Placeholder 4">
+            <a:extLst>
+              <a:ext uri="{FF2B5EF4-FFF2-40B4-BE49-F238E27FC236}">
+                <a16:creationId xmlns:a16="http://schemas.microsoft.com/office/drawing/2014/main" id="{2D74ADB1-F041-31C0-CBCF-0B1C18D1EB3B}"/>
+              </a:ext>
+            </a:extLst>
+          </p:cNvPr>
+          <p:cNvSpPr>
+            <a:spLocks noGrp="1"/>
+          </p:cNvSpPr>
+          <p:nvPr>
+            <p:ph type="sldNum" sz="quarter" idx="12"/>
+          </p:nvPr>
+        </p:nvSpPr>
+        <p:spPr/>
+        <p:txBody>
+          <a:bodyPr/>
+          <a:lstStyle/>
+          <a:p>
+            <a:fld id="{6874CE7D-5D74-4EC3-A871-8F42005EC53C}" type="slidenum">
+              <a:rPr lang="en-US" smtClean="0"/>
+              <a:t>20</a:t>
+            </a:fld>
+            <a:endParaRPr lang="en-US"/>
+          </a:p>
+        </p:txBody>
+      </p:sp>
+      <p:grpSp>
+        <p:nvGrpSpPr>
+          <p:cNvPr id="11" name="Group 10">
+            <a:extLst>
+              <a:ext uri="{FF2B5EF4-FFF2-40B4-BE49-F238E27FC236}">
+                <a16:creationId xmlns:a16="http://schemas.microsoft.com/office/drawing/2014/main" id="{0C000AFC-9060-C264-9B3C-36DCB1F81D46}"/>
+              </a:ext>
+            </a:extLst>
+          </p:cNvPr>
+          <p:cNvGrpSpPr/>
+          <p:nvPr/>
+        </p:nvGrpSpPr>
+        <p:grpSpPr>
+          <a:xfrm>
+            <a:off x="9195438" y="1051560"/>
+            <a:ext cx="2158362" cy="2158362"/>
+            <a:chOff x="9195438" y="1051560"/>
+            <a:chExt cx="2158362" cy="2158362"/>
+          </a:xfrm>
+        </p:grpSpPr>
+        <p:pic>
+          <p:nvPicPr>
+            <p:cNvPr id="7" name="Picture 6">
+              <a:extLst>
+                <a:ext uri="{FF2B5EF4-FFF2-40B4-BE49-F238E27FC236}">
+                  <a16:creationId xmlns:a16="http://schemas.microsoft.com/office/drawing/2014/main" id="{D3350572-C203-D6AA-E140-206241D1B060}"/>
+                </a:ext>
+              </a:extLst>
+            </p:cNvPr>
+            <p:cNvPicPr>
+              <a:picLocks noChangeAspect="1"/>
+            </p:cNvPicPr>
+            <p:nvPr/>
+          </p:nvPicPr>
+          <p:blipFill>
+            <a:blip r:embed="rId5"/>
+            <a:stretch>
+              <a:fillRect/>
+            </a:stretch>
+          </p:blipFill>
+          <p:spPr>
+            <a:xfrm>
+              <a:off x="9195438" y="1051560"/>
+              <a:ext cx="2158362" cy="2158362"/>
+            </a:xfrm>
+            <a:prstGeom prst="rect">
+              <a:avLst/>
+            </a:prstGeom>
+          </p:spPr>
+        </p:pic>
+        <p:sp>
+          <p:nvSpPr>
+            <p:cNvPr id="8" name="Rectangle 7">
+              <a:extLst>
+                <a:ext uri="{FF2B5EF4-FFF2-40B4-BE49-F238E27FC236}">
+                  <a16:creationId xmlns:a16="http://schemas.microsoft.com/office/drawing/2014/main" id="{B116E0A4-743D-7099-2DC5-34DE0044E83B}"/>
+                </a:ext>
+              </a:extLst>
+            </p:cNvPr>
+            <p:cNvSpPr/>
+            <p:nvPr/>
+          </p:nvSpPr>
+          <p:spPr>
+            <a:xfrm>
+              <a:off x="9427528" y="1281694"/>
+              <a:ext cx="182880" cy="182880"/>
+            </a:xfrm>
+            <a:prstGeom prst="rect">
+              <a:avLst/>
+            </a:prstGeom>
+            <a:solidFill>
+              <a:srgbClr val="F7941E"/>
+            </a:solidFill>
+            <a:ln>
+              <a:noFill/>
+            </a:ln>
+          </p:spPr>
+          <p:style>
+            <a:lnRef idx="2">
+              <a:schemeClr val="accent1">
+                <a:shade val="15000"/>
+              </a:schemeClr>
+            </a:lnRef>
+            <a:fillRef idx="1">
+              <a:schemeClr val="accent1"/>
+            </a:fillRef>
+            <a:effectRef idx="0">
+              <a:schemeClr val="accent1"/>
+            </a:effectRef>
+            <a:fontRef idx="minor">
+              <a:schemeClr val="lt1"/>
+            </a:fontRef>
+          </p:style>
+          <p:txBody>
+            <a:bodyPr rtlCol="0" anchor="ctr"/>
+            <a:lstStyle/>
+            <a:p>
+              <a:pPr algn="ctr"/>
+              <a:endParaRPr lang="en-US"/>
+            </a:p>
+          </p:txBody>
+        </p:sp>
+        <p:sp>
+          <p:nvSpPr>
+            <p:cNvPr id="9" name="Rectangle 8">
+              <a:extLst>
+                <a:ext uri="{FF2B5EF4-FFF2-40B4-BE49-F238E27FC236}">
+                  <a16:creationId xmlns:a16="http://schemas.microsoft.com/office/drawing/2014/main" id="{6F400F7D-A022-93E4-7160-1AE33D99231A}"/>
+                </a:ext>
+              </a:extLst>
+            </p:cNvPr>
+            <p:cNvSpPr/>
+            <p:nvPr/>
+          </p:nvSpPr>
+          <p:spPr>
+            <a:xfrm>
+              <a:off x="10943908" y="1281694"/>
+              <a:ext cx="182880" cy="182880"/>
+            </a:xfrm>
+            <a:prstGeom prst="rect">
+              <a:avLst/>
+            </a:prstGeom>
+            <a:solidFill>
+              <a:srgbClr val="F7941E"/>
+            </a:solidFill>
+            <a:ln>
+              <a:noFill/>
+            </a:ln>
+          </p:spPr>
+          <p:style>
+            <a:lnRef idx="2">
+              <a:schemeClr val="accent1">
+                <a:shade val="15000"/>
+              </a:schemeClr>
+            </a:lnRef>
+            <a:fillRef idx="1">
+              <a:schemeClr val="accent1"/>
+            </a:fillRef>
+            <a:effectRef idx="0">
+              <a:schemeClr val="accent1"/>
+            </a:effectRef>
+            <a:fontRef idx="minor">
+              <a:schemeClr val="lt1"/>
+            </a:fontRef>
+          </p:style>
+          <p:txBody>
+            <a:bodyPr rtlCol="0" anchor="ctr"/>
+            <a:lstStyle/>
+            <a:p>
+              <a:pPr algn="ctr"/>
+              <a:endParaRPr lang="en-US"/>
+            </a:p>
+          </p:txBody>
+        </p:sp>
+        <p:sp>
+          <p:nvSpPr>
+            <p:cNvPr id="10" name="Rectangle 9">
+              <a:extLst>
+                <a:ext uri="{FF2B5EF4-FFF2-40B4-BE49-F238E27FC236}">
+                  <a16:creationId xmlns:a16="http://schemas.microsoft.com/office/drawing/2014/main" id="{2AB37440-1233-BC71-5B31-05C4B68B6F0E}"/>
+                </a:ext>
+              </a:extLst>
+            </p:cNvPr>
+            <p:cNvSpPr/>
+            <p:nvPr/>
+          </p:nvSpPr>
+          <p:spPr>
+            <a:xfrm>
+              <a:off x="9427528" y="2800614"/>
+              <a:ext cx="182880" cy="182880"/>
+            </a:xfrm>
+            <a:prstGeom prst="rect">
+              <a:avLst/>
+            </a:prstGeom>
+            <a:solidFill>
+              <a:srgbClr val="F7941E"/>
+            </a:solidFill>
+            <a:ln>
+              <a:noFill/>
+            </a:ln>
+          </p:spPr>
+          <p:style>
+            <a:lnRef idx="2">
+              <a:schemeClr val="accent1">
+                <a:shade val="15000"/>
+              </a:schemeClr>
+            </a:lnRef>
+            <a:fillRef idx="1">
+              <a:schemeClr val="accent1"/>
+            </a:fillRef>
+            <a:effectRef idx="0">
+              <a:schemeClr val="accent1"/>
+            </a:effectRef>
+            <a:fontRef idx="minor">
+              <a:schemeClr val="lt1"/>
+            </a:fontRef>
+          </p:style>
+          <p:txBody>
+            <a:bodyPr rtlCol="0" anchor="ctr"/>
+            <a:lstStyle/>
+            <a:p>
+              <a:pPr algn="ctr"/>
+              <a:endParaRPr lang="en-US"/>
+            </a:p>
+          </p:txBody>
+        </p:sp>
+      </p:grpSp>
     </p:spTree>
     <p:extLst>
       <p:ext uri="{BB962C8B-B14F-4D97-AF65-F5344CB8AC3E}">
@@ -12220,7 +12456,7 @@
             <a:effectLst/>
             <a:extLst>
               <a:ext uri="{C572A759-6A51-4108-AA02-DFA0A04FC94B}">
-                <ma14:wrappingTextBoxFlag xmlns:ma14="http://schemas.microsoft.com/office/mac/drawingml/2011/main" xmlns="" val="1"/>
+                <ma14:wrappingTextBoxFlag xmlns="" xmlns:ma14="http://schemas.microsoft.com/office/mac/drawingml/2011/main" val="1"/>
               </a:ext>
             </a:extLst>
           </p:spPr>
@@ -12323,7 +12559,7 @@
             <a:effectLst/>
             <a:extLst>
               <a:ext uri="{C572A759-6A51-4108-AA02-DFA0A04FC94B}">
-                <ma14:wrappingTextBoxFlag xmlns:ma14="http://schemas.microsoft.com/office/mac/drawingml/2011/main" xmlns="" val="1"/>
+                <ma14:wrappingTextBoxFlag xmlns="" xmlns:ma14="http://schemas.microsoft.com/office/mac/drawingml/2011/main" val="1"/>
               </a:ext>
             </a:extLst>
           </p:spPr>
@@ -12427,7 +12663,7 @@
             <a:effectLst/>
             <a:extLst>
               <a:ext uri="{C572A759-6A51-4108-AA02-DFA0A04FC94B}">
-                <ma14:wrappingTextBoxFlag xmlns:ma14="http://schemas.microsoft.com/office/mac/drawingml/2011/main" xmlns="" val="1"/>
+                <ma14:wrappingTextBoxFlag xmlns="" xmlns:ma14="http://schemas.microsoft.com/office/mac/drawingml/2011/main" val="1"/>
               </a:ext>
             </a:extLst>
           </p:spPr>
@@ -12530,7 +12766,7 @@
             <a:effectLst/>
             <a:extLst>
               <a:ext uri="{C572A759-6A51-4108-AA02-DFA0A04FC94B}">
-                <ma14:wrappingTextBoxFlag xmlns:ma14="http://schemas.microsoft.com/office/mac/drawingml/2011/main" xmlns="" val="1"/>
+                <ma14:wrappingTextBoxFlag xmlns="" xmlns:ma14="http://schemas.microsoft.com/office/mac/drawingml/2011/main" val="1"/>
               </a:ext>
             </a:extLst>
           </p:spPr>
@@ -12633,7 +12869,7 @@
             <a:effectLst/>
             <a:extLst>
               <a:ext uri="{C572A759-6A51-4108-AA02-DFA0A04FC94B}">
-                <ma14:wrappingTextBoxFlag xmlns:ma14="http://schemas.microsoft.com/office/mac/drawingml/2011/main" xmlns="" val="1"/>
+                <ma14:wrappingTextBoxFlag xmlns="" xmlns:ma14="http://schemas.microsoft.com/office/mac/drawingml/2011/main" val="1"/>
               </a:ext>
             </a:extLst>
           </p:spPr>
@@ -12741,7 +12977,7 @@
             <a:effectLst/>
             <a:extLst>
               <a:ext uri="{C572A759-6A51-4108-AA02-DFA0A04FC94B}">
-                <ma14:wrappingTextBoxFlag xmlns:ma14="http://schemas.microsoft.com/office/mac/drawingml/2011/main" xmlns="" val="1"/>
+                <ma14:wrappingTextBoxFlag xmlns="" xmlns:ma14="http://schemas.microsoft.com/office/mac/drawingml/2011/main" val="1"/>
               </a:ext>
             </a:extLst>
           </p:spPr>
@@ -12844,7 +13080,7 @@
             <a:effectLst/>
             <a:extLst>
               <a:ext uri="{C572A759-6A51-4108-AA02-DFA0A04FC94B}">
-                <ma14:wrappingTextBoxFlag xmlns:ma14="http://schemas.microsoft.com/office/mac/drawingml/2011/main" xmlns="" val="1"/>
+                <ma14:wrappingTextBoxFlag xmlns="" xmlns:ma14="http://schemas.microsoft.com/office/mac/drawingml/2011/main" val="1"/>
               </a:ext>
             </a:extLst>
           </p:spPr>
@@ -12947,7 +13183,7 @@
             <a:effectLst/>
             <a:extLst>
               <a:ext uri="{C572A759-6A51-4108-AA02-DFA0A04FC94B}">
-                <ma14:wrappingTextBoxFlag xmlns:ma14="http://schemas.microsoft.com/office/mac/drawingml/2011/main" xmlns="" val="1"/>
+                <ma14:wrappingTextBoxFlag xmlns="" xmlns:ma14="http://schemas.microsoft.com/office/mac/drawingml/2011/main" val="1"/>
               </a:ext>
             </a:extLst>
           </p:spPr>
@@ -13061,7 +13297,7 @@
             <a:effectLst/>
             <a:extLst>
               <a:ext uri="{C572A759-6A51-4108-AA02-DFA0A04FC94B}">
-                <ma14:wrappingTextBoxFlag xmlns:ma14="http://schemas.microsoft.com/office/mac/drawingml/2011/main" xmlns="" val="1"/>
+                <ma14:wrappingTextBoxFlag xmlns="" xmlns:ma14="http://schemas.microsoft.com/office/mac/drawingml/2011/main" val="1"/>
               </a:ext>
             </a:extLst>
           </p:spPr>
@@ -13274,7 +13510,7 @@
               <a:effectLst/>
               <a:extLst>
                 <a:ext uri="{C572A759-6A51-4108-AA02-DFA0A04FC94B}">
-                  <ma14:wrappingTextBoxFlag xmlns:ma14="http://schemas.microsoft.com/office/mac/drawingml/2011/main" xmlns="" val="1"/>
+                  <ma14:wrappingTextBoxFlag xmlns="" xmlns:ma14="http://schemas.microsoft.com/office/mac/drawingml/2011/main" val="1"/>
                 </a:ext>
               </a:extLst>
             </p:spPr>
@@ -13378,7 +13614,7 @@
             <a:effectLst/>
             <a:extLst>
               <a:ext uri="{C572A759-6A51-4108-AA02-DFA0A04FC94B}">
-                <ma14:wrappingTextBoxFlag xmlns:ma14="http://schemas.microsoft.com/office/mac/drawingml/2011/main" xmlns="" val="1"/>
+                <ma14:wrappingTextBoxFlag xmlns="" xmlns:ma14="http://schemas.microsoft.com/office/mac/drawingml/2011/main" val="1"/>
               </a:ext>
             </a:extLst>
           </p:spPr>
@@ -13481,7 +13717,7 @@
             <a:effectLst/>
             <a:extLst>
               <a:ext uri="{C572A759-6A51-4108-AA02-DFA0A04FC94B}">
-                <ma14:wrappingTextBoxFlag xmlns:ma14="http://schemas.microsoft.com/office/mac/drawingml/2011/main" xmlns="" val="1"/>
+                <ma14:wrappingTextBoxFlag xmlns="" xmlns:ma14="http://schemas.microsoft.com/office/mac/drawingml/2011/main" val="1"/>
               </a:ext>
             </a:extLst>
           </p:spPr>
@@ -13638,7 +13874,7 @@
               <a:effectLst/>
               <a:extLst>
                 <a:ext uri="{C572A759-6A51-4108-AA02-DFA0A04FC94B}">
-                  <ma14:wrappingTextBoxFlag xmlns:ma14="http://schemas.microsoft.com/office/mac/drawingml/2011/main" xmlns="" val="1"/>
+                  <ma14:wrappingTextBoxFlag xmlns="" xmlns:ma14="http://schemas.microsoft.com/office/mac/drawingml/2011/main" val="1"/>
                 </a:ext>
               </a:extLst>
             </p:spPr>
@@ -13796,7 +14032,7 @@
               <a:effectLst/>
               <a:extLst>
                 <a:ext uri="{C572A759-6A51-4108-AA02-DFA0A04FC94B}">
-                  <ma14:wrappingTextBoxFlag xmlns:ma14="http://schemas.microsoft.com/office/mac/drawingml/2011/main" xmlns="" val="1"/>
+                  <ma14:wrappingTextBoxFlag xmlns="" xmlns:ma14="http://schemas.microsoft.com/office/mac/drawingml/2011/main" val="1"/>
                 </a:ext>
               </a:extLst>
             </p:spPr>
@@ -14202,7 +14438,7 @@
               <a:effectLst/>
               <a:extLst>
                 <a:ext uri="{C572A759-6A51-4108-AA02-DFA0A04FC94B}">
-                  <ma14:wrappingTextBoxFlag xmlns:ma14="http://schemas.microsoft.com/office/mac/drawingml/2011/main" xmlns="" val="1"/>
+                  <ma14:wrappingTextBoxFlag xmlns="" xmlns:ma14="http://schemas.microsoft.com/office/mac/drawingml/2011/main" val="1"/>
                 </a:ext>
               </a:extLst>
             </p:spPr>
@@ -14363,7 +14599,7 @@
               <a:effectLst/>
               <a:extLst>
                 <a:ext uri="{C572A759-6A51-4108-AA02-DFA0A04FC94B}">
-                  <ma14:wrappingTextBoxFlag xmlns:ma14="http://schemas.microsoft.com/office/mac/drawingml/2011/main" xmlns="" val="1"/>
+                  <ma14:wrappingTextBoxFlag xmlns="" xmlns:ma14="http://schemas.microsoft.com/office/mac/drawingml/2011/main" val="1"/>
                 </a:ext>
               </a:extLst>
             </p:spPr>
@@ -14760,7 +14996,7 @@
               <a:effectLst/>
               <a:extLst>
                 <a:ext uri="{C572A759-6A51-4108-AA02-DFA0A04FC94B}">
-                  <ma14:wrappingTextBoxFlag xmlns:ma14="http://schemas.microsoft.com/office/mac/drawingml/2011/main" xmlns="" val="1"/>
+                  <ma14:wrappingTextBoxFlag xmlns="" xmlns:ma14="http://schemas.microsoft.com/office/mac/drawingml/2011/main" val="1"/>
                 </a:ext>
               </a:extLst>
             </p:spPr>
@@ -14978,7 +15214,7 @@
               <a:effectLst/>
               <a:extLst>
                 <a:ext uri="{C572A759-6A51-4108-AA02-DFA0A04FC94B}">
-                  <ma14:wrappingTextBoxFlag xmlns:ma14="http://schemas.microsoft.com/office/mac/drawingml/2011/main" xmlns="" val="1"/>
+                  <ma14:wrappingTextBoxFlag xmlns="" xmlns:ma14="http://schemas.microsoft.com/office/mac/drawingml/2011/main" val="1"/>
                 </a:ext>
               </a:extLst>
             </p:spPr>
@@ -15146,7 +15382,7 @@
               <a:effectLst/>
               <a:extLst>
                 <a:ext uri="{C572A759-6A51-4108-AA02-DFA0A04FC94B}">
-                  <ma14:wrappingTextBoxFlag xmlns:ma14="http://schemas.microsoft.com/office/mac/drawingml/2011/main" xmlns="" val="1"/>
+                  <ma14:wrappingTextBoxFlag xmlns="" xmlns:ma14="http://schemas.microsoft.com/office/mac/drawingml/2011/main" val="1"/>
                 </a:ext>
               </a:extLst>
             </p:spPr>
@@ -15766,7 +16002,7 @@
               <a:effectLst/>
               <a:extLst>
                 <a:ext uri="{C572A759-6A51-4108-AA02-DFA0A04FC94B}">
-                  <ma14:wrappingTextBoxFlag xmlns:ma14="http://schemas.microsoft.com/office/mac/drawingml/2011/main" xmlns="" val="1"/>
+                  <ma14:wrappingTextBoxFlag xmlns="" xmlns:ma14="http://schemas.microsoft.com/office/mac/drawingml/2011/main" val="1"/>
                 </a:ext>
               </a:extLst>
             </p:spPr>
@@ -15819,7 +16055,7 @@
           </a:ln>
           <a:extLst>
             <a:ext uri="{C572A759-6A51-4108-AA02-DFA0A04FC94B}">
-              <ma14:wrappingTextBoxFlag xmlns:ma14="http://schemas.microsoft.com/office/mac/drawingml/2011/main" xmlns="" val="1"/>
+              <ma14:wrappingTextBoxFlag xmlns="" xmlns:ma14="http://schemas.microsoft.com/office/mac/drawingml/2011/main" val="1"/>
             </a:ext>
           </a:extLst>
         </p:spPr>
@@ -17194,7 +17430,7 @@
           </a:ln>
           <a:extLst>
             <a:ext uri="{C572A759-6A51-4108-AA02-DFA0A04FC94B}">
-              <ma14:wrappingTextBoxFlag xmlns:ma14="http://schemas.microsoft.com/office/mac/drawingml/2011/main" xmlns="" val="1"/>
+              <ma14:wrappingTextBoxFlag xmlns="" xmlns:ma14="http://schemas.microsoft.com/office/mac/drawingml/2011/main" val="1"/>
             </a:ext>
           </a:extLst>
         </p:spPr>
@@ -17567,7 +17803,7 @@
           </a:ln>
           <a:extLst>
             <a:ext uri="{C572A759-6A51-4108-AA02-DFA0A04FC94B}">
-              <ma14:wrappingTextBoxFlag xmlns:ma14="http://schemas.microsoft.com/office/mac/drawingml/2011/main" xmlns="" val="1"/>
+              <ma14:wrappingTextBoxFlag xmlns="" xmlns:ma14="http://schemas.microsoft.com/office/mac/drawingml/2011/main" val="1"/>
             </a:ext>
           </a:extLst>
         </p:spPr>
@@ -17627,7 +17863,7 @@
           </a:ln>
           <a:extLst>
             <a:ext uri="{C572A759-6A51-4108-AA02-DFA0A04FC94B}">
-              <ma14:wrappingTextBoxFlag xmlns:ma14="http://schemas.microsoft.com/office/mac/drawingml/2011/main" xmlns="" val="1"/>
+              <ma14:wrappingTextBoxFlag xmlns="" xmlns:ma14="http://schemas.microsoft.com/office/mac/drawingml/2011/main" val="1"/>
             </a:ext>
           </a:extLst>
         </p:spPr>
@@ -26260,7 +26496,7 @@
           </a:ln>
           <a:extLst>
             <a:ext uri="{C572A759-6A51-4108-AA02-DFA0A04FC94B}">
-              <ma14:wrappingTextBoxFlag xmlns:ma14="http://schemas.microsoft.com/office/mac/drawingml/2011/main" xmlns:a14="http://schemas.microsoft.com/office/drawing/2010/main" xmlns:m="http://schemas.openxmlformats.org/officeDocument/2006/math" xmlns="" xmlns:lc="http://schemas.openxmlformats.org/drawingml/2006/lockedCanvas" val="1"/>
+              <ma14:wrappingTextBoxFlag xmlns:lc="http://schemas.openxmlformats.org/drawingml/2006/lockedCanvas" xmlns="" xmlns:m="http://schemas.openxmlformats.org/officeDocument/2006/math" xmlns:a14="http://schemas.microsoft.com/office/drawing/2010/main" xmlns:ma14="http://schemas.microsoft.com/office/mac/drawingml/2011/main" val="1"/>
             </a:ext>
           </a:extLst>
         </p:spPr>
@@ -26628,7 +26864,7 @@
           </a:ln>
           <a:extLst>
             <a:ext uri="{C572A759-6A51-4108-AA02-DFA0A04FC94B}">
-              <ma14:wrappingTextBoxFlag xmlns:ma14="http://schemas.microsoft.com/office/mac/drawingml/2011/main" xmlns:a14="http://schemas.microsoft.com/office/drawing/2010/main" xmlns:m="http://schemas.openxmlformats.org/officeDocument/2006/math" xmlns="" xmlns:lc="http://schemas.openxmlformats.org/drawingml/2006/lockedCanvas" val="1"/>
+              <ma14:wrappingTextBoxFlag xmlns:lc="http://schemas.openxmlformats.org/drawingml/2006/lockedCanvas" xmlns="" xmlns:m="http://schemas.openxmlformats.org/officeDocument/2006/math" xmlns:a14="http://schemas.microsoft.com/office/drawing/2010/main" xmlns:ma14="http://schemas.microsoft.com/office/mac/drawingml/2011/main" val="1"/>
             </a:ext>
           </a:extLst>
         </p:spPr>
@@ -26995,7 +27231,7 @@
           </a:ln>
           <a:extLst>
             <a:ext uri="{C572A759-6A51-4108-AA02-DFA0A04FC94B}">
-              <ma14:wrappingTextBoxFlag xmlns:ma14="http://schemas.microsoft.com/office/mac/drawingml/2011/main" xmlns:a14="http://schemas.microsoft.com/office/drawing/2010/main" xmlns:m="http://schemas.openxmlformats.org/officeDocument/2006/math" xmlns="" xmlns:lc="http://schemas.openxmlformats.org/drawingml/2006/lockedCanvas" val="1"/>
+              <ma14:wrappingTextBoxFlag xmlns:lc="http://schemas.openxmlformats.org/drawingml/2006/lockedCanvas" xmlns="" xmlns:m="http://schemas.openxmlformats.org/officeDocument/2006/math" xmlns:a14="http://schemas.microsoft.com/office/drawing/2010/main" xmlns:ma14="http://schemas.microsoft.com/office/mac/drawingml/2011/main" val="1"/>
             </a:ext>
           </a:extLst>
         </p:spPr>
@@ -27352,7 +27588,7 @@
           </a:ln>
           <a:extLst>
             <a:ext uri="{C572A759-6A51-4108-AA02-DFA0A04FC94B}">
-              <ma14:wrappingTextBoxFlag xmlns:ma14="http://schemas.microsoft.com/office/mac/drawingml/2011/main" xmlns:a14="http://schemas.microsoft.com/office/drawing/2010/main" xmlns:m="http://schemas.openxmlformats.org/officeDocument/2006/math" xmlns="" xmlns:lc="http://schemas.openxmlformats.org/drawingml/2006/lockedCanvas" val="1"/>
+              <ma14:wrappingTextBoxFlag xmlns:lc="http://schemas.openxmlformats.org/drawingml/2006/lockedCanvas" xmlns="" xmlns:m="http://schemas.openxmlformats.org/officeDocument/2006/math" xmlns:a14="http://schemas.microsoft.com/office/drawing/2010/main" xmlns:ma14="http://schemas.microsoft.com/office/mac/drawingml/2011/main" val="1"/>
             </a:ext>
           </a:extLst>
         </p:spPr>
@@ -27701,7 +27937,7 @@
           </a:ln>
           <a:extLst>
             <a:ext uri="{C572A759-6A51-4108-AA02-DFA0A04FC94B}">
-              <ma14:wrappingTextBoxFlag xmlns:ma14="http://schemas.microsoft.com/office/mac/drawingml/2011/main" xmlns:a14="http://schemas.microsoft.com/office/drawing/2010/main" xmlns:m="http://schemas.openxmlformats.org/officeDocument/2006/math" xmlns="" xmlns:lc="http://schemas.openxmlformats.org/drawingml/2006/lockedCanvas" val="1"/>
+              <ma14:wrappingTextBoxFlag xmlns:lc="http://schemas.openxmlformats.org/drawingml/2006/lockedCanvas" xmlns="" xmlns:m="http://schemas.openxmlformats.org/officeDocument/2006/math" xmlns:a14="http://schemas.microsoft.com/office/drawing/2010/main" xmlns:ma14="http://schemas.microsoft.com/office/mac/drawingml/2011/main" val="1"/>
             </a:ext>
           </a:extLst>
         </p:spPr>
@@ -28058,7 +28294,7 @@
           </a:ln>
           <a:extLst>
             <a:ext uri="{C572A759-6A51-4108-AA02-DFA0A04FC94B}">
-              <ma14:wrappingTextBoxFlag xmlns:ma14="http://schemas.microsoft.com/office/mac/drawingml/2011/main" xmlns:a14="http://schemas.microsoft.com/office/drawing/2010/main" xmlns:m="http://schemas.openxmlformats.org/officeDocument/2006/math" xmlns="" xmlns:lc="http://schemas.openxmlformats.org/drawingml/2006/lockedCanvas" val="1"/>
+              <ma14:wrappingTextBoxFlag xmlns:lc="http://schemas.openxmlformats.org/drawingml/2006/lockedCanvas" xmlns="" xmlns:m="http://schemas.openxmlformats.org/officeDocument/2006/math" xmlns:a14="http://schemas.microsoft.com/office/drawing/2010/main" xmlns:ma14="http://schemas.microsoft.com/office/mac/drawingml/2011/main" val="1"/>
             </a:ext>
           </a:extLst>
         </p:spPr>
@@ -28407,7 +28643,7 @@
           </a:ln>
           <a:extLst>
             <a:ext uri="{C572A759-6A51-4108-AA02-DFA0A04FC94B}">
-              <ma14:wrappingTextBoxFlag xmlns:ma14="http://schemas.microsoft.com/office/mac/drawingml/2011/main" xmlns:a14="http://schemas.microsoft.com/office/drawing/2010/main" xmlns:m="http://schemas.openxmlformats.org/officeDocument/2006/math" xmlns="" xmlns:lc="http://schemas.openxmlformats.org/drawingml/2006/lockedCanvas" val="1"/>
+              <ma14:wrappingTextBoxFlag xmlns:lc="http://schemas.openxmlformats.org/drawingml/2006/lockedCanvas" xmlns="" xmlns:m="http://schemas.openxmlformats.org/officeDocument/2006/math" xmlns:a14="http://schemas.microsoft.com/office/drawing/2010/main" xmlns:ma14="http://schemas.microsoft.com/office/mac/drawingml/2011/main" val="1"/>
             </a:ext>
           </a:extLst>
         </p:spPr>
@@ -28771,7 +29007,7 @@
           </a:ln>
           <a:extLst>
             <a:ext uri="{C572A759-6A51-4108-AA02-DFA0A04FC94B}">
-              <ma14:wrappingTextBoxFlag xmlns:ma14="http://schemas.microsoft.com/office/mac/drawingml/2011/main" xmlns:a14="http://schemas.microsoft.com/office/drawing/2010/main" xmlns:m="http://schemas.openxmlformats.org/officeDocument/2006/math" xmlns="" xmlns:lc="http://schemas.openxmlformats.org/drawingml/2006/lockedCanvas" val="1"/>
+              <ma14:wrappingTextBoxFlag xmlns:lc="http://schemas.openxmlformats.org/drawingml/2006/lockedCanvas" xmlns="" xmlns:m="http://schemas.openxmlformats.org/officeDocument/2006/math" xmlns:a14="http://schemas.microsoft.com/office/drawing/2010/main" xmlns:ma14="http://schemas.microsoft.com/office/mac/drawingml/2011/main" val="1"/>
             </a:ext>
           </a:extLst>
         </p:spPr>
@@ -29110,7 +29346,7 @@
           </a:ln>
           <a:extLst>
             <a:ext uri="{C572A759-6A51-4108-AA02-DFA0A04FC94B}">
-              <ma14:wrappingTextBoxFlag xmlns:ma14="http://schemas.microsoft.com/office/mac/drawingml/2011/main" xmlns:a14="http://schemas.microsoft.com/office/drawing/2010/main" xmlns:m="http://schemas.openxmlformats.org/officeDocument/2006/math" xmlns="" xmlns:lc="http://schemas.openxmlformats.org/drawingml/2006/lockedCanvas" val="1"/>
+              <ma14:wrappingTextBoxFlag xmlns:lc="http://schemas.openxmlformats.org/drawingml/2006/lockedCanvas" xmlns="" xmlns:m="http://schemas.openxmlformats.org/officeDocument/2006/math" xmlns:a14="http://schemas.microsoft.com/office/drawing/2010/main" xmlns:ma14="http://schemas.microsoft.com/office/mac/drawingml/2011/main" val="1"/>
             </a:ext>
           </a:extLst>
         </p:spPr>
@@ -29449,7 +29685,7 @@
           </a:ln>
           <a:extLst>
             <a:ext uri="{C572A759-6A51-4108-AA02-DFA0A04FC94B}">
-              <ma14:wrappingTextBoxFlag xmlns:ma14="http://schemas.microsoft.com/office/mac/drawingml/2011/main" xmlns:a14="http://schemas.microsoft.com/office/drawing/2010/main" xmlns:m="http://schemas.openxmlformats.org/officeDocument/2006/math" xmlns="" xmlns:lc="http://schemas.openxmlformats.org/drawingml/2006/lockedCanvas" val="1"/>
+              <ma14:wrappingTextBoxFlag xmlns:lc="http://schemas.openxmlformats.org/drawingml/2006/lockedCanvas" xmlns="" xmlns:m="http://schemas.openxmlformats.org/officeDocument/2006/math" xmlns:a14="http://schemas.microsoft.com/office/drawing/2010/main" xmlns:ma14="http://schemas.microsoft.com/office/mac/drawingml/2011/main" val="1"/>
             </a:ext>
           </a:extLst>
         </p:spPr>
@@ -29788,7 +30024,7 @@
           </a:ln>
           <a:extLst>
             <a:ext uri="{C572A759-6A51-4108-AA02-DFA0A04FC94B}">
-              <ma14:wrappingTextBoxFlag xmlns:ma14="http://schemas.microsoft.com/office/mac/drawingml/2011/main" xmlns:a14="http://schemas.microsoft.com/office/drawing/2010/main" xmlns:m="http://schemas.openxmlformats.org/officeDocument/2006/math" xmlns="" xmlns:lc="http://schemas.openxmlformats.org/drawingml/2006/lockedCanvas" val="1"/>
+              <ma14:wrappingTextBoxFlag xmlns:lc="http://schemas.openxmlformats.org/drawingml/2006/lockedCanvas" xmlns="" xmlns:m="http://schemas.openxmlformats.org/officeDocument/2006/math" xmlns:a14="http://schemas.microsoft.com/office/drawing/2010/main" xmlns:ma14="http://schemas.microsoft.com/office/mac/drawingml/2011/main" val="1"/>
             </a:ext>
           </a:extLst>
         </p:spPr>
@@ -30157,7 +30393,7 @@
           </a:ln>
           <a:extLst>
             <a:ext uri="{C572A759-6A51-4108-AA02-DFA0A04FC94B}">
-              <ma14:wrappingTextBoxFlag xmlns:ma14="http://schemas.microsoft.com/office/mac/drawingml/2011/main" xmlns:a14="http://schemas.microsoft.com/office/drawing/2010/main" xmlns:m="http://schemas.openxmlformats.org/officeDocument/2006/math" xmlns="" xmlns:lc="http://schemas.openxmlformats.org/drawingml/2006/lockedCanvas" val="1"/>
+              <ma14:wrappingTextBoxFlag xmlns:lc="http://schemas.openxmlformats.org/drawingml/2006/lockedCanvas" xmlns="" xmlns:m="http://schemas.openxmlformats.org/officeDocument/2006/math" xmlns:a14="http://schemas.microsoft.com/office/drawing/2010/main" xmlns:ma14="http://schemas.microsoft.com/office/mac/drawingml/2011/main" val="1"/>
             </a:ext>
           </a:extLst>
         </p:spPr>
@@ -30514,7 +30750,7 @@
           </a:ln>
           <a:extLst>
             <a:ext uri="{C572A759-6A51-4108-AA02-DFA0A04FC94B}">
-              <ma14:wrappingTextBoxFlag xmlns:ma14="http://schemas.microsoft.com/office/mac/drawingml/2011/main" xmlns:a14="http://schemas.microsoft.com/office/drawing/2010/main" xmlns:m="http://schemas.openxmlformats.org/officeDocument/2006/math" xmlns="" xmlns:lc="http://schemas.openxmlformats.org/drawingml/2006/lockedCanvas" val="1"/>
+              <ma14:wrappingTextBoxFlag xmlns:lc="http://schemas.openxmlformats.org/drawingml/2006/lockedCanvas" xmlns="" xmlns:m="http://schemas.openxmlformats.org/officeDocument/2006/math" xmlns:a14="http://schemas.microsoft.com/office/drawing/2010/main" xmlns:ma14="http://schemas.microsoft.com/office/mac/drawingml/2011/main" val="1"/>
             </a:ext>
           </a:extLst>
         </p:spPr>
@@ -30853,7 +31089,7 @@
           </a:ln>
           <a:extLst>
             <a:ext uri="{C572A759-6A51-4108-AA02-DFA0A04FC94B}">
-              <ma14:wrappingTextBoxFlag xmlns:ma14="http://schemas.microsoft.com/office/mac/drawingml/2011/main" xmlns:a14="http://schemas.microsoft.com/office/drawing/2010/main" xmlns:m="http://schemas.openxmlformats.org/officeDocument/2006/math" xmlns="" xmlns:lc="http://schemas.openxmlformats.org/drawingml/2006/lockedCanvas" val="1"/>
+              <ma14:wrappingTextBoxFlag xmlns:lc="http://schemas.openxmlformats.org/drawingml/2006/lockedCanvas" xmlns="" xmlns:m="http://schemas.openxmlformats.org/officeDocument/2006/math" xmlns:a14="http://schemas.microsoft.com/office/drawing/2010/main" xmlns:ma14="http://schemas.microsoft.com/office/mac/drawingml/2011/main" val="1"/>
             </a:ext>
           </a:extLst>
         </p:spPr>
@@ -31192,7 +31428,7 @@
           </a:ln>
           <a:extLst>
             <a:ext uri="{C572A759-6A51-4108-AA02-DFA0A04FC94B}">
-              <ma14:wrappingTextBoxFlag xmlns:ma14="http://schemas.microsoft.com/office/mac/drawingml/2011/main" xmlns:a14="http://schemas.microsoft.com/office/drawing/2010/main" xmlns:m="http://schemas.openxmlformats.org/officeDocument/2006/math" xmlns="" xmlns:lc="http://schemas.openxmlformats.org/drawingml/2006/lockedCanvas" val="1"/>
+              <ma14:wrappingTextBoxFlag xmlns:lc="http://schemas.openxmlformats.org/drawingml/2006/lockedCanvas" xmlns="" xmlns:m="http://schemas.openxmlformats.org/officeDocument/2006/math" xmlns:a14="http://schemas.microsoft.com/office/drawing/2010/main" xmlns:ma14="http://schemas.microsoft.com/office/mac/drawingml/2011/main" val="1"/>
             </a:ext>
           </a:extLst>
         </p:spPr>
@@ -31534,7 +31770,7 @@
           </a:ln>
           <a:extLst>
             <a:ext uri="{C572A759-6A51-4108-AA02-DFA0A04FC94B}">
-              <ma14:wrappingTextBoxFlag xmlns:ma14="http://schemas.microsoft.com/office/mac/drawingml/2011/main" xmlns:a14="http://schemas.microsoft.com/office/drawing/2010/main" xmlns:m="http://schemas.openxmlformats.org/officeDocument/2006/math" xmlns="" xmlns:lc="http://schemas.openxmlformats.org/drawingml/2006/lockedCanvas" val="1"/>
+              <ma14:wrappingTextBoxFlag xmlns:lc="http://schemas.openxmlformats.org/drawingml/2006/lockedCanvas" xmlns="" xmlns:m="http://schemas.openxmlformats.org/officeDocument/2006/math" xmlns:a14="http://schemas.microsoft.com/office/drawing/2010/main" xmlns:ma14="http://schemas.microsoft.com/office/mac/drawingml/2011/main" val="1"/>
             </a:ext>
           </a:extLst>
         </p:spPr>
@@ -32575,7 +32811,7 @@
           </a:ln>
           <a:extLst>
             <a:ext uri="{C572A759-6A51-4108-AA02-DFA0A04FC94B}">
-              <ma14:wrappingTextBoxFlag xmlns:ma14="http://schemas.microsoft.com/office/mac/drawingml/2011/main" xmlns:a14="http://schemas.microsoft.com/office/drawing/2010/main" xmlns:m="http://schemas.openxmlformats.org/officeDocument/2006/math" xmlns="" xmlns:lc="http://schemas.openxmlformats.org/drawingml/2006/lockedCanvas" val="1"/>
+              <ma14:wrappingTextBoxFlag xmlns:lc="http://schemas.openxmlformats.org/drawingml/2006/lockedCanvas" xmlns="" xmlns:m="http://schemas.openxmlformats.org/officeDocument/2006/math" xmlns:a14="http://schemas.microsoft.com/office/drawing/2010/main" xmlns:ma14="http://schemas.microsoft.com/office/mac/drawingml/2011/main" val="1"/>
             </a:ext>
           </a:extLst>
         </p:spPr>
@@ -32932,7 +33168,7 @@
           </a:ln>
           <a:extLst>
             <a:ext uri="{C572A759-6A51-4108-AA02-DFA0A04FC94B}">
-              <ma14:wrappingTextBoxFlag xmlns:ma14="http://schemas.microsoft.com/office/mac/drawingml/2011/main" xmlns:a14="http://schemas.microsoft.com/office/drawing/2010/main" xmlns:m="http://schemas.openxmlformats.org/officeDocument/2006/math" xmlns="" xmlns:lc="http://schemas.openxmlformats.org/drawingml/2006/lockedCanvas" val="1"/>
+              <ma14:wrappingTextBoxFlag xmlns:lc="http://schemas.openxmlformats.org/drawingml/2006/lockedCanvas" xmlns="" xmlns:m="http://schemas.openxmlformats.org/officeDocument/2006/math" xmlns:a14="http://schemas.microsoft.com/office/drawing/2010/main" xmlns:ma14="http://schemas.microsoft.com/office/mac/drawingml/2011/main" val="1"/>
             </a:ext>
           </a:extLst>
         </p:spPr>
@@ -33486,7 +33722,7 @@
               <a:effectLst/>
               <a:extLst>
                 <a:ext uri="{C572A759-6A51-4108-AA02-DFA0A04FC94B}">
-                  <ma14:wrappingTextBoxFlag xmlns:ma14="http://schemas.microsoft.com/office/mac/drawingml/2011/main" xmlns="" val="1"/>
+                  <ma14:wrappingTextBoxFlag xmlns="" xmlns:ma14="http://schemas.microsoft.com/office/mac/drawingml/2011/main" val="1"/>
                 </a:ext>
               </a:extLst>
             </p:spPr>
@@ -33537,7 +33773,7 @@
             <a:effectLst/>
             <a:extLst>
               <a:ext uri="{C572A759-6A51-4108-AA02-DFA0A04FC94B}">
-                <ma14:wrappingTextBoxFlag xmlns:ma14="http://schemas.microsoft.com/office/mac/drawingml/2011/main" xmlns="" val="1"/>
+                <ma14:wrappingTextBoxFlag xmlns="" xmlns:ma14="http://schemas.microsoft.com/office/mac/drawingml/2011/main" val="1"/>
               </a:ext>
             </a:extLst>
           </p:spPr>
@@ -33760,7 +33996,7 @@
               <a:effectLst/>
               <a:extLst>
                 <a:ext uri="{C572A759-6A51-4108-AA02-DFA0A04FC94B}">
-                  <ma14:wrappingTextBoxFlag xmlns:ma14="http://schemas.microsoft.com/office/mac/drawingml/2011/main" xmlns="" val="1"/>
+                  <ma14:wrappingTextBoxFlag xmlns="" xmlns:ma14="http://schemas.microsoft.com/office/mac/drawingml/2011/main" val="1"/>
                 </a:ext>
               </a:extLst>
             </p:spPr>
@@ -33811,7 +34047,7 @@
             <a:effectLst/>
             <a:extLst>
               <a:ext uri="{C572A759-6A51-4108-AA02-DFA0A04FC94B}">
-                <ma14:wrappingTextBoxFlag xmlns:ma14="http://schemas.microsoft.com/office/mac/drawingml/2011/main" xmlns="" val="1"/>
+                <ma14:wrappingTextBoxFlag xmlns="" xmlns:ma14="http://schemas.microsoft.com/office/mac/drawingml/2011/main" val="1"/>
               </a:ext>
             </a:extLst>
           </p:spPr>
@@ -33989,7 +34225,7 @@
               <a:effectLst/>
               <a:extLst>
                 <a:ext uri="{C572A759-6A51-4108-AA02-DFA0A04FC94B}">
-                  <ma14:wrappingTextBoxFlag xmlns:ma14="http://schemas.microsoft.com/office/mac/drawingml/2011/main" xmlns="" val="1"/>
+                  <ma14:wrappingTextBoxFlag xmlns="" xmlns:ma14="http://schemas.microsoft.com/office/mac/drawingml/2011/main" val="1"/>
                 </a:ext>
               </a:extLst>
             </p:spPr>
@@ -34040,7 +34276,7 @@
             <a:effectLst/>
             <a:extLst>
               <a:ext uri="{C572A759-6A51-4108-AA02-DFA0A04FC94B}">
-                <ma14:wrappingTextBoxFlag xmlns:ma14="http://schemas.microsoft.com/office/mac/drawingml/2011/main" xmlns="" val="1"/>
+                <ma14:wrappingTextBoxFlag xmlns="" xmlns:ma14="http://schemas.microsoft.com/office/mac/drawingml/2011/main" val="1"/>
               </a:ext>
             </a:extLst>
           </p:spPr>
@@ -34319,7 +34555,7 @@
               <a:effectLst/>
               <a:extLst>
                 <a:ext uri="{C572A759-6A51-4108-AA02-DFA0A04FC94B}">
-                  <ma14:wrappingTextBoxFlag xmlns:ma14="http://schemas.microsoft.com/office/mac/drawingml/2011/main" xmlns="" val="1"/>
+                  <ma14:wrappingTextBoxFlag xmlns="" xmlns:ma14="http://schemas.microsoft.com/office/mac/drawingml/2011/main" val="1"/>
                 </a:ext>
               </a:extLst>
             </p:spPr>
@@ -34370,7 +34606,7 @@
             <a:effectLst/>
             <a:extLst>
               <a:ext uri="{C572A759-6A51-4108-AA02-DFA0A04FC94B}">
-                <ma14:wrappingTextBoxFlag xmlns:ma14="http://schemas.microsoft.com/office/mac/drawingml/2011/main" xmlns="" val="1"/>
+                <ma14:wrappingTextBoxFlag xmlns="" xmlns:ma14="http://schemas.microsoft.com/office/mac/drawingml/2011/main" val="1"/>
               </a:ext>
             </a:extLst>
           </p:spPr>
@@ -34588,7 +34824,7 @@
               <a:effectLst/>
               <a:extLst>
                 <a:ext uri="{C572A759-6A51-4108-AA02-DFA0A04FC94B}">
-                  <ma14:wrappingTextBoxFlag xmlns:ma14="http://schemas.microsoft.com/office/mac/drawingml/2011/main" xmlns="" val="1"/>
+                  <ma14:wrappingTextBoxFlag xmlns="" xmlns:ma14="http://schemas.microsoft.com/office/mac/drawingml/2011/main" val="1"/>
                 </a:ext>
               </a:extLst>
             </p:spPr>
@@ -34642,7 +34878,7 @@
             <a:effectLst/>
             <a:extLst>
               <a:ext uri="{C572A759-6A51-4108-AA02-DFA0A04FC94B}">
-                <ma14:wrappingTextBoxFlag xmlns:ma14="http://schemas.microsoft.com/office/mac/drawingml/2011/main" xmlns="" val="1"/>
+                <ma14:wrappingTextBoxFlag xmlns="" xmlns:ma14="http://schemas.microsoft.com/office/mac/drawingml/2011/main" val="1"/>
               </a:ext>
             </a:extLst>
           </p:spPr>
@@ -34847,7 +35083,7 @@
               <a:effectLst/>
               <a:extLst>
                 <a:ext uri="{C572A759-6A51-4108-AA02-DFA0A04FC94B}">
-                  <ma14:wrappingTextBoxFlag xmlns:ma14="http://schemas.microsoft.com/office/mac/drawingml/2011/main" xmlns="" val="1"/>
+                  <ma14:wrappingTextBoxFlag xmlns="" xmlns:ma14="http://schemas.microsoft.com/office/mac/drawingml/2011/main" val="1"/>
                 </a:ext>
               </a:extLst>
             </p:spPr>
@@ -34901,7 +35137,7 @@
             <a:effectLst/>
             <a:extLst>
               <a:ext uri="{C572A759-6A51-4108-AA02-DFA0A04FC94B}">
-                <ma14:wrappingTextBoxFlag xmlns:ma14="http://schemas.microsoft.com/office/mac/drawingml/2011/main" xmlns="" val="1"/>
+                <ma14:wrappingTextBoxFlag xmlns="" xmlns:ma14="http://schemas.microsoft.com/office/mac/drawingml/2011/main" val="1"/>
               </a:ext>
             </a:extLst>
           </p:spPr>
@@ -35143,7 +35379,7 @@
               <a:effectLst/>
               <a:extLst>
                 <a:ext uri="{C572A759-6A51-4108-AA02-DFA0A04FC94B}">
-                  <ma14:wrappingTextBoxFlag xmlns:ma14="http://schemas.microsoft.com/office/mac/drawingml/2011/main" xmlns="" val="1"/>
+                  <ma14:wrappingTextBoxFlag xmlns="" xmlns:ma14="http://schemas.microsoft.com/office/mac/drawingml/2011/main" val="1"/>
                 </a:ext>
               </a:extLst>
             </p:spPr>
@@ -35201,7 +35437,7 @@
             <a:effectLst/>
             <a:extLst>
               <a:ext uri="{C572A759-6A51-4108-AA02-DFA0A04FC94B}">
-                <ma14:wrappingTextBoxFlag xmlns:ma14="http://schemas.microsoft.com/office/mac/drawingml/2011/main" xmlns="" val="1"/>
+                <ma14:wrappingTextBoxFlag xmlns="" xmlns:ma14="http://schemas.microsoft.com/office/mac/drawingml/2011/main" val="1"/>
               </a:ext>
             </a:extLst>
           </p:spPr>

--- a/RefactorToEcIntro.pptx
+++ b/RefactorToEcIntro.pptx
@@ -219,7 +219,7 @@
           <a:p>
             <a:fld id="{8CCF7272-9B1D-4C9A-BAA4-A2C3BF62B1D2}" type="datetimeFigureOut">
               <a:rPr lang="en-US" smtClean="0"/>
-              <a:t>9/27/2025</a:t>
+              <a:t>9/29/2025</a:t>
             </a:fld>
             <a:endParaRPr lang="en-US"/>
           </a:p>
@@ -632,7 +632,7 @@
           <a:bodyPr/>
           <a:lstStyle/>
           <a:p>
-            <a:endParaRPr lang="en-US"/>
+            <a:endParaRPr lang="en-US" dirty="0"/>
           </a:p>
         </p:txBody>
       </p:sp>
@@ -975,7 +975,7 @@
           <a:p>
             <a:fld id="{68BAE448-34E0-46DC-9FDB-1B326907CA84}" type="datetime1">
               <a:rPr lang="en-US" smtClean="0"/>
-              <a:t>9/27/2025</a:t>
+              <a:t>9/29/2025</a:t>
             </a:fld>
             <a:endParaRPr lang="en-US"/>
           </a:p>
@@ -1173,7 +1173,7 @@
           <a:p>
             <a:fld id="{BAC0C9A0-71EB-4C46-BFAE-DCF0AF3A0EC8}" type="datetime1">
               <a:rPr lang="en-US" smtClean="0"/>
-              <a:t>9/27/2025</a:t>
+              <a:t>9/29/2025</a:t>
             </a:fld>
             <a:endParaRPr lang="en-US"/>
           </a:p>
@@ -1381,7 +1381,7 @@
           <a:p>
             <a:fld id="{AB43F7C9-88A6-4437-8948-DF2F3F9B25C1}" type="datetime1">
               <a:rPr lang="en-US" smtClean="0"/>
-              <a:t>9/27/2025</a:t>
+              <a:t>9/29/2025</a:t>
             </a:fld>
             <a:endParaRPr lang="en-US"/>
           </a:p>
@@ -1579,7 +1579,7 @@
           <a:p>
             <a:fld id="{3B0593FE-CF93-4F9B-AC56-75BC55C6F32F}" type="datetime1">
               <a:rPr lang="en-US" smtClean="0"/>
-              <a:t>9/27/2025</a:t>
+              <a:t>9/29/2025</a:t>
             </a:fld>
             <a:endParaRPr lang="en-US"/>
           </a:p>
@@ -1889,7 +1889,7 @@
           <a:p>
             <a:fld id="{54C29679-8FFF-4A98-A10B-7B9208840F9A}" type="datetime1">
               <a:rPr lang="en-US" smtClean="0"/>
-              <a:t>9/27/2025</a:t>
+              <a:t>9/29/2025</a:t>
             </a:fld>
             <a:endParaRPr lang="en-US"/>
           </a:p>
@@ -2154,7 +2154,7 @@
           <a:p>
             <a:fld id="{C616605E-1528-4FCA-84AE-4988E530378F}" type="datetime1">
               <a:rPr lang="en-US" smtClean="0"/>
-              <a:t>9/27/2025</a:t>
+              <a:t>9/29/2025</a:t>
             </a:fld>
             <a:endParaRPr lang="en-US"/>
           </a:p>
@@ -2566,7 +2566,7 @@
           <a:p>
             <a:fld id="{5C967F88-E15A-423E-8C0E-ED81B2AD200B}" type="datetime1">
               <a:rPr lang="en-US" smtClean="0"/>
-              <a:t>9/27/2025</a:t>
+              <a:t>9/29/2025</a:t>
             </a:fld>
             <a:endParaRPr lang="en-US"/>
           </a:p>
@@ -2707,7 +2707,7 @@
           <a:p>
             <a:fld id="{7B77AEE9-0B70-4E11-9251-71473506E641}" type="datetime1">
               <a:rPr lang="en-US" smtClean="0"/>
-              <a:t>9/27/2025</a:t>
+              <a:t>9/29/2025</a:t>
             </a:fld>
             <a:endParaRPr lang="en-US"/>
           </a:p>
@@ -2855,7 +2855,7 @@
           <a:p>
             <a:fld id="{D39A6C2F-4429-4DEF-9F7B-968D133361D9}" type="datetime1">
               <a:rPr lang="en-US" smtClean="0"/>
-              <a:t>9/27/2025</a:t>
+              <a:t>9/29/2025</a:t>
             </a:fld>
             <a:endParaRPr lang="en-US"/>
           </a:p>
@@ -3166,7 +3166,7 @@
           <a:p>
             <a:fld id="{E6A7DD99-E1A7-4CEB-A5F5-1115ADD4759D}" type="datetime1">
               <a:rPr lang="en-US" smtClean="0"/>
-              <a:t>9/27/2025</a:t>
+              <a:t>9/29/2025</a:t>
             </a:fld>
             <a:endParaRPr lang="en-US"/>
           </a:p>
@@ -3454,7 +3454,7 @@
           <a:p>
             <a:fld id="{4D6AC830-A156-4095-8DF1-654325C78F63}" type="datetime1">
               <a:rPr lang="en-US" smtClean="0"/>
-              <a:t>9/27/2025</a:t>
+              <a:t>9/29/2025</a:t>
             </a:fld>
             <a:endParaRPr lang="en-US"/>
           </a:p>
@@ -3696,7 +3696,7 @@
           <a:p>
             <a:fld id="{F83568D0-A24C-431A-888C-8829CA6D36F6}" type="datetime1">
               <a:rPr lang="en-US" smtClean="0"/>
-              <a:t>9/27/2025</a:t>
+              <a:t>9/29/2025</a:t>
             </a:fld>
             <a:endParaRPr lang="en-US"/>
           </a:p>
@@ -4409,8 +4409,8 @@
         </p:nvSpPr>
         <p:spPr>
           <a:xfrm>
-            <a:off x="1524000" y="5745718"/>
-            <a:ext cx="9144000" cy="761524"/>
+            <a:off x="1524000" y="5385311"/>
+            <a:ext cx="9144000" cy="1121931"/>
           </a:xfrm>
           <a:prstGeom prst="rect">
             <a:avLst/>
@@ -4420,7 +4420,7 @@
           </a:ln>
           <a:extLst>
             <a:ext uri="{C572A759-6A51-4108-AA02-DFA0A04FC94B}">
-              <ma14:wrappingTextBoxFlag xmlns="" xmlns:ma14="http://schemas.microsoft.com/office/mac/drawingml/2011/main" val="1"/>
+              <ma14:wrappingTextBoxFlag xmlns:ma14="http://schemas.microsoft.com/office/mac/drawingml/2011/main" xmlns="" val="1"/>
             </a:ext>
           </a:extLst>
         </p:spPr>
@@ -4725,6 +4725,24 @@
                 <a:latin typeface="Aptos" panose="020B0004020202020204" pitchFamily="34" charset="0"/>
               </a:rPr>
               <a:t>dev2next • Colorado Springs, CO • September 29 - October 2, 2025</a:t>
+            </a:r>
+          </a:p>
+          <a:p>
+            <a:pPr hangingPunct="1">
+              <a:defRPr sz="3200">
+                <a:solidFill>
+                  <a:srgbClr val="808080"/>
+                </a:solidFill>
+              </a:defRPr>
+            </a:pPr>
+            <a:r>
+              <a:rPr lang="en-US" sz="1800" dirty="0">
+                <a:solidFill>
+                  <a:srgbClr val="808080"/>
+                </a:solidFill>
+                <a:latin typeface="Aptos" panose="020B0004020202020204" pitchFamily="34" charset="0"/>
+              </a:rPr>
+              <a:t>https://github.com/vmzakharov/refactor-to-ec-remake</a:t>
             </a:r>
           </a:p>
         </p:txBody>
@@ -10415,6 +10433,48 @@
           </a:p>
         </p:txBody>
       </p:sp>
+      <p:sp>
+        <p:nvSpPr>
+          <p:cNvPr id="16" name="TextBox 15">
+            <a:extLst>
+              <a:ext uri="{FF2B5EF4-FFF2-40B4-BE49-F238E27FC236}">
+                <a16:creationId xmlns:a16="http://schemas.microsoft.com/office/drawing/2014/main" id="{4693BE54-88DE-F5C2-4AB6-A5B9C57D023A}"/>
+              </a:ext>
+            </a:extLst>
+          </p:cNvPr>
+          <p:cNvSpPr txBox="1"/>
+          <p:nvPr/>
+        </p:nvSpPr>
+        <p:spPr>
+          <a:xfrm>
+            <a:off x="2333675" y="6340863"/>
+            <a:ext cx="6171050" cy="369332"/>
+          </a:xfrm>
+          <a:prstGeom prst="rect">
+            <a:avLst/>
+          </a:prstGeom>
+          <a:noFill/>
+        </p:spPr>
+        <p:txBody>
+          <a:bodyPr wrap="square">
+            <a:spAutoFit/>
+          </a:bodyPr>
+          <a:lstStyle/>
+          <a:p>
+            <a:pPr algn="ctr"/>
+            <a:r>
+              <a:rPr lang="en-US" dirty="0">
+                <a:solidFill>
+                  <a:schemeClr val="bg1">
+                    <a:lumMod val="50000"/>
+                  </a:schemeClr>
+                </a:solidFill>
+              </a:rPr>
+              <a:t>https://github.com/vmzakharov/dataframe-ec</a:t>
+            </a:r>
+          </a:p>
+        </p:txBody>
+      </p:sp>
     </p:spTree>
     <p:extLst>
       <p:ext uri="{BB962C8B-B14F-4D97-AF65-F5344CB8AC3E}">
@@ -10640,6 +10700,48 @@
               <a:t>19</a:t>
             </a:fld>
             <a:endParaRPr lang="en-US"/>
+          </a:p>
+        </p:txBody>
+      </p:sp>
+      <p:sp>
+        <p:nvSpPr>
+          <p:cNvPr id="13" name="TextBox 12">
+            <a:extLst>
+              <a:ext uri="{FF2B5EF4-FFF2-40B4-BE49-F238E27FC236}">
+                <a16:creationId xmlns:a16="http://schemas.microsoft.com/office/drawing/2014/main" id="{077FBB50-C5CE-FAC8-53E1-CE634C7DA12F}"/>
+              </a:ext>
+            </a:extLst>
+          </p:cNvPr>
+          <p:cNvSpPr txBox="1"/>
+          <p:nvPr/>
+        </p:nvSpPr>
+        <p:spPr>
+          <a:xfrm>
+            <a:off x="2333675" y="6340863"/>
+            <a:ext cx="6171050" cy="369332"/>
+          </a:xfrm>
+          <a:prstGeom prst="rect">
+            <a:avLst/>
+          </a:prstGeom>
+          <a:noFill/>
+        </p:spPr>
+        <p:txBody>
+          <a:bodyPr wrap="square">
+            <a:spAutoFit/>
+          </a:bodyPr>
+          <a:lstStyle/>
+          <a:p>
+            <a:pPr algn="ctr"/>
+            <a:r>
+              <a:rPr lang="en-US" dirty="0">
+                <a:solidFill>
+                  <a:schemeClr val="bg1">
+                    <a:lumMod val="50000"/>
+                  </a:schemeClr>
+                </a:solidFill>
+              </a:rPr>
+              <a:t>https://github.com/vmzakharov/dataframe-ec</a:t>
+            </a:r>
           </a:p>
         </p:txBody>
       </p:sp>
@@ -12456,7 +12558,7 @@
             <a:effectLst/>
             <a:extLst>
               <a:ext uri="{C572A759-6A51-4108-AA02-DFA0A04FC94B}">
-                <ma14:wrappingTextBoxFlag xmlns="" xmlns:ma14="http://schemas.microsoft.com/office/mac/drawingml/2011/main" val="1"/>
+                <ma14:wrappingTextBoxFlag xmlns:ma14="http://schemas.microsoft.com/office/mac/drawingml/2011/main" xmlns="" val="1"/>
               </a:ext>
             </a:extLst>
           </p:spPr>
@@ -12559,7 +12661,7 @@
             <a:effectLst/>
             <a:extLst>
               <a:ext uri="{C572A759-6A51-4108-AA02-DFA0A04FC94B}">
-                <ma14:wrappingTextBoxFlag xmlns="" xmlns:ma14="http://schemas.microsoft.com/office/mac/drawingml/2011/main" val="1"/>
+                <ma14:wrappingTextBoxFlag xmlns:ma14="http://schemas.microsoft.com/office/mac/drawingml/2011/main" xmlns="" val="1"/>
               </a:ext>
             </a:extLst>
           </p:spPr>
@@ -12663,7 +12765,7 @@
             <a:effectLst/>
             <a:extLst>
               <a:ext uri="{C572A759-6A51-4108-AA02-DFA0A04FC94B}">
-                <ma14:wrappingTextBoxFlag xmlns="" xmlns:ma14="http://schemas.microsoft.com/office/mac/drawingml/2011/main" val="1"/>
+                <ma14:wrappingTextBoxFlag xmlns:ma14="http://schemas.microsoft.com/office/mac/drawingml/2011/main" xmlns="" val="1"/>
               </a:ext>
             </a:extLst>
           </p:spPr>
@@ -12766,7 +12868,7 @@
             <a:effectLst/>
             <a:extLst>
               <a:ext uri="{C572A759-6A51-4108-AA02-DFA0A04FC94B}">
-                <ma14:wrappingTextBoxFlag xmlns="" xmlns:ma14="http://schemas.microsoft.com/office/mac/drawingml/2011/main" val="1"/>
+                <ma14:wrappingTextBoxFlag xmlns:ma14="http://schemas.microsoft.com/office/mac/drawingml/2011/main" xmlns="" val="1"/>
               </a:ext>
             </a:extLst>
           </p:spPr>
@@ -12869,7 +12971,7 @@
             <a:effectLst/>
             <a:extLst>
               <a:ext uri="{C572A759-6A51-4108-AA02-DFA0A04FC94B}">
-                <ma14:wrappingTextBoxFlag xmlns="" xmlns:ma14="http://schemas.microsoft.com/office/mac/drawingml/2011/main" val="1"/>
+                <ma14:wrappingTextBoxFlag xmlns:ma14="http://schemas.microsoft.com/office/mac/drawingml/2011/main" xmlns="" val="1"/>
               </a:ext>
             </a:extLst>
           </p:spPr>
@@ -12977,7 +13079,7 @@
             <a:effectLst/>
             <a:extLst>
               <a:ext uri="{C572A759-6A51-4108-AA02-DFA0A04FC94B}">
-                <ma14:wrappingTextBoxFlag xmlns="" xmlns:ma14="http://schemas.microsoft.com/office/mac/drawingml/2011/main" val="1"/>
+                <ma14:wrappingTextBoxFlag xmlns:ma14="http://schemas.microsoft.com/office/mac/drawingml/2011/main" xmlns="" val="1"/>
               </a:ext>
             </a:extLst>
           </p:spPr>
@@ -13080,7 +13182,7 @@
             <a:effectLst/>
             <a:extLst>
               <a:ext uri="{C572A759-6A51-4108-AA02-DFA0A04FC94B}">
-                <ma14:wrappingTextBoxFlag xmlns="" xmlns:ma14="http://schemas.microsoft.com/office/mac/drawingml/2011/main" val="1"/>
+                <ma14:wrappingTextBoxFlag xmlns:ma14="http://schemas.microsoft.com/office/mac/drawingml/2011/main" xmlns="" val="1"/>
               </a:ext>
             </a:extLst>
           </p:spPr>
@@ -13183,7 +13285,7 @@
             <a:effectLst/>
             <a:extLst>
               <a:ext uri="{C572A759-6A51-4108-AA02-DFA0A04FC94B}">
-                <ma14:wrappingTextBoxFlag xmlns="" xmlns:ma14="http://schemas.microsoft.com/office/mac/drawingml/2011/main" val="1"/>
+                <ma14:wrappingTextBoxFlag xmlns:ma14="http://schemas.microsoft.com/office/mac/drawingml/2011/main" xmlns="" val="1"/>
               </a:ext>
             </a:extLst>
           </p:spPr>
@@ -13297,7 +13399,7 @@
             <a:effectLst/>
             <a:extLst>
               <a:ext uri="{C572A759-6A51-4108-AA02-DFA0A04FC94B}">
-                <ma14:wrappingTextBoxFlag xmlns="" xmlns:ma14="http://schemas.microsoft.com/office/mac/drawingml/2011/main" val="1"/>
+                <ma14:wrappingTextBoxFlag xmlns:ma14="http://schemas.microsoft.com/office/mac/drawingml/2011/main" xmlns="" val="1"/>
               </a:ext>
             </a:extLst>
           </p:spPr>
@@ -13510,7 +13612,7 @@
               <a:effectLst/>
               <a:extLst>
                 <a:ext uri="{C572A759-6A51-4108-AA02-DFA0A04FC94B}">
-                  <ma14:wrappingTextBoxFlag xmlns="" xmlns:ma14="http://schemas.microsoft.com/office/mac/drawingml/2011/main" val="1"/>
+                  <ma14:wrappingTextBoxFlag xmlns:ma14="http://schemas.microsoft.com/office/mac/drawingml/2011/main" xmlns="" val="1"/>
                 </a:ext>
               </a:extLst>
             </p:spPr>
@@ -13614,7 +13716,7 @@
             <a:effectLst/>
             <a:extLst>
               <a:ext uri="{C572A759-6A51-4108-AA02-DFA0A04FC94B}">
-                <ma14:wrappingTextBoxFlag xmlns="" xmlns:ma14="http://schemas.microsoft.com/office/mac/drawingml/2011/main" val="1"/>
+                <ma14:wrappingTextBoxFlag xmlns:ma14="http://schemas.microsoft.com/office/mac/drawingml/2011/main" xmlns="" val="1"/>
               </a:ext>
             </a:extLst>
           </p:spPr>
@@ -13717,7 +13819,7 @@
             <a:effectLst/>
             <a:extLst>
               <a:ext uri="{C572A759-6A51-4108-AA02-DFA0A04FC94B}">
-                <ma14:wrappingTextBoxFlag xmlns="" xmlns:ma14="http://schemas.microsoft.com/office/mac/drawingml/2011/main" val="1"/>
+                <ma14:wrappingTextBoxFlag xmlns:ma14="http://schemas.microsoft.com/office/mac/drawingml/2011/main" xmlns="" val="1"/>
               </a:ext>
             </a:extLst>
           </p:spPr>
@@ -13874,7 +13976,7 @@
               <a:effectLst/>
               <a:extLst>
                 <a:ext uri="{C572A759-6A51-4108-AA02-DFA0A04FC94B}">
-                  <ma14:wrappingTextBoxFlag xmlns="" xmlns:ma14="http://schemas.microsoft.com/office/mac/drawingml/2011/main" val="1"/>
+                  <ma14:wrappingTextBoxFlag xmlns:ma14="http://schemas.microsoft.com/office/mac/drawingml/2011/main" xmlns="" val="1"/>
                 </a:ext>
               </a:extLst>
             </p:spPr>
@@ -14032,7 +14134,7 @@
               <a:effectLst/>
               <a:extLst>
                 <a:ext uri="{C572A759-6A51-4108-AA02-DFA0A04FC94B}">
-                  <ma14:wrappingTextBoxFlag xmlns="" xmlns:ma14="http://schemas.microsoft.com/office/mac/drawingml/2011/main" val="1"/>
+                  <ma14:wrappingTextBoxFlag xmlns:ma14="http://schemas.microsoft.com/office/mac/drawingml/2011/main" xmlns="" val="1"/>
                 </a:ext>
               </a:extLst>
             </p:spPr>
@@ -14438,7 +14540,7 @@
               <a:effectLst/>
               <a:extLst>
                 <a:ext uri="{C572A759-6A51-4108-AA02-DFA0A04FC94B}">
-                  <ma14:wrappingTextBoxFlag xmlns="" xmlns:ma14="http://schemas.microsoft.com/office/mac/drawingml/2011/main" val="1"/>
+                  <ma14:wrappingTextBoxFlag xmlns:ma14="http://schemas.microsoft.com/office/mac/drawingml/2011/main" xmlns="" val="1"/>
                 </a:ext>
               </a:extLst>
             </p:spPr>
@@ -14599,7 +14701,7 @@
               <a:effectLst/>
               <a:extLst>
                 <a:ext uri="{C572A759-6A51-4108-AA02-DFA0A04FC94B}">
-                  <ma14:wrappingTextBoxFlag xmlns="" xmlns:ma14="http://schemas.microsoft.com/office/mac/drawingml/2011/main" val="1"/>
+                  <ma14:wrappingTextBoxFlag xmlns:ma14="http://schemas.microsoft.com/office/mac/drawingml/2011/main" xmlns="" val="1"/>
                 </a:ext>
               </a:extLst>
             </p:spPr>
@@ -14996,7 +15098,7 @@
               <a:effectLst/>
               <a:extLst>
                 <a:ext uri="{C572A759-6A51-4108-AA02-DFA0A04FC94B}">
-                  <ma14:wrappingTextBoxFlag xmlns="" xmlns:ma14="http://schemas.microsoft.com/office/mac/drawingml/2011/main" val="1"/>
+                  <ma14:wrappingTextBoxFlag xmlns:ma14="http://schemas.microsoft.com/office/mac/drawingml/2011/main" xmlns="" val="1"/>
                 </a:ext>
               </a:extLst>
             </p:spPr>
@@ -15214,7 +15316,7 @@
               <a:effectLst/>
               <a:extLst>
                 <a:ext uri="{C572A759-6A51-4108-AA02-DFA0A04FC94B}">
-                  <ma14:wrappingTextBoxFlag xmlns="" xmlns:ma14="http://schemas.microsoft.com/office/mac/drawingml/2011/main" val="1"/>
+                  <ma14:wrappingTextBoxFlag xmlns:ma14="http://schemas.microsoft.com/office/mac/drawingml/2011/main" xmlns="" val="1"/>
                 </a:ext>
               </a:extLst>
             </p:spPr>
@@ -15382,7 +15484,7 @@
               <a:effectLst/>
               <a:extLst>
                 <a:ext uri="{C572A759-6A51-4108-AA02-DFA0A04FC94B}">
-                  <ma14:wrappingTextBoxFlag xmlns="" xmlns:ma14="http://schemas.microsoft.com/office/mac/drawingml/2011/main" val="1"/>
+                  <ma14:wrappingTextBoxFlag xmlns:ma14="http://schemas.microsoft.com/office/mac/drawingml/2011/main" xmlns="" val="1"/>
                 </a:ext>
               </a:extLst>
             </p:spPr>
@@ -16002,7 +16104,7 @@
               <a:effectLst/>
               <a:extLst>
                 <a:ext uri="{C572A759-6A51-4108-AA02-DFA0A04FC94B}">
-                  <ma14:wrappingTextBoxFlag xmlns="" xmlns:ma14="http://schemas.microsoft.com/office/mac/drawingml/2011/main" val="1"/>
+                  <ma14:wrappingTextBoxFlag xmlns:ma14="http://schemas.microsoft.com/office/mac/drawingml/2011/main" xmlns="" val="1"/>
                 </a:ext>
               </a:extLst>
             </p:spPr>
@@ -16055,7 +16157,7 @@
           </a:ln>
           <a:extLst>
             <a:ext uri="{C572A759-6A51-4108-AA02-DFA0A04FC94B}">
-              <ma14:wrappingTextBoxFlag xmlns="" xmlns:ma14="http://schemas.microsoft.com/office/mac/drawingml/2011/main" val="1"/>
+              <ma14:wrappingTextBoxFlag xmlns:ma14="http://schemas.microsoft.com/office/mac/drawingml/2011/main" xmlns="" val="1"/>
             </a:ext>
           </a:extLst>
         </p:spPr>
@@ -17430,7 +17532,7 @@
           </a:ln>
           <a:extLst>
             <a:ext uri="{C572A759-6A51-4108-AA02-DFA0A04FC94B}">
-              <ma14:wrappingTextBoxFlag xmlns="" xmlns:ma14="http://schemas.microsoft.com/office/mac/drawingml/2011/main" val="1"/>
+              <ma14:wrappingTextBoxFlag xmlns:ma14="http://schemas.microsoft.com/office/mac/drawingml/2011/main" xmlns="" val="1"/>
             </a:ext>
           </a:extLst>
         </p:spPr>
@@ -17803,7 +17905,7 @@
           </a:ln>
           <a:extLst>
             <a:ext uri="{C572A759-6A51-4108-AA02-DFA0A04FC94B}">
-              <ma14:wrappingTextBoxFlag xmlns="" xmlns:ma14="http://schemas.microsoft.com/office/mac/drawingml/2011/main" val="1"/>
+              <ma14:wrappingTextBoxFlag xmlns:ma14="http://schemas.microsoft.com/office/mac/drawingml/2011/main" xmlns="" val="1"/>
             </a:ext>
           </a:extLst>
         </p:spPr>
@@ -17863,7 +17965,7 @@
           </a:ln>
           <a:extLst>
             <a:ext uri="{C572A759-6A51-4108-AA02-DFA0A04FC94B}">
-              <ma14:wrappingTextBoxFlag xmlns="" xmlns:ma14="http://schemas.microsoft.com/office/mac/drawingml/2011/main" val="1"/>
+              <ma14:wrappingTextBoxFlag xmlns:ma14="http://schemas.microsoft.com/office/mac/drawingml/2011/main" xmlns="" val="1"/>
             </a:ext>
           </a:extLst>
         </p:spPr>
@@ -26496,7 +26598,7 @@
           </a:ln>
           <a:extLst>
             <a:ext uri="{C572A759-6A51-4108-AA02-DFA0A04FC94B}">
-              <ma14:wrappingTextBoxFlag xmlns:lc="http://schemas.openxmlformats.org/drawingml/2006/lockedCanvas" xmlns="" xmlns:m="http://schemas.openxmlformats.org/officeDocument/2006/math" xmlns:a14="http://schemas.microsoft.com/office/drawing/2010/main" xmlns:ma14="http://schemas.microsoft.com/office/mac/drawingml/2011/main" val="1"/>
+              <ma14:wrappingTextBoxFlag xmlns:ma14="http://schemas.microsoft.com/office/mac/drawingml/2011/main" xmlns:a14="http://schemas.microsoft.com/office/drawing/2010/main" xmlns:m="http://schemas.openxmlformats.org/officeDocument/2006/math" xmlns="" xmlns:lc="http://schemas.openxmlformats.org/drawingml/2006/lockedCanvas" val="1"/>
             </a:ext>
           </a:extLst>
         </p:spPr>
@@ -26864,7 +26966,7 @@
           </a:ln>
           <a:extLst>
             <a:ext uri="{C572A759-6A51-4108-AA02-DFA0A04FC94B}">
-              <ma14:wrappingTextBoxFlag xmlns:lc="http://schemas.openxmlformats.org/drawingml/2006/lockedCanvas" xmlns="" xmlns:m="http://schemas.openxmlformats.org/officeDocument/2006/math" xmlns:a14="http://schemas.microsoft.com/office/drawing/2010/main" xmlns:ma14="http://schemas.microsoft.com/office/mac/drawingml/2011/main" val="1"/>
+              <ma14:wrappingTextBoxFlag xmlns:ma14="http://schemas.microsoft.com/office/mac/drawingml/2011/main" xmlns:a14="http://schemas.microsoft.com/office/drawing/2010/main" xmlns:m="http://schemas.openxmlformats.org/officeDocument/2006/math" xmlns="" xmlns:lc="http://schemas.openxmlformats.org/drawingml/2006/lockedCanvas" val="1"/>
             </a:ext>
           </a:extLst>
         </p:spPr>
@@ -27231,7 +27333,7 @@
           </a:ln>
           <a:extLst>
             <a:ext uri="{C572A759-6A51-4108-AA02-DFA0A04FC94B}">
-              <ma14:wrappingTextBoxFlag xmlns:lc="http://schemas.openxmlformats.org/drawingml/2006/lockedCanvas" xmlns="" xmlns:m="http://schemas.openxmlformats.org/officeDocument/2006/math" xmlns:a14="http://schemas.microsoft.com/office/drawing/2010/main" xmlns:ma14="http://schemas.microsoft.com/office/mac/drawingml/2011/main" val="1"/>
+              <ma14:wrappingTextBoxFlag xmlns:ma14="http://schemas.microsoft.com/office/mac/drawingml/2011/main" xmlns:a14="http://schemas.microsoft.com/office/drawing/2010/main" xmlns:m="http://schemas.openxmlformats.org/officeDocument/2006/math" xmlns="" xmlns:lc="http://schemas.openxmlformats.org/drawingml/2006/lockedCanvas" val="1"/>
             </a:ext>
           </a:extLst>
         </p:spPr>
@@ -27588,7 +27690,7 @@
           </a:ln>
           <a:extLst>
             <a:ext uri="{C572A759-6A51-4108-AA02-DFA0A04FC94B}">
-              <ma14:wrappingTextBoxFlag xmlns:lc="http://schemas.openxmlformats.org/drawingml/2006/lockedCanvas" xmlns="" xmlns:m="http://schemas.openxmlformats.org/officeDocument/2006/math" xmlns:a14="http://schemas.microsoft.com/office/drawing/2010/main" xmlns:ma14="http://schemas.microsoft.com/office/mac/drawingml/2011/main" val="1"/>
+              <ma14:wrappingTextBoxFlag xmlns:ma14="http://schemas.microsoft.com/office/mac/drawingml/2011/main" xmlns:a14="http://schemas.microsoft.com/office/drawing/2010/main" xmlns:m="http://schemas.openxmlformats.org/officeDocument/2006/math" xmlns="" xmlns:lc="http://schemas.openxmlformats.org/drawingml/2006/lockedCanvas" val="1"/>
             </a:ext>
           </a:extLst>
         </p:spPr>
@@ -27937,7 +28039,7 @@
           </a:ln>
           <a:extLst>
             <a:ext uri="{C572A759-6A51-4108-AA02-DFA0A04FC94B}">
-              <ma14:wrappingTextBoxFlag xmlns:lc="http://schemas.openxmlformats.org/drawingml/2006/lockedCanvas" xmlns="" xmlns:m="http://schemas.openxmlformats.org/officeDocument/2006/math" xmlns:a14="http://schemas.microsoft.com/office/drawing/2010/main" xmlns:ma14="http://schemas.microsoft.com/office/mac/drawingml/2011/main" val="1"/>
+              <ma14:wrappingTextBoxFlag xmlns:ma14="http://schemas.microsoft.com/office/mac/drawingml/2011/main" xmlns:a14="http://schemas.microsoft.com/office/drawing/2010/main" xmlns:m="http://schemas.openxmlformats.org/officeDocument/2006/math" xmlns="" xmlns:lc="http://schemas.openxmlformats.org/drawingml/2006/lockedCanvas" val="1"/>
             </a:ext>
           </a:extLst>
         </p:spPr>
@@ -28294,7 +28396,7 @@
           </a:ln>
           <a:extLst>
             <a:ext uri="{C572A759-6A51-4108-AA02-DFA0A04FC94B}">
-              <ma14:wrappingTextBoxFlag xmlns:lc="http://schemas.openxmlformats.org/drawingml/2006/lockedCanvas" xmlns="" xmlns:m="http://schemas.openxmlformats.org/officeDocument/2006/math" xmlns:a14="http://schemas.microsoft.com/office/drawing/2010/main" xmlns:ma14="http://schemas.microsoft.com/office/mac/drawingml/2011/main" val="1"/>
+              <ma14:wrappingTextBoxFlag xmlns:ma14="http://schemas.microsoft.com/office/mac/drawingml/2011/main" xmlns:a14="http://schemas.microsoft.com/office/drawing/2010/main" xmlns:m="http://schemas.openxmlformats.org/officeDocument/2006/math" xmlns="" xmlns:lc="http://schemas.openxmlformats.org/drawingml/2006/lockedCanvas" val="1"/>
             </a:ext>
           </a:extLst>
         </p:spPr>
@@ -28643,7 +28745,7 @@
           </a:ln>
           <a:extLst>
             <a:ext uri="{C572A759-6A51-4108-AA02-DFA0A04FC94B}">
-              <ma14:wrappingTextBoxFlag xmlns:lc="http://schemas.openxmlformats.org/drawingml/2006/lockedCanvas" xmlns="" xmlns:m="http://schemas.openxmlformats.org/officeDocument/2006/math" xmlns:a14="http://schemas.microsoft.com/office/drawing/2010/main" xmlns:ma14="http://schemas.microsoft.com/office/mac/drawingml/2011/main" val="1"/>
+              <ma14:wrappingTextBoxFlag xmlns:ma14="http://schemas.microsoft.com/office/mac/drawingml/2011/main" xmlns:a14="http://schemas.microsoft.com/office/drawing/2010/main" xmlns:m="http://schemas.openxmlformats.org/officeDocument/2006/math" xmlns="" xmlns:lc="http://schemas.openxmlformats.org/drawingml/2006/lockedCanvas" val="1"/>
             </a:ext>
           </a:extLst>
         </p:spPr>
@@ -29007,7 +29109,7 @@
           </a:ln>
           <a:extLst>
             <a:ext uri="{C572A759-6A51-4108-AA02-DFA0A04FC94B}">
-              <ma14:wrappingTextBoxFlag xmlns:lc="http://schemas.openxmlformats.org/drawingml/2006/lockedCanvas" xmlns="" xmlns:m="http://schemas.openxmlformats.org/officeDocument/2006/math" xmlns:a14="http://schemas.microsoft.com/office/drawing/2010/main" xmlns:ma14="http://schemas.microsoft.com/office/mac/drawingml/2011/main" val="1"/>
+              <ma14:wrappingTextBoxFlag xmlns:ma14="http://schemas.microsoft.com/office/mac/drawingml/2011/main" xmlns:a14="http://schemas.microsoft.com/office/drawing/2010/main" xmlns:m="http://schemas.openxmlformats.org/officeDocument/2006/math" xmlns="" xmlns:lc="http://schemas.openxmlformats.org/drawingml/2006/lockedCanvas" val="1"/>
             </a:ext>
           </a:extLst>
         </p:spPr>
@@ -29346,7 +29448,7 @@
           </a:ln>
           <a:extLst>
             <a:ext uri="{C572A759-6A51-4108-AA02-DFA0A04FC94B}">
-              <ma14:wrappingTextBoxFlag xmlns:lc="http://schemas.openxmlformats.org/drawingml/2006/lockedCanvas" xmlns="" xmlns:m="http://schemas.openxmlformats.org/officeDocument/2006/math" xmlns:a14="http://schemas.microsoft.com/office/drawing/2010/main" xmlns:ma14="http://schemas.microsoft.com/office/mac/drawingml/2011/main" val="1"/>
+              <ma14:wrappingTextBoxFlag xmlns:ma14="http://schemas.microsoft.com/office/mac/drawingml/2011/main" xmlns:a14="http://schemas.microsoft.com/office/drawing/2010/main" xmlns:m="http://schemas.openxmlformats.org/officeDocument/2006/math" xmlns="" xmlns:lc="http://schemas.openxmlformats.org/drawingml/2006/lockedCanvas" val="1"/>
             </a:ext>
           </a:extLst>
         </p:spPr>
@@ -29685,7 +29787,7 @@
           </a:ln>
           <a:extLst>
             <a:ext uri="{C572A759-6A51-4108-AA02-DFA0A04FC94B}">
-              <ma14:wrappingTextBoxFlag xmlns:lc="http://schemas.openxmlformats.org/drawingml/2006/lockedCanvas" xmlns="" xmlns:m="http://schemas.openxmlformats.org/officeDocument/2006/math" xmlns:a14="http://schemas.microsoft.com/office/drawing/2010/main" xmlns:ma14="http://schemas.microsoft.com/office/mac/drawingml/2011/main" val="1"/>
+              <ma14:wrappingTextBoxFlag xmlns:ma14="http://schemas.microsoft.com/office/mac/drawingml/2011/main" xmlns:a14="http://schemas.microsoft.com/office/drawing/2010/main" xmlns:m="http://schemas.openxmlformats.org/officeDocument/2006/math" xmlns="" xmlns:lc="http://schemas.openxmlformats.org/drawingml/2006/lockedCanvas" val="1"/>
             </a:ext>
           </a:extLst>
         </p:spPr>
@@ -30024,7 +30126,7 @@
           </a:ln>
           <a:extLst>
             <a:ext uri="{C572A759-6A51-4108-AA02-DFA0A04FC94B}">
-              <ma14:wrappingTextBoxFlag xmlns:lc="http://schemas.openxmlformats.org/drawingml/2006/lockedCanvas" xmlns="" xmlns:m="http://schemas.openxmlformats.org/officeDocument/2006/math" xmlns:a14="http://schemas.microsoft.com/office/drawing/2010/main" xmlns:ma14="http://schemas.microsoft.com/office/mac/drawingml/2011/main" val="1"/>
+              <ma14:wrappingTextBoxFlag xmlns:ma14="http://schemas.microsoft.com/office/mac/drawingml/2011/main" xmlns:a14="http://schemas.microsoft.com/office/drawing/2010/main" xmlns:m="http://schemas.openxmlformats.org/officeDocument/2006/math" xmlns="" xmlns:lc="http://schemas.openxmlformats.org/drawingml/2006/lockedCanvas" val="1"/>
             </a:ext>
           </a:extLst>
         </p:spPr>
@@ -30393,7 +30495,7 @@
           </a:ln>
           <a:extLst>
             <a:ext uri="{C572A759-6A51-4108-AA02-DFA0A04FC94B}">
-              <ma14:wrappingTextBoxFlag xmlns:lc="http://schemas.openxmlformats.org/drawingml/2006/lockedCanvas" xmlns="" xmlns:m="http://schemas.openxmlformats.org/officeDocument/2006/math" xmlns:a14="http://schemas.microsoft.com/office/drawing/2010/main" xmlns:ma14="http://schemas.microsoft.com/office/mac/drawingml/2011/main" val="1"/>
+              <ma14:wrappingTextBoxFlag xmlns:ma14="http://schemas.microsoft.com/office/mac/drawingml/2011/main" xmlns:a14="http://schemas.microsoft.com/office/drawing/2010/main" xmlns:m="http://schemas.openxmlformats.org/officeDocument/2006/math" xmlns="" xmlns:lc="http://schemas.openxmlformats.org/drawingml/2006/lockedCanvas" val="1"/>
             </a:ext>
           </a:extLst>
         </p:spPr>
@@ -30750,7 +30852,7 @@
           </a:ln>
           <a:extLst>
             <a:ext uri="{C572A759-6A51-4108-AA02-DFA0A04FC94B}">
-              <ma14:wrappingTextBoxFlag xmlns:lc="http://schemas.openxmlformats.org/drawingml/2006/lockedCanvas" xmlns="" xmlns:m="http://schemas.openxmlformats.org/officeDocument/2006/math" xmlns:a14="http://schemas.microsoft.com/office/drawing/2010/main" xmlns:ma14="http://schemas.microsoft.com/office/mac/drawingml/2011/main" val="1"/>
+              <ma14:wrappingTextBoxFlag xmlns:ma14="http://schemas.microsoft.com/office/mac/drawingml/2011/main" xmlns:a14="http://schemas.microsoft.com/office/drawing/2010/main" xmlns:m="http://schemas.openxmlformats.org/officeDocument/2006/math" xmlns="" xmlns:lc="http://schemas.openxmlformats.org/drawingml/2006/lockedCanvas" val="1"/>
             </a:ext>
           </a:extLst>
         </p:spPr>
@@ -31089,7 +31191,7 @@
           </a:ln>
           <a:extLst>
             <a:ext uri="{C572A759-6A51-4108-AA02-DFA0A04FC94B}">
-              <ma14:wrappingTextBoxFlag xmlns:lc="http://schemas.openxmlformats.org/drawingml/2006/lockedCanvas" xmlns="" xmlns:m="http://schemas.openxmlformats.org/officeDocument/2006/math" xmlns:a14="http://schemas.microsoft.com/office/drawing/2010/main" xmlns:ma14="http://schemas.microsoft.com/office/mac/drawingml/2011/main" val="1"/>
+              <ma14:wrappingTextBoxFlag xmlns:ma14="http://schemas.microsoft.com/office/mac/drawingml/2011/main" xmlns:a14="http://schemas.microsoft.com/office/drawing/2010/main" xmlns:m="http://schemas.openxmlformats.org/officeDocument/2006/math" xmlns="" xmlns:lc="http://schemas.openxmlformats.org/drawingml/2006/lockedCanvas" val="1"/>
             </a:ext>
           </a:extLst>
         </p:spPr>
@@ -31428,7 +31530,7 @@
           </a:ln>
           <a:extLst>
             <a:ext uri="{C572A759-6A51-4108-AA02-DFA0A04FC94B}">
-              <ma14:wrappingTextBoxFlag xmlns:lc="http://schemas.openxmlformats.org/drawingml/2006/lockedCanvas" xmlns="" xmlns:m="http://schemas.openxmlformats.org/officeDocument/2006/math" xmlns:a14="http://schemas.microsoft.com/office/drawing/2010/main" xmlns:ma14="http://schemas.microsoft.com/office/mac/drawingml/2011/main" val="1"/>
+              <ma14:wrappingTextBoxFlag xmlns:ma14="http://schemas.microsoft.com/office/mac/drawingml/2011/main" xmlns:a14="http://schemas.microsoft.com/office/drawing/2010/main" xmlns:m="http://schemas.openxmlformats.org/officeDocument/2006/math" xmlns="" xmlns:lc="http://schemas.openxmlformats.org/drawingml/2006/lockedCanvas" val="1"/>
             </a:ext>
           </a:extLst>
         </p:spPr>
@@ -31770,7 +31872,7 @@
           </a:ln>
           <a:extLst>
             <a:ext uri="{C572A759-6A51-4108-AA02-DFA0A04FC94B}">
-              <ma14:wrappingTextBoxFlag xmlns:lc="http://schemas.openxmlformats.org/drawingml/2006/lockedCanvas" xmlns="" xmlns:m="http://schemas.openxmlformats.org/officeDocument/2006/math" xmlns:a14="http://schemas.microsoft.com/office/drawing/2010/main" xmlns:ma14="http://schemas.microsoft.com/office/mac/drawingml/2011/main" val="1"/>
+              <ma14:wrappingTextBoxFlag xmlns:ma14="http://schemas.microsoft.com/office/mac/drawingml/2011/main" xmlns:a14="http://schemas.microsoft.com/office/drawing/2010/main" xmlns:m="http://schemas.openxmlformats.org/officeDocument/2006/math" xmlns="" xmlns:lc="http://schemas.openxmlformats.org/drawingml/2006/lockedCanvas" val="1"/>
             </a:ext>
           </a:extLst>
         </p:spPr>
@@ -32811,7 +32913,7 @@
           </a:ln>
           <a:extLst>
             <a:ext uri="{C572A759-6A51-4108-AA02-DFA0A04FC94B}">
-              <ma14:wrappingTextBoxFlag xmlns:lc="http://schemas.openxmlformats.org/drawingml/2006/lockedCanvas" xmlns="" xmlns:m="http://schemas.openxmlformats.org/officeDocument/2006/math" xmlns:a14="http://schemas.microsoft.com/office/drawing/2010/main" xmlns:ma14="http://schemas.microsoft.com/office/mac/drawingml/2011/main" val="1"/>
+              <ma14:wrappingTextBoxFlag xmlns:ma14="http://schemas.microsoft.com/office/mac/drawingml/2011/main" xmlns:a14="http://schemas.microsoft.com/office/drawing/2010/main" xmlns:m="http://schemas.openxmlformats.org/officeDocument/2006/math" xmlns="" xmlns:lc="http://schemas.openxmlformats.org/drawingml/2006/lockedCanvas" val="1"/>
             </a:ext>
           </a:extLst>
         </p:spPr>
@@ -33168,7 +33270,7 @@
           </a:ln>
           <a:extLst>
             <a:ext uri="{C572A759-6A51-4108-AA02-DFA0A04FC94B}">
-              <ma14:wrappingTextBoxFlag xmlns:lc="http://schemas.openxmlformats.org/drawingml/2006/lockedCanvas" xmlns="" xmlns:m="http://schemas.openxmlformats.org/officeDocument/2006/math" xmlns:a14="http://schemas.microsoft.com/office/drawing/2010/main" xmlns:ma14="http://schemas.microsoft.com/office/mac/drawingml/2011/main" val="1"/>
+              <ma14:wrappingTextBoxFlag xmlns:ma14="http://schemas.microsoft.com/office/mac/drawingml/2011/main" xmlns:a14="http://schemas.microsoft.com/office/drawing/2010/main" xmlns:m="http://schemas.openxmlformats.org/officeDocument/2006/math" xmlns="" xmlns:lc="http://schemas.openxmlformats.org/drawingml/2006/lockedCanvas" val="1"/>
             </a:ext>
           </a:extLst>
         </p:spPr>
@@ -33722,7 +33824,7 @@
               <a:effectLst/>
               <a:extLst>
                 <a:ext uri="{C572A759-6A51-4108-AA02-DFA0A04FC94B}">
-                  <ma14:wrappingTextBoxFlag xmlns="" xmlns:ma14="http://schemas.microsoft.com/office/mac/drawingml/2011/main" val="1"/>
+                  <ma14:wrappingTextBoxFlag xmlns:ma14="http://schemas.microsoft.com/office/mac/drawingml/2011/main" xmlns="" val="1"/>
                 </a:ext>
               </a:extLst>
             </p:spPr>
@@ -33773,7 +33875,7 @@
             <a:effectLst/>
             <a:extLst>
               <a:ext uri="{C572A759-6A51-4108-AA02-DFA0A04FC94B}">
-                <ma14:wrappingTextBoxFlag xmlns="" xmlns:ma14="http://schemas.microsoft.com/office/mac/drawingml/2011/main" val="1"/>
+                <ma14:wrappingTextBoxFlag xmlns:ma14="http://schemas.microsoft.com/office/mac/drawingml/2011/main" xmlns="" val="1"/>
               </a:ext>
             </a:extLst>
           </p:spPr>
@@ -33996,7 +34098,7 @@
               <a:effectLst/>
               <a:extLst>
                 <a:ext uri="{C572A759-6A51-4108-AA02-DFA0A04FC94B}">
-                  <ma14:wrappingTextBoxFlag xmlns="" xmlns:ma14="http://schemas.microsoft.com/office/mac/drawingml/2011/main" val="1"/>
+                  <ma14:wrappingTextBoxFlag xmlns:ma14="http://schemas.microsoft.com/office/mac/drawingml/2011/main" xmlns="" val="1"/>
                 </a:ext>
               </a:extLst>
             </p:spPr>
@@ -34047,7 +34149,7 @@
             <a:effectLst/>
             <a:extLst>
               <a:ext uri="{C572A759-6A51-4108-AA02-DFA0A04FC94B}">
-                <ma14:wrappingTextBoxFlag xmlns="" xmlns:ma14="http://schemas.microsoft.com/office/mac/drawingml/2011/main" val="1"/>
+                <ma14:wrappingTextBoxFlag xmlns:ma14="http://schemas.microsoft.com/office/mac/drawingml/2011/main" xmlns="" val="1"/>
               </a:ext>
             </a:extLst>
           </p:spPr>
@@ -34225,7 +34327,7 @@
               <a:effectLst/>
               <a:extLst>
                 <a:ext uri="{C572A759-6A51-4108-AA02-DFA0A04FC94B}">
-                  <ma14:wrappingTextBoxFlag xmlns="" xmlns:ma14="http://schemas.microsoft.com/office/mac/drawingml/2011/main" val="1"/>
+                  <ma14:wrappingTextBoxFlag xmlns:ma14="http://schemas.microsoft.com/office/mac/drawingml/2011/main" xmlns="" val="1"/>
                 </a:ext>
               </a:extLst>
             </p:spPr>
@@ -34276,7 +34378,7 @@
             <a:effectLst/>
             <a:extLst>
               <a:ext uri="{C572A759-6A51-4108-AA02-DFA0A04FC94B}">
-                <ma14:wrappingTextBoxFlag xmlns="" xmlns:ma14="http://schemas.microsoft.com/office/mac/drawingml/2011/main" val="1"/>
+                <ma14:wrappingTextBoxFlag xmlns:ma14="http://schemas.microsoft.com/office/mac/drawingml/2011/main" xmlns="" val="1"/>
               </a:ext>
             </a:extLst>
           </p:spPr>
@@ -34555,7 +34657,7 @@
               <a:effectLst/>
               <a:extLst>
                 <a:ext uri="{C572A759-6A51-4108-AA02-DFA0A04FC94B}">
-                  <ma14:wrappingTextBoxFlag xmlns="" xmlns:ma14="http://schemas.microsoft.com/office/mac/drawingml/2011/main" val="1"/>
+                  <ma14:wrappingTextBoxFlag xmlns:ma14="http://schemas.microsoft.com/office/mac/drawingml/2011/main" xmlns="" val="1"/>
                 </a:ext>
               </a:extLst>
             </p:spPr>
@@ -34606,7 +34708,7 @@
             <a:effectLst/>
             <a:extLst>
               <a:ext uri="{C572A759-6A51-4108-AA02-DFA0A04FC94B}">
-                <ma14:wrappingTextBoxFlag xmlns="" xmlns:ma14="http://schemas.microsoft.com/office/mac/drawingml/2011/main" val="1"/>
+                <ma14:wrappingTextBoxFlag xmlns:ma14="http://schemas.microsoft.com/office/mac/drawingml/2011/main" xmlns="" val="1"/>
               </a:ext>
             </a:extLst>
           </p:spPr>
@@ -34824,7 +34926,7 @@
               <a:effectLst/>
               <a:extLst>
                 <a:ext uri="{C572A759-6A51-4108-AA02-DFA0A04FC94B}">
-                  <ma14:wrappingTextBoxFlag xmlns="" xmlns:ma14="http://schemas.microsoft.com/office/mac/drawingml/2011/main" val="1"/>
+                  <ma14:wrappingTextBoxFlag xmlns:ma14="http://schemas.microsoft.com/office/mac/drawingml/2011/main" xmlns="" val="1"/>
                 </a:ext>
               </a:extLst>
             </p:spPr>
@@ -34878,7 +34980,7 @@
             <a:effectLst/>
             <a:extLst>
               <a:ext uri="{C572A759-6A51-4108-AA02-DFA0A04FC94B}">
-                <ma14:wrappingTextBoxFlag xmlns="" xmlns:ma14="http://schemas.microsoft.com/office/mac/drawingml/2011/main" val="1"/>
+                <ma14:wrappingTextBoxFlag xmlns:ma14="http://schemas.microsoft.com/office/mac/drawingml/2011/main" xmlns="" val="1"/>
               </a:ext>
             </a:extLst>
           </p:spPr>
@@ -35083,7 +35185,7 @@
               <a:effectLst/>
               <a:extLst>
                 <a:ext uri="{C572A759-6A51-4108-AA02-DFA0A04FC94B}">
-                  <ma14:wrappingTextBoxFlag xmlns="" xmlns:ma14="http://schemas.microsoft.com/office/mac/drawingml/2011/main" val="1"/>
+                  <ma14:wrappingTextBoxFlag xmlns:ma14="http://schemas.microsoft.com/office/mac/drawingml/2011/main" xmlns="" val="1"/>
                 </a:ext>
               </a:extLst>
             </p:spPr>
@@ -35137,7 +35239,7 @@
             <a:effectLst/>
             <a:extLst>
               <a:ext uri="{C572A759-6A51-4108-AA02-DFA0A04FC94B}">
-                <ma14:wrappingTextBoxFlag xmlns="" xmlns:ma14="http://schemas.microsoft.com/office/mac/drawingml/2011/main" val="1"/>
+                <ma14:wrappingTextBoxFlag xmlns:ma14="http://schemas.microsoft.com/office/mac/drawingml/2011/main" xmlns="" val="1"/>
               </a:ext>
             </a:extLst>
           </p:spPr>
@@ -35379,7 +35481,7 @@
               <a:effectLst/>
               <a:extLst>
                 <a:ext uri="{C572A759-6A51-4108-AA02-DFA0A04FC94B}">
-                  <ma14:wrappingTextBoxFlag xmlns="" xmlns:ma14="http://schemas.microsoft.com/office/mac/drawingml/2011/main" val="1"/>
+                  <ma14:wrappingTextBoxFlag xmlns:ma14="http://schemas.microsoft.com/office/mac/drawingml/2011/main" xmlns="" val="1"/>
                 </a:ext>
               </a:extLst>
             </p:spPr>
@@ -35437,7 +35539,7 @@
             <a:effectLst/>
             <a:extLst>
               <a:ext uri="{C572A759-6A51-4108-AA02-DFA0A04FC94B}">
-                <ma14:wrappingTextBoxFlag xmlns="" xmlns:ma14="http://schemas.microsoft.com/office/mac/drawingml/2011/main" val="1"/>
+                <ma14:wrappingTextBoxFlag xmlns:ma14="http://schemas.microsoft.com/office/mac/drawingml/2011/main" xmlns="" val="1"/>
               </a:ext>
             </a:extLst>
           </p:spPr>

--- a/RefactorToEcIntro.pptx
+++ b/RefactorToEcIntro.pptx
@@ -219,7 +219,7 @@
           <a:p>
             <a:fld id="{8CCF7272-9B1D-4C9A-BAA4-A2C3BF62B1D2}" type="datetimeFigureOut">
               <a:rPr lang="en-US" smtClean="0"/>
-              <a:t>9/29/2025</a:t>
+              <a:t>9/30/2025</a:t>
             </a:fld>
             <a:endParaRPr lang="en-US"/>
           </a:p>
@@ -975,7 +975,7 @@
           <a:p>
             <a:fld id="{68BAE448-34E0-46DC-9FDB-1B326907CA84}" type="datetime1">
               <a:rPr lang="en-US" smtClean="0"/>
-              <a:t>9/29/2025</a:t>
+              <a:t>9/30/2025</a:t>
             </a:fld>
             <a:endParaRPr lang="en-US"/>
           </a:p>
@@ -1173,7 +1173,7 @@
           <a:p>
             <a:fld id="{BAC0C9A0-71EB-4C46-BFAE-DCF0AF3A0EC8}" type="datetime1">
               <a:rPr lang="en-US" smtClean="0"/>
-              <a:t>9/29/2025</a:t>
+              <a:t>9/30/2025</a:t>
             </a:fld>
             <a:endParaRPr lang="en-US"/>
           </a:p>
@@ -1381,7 +1381,7 @@
           <a:p>
             <a:fld id="{AB43F7C9-88A6-4437-8948-DF2F3F9B25C1}" type="datetime1">
               <a:rPr lang="en-US" smtClean="0"/>
-              <a:t>9/29/2025</a:t>
+              <a:t>9/30/2025</a:t>
             </a:fld>
             <a:endParaRPr lang="en-US"/>
           </a:p>
@@ -1579,7 +1579,7 @@
           <a:p>
             <a:fld id="{3B0593FE-CF93-4F9B-AC56-75BC55C6F32F}" type="datetime1">
               <a:rPr lang="en-US" smtClean="0"/>
-              <a:t>9/29/2025</a:t>
+              <a:t>9/30/2025</a:t>
             </a:fld>
             <a:endParaRPr lang="en-US"/>
           </a:p>
@@ -1889,7 +1889,7 @@
           <a:p>
             <a:fld id="{54C29679-8FFF-4A98-A10B-7B9208840F9A}" type="datetime1">
               <a:rPr lang="en-US" smtClean="0"/>
-              <a:t>9/29/2025</a:t>
+              <a:t>9/30/2025</a:t>
             </a:fld>
             <a:endParaRPr lang="en-US"/>
           </a:p>
@@ -2154,7 +2154,7 @@
           <a:p>
             <a:fld id="{C616605E-1528-4FCA-84AE-4988E530378F}" type="datetime1">
               <a:rPr lang="en-US" smtClean="0"/>
-              <a:t>9/29/2025</a:t>
+              <a:t>9/30/2025</a:t>
             </a:fld>
             <a:endParaRPr lang="en-US"/>
           </a:p>
@@ -2566,7 +2566,7 @@
           <a:p>
             <a:fld id="{5C967F88-E15A-423E-8C0E-ED81B2AD200B}" type="datetime1">
               <a:rPr lang="en-US" smtClean="0"/>
-              <a:t>9/29/2025</a:t>
+              <a:t>9/30/2025</a:t>
             </a:fld>
             <a:endParaRPr lang="en-US"/>
           </a:p>
@@ -2707,7 +2707,7 @@
           <a:p>
             <a:fld id="{7B77AEE9-0B70-4E11-9251-71473506E641}" type="datetime1">
               <a:rPr lang="en-US" smtClean="0"/>
-              <a:t>9/29/2025</a:t>
+              <a:t>9/30/2025</a:t>
             </a:fld>
             <a:endParaRPr lang="en-US"/>
           </a:p>
@@ -2855,7 +2855,7 @@
           <a:p>
             <a:fld id="{D39A6C2F-4429-4DEF-9F7B-968D133361D9}" type="datetime1">
               <a:rPr lang="en-US" smtClean="0"/>
-              <a:t>9/29/2025</a:t>
+              <a:t>9/30/2025</a:t>
             </a:fld>
             <a:endParaRPr lang="en-US"/>
           </a:p>
@@ -3166,7 +3166,7 @@
           <a:p>
             <a:fld id="{E6A7DD99-E1A7-4CEB-A5F5-1115ADD4759D}" type="datetime1">
               <a:rPr lang="en-US" smtClean="0"/>
-              <a:t>9/29/2025</a:t>
+              <a:t>9/30/2025</a:t>
             </a:fld>
             <a:endParaRPr lang="en-US"/>
           </a:p>
@@ -3454,7 +3454,7 @@
           <a:p>
             <a:fld id="{4D6AC830-A156-4095-8DF1-654325C78F63}" type="datetime1">
               <a:rPr lang="en-US" smtClean="0"/>
-              <a:t>9/29/2025</a:t>
+              <a:t>9/30/2025</a:t>
             </a:fld>
             <a:endParaRPr lang="en-US"/>
           </a:p>
@@ -3696,7 +3696,7 @@
           <a:p>
             <a:fld id="{F83568D0-A24C-431A-888C-8829CA6D36F6}" type="datetime1">
               <a:rPr lang="en-US" smtClean="0"/>
-              <a:t>9/29/2025</a:t>
+              <a:t>9/30/2025</a:t>
             </a:fld>
             <a:endParaRPr lang="en-US"/>
           </a:p>
@@ -4217,7 +4217,7 @@
         </p:nvSpPr>
         <p:spPr>
           <a:xfrm>
-            <a:off x="1524000" y="3659190"/>
+            <a:off x="1524000" y="3663785"/>
             <a:ext cx="9144000" cy="1155701"/>
           </a:xfrm>
           <a:prstGeom prst="rect">
@@ -4420,7 +4420,7 @@
           </a:ln>
           <a:extLst>
             <a:ext uri="{C572A759-6A51-4108-AA02-DFA0A04FC94B}">
-              <ma14:wrappingTextBoxFlag xmlns:ma14="http://schemas.microsoft.com/office/mac/drawingml/2011/main" xmlns="" val="1"/>
+              <ma14:wrappingTextBoxFlag xmlns="" xmlns:ma14="http://schemas.microsoft.com/office/mac/drawingml/2011/main" val="1"/>
             </a:ext>
           </a:extLst>
         </p:spPr>
@@ -6424,8 +6424,8 @@
           <a:lstStyle/>
           <a:p>
             <a:r>
-              <a:rPr lang="en-US"/>
-              <a:t>Memory Usage (Overhead in KB, Count)</a:t>
+              <a:rPr lang="en-US" dirty="0"/>
+              <a:t>Container Overhead in KB vs. Size</a:t>
             </a:r>
           </a:p>
         </p:txBody>
@@ -12558,7 +12558,7 @@
             <a:effectLst/>
             <a:extLst>
               <a:ext uri="{C572A759-6A51-4108-AA02-DFA0A04FC94B}">
-                <ma14:wrappingTextBoxFlag xmlns:ma14="http://schemas.microsoft.com/office/mac/drawingml/2011/main" xmlns="" val="1"/>
+                <ma14:wrappingTextBoxFlag xmlns="" xmlns:ma14="http://schemas.microsoft.com/office/mac/drawingml/2011/main" val="1"/>
               </a:ext>
             </a:extLst>
           </p:spPr>
@@ -12661,7 +12661,7 @@
             <a:effectLst/>
             <a:extLst>
               <a:ext uri="{C572A759-6A51-4108-AA02-DFA0A04FC94B}">
-                <ma14:wrappingTextBoxFlag xmlns:ma14="http://schemas.microsoft.com/office/mac/drawingml/2011/main" xmlns="" val="1"/>
+                <ma14:wrappingTextBoxFlag xmlns="" xmlns:ma14="http://schemas.microsoft.com/office/mac/drawingml/2011/main" val="1"/>
               </a:ext>
             </a:extLst>
           </p:spPr>
@@ -12765,7 +12765,7 @@
             <a:effectLst/>
             <a:extLst>
               <a:ext uri="{C572A759-6A51-4108-AA02-DFA0A04FC94B}">
-                <ma14:wrappingTextBoxFlag xmlns:ma14="http://schemas.microsoft.com/office/mac/drawingml/2011/main" xmlns="" val="1"/>
+                <ma14:wrappingTextBoxFlag xmlns="" xmlns:ma14="http://schemas.microsoft.com/office/mac/drawingml/2011/main" val="1"/>
               </a:ext>
             </a:extLst>
           </p:spPr>
@@ -12868,7 +12868,7 @@
             <a:effectLst/>
             <a:extLst>
               <a:ext uri="{C572A759-6A51-4108-AA02-DFA0A04FC94B}">
-                <ma14:wrappingTextBoxFlag xmlns:ma14="http://schemas.microsoft.com/office/mac/drawingml/2011/main" xmlns="" val="1"/>
+                <ma14:wrappingTextBoxFlag xmlns="" xmlns:ma14="http://schemas.microsoft.com/office/mac/drawingml/2011/main" val="1"/>
               </a:ext>
             </a:extLst>
           </p:spPr>
@@ -12971,7 +12971,7 @@
             <a:effectLst/>
             <a:extLst>
               <a:ext uri="{C572A759-6A51-4108-AA02-DFA0A04FC94B}">
-                <ma14:wrappingTextBoxFlag xmlns:ma14="http://schemas.microsoft.com/office/mac/drawingml/2011/main" xmlns="" val="1"/>
+                <ma14:wrappingTextBoxFlag xmlns="" xmlns:ma14="http://schemas.microsoft.com/office/mac/drawingml/2011/main" val="1"/>
               </a:ext>
             </a:extLst>
           </p:spPr>
@@ -13079,7 +13079,7 @@
             <a:effectLst/>
             <a:extLst>
               <a:ext uri="{C572A759-6A51-4108-AA02-DFA0A04FC94B}">
-                <ma14:wrappingTextBoxFlag xmlns:ma14="http://schemas.microsoft.com/office/mac/drawingml/2011/main" xmlns="" val="1"/>
+                <ma14:wrappingTextBoxFlag xmlns="" xmlns:ma14="http://schemas.microsoft.com/office/mac/drawingml/2011/main" val="1"/>
               </a:ext>
             </a:extLst>
           </p:spPr>
@@ -13182,7 +13182,7 @@
             <a:effectLst/>
             <a:extLst>
               <a:ext uri="{C572A759-6A51-4108-AA02-DFA0A04FC94B}">
-                <ma14:wrappingTextBoxFlag xmlns:ma14="http://schemas.microsoft.com/office/mac/drawingml/2011/main" xmlns="" val="1"/>
+                <ma14:wrappingTextBoxFlag xmlns="" xmlns:ma14="http://schemas.microsoft.com/office/mac/drawingml/2011/main" val="1"/>
               </a:ext>
             </a:extLst>
           </p:spPr>
@@ -13285,7 +13285,7 @@
             <a:effectLst/>
             <a:extLst>
               <a:ext uri="{C572A759-6A51-4108-AA02-DFA0A04FC94B}">
-                <ma14:wrappingTextBoxFlag xmlns:ma14="http://schemas.microsoft.com/office/mac/drawingml/2011/main" xmlns="" val="1"/>
+                <ma14:wrappingTextBoxFlag xmlns="" xmlns:ma14="http://schemas.microsoft.com/office/mac/drawingml/2011/main" val="1"/>
               </a:ext>
             </a:extLst>
           </p:spPr>
@@ -13399,7 +13399,7 @@
             <a:effectLst/>
             <a:extLst>
               <a:ext uri="{C572A759-6A51-4108-AA02-DFA0A04FC94B}">
-                <ma14:wrappingTextBoxFlag xmlns:ma14="http://schemas.microsoft.com/office/mac/drawingml/2011/main" xmlns="" val="1"/>
+                <ma14:wrappingTextBoxFlag xmlns="" xmlns:ma14="http://schemas.microsoft.com/office/mac/drawingml/2011/main" val="1"/>
               </a:ext>
             </a:extLst>
           </p:spPr>
@@ -13612,7 +13612,7 @@
               <a:effectLst/>
               <a:extLst>
                 <a:ext uri="{C572A759-6A51-4108-AA02-DFA0A04FC94B}">
-                  <ma14:wrappingTextBoxFlag xmlns:ma14="http://schemas.microsoft.com/office/mac/drawingml/2011/main" xmlns="" val="1"/>
+                  <ma14:wrappingTextBoxFlag xmlns="" xmlns:ma14="http://schemas.microsoft.com/office/mac/drawingml/2011/main" val="1"/>
                 </a:ext>
               </a:extLst>
             </p:spPr>
@@ -13716,7 +13716,7 @@
             <a:effectLst/>
             <a:extLst>
               <a:ext uri="{C572A759-6A51-4108-AA02-DFA0A04FC94B}">
-                <ma14:wrappingTextBoxFlag xmlns:ma14="http://schemas.microsoft.com/office/mac/drawingml/2011/main" xmlns="" val="1"/>
+                <ma14:wrappingTextBoxFlag xmlns="" xmlns:ma14="http://schemas.microsoft.com/office/mac/drawingml/2011/main" val="1"/>
               </a:ext>
             </a:extLst>
           </p:spPr>
@@ -13819,7 +13819,7 @@
             <a:effectLst/>
             <a:extLst>
               <a:ext uri="{C572A759-6A51-4108-AA02-DFA0A04FC94B}">
-                <ma14:wrappingTextBoxFlag xmlns:ma14="http://schemas.microsoft.com/office/mac/drawingml/2011/main" xmlns="" val="1"/>
+                <ma14:wrappingTextBoxFlag xmlns="" xmlns:ma14="http://schemas.microsoft.com/office/mac/drawingml/2011/main" val="1"/>
               </a:ext>
             </a:extLst>
           </p:spPr>
@@ -13976,7 +13976,7 @@
               <a:effectLst/>
               <a:extLst>
                 <a:ext uri="{C572A759-6A51-4108-AA02-DFA0A04FC94B}">
-                  <ma14:wrappingTextBoxFlag xmlns:ma14="http://schemas.microsoft.com/office/mac/drawingml/2011/main" xmlns="" val="1"/>
+                  <ma14:wrappingTextBoxFlag xmlns="" xmlns:ma14="http://schemas.microsoft.com/office/mac/drawingml/2011/main" val="1"/>
                 </a:ext>
               </a:extLst>
             </p:spPr>
@@ -14134,7 +14134,7 @@
               <a:effectLst/>
               <a:extLst>
                 <a:ext uri="{C572A759-6A51-4108-AA02-DFA0A04FC94B}">
-                  <ma14:wrappingTextBoxFlag xmlns:ma14="http://schemas.microsoft.com/office/mac/drawingml/2011/main" xmlns="" val="1"/>
+                  <ma14:wrappingTextBoxFlag xmlns="" xmlns:ma14="http://schemas.microsoft.com/office/mac/drawingml/2011/main" val="1"/>
                 </a:ext>
               </a:extLst>
             </p:spPr>
@@ -14540,7 +14540,7 @@
               <a:effectLst/>
               <a:extLst>
                 <a:ext uri="{C572A759-6A51-4108-AA02-DFA0A04FC94B}">
-                  <ma14:wrappingTextBoxFlag xmlns:ma14="http://schemas.microsoft.com/office/mac/drawingml/2011/main" xmlns="" val="1"/>
+                  <ma14:wrappingTextBoxFlag xmlns="" xmlns:ma14="http://schemas.microsoft.com/office/mac/drawingml/2011/main" val="1"/>
                 </a:ext>
               </a:extLst>
             </p:spPr>
@@ -14701,7 +14701,7 @@
               <a:effectLst/>
               <a:extLst>
                 <a:ext uri="{C572A759-6A51-4108-AA02-DFA0A04FC94B}">
-                  <ma14:wrappingTextBoxFlag xmlns:ma14="http://schemas.microsoft.com/office/mac/drawingml/2011/main" xmlns="" val="1"/>
+                  <ma14:wrappingTextBoxFlag xmlns="" xmlns:ma14="http://schemas.microsoft.com/office/mac/drawingml/2011/main" val="1"/>
                 </a:ext>
               </a:extLst>
             </p:spPr>
@@ -15098,7 +15098,7 @@
               <a:effectLst/>
               <a:extLst>
                 <a:ext uri="{C572A759-6A51-4108-AA02-DFA0A04FC94B}">
-                  <ma14:wrappingTextBoxFlag xmlns:ma14="http://schemas.microsoft.com/office/mac/drawingml/2011/main" xmlns="" val="1"/>
+                  <ma14:wrappingTextBoxFlag xmlns="" xmlns:ma14="http://schemas.microsoft.com/office/mac/drawingml/2011/main" val="1"/>
                 </a:ext>
               </a:extLst>
             </p:spPr>
@@ -15316,7 +15316,7 @@
               <a:effectLst/>
               <a:extLst>
                 <a:ext uri="{C572A759-6A51-4108-AA02-DFA0A04FC94B}">
-                  <ma14:wrappingTextBoxFlag xmlns:ma14="http://schemas.microsoft.com/office/mac/drawingml/2011/main" xmlns="" val="1"/>
+                  <ma14:wrappingTextBoxFlag xmlns="" xmlns:ma14="http://schemas.microsoft.com/office/mac/drawingml/2011/main" val="1"/>
                 </a:ext>
               </a:extLst>
             </p:spPr>
@@ -15484,7 +15484,7 @@
               <a:effectLst/>
               <a:extLst>
                 <a:ext uri="{C572A759-6A51-4108-AA02-DFA0A04FC94B}">
-                  <ma14:wrappingTextBoxFlag xmlns:ma14="http://schemas.microsoft.com/office/mac/drawingml/2011/main" xmlns="" val="1"/>
+                  <ma14:wrappingTextBoxFlag xmlns="" xmlns:ma14="http://schemas.microsoft.com/office/mac/drawingml/2011/main" val="1"/>
                 </a:ext>
               </a:extLst>
             </p:spPr>
@@ -16104,7 +16104,7 @@
               <a:effectLst/>
               <a:extLst>
                 <a:ext uri="{C572A759-6A51-4108-AA02-DFA0A04FC94B}">
-                  <ma14:wrappingTextBoxFlag xmlns:ma14="http://schemas.microsoft.com/office/mac/drawingml/2011/main" xmlns="" val="1"/>
+                  <ma14:wrappingTextBoxFlag xmlns="" xmlns:ma14="http://schemas.microsoft.com/office/mac/drawingml/2011/main" val="1"/>
                 </a:ext>
               </a:extLst>
             </p:spPr>
@@ -16157,7 +16157,7 @@
           </a:ln>
           <a:extLst>
             <a:ext uri="{C572A759-6A51-4108-AA02-DFA0A04FC94B}">
-              <ma14:wrappingTextBoxFlag xmlns:ma14="http://schemas.microsoft.com/office/mac/drawingml/2011/main" xmlns="" val="1"/>
+              <ma14:wrappingTextBoxFlag xmlns="" xmlns:ma14="http://schemas.microsoft.com/office/mac/drawingml/2011/main" val="1"/>
             </a:ext>
           </a:extLst>
         </p:spPr>
@@ -16459,7 +16459,7 @@
           <p:nvPr>
             <p:extLst>
               <p:ext uri="{D42A27DB-BD31-4B8C-83A1-F6EECF244321}">
-                <p14:modId xmlns:p14="http://schemas.microsoft.com/office/powerpoint/2010/main" val="3985011068"/>
+                <p14:modId xmlns:p14="http://schemas.microsoft.com/office/powerpoint/2010/main" val="1373391110"/>
               </p:ext>
             </p:extLst>
           </p:nvPr>
@@ -16526,8 +16526,12 @@
                         <a:defRPr sz="1800"/>
                       </a:pPr>
                       <a:r>
+                        <a:rPr lang="en-US" b="1" dirty="0"/>
+                        <a:t>Payload</a:t>
+                      </a:r>
+                      <a:r>
                         <a:rPr b="1" dirty="0"/>
-                        <a:t>Primitive Type</a:t>
+                        <a:t> Type</a:t>
                       </a:r>
                       <a:r>
                         <a:rPr lang="en-US" b="1" baseline="30000" dirty="0"/>
@@ -17532,7 +17536,7 @@
           </a:ln>
           <a:extLst>
             <a:ext uri="{C572A759-6A51-4108-AA02-DFA0A04FC94B}">
-              <ma14:wrappingTextBoxFlag xmlns:ma14="http://schemas.microsoft.com/office/mac/drawingml/2011/main" xmlns="" val="1"/>
+              <ma14:wrappingTextBoxFlag xmlns="" xmlns:ma14="http://schemas.microsoft.com/office/mac/drawingml/2011/main" val="1"/>
             </a:ext>
           </a:extLst>
         </p:spPr>
@@ -17905,7 +17909,7 @@
           </a:ln>
           <a:extLst>
             <a:ext uri="{C572A759-6A51-4108-AA02-DFA0A04FC94B}">
-              <ma14:wrappingTextBoxFlag xmlns:ma14="http://schemas.microsoft.com/office/mac/drawingml/2011/main" xmlns="" val="1"/>
+              <ma14:wrappingTextBoxFlag xmlns="" xmlns:ma14="http://schemas.microsoft.com/office/mac/drawingml/2011/main" val="1"/>
             </a:ext>
           </a:extLst>
         </p:spPr>
@@ -17965,7 +17969,7 @@
           </a:ln>
           <a:extLst>
             <a:ext uri="{C572A759-6A51-4108-AA02-DFA0A04FC94B}">
-              <ma14:wrappingTextBoxFlag xmlns:ma14="http://schemas.microsoft.com/office/mac/drawingml/2011/main" xmlns="" val="1"/>
+              <ma14:wrappingTextBoxFlag xmlns="" xmlns:ma14="http://schemas.microsoft.com/office/mac/drawingml/2011/main" val="1"/>
             </a:ext>
           </a:extLst>
         </p:spPr>
@@ -26598,7 +26602,7 @@
           </a:ln>
           <a:extLst>
             <a:ext uri="{C572A759-6A51-4108-AA02-DFA0A04FC94B}">
-              <ma14:wrappingTextBoxFlag xmlns:ma14="http://schemas.microsoft.com/office/mac/drawingml/2011/main" xmlns:a14="http://schemas.microsoft.com/office/drawing/2010/main" xmlns:m="http://schemas.openxmlformats.org/officeDocument/2006/math" xmlns="" xmlns:lc="http://schemas.openxmlformats.org/drawingml/2006/lockedCanvas" val="1"/>
+              <ma14:wrappingTextBoxFlag xmlns:lc="http://schemas.openxmlformats.org/drawingml/2006/lockedCanvas" xmlns="" xmlns:m="http://schemas.openxmlformats.org/officeDocument/2006/math" xmlns:a14="http://schemas.microsoft.com/office/drawing/2010/main" xmlns:ma14="http://schemas.microsoft.com/office/mac/drawingml/2011/main" val="1"/>
             </a:ext>
           </a:extLst>
         </p:spPr>
@@ -26966,7 +26970,7 @@
           </a:ln>
           <a:extLst>
             <a:ext uri="{C572A759-6A51-4108-AA02-DFA0A04FC94B}">
-              <ma14:wrappingTextBoxFlag xmlns:ma14="http://schemas.microsoft.com/office/mac/drawingml/2011/main" xmlns:a14="http://schemas.microsoft.com/office/drawing/2010/main" xmlns:m="http://schemas.openxmlformats.org/officeDocument/2006/math" xmlns="" xmlns:lc="http://schemas.openxmlformats.org/drawingml/2006/lockedCanvas" val="1"/>
+              <ma14:wrappingTextBoxFlag xmlns:lc="http://schemas.openxmlformats.org/drawingml/2006/lockedCanvas" xmlns="" xmlns:m="http://schemas.openxmlformats.org/officeDocument/2006/math" xmlns:a14="http://schemas.microsoft.com/office/drawing/2010/main" xmlns:ma14="http://schemas.microsoft.com/office/mac/drawingml/2011/main" val="1"/>
             </a:ext>
           </a:extLst>
         </p:spPr>
@@ -27333,7 +27337,7 @@
           </a:ln>
           <a:extLst>
             <a:ext uri="{C572A759-6A51-4108-AA02-DFA0A04FC94B}">
-              <ma14:wrappingTextBoxFlag xmlns:ma14="http://schemas.microsoft.com/office/mac/drawingml/2011/main" xmlns:a14="http://schemas.microsoft.com/office/drawing/2010/main" xmlns:m="http://schemas.openxmlformats.org/officeDocument/2006/math" xmlns="" xmlns:lc="http://schemas.openxmlformats.org/drawingml/2006/lockedCanvas" val="1"/>
+              <ma14:wrappingTextBoxFlag xmlns:lc="http://schemas.openxmlformats.org/drawingml/2006/lockedCanvas" xmlns="" xmlns:m="http://schemas.openxmlformats.org/officeDocument/2006/math" xmlns:a14="http://schemas.microsoft.com/office/drawing/2010/main" xmlns:ma14="http://schemas.microsoft.com/office/mac/drawingml/2011/main" val="1"/>
             </a:ext>
           </a:extLst>
         </p:spPr>
@@ -27690,7 +27694,7 @@
           </a:ln>
           <a:extLst>
             <a:ext uri="{C572A759-6A51-4108-AA02-DFA0A04FC94B}">
-              <ma14:wrappingTextBoxFlag xmlns:ma14="http://schemas.microsoft.com/office/mac/drawingml/2011/main" xmlns:a14="http://schemas.microsoft.com/office/drawing/2010/main" xmlns:m="http://schemas.openxmlformats.org/officeDocument/2006/math" xmlns="" xmlns:lc="http://schemas.openxmlformats.org/drawingml/2006/lockedCanvas" val="1"/>
+              <ma14:wrappingTextBoxFlag xmlns:lc="http://schemas.openxmlformats.org/drawingml/2006/lockedCanvas" xmlns="" xmlns:m="http://schemas.openxmlformats.org/officeDocument/2006/math" xmlns:a14="http://schemas.microsoft.com/office/drawing/2010/main" xmlns:ma14="http://schemas.microsoft.com/office/mac/drawingml/2011/main" val="1"/>
             </a:ext>
           </a:extLst>
         </p:spPr>
@@ -28039,7 +28043,7 @@
           </a:ln>
           <a:extLst>
             <a:ext uri="{C572A759-6A51-4108-AA02-DFA0A04FC94B}">
-              <ma14:wrappingTextBoxFlag xmlns:ma14="http://schemas.microsoft.com/office/mac/drawingml/2011/main" xmlns:a14="http://schemas.microsoft.com/office/drawing/2010/main" xmlns:m="http://schemas.openxmlformats.org/officeDocument/2006/math" xmlns="" xmlns:lc="http://schemas.openxmlformats.org/drawingml/2006/lockedCanvas" val="1"/>
+              <ma14:wrappingTextBoxFlag xmlns:lc="http://schemas.openxmlformats.org/drawingml/2006/lockedCanvas" xmlns="" xmlns:m="http://schemas.openxmlformats.org/officeDocument/2006/math" xmlns:a14="http://schemas.microsoft.com/office/drawing/2010/main" xmlns:ma14="http://schemas.microsoft.com/office/mac/drawingml/2011/main" val="1"/>
             </a:ext>
           </a:extLst>
         </p:spPr>
@@ -28396,7 +28400,7 @@
           </a:ln>
           <a:extLst>
             <a:ext uri="{C572A759-6A51-4108-AA02-DFA0A04FC94B}">
-              <ma14:wrappingTextBoxFlag xmlns:ma14="http://schemas.microsoft.com/office/mac/drawingml/2011/main" xmlns:a14="http://schemas.microsoft.com/office/drawing/2010/main" xmlns:m="http://schemas.openxmlformats.org/officeDocument/2006/math" xmlns="" xmlns:lc="http://schemas.openxmlformats.org/drawingml/2006/lockedCanvas" val="1"/>
+              <ma14:wrappingTextBoxFlag xmlns:lc="http://schemas.openxmlformats.org/drawingml/2006/lockedCanvas" xmlns="" xmlns:m="http://schemas.openxmlformats.org/officeDocument/2006/math" xmlns:a14="http://schemas.microsoft.com/office/drawing/2010/main" xmlns:ma14="http://schemas.microsoft.com/office/mac/drawingml/2011/main" val="1"/>
             </a:ext>
           </a:extLst>
         </p:spPr>
@@ -28745,7 +28749,7 @@
           </a:ln>
           <a:extLst>
             <a:ext uri="{C572A759-6A51-4108-AA02-DFA0A04FC94B}">
-              <ma14:wrappingTextBoxFlag xmlns:ma14="http://schemas.microsoft.com/office/mac/drawingml/2011/main" xmlns:a14="http://schemas.microsoft.com/office/drawing/2010/main" xmlns:m="http://schemas.openxmlformats.org/officeDocument/2006/math" xmlns="" xmlns:lc="http://schemas.openxmlformats.org/drawingml/2006/lockedCanvas" val="1"/>
+              <ma14:wrappingTextBoxFlag xmlns:lc="http://schemas.openxmlformats.org/drawingml/2006/lockedCanvas" xmlns="" xmlns:m="http://schemas.openxmlformats.org/officeDocument/2006/math" xmlns:a14="http://schemas.microsoft.com/office/drawing/2010/main" xmlns:ma14="http://schemas.microsoft.com/office/mac/drawingml/2011/main" val="1"/>
             </a:ext>
           </a:extLst>
         </p:spPr>
@@ -29109,7 +29113,7 @@
           </a:ln>
           <a:extLst>
             <a:ext uri="{C572A759-6A51-4108-AA02-DFA0A04FC94B}">
-              <ma14:wrappingTextBoxFlag xmlns:ma14="http://schemas.microsoft.com/office/mac/drawingml/2011/main" xmlns:a14="http://schemas.microsoft.com/office/drawing/2010/main" xmlns:m="http://schemas.openxmlformats.org/officeDocument/2006/math" xmlns="" xmlns:lc="http://schemas.openxmlformats.org/drawingml/2006/lockedCanvas" val="1"/>
+              <ma14:wrappingTextBoxFlag xmlns:lc="http://schemas.openxmlformats.org/drawingml/2006/lockedCanvas" xmlns="" xmlns:m="http://schemas.openxmlformats.org/officeDocument/2006/math" xmlns:a14="http://schemas.microsoft.com/office/drawing/2010/main" xmlns:ma14="http://schemas.microsoft.com/office/mac/drawingml/2011/main" val="1"/>
             </a:ext>
           </a:extLst>
         </p:spPr>
@@ -29448,7 +29452,7 @@
           </a:ln>
           <a:extLst>
             <a:ext uri="{C572A759-6A51-4108-AA02-DFA0A04FC94B}">
-              <ma14:wrappingTextBoxFlag xmlns:ma14="http://schemas.microsoft.com/office/mac/drawingml/2011/main" xmlns:a14="http://schemas.microsoft.com/office/drawing/2010/main" xmlns:m="http://schemas.openxmlformats.org/officeDocument/2006/math" xmlns="" xmlns:lc="http://schemas.openxmlformats.org/drawingml/2006/lockedCanvas" val="1"/>
+              <ma14:wrappingTextBoxFlag xmlns:lc="http://schemas.openxmlformats.org/drawingml/2006/lockedCanvas" xmlns="" xmlns:m="http://schemas.openxmlformats.org/officeDocument/2006/math" xmlns:a14="http://schemas.microsoft.com/office/drawing/2010/main" xmlns:ma14="http://schemas.microsoft.com/office/mac/drawingml/2011/main" val="1"/>
             </a:ext>
           </a:extLst>
         </p:spPr>
@@ -29787,7 +29791,7 @@
           </a:ln>
           <a:extLst>
             <a:ext uri="{C572A759-6A51-4108-AA02-DFA0A04FC94B}">
-              <ma14:wrappingTextBoxFlag xmlns:ma14="http://schemas.microsoft.com/office/mac/drawingml/2011/main" xmlns:a14="http://schemas.microsoft.com/office/drawing/2010/main" xmlns:m="http://schemas.openxmlformats.org/officeDocument/2006/math" xmlns="" xmlns:lc="http://schemas.openxmlformats.org/drawingml/2006/lockedCanvas" val="1"/>
+              <ma14:wrappingTextBoxFlag xmlns:lc="http://schemas.openxmlformats.org/drawingml/2006/lockedCanvas" xmlns="" xmlns:m="http://schemas.openxmlformats.org/officeDocument/2006/math" xmlns:a14="http://schemas.microsoft.com/office/drawing/2010/main" xmlns:ma14="http://schemas.microsoft.com/office/mac/drawingml/2011/main" val="1"/>
             </a:ext>
           </a:extLst>
         </p:spPr>
@@ -30126,7 +30130,7 @@
           </a:ln>
           <a:extLst>
             <a:ext uri="{C572A759-6A51-4108-AA02-DFA0A04FC94B}">
-              <ma14:wrappingTextBoxFlag xmlns:ma14="http://schemas.microsoft.com/office/mac/drawingml/2011/main" xmlns:a14="http://schemas.microsoft.com/office/drawing/2010/main" xmlns:m="http://schemas.openxmlformats.org/officeDocument/2006/math" xmlns="" xmlns:lc="http://schemas.openxmlformats.org/drawingml/2006/lockedCanvas" val="1"/>
+              <ma14:wrappingTextBoxFlag xmlns:lc="http://schemas.openxmlformats.org/drawingml/2006/lockedCanvas" xmlns="" xmlns:m="http://schemas.openxmlformats.org/officeDocument/2006/math" xmlns:a14="http://schemas.microsoft.com/office/drawing/2010/main" xmlns:ma14="http://schemas.microsoft.com/office/mac/drawingml/2011/main" val="1"/>
             </a:ext>
           </a:extLst>
         </p:spPr>
@@ -30495,7 +30499,7 @@
           </a:ln>
           <a:extLst>
             <a:ext uri="{C572A759-6A51-4108-AA02-DFA0A04FC94B}">
-              <ma14:wrappingTextBoxFlag xmlns:ma14="http://schemas.microsoft.com/office/mac/drawingml/2011/main" xmlns:a14="http://schemas.microsoft.com/office/drawing/2010/main" xmlns:m="http://schemas.openxmlformats.org/officeDocument/2006/math" xmlns="" xmlns:lc="http://schemas.openxmlformats.org/drawingml/2006/lockedCanvas" val="1"/>
+              <ma14:wrappingTextBoxFlag xmlns:lc="http://schemas.openxmlformats.org/drawingml/2006/lockedCanvas" xmlns="" xmlns:m="http://schemas.openxmlformats.org/officeDocument/2006/math" xmlns:a14="http://schemas.microsoft.com/office/drawing/2010/main" xmlns:ma14="http://schemas.microsoft.com/office/mac/drawingml/2011/main" val="1"/>
             </a:ext>
           </a:extLst>
         </p:spPr>
@@ -30852,7 +30856,7 @@
           </a:ln>
           <a:extLst>
             <a:ext uri="{C572A759-6A51-4108-AA02-DFA0A04FC94B}">
-              <ma14:wrappingTextBoxFlag xmlns:ma14="http://schemas.microsoft.com/office/mac/drawingml/2011/main" xmlns:a14="http://schemas.microsoft.com/office/drawing/2010/main" xmlns:m="http://schemas.openxmlformats.org/officeDocument/2006/math" xmlns="" xmlns:lc="http://schemas.openxmlformats.org/drawingml/2006/lockedCanvas" val="1"/>
+              <ma14:wrappingTextBoxFlag xmlns:lc="http://schemas.openxmlformats.org/drawingml/2006/lockedCanvas" xmlns="" xmlns:m="http://schemas.openxmlformats.org/officeDocument/2006/math" xmlns:a14="http://schemas.microsoft.com/office/drawing/2010/main" xmlns:ma14="http://schemas.microsoft.com/office/mac/drawingml/2011/main" val="1"/>
             </a:ext>
           </a:extLst>
         </p:spPr>
@@ -31191,7 +31195,7 @@
           </a:ln>
           <a:extLst>
             <a:ext uri="{C572A759-6A51-4108-AA02-DFA0A04FC94B}">
-              <ma14:wrappingTextBoxFlag xmlns:ma14="http://schemas.microsoft.com/office/mac/drawingml/2011/main" xmlns:a14="http://schemas.microsoft.com/office/drawing/2010/main" xmlns:m="http://schemas.openxmlformats.org/officeDocument/2006/math" xmlns="" xmlns:lc="http://schemas.openxmlformats.org/drawingml/2006/lockedCanvas" val="1"/>
+              <ma14:wrappingTextBoxFlag xmlns:lc="http://schemas.openxmlformats.org/drawingml/2006/lockedCanvas" xmlns="" xmlns:m="http://schemas.openxmlformats.org/officeDocument/2006/math" xmlns:a14="http://schemas.microsoft.com/office/drawing/2010/main" xmlns:ma14="http://schemas.microsoft.com/office/mac/drawingml/2011/main" val="1"/>
             </a:ext>
           </a:extLst>
         </p:spPr>
@@ -31530,7 +31534,7 @@
           </a:ln>
           <a:extLst>
             <a:ext uri="{C572A759-6A51-4108-AA02-DFA0A04FC94B}">
-              <ma14:wrappingTextBoxFlag xmlns:ma14="http://schemas.microsoft.com/office/mac/drawingml/2011/main" xmlns:a14="http://schemas.microsoft.com/office/drawing/2010/main" xmlns:m="http://schemas.openxmlformats.org/officeDocument/2006/math" xmlns="" xmlns:lc="http://schemas.openxmlformats.org/drawingml/2006/lockedCanvas" val="1"/>
+              <ma14:wrappingTextBoxFlag xmlns:lc="http://schemas.openxmlformats.org/drawingml/2006/lockedCanvas" xmlns="" xmlns:m="http://schemas.openxmlformats.org/officeDocument/2006/math" xmlns:a14="http://schemas.microsoft.com/office/drawing/2010/main" xmlns:ma14="http://schemas.microsoft.com/office/mac/drawingml/2011/main" val="1"/>
             </a:ext>
           </a:extLst>
         </p:spPr>
@@ -31872,7 +31876,7 @@
           </a:ln>
           <a:extLst>
             <a:ext uri="{C572A759-6A51-4108-AA02-DFA0A04FC94B}">
-              <ma14:wrappingTextBoxFlag xmlns:ma14="http://schemas.microsoft.com/office/mac/drawingml/2011/main" xmlns:a14="http://schemas.microsoft.com/office/drawing/2010/main" xmlns:m="http://schemas.openxmlformats.org/officeDocument/2006/math" xmlns="" xmlns:lc="http://schemas.openxmlformats.org/drawingml/2006/lockedCanvas" val="1"/>
+              <ma14:wrappingTextBoxFlag xmlns:lc="http://schemas.openxmlformats.org/drawingml/2006/lockedCanvas" xmlns="" xmlns:m="http://schemas.openxmlformats.org/officeDocument/2006/math" xmlns:a14="http://schemas.microsoft.com/office/drawing/2010/main" xmlns:ma14="http://schemas.microsoft.com/office/mac/drawingml/2011/main" val="1"/>
             </a:ext>
           </a:extLst>
         </p:spPr>
@@ -32913,7 +32917,7 @@
           </a:ln>
           <a:extLst>
             <a:ext uri="{C572A759-6A51-4108-AA02-DFA0A04FC94B}">
-              <ma14:wrappingTextBoxFlag xmlns:ma14="http://schemas.microsoft.com/office/mac/drawingml/2011/main" xmlns:a14="http://schemas.microsoft.com/office/drawing/2010/main" xmlns:m="http://schemas.openxmlformats.org/officeDocument/2006/math" xmlns="" xmlns:lc="http://schemas.openxmlformats.org/drawingml/2006/lockedCanvas" val="1"/>
+              <ma14:wrappingTextBoxFlag xmlns:lc="http://schemas.openxmlformats.org/drawingml/2006/lockedCanvas" xmlns="" xmlns:m="http://schemas.openxmlformats.org/officeDocument/2006/math" xmlns:a14="http://schemas.microsoft.com/office/drawing/2010/main" xmlns:ma14="http://schemas.microsoft.com/office/mac/drawingml/2011/main" val="1"/>
             </a:ext>
           </a:extLst>
         </p:spPr>
@@ -33270,7 +33274,7 @@
           </a:ln>
           <a:extLst>
             <a:ext uri="{C572A759-6A51-4108-AA02-DFA0A04FC94B}">
-              <ma14:wrappingTextBoxFlag xmlns:ma14="http://schemas.microsoft.com/office/mac/drawingml/2011/main" xmlns:a14="http://schemas.microsoft.com/office/drawing/2010/main" xmlns:m="http://schemas.openxmlformats.org/officeDocument/2006/math" xmlns="" xmlns:lc="http://schemas.openxmlformats.org/drawingml/2006/lockedCanvas" val="1"/>
+              <ma14:wrappingTextBoxFlag xmlns:lc="http://schemas.openxmlformats.org/drawingml/2006/lockedCanvas" xmlns="" xmlns:m="http://schemas.openxmlformats.org/officeDocument/2006/math" xmlns:a14="http://schemas.microsoft.com/office/drawing/2010/main" xmlns:ma14="http://schemas.microsoft.com/office/mac/drawingml/2011/main" val="1"/>
             </a:ext>
           </a:extLst>
         </p:spPr>
@@ -33824,7 +33828,7 @@
               <a:effectLst/>
               <a:extLst>
                 <a:ext uri="{C572A759-6A51-4108-AA02-DFA0A04FC94B}">
-                  <ma14:wrappingTextBoxFlag xmlns:ma14="http://schemas.microsoft.com/office/mac/drawingml/2011/main" xmlns="" val="1"/>
+                  <ma14:wrappingTextBoxFlag xmlns="" xmlns:ma14="http://schemas.microsoft.com/office/mac/drawingml/2011/main" val="1"/>
                 </a:ext>
               </a:extLst>
             </p:spPr>
@@ -33875,7 +33879,7 @@
             <a:effectLst/>
             <a:extLst>
               <a:ext uri="{C572A759-6A51-4108-AA02-DFA0A04FC94B}">
-                <ma14:wrappingTextBoxFlag xmlns:ma14="http://schemas.microsoft.com/office/mac/drawingml/2011/main" xmlns="" val="1"/>
+                <ma14:wrappingTextBoxFlag xmlns="" xmlns:ma14="http://schemas.microsoft.com/office/mac/drawingml/2011/main" val="1"/>
               </a:ext>
             </a:extLst>
           </p:spPr>
@@ -34098,7 +34102,7 @@
               <a:effectLst/>
               <a:extLst>
                 <a:ext uri="{C572A759-6A51-4108-AA02-DFA0A04FC94B}">
-                  <ma14:wrappingTextBoxFlag xmlns:ma14="http://schemas.microsoft.com/office/mac/drawingml/2011/main" xmlns="" val="1"/>
+                  <ma14:wrappingTextBoxFlag xmlns="" xmlns:ma14="http://schemas.microsoft.com/office/mac/drawingml/2011/main" val="1"/>
                 </a:ext>
               </a:extLst>
             </p:spPr>
@@ -34149,7 +34153,7 @@
             <a:effectLst/>
             <a:extLst>
               <a:ext uri="{C572A759-6A51-4108-AA02-DFA0A04FC94B}">
-                <ma14:wrappingTextBoxFlag xmlns:ma14="http://schemas.microsoft.com/office/mac/drawingml/2011/main" xmlns="" val="1"/>
+                <ma14:wrappingTextBoxFlag xmlns="" xmlns:ma14="http://schemas.microsoft.com/office/mac/drawingml/2011/main" val="1"/>
               </a:ext>
             </a:extLst>
           </p:spPr>
@@ -34327,7 +34331,7 @@
               <a:effectLst/>
               <a:extLst>
                 <a:ext uri="{C572A759-6A51-4108-AA02-DFA0A04FC94B}">
-                  <ma14:wrappingTextBoxFlag xmlns:ma14="http://schemas.microsoft.com/office/mac/drawingml/2011/main" xmlns="" val="1"/>
+                  <ma14:wrappingTextBoxFlag xmlns="" xmlns:ma14="http://schemas.microsoft.com/office/mac/drawingml/2011/main" val="1"/>
                 </a:ext>
               </a:extLst>
             </p:spPr>
@@ -34378,7 +34382,7 @@
             <a:effectLst/>
             <a:extLst>
               <a:ext uri="{C572A759-6A51-4108-AA02-DFA0A04FC94B}">
-                <ma14:wrappingTextBoxFlag xmlns:ma14="http://schemas.microsoft.com/office/mac/drawingml/2011/main" xmlns="" val="1"/>
+                <ma14:wrappingTextBoxFlag xmlns="" xmlns:ma14="http://schemas.microsoft.com/office/mac/drawingml/2011/main" val="1"/>
               </a:ext>
             </a:extLst>
           </p:spPr>
@@ -34657,7 +34661,7 @@
               <a:effectLst/>
               <a:extLst>
                 <a:ext uri="{C572A759-6A51-4108-AA02-DFA0A04FC94B}">
-                  <ma14:wrappingTextBoxFlag xmlns:ma14="http://schemas.microsoft.com/office/mac/drawingml/2011/main" xmlns="" val="1"/>
+                  <ma14:wrappingTextBoxFlag xmlns="" xmlns:ma14="http://schemas.microsoft.com/office/mac/drawingml/2011/main" val="1"/>
                 </a:ext>
               </a:extLst>
             </p:spPr>
@@ -34708,7 +34712,7 @@
             <a:effectLst/>
             <a:extLst>
               <a:ext uri="{C572A759-6A51-4108-AA02-DFA0A04FC94B}">
-                <ma14:wrappingTextBoxFlag xmlns:ma14="http://schemas.microsoft.com/office/mac/drawingml/2011/main" xmlns="" val="1"/>
+                <ma14:wrappingTextBoxFlag xmlns="" xmlns:ma14="http://schemas.microsoft.com/office/mac/drawingml/2011/main" val="1"/>
               </a:ext>
             </a:extLst>
           </p:spPr>
@@ -34926,7 +34930,7 @@
               <a:effectLst/>
               <a:extLst>
                 <a:ext uri="{C572A759-6A51-4108-AA02-DFA0A04FC94B}">
-                  <ma14:wrappingTextBoxFlag xmlns:ma14="http://schemas.microsoft.com/office/mac/drawingml/2011/main" xmlns="" val="1"/>
+                  <ma14:wrappingTextBoxFlag xmlns="" xmlns:ma14="http://schemas.microsoft.com/office/mac/drawingml/2011/main" val="1"/>
                 </a:ext>
               </a:extLst>
             </p:spPr>
@@ -34980,7 +34984,7 @@
             <a:effectLst/>
             <a:extLst>
               <a:ext uri="{C572A759-6A51-4108-AA02-DFA0A04FC94B}">
-                <ma14:wrappingTextBoxFlag xmlns:ma14="http://schemas.microsoft.com/office/mac/drawingml/2011/main" xmlns="" val="1"/>
+                <ma14:wrappingTextBoxFlag xmlns="" xmlns:ma14="http://schemas.microsoft.com/office/mac/drawingml/2011/main" val="1"/>
               </a:ext>
             </a:extLst>
           </p:spPr>
@@ -35185,7 +35189,7 @@
               <a:effectLst/>
               <a:extLst>
                 <a:ext uri="{C572A759-6A51-4108-AA02-DFA0A04FC94B}">
-                  <ma14:wrappingTextBoxFlag xmlns:ma14="http://schemas.microsoft.com/office/mac/drawingml/2011/main" xmlns="" val="1"/>
+                  <ma14:wrappingTextBoxFlag xmlns="" xmlns:ma14="http://schemas.microsoft.com/office/mac/drawingml/2011/main" val="1"/>
                 </a:ext>
               </a:extLst>
             </p:spPr>
@@ -35239,7 +35243,7 @@
             <a:effectLst/>
             <a:extLst>
               <a:ext uri="{C572A759-6A51-4108-AA02-DFA0A04FC94B}">
-                <ma14:wrappingTextBoxFlag xmlns:ma14="http://schemas.microsoft.com/office/mac/drawingml/2011/main" xmlns="" val="1"/>
+                <ma14:wrappingTextBoxFlag xmlns="" xmlns:ma14="http://schemas.microsoft.com/office/mac/drawingml/2011/main" val="1"/>
               </a:ext>
             </a:extLst>
           </p:spPr>
@@ -35481,7 +35485,7 @@
               <a:effectLst/>
               <a:extLst>
                 <a:ext uri="{C572A759-6A51-4108-AA02-DFA0A04FC94B}">
-                  <ma14:wrappingTextBoxFlag xmlns:ma14="http://schemas.microsoft.com/office/mac/drawingml/2011/main" xmlns="" val="1"/>
+                  <ma14:wrappingTextBoxFlag xmlns="" xmlns:ma14="http://schemas.microsoft.com/office/mac/drawingml/2011/main" val="1"/>
                 </a:ext>
               </a:extLst>
             </p:spPr>
@@ -35539,7 +35543,7 @@
             <a:effectLst/>
             <a:extLst>
               <a:ext uri="{C572A759-6A51-4108-AA02-DFA0A04FC94B}">
-                <ma14:wrappingTextBoxFlag xmlns:ma14="http://schemas.microsoft.com/office/mac/drawingml/2011/main" xmlns="" val="1"/>
+                <ma14:wrappingTextBoxFlag xmlns="" xmlns:ma14="http://schemas.microsoft.com/office/mac/drawingml/2011/main" val="1"/>
               </a:ext>
             </a:extLst>
           </p:spPr>
